--- a/draft/YAPPERS_BI10_R01.pptx
+++ b/draft/YAPPERS_BI10_R01.pptx
@@ -23,9 +23,13 @@
     <p:sldId id="271" r:id="rId17"/>
     <p:sldId id="272" r:id="rId18"/>
     <p:sldId id="273" r:id="rId19"/>
+    <p:sldId id="274" r:id="rId20"/>
+    <p:sldId id="275" r:id="rId21"/>
+    <p:sldId id="276" r:id="rId22"/>
+    <p:sldId id="277" r:id="rId23"/>
   </p:sldIdLst>
   <p:notesMasterIdLst>
-    <p:notesMasterId r:id="rId20"/>
+    <p:notesMasterId r:id="rId24"/>
   </p:notesMasterIdLst>
   <p:sldSz cx="12192000" cy="6858000"/>
   <p:notesSz cx="6858000" cy="12192000"/>
@@ -607,7 +611,7 @@
           <a:p>
             <a:r>
               <a:rPr lang="en-US" dirty="0"/>
-              <a:t>More than half of every stress episode happens to someone we can text right now.</a:t>
+              <a:t>Two ratios are the whole game — the quintile chart makes r = −0.90 tangible.</a:t>
             </a:r>
             <a:endParaRPr lang="en-US" dirty="0"/>
           </a:p>
@@ -695,7 +699,7 @@
           <a:p>
             <a:r>
               <a:rPr lang="en-US" dirty="0"/>
-              <a:t>Don't segment on the engagement score — it's a ceiling. Segment on behaviours underneath.</a:t>
+              <a:t>More than half of every stress episode happens to someone we can reach in-app — and we now know when.</a:t>
             </a:r>
             <a:endParaRPr lang="en-US" dirty="0"/>
           </a:p>
@@ -783,7 +787,7 @@
           <a:p>
             <a:r>
               <a:rPr lang="en-US" dirty="0"/>
-              <a:t>Build the early-warning flag on category diversity.</a:t>
+              <a:t>Deliverable 3 — the honest answer: the one demographic gap is really a spending gap.</a:t>
             </a:r>
             <a:endParaRPr lang="en-US" dirty="0"/>
           </a:p>
@@ -871,7 +875,7 @@
           <a:p>
             <a:r>
               <a:rPr lang="en-US" dirty="0"/>
-              <a:t>Two low-engagement tails, opposite remedies — don't merge them.</a:t>
+              <a:t>Bar, not pie: a pie would hide the 1% tail. Segment on the behaviours underneath, not the score.</a:t>
             </a:r>
             <a:endParaRPr lang="en-US" dirty="0"/>
           </a:p>
@@ -959,7 +963,7 @@
           <a:p>
             <a:r>
               <a:rPr lang="en-US" dirty="0"/>
-              <a:t>Moderate silhouette is expected for a behavioural continuum; the 2×2 validates the poles.</a:t>
+              <a:t>Scatter for two continuous variables; heatmap for the recency × frequency interaction.</a:t>
             </a:r>
             <a:endParaRPr lang="en-US" dirty="0"/>
           </a:p>
@@ -1047,7 +1051,7 @@
           <a:p>
             <a:r>
               <a:rPr lang="en-US" dirty="0"/>
-              <a:t>Segment 2 turns Task 1's 25–34 vulnerability into an addressable 302-person group.</a:t>
+              <a:t>The sensitivity table is the answer to 'why this cutoff and not tighter or looser'.</a:t>
             </a:r>
             <a:endParaRPr lang="en-US" dirty="0"/>
           </a:p>
@@ -1135,7 +1139,7 @@
           <a:p>
             <a:r>
               <a:rPr lang="en-US" dirty="0"/>
-              <a:t>One tool per required type, each bound to an exact size and a real ratio.</a:t>
+              <a:t>Moderate silhouette is expected for a behavioural continuum; the next slides validate it.</a:t>
             </a:r>
             <a:endParaRPr lang="en-US" dirty="0"/>
           </a:p>
@@ -1223,7 +1227,7 @@
           <a:p>
             <a:r>
               <a:rPr lang="en-US" dirty="0"/>
-              <a:t>The rule is the deck's contract — a low score triggers help offered, never access removed.</a:t>
+              <a:t>Segment 2 is the addressable wellbeing priority.</a:t>
             </a:r>
             <a:endParaRPr lang="en-US" dirty="0"/>
           </a:p>
@@ -1311,7 +1315,7 @@
           <a:p>
             <a:r>
               <a:rPr lang="en-US" dirty="0"/>
-              <a:t>Close on the contract.</a:t>
+              <a:t>Stable enough to act on; the Nov→Dec slide is the timing evidence for planning reminders.</a:t>
             </a:r>
             <a:endParaRPr lang="en-US" dirty="0"/>
           </a:p>
@@ -1335,6 +1339,94 @@
             <a:fld id="{F7021451-1387-4CA6-816F-3879F97B5CBC}" type="slidenum">
               <a:rPr lang="en-US"/>
               <a:t>18</a:t>
+            </a:fld>
+            <a:endParaRPr lang="en-US"/>
+          </a:p>
+        </p:txBody>
+      </p:sp>
+    </p:spTree>
+    <p:extLst>
+      <p:ext uri="{BB962C8B-B14F-4D97-AF65-F5344CB8AC3E}">
+        <p14:creationId xmlns:p14="http://schemas.microsoft.com/office/powerpoint/2010/main" val="1024086991"/>
+      </p:ext>
+    </p:extLst>
+  </p:cSld>
+  <p:clrMapOvr>
+    <a:masterClrMapping/>
+  </p:clrMapOvr>
+</p:notes>
+</file>
+
+<file path=ppt/notesSlides/notesSlide19.xml><?xml version="1.0" encoding="utf-8"?>
+<p:notes xmlns:a="http://schemas.openxmlformats.org/drawingml/2006/main" xmlns:r="http://schemas.openxmlformats.org/officeDocument/2006/relationships" xmlns:p="http://schemas.openxmlformats.org/presentationml/2006/main">
+  <p:cSld>
+    <p:spTree>
+      <p:nvGrpSpPr>
+        <p:cNvPr id="1" name=""/>
+        <p:cNvGrpSpPr/>
+        <p:nvPr/>
+      </p:nvGrpSpPr>
+      <p:grpSpPr>
+        <a:xfrm>
+          <a:off x="0" y="0"/>
+          <a:ext cx="0" cy="0"/>
+          <a:chOff x="0" y="0"/>
+          <a:chExt cx="0" cy="0"/>
+        </a:xfrm>
+      </p:grpSpPr>
+      <p:sp>
+        <p:nvSpPr>
+          <p:cNvPr id="2" name="Slide Image Placeholder 1"/>
+          <p:cNvSpPr>
+            <a:spLocks noGrp="1" noRot="1" noChangeAspect="1"/>
+          </p:cNvSpPr>
+          <p:nvPr>
+            <p:ph type="sldImg"/>
+          </p:nvPr>
+        </p:nvSpPr>
+        <p:spPr/>
+      </p:sp>
+      <p:sp>
+        <p:nvSpPr>
+          <p:cNvPr id="3" name="Notes Placeholder 2"/>
+          <p:cNvSpPr>
+            <a:spLocks noGrp="1"/>
+          </p:cNvSpPr>
+          <p:nvPr>
+            <p:ph type="body" idx="1"/>
+          </p:nvPr>
+        </p:nvSpPr>
+        <p:spPr/>
+        <p:txBody>
+          <a:bodyPr/>
+          <a:lstStyle/>
+          <a:p>
+            <a:r>
+              <a:rPr lang="en-US" dirty="0"/>
+              <a:t>One tool per required type, each bound to an exact size, a real ratio and now a timing.</a:t>
+            </a:r>
+            <a:endParaRPr lang="en-US" dirty="0"/>
+          </a:p>
+        </p:txBody>
+      </p:sp>
+      <p:sp>
+        <p:nvSpPr>
+          <p:cNvPr id="4" name="Slide Number Placeholder 3"/>
+          <p:cNvSpPr>
+            <a:spLocks noGrp="1"/>
+          </p:cNvSpPr>
+          <p:nvPr>
+            <p:ph type="sldNum" sz="quarter" idx="10"/>
+          </p:nvPr>
+        </p:nvSpPr>
+        <p:spPr/>
+        <p:txBody>
+          <a:bodyPr/>
+          <a:lstStyle/>
+          <a:p>
+            <a:fld id="{F7021451-1387-4CA6-816F-3879F97B5CBC}" type="slidenum">
+              <a:rPr lang="en-US"/>
+              <a:t>19</a:t>
             </a:fld>
             <a:endParaRPr lang="en-US"/>
           </a:p>
@@ -1441,6 +1533,270 @@
 </p:notes>
 </file>
 
+<file path=ppt/notesSlides/notesSlide20.xml><?xml version="1.0" encoding="utf-8"?>
+<p:notes xmlns:a="http://schemas.openxmlformats.org/drawingml/2006/main" xmlns:r="http://schemas.openxmlformats.org/officeDocument/2006/relationships" xmlns:p="http://schemas.openxmlformats.org/presentationml/2006/main">
+  <p:cSld>
+    <p:spTree>
+      <p:nvGrpSpPr>
+        <p:cNvPr id="1" name=""/>
+        <p:cNvGrpSpPr/>
+        <p:nvPr/>
+      </p:nvGrpSpPr>
+      <p:grpSpPr>
+        <a:xfrm>
+          <a:off x="0" y="0"/>
+          <a:ext cx="0" cy="0"/>
+          <a:chOff x="0" y="0"/>
+          <a:chExt cx="0" cy="0"/>
+        </a:xfrm>
+      </p:grpSpPr>
+      <p:sp>
+        <p:nvSpPr>
+          <p:cNvPr id="2" name="Slide Image Placeholder 1"/>
+          <p:cNvSpPr>
+            <a:spLocks noGrp="1" noRot="1" noChangeAspect="1"/>
+          </p:cNvSpPr>
+          <p:nvPr>
+            <p:ph type="sldImg"/>
+          </p:nvPr>
+        </p:nvSpPr>
+        <p:spPr/>
+      </p:sp>
+      <p:sp>
+        <p:nvSpPr>
+          <p:cNvPr id="3" name="Notes Placeholder 2"/>
+          <p:cNvSpPr>
+            <a:spLocks noGrp="1"/>
+          </p:cNvSpPr>
+          <p:nvPr>
+            <p:ph type="body" idx="1"/>
+          </p:nvPr>
+        </p:nvSpPr>
+        <p:spPr/>
+        <p:txBody>
+          <a:bodyPr/>
+          <a:lstStyle/>
+          <a:p>
+            <a:r>
+              <a:rPr lang="en-US" dirty="0"/>
+              <a:t>The rule is the deck's contract — a low score triggers help offered, never access removed.</a:t>
+            </a:r>
+            <a:endParaRPr lang="en-US" dirty="0"/>
+          </a:p>
+        </p:txBody>
+      </p:sp>
+      <p:sp>
+        <p:nvSpPr>
+          <p:cNvPr id="4" name="Slide Number Placeholder 3"/>
+          <p:cNvSpPr>
+            <a:spLocks noGrp="1"/>
+          </p:cNvSpPr>
+          <p:nvPr>
+            <p:ph type="sldNum" sz="quarter" idx="10"/>
+          </p:nvPr>
+        </p:nvSpPr>
+        <p:spPr/>
+        <p:txBody>
+          <a:bodyPr/>
+          <a:lstStyle/>
+          <a:p>
+            <a:fld id="{F7021451-1387-4CA6-816F-3879F97B5CBC}" type="slidenum">
+              <a:rPr lang="en-US"/>
+              <a:t>20</a:t>
+            </a:fld>
+            <a:endParaRPr lang="en-US"/>
+          </a:p>
+        </p:txBody>
+      </p:sp>
+    </p:spTree>
+    <p:extLst>
+      <p:ext uri="{BB962C8B-B14F-4D97-AF65-F5344CB8AC3E}">
+        <p14:creationId xmlns:p14="http://schemas.microsoft.com/office/powerpoint/2010/main" val="1024086991"/>
+      </p:ext>
+    </p:extLst>
+  </p:cSld>
+  <p:clrMapOvr>
+    <a:masterClrMapping/>
+  </p:clrMapOvr>
+</p:notes>
+</file>
+
+<file path=ppt/notesSlides/notesSlide21.xml><?xml version="1.0" encoding="utf-8"?>
+<p:notes xmlns:a="http://schemas.openxmlformats.org/drawingml/2006/main" xmlns:r="http://schemas.openxmlformats.org/officeDocument/2006/relationships" xmlns:p="http://schemas.openxmlformats.org/presentationml/2006/main">
+  <p:cSld>
+    <p:spTree>
+      <p:nvGrpSpPr>
+        <p:cNvPr id="1" name=""/>
+        <p:cNvGrpSpPr/>
+        <p:nvPr/>
+      </p:nvGrpSpPr>
+      <p:grpSpPr>
+        <a:xfrm>
+          <a:off x="0" y="0"/>
+          <a:ext cx="0" cy="0"/>
+          <a:chOff x="0" y="0"/>
+          <a:chExt cx="0" cy="0"/>
+        </a:xfrm>
+      </p:grpSpPr>
+      <p:sp>
+        <p:nvSpPr>
+          <p:cNvPr id="2" name="Slide Image Placeholder 1"/>
+          <p:cNvSpPr>
+            <a:spLocks noGrp="1" noRot="1" noChangeAspect="1"/>
+          </p:cNvSpPr>
+          <p:nvPr>
+            <p:ph type="sldImg"/>
+          </p:nvPr>
+        </p:nvSpPr>
+        <p:spPr/>
+      </p:sp>
+      <p:sp>
+        <p:nvSpPr>
+          <p:cNvPr id="3" name="Notes Placeholder 2"/>
+          <p:cNvSpPr>
+            <a:spLocks noGrp="1"/>
+          </p:cNvSpPr>
+          <p:nvPr>
+            <p:ph type="body" idx="1"/>
+          </p:nvPr>
+        </p:nvSpPr>
+        <p:spPr/>
+        <p:txBody>
+          <a:bodyPr/>
+          <a:lstStyle/>
+          <a:p>
+            <a:r>
+              <a:rPr lang="en-US" dirty="0"/>
+              <a:t>Impact is a hypothesis we will measure, not a promise.</a:t>
+            </a:r>
+            <a:endParaRPr lang="en-US" dirty="0"/>
+          </a:p>
+        </p:txBody>
+      </p:sp>
+      <p:sp>
+        <p:nvSpPr>
+          <p:cNvPr id="4" name="Slide Number Placeholder 3"/>
+          <p:cNvSpPr>
+            <a:spLocks noGrp="1"/>
+          </p:cNvSpPr>
+          <p:nvPr>
+            <p:ph type="sldNum" sz="quarter" idx="10"/>
+          </p:nvPr>
+        </p:nvSpPr>
+        <p:spPr/>
+        <p:txBody>
+          <a:bodyPr/>
+          <a:lstStyle/>
+          <a:p>
+            <a:fld id="{F7021451-1387-4CA6-816F-3879F97B5CBC}" type="slidenum">
+              <a:rPr lang="en-US"/>
+              <a:t>21</a:t>
+            </a:fld>
+            <a:endParaRPr lang="en-US"/>
+          </a:p>
+        </p:txBody>
+      </p:sp>
+    </p:spTree>
+    <p:extLst>
+      <p:ext uri="{BB962C8B-B14F-4D97-AF65-F5344CB8AC3E}">
+        <p14:creationId xmlns:p14="http://schemas.microsoft.com/office/powerpoint/2010/main" val="1024086991"/>
+      </p:ext>
+    </p:extLst>
+  </p:cSld>
+  <p:clrMapOvr>
+    <a:masterClrMapping/>
+  </p:clrMapOvr>
+</p:notes>
+</file>
+
+<file path=ppt/notesSlides/notesSlide22.xml><?xml version="1.0" encoding="utf-8"?>
+<p:notes xmlns:a="http://schemas.openxmlformats.org/drawingml/2006/main" xmlns:r="http://schemas.openxmlformats.org/officeDocument/2006/relationships" xmlns:p="http://schemas.openxmlformats.org/presentationml/2006/main">
+  <p:cSld>
+    <p:spTree>
+      <p:nvGrpSpPr>
+        <p:cNvPr id="1" name=""/>
+        <p:cNvGrpSpPr/>
+        <p:nvPr/>
+      </p:nvGrpSpPr>
+      <p:grpSpPr>
+        <a:xfrm>
+          <a:off x="0" y="0"/>
+          <a:ext cx="0" cy="0"/>
+          <a:chOff x="0" y="0"/>
+          <a:chExt cx="0" cy="0"/>
+        </a:xfrm>
+      </p:grpSpPr>
+      <p:sp>
+        <p:nvSpPr>
+          <p:cNvPr id="2" name="Slide Image Placeholder 1"/>
+          <p:cNvSpPr>
+            <a:spLocks noGrp="1" noRot="1" noChangeAspect="1"/>
+          </p:cNvSpPr>
+          <p:nvPr>
+            <p:ph type="sldImg"/>
+          </p:nvPr>
+        </p:nvSpPr>
+        <p:spPr/>
+      </p:sp>
+      <p:sp>
+        <p:nvSpPr>
+          <p:cNvPr id="3" name="Notes Placeholder 2"/>
+          <p:cNvSpPr>
+            <a:spLocks noGrp="1"/>
+          </p:cNvSpPr>
+          <p:nvPr>
+            <p:ph type="body" idx="1"/>
+          </p:nvPr>
+        </p:nvSpPr>
+        <p:spPr/>
+        <p:txBody>
+          <a:bodyPr/>
+          <a:lstStyle/>
+          <a:p>
+            <a:r>
+              <a:rPr lang="en-US" dirty="0"/>
+              <a:t>Close on the contract.</a:t>
+            </a:r>
+            <a:endParaRPr lang="en-US" dirty="0"/>
+          </a:p>
+        </p:txBody>
+      </p:sp>
+      <p:sp>
+        <p:nvSpPr>
+          <p:cNvPr id="4" name="Slide Number Placeholder 3"/>
+          <p:cNvSpPr>
+            <a:spLocks noGrp="1"/>
+          </p:cNvSpPr>
+          <p:nvPr>
+            <p:ph type="sldNum" sz="quarter" idx="10"/>
+          </p:nvPr>
+        </p:nvSpPr>
+        <p:spPr/>
+        <p:txBody>
+          <a:bodyPr/>
+          <a:lstStyle/>
+          <a:p>
+            <a:fld id="{F7021451-1387-4CA6-816F-3879F97B5CBC}" type="slidenum">
+              <a:rPr lang="en-US"/>
+              <a:t>22</a:t>
+            </a:fld>
+            <a:endParaRPr lang="en-US"/>
+          </a:p>
+        </p:txBody>
+      </p:sp>
+    </p:spTree>
+    <p:extLst>
+      <p:ext uri="{BB962C8B-B14F-4D97-AF65-F5344CB8AC3E}">
+        <p14:creationId xmlns:p14="http://schemas.microsoft.com/office/powerpoint/2010/main" val="1024086991"/>
+      </p:ext>
+    </p:extLst>
+  </p:cSld>
+  <p:clrMapOvr>
+    <a:masterClrMapping/>
+  </p:clrMapOvr>
+</p:notes>
+</file>
+
 <file path=ppt/notesSlides/notesSlide3.xml><?xml version="1.0" encoding="utf-8"?>
 <p:notes xmlns:a="http://schemas.openxmlformats.org/drawingml/2006/main" xmlns:r="http://schemas.openxmlformats.org/officeDocument/2006/relationships" xmlns:p="http://schemas.openxmlformats.org/presentationml/2006/main">
   <p:cSld>
@@ -1663,7 +2019,7 @@
           <a:p>
             <a:r>
               <a:rPr lang="en-US" dirty="0"/>
-              <a:t>Peaks are a frequency phenomenon — the lever is trip frequency, not upsell.</a:t>
+              <a:t>Peaks are a frequency phenomenon across every category — the lever is trip frequency, not upsell.</a:t>
             </a:r>
             <a:endParaRPr lang="en-US" dirty="0"/>
           </a:p>
@@ -1751,7 +2107,7 @@
           <a:p>
             <a:r>
               <a:rPr lang="en-US" dirty="0"/>
-              <a:t>This is THE slide — every later decision traces back to this inversion.</a:t>
+              <a:t>THE slide — the gradient proves the inversion is real, not an artefact of the 40/80 cutoffs.</a:t>
             </a:r>
             <a:endParaRPr lang="en-US" dirty="0"/>
           </a:p>
@@ -1839,7 +2195,7 @@
           <a:p>
             <a:r>
               <a:rPr lang="en-US" dirty="0"/>
-              <a:t>Two honest negatives (geography, age) + one behavioural positive.</a:t>
+              <a:t>One honest negative (age) and one habit insight (fuel/groceries are near-universal).</a:t>
             </a:r>
             <a:endParaRPr lang="en-US" dirty="0"/>
           </a:p>
@@ -1927,7 +2283,7 @@
           <a:p>
             <a:r>
               <a:rPr lang="en-US" dirty="0"/>
-              <a:t>Nobody is chronically unhealthy — trigger on the month, not the person.</a:t>
+              <a:t>Q3 asked for the channel breakdown — it answers itself: every hub has the national mix.</a:t>
             </a:r>
             <a:endParaRPr lang="en-US" dirty="0"/>
           </a:p>
@@ -2015,7 +2371,7 @@
           <a:p>
             <a:r>
               <a:rPr lang="en-US" dirty="0"/>
-              <a:t>Two ratios are the whole game — and the stressed are active, not disengaged.</a:t>
+              <a:t>Nobody is chronically unhealthy — trigger on the month, not the person.</a:t>
             </a:r>
             <a:endParaRPr lang="en-US" dirty="0"/>
           </a:p>
@@ -2688,7 +3044,7 @@
                 <a:ea typeface="Cambria" pitchFamily="34" charset="-122"/>
                 <a:cs typeface="Cambria" pitchFamily="34" charset="-120"/>
               </a:rPr>
-              <a:t>The "Stressed but Engaged" crossover</a:t>
+              <a:t>Low health is an overspend story</a:t>
             </a:r>
             <a:endParaRPr lang="en-US" sz="2700" dirty="0"/>
           </a:p>
@@ -2702,8 +3058,8 @@
         </p:nvSpPr>
         <p:spPr>
           <a:xfrm>
-            <a:off x="457200" y="1600200"/>
-            <a:ext cx="5760720" cy="3200400"/>
+            <a:off x="457200" y="1463040"/>
+            <a:ext cx="11247120" cy="1508760"/>
           </a:xfrm>
           <a:prstGeom prst="rect">
             <a:avLst/>
@@ -2731,7 +3087,7 @@
                 <a:ea typeface="Calibri" pitchFamily="34" charset="-122"/>
                 <a:cs typeface="Calibri" pitchFamily="34" charset="-120"/>
               </a:rPr>
-              <a:t>Reproducible rule (month grain): FHS &lt; 40 AND engagement ≥ p75 (81.4).</a:t>
+              <a:t>Top correlates: spend-to-income −0.90, credit-utilization −0.86, volatility −0.50. Stressed vs healthy months: spend/income 2.10 vs 0.29.</a:t>
             </a:r>
             <a:endParaRPr lang="en-US" sz="1400" dirty="0"/>
           </a:p>
@@ -2752,7 +3108,7 @@
                 <a:ea typeface="Calibri" pitchFamily="34" charset="-122"/>
                 <a:cs typeface="Calibri" pitchFamily="34" charset="-120"/>
               </a:rPr>
-              <a:t>43 consumers / 49 months = 52% of ALL stress episodes.</a:t>
+              <a:t>Step by step: mean FHS falls 72.4 → 68.4 → 66.0 → 63.8 → 60.9 across spend-to-income quintiles (−11.4 pts, ~10× the age spread).</a:t>
             </a:r>
             <a:endParaRPr lang="en-US" sz="1400" dirty="0"/>
           </a:p>
@@ -2773,28 +3129,7 @@
                 <a:ea typeface="Calibri" pitchFamily="34" charset="-122"/>
                 <a:cs typeface="Calibri" pitchFamily="34" charset="-120"/>
               </a:rPr>
-              <a:t>Profile: spend/income 1.89, credit-util 0.55, online 0.49 (2× national).</a:t>
-            </a:r>
-            <a:endParaRPr lang="en-US" sz="1400" dirty="0"/>
-          </a:p>
-          <a:p>
-            <a:pPr marL="177800" indent="-177800">
-              <a:spcAft>
-                <a:spcPts val="800"/>
-              </a:spcAft>
-              <a:buSzPct val="100000"/>
-              <a:buChar char="•"/>
-            </a:pPr>
-            <a:r>
-              <a:rPr lang="en-US" sz="1400" dirty="0">
-                <a:solidFill>
-                  <a:srgbClr val="1B2A36"/>
-                </a:solidFill>
-                <a:latin typeface="Calibri" pitchFamily="34" charset="0"/>
-                <a:ea typeface="Calibri" pitchFamily="34" charset="-122"/>
-                <a:cs typeface="Calibri" pitchFamily="34" charset="-120"/>
-              </a:rPr>
-              <a:t>Active, digital, over-extended — reachable at near-zero cost via in-app alerts.</a:t>
+              <a:t>Counter-intuitive: stressed months are MORE engaged (81.1 vs 72.7). FHS and ratios share spend fields — directional, not causal.</a:t>
             </a:r>
             <a:endParaRPr lang="en-US" sz="1400" dirty="0"/>
           </a:p>
@@ -2802,7 +3137,7 @@
       </p:sp>
       <p:pic>
         <p:nvPicPr>
-          <p:cNvPr id="5" name="Image 0" descr="D:\BI10GroupYAPPERS\outputs\figures\t2_crossover.png">    </p:cNvPr>
+          <p:cNvPr id="5" name="Image 0" descr="D:\BI10GroupYAPPERS\outputs\figures\t2_low_health_drivers.png">    </p:cNvPr>
           <p:cNvPicPr>
             <a:picLocks noChangeAspect="1"/>
           </p:cNvPicPr>
@@ -2815,156 +3150,40 @@
         </p:blipFill>
         <p:spPr>
           <a:xfrm>
-            <a:off x="6446520" y="1554480"/>
-            <a:ext cx="5303520" cy="4206240"/>
+            <a:off x="502920" y="3063240"/>
+            <a:ext cx="5440680" cy="3200400"/>
           </a:xfrm>
           <a:prstGeom prst="rect">
             <a:avLst/>
           </a:prstGeom>
         </p:spPr>
       </p:pic>
-      <p:sp>
-        <p:nvSpPr>
-          <p:cNvPr id="6" name="Text 3"/>
-          <p:cNvSpPr txBox="1"/>
-          <p:nvPr/>
-        </p:nvSpPr>
-        <p:spPr>
-          <a:xfrm>
-            <a:off x="6446520" y="5852160"/>
-            <a:ext cx="5303520" cy="548640"/>
-          </a:xfrm>
-          <a:prstGeom prst="rect">
-            <a:avLst/>
-          </a:prstGeom>
-          <a:noFill/>
-          <a:ln/>
-        </p:spPr>
-        <p:txBody>
-          <a:bodyPr wrap="square" lIns="0" tIns="0" rIns="0" bIns="0" rtlCol="0" anchor="t"/>
-          <a:lstStyle/>
-          <a:p>
-            <a:pPr indent="0" marL="0">
-              <a:buNone/>
-            </a:pPr>
-            <a:r>
-              <a:rPr lang="en-US" sz="1000" i="1" dirty="0">
-                <a:solidFill>
-                  <a:srgbClr val="5F7180"/>
-                </a:solidFill>
-                <a:latin typeface="Calibri" pitchFamily="34" charset="0"/>
-                <a:ea typeface="Calibri" pitchFamily="34" charset="-122"/>
-                <a:cs typeface="Calibri" pitchFamily="34" charset="-120"/>
-              </a:rPr>
-              <a:t>⚠  49 months / 43 consumers is a small synthetic cell — a directional archetype.</a:t>
-            </a:r>
-            <a:endParaRPr lang="en-US" sz="1000" dirty="0"/>
-          </a:p>
-        </p:txBody>
-      </p:sp>
-      <p:sp>
-        <p:nvSpPr>
-          <p:cNvPr id="7" name="Shape 4"/>
-          <p:cNvSpPr/>
-          <p:nvPr/>
-        </p:nvSpPr>
-        <p:spPr>
-          <a:xfrm>
-            <a:off x="457200" y="5029200"/>
-            <a:ext cx="3383280" cy="1097280"/>
-          </a:xfrm>
-          <a:prstGeom prst="roundRect">
-            <a:avLst>
-              <a:gd name="adj" fmla="val 6667"/>
-            </a:avLst>
-          </a:prstGeom>
-          <a:solidFill>
-            <a:srgbClr val="12435E"/>
-          </a:solidFill>
-          <a:ln/>
-        </p:spPr>
-      </p:sp>
-      <p:sp>
-        <p:nvSpPr>
-          <p:cNvPr id="8" name="Text 5"/>
-          <p:cNvSpPr txBox="1"/>
-          <p:nvPr/>
-        </p:nvSpPr>
-        <p:spPr>
-          <a:xfrm>
-            <a:off x="457200" y="5138928"/>
-            <a:ext cx="3383280" cy="658368"/>
-          </a:xfrm>
-          <a:prstGeom prst="rect">
-            <a:avLst/>
-          </a:prstGeom>
-          <a:noFill/>
-          <a:ln/>
-        </p:spPr>
-        <p:txBody>
-          <a:bodyPr wrap="square" lIns="0" tIns="0" rIns="0" bIns="0" rtlCol="0" anchor="ctr"/>
-          <a:lstStyle/>
-          <a:p>
-            <a:pPr algn="ctr" indent="0" marL="0">
-              <a:buNone/>
-            </a:pPr>
-            <a:r>
-              <a:rPr lang="en-US" sz="2800" b="1" dirty="0">
-                <a:solidFill>
-                  <a:srgbClr val="1FC3A6"/>
-                </a:solidFill>
-                <a:latin typeface="Cambria" pitchFamily="34" charset="0"/>
-                <a:ea typeface="Cambria" pitchFamily="34" charset="-122"/>
-                <a:cs typeface="Cambria" pitchFamily="34" charset="-120"/>
-              </a:rPr>
-              <a:t>52%</a:t>
-            </a:r>
-            <a:endParaRPr lang="en-US" sz="2800" dirty="0"/>
-          </a:p>
-        </p:txBody>
-      </p:sp>
-      <p:sp>
-        <p:nvSpPr>
-          <p:cNvPr id="9" name="Text 6"/>
-          <p:cNvSpPr txBox="1"/>
-          <p:nvPr/>
-        </p:nvSpPr>
-        <p:spPr>
-          <a:xfrm>
-            <a:off x="457200" y="5779008"/>
-            <a:ext cx="3383280" cy="320040"/>
-          </a:xfrm>
-          <a:prstGeom prst="rect">
-            <a:avLst/>
-          </a:prstGeom>
-          <a:noFill/>
-          <a:ln/>
-        </p:spPr>
-        <p:txBody>
-          <a:bodyPr wrap="square" lIns="0" tIns="0" rIns="0" bIns="0" rtlCol="0" anchor="ctr"/>
-          <a:lstStyle/>
-          <a:p>
-            <a:pPr algn="ctr" indent="0" marL="0">
-              <a:buNone/>
-            </a:pPr>
-            <a:r>
-              <a:rPr lang="en-US" sz="1100" dirty="0">
-                <a:solidFill>
-                  <a:srgbClr val="FFFFFF"/>
-                </a:solidFill>
-                <a:latin typeface="Calibri" pitchFamily="34" charset="0"/>
-                <a:ea typeface="Calibri" pitchFamily="34" charset="-122"/>
-                <a:cs typeface="Calibri" pitchFamily="34" charset="-120"/>
-              </a:rPr>
-              <a:t>of all stress episodes</a:t>
-            </a:r>
-            <a:endParaRPr lang="en-US" sz="1100" dirty="0"/>
-          </a:p>
-        </p:txBody>
-      </p:sp>
-      <p:sp>
-        <p:nvSpPr>
-          <p:cNvPr id="10" name="Text 7"/>
+      <p:pic>
+        <p:nvPicPr>
+          <p:cNvPr id="6" name="Image 1" descr="D:\BI10GroupYAPPERS\outputs\figures\t2_sti_quintile.png">    </p:cNvPr>
+          <p:cNvPicPr>
+            <a:picLocks noChangeAspect="1"/>
+          </p:cNvPicPr>
+          <p:nvPr/>
+        </p:nvPicPr>
+        <p:blipFill>
+          <a:blip r:embed="rId2"/>
+          <a:srcRect l="0" r="0" t="0" b="0"/>
+          <a:stretch/>
+        </p:blipFill>
+        <p:spPr>
+          <a:xfrm>
+            <a:off x="6263640" y="3063240"/>
+            <a:ext cx="5440680" cy="3200400"/>
+          </a:xfrm>
+          <a:prstGeom prst="rect">
+            <a:avLst/>
+          </a:prstGeom>
+        </p:spPr>
+      </p:pic>
+      <p:sp>
+        <p:nvSpPr>
+          <p:cNvPr id="7" name="Text 3"/>
           <p:cNvSpPr txBox="1"/>
           <p:nvPr/>
         </p:nvSpPr>
@@ -3003,7 +3222,7 @@
       </p:sp>
       <p:sp>
         <p:nvSpPr>
-          <p:cNvPr id="11" name="Text 8"/>
+          <p:cNvPr id="8" name="Text 4"/>
           <p:cNvSpPr txBox="1"/>
           <p:nvPr/>
         </p:nvSpPr>
@@ -3105,7 +3324,7 @@
                 <a:ea typeface="Calibri" pitchFamily="34" charset="-122"/>
                 <a:cs typeface="Calibri" pitchFamily="34" charset="-120"/>
               </a:rPr>
-              <a:t>TASK 3 · ENGAGEMENT</a:t>
+              <a:t>TASK 2 · FINANCIAL HEALTH</a:t>
             </a:r>
             <a:endParaRPr lang="en-US" sz="1100" dirty="0"/>
           </a:p>
@@ -3147,7 +3366,7 @@
                 <a:ea typeface="Cambria" pitchFamily="34" charset="-122"/>
                 <a:cs typeface="Cambria" pitchFamily="34" charset="-120"/>
               </a:rPr>
-              <a:t>Engagement is saturated; digital is broad but shallow</a:t>
+              <a:t>The "Stressed but Engaged" crossover — and when to reach it</a:t>
             </a:r>
             <a:endParaRPr lang="en-US" sz="2700" dirty="0"/>
           </a:p>
@@ -3190,7 +3409,7 @@
                 <a:ea typeface="Calibri" pitchFamily="34" charset="-122"/>
                 <a:cs typeface="Calibri" pitchFamily="34" charset="-120"/>
               </a:rPr>
-              <a:t>99.0% of consumer-months are high/very-high engagement (mean 77.8) — the score does NOT segment the base.</a:t>
+              <a:t>Rule (month grain): FHS &lt; 40 AND engagement ≥ p75 (81.4) → 43 consumers = 52% of ALL stress episodes; stable at p70/p80 (44/41 consumers, 53%/48%).</a:t>
             </a:r>
             <a:endParaRPr lang="en-US" sz="1400" dirty="0"/>
           </a:p>
@@ -3211,7 +3430,7 @@
                 <a:ea typeface="Calibri" pitchFamily="34" charset="-122"/>
                 <a:cs typeface="Calibri" pitchFamily="34" charset="-120"/>
               </a:rPr>
-              <a:t>Channel mix: POS 58.8% · QR 19.8% · E-com 8.7% · Mobile 7.7% · Recurring 4.9% → digital = 41% of trips but only 21% of spend.</a:t>
+              <a:t>Stressed months put 23.5% of spend into 22–23h vs 8.3% for healthy — bigger late-night tickets, not more of them (count 11.6% vs 9.7%).</a:t>
             </a:r>
             <a:endParaRPr lang="en-US" sz="1400" dirty="0"/>
           </a:p>
@@ -3232,7 +3451,7 @@
                 <a:ea typeface="Calibri" pitchFamily="34" charset="-122"/>
                 <a:cs typeface="Calibri" pitchFamily="34" charset="-120"/>
               </a:rPr>
-              <a:t>Digital handles many small tickets; big baskets stay on POS. Grow digital value, not just reach. (Note: synthetic cards are engineered highly active — the 99% is partly an artefact.)</a:t>
+              <a:t>Sunday + Monday carry 42% of stressed spend (vs 34%) → send pacing alerts Sunday–Monday evenings, before 22:00.</a:t>
             </a:r>
             <a:endParaRPr lang="en-US" sz="1400" dirty="0"/>
           </a:p>
@@ -3240,7 +3459,7 @@
       </p:sp>
       <p:pic>
         <p:nvPicPr>
-          <p:cNvPr id="5" name="Image 0" descr="D:\BI10GroupYAPPERS\outputs\figures\t3_engagement_dist.png">    </p:cNvPr>
+          <p:cNvPr id="5" name="Image 0" descr="D:\BI10GroupYAPPERS\outputs\figures\t2_crossover.png">    </p:cNvPr>
           <p:cNvPicPr>
             <a:picLocks noChangeAspect="1"/>
           </p:cNvPicPr>
@@ -3263,7 +3482,7 @@
       </p:pic>
       <p:pic>
         <p:nvPicPr>
-          <p:cNvPr id="6" name="Image 1" descr="D:\BI10GroupYAPPERS\outputs\figures\t3_channel_mix.png">    </p:cNvPr>
+          <p:cNvPr id="6" name="Image 1" descr="D:\BI10GroupYAPPERS\outputs\figures\t2_timing.png">    </p:cNvPr>
           <p:cNvPicPr>
             <a:picLocks noChangeAspect="1"/>
           </p:cNvPicPr>
@@ -3427,7 +3646,7 @@
                 <a:ea typeface="Calibri" pitchFamily="34" charset="-122"/>
                 <a:cs typeface="Calibri" pitchFamily="34" charset="-120"/>
               </a:rPr>
-              <a:t>TASK 3 · ENGAGEMENT</a:t>
+              <a:t>TASK 2 · FINANCIAL HEALTH</a:t>
             </a:r>
             <a:endParaRPr lang="en-US" sz="1100" dirty="0"/>
           </a:p>
@@ -3469,7 +3688,7 @@
                 <a:ea typeface="Cambria" pitchFamily="34" charset="-122"/>
                 <a:cs typeface="Cambria" pitchFamily="34" charset="-120"/>
               </a:rPr>
-              <a:t>What actually discriminates: diversity &amp; consistency</a:t>
+              <a:t>Who differs? Province and age barely; occupation through spending</a:t>
             </a:r>
             <a:endParaRPr lang="en-US" sz="2700" dirty="0"/>
           </a:p>
@@ -3483,8 +3702,8 @@
         </p:nvSpPr>
         <p:spPr>
           <a:xfrm>
-            <a:off x="457200" y="1600200"/>
-            <a:ext cx="5760720" cy="3200400"/>
+            <a:off x="457200" y="1463040"/>
+            <a:ext cx="11247120" cy="1417320"/>
           </a:xfrm>
           <a:prstGeom prst="rect">
             <a:avLst/>
@@ -3512,7 +3731,7 @@
                 <a:ea typeface="Calibri" pitchFamily="34" charset="-122"/>
                 <a:cs typeface="Calibri" pitchFamily="34" charset="-120"/>
               </a:rPr>
-              <a:t>Category diversity is the cleanest signal: r +0.94 with engagement (consumer level).</a:t>
+              <a:t>Province: 22 of 27 provinces (≥15 consumers) have a 95% CI containing the national mean 66.3. Age: all six cohort CIs overlap.</a:t>
             </a:r>
             <a:endParaRPr lang="en-US" sz="1400" dirty="0"/>
           </a:p>
@@ -3533,7 +3752,7 @@
                 <a:ea typeface="Calibri" pitchFamily="34" charset="-122"/>
                 <a:cs typeface="Calibri" pitchFamily="34" charset="-120"/>
               </a:rPr>
-              <a:t>The dormant tail is disengaged because it is narrow — 4–6 categories vs ~14 for the core.</a:t>
+              <a:t>Occupation (396 titles → 8 groups): Engineering/IT 69.1 and Business/finance 68.7 vs Office/public 64.5 and Manual 62.9 — a ~6-pt spread that mirrors spend-to-income (0.60 vs 0.76–0.79).</a:t>
             </a:r>
             <a:endParaRPr lang="en-US" sz="1400" dirty="0"/>
           </a:p>
@@ -3554,28 +3773,7 @@
                 <a:ea typeface="Calibri" pitchFamily="34" charset="-122"/>
                 <a:cs typeface="Calibri" pitchFamily="34" charset="-120"/>
               </a:rPr>
-              <a:t>Consistency (active days r +0.59) beats raw volume (txn count r +0.40).</a:t>
-            </a:r>
-            <a:endParaRPr lang="en-US" sz="1400" dirty="0"/>
-          </a:p>
-          <a:p>
-            <a:pPr marL="177800" indent="-177800">
-              <a:spcAft>
-                <a:spcPts val="800"/>
-              </a:spcAft>
-              <a:buSzPct val="100000"/>
-              <a:buChar char="•"/>
-            </a:pPr>
-            <a:r>
-              <a:rPr lang="en-US" sz="1400" dirty="0">
-                <a:solidFill>
-                  <a:srgbClr val="1B2A36"/>
-                </a:solidFill>
-                <a:latin typeface="Calibri" pitchFamily="34" charset="0"/>
-                <a:ea typeface="Calibri" pitchFamily="34" charset="-122"/>
-                <a:cs typeface="Calibri" pitchFamily="34" charset="-120"/>
-              </a:rPr>
-              <a:t>A falling category count flags disengagement before the composite score moves.</a:t>
+              <a:t>Demographics act through the overspend ratio → target the ratio, never the group.</a:t>
             </a:r>
             <a:endParaRPr lang="en-US" sz="1400" dirty="0"/>
           </a:p>
@@ -3583,7 +3781,7 @@
       </p:sp>
       <p:pic>
         <p:nvPicPr>
-          <p:cNvPr id="5" name="Image 0" descr="D:\BI10GroupYAPPERS\outputs\figures\t3_diversity_vs_engagement.png">    </p:cNvPr>
+          <p:cNvPr id="5" name="Image 0" descr="D:\BI10GroupYAPPERS\outputs\figures\t2_demographics.png">    </p:cNvPr>
           <p:cNvPicPr>
             <a:picLocks noChangeAspect="1"/>
           </p:cNvPicPr>
@@ -3596,8 +3794,8 @@
         </p:blipFill>
         <p:spPr>
           <a:xfrm>
-            <a:off x="6446520" y="1554480"/>
-            <a:ext cx="5303520" cy="4206240"/>
+            <a:off x="457200" y="2926080"/>
+            <a:ext cx="11247120" cy="3474720"/>
           </a:xfrm>
           <a:prstGeom prst="rect">
             <a:avLst/>
@@ -3789,7 +3987,7 @@
                 <a:ea typeface="Cambria" pitchFamily="34" charset="-122"/>
                 <a:cs typeface="Cambria" pitchFamily="34" charset="-120"/>
               </a:rPr>
-              <a:t>High-health, low-engagement: dormancy hiding in "healthy"</a:t>
+              <a:t>Engagement is saturated; digital is broad but shallow</a:t>
             </a:r>
             <a:endParaRPr lang="en-US" sz="2700" dirty="0"/>
           </a:p>
@@ -3803,8 +4001,8 @@
         </p:nvSpPr>
         <p:spPr>
           <a:xfrm>
-            <a:off x="457200" y="1600200"/>
-            <a:ext cx="5760720" cy="3200400"/>
+            <a:off x="457200" y="1463040"/>
+            <a:ext cx="11247120" cy="1508760"/>
           </a:xfrm>
           <a:prstGeom prst="rect">
             <a:avLst/>
@@ -3832,7 +4030,7 @@
                 <a:ea typeface="Calibri" pitchFamily="34" charset="-122"/>
                 <a:cs typeface="Calibri" pitchFamily="34" charset="-120"/>
               </a:rPr>
-              <a:t>Cutoff: FHS ≥ 70 AND engagement &lt; 70 → 25 consumers (2.5%).</a:t>
+              <a:t>Consumers by engagement segment: Low 1.0% · Medium 8.0% · High 74.1% · Very high 16.9% — the score does NOT segment the base.</a:t>
             </a:r>
             <a:endParaRPr lang="en-US" sz="1400" dirty="0"/>
           </a:p>
@@ -3853,7 +4051,7 @@
                 <a:ea typeface="Calibri" pitchFamily="34" charset="-122"/>
                 <a:cs typeface="Calibri" pitchFamily="34" charset="-120"/>
               </a:rPr>
-              <a:t>Why 70: the same 25 return at eng &lt; 65/68/70 — a natural gap in the data.</a:t>
+              <a:t>Channel mix: POS 58.8% · QR 19.8% · E-com 8.7% · Mobile 7.7% · Recurring 4.9%; average online spend share 24.7% per consumer.</a:t>
             </a:r>
             <a:endParaRPr lang="en-US" sz="1400" dirty="0"/>
           </a:p>
@@ -3874,28 +4072,7 @@
                 <a:ea typeface="Calibri" pitchFamily="34" charset="-122"/>
                 <a:cs typeface="Calibri" pitchFamily="34" charset="-120"/>
               </a:rPr>
-              <a:t>They moved spend off-card to narrow online use (diversity 4.7 vs 13.2; online 0.61 vs 0.24).</a:t>
-            </a:r>
-            <a:endParaRPr lang="en-US" sz="1400" dirty="0"/>
-          </a:p>
-          <a:p>
-            <a:pPr marL="177800" indent="-177800">
-              <a:spcAft>
-                <a:spcPts val="800"/>
-              </a:spcAft>
-              <a:buSzPct val="100000"/>
-              <a:buChar char="•"/>
-            </a:pPr>
-            <a:r>
-              <a:rPr lang="en-US" sz="1400" dirty="0">
-                <a:solidFill>
-                  <a:srgbClr val="1B2A36"/>
-                </a:solidFill>
-                <a:latin typeface="Calibri" pitchFamily="34" charset="0"/>
-                <a:ea typeface="Calibri" pitchFamily="34" charset="-122"/>
-                <a:cs typeface="Calibri" pitchFamily="34" charset="-120"/>
-              </a:rPr>
-              <a:t>Play = reactivation of everyday use, NOT budgeting — distinct from the 67 distress-tail customers.</a:t>
+              <a:t>Non-POS channels carry 41% of trips and 41.5% of value (same ticket size as POS); truly online E-com + Mobile is ~17% of value.</a:t>
             </a:r>
             <a:endParaRPr lang="en-US" sz="1400" dirty="0"/>
           </a:p>
@@ -3903,7 +4080,7 @@
       </p:sp>
       <p:pic>
         <p:nvPicPr>
-          <p:cNvPr id="5" name="Image 0" descr="D:\BI10GroupYAPPERS\outputs\figures\t3_health_vs_engagement_quadrant.png">    </p:cNvPr>
+          <p:cNvPr id="5" name="Image 0" descr="D:\BI10GroupYAPPERS\outputs\figures\t3_segment_share.png">    </p:cNvPr>
           <p:cNvPicPr>
             <a:picLocks noChangeAspect="1"/>
           </p:cNvPicPr>
@@ -3916,56 +4093,40 @@
         </p:blipFill>
         <p:spPr>
           <a:xfrm>
-            <a:off x="6446520" y="1554480"/>
-            <a:ext cx="5303520" cy="4206240"/>
+            <a:off x="502920" y="3063240"/>
+            <a:ext cx="5440680" cy="3200400"/>
           </a:xfrm>
           <a:prstGeom prst="rect">
             <a:avLst/>
           </a:prstGeom>
         </p:spPr>
       </p:pic>
-      <p:sp>
-        <p:nvSpPr>
-          <p:cNvPr id="6" name="Text 3"/>
-          <p:cNvSpPr txBox="1"/>
-          <p:nvPr/>
-        </p:nvSpPr>
-        <p:spPr>
-          <a:xfrm>
-            <a:off x="6446520" y="5852160"/>
-            <a:ext cx="5303520" cy="548640"/>
-          </a:xfrm>
-          <a:prstGeom prst="rect">
-            <a:avLst/>
-          </a:prstGeom>
-          <a:noFill/>
-          <a:ln/>
-        </p:spPr>
-        <p:txBody>
-          <a:bodyPr wrap="square" lIns="0" tIns="0" rIns="0" bIns="0" rtlCol="0" anchor="t"/>
-          <a:lstStyle/>
-          <a:p>
-            <a:pPr indent="0" marL="0">
-              <a:buNone/>
-            </a:pPr>
-            <a:r>
-              <a:rPr lang="en-US" sz="1000" i="1" dirty="0">
-                <a:solidFill>
-                  <a:srgbClr val="5F7180"/>
-                </a:solidFill>
-                <a:latin typeface="Calibri" pitchFamily="34" charset="0"/>
-                <a:ea typeface="Calibri" pitchFamily="34" charset="-122"/>
-                <a:cs typeface="Calibri" pitchFamily="34" charset="-120"/>
-              </a:rPr>
-              <a:t>⚠  n = 25, synthetic-inflated engagement — a cohort to watch, not a sized forecast.</a:t>
-            </a:r>
-            <a:endParaRPr lang="en-US" sz="1000" dirty="0"/>
-          </a:p>
-        </p:txBody>
-      </p:sp>
-      <p:sp>
-        <p:nvSpPr>
-          <p:cNvPr id="7" name="Text 4"/>
+      <p:pic>
+        <p:nvPicPr>
+          <p:cNvPr id="6" name="Image 1" descr="D:\BI10GroupYAPPERS\outputs\figures\t3_channel_mix.png">    </p:cNvPr>
+          <p:cNvPicPr>
+            <a:picLocks noChangeAspect="1"/>
+          </p:cNvPicPr>
+          <p:nvPr/>
+        </p:nvPicPr>
+        <p:blipFill>
+          <a:blip r:embed="rId2"/>
+          <a:srcRect l="0" r="0" t="0" b="0"/>
+          <a:stretch/>
+        </p:blipFill>
+        <p:spPr>
+          <a:xfrm>
+            <a:off x="6263640" y="3063240"/>
+            <a:ext cx="5440680" cy="3200400"/>
+          </a:xfrm>
+          <a:prstGeom prst="rect">
+            <a:avLst/>
+          </a:prstGeom>
+        </p:spPr>
+      </p:pic>
+      <p:sp>
+        <p:nvSpPr>
+          <p:cNvPr id="7" name="Text 3"/>
           <p:cNvSpPr txBox="1"/>
           <p:nvPr/>
         </p:nvSpPr>
@@ -4004,7 +4165,7 @@
       </p:sp>
       <p:sp>
         <p:nvSpPr>
-          <p:cNvPr id="8" name="Text 5"/>
+          <p:cNvPr id="8" name="Text 4"/>
           <p:cNvSpPr txBox="1"/>
           <p:nvPr/>
         </p:nvSpPr>
@@ -4106,7 +4267,7 @@
                 <a:ea typeface="Calibri" pitchFamily="34" charset="-122"/>
                 <a:cs typeface="Calibri" pitchFamily="34" charset="-120"/>
               </a:rPr>
-              <a:t>TASK 4 · SEGMENTATION</a:t>
+              <a:t>TASK 3 · ENGAGEMENT</a:t>
             </a:r>
             <a:endParaRPr lang="en-US" sz="1100" dirty="0"/>
           </a:p>
@@ -4148,7 +4309,7 @@
                 <a:ea typeface="Cambria" pitchFamily="34" charset="-122"/>
                 <a:cs typeface="Cambria" pitchFamily="34" charset="-120"/>
               </a:rPr>
-              <a:t>Method: cluster on behaviour, justify k honestly</a:t>
+              <a:t>What actually discriminates: diversity &amp; consistency</a:t>
             </a:r>
             <a:endParaRPr lang="en-US" sz="2700" dirty="0"/>
           </a:p>
@@ -4162,8 +4323,8 @@
         </p:nvSpPr>
         <p:spPr>
           <a:xfrm>
-            <a:off x="457200" y="1600200"/>
-            <a:ext cx="5760720" cy="3200400"/>
+            <a:off x="457200" y="1463040"/>
+            <a:ext cx="11247120" cy="1508760"/>
           </a:xfrm>
           <a:prstGeom prst="rect">
             <a:avLst/>
@@ -4191,7 +4352,7 @@
                 <a:ea typeface="Calibri" pitchFamily="34" charset="-122"/>
                 <a:cs typeface="Calibri" pitchFamily="34" charset="-120"/>
               </a:rPr>
-              <a:t>Aggregate 10,992 consumer-months → 999 consumers (yearly mean profile).</a:t>
+              <a:t>Category diversity: r +0.94 with engagement; still +0.81 without the dormant tail (Spearman +0.85) — not a tail artefact.</a:t>
             </a:r>
             <a:endParaRPr lang="en-US" sz="1400" dirty="0"/>
           </a:p>
@@ -4212,7 +4373,7 @@
                 <a:ea typeface="Calibri" pitchFamily="34" charset="-122"/>
                 <a:cs typeface="Calibri" pitchFamily="34" charset="-120"/>
               </a:rPr>
-              <a:t>8 z-scaled behavioural features across health, engagement &amp; spending; demographics excluded (no signal).</a:t>
+              <a:t>Heatmap: 30–31 active days &amp; recency 0 → engagement 79.8 (n=6,614); every 1–5-active-day cell stays ≤ 55 whatever the recency.</a:t>
             </a:r>
             <a:endParaRPr lang="en-US" sz="1400" dirty="0"/>
           </a:p>
@@ -4233,28 +4394,7 @@
                 <a:ea typeface="Calibri" pitchFamily="34" charset="-122"/>
                 <a:cs typeface="Calibri" pitchFamily="34" charset="-120"/>
               </a:rPr>
-              <a:t>k-means chosen over a pure 2×2 so boundaries form across all 8 dimensions at once.</a:t>
-            </a:r>
-            <a:endParaRPr lang="en-US" sz="1400" dirty="0"/>
-          </a:p>
-          <a:p>
-            <a:pPr marL="177800" indent="-177800">
-              <a:spcAft>
-                <a:spcPts val="800"/>
-              </a:spcAft>
-              <a:buSzPct val="100000"/>
-              <a:buChar char="•"/>
-            </a:pPr>
-            <a:r>
-              <a:rPr lang="en-US" sz="1400" dirty="0">
-                <a:solidFill>
-                  <a:srgbClr val="1B2A36"/>
-                </a:solidFill>
-                <a:latin typeface="Calibri" pitchFamily="34" charset="0"/>
-                <a:ea typeface="Calibri" pitchFamily="34" charset="-122"/>
-                <a:cs typeface="Calibri" pitchFamily="34" charset="-120"/>
-              </a:rPr>
-              <a:t>k=4 via elbow + silhouette (0.251); coverage 999/999, all 7 minors retained — PASS.</a:t>
+              <a:t>Consistency beats recency and volume → build the early-warning flag on falling diversity and active days.</a:t>
             </a:r>
             <a:endParaRPr lang="en-US" sz="1400" dirty="0"/>
           </a:p>
@@ -4262,7 +4402,7 @@
       </p:sp>
       <p:pic>
         <p:nvPicPr>
-          <p:cNvPr id="5" name="Image 0" descr="D:\BI10GroupYAPPERS\outputs\figures\t4_silhouette.png">    </p:cNvPr>
+          <p:cNvPr id="5" name="Image 0" descr="D:\BI10GroupYAPPERS\outputs\figures\t3_diversity_vs_engagement.png">    </p:cNvPr>
           <p:cNvPicPr>
             <a:picLocks noChangeAspect="1"/>
           </p:cNvPicPr>
@@ -4275,17 +4415,40 @@
         </p:blipFill>
         <p:spPr>
           <a:xfrm>
-            <a:off x="6446520" y="1554480"/>
-            <a:ext cx="5303520" cy="4206240"/>
+            <a:off x="502920" y="3063240"/>
+            <a:ext cx="5440680" cy="3200400"/>
           </a:xfrm>
           <a:prstGeom prst="rect">
             <a:avLst/>
           </a:prstGeom>
         </p:spPr>
       </p:pic>
-      <p:sp>
-        <p:nvSpPr>
-          <p:cNvPr id="6" name="Text 3"/>
+      <p:pic>
+        <p:nvPicPr>
+          <p:cNvPr id="6" name="Image 1" descr="D:\BI10GroupYAPPERS\outputs\figures\t3_recency_frequency.png">    </p:cNvPr>
+          <p:cNvPicPr>
+            <a:picLocks noChangeAspect="1"/>
+          </p:cNvPicPr>
+          <p:nvPr/>
+        </p:nvPicPr>
+        <p:blipFill>
+          <a:blip r:embed="rId2"/>
+          <a:srcRect l="0" r="0" t="0" b="0"/>
+          <a:stretch/>
+        </p:blipFill>
+        <p:spPr>
+          <a:xfrm>
+            <a:off x="6263640" y="3063240"/>
+            <a:ext cx="5440680" cy="3200400"/>
+          </a:xfrm>
+          <a:prstGeom prst="rect">
+            <a:avLst/>
+          </a:prstGeom>
+        </p:spPr>
+      </p:pic>
+      <p:sp>
+        <p:nvSpPr>
+          <p:cNvPr id="7" name="Text 3"/>
           <p:cNvSpPr txBox="1"/>
           <p:nvPr/>
         </p:nvSpPr>
@@ -4324,7 +4487,7 @@
       </p:sp>
       <p:sp>
         <p:nvSpPr>
-          <p:cNvPr id="7" name="Text 4"/>
+          <p:cNvPr id="8" name="Text 4"/>
           <p:cNvSpPr txBox="1"/>
           <p:nvPr/>
         </p:nvSpPr>
@@ -4426,7 +4589,7 @@
                 <a:ea typeface="Calibri" pitchFamily="34" charset="-122"/>
                 <a:cs typeface="Calibri" pitchFamily="34" charset="-120"/>
               </a:rPr>
-              <a:t>TASK 4 · SEGMENTATION</a:t>
+              <a:t>TASK 3 · ENGAGEMENT</a:t>
             </a:r>
             <a:endParaRPr lang="en-US" sz="1100" dirty="0"/>
           </a:p>
@@ -4468,7 +4631,7 @@
                 <a:ea typeface="Cambria" pitchFamily="34" charset="-122"/>
                 <a:cs typeface="Cambria" pitchFamily="34" charset="-120"/>
               </a:rPr>
-              <a:t>The four customer segments</a:t>
+              <a:t>High-health, low-engagement: dormancy hiding in "healthy"</a:t>
             </a:r>
             <a:endParaRPr lang="en-US" sz="2700" dirty="0"/>
           </a:p>
@@ -4482,8 +4645,8 @@
         </p:nvSpPr>
         <p:spPr>
           <a:xfrm>
-            <a:off x="457200" y="1463040"/>
-            <a:ext cx="11247120" cy="1508760"/>
+            <a:off x="457200" y="1600200"/>
+            <a:ext cx="5760720" cy="3200400"/>
           </a:xfrm>
           <a:prstGeom prst="rect">
             <a:avLst/>
@@ -4511,7 +4674,7 @@
                 <a:ea typeface="Calibri" pitchFamily="34" charset="-122"/>
                 <a:cs typeface="Calibri" pitchFamily="34" charset="-120"/>
               </a:rPr>
-              <a:t>Financially Healthy &amp; Highly Engaged — 351 (35%): FHS 70.5, lowest util 0.148 → retain &amp; grow value.</a:t>
+              <a:t>Cutoff: FHS ≥ 70 AND engagement &lt; 70 → 25 consumers (2.5%).</a:t>
             </a:r>
             <a:endParaRPr lang="en-US" sz="1400" dirty="0"/>
           </a:p>
@@ -4532,7 +4695,7 @@
                 <a:ea typeface="Calibri" pitchFamily="34" charset="-122"/>
                 <a:cs typeface="Calibri" pitchFamily="34" charset="-120"/>
               </a:rPr>
-              <a:t>Financially Stretched but Highly Engaged — 302 (30%): highest spend/income 0.835, still engaged → the wellbeing priority.</a:t>
+              <a:t>Why 70: the count is 25 at engagement &lt; 60, 65 and 70 (a natural gap) and jumps to 63 at &lt; 75; FHS ≥ 65 gives 48, ≥ 75 gives 9.</a:t>
             </a:r>
             <a:endParaRPr lang="en-US" sz="1400" dirty="0"/>
           </a:p>
@@ -4553,7 +4716,28 @@
                 <a:ea typeface="Calibri" pitchFamily="34" charset="-122"/>
                 <a:cs typeface="Calibri" pitchFamily="34" charset="-120"/>
               </a:rPr>
-              <a:t>High-Activity Digital Power Users — 258 (26%): most active &amp; volatile → monetise &amp; monitor drift.  ·  Low Engagement &amp; Emerging Digital — 88 (9%): near-dormant but 67% online → activate; highest growth headroom.</a:t>
+              <a:t>They moved spend to narrow online use (diversity 4.7 vs 13.2; online 0.61 vs 0.24); 24 of 25 sit in Emerging Digital.</a:t>
+            </a:r>
+            <a:endParaRPr lang="en-US" sz="1400" dirty="0"/>
+          </a:p>
+          <a:p>
+            <a:pPr marL="177800" indent="-177800">
+              <a:spcAft>
+                <a:spcPts val="800"/>
+              </a:spcAft>
+              <a:buSzPct val="100000"/>
+              <a:buChar char="•"/>
+            </a:pPr>
+            <a:r>
+              <a:rPr lang="en-US" sz="1400" dirty="0">
+                <a:solidFill>
+                  <a:srgbClr val="1B2A36"/>
+                </a:solidFill>
+                <a:latin typeface="Calibri" pitchFamily="34" charset="0"/>
+                <a:ea typeface="Calibri" pitchFamily="34" charset="-122"/>
+                <a:cs typeface="Calibri" pitchFamily="34" charset="-120"/>
+              </a:rPr>
+              <a:t>Play = reactivation of everyday use, NOT budgeting.</a:t>
             </a:r>
             <a:endParaRPr lang="en-US" sz="1400" dirty="0"/>
           </a:p>
@@ -4561,7 +4745,7 @@
       </p:sp>
       <p:pic>
         <p:nvPicPr>
-          <p:cNvPr id="5" name="Image 0" descr="D:\BI10GroupYAPPERS\outputs\figures\t4_segment_sizes.png">    </p:cNvPr>
+          <p:cNvPr id="5" name="Image 0" descr="D:\BI10GroupYAPPERS\outputs\figures\t3_health_vs_engagement_quadrant.png">    </p:cNvPr>
           <p:cNvPicPr>
             <a:picLocks noChangeAspect="1"/>
           </p:cNvPicPr>
@@ -4574,40 +4758,56 @@
         </p:blipFill>
         <p:spPr>
           <a:xfrm>
-            <a:off x="502920" y="3063240"/>
-            <a:ext cx="5440680" cy="3200400"/>
+            <a:off x="6446520" y="1554480"/>
+            <a:ext cx="5303520" cy="4206240"/>
           </a:xfrm>
           <a:prstGeom prst="rect">
             <a:avLst/>
           </a:prstGeom>
         </p:spPr>
       </p:pic>
-      <p:pic>
-        <p:nvPicPr>
-          <p:cNvPr id="6" name="Image 1" descr="D:\BI10GroupYAPPERS\outputs\figures\t4_segment_profiles.png">    </p:cNvPr>
-          <p:cNvPicPr>
-            <a:picLocks noChangeAspect="1"/>
-          </p:cNvPicPr>
-          <p:nvPr/>
-        </p:nvPicPr>
-        <p:blipFill>
-          <a:blip r:embed="rId2"/>
-          <a:srcRect l="0" r="0" t="0" b="0"/>
-          <a:stretch/>
-        </p:blipFill>
-        <p:spPr>
-          <a:xfrm>
-            <a:off x="6263640" y="3063240"/>
-            <a:ext cx="5440680" cy="3200400"/>
-          </a:xfrm>
-          <a:prstGeom prst="rect">
-            <a:avLst/>
-          </a:prstGeom>
-        </p:spPr>
-      </p:pic>
-      <p:sp>
-        <p:nvSpPr>
-          <p:cNvPr id="7" name="Text 3"/>
+      <p:sp>
+        <p:nvSpPr>
+          <p:cNvPr id="6" name="Text 3"/>
+          <p:cNvSpPr txBox="1"/>
+          <p:nvPr/>
+        </p:nvSpPr>
+        <p:spPr>
+          <a:xfrm>
+            <a:off x="6446520" y="5852160"/>
+            <a:ext cx="5303520" cy="548640"/>
+          </a:xfrm>
+          <a:prstGeom prst="rect">
+            <a:avLst/>
+          </a:prstGeom>
+          <a:noFill/>
+          <a:ln/>
+        </p:spPr>
+        <p:txBody>
+          <a:bodyPr wrap="square" lIns="0" tIns="0" rIns="0" bIns="0" rtlCol="0" anchor="t"/>
+          <a:lstStyle/>
+          <a:p>
+            <a:pPr indent="0" marL="0">
+              <a:buNone/>
+            </a:pPr>
+            <a:r>
+              <a:rPr lang="en-US" sz="1000" i="1" dirty="0">
+                <a:solidFill>
+                  <a:srgbClr val="5F7180"/>
+                </a:solidFill>
+                <a:latin typeface="Calibri" pitchFamily="34" charset="0"/>
+                <a:ea typeface="Calibri" pitchFamily="34" charset="-122"/>
+                <a:cs typeface="Calibri" pitchFamily="34" charset="-120"/>
+              </a:rPr>
+              <a:t>⚠  n = 25, synthetic-inflated engagement — a cohort to watch, not a sized forecast.</a:t>
+            </a:r>
+            <a:endParaRPr lang="en-US" sz="1000" dirty="0"/>
+          </a:p>
+        </p:txBody>
+      </p:sp>
+      <p:sp>
+        <p:nvSpPr>
+          <p:cNvPr id="7" name="Text 4"/>
           <p:cNvSpPr txBox="1"/>
           <p:nvPr/>
         </p:nvSpPr>
@@ -4646,7 +4846,7 @@
       </p:sp>
       <p:sp>
         <p:nvSpPr>
-          <p:cNvPr id="8" name="Text 4"/>
+          <p:cNvPr id="8" name="Text 5"/>
           <p:cNvSpPr txBox="1"/>
           <p:nvPr/>
         </p:nvSpPr>
@@ -4748,7 +4948,7 @@
                 <a:ea typeface="Calibri" pitchFamily="34" charset="-122"/>
                 <a:cs typeface="Calibri" pitchFamily="34" charset="-120"/>
               </a:rPr>
-              <a:t>TASK 5 · RECOMMENDATIONS</a:t>
+              <a:t>TASK 4 · SEGMENTATION</a:t>
             </a:r>
             <a:endParaRPr lang="en-US" sz="1100" dirty="0"/>
           </a:p>
@@ -4790,7 +4990,7 @@
                 <a:ea typeface="Cambria" pitchFamily="34" charset="-122"/>
                 <a:cs typeface="Cambria" pitchFamily="34" charset="-120"/>
               </a:rPr>
-              <a:t>A six-tool, non-punitive action plan</a:t>
+              <a:t>Method: cluster on behaviour, justify k honestly</a:t>
             </a:r>
             <a:endParaRPr lang="en-US" sz="2700" dirty="0"/>
           </a:p>
@@ -4833,7 +5033,7 @@
                 <a:ea typeface="Calibri" pitchFamily="34" charset="-122"/>
                 <a:cs typeface="Calibri" pitchFamily="34" charset="-120"/>
               </a:rPr>
-              <a:t>① Budgeting → Stretched-Engaged (302): spend-vs-income dashboard (driver −0.90).</a:t>
+              <a:t>Aggregate 10,992 consumer-months → 999 consumers (yearly mean profile); preprocessed dataset + dictionary delivered.</a:t>
             </a:r>
             <a:endParaRPr lang="en-US" sz="1400" dirty="0"/>
           </a:p>
@@ -4854,7 +5054,7 @@
                 <a:ea typeface="Calibri" pitchFamily="34" charset="-122"/>
                 <a:cs typeface="Calibri" pitchFamily="34" charset="-120"/>
               </a:rPr>
-              <a:t>② Spend alerts → Crossover (43 = 52% of stress): event-triggered in-app pacing.</a:t>
+              <a:t>8 z-scaled behavioural features across health, engagement &amp; spending; demographics kept out of clustering, used only to profile.</a:t>
             </a:r>
             <a:endParaRPr lang="en-US" sz="1400" dirty="0"/>
           </a:p>
@@ -4875,7 +5075,7 @@
                 <a:ea typeface="Calibri" pitchFamily="34" charset="-122"/>
                 <a:cs typeface="Calibri" pitchFamily="34" charset="-120"/>
               </a:rPr>
-              <a:t>③ Planning reminders → Power Users (258): pre-December pacing (volatility r −0.50).</a:t>
+              <a:t>k-means chosen over a pure 2×2 so boundaries form across all 8 dimensions at once.</a:t>
             </a:r>
             <a:endParaRPr lang="en-US" sz="1400" dirty="0"/>
           </a:p>
@@ -4896,49 +5096,7 @@
                 <a:ea typeface="Calibri" pitchFamily="34" charset="-122"/>
                 <a:cs typeface="Calibri" pitchFamily="34" charset="-120"/>
               </a:rPr>
-              <a:t>④ Education → Distress tail (67): needs-vs-wants modules (essential ratio +0.48).</a:t>
-            </a:r>
-            <a:endParaRPr lang="en-US" sz="1400" dirty="0"/>
-          </a:p>
-          <a:p>
-            <a:pPr marL="177800" indent="-177800">
-              <a:spcAft>
-                <a:spcPts val="800"/>
-              </a:spcAft>
-              <a:buSzPct val="100000"/>
-              <a:buChar char="•"/>
-            </a:pPr>
-            <a:r>
-              <a:rPr lang="en-US" sz="1400" dirty="0">
-                <a:solidFill>
-                  <a:srgbClr val="1B2A36"/>
-                </a:solidFill>
-                <a:latin typeface="Calibri" pitchFamily="34" charset="0"/>
-                <a:ea typeface="Calibri" pitchFamily="34" charset="-122"/>
-                <a:cs typeface="Calibri" pitchFamily="34" charset="-120"/>
-              </a:rPr>
-              <a:t>⑤ Digital nudges → Emerging Digital (88): onboarding &amp; habit loops (diversity r +0.94).</a:t>
-            </a:r>
-            <a:endParaRPr lang="en-US" sz="1400" dirty="0"/>
-          </a:p>
-          <a:p>
-            <a:pPr marL="177800" indent="-177800">
-              <a:spcAft>
-                <a:spcPts val="800"/>
-              </a:spcAft>
-              <a:buSzPct val="100000"/>
-              <a:buChar char="•"/>
-            </a:pPr>
-            <a:r>
-              <a:rPr lang="en-US" sz="1400" dirty="0">
-                <a:solidFill>
-                  <a:srgbClr val="1B2A36"/>
-                </a:solidFill>
-                <a:latin typeface="Calibri" pitchFamily="34" charset="0"/>
-                <a:ea typeface="Calibri" pitchFamily="34" charset="-122"/>
-                <a:cs typeface="Calibri" pitchFamily="34" charset="-120"/>
-              </a:rPr>
-              <a:t>⑥ Product suggestions → Healthy-Engaged (351): savings/loyalty, opt-in, never auto-extend.</a:t>
+              <a:t>k=4 via elbow + silhouette (0.251); coverage 999/999, all 7 minors retained — PASS.</a:t>
             </a:r>
             <a:endParaRPr lang="en-US" sz="1400" dirty="0"/>
           </a:p>
@@ -4946,7 +5104,7 @@
       </p:sp>
       <p:pic>
         <p:nvPicPr>
-          <p:cNvPr id="5" name="Image 0" descr="D:\BI10GroupYAPPERS\outputs\figures\t5_target_sizes.png">    </p:cNvPr>
+          <p:cNvPr id="5" name="Image 0" descr="D:\BI10GroupYAPPERS\outputs\figures\t4_silhouette.png">    </p:cNvPr>
           <p:cNvPicPr>
             <a:picLocks noChangeAspect="1"/>
           </p:cNvPicPr>
@@ -5110,7 +5268,7 @@
                 <a:ea typeface="Calibri" pitchFamily="34" charset="-122"/>
                 <a:cs typeface="Calibri" pitchFamily="34" charset="-120"/>
               </a:rPr>
-              <a:t>TASK 5 · RECOMMENDATIONS</a:t>
+              <a:t>TASK 4 · SEGMENTATION</a:t>
             </a:r>
             <a:endParaRPr lang="en-US" sz="1100" dirty="0"/>
           </a:p>
@@ -5152,7 +5310,7 @@
                 <a:ea typeface="Cambria" pitchFamily="34" charset="-122"/>
                 <a:cs typeface="Cambria" pitchFamily="34" charset="-120"/>
               </a:rPr>
-              <a:t>Prioritization &amp; the ethical rule</a:t>
+              <a:t>The four customer segments</a:t>
             </a:r>
             <a:endParaRPr lang="en-US" sz="2700" dirty="0"/>
           </a:p>
@@ -5166,8 +5324,8 @@
         </p:nvSpPr>
         <p:spPr>
           <a:xfrm>
-            <a:off x="457200" y="1600200"/>
-            <a:ext cx="5760720" cy="3200400"/>
+            <a:off x="457200" y="1463040"/>
+            <a:ext cx="11247120" cy="1508760"/>
           </a:xfrm>
           <a:prstGeom prst="rect">
             <a:avLst/>
@@ -5195,7 +5353,7 @@
                 <a:ea typeface="Calibri" pitchFamily="34" charset="-122"/>
                 <a:cs typeface="Calibri" pitchFamily="34" charset="-120"/>
               </a:rPr>
-              <a:t>Ranking (reach × driver): Budgeting → Alerts → Reminders → Products → Nudges → Education.</a:t>
+              <a:t>Financially Healthy &amp; Highly Engaged — 351 (35%): FHS 70.5, lowest util 0.148 → retain &amp; grow value.</a:t>
             </a:r>
             <a:endParaRPr lang="en-US" sz="1400" dirty="0"/>
           </a:p>
@@ -5216,7 +5374,7 @@
                 <a:ea typeface="Calibri" pitchFamily="34" charset="-122"/>
                 <a:cs typeface="Calibri" pitchFamily="34" charset="-120"/>
               </a:rPr>
-              <a:t>Lead with Budgeting + Alerts (the wellbeing mission); layer growth on top.</a:t>
+              <a:t>Financially Stretched but Highly Engaged — 302 (30%): highest spend/income 0.835, still engaged → the wellbeing priority.</a:t>
             </a:r>
             <a:endParaRPr lang="en-US" sz="1400" dirty="0"/>
           </a:p>
@@ -5237,28 +5395,7 @@
                 <a:ea typeface="Calibri" pitchFamily="34" charset="-122"/>
                 <a:cs typeface="Calibri" pitchFamily="34" charset="-120"/>
               </a:rPr>
-              <a:t>No double-counting: the 4 segments partition 999; crossover (43) &amp; distress (67) are overlays inside Segment 2.</a:t>
-            </a:r>
-            <a:endParaRPr lang="en-US" sz="1400" dirty="0"/>
-          </a:p>
-          <a:p>
-            <a:pPr marL="177800" indent="-177800">
-              <a:spcAft>
-                <a:spcPts val="800"/>
-              </a:spcAft>
-              <a:buSzPct val="100000"/>
-              <a:buChar char="•"/>
-            </a:pPr>
-            <a:r>
-              <a:rPr lang="en-US" sz="1400" dirty="0">
-                <a:solidFill>
-                  <a:srgbClr val="1B2A36"/>
-                </a:solidFill>
-                <a:latin typeface="Calibri" pitchFamily="34" charset="0"/>
-                <a:ea typeface="Calibri" pitchFamily="34" charset="-122"/>
-                <a:cs typeface="Calibri" pitchFamily="34" charset="-120"/>
-              </a:rPr>
-              <a:t>Fair by design: targeting on ratios, not demographics; monitor (don't use) a mild male skew.</a:t>
+              <a:t>High-Activity Digital Power Users — 258 (26%): most active &amp; volatile → monetise &amp; monitor drift.  ·  Low Engagement &amp; Emerging Digital — 88 (9%): near-dormant, 60% of spend via E-com/Mobile → activate.</a:t>
             </a:r>
             <a:endParaRPr lang="en-US" sz="1400" dirty="0"/>
           </a:p>
@@ -5266,7 +5403,7 @@
       </p:sp>
       <p:pic>
         <p:nvPicPr>
-          <p:cNvPr id="5" name="Image 0" descr="D:\BI10GroupYAPPERS\outputs\figures\t5_priority_ranking.png">    </p:cNvPr>
+          <p:cNvPr id="5" name="Image 0" descr="D:\BI10GroupYAPPERS\outputs\figures\t4_segment_sizes.png">    </p:cNvPr>
           <p:cNvPicPr>
             <a:picLocks noChangeAspect="1"/>
           </p:cNvPicPr>
@@ -5279,117 +5416,40 @@
         </p:blipFill>
         <p:spPr>
           <a:xfrm>
-            <a:off x="6446520" y="1554480"/>
-            <a:ext cx="5303520" cy="4206240"/>
+            <a:off x="502920" y="3063240"/>
+            <a:ext cx="5440680" cy="3200400"/>
           </a:xfrm>
           <a:prstGeom prst="rect">
             <a:avLst/>
           </a:prstGeom>
         </p:spPr>
       </p:pic>
-      <p:sp>
-        <p:nvSpPr>
-          <p:cNvPr id="6" name="Shape 3"/>
-          <p:cNvSpPr/>
-          <p:nvPr/>
-        </p:nvSpPr>
-        <p:spPr>
-          <a:xfrm>
-            <a:off x="457200" y="5029200"/>
-            <a:ext cx="3383280" cy="1097280"/>
-          </a:xfrm>
-          <a:prstGeom prst="roundRect">
-            <a:avLst>
-              <a:gd name="adj" fmla="val 6667"/>
-            </a:avLst>
-          </a:prstGeom>
-          <a:solidFill>
-            <a:srgbClr val="12435E"/>
-          </a:solidFill>
-          <a:ln/>
-        </p:spPr>
-      </p:sp>
-      <p:sp>
-        <p:nvSpPr>
-          <p:cNvPr id="7" name="Text 4"/>
-          <p:cNvSpPr txBox="1"/>
-          <p:nvPr/>
-        </p:nvSpPr>
-        <p:spPr>
-          <a:xfrm>
-            <a:off x="457200" y="5138928"/>
-            <a:ext cx="3383280" cy="658368"/>
-          </a:xfrm>
-          <a:prstGeom prst="rect">
-            <a:avLst/>
-          </a:prstGeom>
-          <a:noFill/>
-          <a:ln/>
-        </p:spPr>
-        <p:txBody>
-          <a:bodyPr wrap="square" lIns="0" tIns="0" rIns="0" bIns="0" rtlCol="0" anchor="ctr"/>
-          <a:lstStyle/>
-          <a:p>
-            <a:pPr algn="ctr" indent="0" marL="0">
-              <a:buNone/>
-            </a:pPr>
-            <a:r>
-              <a:rPr lang="en-US" sz="2800" b="1" dirty="0">
-                <a:solidFill>
-                  <a:srgbClr val="1FC3A6"/>
-                </a:solidFill>
-                <a:latin typeface="Cambria" pitchFamily="34" charset="0"/>
-                <a:ea typeface="Cambria" pitchFamily="34" charset="-122"/>
-                <a:cs typeface="Cambria" pitchFamily="34" charset="-120"/>
-              </a:rPr>
-              <a:t>NEVER</a:t>
-            </a:r>
-            <a:endParaRPr lang="en-US" sz="2800" dirty="0"/>
-          </a:p>
-        </p:txBody>
-      </p:sp>
-      <p:sp>
-        <p:nvSpPr>
-          <p:cNvPr id="8" name="Text 5"/>
-          <p:cNvSpPr txBox="1"/>
-          <p:nvPr/>
-        </p:nvSpPr>
-        <p:spPr>
-          <a:xfrm>
-            <a:off x="457200" y="5779008"/>
-            <a:ext cx="3383280" cy="320040"/>
-          </a:xfrm>
-          <a:prstGeom prst="rect">
-            <a:avLst/>
-          </a:prstGeom>
-          <a:noFill/>
-          <a:ln/>
-        </p:spPr>
-        <p:txBody>
-          <a:bodyPr wrap="square" lIns="0" tIns="0" rIns="0" bIns="0" rtlCol="0" anchor="ctr"/>
-          <a:lstStyle/>
-          <a:p>
-            <a:pPr algn="ctr" indent="0" marL="0">
-              <a:buNone/>
-            </a:pPr>
-            <a:r>
-              <a:rPr lang="en-US" sz="1100" dirty="0">
-                <a:solidFill>
-                  <a:srgbClr val="FFFFFF"/>
-                </a:solidFill>
-                <a:latin typeface="Calibri" pitchFamily="34" charset="0"/>
-                <a:ea typeface="Calibri" pitchFamily="34" charset="-122"/>
-                <a:cs typeface="Calibri" pitchFamily="34" charset="-120"/>
-              </a:rPr>
-              <a:t>FHS → credit decision</a:t>
-            </a:r>
-            <a:endParaRPr lang="en-US" sz="1100" dirty="0"/>
-          </a:p>
-        </p:txBody>
-      </p:sp>
-      <p:sp>
-        <p:nvSpPr>
-          <p:cNvPr id="9" name="Text 6"/>
+      <p:pic>
+        <p:nvPicPr>
+          <p:cNvPr id="6" name="Image 1" descr="D:\BI10GroupYAPPERS\outputs\figures\t4_segment_profiles.png">    </p:cNvPr>
+          <p:cNvPicPr>
+            <a:picLocks noChangeAspect="1"/>
+          </p:cNvPicPr>
+          <p:nvPr/>
+        </p:nvPicPr>
+        <p:blipFill>
+          <a:blip r:embed="rId2"/>
+          <a:srcRect l="0" r="0" t="0" b="0"/>
+          <a:stretch/>
+        </p:blipFill>
+        <p:spPr>
+          <a:xfrm>
+            <a:off x="6263640" y="3063240"/>
+            <a:ext cx="5440680" cy="3200400"/>
+          </a:xfrm>
+          <a:prstGeom prst="rect">
+            <a:avLst/>
+          </a:prstGeom>
+        </p:spPr>
+      </p:pic>
+      <p:sp>
+        <p:nvSpPr>
+          <p:cNvPr id="7" name="Text 3"/>
           <p:cNvSpPr txBox="1"/>
           <p:nvPr/>
         </p:nvSpPr>
@@ -5428,7 +5488,7 @@
       </p:sp>
       <p:sp>
         <p:nvSpPr>
-          <p:cNvPr id="10" name="Text 7"/>
+          <p:cNvPr id="8" name="Text 4"/>
           <p:cNvSpPr txBox="1"/>
           <p:nvPr/>
         </p:nvSpPr>
@@ -5479,7 +5539,7 @@
     <p:bg>
       <p:bgPr>
         <a:solidFill>
-          <a:srgbClr val="0F2A43"/>
+          <a:srgbClr val="FFFFFF"/>
         </a:solidFill>
       </p:bgPr>
     </p:bg>
@@ -5499,23 +5559,42 @@
       </p:grpSpPr>
       <p:sp>
         <p:nvSpPr>
-          <p:cNvPr id="2" name="Shape 0"/>
-          <p:cNvSpPr/>
-          <p:nvPr/>
-        </p:nvSpPr>
-        <p:spPr>
-          <a:xfrm>
-            <a:off x="0" y="0"/>
-            <a:ext cx="201168" cy="6858000"/>
-          </a:xfrm>
-          <a:prstGeom prst="rect">
-            <a:avLst/>
-          </a:prstGeom>
-          <a:solidFill>
-            <a:srgbClr val="1FC3A6"/>
-          </a:solidFill>
-          <a:ln/>
-        </p:spPr>
+          <p:cNvPr id="2" name="Text 0"/>
+          <p:cNvSpPr txBox="1"/>
+          <p:nvPr/>
+        </p:nvSpPr>
+        <p:spPr>
+          <a:xfrm>
+            <a:off x="457200" y="384048"/>
+            <a:ext cx="4114800" cy="292608"/>
+          </a:xfrm>
+          <a:prstGeom prst="rect">
+            <a:avLst/>
+          </a:prstGeom>
+          <a:noFill/>
+          <a:ln/>
+        </p:spPr>
+        <p:txBody>
+          <a:bodyPr wrap="square" lIns="0" tIns="0" rIns="0" bIns="0" rtlCol="0" anchor="ctr"/>
+          <a:lstStyle/>
+          <a:p>
+            <a:pPr indent="0" marL="0">
+              <a:buNone/>
+            </a:pPr>
+            <a:r>
+              <a:rPr lang="en-US" sz="1100" b="1" spc="200" kern="0" dirty="0">
+                <a:solidFill>
+                  <a:srgbClr val="058B8C"/>
+                </a:solidFill>
+                <a:latin typeface="Calibri" pitchFamily="34" charset="0"/>
+                <a:ea typeface="Calibri" pitchFamily="34" charset="-122"/>
+                <a:cs typeface="Calibri" pitchFamily="34" charset="-120"/>
+              </a:rPr>
+              <a:t>TASK 4 · SEGMENTATION</a:t>
+            </a:r>
+            <a:endParaRPr lang="en-US" sz="1100" dirty="0"/>
+          </a:p>
+        </p:txBody>
       </p:sp>
       <p:sp>
         <p:nvSpPr>
@@ -5525,94 +5604,225 @@
         </p:nvSpPr>
         <p:spPr>
           <a:xfrm>
-            <a:off x="822960" y="822960"/>
-            <a:ext cx="7315200" cy="365760"/>
-          </a:xfrm>
-          <a:prstGeom prst="rect">
-            <a:avLst/>
-          </a:prstGeom>
-          <a:noFill/>
-          <a:ln/>
-        </p:spPr>
-        <p:txBody>
-          <a:bodyPr wrap="square" lIns="0" tIns="0" rIns="0" bIns="0" rtlCol="0" anchor="ctr"/>
-          <a:lstStyle/>
-          <a:p>
-            <a:pPr indent="0" marL="0">
-              <a:buNone/>
-            </a:pPr>
-            <a:r>
-              <a:rPr lang="en-US" sz="1200" b="1" spc="300" kern="0" dirty="0">
-                <a:solidFill>
-                  <a:srgbClr val="1FC3A6"/>
-                </a:solidFill>
-                <a:latin typeface="Calibri" pitchFamily="34" charset="0"/>
-                <a:ea typeface="Calibri" pitchFamily="34" charset="-122"/>
-                <a:cs typeface="Calibri" pitchFamily="34" charset="-120"/>
-              </a:rPr>
-              <a:t>The contract</a:t>
-            </a:r>
-            <a:endParaRPr lang="en-US" sz="1200" dirty="0"/>
-          </a:p>
-        </p:txBody>
-      </p:sp>
-      <p:sp>
-        <p:nvSpPr>
-          <p:cNvPr id="4" name="Text 2"/>
-          <p:cNvSpPr txBox="1"/>
-          <p:nvPr/>
-        </p:nvSpPr>
-        <p:spPr>
-          <a:xfrm>
-            <a:off x="822960" y="1234440"/>
-            <a:ext cx="10607040" cy="1554480"/>
-          </a:xfrm>
-          <a:prstGeom prst="rect">
-            <a:avLst/>
-          </a:prstGeom>
-          <a:noFill/>
-          <a:ln/>
-        </p:spPr>
-        <p:txBody>
-          <a:bodyPr wrap="square" lIns="0" tIns="0" rIns="0" bIns="0" rtlCol="0" anchor="ctr"/>
+            <a:off x="457200" y="658368"/>
+            <a:ext cx="11247120" cy="868680"/>
+          </a:xfrm>
+          <a:prstGeom prst="rect">
+            <a:avLst/>
+          </a:prstGeom>
+          <a:noFill/>
+          <a:ln/>
+        </p:spPr>
+        <p:txBody>
+          <a:bodyPr wrap="square" lIns="0" tIns="0" rIns="0" bIns="0" rtlCol="0" anchor="t"/>
           <a:lstStyle/>
           <a:p>
             <a:pPr indent="0" marL="0">
               <a:lnSpc>
-                <a:spcPct val="105000"/>
+                <a:spcPct val="95000"/>
               </a:lnSpc>
               <a:buNone/>
             </a:pPr>
             <a:r>
-              <a:rPr lang="en-US" sz="2800" b="1" dirty="0">
-                <a:solidFill>
-                  <a:srgbClr val="FFFFFF"/>
+              <a:rPr lang="en-US" sz="2700" b="1" dirty="0">
+                <a:solidFill>
+                  <a:srgbClr val="12435E"/>
                 </a:solidFill>
                 <a:latin typeface="Cambria" pitchFamily="34" charset="0"/>
                 <a:ea typeface="Cambria" pitchFamily="34" charset="-122"/>
                 <a:cs typeface="Cambria" pitchFamily="34" charset="-120"/>
               </a:rPr>
-              <a:t>Grow the healthy, activate the dormant, protect the stretched —</a:t>
-            </a:r>
-            <a:endParaRPr lang="en-US" sz="2800" dirty="0"/>
-          </a:p>
-          <a:p>
-            <a:pPr indent="0" marL="0">
-              <a:lnSpc>
-                <a:spcPct val="105000"/>
-              </a:lnSpc>
+              <a:t>Validation: stable segments, and a December slide</a:t>
+            </a:r>
+            <a:endParaRPr lang="en-US" sz="2700" dirty="0"/>
+          </a:p>
+        </p:txBody>
+      </p:sp>
+      <p:sp>
+        <p:nvSpPr>
+          <p:cNvPr id="4" name="Text 2"/>
+          <p:cNvSpPr txBox="1"/>
+          <p:nvPr/>
+        </p:nvSpPr>
+        <p:spPr>
+          <a:xfrm>
+            <a:off x="457200" y="1600200"/>
+            <a:ext cx="5760720" cy="3200400"/>
+          </a:xfrm>
+          <a:prstGeom prst="rect">
+            <a:avLst/>
+          </a:prstGeom>
+          <a:noFill/>
+          <a:ln/>
+        </p:spPr>
+        <p:txBody>
+          <a:bodyPr wrap="square" rtlCol="0" anchor="t"/>
+          <a:lstStyle/>
+          <a:p>
+            <a:pPr marL="177800" indent="-177800">
+              <a:spcAft>
+                <a:spcPts val="800"/>
+              </a:spcAft>
+              <a:buSzPct val="100000"/>
+              <a:buChar char="•"/>
+            </a:pPr>
+            <a:r>
+              <a:rPr lang="en-US" sz="1400" dirty="0">
+                <a:solidFill>
+                  <a:srgbClr val="1B2A36"/>
+                </a:solidFill>
+                <a:latin typeface="Calibri" pitchFamily="34" charset="0"/>
+                <a:ea typeface="Calibri" pitchFamily="34" charset="-122"/>
+                <a:cs typeface="Calibri" pitchFamily="34" charset="-120"/>
+              </a:rPr>
+              <a:t>Stable: 20 random seeds → ARI 0.988; 80% bootstrap × 50 → ARI 0.911.</a:t>
+            </a:r>
+            <a:endParaRPr lang="en-US" sz="1400" dirty="0"/>
+          </a:p>
+          <a:p>
+            <a:pPr marL="177800" indent="-177800">
+              <a:spcAft>
+                <a:spcPts val="800"/>
+              </a:spcAft>
+              <a:buSzPct val="100000"/>
+              <a:buChar char="•"/>
+            </a:pPr>
+            <a:r>
+              <a:rPr lang="en-US" sz="1400" dirty="0">
+                <a:solidFill>
+                  <a:srgbClr val="1B2A36"/>
+                </a:solidFill>
+                <a:latin typeface="Calibri" pitchFamily="34" charset="0"/>
+                <a:ea typeface="Calibri" pitchFamily="34" charset="-122"/>
+                <a:cs typeface="Calibri" pitchFamily="34" charset="-120"/>
+              </a:rPr>
+              <a:t>GMM agrees only partly (ARI 0.26): Emerging Digital is identical, the three large segments form one continuum — hence silhouette 0.251.</a:t>
+            </a:r>
+            <a:endParaRPr lang="en-US" sz="1400" dirty="0"/>
+          </a:p>
+          <a:p>
+            <a:pPr marL="177800" indent="-177800">
+              <a:spcAft>
+                <a:spcPts val="800"/>
+              </a:spcAft>
+              <a:buSzPct val="100000"/>
+              <a:buChar char="•"/>
+            </a:pPr>
+            <a:r>
+              <a:rPr lang="en-US" sz="1400" dirty="0">
+                <a:solidFill>
+                  <a:srgbClr val="1B2A36"/>
+                </a:solidFill>
+                <a:latin typeface="Calibri" pitchFamily="34" charset="0"/>
+                <a:ea typeface="Calibri" pitchFamily="34" charset="-122"/>
+                <a:cs typeface="Calibri" pitchFamily="34" charset="-120"/>
+              </a:rPr>
+              <a:t>Monthly migration: a Healthy month slides to Stretched 23% of the time — but 72% from November to December.</a:t>
+            </a:r>
+            <a:endParaRPr lang="en-US" sz="1400" dirty="0"/>
+          </a:p>
+          <a:p>
+            <a:pPr marL="177800" indent="-177800">
+              <a:spcAft>
+                <a:spcPts val="800"/>
+              </a:spcAft>
+              <a:buSzPct val="100000"/>
+              <a:buChar char="•"/>
+            </a:pPr>
+            <a:r>
+              <a:rPr lang="en-US" sz="1400" dirty="0">
+                <a:solidFill>
+                  <a:srgbClr val="1B2A36"/>
+                </a:solidFill>
+                <a:latin typeface="Calibri" pitchFamily="34" charset="0"/>
+                <a:ea typeface="Calibri" pitchFamily="34" charset="-122"/>
+                <a:cs typeface="Calibri" pitchFamily="34" charset="-120"/>
+              </a:rPr>
+              <a:t>Segments correlate with age &amp; gender (p &lt; 0.01) though not used as inputs → trigger tools on behaviour only.</a:t>
+            </a:r>
+            <a:endParaRPr lang="en-US" sz="1400" dirty="0"/>
+          </a:p>
+        </p:txBody>
+      </p:sp>
+      <p:pic>
+        <p:nvPicPr>
+          <p:cNvPr id="5" name="Image 0" descr="D:\BI10GroupYAPPERS\outputs\figures\t4_pca.png">    </p:cNvPr>
+          <p:cNvPicPr>
+            <a:picLocks noChangeAspect="1"/>
+          </p:cNvPicPr>
+          <p:nvPr/>
+        </p:nvPicPr>
+        <p:blipFill>
+          <a:blip r:embed="rId1"/>
+          <a:srcRect l="0" r="0" t="0" b="0"/>
+          <a:stretch/>
+        </p:blipFill>
+        <p:spPr>
+          <a:xfrm>
+            <a:off x="6446520" y="1554480"/>
+            <a:ext cx="5303520" cy="4206240"/>
+          </a:xfrm>
+          <a:prstGeom prst="rect">
+            <a:avLst/>
+          </a:prstGeom>
+        </p:spPr>
+      </p:pic>
+      <p:sp>
+        <p:nvSpPr>
+          <p:cNvPr id="6" name="Shape 3"/>
+          <p:cNvSpPr/>
+          <p:nvPr/>
+        </p:nvSpPr>
+        <p:spPr>
+          <a:xfrm>
+            <a:off x="457200" y="5029200"/>
+            <a:ext cx="3383280" cy="1097280"/>
+          </a:xfrm>
+          <a:prstGeom prst="roundRect">
+            <a:avLst>
+              <a:gd name="adj" fmla="val 6667"/>
+            </a:avLst>
+          </a:prstGeom>
+          <a:solidFill>
+            <a:srgbClr val="12435E"/>
+          </a:solidFill>
+          <a:ln/>
+        </p:spPr>
+      </p:sp>
+      <p:sp>
+        <p:nvSpPr>
+          <p:cNvPr id="7" name="Text 4"/>
+          <p:cNvSpPr txBox="1"/>
+          <p:nvPr/>
+        </p:nvSpPr>
+        <p:spPr>
+          <a:xfrm>
+            <a:off x="457200" y="5138928"/>
+            <a:ext cx="3383280" cy="658368"/>
+          </a:xfrm>
+          <a:prstGeom prst="rect">
+            <a:avLst/>
+          </a:prstGeom>
+          <a:noFill/>
+          <a:ln/>
+        </p:spPr>
+        <p:txBody>
+          <a:bodyPr wrap="square" lIns="0" tIns="0" rIns="0" bIns="0" rtlCol="0" anchor="ctr"/>
+          <a:lstStyle/>
+          <a:p>
+            <a:pPr algn="ctr" indent="0" marL="0">
               <a:buNone/>
             </a:pPr>
             <a:r>
               <a:rPr lang="en-US" sz="2800" b="1" dirty="0">
                 <a:solidFill>
-                  <a:srgbClr val="FFFFFF"/>
+                  <a:srgbClr val="1FC3A6"/>
                 </a:solidFill>
                 <a:latin typeface="Cambria" pitchFamily="34" charset="0"/>
                 <a:ea typeface="Cambria" pitchFamily="34" charset="-122"/>
                 <a:cs typeface="Cambria" pitchFamily="34" charset="-120"/>
               </a:rPr>
-              <a:t>without ever touching their credit.</a:t>
+              <a:t>72%</a:t>
             </a:r>
             <a:endParaRPr lang="en-US" sz="2800" dirty="0"/>
           </a:p>
@@ -5620,14 +5830,202 @@
       </p:sp>
       <p:sp>
         <p:nvSpPr>
-          <p:cNvPr id="5" name="Text 3"/>
-          <p:cNvSpPr txBox="1"/>
-          <p:nvPr/>
-        </p:nvSpPr>
-        <p:spPr>
-          <a:xfrm>
-            <a:off x="822960" y="3063240"/>
-            <a:ext cx="2468880" cy="731520"/>
+          <p:cNvPr id="8" name="Text 5"/>
+          <p:cNvSpPr txBox="1"/>
+          <p:nvPr/>
+        </p:nvSpPr>
+        <p:spPr>
+          <a:xfrm>
+            <a:off x="457200" y="5779008"/>
+            <a:ext cx="3383280" cy="320040"/>
+          </a:xfrm>
+          <a:prstGeom prst="rect">
+            <a:avLst/>
+          </a:prstGeom>
+          <a:noFill/>
+          <a:ln/>
+        </p:spPr>
+        <p:txBody>
+          <a:bodyPr wrap="square" lIns="0" tIns="0" rIns="0" bIns="0" rtlCol="0" anchor="ctr"/>
+          <a:lstStyle/>
+          <a:p>
+            <a:pPr algn="ctr" indent="0" marL="0">
+              <a:buNone/>
+            </a:pPr>
+            <a:r>
+              <a:rPr lang="en-US" sz="1100" dirty="0">
+                <a:solidFill>
+                  <a:srgbClr val="FFFFFF"/>
+                </a:solidFill>
+                <a:latin typeface="Calibri" pitchFamily="34" charset="0"/>
+                <a:ea typeface="Calibri" pitchFamily="34" charset="-122"/>
+                <a:cs typeface="Calibri" pitchFamily="34" charset="-120"/>
+              </a:rPr>
+              <a:t>Healthy → Stretched, Nov → Dec</a:t>
+            </a:r>
+            <a:endParaRPr lang="en-US" sz="1100" dirty="0"/>
+          </a:p>
+        </p:txBody>
+      </p:sp>
+      <p:sp>
+        <p:nvSpPr>
+          <p:cNvPr id="9" name="Text 6"/>
+          <p:cNvSpPr txBox="1"/>
+          <p:nvPr/>
+        </p:nvSpPr>
+        <p:spPr>
+          <a:xfrm>
+            <a:off x="457200" y="6473952"/>
+            <a:ext cx="5486400" cy="274320"/>
+          </a:xfrm>
+          <a:prstGeom prst="rect">
+            <a:avLst/>
+          </a:prstGeom>
+          <a:noFill/>
+          <a:ln/>
+        </p:spPr>
+        <p:txBody>
+          <a:bodyPr wrap="square" lIns="0" tIns="0" rIns="0" bIns="0" rtlCol="0" anchor="ctr"/>
+          <a:lstStyle/>
+          <a:p>
+            <a:pPr indent="0" marL="0">
+              <a:buNone/>
+            </a:pPr>
+            <a:r>
+              <a:rPr lang="en-US" sz="900" dirty="0">
+                <a:solidFill>
+                  <a:srgbClr val="5F7180"/>
+                </a:solidFill>
+                <a:latin typeface="Calibri" pitchFamily="34" charset="0"/>
+                <a:ea typeface="Calibri" pitchFamily="34" charset="-122"/>
+                <a:cs typeface="Calibri" pitchFamily="34" charset="-120"/>
+              </a:rPr>
+              <a:t>Group YAPPERS · BI10 Round 01</a:t>
+            </a:r>
+            <a:endParaRPr lang="en-US" sz="900" dirty="0"/>
+          </a:p>
+        </p:txBody>
+      </p:sp>
+      <p:sp>
+        <p:nvSpPr>
+          <p:cNvPr id="10" name="Text 7"/>
+          <p:cNvSpPr txBox="1"/>
+          <p:nvPr/>
+        </p:nvSpPr>
+        <p:spPr>
+          <a:xfrm>
+            <a:off x="11430000" y="6473952"/>
+            <a:ext cx="457200" cy="274320"/>
+          </a:xfrm>
+          <a:prstGeom prst="rect">
+            <a:avLst/>
+          </a:prstGeom>
+          <a:noFill/>
+          <a:ln/>
+        </p:spPr>
+        <p:txBody>
+          <a:bodyPr wrap="square" lIns="0" tIns="0" rIns="0" bIns="0" rtlCol="0" anchor="ctr"/>
+          <a:lstStyle/>
+          <a:p>
+            <a:pPr algn="r" indent="0" marL="0">
+              <a:buNone/>
+            </a:pPr>
+            <a:r>
+              <a:rPr lang="en-US" sz="900" dirty="0">
+                <a:solidFill>
+                  <a:srgbClr val="5F7180"/>
+                </a:solidFill>
+                <a:latin typeface="Calibri" pitchFamily="34" charset="0"/>
+                <a:ea typeface="Calibri" pitchFamily="34" charset="-122"/>
+                <a:cs typeface="Calibri" pitchFamily="34" charset="-120"/>
+              </a:rPr>
+              <a:t>18</a:t>
+            </a:r>
+            <a:endParaRPr lang="en-US" sz="900" dirty="0"/>
+          </a:p>
+        </p:txBody>
+      </p:sp>
+    </p:spTree>
+  </p:cSld>
+  <p:clrMapOvr>
+    <a:masterClrMapping/>
+  </p:clrMapOvr>
+</p:sld>
+</file>
+
+<file path=ppt/slides/slide19.xml><?xml version="1.0" encoding="utf-8"?>
+<p:sld xmlns:a="http://schemas.openxmlformats.org/drawingml/2006/main" xmlns:r="http://schemas.openxmlformats.org/officeDocument/2006/relationships" xmlns:p="http://schemas.openxmlformats.org/presentationml/2006/main">
+  <p:cSld name="Slide 19">
+    <p:bg>
+      <p:bgPr>
+        <a:solidFill>
+          <a:srgbClr val="FFFFFF"/>
+        </a:solidFill>
+      </p:bgPr>
+    </p:bg>
+    <p:spTree>
+      <p:nvGrpSpPr>
+        <p:cNvPr id="1" name=""/>
+        <p:cNvGrpSpPr/>
+        <p:nvPr/>
+      </p:nvGrpSpPr>
+      <p:grpSpPr>
+        <a:xfrm>
+          <a:off x="0" y="0"/>
+          <a:ext cx="0" cy="0"/>
+          <a:chOff x="0" y="0"/>
+          <a:chExt cx="0" cy="0"/>
+        </a:xfrm>
+      </p:grpSpPr>
+      <p:sp>
+        <p:nvSpPr>
+          <p:cNvPr id="2" name="Text 0"/>
+          <p:cNvSpPr txBox="1"/>
+          <p:nvPr/>
+        </p:nvSpPr>
+        <p:spPr>
+          <a:xfrm>
+            <a:off x="457200" y="384048"/>
+            <a:ext cx="4114800" cy="292608"/>
+          </a:xfrm>
+          <a:prstGeom prst="rect">
+            <a:avLst/>
+          </a:prstGeom>
+          <a:noFill/>
+          <a:ln/>
+        </p:spPr>
+        <p:txBody>
+          <a:bodyPr wrap="square" lIns="0" tIns="0" rIns="0" bIns="0" rtlCol="0" anchor="ctr"/>
+          <a:lstStyle/>
+          <a:p>
+            <a:pPr indent="0" marL="0">
+              <a:buNone/>
+            </a:pPr>
+            <a:r>
+              <a:rPr lang="en-US" sz="1100" b="1" spc="200" kern="0" dirty="0">
+                <a:solidFill>
+                  <a:srgbClr val="058B8C"/>
+                </a:solidFill>
+                <a:latin typeface="Calibri" pitchFamily="34" charset="0"/>
+                <a:ea typeface="Calibri" pitchFamily="34" charset="-122"/>
+                <a:cs typeface="Calibri" pitchFamily="34" charset="-120"/>
+              </a:rPr>
+              <a:t>TASK 5 · RECOMMENDATIONS</a:t>
+            </a:r>
+            <a:endParaRPr lang="en-US" sz="1100" dirty="0"/>
+          </a:p>
+        </p:txBody>
+      </p:sp>
+      <p:sp>
+        <p:nvSpPr>
+          <p:cNvPr id="3" name="Text 1"/>
+          <p:cNvSpPr txBox="1"/>
+          <p:nvPr/>
+        </p:nvSpPr>
+        <p:spPr>
+          <a:xfrm>
+            <a:off x="457200" y="658368"/>
+            <a:ext cx="11247120" cy="868680"/>
           </a:xfrm>
           <a:prstGeom prst="rect">
             <a:avLst/>
@@ -5640,306 +6038,246 @@
           <a:lstStyle/>
           <a:p>
             <a:pPr indent="0" marL="0">
-              <a:buNone/>
-            </a:pPr>
-            <a:r>
-              <a:rPr lang="en-US" sz="1400" b="1" dirty="0">
-                <a:solidFill>
-                  <a:srgbClr val="1FC3A6"/>
-                </a:solidFill>
-                <a:latin typeface="Calibri" pitchFamily="34" charset="0"/>
-                <a:ea typeface="Calibri" pitchFamily="34" charset="-122"/>
-                <a:cs typeface="Calibri" pitchFamily="34" charset="-120"/>
-              </a:rPr>
-              <a:t>The spine</a:t>
+              <a:lnSpc>
+                <a:spcPct val="95000"/>
+              </a:lnSpc>
+              <a:buNone/>
+            </a:pPr>
+            <a:r>
+              <a:rPr lang="en-US" sz="2700" b="1" dirty="0">
+                <a:solidFill>
+                  <a:srgbClr val="12435E"/>
+                </a:solidFill>
+                <a:latin typeface="Cambria" pitchFamily="34" charset="0"/>
+                <a:ea typeface="Cambria" pitchFamily="34" charset="-122"/>
+                <a:cs typeface="Cambria" pitchFamily="34" charset="-120"/>
+              </a:rPr>
+              <a:t>A six-tool, non-punitive action plan</a:t>
+            </a:r>
+            <a:endParaRPr lang="en-US" sz="2700" dirty="0"/>
+          </a:p>
+        </p:txBody>
+      </p:sp>
+      <p:sp>
+        <p:nvSpPr>
+          <p:cNvPr id="4" name="Text 2"/>
+          <p:cNvSpPr txBox="1"/>
+          <p:nvPr/>
+        </p:nvSpPr>
+        <p:spPr>
+          <a:xfrm>
+            <a:off x="457200" y="1600200"/>
+            <a:ext cx="5760720" cy="3200400"/>
+          </a:xfrm>
+          <a:prstGeom prst="rect">
+            <a:avLst/>
+          </a:prstGeom>
+          <a:noFill/>
+          <a:ln/>
+        </p:spPr>
+        <p:txBody>
+          <a:bodyPr wrap="square" rtlCol="0" anchor="t"/>
+          <a:lstStyle/>
+          <a:p>
+            <a:pPr marL="177800" indent="-177800">
+              <a:spcAft>
+                <a:spcPts val="800"/>
+              </a:spcAft>
+              <a:buSzPct val="100000"/>
+              <a:buChar char="•"/>
+            </a:pPr>
+            <a:r>
+              <a:rPr lang="en-US" sz="1400" dirty="0">
+                <a:solidFill>
+                  <a:srgbClr val="1B2A36"/>
+                </a:solidFill>
+                <a:latin typeface="Calibri" pitchFamily="34" charset="0"/>
+                <a:ea typeface="Calibri" pitchFamily="34" charset="-122"/>
+                <a:cs typeface="Calibri" pitchFamily="34" charset="-120"/>
+              </a:rPr>
+              <a:t>① Budgeting → Stretched-Engaged (302): spend-vs-income dashboard (driver −0.90).</a:t>
             </a:r>
             <a:endParaRPr lang="en-US" sz="1400" dirty="0"/>
           </a:p>
-        </p:txBody>
-      </p:sp>
-      <p:sp>
-        <p:nvSpPr>
-          <p:cNvPr id="6" name="Text 4"/>
-          <p:cNvSpPr txBox="1"/>
-          <p:nvPr/>
-        </p:nvSpPr>
-        <p:spPr>
-          <a:xfrm>
-            <a:off x="3383280" y="3063240"/>
-            <a:ext cx="8046720" cy="731520"/>
-          </a:xfrm>
-          <a:prstGeom prst="rect">
-            <a:avLst/>
-          </a:prstGeom>
-          <a:noFill/>
-          <a:ln/>
-        </p:spPr>
-        <p:txBody>
-          <a:bodyPr wrap="square" lIns="0" tIns="0" rIns="0" bIns="0" rtlCol="0" anchor="t"/>
+          <a:p>
+            <a:pPr marL="177800" indent="-177800">
+              <a:spcAft>
+                <a:spcPts val="800"/>
+              </a:spcAft>
+              <a:buSzPct val="100000"/>
+              <a:buChar char="•"/>
+            </a:pPr>
+            <a:r>
+              <a:rPr lang="en-US" sz="1400" dirty="0">
+                <a:solidFill>
+                  <a:srgbClr val="1B2A36"/>
+                </a:solidFill>
+                <a:latin typeface="Calibri" pitchFamily="34" charset="0"/>
+                <a:ea typeface="Calibri" pitchFamily="34" charset="-122"/>
+                <a:cs typeface="Calibri" pitchFamily="34" charset="-120"/>
+              </a:rPr>
+              <a:t>② Spend alerts → Crossover (43 = 52% of stress): Sunday–Monday evenings, before 22:00.</a:t>
+            </a:r>
+            <a:endParaRPr lang="en-US" sz="1400" dirty="0"/>
+          </a:p>
+          <a:p>
+            <a:pPr marL="177800" indent="-177800">
+              <a:spcAft>
+                <a:spcPts val="800"/>
+              </a:spcAft>
+              <a:buSzPct val="100000"/>
+              <a:buChar char="•"/>
+            </a:pPr>
+            <a:r>
+              <a:rPr lang="en-US" sz="1400" dirty="0">
+                <a:solidFill>
+                  <a:srgbClr val="1B2A36"/>
+                </a:solidFill>
+                <a:latin typeface="Calibri" pitchFamily="34" charset="0"/>
+                <a:ea typeface="Calibri" pitchFamily="34" charset="-122"/>
+                <a:cs typeface="Calibri" pitchFamily="34" charset="-120"/>
+              </a:rPr>
+              <a:t>③ Planning reminders → Power Users (258) + Healthy (351) in November, before the 72% December slide.</a:t>
+            </a:r>
+            <a:endParaRPr lang="en-US" sz="1400" dirty="0"/>
+          </a:p>
+          <a:p>
+            <a:pPr marL="177800" indent="-177800">
+              <a:spcAft>
+                <a:spcPts val="800"/>
+              </a:spcAft>
+              <a:buSzPct val="100000"/>
+              <a:buChar char="•"/>
+            </a:pPr>
+            <a:r>
+              <a:rPr lang="en-US" sz="1400" dirty="0">
+                <a:solidFill>
+                  <a:srgbClr val="1B2A36"/>
+                </a:solidFill>
+                <a:latin typeface="Calibri" pitchFamily="34" charset="0"/>
+                <a:ea typeface="Calibri" pitchFamily="34" charset="-122"/>
+                <a:cs typeface="Calibri" pitchFamily="34" charset="-120"/>
+              </a:rPr>
+              <a:t>④ Education → Distress tail (67): needs-vs-wants modules (essential ratio +0.48).</a:t>
+            </a:r>
+            <a:endParaRPr lang="en-US" sz="1400" dirty="0"/>
+          </a:p>
+          <a:p>
+            <a:pPr marL="177800" indent="-177800">
+              <a:spcAft>
+                <a:spcPts val="800"/>
+              </a:spcAft>
+              <a:buSzPct val="100000"/>
+              <a:buChar char="•"/>
+            </a:pPr>
+            <a:r>
+              <a:rPr lang="en-US" sz="1400" dirty="0">
+                <a:solidFill>
+                  <a:srgbClr val="1B2A36"/>
+                </a:solidFill>
+                <a:latin typeface="Calibri" pitchFamily="34" charset="0"/>
+                <a:ea typeface="Calibri" pitchFamily="34" charset="-122"/>
+                <a:cs typeface="Calibri" pitchFamily="34" charset="-120"/>
+              </a:rPr>
+              <a:t>⑤ Digital nudges → Emerging Digital (88): in-app habit loops — they already spend 60% via E-com/Mobile.</a:t>
+            </a:r>
+            <a:endParaRPr lang="en-US" sz="1400" dirty="0"/>
+          </a:p>
+          <a:p>
+            <a:pPr marL="177800" indent="-177800">
+              <a:spcAft>
+                <a:spcPts val="800"/>
+              </a:spcAft>
+              <a:buSzPct val="100000"/>
+              <a:buChar char="•"/>
+            </a:pPr>
+            <a:r>
+              <a:rPr lang="en-US" sz="1400" dirty="0">
+                <a:solidFill>
+                  <a:srgbClr val="1B2A36"/>
+                </a:solidFill>
+                <a:latin typeface="Calibri" pitchFamily="34" charset="0"/>
+                <a:ea typeface="Calibri" pitchFamily="34" charset="-122"/>
+                <a:cs typeface="Calibri" pitchFamily="34" charset="-120"/>
+              </a:rPr>
+              <a:t>⑥ Product suggestions → Healthy-Engaged (351): savings/loyalty, opt-in, never auto-extend.</a:t>
+            </a:r>
+            <a:endParaRPr lang="en-US" sz="1400" dirty="0"/>
+          </a:p>
+        </p:txBody>
+      </p:sp>
+      <p:pic>
+        <p:nvPicPr>
+          <p:cNvPr id="5" name="Image 0" descr="D:\BI10GroupYAPPERS\outputs\figures\t5_target_sizes.png">    </p:cNvPr>
+          <p:cNvPicPr>
+            <a:picLocks noChangeAspect="1"/>
+          </p:cNvPicPr>
+          <p:nvPr/>
+        </p:nvPicPr>
+        <p:blipFill>
+          <a:blip r:embed="rId1"/>
+          <a:srcRect l="0" r="0" t="0" b="0"/>
+          <a:stretch/>
+        </p:blipFill>
+        <p:spPr>
+          <a:xfrm>
+            <a:off x="6446520" y="1554480"/>
+            <a:ext cx="5303520" cy="4206240"/>
+          </a:xfrm>
+          <a:prstGeom prst="rect">
+            <a:avLst/>
+          </a:prstGeom>
+        </p:spPr>
+      </p:pic>
+      <p:sp>
+        <p:nvSpPr>
+          <p:cNvPr id="6" name="Text 3"/>
+          <p:cNvSpPr txBox="1"/>
+          <p:nvPr/>
+        </p:nvSpPr>
+        <p:spPr>
+          <a:xfrm>
+            <a:off x="457200" y="6473952"/>
+            <a:ext cx="5486400" cy="274320"/>
+          </a:xfrm>
+          <a:prstGeom prst="rect">
+            <a:avLst/>
+          </a:prstGeom>
+          <a:noFill/>
+          <a:ln/>
+        </p:spPr>
+        <p:txBody>
+          <a:bodyPr wrap="square" lIns="0" tIns="0" rIns="0" bIns="0" rtlCol="0" anchor="ctr"/>
           <a:lstStyle/>
           <a:p>
             <a:pPr indent="0" marL="0">
               <a:buNone/>
             </a:pPr>
             <a:r>
-              <a:rPr lang="en-US" sz="1300" dirty="0">
-                <a:solidFill>
-                  <a:srgbClr val="DCEAEC"/>
-                </a:solidFill>
-                <a:latin typeface="Calibri" pitchFamily="34" charset="0"/>
-                <a:ea typeface="Calibri" pitchFamily="34" charset="-122"/>
-                <a:cs typeface="Calibri" pitchFamily="34" charset="-120"/>
-              </a:rPr>
-              <a:t>Overspend drives poor health; the budget inverts under stress; stress is episodic, striking the most engaged.</a:t>
-            </a:r>
-            <a:endParaRPr lang="en-US" sz="1300" dirty="0"/>
-          </a:p>
-        </p:txBody>
-      </p:sp>
-      <p:sp>
-        <p:nvSpPr>
-          <p:cNvPr id="7" name="Text 5"/>
-          <p:cNvSpPr txBox="1"/>
-          <p:nvPr/>
-        </p:nvSpPr>
-        <p:spPr>
-          <a:xfrm>
-            <a:off x="822960" y="3849624"/>
-            <a:ext cx="2468880" cy="731520"/>
-          </a:xfrm>
-          <a:prstGeom prst="rect">
-            <a:avLst/>
-          </a:prstGeom>
-          <a:noFill/>
-          <a:ln/>
-        </p:spPr>
-        <p:txBody>
-          <a:bodyPr wrap="square" lIns="0" tIns="0" rIns="0" bIns="0" rtlCol="0" anchor="t"/>
-          <a:lstStyle/>
-          <a:p>
-            <a:pPr indent="0" marL="0">
-              <a:buNone/>
-            </a:pPr>
-            <a:r>
-              <a:rPr lang="en-US" sz="1400" b="1" dirty="0">
-                <a:solidFill>
-                  <a:srgbClr val="1FC3A6"/>
-                </a:solidFill>
-                <a:latin typeface="Calibri" pitchFamily="34" charset="0"/>
-                <a:ea typeface="Calibri" pitchFamily="34" charset="-122"/>
-                <a:cs typeface="Calibri" pitchFamily="34" charset="-120"/>
-              </a:rPr>
-              <a:t>The payoff</a:t>
-            </a:r>
-            <a:endParaRPr lang="en-US" sz="1400" dirty="0"/>
-          </a:p>
-        </p:txBody>
-      </p:sp>
-      <p:sp>
-        <p:nvSpPr>
-          <p:cNvPr id="8" name="Text 6"/>
-          <p:cNvSpPr txBox="1"/>
-          <p:nvPr/>
-        </p:nvSpPr>
-        <p:spPr>
-          <a:xfrm>
-            <a:off x="3383280" y="3849624"/>
-            <a:ext cx="8046720" cy="731520"/>
-          </a:xfrm>
-          <a:prstGeom prst="rect">
-            <a:avLst/>
-          </a:prstGeom>
-          <a:noFill/>
-          <a:ln/>
-        </p:spPr>
-        <p:txBody>
-          <a:bodyPr wrap="square" lIns="0" tIns="0" rIns="0" bIns="0" rtlCol="0" anchor="t"/>
-          <a:lstStyle/>
-          <a:p>
-            <a:pPr indent="0" marL="0">
-              <a:buNone/>
-            </a:pPr>
-            <a:r>
-              <a:rPr lang="en-US" sz="1300" dirty="0">
-                <a:solidFill>
-                  <a:srgbClr val="DCEAEC"/>
-                </a:solidFill>
-                <a:latin typeface="Calibri" pitchFamily="34" charset="0"/>
-                <a:ea typeface="Calibri" pitchFamily="34" charset="-122"/>
-                <a:cs typeface="Calibri" pitchFamily="34" charset="-120"/>
-              </a:rPr>
-              <a:t>4 clean segments (351/302/258/88) and a 6-tool plan reaching every customer with the right non-punitive touch.</a:t>
-            </a:r>
-            <a:endParaRPr lang="en-US" sz="1300" dirty="0"/>
-          </a:p>
-        </p:txBody>
-      </p:sp>
-      <p:sp>
-        <p:nvSpPr>
-          <p:cNvPr id="9" name="Text 7"/>
-          <p:cNvSpPr txBox="1"/>
-          <p:nvPr/>
-        </p:nvSpPr>
-        <p:spPr>
-          <a:xfrm>
-            <a:off x="822960" y="4636008"/>
-            <a:ext cx="2468880" cy="731520"/>
-          </a:xfrm>
-          <a:prstGeom prst="rect">
-            <a:avLst/>
-          </a:prstGeom>
-          <a:noFill/>
-          <a:ln/>
-        </p:spPr>
-        <p:txBody>
-          <a:bodyPr wrap="square" lIns="0" tIns="0" rIns="0" bIns="0" rtlCol="0" anchor="t"/>
-          <a:lstStyle/>
-          <a:p>
-            <a:pPr indent="0" marL="0">
-              <a:buNone/>
-            </a:pPr>
-            <a:r>
-              <a:rPr lang="en-US" sz="1400" b="1" dirty="0">
-                <a:solidFill>
-                  <a:srgbClr val="1FC3A6"/>
-                </a:solidFill>
-                <a:latin typeface="Calibri" pitchFamily="34" charset="0"/>
-                <a:ea typeface="Calibri" pitchFamily="34" charset="-122"/>
-                <a:cs typeface="Calibri" pitchFamily="34" charset="-120"/>
-              </a:rPr>
-              <a:t>Lead action</a:t>
-            </a:r>
-            <a:endParaRPr lang="en-US" sz="1400" dirty="0"/>
-          </a:p>
-        </p:txBody>
-      </p:sp>
-      <p:sp>
-        <p:nvSpPr>
-          <p:cNvPr id="10" name="Text 8"/>
-          <p:cNvSpPr txBox="1"/>
-          <p:nvPr/>
-        </p:nvSpPr>
-        <p:spPr>
-          <a:xfrm>
-            <a:off x="3383280" y="4636008"/>
-            <a:ext cx="8046720" cy="731520"/>
-          </a:xfrm>
-          <a:prstGeom prst="rect">
-            <a:avLst/>
-          </a:prstGeom>
-          <a:noFill/>
-          <a:ln/>
-        </p:spPr>
-        <p:txBody>
-          <a:bodyPr wrap="square" lIns="0" tIns="0" rIns="0" bIns="0" rtlCol="0" anchor="t"/>
-          <a:lstStyle/>
-          <a:p>
-            <a:pPr indent="0" marL="0">
-              <a:buNone/>
-            </a:pPr>
-            <a:r>
-              <a:rPr lang="en-US" sz="1300" dirty="0">
-                <a:solidFill>
-                  <a:srgbClr val="DCEAEC"/>
-                </a:solidFill>
-                <a:latin typeface="Calibri" pitchFamily="34" charset="0"/>
-                <a:ea typeface="Calibri" pitchFamily="34" charset="-122"/>
-                <a:cs typeface="Calibri" pitchFamily="34" charset="-120"/>
-              </a:rPr>
-              <a:t>Budgeting for 302 + real-time Alerts catching 52% of all stress — highest reach × strongest driver, near-zero cost.</a:t>
-            </a:r>
-            <a:endParaRPr lang="en-US" sz="1300" dirty="0"/>
-          </a:p>
-        </p:txBody>
-      </p:sp>
-      <p:sp>
-        <p:nvSpPr>
-          <p:cNvPr id="11" name="Text 9"/>
-          <p:cNvSpPr txBox="1"/>
-          <p:nvPr/>
-        </p:nvSpPr>
-        <p:spPr>
-          <a:xfrm>
-            <a:off x="822960" y="5422392"/>
-            <a:ext cx="2468880" cy="731520"/>
-          </a:xfrm>
-          <a:prstGeom prst="rect">
-            <a:avLst/>
-          </a:prstGeom>
-          <a:noFill/>
-          <a:ln/>
-        </p:spPr>
-        <p:txBody>
-          <a:bodyPr wrap="square" lIns="0" tIns="0" rIns="0" bIns="0" rtlCol="0" anchor="t"/>
-          <a:lstStyle/>
-          <a:p>
-            <a:pPr indent="0" marL="0">
-              <a:buNone/>
-            </a:pPr>
-            <a:r>
-              <a:rPr lang="en-US" sz="1400" b="1" dirty="0">
-                <a:solidFill>
-                  <a:srgbClr val="1FC3A6"/>
-                </a:solidFill>
-                <a:latin typeface="Calibri" pitchFamily="34" charset="0"/>
-                <a:ea typeface="Calibri" pitchFamily="34" charset="-122"/>
-                <a:cs typeface="Calibri" pitchFamily="34" charset="-120"/>
-              </a:rPr>
-              <a:t>Honest limits</a:t>
-            </a:r>
-            <a:endParaRPr lang="en-US" sz="1400" dirty="0"/>
-          </a:p>
-        </p:txBody>
-      </p:sp>
-      <p:sp>
-        <p:nvSpPr>
-          <p:cNvPr id="12" name="Text 10"/>
-          <p:cNvSpPr txBox="1"/>
-          <p:nvPr/>
-        </p:nvSpPr>
-        <p:spPr>
-          <a:xfrm>
-            <a:off x="3383280" y="5422392"/>
-            <a:ext cx="8046720" cy="731520"/>
-          </a:xfrm>
-          <a:prstGeom prst="rect">
-            <a:avLst/>
-          </a:prstGeom>
-          <a:noFill/>
-          <a:ln/>
-        </p:spPr>
-        <p:txBody>
-          <a:bodyPr wrap="square" lIns="0" tIns="0" rIns="0" bIns="0" rtlCol="0" anchor="t"/>
-          <a:lstStyle/>
-          <a:p>
-            <a:pPr indent="0" marL="0">
-              <a:buNone/>
-            </a:pPr>
-            <a:r>
-              <a:rPr lang="en-US" sz="1300" dirty="0">
-                <a:solidFill>
-                  <a:srgbClr val="DCEAEC"/>
-                </a:solidFill>
-                <a:latin typeface="Calibri" pitchFamily="34" charset="0"/>
-                <a:ea typeface="Calibri" pitchFamily="34" charset="-122"/>
-                <a:cs typeface="Calibri" pitchFamily="34" charset="-120"/>
-              </a:rPr>
-              <a:t>Synthetic single-year data, flat geography/age, engineered engagement — sizes directional, conclusions robust on ratios.</a:t>
-            </a:r>
-            <a:endParaRPr lang="en-US" sz="1300" dirty="0"/>
-          </a:p>
-        </p:txBody>
-      </p:sp>
-      <p:sp>
-        <p:nvSpPr>
-          <p:cNvPr id="13" name="Text 11"/>
-          <p:cNvSpPr txBox="1"/>
-          <p:nvPr/>
-        </p:nvSpPr>
-        <p:spPr>
-          <a:xfrm>
-            <a:off x="822960" y="6263640"/>
-            <a:ext cx="10607040" cy="365760"/>
+              <a:rPr lang="en-US" sz="900" dirty="0">
+                <a:solidFill>
+                  <a:srgbClr val="5F7180"/>
+                </a:solidFill>
+                <a:latin typeface="Calibri" pitchFamily="34" charset="0"/>
+                <a:ea typeface="Calibri" pitchFamily="34" charset="-122"/>
+                <a:cs typeface="Calibri" pitchFamily="34" charset="-120"/>
+              </a:rPr>
+              <a:t>Group YAPPERS · BI10 Round 01</a:t>
+            </a:r>
+            <a:endParaRPr lang="en-US" sz="900" dirty="0"/>
+          </a:p>
+        </p:txBody>
+      </p:sp>
+      <p:sp>
+        <p:nvSpPr>
+          <p:cNvPr id="7" name="Text 4"/>
+          <p:cNvSpPr txBox="1"/>
+          <p:nvPr/>
+        </p:nvSpPr>
+        <p:spPr>
+          <a:xfrm>
+            <a:off x="11430000" y="6473952"/>
+            <a:ext cx="457200" cy="274320"/>
           </a:xfrm>
           <a:prstGeom prst="rect">
             <a:avLst/>
@@ -5951,21 +6289,21 @@
           <a:bodyPr wrap="square" lIns="0" tIns="0" rIns="0" bIns="0" rtlCol="0" anchor="ctr"/>
           <a:lstStyle/>
           <a:p>
-            <a:pPr indent="0" marL="0">
-              <a:buNone/>
-            </a:pPr>
-            <a:r>
-              <a:rPr lang="en-US" sz="1300" b="1" i="1" dirty="0">
-                <a:solidFill>
-                  <a:srgbClr val="1FC3A6"/>
-                </a:solidFill>
-                <a:latin typeface="Calibri" pitchFamily="34" charset="0"/>
-                <a:ea typeface="Calibri" pitchFamily="34" charset="-122"/>
-                <a:cs typeface="Calibri" pitchFamily="34" charset="-120"/>
-              </a:rPr>
-              <a:t>One guarantee: wellbeing help, never a credit decision.</a:t>
-            </a:r>
-            <a:endParaRPr lang="en-US" sz="1300" dirty="0"/>
+            <a:pPr algn="r" indent="0" marL="0">
+              <a:buNone/>
+            </a:pPr>
+            <a:r>
+              <a:rPr lang="en-US" sz="900" dirty="0">
+                <a:solidFill>
+                  <a:srgbClr val="5F7180"/>
+                </a:solidFill>
+                <a:latin typeface="Calibri" pitchFamily="34" charset="0"/>
+                <a:ea typeface="Calibri" pitchFamily="34" charset="-122"/>
+                <a:cs typeface="Calibri" pitchFamily="34" charset="-120"/>
+              </a:rPr>
+              <a:t>19</a:t>
+            </a:r>
+            <a:endParaRPr lang="en-US" sz="900" dirty="0"/>
           </a:p>
         </p:txBody>
       </p:sp>
@@ -6307,7 +6645,7 @@
                 <a:ea typeface="Calibri" pitchFamily="34" charset="-122"/>
                 <a:cs typeface="Calibri" pitchFamily="34" charset="-120"/>
               </a:rPr>
-              <a:t>0 of 999 chronically stressed; the crossover = 43 consumers = 52% of ALL stress episodes.</a:t>
+              <a:t>0 of 999 chronically stressed; the crossover = 43 consumers = 52% of ALL stress episodes; 72% of Healthy→Stretched slides happen Nov→Dec.</a:t>
             </a:r>
             <a:endParaRPr lang="en-US" sz="1350" dirty="0"/>
           </a:p>
@@ -6346,7 +6684,7 @@
                 <a:ea typeface="Calibri" pitchFamily="34" charset="-122"/>
                 <a:cs typeface="Calibri" pitchFamily="34" charset="-120"/>
               </a:rPr>
-              <a:t>Four actionable segments</a:t>
+              <a:t>Four stable segments</a:t>
             </a:r>
             <a:endParaRPr lang="en-US" sz="1500" dirty="0"/>
           </a:p>
@@ -6385,7 +6723,7 @@
                 <a:ea typeface="Calibri" pitchFamily="34" charset="-122"/>
                 <a:cs typeface="Calibri" pitchFamily="34" charset="-120"/>
               </a:rPr>
-              <a:t>k-means (k=4), 999/999 covered — sizes 351 / 302 / 258 / 88.</a:t>
+              <a:t>k-means (k=4), 999/999 covered — sizes 351 / 302 / 258 / 88; stable across seeds (ARI 0.99).</a:t>
             </a:r>
             <a:endParaRPr lang="en-US" sz="1350" dirty="0"/>
           </a:p>
@@ -6463,9 +6801,1371 @@
                 <a:ea typeface="Calibri" pitchFamily="34" charset="-122"/>
                 <a:cs typeface="Calibri" pitchFamily="34" charset="-120"/>
               </a:rPr>
-              <a:t>lead with Budgeting (302) + in-app Spend Alerts (43); FHS never denies, cuts, or blocks credit.</a:t>
+              <a:t>lead with Budgeting (302) + Spend Alerts (43, Sun–Mon evenings); a 10% spend trim cuts stress months ~32%. FHS never denies, cuts, or blocks credit.</a:t>
             </a:r>
             <a:endParaRPr lang="en-US" sz="1350" dirty="0"/>
+          </a:p>
+        </p:txBody>
+      </p:sp>
+    </p:spTree>
+  </p:cSld>
+  <p:clrMapOvr>
+    <a:masterClrMapping/>
+  </p:clrMapOvr>
+</p:sld>
+</file>
+
+<file path=ppt/slides/slide20.xml><?xml version="1.0" encoding="utf-8"?>
+<p:sld xmlns:a="http://schemas.openxmlformats.org/drawingml/2006/main" xmlns:r="http://schemas.openxmlformats.org/officeDocument/2006/relationships" xmlns:p="http://schemas.openxmlformats.org/presentationml/2006/main">
+  <p:cSld name="Slide 20">
+    <p:bg>
+      <p:bgPr>
+        <a:solidFill>
+          <a:srgbClr val="FFFFFF"/>
+        </a:solidFill>
+      </p:bgPr>
+    </p:bg>
+    <p:spTree>
+      <p:nvGrpSpPr>
+        <p:cNvPr id="1" name=""/>
+        <p:cNvGrpSpPr/>
+        <p:nvPr/>
+      </p:nvGrpSpPr>
+      <p:grpSpPr>
+        <a:xfrm>
+          <a:off x="0" y="0"/>
+          <a:ext cx="0" cy="0"/>
+          <a:chOff x="0" y="0"/>
+          <a:chExt cx="0" cy="0"/>
+        </a:xfrm>
+      </p:grpSpPr>
+      <p:sp>
+        <p:nvSpPr>
+          <p:cNvPr id="2" name="Text 0"/>
+          <p:cNvSpPr txBox="1"/>
+          <p:nvPr/>
+        </p:nvSpPr>
+        <p:spPr>
+          <a:xfrm>
+            <a:off x="457200" y="384048"/>
+            <a:ext cx="4114800" cy="292608"/>
+          </a:xfrm>
+          <a:prstGeom prst="rect">
+            <a:avLst/>
+          </a:prstGeom>
+          <a:noFill/>
+          <a:ln/>
+        </p:spPr>
+        <p:txBody>
+          <a:bodyPr wrap="square" lIns="0" tIns="0" rIns="0" bIns="0" rtlCol="0" anchor="ctr"/>
+          <a:lstStyle/>
+          <a:p>
+            <a:pPr indent="0" marL="0">
+              <a:buNone/>
+            </a:pPr>
+            <a:r>
+              <a:rPr lang="en-US" sz="1100" b="1" spc="200" kern="0" dirty="0">
+                <a:solidFill>
+                  <a:srgbClr val="058B8C"/>
+                </a:solidFill>
+                <a:latin typeface="Calibri" pitchFamily="34" charset="0"/>
+                <a:ea typeface="Calibri" pitchFamily="34" charset="-122"/>
+                <a:cs typeface="Calibri" pitchFamily="34" charset="-120"/>
+              </a:rPr>
+              <a:t>TASK 5 · RECOMMENDATIONS</a:t>
+            </a:r>
+            <a:endParaRPr lang="en-US" sz="1100" dirty="0"/>
+          </a:p>
+        </p:txBody>
+      </p:sp>
+      <p:sp>
+        <p:nvSpPr>
+          <p:cNvPr id="3" name="Text 1"/>
+          <p:cNvSpPr txBox="1"/>
+          <p:nvPr/>
+        </p:nvSpPr>
+        <p:spPr>
+          <a:xfrm>
+            <a:off x="457200" y="658368"/>
+            <a:ext cx="11247120" cy="868680"/>
+          </a:xfrm>
+          <a:prstGeom prst="rect">
+            <a:avLst/>
+          </a:prstGeom>
+          <a:noFill/>
+          <a:ln/>
+        </p:spPr>
+        <p:txBody>
+          <a:bodyPr wrap="square" lIns="0" tIns="0" rIns="0" bIns="0" rtlCol="0" anchor="t"/>
+          <a:lstStyle/>
+          <a:p>
+            <a:pPr indent="0" marL="0">
+              <a:lnSpc>
+                <a:spcPct val="95000"/>
+              </a:lnSpc>
+              <a:buNone/>
+            </a:pPr>
+            <a:r>
+              <a:rPr lang="en-US" sz="2700" b="1" dirty="0">
+                <a:solidFill>
+                  <a:srgbClr val="12435E"/>
+                </a:solidFill>
+                <a:latin typeface="Cambria" pitchFamily="34" charset="0"/>
+                <a:ea typeface="Cambria" pitchFamily="34" charset="-122"/>
+                <a:cs typeface="Cambria" pitchFamily="34" charset="-120"/>
+              </a:rPr>
+              <a:t>Prioritization &amp; the ethical rule</a:t>
+            </a:r>
+            <a:endParaRPr lang="en-US" sz="2700" dirty="0"/>
+          </a:p>
+        </p:txBody>
+      </p:sp>
+      <p:sp>
+        <p:nvSpPr>
+          <p:cNvPr id="4" name="Text 2"/>
+          <p:cNvSpPr txBox="1"/>
+          <p:nvPr/>
+        </p:nvSpPr>
+        <p:spPr>
+          <a:xfrm>
+            <a:off x="457200" y="1600200"/>
+            <a:ext cx="5760720" cy="3200400"/>
+          </a:xfrm>
+          <a:prstGeom prst="rect">
+            <a:avLst/>
+          </a:prstGeom>
+          <a:noFill/>
+          <a:ln/>
+        </p:spPr>
+        <p:txBody>
+          <a:bodyPr wrap="square" rtlCol="0" anchor="t"/>
+          <a:lstStyle/>
+          <a:p>
+            <a:pPr marL="177800" indent="-177800">
+              <a:spcAft>
+                <a:spcPts val="800"/>
+              </a:spcAft>
+              <a:buSzPct val="100000"/>
+              <a:buChar char="•"/>
+            </a:pPr>
+            <a:r>
+              <a:rPr lang="en-US" sz="1400" dirty="0">
+                <a:solidFill>
+                  <a:srgbClr val="1B2A36"/>
+                </a:solidFill>
+                <a:latin typeface="Calibri" pitchFamily="34" charset="0"/>
+                <a:ea typeface="Calibri" pitchFamily="34" charset="-122"/>
+                <a:cs typeface="Calibri" pitchFamily="34" charset="-120"/>
+              </a:rPr>
+              <a:t>Ranking (reach × driver): Budgeting → Alerts → Reminders → Products → Nudges → Education.</a:t>
+            </a:r>
+            <a:endParaRPr lang="en-US" sz="1400" dirty="0"/>
+          </a:p>
+          <a:p>
+            <a:pPr marL="177800" indent="-177800">
+              <a:spcAft>
+                <a:spcPts val="800"/>
+              </a:spcAft>
+              <a:buSzPct val="100000"/>
+              <a:buChar char="•"/>
+            </a:pPr>
+            <a:r>
+              <a:rPr lang="en-US" sz="1400" dirty="0">
+                <a:solidFill>
+                  <a:srgbClr val="1B2A36"/>
+                </a:solidFill>
+                <a:latin typeface="Calibri" pitchFamily="34" charset="0"/>
+                <a:ea typeface="Calibri" pitchFamily="34" charset="-122"/>
+                <a:cs typeface="Calibri" pitchFamily="34" charset="-120"/>
+              </a:rPr>
+              <a:t>Lead with Budgeting + Alerts (the wellbeing mission); layer growth on top.</a:t>
+            </a:r>
+            <a:endParaRPr lang="en-US" sz="1400" dirty="0"/>
+          </a:p>
+          <a:p>
+            <a:pPr marL="177800" indent="-177800">
+              <a:spcAft>
+                <a:spcPts val="800"/>
+              </a:spcAft>
+              <a:buSzPct val="100000"/>
+              <a:buChar char="•"/>
+            </a:pPr>
+            <a:r>
+              <a:rPr lang="en-US" sz="1400" dirty="0">
+                <a:solidFill>
+                  <a:srgbClr val="1B2A36"/>
+                </a:solidFill>
+                <a:latin typeface="Calibri" pitchFamily="34" charset="0"/>
+                <a:ea typeface="Calibri" pitchFamily="34" charset="-122"/>
+                <a:cs typeface="Calibri" pitchFamily="34" charset="-120"/>
+              </a:rPr>
+              <a:t>No double-counting: the 4 segments partition 999; crossover (43) &amp; distress (67) are overlays inside Segment 2.</a:t>
+            </a:r>
+            <a:endParaRPr lang="en-US" sz="1400" dirty="0"/>
+          </a:p>
+          <a:p>
+            <a:pPr marL="177800" indent="-177800">
+              <a:spcAft>
+                <a:spcPts val="800"/>
+              </a:spcAft>
+              <a:buSzPct val="100000"/>
+              <a:buChar char="•"/>
+            </a:pPr>
+            <a:r>
+              <a:rPr lang="en-US" sz="1400" dirty="0">
+                <a:solidFill>
+                  <a:srgbClr val="1B2A36"/>
+                </a:solidFill>
+                <a:latin typeface="Calibri" pitchFamily="34" charset="0"/>
+                <a:ea typeface="Calibri" pitchFamily="34" charset="-122"/>
+                <a:cs typeface="Calibri" pitchFamily="34" charset="-120"/>
+              </a:rPr>
+              <a:t>Fair by design: every trigger is a behavioural ratio; segments correlate with age/gender, so we never target by demographics.</a:t>
+            </a:r>
+            <a:endParaRPr lang="en-US" sz="1400" dirty="0"/>
+          </a:p>
+        </p:txBody>
+      </p:sp>
+      <p:pic>
+        <p:nvPicPr>
+          <p:cNvPr id="5" name="Image 0" descr="D:\BI10GroupYAPPERS\outputs\figures\t5_priority_ranking.png">    </p:cNvPr>
+          <p:cNvPicPr>
+            <a:picLocks noChangeAspect="1"/>
+          </p:cNvPicPr>
+          <p:nvPr/>
+        </p:nvPicPr>
+        <p:blipFill>
+          <a:blip r:embed="rId1"/>
+          <a:srcRect l="0" r="0" t="0" b="0"/>
+          <a:stretch/>
+        </p:blipFill>
+        <p:spPr>
+          <a:xfrm>
+            <a:off x="6446520" y="1554480"/>
+            <a:ext cx="5303520" cy="4206240"/>
+          </a:xfrm>
+          <a:prstGeom prst="rect">
+            <a:avLst/>
+          </a:prstGeom>
+        </p:spPr>
+      </p:pic>
+      <p:sp>
+        <p:nvSpPr>
+          <p:cNvPr id="6" name="Shape 3"/>
+          <p:cNvSpPr/>
+          <p:nvPr/>
+        </p:nvSpPr>
+        <p:spPr>
+          <a:xfrm>
+            <a:off x="457200" y="5029200"/>
+            <a:ext cx="3383280" cy="1097280"/>
+          </a:xfrm>
+          <a:prstGeom prst="roundRect">
+            <a:avLst>
+              <a:gd name="adj" fmla="val 6667"/>
+            </a:avLst>
+          </a:prstGeom>
+          <a:solidFill>
+            <a:srgbClr val="12435E"/>
+          </a:solidFill>
+          <a:ln/>
+        </p:spPr>
+      </p:sp>
+      <p:sp>
+        <p:nvSpPr>
+          <p:cNvPr id="7" name="Text 4"/>
+          <p:cNvSpPr txBox="1"/>
+          <p:nvPr/>
+        </p:nvSpPr>
+        <p:spPr>
+          <a:xfrm>
+            <a:off x="457200" y="5138928"/>
+            <a:ext cx="3383280" cy="658368"/>
+          </a:xfrm>
+          <a:prstGeom prst="rect">
+            <a:avLst/>
+          </a:prstGeom>
+          <a:noFill/>
+          <a:ln/>
+        </p:spPr>
+        <p:txBody>
+          <a:bodyPr wrap="square" lIns="0" tIns="0" rIns="0" bIns="0" rtlCol="0" anchor="ctr"/>
+          <a:lstStyle/>
+          <a:p>
+            <a:pPr algn="ctr" indent="0" marL="0">
+              <a:buNone/>
+            </a:pPr>
+            <a:r>
+              <a:rPr lang="en-US" sz="2800" b="1" dirty="0">
+                <a:solidFill>
+                  <a:srgbClr val="1FC3A6"/>
+                </a:solidFill>
+                <a:latin typeface="Cambria" pitchFamily="34" charset="0"/>
+                <a:ea typeface="Cambria" pitchFamily="34" charset="-122"/>
+                <a:cs typeface="Cambria" pitchFamily="34" charset="-120"/>
+              </a:rPr>
+              <a:t>NEVER</a:t>
+            </a:r>
+            <a:endParaRPr lang="en-US" sz="2800" dirty="0"/>
+          </a:p>
+        </p:txBody>
+      </p:sp>
+      <p:sp>
+        <p:nvSpPr>
+          <p:cNvPr id="8" name="Text 5"/>
+          <p:cNvSpPr txBox="1"/>
+          <p:nvPr/>
+        </p:nvSpPr>
+        <p:spPr>
+          <a:xfrm>
+            <a:off x="457200" y="5779008"/>
+            <a:ext cx="3383280" cy="320040"/>
+          </a:xfrm>
+          <a:prstGeom prst="rect">
+            <a:avLst/>
+          </a:prstGeom>
+          <a:noFill/>
+          <a:ln/>
+        </p:spPr>
+        <p:txBody>
+          <a:bodyPr wrap="square" lIns="0" tIns="0" rIns="0" bIns="0" rtlCol="0" anchor="ctr"/>
+          <a:lstStyle/>
+          <a:p>
+            <a:pPr algn="ctr" indent="0" marL="0">
+              <a:buNone/>
+            </a:pPr>
+            <a:r>
+              <a:rPr lang="en-US" sz="1100" dirty="0">
+                <a:solidFill>
+                  <a:srgbClr val="FFFFFF"/>
+                </a:solidFill>
+                <a:latin typeface="Calibri" pitchFamily="34" charset="0"/>
+                <a:ea typeface="Calibri" pitchFamily="34" charset="-122"/>
+                <a:cs typeface="Calibri" pitchFamily="34" charset="-120"/>
+              </a:rPr>
+              <a:t>FHS → credit decision</a:t>
+            </a:r>
+            <a:endParaRPr lang="en-US" sz="1100" dirty="0"/>
+          </a:p>
+        </p:txBody>
+      </p:sp>
+      <p:sp>
+        <p:nvSpPr>
+          <p:cNvPr id="9" name="Text 6"/>
+          <p:cNvSpPr txBox="1"/>
+          <p:nvPr/>
+        </p:nvSpPr>
+        <p:spPr>
+          <a:xfrm>
+            <a:off x="457200" y="6473952"/>
+            <a:ext cx="5486400" cy="274320"/>
+          </a:xfrm>
+          <a:prstGeom prst="rect">
+            <a:avLst/>
+          </a:prstGeom>
+          <a:noFill/>
+          <a:ln/>
+        </p:spPr>
+        <p:txBody>
+          <a:bodyPr wrap="square" lIns="0" tIns="0" rIns="0" bIns="0" rtlCol="0" anchor="ctr"/>
+          <a:lstStyle/>
+          <a:p>
+            <a:pPr indent="0" marL="0">
+              <a:buNone/>
+            </a:pPr>
+            <a:r>
+              <a:rPr lang="en-US" sz="900" dirty="0">
+                <a:solidFill>
+                  <a:srgbClr val="5F7180"/>
+                </a:solidFill>
+                <a:latin typeface="Calibri" pitchFamily="34" charset="0"/>
+                <a:ea typeface="Calibri" pitchFamily="34" charset="-122"/>
+                <a:cs typeface="Calibri" pitchFamily="34" charset="-120"/>
+              </a:rPr>
+              <a:t>Group YAPPERS · BI10 Round 01</a:t>
+            </a:r>
+            <a:endParaRPr lang="en-US" sz="900" dirty="0"/>
+          </a:p>
+        </p:txBody>
+      </p:sp>
+      <p:sp>
+        <p:nvSpPr>
+          <p:cNvPr id="10" name="Text 7"/>
+          <p:cNvSpPr txBox="1"/>
+          <p:nvPr/>
+        </p:nvSpPr>
+        <p:spPr>
+          <a:xfrm>
+            <a:off x="11430000" y="6473952"/>
+            <a:ext cx="457200" cy="274320"/>
+          </a:xfrm>
+          <a:prstGeom prst="rect">
+            <a:avLst/>
+          </a:prstGeom>
+          <a:noFill/>
+          <a:ln/>
+        </p:spPr>
+        <p:txBody>
+          <a:bodyPr wrap="square" lIns="0" tIns="0" rIns="0" bIns="0" rtlCol="0" anchor="ctr"/>
+          <a:lstStyle/>
+          <a:p>
+            <a:pPr algn="r" indent="0" marL="0">
+              <a:buNone/>
+            </a:pPr>
+            <a:r>
+              <a:rPr lang="en-US" sz="900" dirty="0">
+                <a:solidFill>
+                  <a:srgbClr val="5F7180"/>
+                </a:solidFill>
+                <a:latin typeface="Calibri" pitchFamily="34" charset="0"/>
+                <a:ea typeface="Calibri" pitchFamily="34" charset="-122"/>
+                <a:cs typeface="Calibri" pitchFamily="34" charset="-120"/>
+              </a:rPr>
+              <a:t>20</a:t>
+            </a:r>
+            <a:endParaRPr lang="en-US" sz="900" dirty="0"/>
+          </a:p>
+        </p:txBody>
+      </p:sp>
+    </p:spTree>
+  </p:cSld>
+  <p:clrMapOvr>
+    <a:masterClrMapping/>
+  </p:clrMapOvr>
+</p:sld>
+</file>
+
+<file path=ppt/slides/slide21.xml><?xml version="1.0" encoding="utf-8"?>
+<p:sld xmlns:a="http://schemas.openxmlformats.org/drawingml/2006/main" xmlns:r="http://schemas.openxmlformats.org/officeDocument/2006/relationships" xmlns:p="http://schemas.openxmlformats.org/presentationml/2006/main">
+  <p:cSld name="Slide 21">
+    <p:bg>
+      <p:bgPr>
+        <a:solidFill>
+          <a:srgbClr val="FFFFFF"/>
+        </a:solidFill>
+      </p:bgPr>
+    </p:bg>
+    <p:spTree>
+      <p:nvGrpSpPr>
+        <p:cNvPr id="1" name=""/>
+        <p:cNvGrpSpPr/>
+        <p:nvPr/>
+      </p:nvGrpSpPr>
+      <p:grpSpPr>
+        <a:xfrm>
+          <a:off x="0" y="0"/>
+          <a:ext cx="0" cy="0"/>
+          <a:chOff x="0" y="0"/>
+          <a:chExt cx="0" cy="0"/>
+        </a:xfrm>
+      </p:grpSpPr>
+      <p:sp>
+        <p:nvSpPr>
+          <p:cNvPr id="2" name="Text 0"/>
+          <p:cNvSpPr txBox="1"/>
+          <p:nvPr/>
+        </p:nvSpPr>
+        <p:spPr>
+          <a:xfrm>
+            <a:off x="457200" y="384048"/>
+            <a:ext cx="4114800" cy="292608"/>
+          </a:xfrm>
+          <a:prstGeom prst="rect">
+            <a:avLst/>
+          </a:prstGeom>
+          <a:noFill/>
+          <a:ln/>
+        </p:spPr>
+        <p:txBody>
+          <a:bodyPr wrap="square" lIns="0" tIns="0" rIns="0" bIns="0" rtlCol="0" anchor="ctr"/>
+          <a:lstStyle/>
+          <a:p>
+            <a:pPr indent="0" marL="0">
+              <a:buNone/>
+            </a:pPr>
+            <a:r>
+              <a:rPr lang="en-US" sz="1100" b="1" spc="200" kern="0" dirty="0">
+                <a:solidFill>
+                  <a:srgbClr val="058B8C"/>
+                </a:solidFill>
+                <a:latin typeface="Calibri" pitchFamily="34" charset="0"/>
+                <a:ea typeface="Calibri" pitchFamily="34" charset="-122"/>
+                <a:cs typeface="Calibri" pitchFamily="34" charset="-120"/>
+              </a:rPr>
+              <a:t>TASK 5 · IMPACT</a:t>
+            </a:r>
+            <a:endParaRPr lang="en-US" sz="1100" dirty="0"/>
+          </a:p>
+        </p:txBody>
+      </p:sp>
+      <p:sp>
+        <p:nvSpPr>
+          <p:cNvPr id="3" name="Text 1"/>
+          <p:cNvSpPr txBox="1"/>
+          <p:nvPr/>
+        </p:nvSpPr>
+        <p:spPr>
+          <a:xfrm>
+            <a:off x="457200" y="658368"/>
+            <a:ext cx="11247120" cy="868680"/>
+          </a:xfrm>
+          <a:prstGeom prst="rect">
+            <a:avLst/>
+          </a:prstGeom>
+          <a:noFill/>
+          <a:ln/>
+        </p:spPr>
+        <p:txBody>
+          <a:bodyPr wrap="square" lIns="0" tIns="0" rIns="0" bIns="0" rtlCol="0" anchor="t"/>
+          <a:lstStyle/>
+          <a:p>
+            <a:pPr indent="0" marL="0">
+              <a:lnSpc>
+                <a:spcPct val="95000"/>
+              </a:lnSpc>
+              <a:buNone/>
+            </a:pPr>
+            <a:r>
+              <a:rPr lang="en-US" sz="2700" b="1" dirty="0">
+                <a:solidFill>
+                  <a:srgbClr val="12435E"/>
+                </a:solidFill>
+                <a:latin typeface="Cambria" pitchFamily="34" charset="0"/>
+                <a:ea typeface="Cambria" pitchFamily="34" charset="-122"/>
+                <a:cs typeface="Cambria" pitchFamily="34" charset="-120"/>
+              </a:rPr>
+              <a:t>Expected impact, measurement &amp; a 90-day roadmap</a:t>
+            </a:r>
+            <a:endParaRPr lang="en-US" sz="2700" dirty="0"/>
+          </a:p>
+        </p:txBody>
+      </p:sp>
+      <p:sp>
+        <p:nvSpPr>
+          <p:cNvPr id="4" name="Text 2"/>
+          <p:cNvSpPr txBox="1"/>
+          <p:nvPr/>
+        </p:nvSpPr>
+        <p:spPr>
+          <a:xfrm>
+            <a:off x="457200" y="1600200"/>
+            <a:ext cx="5760720" cy="3200400"/>
+          </a:xfrm>
+          <a:prstGeom prst="rect">
+            <a:avLst/>
+          </a:prstGeom>
+          <a:noFill/>
+          <a:ln/>
+        </p:spPr>
+        <p:txBody>
+          <a:bodyPr wrap="square" rtlCol="0" anchor="t"/>
+          <a:lstStyle/>
+          <a:p>
+            <a:pPr marL="177800" indent="-177800">
+              <a:spcAft>
+                <a:spcPts val="800"/>
+              </a:spcAft>
+              <a:buSzPct val="100000"/>
+              <a:buChar char="•"/>
+            </a:pPr>
+            <a:r>
+              <a:rPr lang="en-US" sz="1400" dirty="0">
+                <a:solidFill>
+                  <a:srgbClr val="1B2A36"/>
+                </a:solidFill>
+                <a:latin typeface="Calibri" pitchFamily="34" charset="0"/>
+                <a:ea typeface="Calibri" pitchFamily="34" charset="-122"/>
+                <a:cs typeface="Calibri" pitchFamily="34" charset="-120"/>
+              </a:rPr>
+              <a:t>Scenario (illustrative): FHS = 84.1 − 25.3 × spend/income. A 10% trim for the Stretched 302 cuts stress months 95 → 65 (−32%); 5% → 80 (−16%).</a:t>
+            </a:r>
+            <a:endParaRPr lang="en-US" sz="1400" dirty="0"/>
+          </a:p>
+          <a:p>
+            <a:pPr marL="177800" indent="-177800">
+              <a:spcAft>
+                <a:spcPts val="800"/>
+              </a:spcAft>
+              <a:buSzPct val="100000"/>
+              <a:buChar char="•"/>
+            </a:pPr>
+            <a:r>
+              <a:rPr lang="en-US" sz="1400" dirty="0">
+                <a:solidFill>
+                  <a:srgbClr val="1B2A36"/>
+                </a:solidFill>
+                <a:latin typeface="Calibri" pitchFamily="34" charset="0"/>
+                <a:ea typeface="Calibri" pitchFamily="34" charset="-122"/>
+                <a:cs typeface="Calibri" pitchFamily="34" charset="-120"/>
+              </a:rPr>
+              <a:t>Every tool gets one KPI and a randomised holdout (e.g. Budgeting: spend-to-income, 10% holdout for 3 months).</a:t>
+            </a:r>
+            <a:endParaRPr lang="en-US" sz="1400" dirty="0"/>
+          </a:p>
+          <a:p>
+            <a:pPr marL="177800" indent="-177800">
+              <a:spcAft>
+                <a:spcPts val="800"/>
+              </a:spcAft>
+              <a:buSzPct val="100000"/>
+              <a:buChar char="•"/>
+            </a:pPr>
+            <a:r>
+              <a:rPr lang="en-US" sz="1400" dirty="0">
+                <a:solidFill>
+                  <a:srgbClr val="1B2A36"/>
+                </a:solidFill>
+                <a:latin typeface="Calibri" pitchFamily="34" charset="0"/>
+                <a:ea typeface="Calibri" pitchFamily="34" charset="-122"/>
+                <a:cs typeface="Calibri" pitchFamily="34" charset="-120"/>
+              </a:rPr>
+              <a:t>Days 0–30: Budgeting + Alerts · 31–60: November Reminders + Nudges · 61–90: Education + opt-in Products; keep what moves the KPI.</a:t>
+            </a:r>
+            <a:endParaRPr lang="en-US" sz="1400" dirty="0"/>
+          </a:p>
+        </p:txBody>
+      </p:sp>
+      <p:pic>
+        <p:nvPicPr>
+          <p:cNvPr id="5" name="Image 0" descr="D:\BI10GroupYAPPERS\outputs\figures\t5_impact_scenario.png">    </p:cNvPr>
+          <p:cNvPicPr>
+            <a:picLocks noChangeAspect="1"/>
+          </p:cNvPicPr>
+          <p:nvPr/>
+        </p:nvPicPr>
+        <p:blipFill>
+          <a:blip r:embed="rId1"/>
+          <a:srcRect l="0" r="0" t="0" b="0"/>
+          <a:stretch/>
+        </p:blipFill>
+        <p:spPr>
+          <a:xfrm>
+            <a:off x="6446520" y="1554480"/>
+            <a:ext cx="5303520" cy="4206240"/>
+          </a:xfrm>
+          <a:prstGeom prst="rect">
+            <a:avLst/>
+          </a:prstGeom>
+        </p:spPr>
+      </p:pic>
+      <p:sp>
+        <p:nvSpPr>
+          <p:cNvPr id="6" name="Text 3"/>
+          <p:cNvSpPr txBox="1"/>
+          <p:nvPr/>
+        </p:nvSpPr>
+        <p:spPr>
+          <a:xfrm>
+            <a:off x="6446520" y="5852160"/>
+            <a:ext cx="5303520" cy="548640"/>
+          </a:xfrm>
+          <a:prstGeom prst="rect">
+            <a:avLst/>
+          </a:prstGeom>
+          <a:noFill/>
+          <a:ln/>
+        </p:spPr>
+        <p:txBody>
+          <a:bodyPr wrap="square" lIns="0" tIns="0" rIns="0" bIns="0" rtlCol="0" anchor="t"/>
+          <a:lstStyle/>
+          <a:p>
+            <a:pPr indent="0" marL="0">
+              <a:buNone/>
+            </a:pPr>
+            <a:r>
+              <a:rPr lang="en-US" sz="1000" i="1" dirty="0">
+                <a:solidFill>
+                  <a:srgbClr val="5F7180"/>
+                </a:solidFill>
+                <a:latin typeface="Calibri" pitchFamily="34" charset="0"/>
+                <a:ea typeface="Calibri" pitchFamily="34" charset="-122"/>
+                <a:cs typeface="Calibri" pitchFamily="34" charset="-120"/>
+              </a:rPr>
+              <a:t>⚠  FHS embeds spend fields — the slope is mechanical; a scenario to test, not a forecast.</a:t>
+            </a:r>
+            <a:endParaRPr lang="en-US" sz="1000" dirty="0"/>
+          </a:p>
+        </p:txBody>
+      </p:sp>
+      <p:sp>
+        <p:nvSpPr>
+          <p:cNvPr id="7" name="Shape 4"/>
+          <p:cNvSpPr/>
+          <p:nvPr/>
+        </p:nvSpPr>
+        <p:spPr>
+          <a:xfrm>
+            <a:off x="457200" y="5029200"/>
+            <a:ext cx="3383280" cy="1097280"/>
+          </a:xfrm>
+          <a:prstGeom prst="roundRect">
+            <a:avLst>
+              <a:gd name="adj" fmla="val 6667"/>
+            </a:avLst>
+          </a:prstGeom>
+          <a:solidFill>
+            <a:srgbClr val="12435E"/>
+          </a:solidFill>
+          <a:ln/>
+        </p:spPr>
+      </p:sp>
+      <p:sp>
+        <p:nvSpPr>
+          <p:cNvPr id="8" name="Text 5"/>
+          <p:cNvSpPr txBox="1"/>
+          <p:nvPr/>
+        </p:nvSpPr>
+        <p:spPr>
+          <a:xfrm>
+            <a:off x="457200" y="5138928"/>
+            <a:ext cx="3383280" cy="658368"/>
+          </a:xfrm>
+          <a:prstGeom prst="rect">
+            <a:avLst/>
+          </a:prstGeom>
+          <a:noFill/>
+          <a:ln/>
+        </p:spPr>
+        <p:txBody>
+          <a:bodyPr wrap="square" lIns="0" tIns="0" rIns="0" bIns="0" rtlCol="0" anchor="ctr"/>
+          <a:lstStyle/>
+          <a:p>
+            <a:pPr algn="ctr" indent="0" marL="0">
+              <a:buNone/>
+            </a:pPr>
+            <a:r>
+              <a:rPr lang="en-US" sz="2800" b="1" dirty="0">
+                <a:solidFill>
+                  <a:srgbClr val="1FC3A6"/>
+                </a:solidFill>
+                <a:latin typeface="Cambria" pitchFamily="34" charset="0"/>
+                <a:ea typeface="Cambria" pitchFamily="34" charset="-122"/>
+                <a:cs typeface="Cambria" pitchFamily="34" charset="-120"/>
+              </a:rPr>
+              <a:t>−32%</a:t>
+            </a:r>
+            <a:endParaRPr lang="en-US" sz="2800" dirty="0"/>
+          </a:p>
+        </p:txBody>
+      </p:sp>
+      <p:sp>
+        <p:nvSpPr>
+          <p:cNvPr id="9" name="Text 6"/>
+          <p:cNvSpPr txBox="1"/>
+          <p:nvPr/>
+        </p:nvSpPr>
+        <p:spPr>
+          <a:xfrm>
+            <a:off x="457200" y="5779008"/>
+            <a:ext cx="3383280" cy="320040"/>
+          </a:xfrm>
+          <a:prstGeom prst="rect">
+            <a:avLst/>
+          </a:prstGeom>
+          <a:noFill/>
+          <a:ln/>
+        </p:spPr>
+        <p:txBody>
+          <a:bodyPr wrap="square" lIns="0" tIns="0" rIns="0" bIns="0" rtlCol="0" anchor="ctr"/>
+          <a:lstStyle/>
+          <a:p>
+            <a:pPr algn="ctr" indent="0" marL="0">
+              <a:buNone/>
+            </a:pPr>
+            <a:r>
+              <a:rPr lang="en-US" sz="1100" dirty="0">
+                <a:solidFill>
+                  <a:srgbClr val="FFFFFF"/>
+                </a:solidFill>
+                <a:latin typeface="Calibri" pitchFamily="34" charset="0"/>
+                <a:ea typeface="Calibri" pitchFamily="34" charset="-122"/>
+                <a:cs typeface="Calibri" pitchFamily="34" charset="-120"/>
+              </a:rPr>
+              <a:t>stress months at a 10% trim</a:t>
+            </a:r>
+            <a:endParaRPr lang="en-US" sz="1100" dirty="0"/>
+          </a:p>
+        </p:txBody>
+      </p:sp>
+      <p:sp>
+        <p:nvSpPr>
+          <p:cNvPr id="10" name="Text 7"/>
+          <p:cNvSpPr txBox="1"/>
+          <p:nvPr/>
+        </p:nvSpPr>
+        <p:spPr>
+          <a:xfrm>
+            <a:off x="457200" y="6473952"/>
+            <a:ext cx="5486400" cy="274320"/>
+          </a:xfrm>
+          <a:prstGeom prst="rect">
+            <a:avLst/>
+          </a:prstGeom>
+          <a:noFill/>
+          <a:ln/>
+        </p:spPr>
+        <p:txBody>
+          <a:bodyPr wrap="square" lIns="0" tIns="0" rIns="0" bIns="0" rtlCol="0" anchor="ctr"/>
+          <a:lstStyle/>
+          <a:p>
+            <a:pPr indent="0" marL="0">
+              <a:buNone/>
+            </a:pPr>
+            <a:r>
+              <a:rPr lang="en-US" sz="900" dirty="0">
+                <a:solidFill>
+                  <a:srgbClr val="5F7180"/>
+                </a:solidFill>
+                <a:latin typeface="Calibri" pitchFamily="34" charset="0"/>
+                <a:ea typeface="Calibri" pitchFamily="34" charset="-122"/>
+                <a:cs typeface="Calibri" pitchFamily="34" charset="-120"/>
+              </a:rPr>
+              <a:t>Group YAPPERS · BI10 Round 01</a:t>
+            </a:r>
+            <a:endParaRPr lang="en-US" sz="900" dirty="0"/>
+          </a:p>
+        </p:txBody>
+      </p:sp>
+      <p:sp>
+        <p:nvSpPr>
+          <p:cNvPr id="11" name="Text 8"/>
+          <p:cNvSpPr txBox="1"/>
+          <p:nvPr/>
+        </p:nvSpPr>
+        <p:spPr>
+          <a:xfrm>
+            <a:off x="11430000" y="6473952"/>
+            <a:ext cx="457200" cy="274320"/>
+          </a:xfrm>
+          <a:prstGeom prst="rect">
+            <a:avLst/>
+          </a:prstGeom>
+          <a:noFill/>
+          <a:ln/>
+        </p:spPr>
+        <p:txBody>
+          <a:bodyPr wrap="square" lIns="0" tIns="0" rIns="0" bIns="0" rtlCol="0" anchor="ctr"/>
+          <a:lstStyle/>
+          <a:p>
+            <a:pPr algn="r" indent="0" marL="0">
+              <a:buNone/>
+            </a:pPr>
+            <a:r>
+              <a:rPr lang="en-US" sz="900" dirty="0">
+                <a:solidFill>
+                  <a:srgbClr val="5F7180"/>
+                </a:solidFill>
+                <a:latin typeface="Calibri" pitchFamily="34" charset="0"/>
+                <a:ea typeface="Calibri" pitchFamily="34" charset="-122"/>
+                <a:cs typeface="Calibri" pitchFamily="34" charset="-120"/>
+              </a:rPr>
+              <a:t>21</a:t>
+            </a:r>
+            <a:endParaRPr lang="en-US" sz="900" dirty="0"/>
+          </a:p>
+        </p:txBody>
+      </p:sp>
+    </p:spTree>
+  </p:cSld>
+  <p:clrMapOvr>
+    <a:masterClrMapping/>
+  </p:clrMapOvr>
+</p:sld>
+</file>
+
+<file path=ppt/slides/slide22.xml><?xml version="1.0" encoding="utf-8"?>
+<p:sld xmlns:a="http://schemas.openxmlformats.org/drawingml/2006/main" xmlns:r="http://schemas.openxmlformats.org/officeDocument/2006/relationships" xmlns:p="http://schemas.openxmlformats.org/presentationml/2006/main">
+  <p:cSld name="Slide 22">
+    <p:bg>
+      <p:bgPr>
+        <a:solidFill>
+          <a:srgbClr val="0F2A43"/>
+        </a:solidFill>
+      </p:bgPr>
+    </p:bg>
+    <p:spTree>
+      <p:nvGrpSpPr>
+        <p:cNvPr id="1" name=""/>
+        <p:cNvGrpSpPr/>
+        <p:nvPr/>
+      </p:nvGrpSpPr>
+      <p:grpSpPr>
+        <a:xfrm>
+          <a:off x="0" y="0"/>
+          <a:ext cx="0" cy="0"/>
+          <a:chOff x="0" y="0"/>
+          <a:chExt cx="0" cy="0"/>
+        </a:xfrm>
+      </p:grpSpPr>
+      <p:sp>
+        <p:nvSpPr>
+          <p:cNvPr id="2" name="Shape 0"/>
+          <p:cNvSpPr/>
+          <p:nvPr/>
+        </p:nvSpPr>
+        <p:spPr>
+          <a:xfrm>
+            <a:off x="0" y="0"/>
+            <a:ext cx="201168" cy="6858000"/>
+          </a:xfrm>
+          <a:prstGeom prst="rect">
+            <a:avLst/>
+          </a:prstGeom>
+          <a:solidFill>
+            <a:srgbClr val="1FC3A6"/>
+          </a:solidFill>
+          <a:ln/>
+        </p:spPr>
+      </p:sp>
+      <p:sp>
+        <p:nvSpPr>
+          <p:cNvPr id="3" name="Text 1"/>
+          <p:cNvSpPr txBox="1"/>
+          <p:nvPr/>
+        </p:nvSpPr>
+        <p:spPr>
+          <a:xfrm>
+            <a:off x="822960" y="822960"/>
+            <a:ext cx="7315200" cy="365760"/>
+          </a:xfrm>
+          <a:prstGeom prst="rect">
+            <a:avLst/>
+          </a:prstGeom>
+          <a:noFill/>
+          <a:ln/>
+        </p:spPr>
+        <p:txBody>
+          <a:bodyPr wrap="square" lIns="0" tIns="0" rIns="0" bIns="0" rtlCol="0" anchor="ctr"/>
+          <a:lstStyle/>
+          <a:p>
+            <a:pPr indent="0" marL="0">
+              <a:buNone/>
+            </a:pPr>
+            <a:r>
+              <a:rPr lang="en-US" sz="1200" b="1" spc="300" kern="0" dirty="0">
+                <a:solidFill>
+                  <a:srgbClr val="1FC3A6"/>
+                </a:solidFill>
+                <a:latin typeface="Calibri" pitchFamily="34" charset="0"/>
+                <a:ea typeface="Calibri" pitchFamily="34" charset="-122"/>
+                <a:cs typeface="Calibri" pitchFamily="34" charset="-120"/>
+              </a:rPr>
+              <a:t>The contract</a:t>
+            </a:r>
+            <a:endParaRPr lang="en-US" sz="1200" dirty="0"/>
+          </a:p>
+        </p:txBody>
+      </p:sp>
+      <p:sp>
+        <p:nvSpPr>
+          <p:cNvPr id="4" name="Text 2"/>
+          <p:cNvSpPr txBox="1"/>
+          <p:nvPr/>
+        </p:nvSpPr>
+        <p:spPr>
+          <a:xfrm>
+            <a:off x="822960" y="1234440"/>
+            <a:ext cx="10607040" cy="1554480"/>
+          </a:xfrm>
+          <a:prstGeom prst="rect">
+            <a:avLst/>
+          </a:prstGeom>
+          <a:noFill/>
+          <a:ln/>
+        </p:spPr>
+        <p:txBody>
+          <a:bodyPr wrap="square" lIns="0" tIns="0" rIns="0" bIns="0" rtlCol="0" anchor="ctr"/>
+          <a:lstStyle/>
+          <a:p>
+            <a:pPr indent="0" marL="0">
+              <a:lnSpc>
+                <a:spcPct val="105000"/>
+              </a:lnSpc>
+              <a:buNone/>
+            </a:pPr>
+            <a:r>
+              <a:rPr lang="en-US" sz="2800" b="1" dirty="0">
+                <a:solidFill>
+                  <a:srgbClr val="FFFFFF"/>
+                </a:solidFill>
+                <a:latin typeface="Cambria" pitchFamily="34" charset="0"/>
+                <a:ea typeface="Cambria" pitchFamily="34" charset="-122"/>
+                <a:cs typeface="Cambria" pitchFamily="34" charset="-120"/>
+              </a:rPr>
+              <a:t>Grow the healthy, activate the dormant, protect the stretched —</a:t>
+            </a:r>
+            <a:endParaRPr lang="en-US" sz="2800" dirty="0"/>
+          </a:p>
+          <a:p>
+            <a:pPr indent="0" marL="0">
+              <a:lnSpc>
+                <a:spcPct val="105000"/>
+              </a:lnSpc>
+              <a:buNone/>
+            </a:pPr>
+            <a:r>
+              <a:rPr lang="en-US" sz="2800" b="1" dirty="0">
+                <a:solidFill>
+                  <a:srgbClr val="FFFFFF"/>
+                </a:solidFill>
+                <a:latin typeface="Cambria" pitchFamily="34" charset="0"/>
+                <a:ea typeface="Cambria" pitchFamily="34" charset="-122"/>
+                <a:cs typeface="Cambria" pitchFamily="34" charset="-120"/>
+              </a:rPr>
+              <a:t>without ever touching their credit.</a:t>
+            </a:r>
+            <a:endParaRPr lang="en-US" sz="2800" dirty="0"/>
+          </a:p>
+        </p:txBody>
+      </p:sp>
+      <p:sp>
+        <p:nvSpPr>
+          <p:cNvPr id="5" name="Text 3"/>
+          <p:cNvSpPr txBox="1"/>
+          <p:nvPr/>
+        </p:nvSpPr>
+        <p:spPr>
+          <a:xfrm>
+            <a:off x="822960" y="3063240"/>
+            <a:ext cx="2468880" cy="731520"/>
+          </a:xfrm>
+          <a:prstGeom prst="rect">
+            <a:avLst/>
+          </a:prstGeom>
+          <a:noFill/>
+          <a:ln/>
+        </p:spPr>
+        <p:txBody>
+          <a:bodyPr wrap="square" lIns="0" tIns="0" rIns="0" bIns="0" rtlCol="0" anchor="t"/>
+          <a:lstStyle/>
+          <a:p>
+            <a:pPr indent="0" marL="0">
+              <a:buNone/>
+            </a:pPr>
+            <a:r>
+              <a:rPr lang="en-US" sz="1400" b="1" dirty="0">
+                <a:solidFill>
+                  <a:srgbClr val="1FC3A6"/>
+                </a:solidFill>
+                <a:latin typeface="Calibri" pitchFamily="34" charset="0"/>
+                <a:ea typeface="Calibri" pitchFamily="34" charset="-122"/>
+                <a:cs typeface="Calibri" pitchFamily="34" charset="-120"/>
+              </a:rPr>
+              <a:t>The spine</a:t>
+            </a:r>
+            <a:endParaRPr lang="en-US" sz="1400" dirty="0"/>
+          </a:p>
+        </p:txBody>
+      </p:sp>
+      <p:sp>
+        <p:nvSpPr>
+          <p:cNvPr id="6" name="Text 4"/>
+          <p:cNvSpPr txBox="1"/>
+          <p:nvPr/>
+        </p:nvSpPr>
+        <p:spPr>
+          <a:xfrm>
+            <a:off x="3383280" y="3063240"/>
+            <a:ext cx="8046720" cy="731520"/>
+          </a:xfrm>
+          <a:prstGeom prst="rect">
+            <a:avLst/>
+          </a:prstGeom>
+          <a:noFill/>
+          <a:ln/>
+        </p:spPr>
+        <p:txBody>
+          <a:bodyPr wrap="square" lIns="0" tIns="0" rIns="0" bIns="0" rtlCol="0" anchor="t"/>
+          <a:lstStyle/>
+          <a:p>
+            <a:pPr indent="0" marL="0">
+              <a:buNone/>
+            </a:pPr>
+            <a:r>
+              <a:rPr lang="en-US" sz="1300" dirty="0">
+                <a:solidFill>
+                  <a:srgbClr val="DCEAEC"/>
+                </a:solidFill>
+                <a:latin typeface="Calibri" pitchFamily="34" charset="0"/>
+                <a:ea typeface="Calibri" pitchFamily="34" charset="-122"/>
+                <a:cs typeface="Calibri" pitchFamily="34" charset="-120"/>
+              </a:rPr>
+              <a:t>Overspend drives poor health; the budget inverts under stress; stress is episodic, striking the most engaged.</a:t>
+            </a:r>
+            <a:endParaRPr lang="en-US" sz="1300" dirty="0"/>
+          </a:p>
+        </p:txBody>
+      </p:sp>
+      <p:sp>
+        <p:nvSpPr>
+          <p:cNvPr id="7" name="Text 5"/>
+          <p:cNvSpPr txBox="1"/>
+          <p:nvPr/>
+        </p:nvSpPr>
+        <p:spPr>
+          <a:xfrm>
+            <a:off x="822960" y="3849624"/>
+            <a:ext cx="2468880" cy="731520"/>
+          </a:xfrm>
+          <a:prstGeom prst="rect">
+            <a:avLst/>
+          </a:prstGeom>
+          <a:noFill/>
+          <a:ln/>
+        </p:spPr>
+        <p:txBody>
+          <a:bodyPr wrap="square" lIns="0" tIns="0" rIns="0" bIns="0" rtlCol="0" anchor="t"/>
+          <a:lstStyle/>
+          <a:p>
+            <a:pPr indent="0" marL="0">
+              <a:buNone/>
+            </a:pPr>
+            <a:r>
+              <a:rPr lang="en-US" sz="1400" b="1" dirty="0">
+                <a:solidFill>
+                  <a:srgbClr val="1FC3A6"/>
+                </a:solidFill>
+                <a:latin typeface="Calibri" pitchFamily="34" charset="0"/>
+                <a:ea typeface="Calibri" pitchFamily="34" charset="-122"/>
+                <a:cs typeface="Calibri" pitchFamily="34" charset="-120"/>
+              </a:rPr>
+              <a:t>The payoff</a:t>
+            </a:r>
+            <a:endParaRPr lang="en-US" sz="1400" dirty="0"/>
+          </a:p>
+        </p:txBody>
+      </p:sp>
+      <p:sp>
+        <p:nvSpPr>
+          <p:cNvPr id="8" name="Text 6"/>
+          <p:cNvSpPr txBox="1"/>
+          <p:nvPr/>
+        </p:nvSpPr>
+        <p:spPr>
+          <a:xfrm>
+            <a:off x="3383280" y="3849624"/>
+            <a:ext cx="8046720" cy="731520"/>
+          </a:xfrm>
+          <a:prstGeom prst="rect">
+            <a:avLst/>
+          </a:prstGeom>
+          <a:noFill/>
+          <a:ln/>
+        </p:spPr>
+        <p:txBody>
+          <a:bodyPr wrap="square" lIns="0" tIns="0" rIns="0" bIns="0" rtlCol="0" anchor="t"/>
+          <a:lstStyle/>
+          <a:p>
+            <a:pPr indent="0" marL="0">
+              <a:buNone/>
+            </a:pPr>
+            <a:r>
+              <a:rPr lang="en-US" sz="1300" dirty="0">
+                <a:solidFill>
+                  <a:srgbClr val="DCEAEC"/>
+                </a:solidFill>
+                <a:latin typeface="Calibri" pitchFamily="34" charset="0"/>
+                <a:ea typeface="Calibri" pitchFamily="34" charset="-122"/>
+                <a:cs typeface="Calibri" pitchFamily="34" charset="-120"/>
+              </a:rPr>
+              <a:t>4 clean segments (351/302/258/88) and a 6-tool plan reaching every customer with the right non-punitive touch.</a:t>
+            </a:r>
+            <a:endParaRPr lang="en-US" sz="1300" dirty="0"/>
+          </a:p>
+        </p:txBody>
+      </p:sp>
+      <p:sp>
+        <p:nvSpPr>
+          <p:cNvPr id="9" name="Text 7"/>
+          <p:cNvSpPr txBox="1"/>
+          <p:nvPr/>
+        </p:nvSpPr>
+        <p:spPr>
+          <a:xfrm>
+            <a:off x="822960" y="4636008"/>
+            <a:ext cx="2468880" cy="731520"/>
+          </a:xfrm>
+          <a:prstGeom prst="rect">
+            <a:avLst/>
+          </a:prstGeom>
+          <a:noFill/>
+          <a:ln/>
+        </p:spPr>
+        <p:txBody>
+          <a:bodyPr wrap="square" lIns="0" tIns="0" rIns="0" bIns="0" rtlCol="0" anchor="t"/>
+          <a:lstStyle/>
+          <a:p>
+            <a:pPr indent="0" marL="0">
+              <a:buNone/>
+            </a:pPr>
+            <a:r>
+              <a:rPr lang="en-US" sz="1400" b="1" dirty="0">
+                <a:solidFill>
+                  <a:srgbClr val="1FC3A6"/>
+                </a:solidFill>
+                <a:latin typeface="Calibri" pitchFamily="34" charset="0"/>
+                <a:ea typeface="Calibri" pitchFamily="34" charset="-122"/>
+                <a:cs typeface="Calibri" pitchFamily="34" charset="-120"/>
+              </a:rPr>
+              <a:t>Lead action</a:t>
+            </a:r>
+            <a:endParaRPr lang="en-US" sz="1400" dirty="0"/>
+          </a:p>
+        </p:txBody>
+      </p:sp>
+      <p:sp>
+        <p:nvSpPr>
+          <p:cNvPr id="10" name="Text 8"/>
+          <p:cNvSpPr txBox="1"/>
+          <p:nvPr/>
+        </p:nvSpPr>
+        <p:spPr>
+          <a:xfrm>
+            <a:off x="3383280" y="4636008"/>
+            <a:ext cx="8046720" cy="731520"/>
+          </a:xfrm>
+          <a:prstGeom prst="rect">
+            <a:avLst/>
+          </a:prstGeom>
+          <a:noFill/>
+          <a:ln/>
+        </p:spPr>
+        <p:txBody>
+          <a:bodyPr wrap="square" lIns="0" tIns="0" rIns="0" bIns="0" rtlCol="0" anchor="t"/>
+          <a:lstStyle/>
+          <a:p>
+            <a:pPr indent="0" marL="0">
+              <a:buNone/>
+            </a:pPr>
+            <a:r>
+              <a:rPr lang="en-US" sz="1300" dirty="0">
+                <a:solidFill>
+                  <a:srgbClr val="DCEAEC"/>
+                </a:solidFill>
+                <a:latin typeface="Calibri" pitchFamily="34" charset="0"/>
+                <a:ea typeface="Calibri" pitchFamily="34" charset="-122"/>
+                <a:cs typeface="Calibri" pitchFamily="34" charset="-120"/>
+              </a:rPr>
+              <a:t>Budgeting for 302 + real-time Alerts catching 52% of all stress — highest reach × strongest driver, near-zero cost.</a:t>
+            </a:r>
+            <a:endParaRPr lang="en-US" sz="1300" dirty="0"/>
+          </a:p>
+        </p:txBody>
+      </p:sp>
+      <p:sp>
+        <p:nvSpPr>
+          <p:cNvPr id="11" name="Text 9"/>
+          <p:cNvSpPr txBox="1"/>
+          <p:nvPr/>
+        </p:nvSpPr>
+        <p:spPr>
+          <a:xfrm>
+            <a:off x="822960" y="5422392"/>
+            <a:ext cx="2468880" cy="731520"/>
+          </a:xfrm>
+          <a:prstGeom prst="rect">
+            <a:avLst/>
+          </a:prstGeom>
+          <a:noFill/>
+          <a:ln/>
+        </p:spPr>
+        <p:txBody>
+          <a:bodyPr wrap="square" lIns="0" tIns="0" rIns="0" bIns="0" rtlCol="0" anchor="t"/>
+          <a:lstStyle/>
+          <a:p>
+            <a:pPr indent="0" marL="0">
+              <a:buNone/>
+            </a:pPr>
+            <a:r>
+              <a:rPr lang="en-US" sz="1400" b="1" dirty="0">
+                <a:solidFill>
+                  <a:srgbClr val="1FC3A6"/>
+                </a:solidFill>
+                <a:latin typeface="Calibri" pitchFamily="34" charset="0"/>
+                <a:ea typeface="Calibri" pitchFamily="34" charset="-122"/>
+                <a:cs typeface="Calibri" pitchFamily="34" charset="-120"/>
+              </a:rPr>
+              <a:t>Honest limits</a:t>
+            </a:r>
+            <a:endParaRPr lang="en-US" sz="1400" dirty="0"/>
+          </a:p>
+        </p:txBody>
+      </p:sp>
+      <p:sp>
+        <p:nvSpPr>
+          <p:cNvPr id="12" name="Text 10"/>
+          <p:cNvSpPr txBox="1"/>
+          <p:nvPr/>
+        </p:nvSpPr>
+        <p:spPr>
+          <a:xfrm>
+            <a:off x="3383280" y="5422392"/>
+            <a:ext cx="8046720" cy="731520"/>
+          </a:xfrm>
+          <a:prstGeom prst="rect">
+            <a:avLst/>
+          </a:prstGeom>
+          <a:noFill/>
+          <a:ln/>
+        </p:spPr>
+        <p:txBody>
+          <a:bodyPr wrap="square" lIns="0" tIns="0" rIns="0" bIns="0" rtlCol="0" anchor="t"/>
+          <a:lstStyle/>
+          <a:p>
+            <a:pPr indent="0" marL="0">
+              <a:buNone/>
+            </a:pPr>
+            <a:r>
+              <a:rPr lang="en-US" sz="1300" dirty="0">
+                <a:solidFill>
+                  <a:srgbClr val="DCEAEC"/>
+                </a:solidFill>
+                <a:latin typeface="Calibri" pitchFamily="34" charset="0"/>
+                <a:ea typeface="Calibri" pitchFamily="34" charset="-122"/>
+                <a:cs typeface="Calibri" pitchFamily="34" charset="-120"/>
+              </a:rPr>
+              <a:t>Synthetic single-year data, uniform December uplift, engineered engagement, segments on a continuum — sizes directional, conclusions robust on ratios.</a:t>
+            </a:r>
+            <a:endParaRPr lang="en-US" sz="1300" dirty="0"/>
+          </a:p>
+        </p:txBody>
+      </p:sp>
+      <p:sp>
+        <p:nvSpPr>
+          <p:cNvPr id="13" name="Text 11"/>
+          <p:cNvSpPr txBox="1"/>
+          <p:nvPr/>
+        </p:nvSpPr>
+        <p:spPr>
+          <a:xfrm>
+            <a:off x="822960" y="6263640"/>
+            <a:ext cx="10607040" cy="365760"/>
+          </a:xfrm>
+          <a:prstGeom prst="rect">
+            <a:avLst/>
+          </a:prstGeom>
+          <a:noFill/>
+          <a:ln/>
+        </p:spPr>
+        <p:txBody>
+          <a:bodyPr wrap="square" lIns="0" tIns="0" rIns="0" bIns="0" rtlCol="0" anchor="ctr"/>
+          <a:lstStyle/>
+          <a:p>
+            <a:pPr indent="0" marL="0">
+              <a:buNone/>
+            </a:pPr>
+            <a:r>
+              <a:rPr lang="en-US" sz="1300" b="1" i="1" dirty="0">
+                <a:solidFill>
+                  <a:srgbClr val="1FC3A6"/>
+                </a:solidFill>
+                <a:latin typeface="Calibri" pitchFamily="34" charset="0"/>
+                <a:ea typeface="Calibri" pitchFamily="34" charset="-122"/>
+                <a:cs typeface="Calibri" pitchFamily="34" charset="-120"/>
+              </a:rPr>
+              <a:t>One guarantee: wellbeing help, never a credit decision.</a:t>
+            </a:r>
+            <a:endParaRPr lang="en-US" sz="1300" dirty="0"/>
           </a:p>
         </p:txBody>
       </p:sp>
@@ -8254,7 +9954,7 @@
                 <a:ea typeface="Calibri" pitchFamily="34" charset="-122"/>
                 <a:cs typeface="Calibri" pitchFamily="34" charset="-120"/>
               </a:rPr>
-              <a:t>Customers buy more often, not pricier (year-end / Tết prep).</a:t>
+              <a:t>The uplift is uniform: all 14 categories grow +181% to +193% — no single category drives it.</a:t>
             </a:r>
             <a:endParaRPr lang="en-US" sz="1400" dirty="0"/>
           </a:p>
@@ -8337,7 +10037,7 @@
                 <a:ea typeface="Calibri" pitchFamily="34" charset="-122"/>
                 <a:cs typeface="Calibri" pitchFamily="34" charset="-120"/>
               </a:rPr>
-              <a:t>⚠  Source folds two years onto 2025, amplifying December — treat 15% as directional.</a:t>
+              <a:t>⚠  All timestamps are 2025; the uniform uplift looks like a synthetic seasonal multiplier — treat 15% as directional.</a:t>
             </a:r>
             <a:endParaRPr lang="en-US" sz="1000" dirty="0"/>
           </a:p>
@@ -8542,8 +10242,8 @@
         </p:nvSpPr>
         <p:spPr>
           <a:xfrm>
-            <a:off x="457200" y="1600200"/>
-            <a:ext cx="5760720" cy="3200400"/>
+            <a:off x="457200" y="1463040"/>
+            <a:ext cx="11247120" cy="1508760"/>
           </a:xfrm>
           <a:prstGeom prst="rect">
             <a:avLst/>
@@ -8571,7 +10271,7 @@
                 <a:ea typeface="Calibri" pitchFamily="34" charset="-122"/>
                 <a:cs typeface="Calibri" pitchFamily="34" charset="-120"/>
               </a:rPr>
-              <a:t>Stressed (FHS &lt; 40): 28% essential / 72% discretionary.</a:t>
+              <a:t>Stressed (FHS &lt; 40): 72% discretionary vs healthy (FHS ≥ 80): 40% — the mix inverts completely.</a:t>
             </a:r>
             <a:endParaRPr lang="en-US" sz="1400" dirty="0"/>
           </a:p>
@@ -8592,7 +10292,7 @@
                 <a:ea typeface="Calibri" pitchFamily="34" charset="-122"/>
                 <a:cs typeface="Calibri" pitchFamily="34" charset="-120"/>
               </a:rPr>
-              <a:t>Healthy (FHS ≥ 80): 60% essential / 40% discretionary.</a:t>
+              <a:t>It is a gradient, not a threshold artefact: 72% → 64% → 57% → 54% → 49% → 41% across FHS bands; any cutoff pair keeps the direction (FHS&lt;35 vs ≥85: 74% vs 30%).</a:t>
             </a:r>
             <a:endParaRPr lang="en-US" sz="1400" dirty="0"/>
           </a:p>
@@ -8613,49 +10313,7 @@
                 <a:ea typeface="Calibri" pitchFamily="34" charset="-122"/>
                 <a:cs typeface="Calibri" pitchFamily="34" charset="-120"/>
               </a:rPr>
-              <a:t>The mix inverts completely — low health is NOT people scraping by on necessities.</a:t>
-            </a:r>
-            <a:endParaRPr lang="en-US" sz="1400" dirty="0"/>
-          </a:p>
-          <a:p>
-            <a:pPr marL="177800" indent="-177800">
-              <a:spcAft>
-                <a:spcPts val="800"/>
-              </a:spcAft>
-              <a:buSzPct val="100000"/>
-              <a:buChar char="•"/>
-            </a:pPr>
-            <a:r>
-              <a:rPr lang="en-US" sz="1400" dirty="0">
-                <a:solidFill>
-                  <a:srgbClr val="1B2A36"/>
-                </a:solidFill>
-                <a:latin typeface="Calibri" pitchFamily="34" charset="0"/>
-                <a:ea typeface="Calibri" pitchFamily="34" charset="-122"/>
-                <a:cs typeface="Calibri" pitchFamily="34" charset="-120"/>
-              </a:rPr>
-              <a:t>Highest-leverage help = budgeting visibility on discretionary spend, not credit restriction.</a:t>
-            </a:r>
-            <a:endParaRPr lang="en-US" sz="1400" dirty="0"/>
-          </a:p>
-          <a:p>
-            <a:pPr marL="177800" indent="-177800">
-              <a:spcAft>
-                <a:spcPts val="800"/>
-              </a:spcAft>
-              <a:buSzPct val="100000"/>
-              <a:buChar char="•"/>
-            </a:pPr>
-            <a:r>
-              <a:rPr lang="en-US" sz="1400" dirty="0">
-                <a:solidFill>
-                  <a:srgbClr val="1B2A36"/>
-                </a:solidFill>
-                <a:latin typeface="Calibri" pitchFamily="34" charset="0"/>
-                <a:ea typeface="Calibri" pitchFamily="34" charset="-122"/>
-                <a:cs typeface="Calibri" pitchFamily="34" charset="-120"/>
-              </a:rPr>
-              <a:t>This single contrast anchors segmentation (Task 4) and recommendations (Task 5).</a:t>
+              <a:t>Highest-leverage help = budgeting visibility on discretionary spend, not credit restriction. This contrast anchors Tasks 4 and 5.</a:t>
             </a:r>
             <a:endParaRPr lang="en-US" sz="1400" dirty="0"/>
           </a:p>
@@ -8676,117 +10334,40 @@
         </p:blipFill>
         <p:spPr>
           <a:xfrm>
-            <a:off x="6446520" y="1554480"/>
-            <a:ext cx="5303520" cy="4206240"/>
+            <a:off x="502920" y="3063240"/>
+            <a:ext cx="5440680" cy="3200400"/>
           </a:xfrm>
           <a:prstGeom prst="rect">
             <a:avLst/>
           </a:prstGeom>
         </p:spPr>
       </p:pic>
-      <p:sp>
-        <p:nvSpPr>
-          <p:cNvPr id="6" name="Shape 3"/>
-          <p:cNvSpPr/>
-          <p:nvPr/>
-        </p:nvSpPr>
-        <p:spPr>
-          <a:xfrm>
-            <a:off x="457200" y="5029200"/>
-            <a:ext cx="3383280" cy="1097280"/>
-          </a:xfrm>
-          <a:prstGeom prst="roundRect">
-            <a:avLst>
-              <a:gd name="adj" fmla="val 6667"/>
-            </a:avLst>
-          </a:prstGeom>
-          <a:solidFill>
-            <a:srgbClr val="12435E"/>
-          </a:solidFill>
-          <a:ln/>
-        </p:spPr>
-      </p:sp>
-      <p:sp>
-        <p:nvSpPr>
-          <p:cNvPr id="7" name="Text 4"/>
-          <p:cNvSpPr txBox="1"/>
-          <p:nvPr/>
-        </p:nvSpPr>
-        <p:spPr>
-          <a:xfrm>
-            <a:off x="457200" y="5138928"/>
-            <a:ext cx="3383280" cy="658368"/>
-          </a:xfrm>
-          <a:prstGeom prst="rect">
-            <a:avLst/>
-          </a:prstGeom>
-          <a:noFill/>
-          <a:ln/>
-        </p:spPr>
-        <p:txBody>
-          <a:bodyPr wrap="square" lIns="0" tIns="0" rIns="0" bIns="0" rtlCol="0" anchor="ctr"/>
-          <a:lstStyle/>
-          <a:p>
-            <a:pPr algn="ctr" indent="0" marL="0">
-              <a:buNone/>
-            </a:pPr>
-            <a:r>
-              <a:rPr lang="en-US" sz="2800" b="1" dirty="0">
-                <a:solidFill>
-                  <a:srgbClr val="1FC3A6"/>
-                </a:solidFill>
-                <a:latin typeface="Cambria" pitchFamily="34" charset="0"/>
-                <a:ea typeface="Cambria" pitchFamily="34" charset="-122"/>
-                <a:cs typeface="Cambria" pitchFamily="34" charset="-120"/>
-              </a:rPr>
-              <a:t>72% vs 40%</a:t>
-            </a:r>
-            <a:endParaRPr lang="en-US" sz="2800" dirty="0"/>
-          </a:p>
-        </p:txBody>
-      </p:sp>
-      <p:sp>
-        <p:nvSpPr>
-          <p:cNvPr id="8" name="Text 5"/>
-          <p:cNvSpPr txBox="1"/>
-          <p:nvPr/>
-        </p:nvSpPr>
-        <p:spPr>
-          <a:xfrm>
-            <a:off x="457200" y="5779008"/>
-            <a:ext cx="3383280" cy="320040"/>
-          </a:xfrm>
-          <a:prstGeom prst="rect">
-            <a:avLst/>
-          </a:prstGeom>
-          <a:noFill/>
-          <a:ln/>
-        </p:spPr>
-        <p:txBody>
-          <a:bodyPr wrap="square" lIns="0" tIns="0" rIns="0" bIns="0" rtlCol="0" anchor="ctr"/>
-          <a:lstStyle/>
-          <a:p>
-            <a:pPr algn="ctr" indent="0" marL="0">
-              <a:buNone/>
-            </a:pPr>
-            <a:r>
-              <a:rPr lang="en-US" sz="1100" dirty="0">
-                <a:solidFill>
-                  <a:srgbClr val="FFFFFF"/>
-                </a:solidFill>
-                <a:latin typeface="Calibri" pitchFamily="34" charset="0"/>
-                <a:ea typeface="Calibri" pitchFamily="34" charset="-122"/>
-                <a:cs typeface="Calibri" pitchFamily="34" charset="-120"/>
-              </a:rPr>
-              <a:t>discretionary: stressed vs healthy</a:t>
-            </a:r>
-            <a:endParaRPr lang="en-US" sz="1100" dirty="0"/>
-          </a:p>
-        </p:txBody>
-      </p:sp>
-      <p:sp>
-        <p:nvSpPr>
-          <p:cNvPr id="9" name="Text 6"/>
+      <p:pic>
+        <p:nvPicPr>
+          <p:cNvPr id="6" name="Image 1" descr="D:\BI10GroupYAPPERS\outputs\figures\t1_discretionary_gradient.png">    </p:cNvPr>
+          <p:cNvPicPr>
+            <a:picLocks noChangeAspect="1"/>
+          </p:cNvPicPr>
+          <p:nvPr/>
+        </p:nvPicPr>
+        <p:blipFill>
+          <a:blip r:embed="rId2"/>
+          <a:srcRect l="0" r="0" t="0" b="0"/>
+          <a:stretch/>
+        </p:blipFill>
+        <p:spPr>
+          <a:xfrm>
+            <a:off x="6263640" y="3063240"/>
+            <a:ext cx="5440680" cy="3200400"/>
+          </a:xfrm>
+          <a:prstGeom prst="rect">
+            <a:avLst/>
+          </a:prstGeom>
+        </p:spPr>
+      </p:pic>
+      <p:sp>
+        <p:nvSpPr>
+          <p:cNvPr id="7" name="Text 3"/>
           <p:cNvSpPr txBox="1"/>
           <p:nvPr/>
         </p:nvSpPr>
@@ -8825,7 +10406,7 @@
       </p:sp>
       <p:sp>
         <p:nvSpPr>
-          <p:cNvPr id="10" name="Text 7"/>
+          <p:cNvPr id="8" name="Text 4"/>
           <p:cNvSpPr txBox="1"/>
           <p:nvPr/>
         </p:nvSpPr>
@@ -8969,7 +10550,7 @@
                 <a:ea typeface="Cambria" pitchFamily="34" charset="-122"/>
                 <a:cs typeface="Cambria" pitchFamily="34" charset="-120"/>
               </a:rPr>
-              <a:t>Where the signal is NOT: geography &amp; age are flat</a:t>
+              <a:t>Where the signal is NOT: age is flat; categories are habits</a:t>
             </a:r>
             <a:endParaRPr lang="en-US" sz="2700" dirty="0"/>
           </a:p>
@@ -9012,7 +10593,7 @@
                 <a:ea typeface="Calibri" pitchFamily="34" charset="-122"/>
                 <a:cs typeface="Calibri" pitchFamily="34" charset="-120"/>
               </a:rPr>
-              <a:t>No regional digital divide — every high-spend province sits at ~41% digital (±0.5pp); province is not a lever.</a:t>
+              <a:t>Two shopping rhythms: Fuel = frequent touchpoint (1.59M ticket, bought by 96.8% of consumers); Groceries = 1.8× larger basket, bought by 99.3%.</a:t>
             </a:r>
             <a:endParaRPr lang="en-US" sz="1400" dirty="0"/>
           </a:p>
@@ -9033,7 +10614,7 @@
                 <a:ea typeface="Calibri" pitchFamily="34" charset="-122"/>
                 <a:cs typeface="Calibri" pitchFamily="34" charset="-120"/>
               </a:rPr>
-              <a:t>Two shopping rhythms: Fuel = frequent touchpoint (1.59M ticket); Groceries = 1.8× larger stock-up basket.</a:t>
+              <a:t>25–34 has the lowest point estimate (FHS 65.8, highest spend/income 0.716) — but bootstrap 95% CIs of all six age cohorts overlap (65.8–67.0).</a:t>
             </a:r>
             <a:endParaRPr lang="en-US" sz="1400" dirty="0"/>
           </a:p>
@@ -9054,7 +10635,7 @@
                 <a:ea typeface="Calibri" pitchFamily="34" charset="-122"/>
                 <a:cs typeface="Calibri" pitchFamily="34" charset="-120"/>
               </a:rPr>
-              <a:t>25–34 is the vulnerability hotspot (lowest FHS 65.8, highest spend/income 0.716) — but age spreads only 65.8–67.0, a weak differentiator. Target behavioural ratios, not the map or birth year.</a:t>
+              <a:t>Age does not separate financial health → target behavioural ratios, not birth year.</a:t>
             </a:r>
             <a:endParaRPr lang="en-US" sz="1400" dirty="0"/>
           </a:p>
@@ -9249,7 +10830,7 @@
                 <a:ea typeface="Calibri" pitchFamily="34" charset="-122"/>
                 <a:cs typeface="Calibri" pitchFamily="34" charset="-120"/>
               </a:rPr>
-              <a:t>TASK 2 · FINANCIAL HEALTH</a:t>
+              <a:t>TASK 1 · EDA</a:t>
             </a:r>
             <a:endParaRPr lang="en-US" sz="1100" dirty="0"/>
           </a:p>
@@ -9291,7 +10872,7 @@
                 <a:ea typeface="Cambria" pitchFamily="34" charset="-122"/>
                 <a:cs typeface="Cambria" pitchFamily="34" charset="-120"/>
               </a:rPr>
-              <a:t>Health is a tight band; distress is episodic, never chronic</a:t>
+              <a:t>No regional digital divide: high-spend provinces mirror the nation</a:t>
             </a:r>
             <a:endParaRPr lang="en-US" sz="2700" dirty="0"/>
           </a:p>
@@ -9334,7 +10915,7 @@
                 <a:ea typeface="Calibri" pitchFamily="34" charset="-122"/>
                 <a:cs typeface="Calibri" pitchFamily="34" charset="-120"/>
               </a:rPr>
-              <a:t>Consumer-level FHS: mean 66.3, range 42–81 — a narrow band with a mild low tail.</a:t>
+              <a:t>5 high-spend provinces with below-average digital share: Ha Noi, Dong Nai, Lam Dong, Hung Yen, Hai Phong.</a:t>
             </a:r>
             <a:endParaRPr lang="en-US" sz="1400" dirty="0"/>
           </a:p>
@@ -9355,7 +10936,7 @@
                 <a:ea typeface="Calibri" pitchFamily="34" charset="-122"/>
                 <a:cs typeface="Calibri" pitchFamily="34" charset="-120"/>
               </a:rPr>
-              <a:t>Stressed months only 0.9%; 0 of 999 consumers have a 12-month mean below 40.</a:t>
+              <a:t>POS 58.9–59.3% of transactions vs 58.8% nationally; QR ~20%, E-com ~8.5%, Mobile ~7.5%, Recurring ~5%.</a:t>
             </a:r>
             <a:endParaRPr lang="en-US" sz="1400" dirty="0"/>
           </a:p>
@@ -9376,7 +10957,7 @@
                 <a:ea typeface="Calibri" pitchFamily="34" charset="-122"/>
                 <a:cs typeface="Calibri" pitchFamily="34" charset="-120"/>
               </a:rPr>
-              <a:t>Distress is episodic — healthy people dip in specific months (Feb 73.6 → Dec 54.2).</a:t>
+              <a:t>Largest digital gap: −0.46pp (Dong Nai); digital value share 40.9–41.5% vs 41.5%.</a:t>
             </a:r>
             <a:endParaRPr lang="en-US" sz="1400" dirty="0"/>
           </a:p>
@@ -9397,7 +10978,7 @@
                 <a:ea typeface="Calibri" pitchFamily="34" charset="-122"/>
                 <a:cs typeface="Calibri" pitchFamily="34" charset="-120"/>
               </a:rPr>
-              <a:t>Interventions must be event-triggered on the current month, not a static risk list.</a:t>
+              <a:t>The gap is real but commercially negligible → province is not a lever for digital adoption.</a:t>
             </a:r>
             <a:endParaRPr lang="en-US" sz="1400" dirty="0"/>
           </a:p>
@@ -9405,7 +10986,7 @@
       </p:sp>
       <p:pic>
         <p:nvPicPr>
-          <p:cNvPr id="5" name="Image 0" descr="D:\BI10GroupYAPPERS\outputs\figures\t2_fhs_distribution.png">    </p:cNvPr>
+          <p:cNvPr id="5" name="Image 0" descr="D:\BI10GroupYAPPERS\outputs\figures\t1_province_channel.png">    </p:cNvPr>
           <p:cNvPicPr>
             <a:picLocks noChangeAspect="1"/>
           </p:cNvPicPr>
@@ -9428,7 +11009,107 @@
       </p:pic>
       <p:sp>
         <p:nvSpPr>
-          <p:cNvPr id="6" name="Text 3"/>
+          <p:cNvPr id="6" name="Shape 3"/>
+          <p:cNvSpPr/>
+          <p:nvPr/>
+        </p:nvSpPr>
+        <p:spPr>
+          <a:xfrm>
+            <a:off x="457200" y="5029200"/>
+            <a:ext cx="3383280" cy="1097280"/>
+          </a:xfrm>
+          <a:prstGeom prst="roundRect">
+            <a:avLst>
+              <a:gd name="adj" fmla="val 6667"/>
+            </a:avLst>
+          </a:prstGeom>
+          <a:solidFill>
+            <a:srgbClr val="12435E"/>
+          </a:solidFill>
+          <a:ln/>
+        </p:spPr>
+      </p:sp>
+      <p:sp>
+        <p:nvSpPr>
+          <p:cNvPr id="7" name="Text 4"/>
+          <p:cNvSpPr txBox="1"/>
+          <p:nvPr/>
+        </p:nvSpPr>
+        <p:spPr>
+          <a:xfrm>
+            <a:off x="457200" y="5138928"/>
+            <a:ext cx="3383280" cy="658368"/>
+          </a:xfrm>
+          <a:prstGeom prst="rect">
+            <a:avLst/>
+          </a:prstGeom>
+          <a:noFill/>
+          <a:ln/>
+        </p:spPr>
+        <p:txBody>
+          <a:bodyPr wrap="square" lIns="0" tIns="0" rIns="0" bIns="0" rtlCol="0" anchor="ctr"/>
+          <a:lstStyle/>
+          <a:p>
+            <a:pPr algn="ctr" indent="0" marL="0">
+              <a:buNone/>
+            </a:pPr>
+            <a:r>
+              <a:rPr lang="en-US" sz="2800" b="1" dirty="0">
+                <a:solidFill>
+                  <a:srgbClr val="1FC3A6"/>
+                </a:solidFill>
+                <a:latin typeface="Cambria" pitchFamily="34" charset="0"/>
+                <a:ea typeface="Cambria" pitchFamily="34" charset="-122"/>
+                <a:cs typeface="Cambria" pitchFamily="34" charset="-120"/>
+              </a:rPr>
+              <a:t>≤ 0.46pp</a:t>
+            </a:r>
+            <a:endParaRPr lang="en-US" sz="2800" dirty="0"/>
+          </a:p>
+        </p:txBody>
+      </p:sp>
+      <p:sp>
+        <p:nvSpPr>
+          <p:cNvPr id="8" name="Text 5"/>
+          <p:cNvSpPr txBox="1"/>
+          <p:nvPr/>
+        </p:nvSpPr>
+        <p:spPr>
+          <a:xfrm>
+            <a:off x="457200" y="5779008"/>
+            <a:ext cx="3383280" cy="320040"/>
+          </a:xfrm>
+          <a:prstGeom prst="rect">
+            <a:avLst/>
+          </a:prstGeom>
+          <a:noFill/>
+          <a:ln/>
+        </p:spPr>
+        <p:txBody>
+          <a:bodyPr wrap="square" lIns="0" tIns="0" rIns="0" bIns="0" rtlCol="0" anchor="ctr"/>
+          <a:lstStyle/>
+          <a:p>
+            <a:pPr algn="ctr" indent="0" marL="0">
+              <a:buNone/>
+            </a:pPr>
+            <a:r>
+              <a:rPr lang="en-US" sz="1100" dirty="0">
+                <a:solidFill>
+                  <a:srgbClr val="FFFFFF"/>
+                </a:solidFill>
+                <a:latin typeface="Calibri" pitchFamily="34" charset="0"/>
+                <a:ea typeface="Calibri" pitchFamily="34" charset="-122"/>
+                <a:cs typeface="Calibri" pitchFamily="34" charset="-120"/>
+              </a:rPr>
+              <a:t>largest digital-share gap</a:t>
+            </a:r>
+            <a:endParaRPr lang="en-US" sz="1100" dirty="0"/>
+          </a:p>
+        </p:txBody>
+      </p:sp>
+      <p:sp>
+        <p:nvSpPr>
+          <p:cNvPr id="9" name="Text 6"/>
           <p:cNvSpPr txBox="1"/>
           <p:nvPr/>
         </p:nvSpPr>
@@ -9467,7 +11148,7 @@
       </p:sp>
       <p:sp>
         <p:nvSpPr>
-          <p:cNvPr id="7" name="Text 4"/>
+          <p:cNvPr id="10" name="Text 7"/>
           <p:cNvSpPr txBox="1"/>
           <p:nvPr/>
         </p:nvSpPr>
@@ -9611,7 +11292,7 @@
                 <a:ea typeface="Cambria" pitchFamily="34" charset="-122"/>
                 <a:cs typeface="Cambria" pitchFamily="34" charset="-120"/>
               </a:rPr>
-              <a:t>Low health is an overspend story</a:t>
+              <a:t>Health is a tight band; distress is episodic, never chronic</a:t>
             </a:r>
             <a:endParaRPr lang="en-US" sz="2700" dirty="0"/>
           </a:p>
@@ -9654,7 +11335,7 @@
                 <a:ea typeface="Calibri" pitchFamily="34" charset="-122"/>
                 <a:cs typeface="Calibri" pitchFamily="34" charset="-120"/>
               </a:rPr>
-              <a:t>Top correlates: spend-to-income −0.90, credit-utilization −0.86, volatility −0.50.</a:t>
+              <a:t>Consumer-level FHS: mean 66.3, range 42–81 — a narrow band with a mild low tail.</a:t>
             </a:r>
             <a:endParaRPr lang="en-US" sz="1400" dirty="0"/>
           </a:p>
@@ -9675,7 +11356,7 @@
                 <a:ea typeface="Calibri" pitchFamily="34" charset="-122"/>
                 <a:cs typeface="Calibri" pitchFamily="34" charset="-120"/>
               </a:rPr>
-              <a:t>Stressed vs healthy months: spend/income 2.10 vs 0.29; util 0.58 vs 0.08.</a:t>
+              <a:t>Stressed months only 0.9%; 0 of 999 consumers have a 12-month mean below 40.</a:t>
             </a:r>
             <a:endParaRPr lang="en-US" sz="1400" dirty="0"/>
           </a:p>
@@ -9696,7 +11377,7 @@
                 <a:ea typeface="Calibri" pitchFamily="34" charset="-122"/>
                 <a:cs typeface="Calibri" pitchFamily="34" charset="-120"/>
               </a:rPr>
-              <a:t>Counter-intuitive: stressed months are MORE engaged (81.1 vs 72.7, r −0.30).</a:t>
+              <a:t>Distress is episodic — healthy people dip in specific months (Feb 73.6 → Dec 54.2).</a:t>
             </a:r>
             <a:endParaRPr lang="en-US" sz="1400" dirty="0"/>
           </a:p>
@@ -9717,7 +11398,7 @@
                 <a:ea typeface="Calibri" pitchFamily="34" charset="-122"/>
                 <a:cs typeface="Calibri" pitchFamily="34" charset="-120"/>
               </a:rPr>
-              <a:t>Demographics add nothing — score &amp; alert on two ratios, reach via the channel they use.</a:t>
+              <a:t>Interventions must be event-triggered on the current month, not a static risk list.</a:t>
             </a:r>
             <a:endParaRPr lang="en-US" sz="1400" dirty="0"/>
           </a:p>
@@ -9725,7 +11406,7 @@
       </p:sp>
       <p:pic>
         <p:nvPicPr>
-          <p:cNvPr id="5" name="Image 0" descr="D:\BI10GroupYAPPERS\outputs\figures\t2_low_health_drivers.png">    </p:cNvPr>
+          <p:cNvPr id="5" name="Image 0" descr="D:\BI10GroupYAPPERS\outputs\figures\t2_fhs_distribution.png">    </p:cNvPr>
           <p:cNvPicPr>
             <a:picLocks noChangeAspect="1"/>
           </p:cNvPicPr>
@@ -9754,45 +11435,6 @@
         </p:nvSpPr>
         <p:spPr>
           <a:xfrm>
-            <a:off x="6446520" y="5852160"/>
-            <a:ext cx="5303520" cy="548640"/>
-          </a:xfrm>
-          <a:prstGeom prst="rect">
-            <a:avLst/>
-          </a:prstGeom>
-          <a:noFill/>
-          <a:ln/>
-        </p:spPr>
-        <p:txBody>
-          <a:bodyPr wrap="square" lIns="0" tIns="0" rIns="0" bIns="0" rtlCol="0" anchor="t"/>
-          <a:lstStyle/>
-          <a:p>
-            <a:pPr indent="0" marL="0">
-              <a:buNone/>
-            </a:pPr>
-            <a:r>
-              <a:rPr lang="en-US" sz="1000" i="1" dirty="0">
-                <a:solidFill>
-                  <a:srgbClr val="5F7180"/>
-                </a:solidFill>
-                <a:latin typeface="Calibri" pitchFamily="34" charset="0"/>
-                <a:ea typeface="Calibri" pitchFamily="34" charset="-122"/>
-                <a:cs typeface="Calibri" pitchFamily="34" charset="-120"/>
-              </a:rPr>
-              <a:t>⚠  FHS and essential/discretionary ratios share spend fields — directional, not causal.</a:t>
-            </a:r>
-            <a:endParaRPr lang="en-US" sz="1000" dirty="0"/>
-          </a:p>
-        </p:txBody>
-      </p:sp>
-      <p:sp>
-        <p:nvSpPr>
-          <p:cNvPr id="7" name="Text 4"/>
-          <p:cNvSpPr txBox="1"/>
-          <p:nvPr/>
-        </p:nvSpPr>
-        <p:spPr>
-          <a:xfrm>
             <a:off x="457200" y="6473952"/>
             <a:ext cx="5486400" cy="274320"/>
           </a:xfrm>
@@ -9826,7 +11468,7 @@
       </p:sp>
       <p:sp>
         <p:nvSpPr>
-          <p:cNvPr id="8" name="Text 5"/>
+          <p:cNvPr id="7" name="Text 4"/>
           <p:cNvSpPr txBox="1"/>
           <p:nvPr/>
         </p:nvSpPr>

--- a/draft/YAPPERS_BI10_R01.pptx
+++ b/draft/YAPPERS_BI10_R01.pptx
@@ -699,7 +699,7 @@
           <a:p>
             <a:r>
               <a:rPr lang="en-US" dirty="0"/>
-              <a:t>More than half of every stress episode happens to someone we can reach in-app — and we now know when.</a:t>
+              <a:t>More than half of every stress episode happens to someone we can reach in-app — and we know when.</a:t>
             </a:r>
             <a:endParaRPr lang="en-US" dirty="0"/>
           </a:p>
@@ -787,7 +787,7 @@
           <a:p>
             <a:r>
               <a:rPr lang="en-US" dirty="0"/>
-              <a:t>Deliverable 3 — the honest answer: the one demographic gap is really a spending gap.</a:t>
+              <a:t>Deliverable 3 — the one demographic gap is really a spending gap.</a:t>
             </a:r>
             <a:endParaRPr lang="en-US" dirty="0"/>
           </a:p>
@@ -875,7 +875,7 @@
           <a:p>
             <a:r>
               <a:rPr lang="en-US" dirty="0"/>
-              <a:t>Bar, not pie: a pie would hide the 1% tail. Segment on the behaviours underneath, not the score.</a:t>
+              <a:t>Histogram for a continuous score, bar for ordered segments (a pie would hide the 1% tail), bar for nominal channels.</a:t>
             </a:r>
             <a:endParaRPr lang="en-US" dirty="0"/>
           </a:p>
@@ -1051,7 +1051,7 @@
           <a:p>
             <a:r>
               <a:rPr lang="en-US" dirty="0"/>
-              <a:t>The sensitivity table is the answer to 'why this cutoff and not tighter or looser'.</a:t>
+              <a:t>The sensitivity numbers answer 'why this cutoff and not a stricter or looser one'.</a:t>
             </a:r>
             <a:endParaRPr lang="en-US" dirty="0"/>
           </a:p>
@@ -1139,7 +1139,7 @@
           <a:p>
             <a:r>
               <a:rPr lang="en-US" dirty="0"/>
-              <a:t>Moderate silhouette is expected for a behavioural continuum; the next slides validate it.</a:t>
+              <a:t>Preprocessed dataset + data dictionary are in the ZIP (task4_features.csv, data_dictionary_task4.md).</a:t>
             </a:r>
             <a:endParaRPr lang="en-US" dirty="0"/>
           </a:p>
@@ -1227,7 +1227,7 @@
           <a:p>
             <a:r>
               <a:rPr lang="en-US" dirty="0"/>
-              <a:t>Segment 2 is the addressable wellbeing priority.</a:t>
+              <a:t>The heatmap is the side-by-side comparison the brief asks for.</a:t>
             </a:r>
             <a:endParaRPr lang="en-US" dirty="0"/>
           </a:p>
@@ -1403,7 +1403,7 @@
           <a:p>
             <a:r>
               <a:rPr lang="en-US" dirty="0"/>
-              <a:t>One tool per required type, each bound to an exact size, a real ratio and now a timing.</a:t>
+              <a:t>One tool per required type, each with exact size, %, the column it rests on, and a KPI.</a:t>
             </a:r>
             <a:endParaRPr lang="en-US" dirty="0"/>
           </a:p>
@@ -1931,7 +1931,7 @@
           <a:p>
             <a:r>
               <a:rPr lang="en-US" dirty="0"/>
-              <a:t>Plant the two rules: ratios over magnitudes, wellbeing over credit.</a:t>
+              <a:t>Two rules govern the deck: ratios over magnitudes, wellbeing over credit. Data quality is clean except the documented synthetic caveats.</a:t>
             </a:r>
             <a:endParaRPr lang="en-US" dirty="0"/>
           </a:p>
@@ -2195,7 +2195,7 @@
           <a:p>
             <a:r>
               <a:rPr lang="en-US" dirty="0"/>
-              <a:t>One honest negative (age) and one habit insight (fuel/groceries are near-universal).</a:t>
+              <a:t>Answer Q4 and Q5 exactly as asked, then show the honest limit (CI overlap).</a:t>
             </a:r>
             <a:endParaRPr lang="en-US" dirty="0"/>
           </a:p>
@@ -2283,7 +2283,7 @@
           <a:p>
             <a:r>
               <a:rPr lang="en-US" dirty="0"/>
-              <a:t>Q3 asked for the channel breakdown — it answers itself: every hub has the national mix.</a:t>
+              <a:t>Q3 asked for the channel breakdown — every hub has the national mix.</a:t>
             </a:r>
             <a:endParaRPr lang="en-US" dirty="0"/>
           </a:p>
@@ -3002,7 +3002,7 @@
                 <a:ea typeface="Calibri" pitchFamily="34" charset="-122"/>
                 <a:cs typeface="Calibri" pitchFamily="34" charset="-120"/>
               </a:rPr>
-              <a:t>TASK 2 · FINANCIAL HEALTH</a:t>
+              <a:t>TASK 2 · FINANCIAL HEALTH · D2</a:t>
             </a:r>
             <a:endParaRPr lang="en-US" sz="1100" dirty="0"/>
           </a:p>
@@ -3058,8 +3058,8 @@
         </p:nvSpPr>
         <p:spPr>
           <a:xfrm>
-            <a:off x="457200" y="1463040"/>
-            <a:ext cx="11247120" cy="1508760"/>
+            <a:off x="457200" y="1417320"/>
+            <a:ext cx="11247120" cy="1600200"/>
           </a:xfrm>
           <a:prstGeom prst="rect">
             <a:avLst/>
@@ -3073,13 +3073,13 @@
           <a:p>
             <a:pPr marL="177800" indent="-177800">
               <a:spcAft>
-                <a:spcPts val="800"/>
+                <a:spcPts val="700"/>
               </a:spcAft>
               <a:buSzPct val="100000"/>
               <a:buChar char="•"/>
             </a:pPr>
             <a:r>
-              <a:rPr lang="en-US" sz="1400" dirty="0">
+              <a:rPr lang="en-US" sz="1250" dirty="0">
                 <a:solidFill>
                   <a:srgbClr val="1B2A36"/>
                 </a:solidFill>
@@ -3087,20 +3087,20 @@
                 <a:ea typeface="Calibri" pitchFamily="34" charset="-122"/>
                 <a:cs typeface="Calibri" pitchFamily="34" charset="-120"/>
               </a:rPr>
-              <a:t>Top correlates: spend-to-income −0.90, credit-utilization −0.86, volatility −0.50. Stressed vs healthy months: spend/income 2.10 vs 0.29.</a:t>
-            </a:r>
-            <a:endParaRPr lang="en-US" sz="1400" dirty="0"/>
+              <a:t>Top correlates with FHS (month grain, n = 10,992): spend-to-income −0.90, credit-utilization −0.86, volatility −0.50. Stressed vs healthy months: spend/income 2.10 vs 0.29; utilization 0.58 vs 0.08.</a:t>
+            </a:r>
+            <a:endParaRPr lang="en-US" sz="1250" dirty="0"/>
           </a:p>
           <a:p>
             <a:pPr marL="177800" indent="-177800">
               <a:spcAft>
-                <a:spcPts val="800"/>
+                <a:spcPts val="700"/>
               </a:spcAft>
               <a:buSzPct val="100000"/>
               <a:buChar char="•"/>
             </a:pPr>
             <a:r>
-              <a:rPr lang="en-US" sz="1400" dirty="0">
+              <a:rPr lang="en-US" sz="1250" dirty="0">
                 <a:solidFill>
                   <a:srgbClr val="1B2A36"/>
                 </a:solidFill>
@@ -3108,20 +3108,20 @@
                 <a:ea typeface="Calibri" pitchFamily="34" charset="-122"/>
                 <a:cs typeface="Calibri" pitchFamily="34" charset="-120"/>
               </a:rPr>
-              <a:t>Step by step: mean FHS falls 72.4 → 68.4 → 66.0 → 63.8 → 60.9 across spend-to-income quintiles (−11.4 pts, ~10× the age spread).</a:t>
-            </a:r>
-            <a:endParaRPr lang="en-US" sz="1400" dirty="0"/>
+              <a:t>Step by step: mean FHS 72.4 → 68.4 → 66.0 → 63.8 → 60.9 across spend-to-income quintiles (−11.4 pts, ~10× the age spread).</a:t>
+            </a:r>
+            <a:endParaRPr lang="en-US" sz="1250" dirty="0"/>
           </a:p>
           <a:p>
             <a:pPr marL="177800" indent="-177800">
               <a:spcAft>
-                <a:spcPts val="800"/>
+                <a:spcPts val="700"/>
               </a:spcAft>
               <a:buSzPct val="100000"/>
               <a:buChar char="•"/>
             </a:pPr>
             <a:r>
-              <a:rPr lang="en-US" sz="1400" dirty="0">
+              <a:rPr lang="en-US" sz="1250" dirty="0">
                 <a:solidFill>
                   <a:srgbClr val="1B2A36"/>
                 </a:solidFill>
@@ -3131,7 +3131,7 @@
               </a:rPr>
               <a:t>Counter-intuitive: stressed months are MORE engaged (81.1 vs 72.7). FHS and ratios share spend fields — directional, not causal.</a:t>
             </a:r>
-            <a:endParaRPr lang="en-US" sz="1400" dirty="0"/>
+            <a:endParaRPr lang="en-US" sz="1250" dirty="0"/>
           </a:p>
         </p:txBody>
       </p:sp>
@@ -3150,8 +3150,8 @@
         </p:blipFill>
         <p:spPr>
           <a:xfrm>
-            <a:off x="502920" y="3063240"/>
-            <a:ext cx="5440680" cy="3200400"/>
+            <a:off x="502920" y="3017520"/>
+            <a:ext cx="5440680" cy="3063240"/>
           </a:xfrm>
           <a:prstGeom prst="rect">
             <a:avLst/>
@@ -3173,8 +3173,8 @@
         </p:blipFill>
         <p:spPr>
           <a:xfrm>
-            <a:off x="6263640" y="3063240"/>
-            <a:ext cx="5440680" cy="3200400"/>
+            <a:off x="6263640" y="3017520"/>
+            <a:ext cx="5440680" cy="3063240"/>
           </a:xfrm>
           <a:prstGeom prst="rect">
             <a:avLst/>
@@ -3184,6 +3184,45 @@
       <p:sp>
         <p:nvSpPr>
           <p:cNvPr id="7" name="Text 3"/>
+          <p:cNvSpPr txBox="1"/>
+          <p:nvPr/>
+        </p:nvSpPr>
+        <p:spPr>
+          <a:xfrm>
+            <a:off x="502920" y="6144768"/>
+            <a:ext cx="11201400" cy="256032"/>
+          </a:xfrm>
+          <a:prstGeom prst="rect">
+            <a:avLst/>
+          </a:prstGeom>
+          <a:noFill/>
+          <a:ln/>
+        </p:spPr>
+        <p:txBody>
+          <a:bodyPr wrap="square" lIns="0" tIns="0" rIns="0" bIns="0" rtlCol="0" anchor="t"/>
+          <a:lstStyle/>
+          <a:p>
+            <a:pPr indent="0" marL="0">
+              <a:buNone/>
+            </a:pPr>
+            <a:r>
+              <a:rPr lang="en-US" sz="850" i="1" dirty="0">
+                <a:solidFill>
+                  <a:srgbClr val="5F7180"/>
+                </a:solidFill>
+                <a:latin typeface="Calibri" pitchFamily="34" charset="0"/>
+                <a:ea typeface="Calibri" pitchFamily="34" charset="-122"/>
+                <a:cs typeface="Calibri" pitchFamily="34" charset="-120"/>
+              </a:rPr>
+              <a:t>Source: consumer_financial_health_engagement_2025 — 10,992 consumer-months, 999 consumers, 2025.</a:t>
+            </a:r>
+            <a:endParaRPr lang="en-US" sz="850" dirty="0"/>
+          </a:p>
+        </p:txBody>
+      </p:sp>
+      <p:sp>
+        <p:nvSpPr>
+          <p:cNvPr id="8" name="Text 4"/>
           <p:cNvSpPr txBox="1"/>
           <p:nvPr/>
         </p:nvSpPr>
@@ -3222,7 +3261,7 @@
       </p:sp>
       <p:sp>
         <p:nvSpPr>
-          <p:cNvPr id="8" name="Text 4"/>
+          <p:cNvPr id="9" name="Text 5"/>
           <p:cNvSpPr txBox="1"/>
           <p:nvPr/>
         </p:nvSpPr>
@@ -3324,7 +3363,7 @@
                 <a:ea typeface="Calibri" pitchFamily="34" charset="-122"/>
                 <a:cs typeface="Calibri" pitchFamily="34" charset="-120"/>
               </a:rPr>
-              <a:t>TASK 2 · FINANCIAL HEALTH</a:t>
+              <a:t>TASK 2 · FINANCIAL HEALTH · D4</a:t>
             </a:r>
             <a:endParaRPr lang="en-US" sz="1100" dirty="0"/>
           </a:p>
@@ -3380,8 +3419,8 @@
         </p:nvSpPr>
         <p:spPr>
           <a:xfrm>
-            <a:off x="457200" y="1463040"/>
-            <a:ext cx="11247120" cy="1508760"/>
+            <a:off x="457200" y="1417320"/>
+            <a:ext cx="11247120" cy="1600200"/>
           </a:xfrm>
           <a:prstGeom prst="rect">
             <a:avLst/>
@@ -3395,13 +3434,13 @@
           <a:p>
             <a:pPr marL="177800" indent="-177800">
               <a:spcAft>
-                <a:spcPts val="800"/>
+                <a:spcPts val="700"/>
               </a:spcAft>
               <a:buSzPct val="100000"/>
               <a:buChar char="•"/>
             </a:pPr>
             <a:r>
-              <a:rPr lang="en-US" sz="1400" dirty="0">
+              <a:rPr lang="en-US" sz="1250" dirty="0">
                 <a:solidFill>
                   <a:srgbClr val="1B2A36"/>
                 </a:solidFill>
@@ -3409,20 +3448,20 @@
                 <a:ea typeface="Calibri" pitchFamily="34" charset="-122"/>
                 <a:cs typeface="Calibri" pitchFamily="34" charset="-120"/>
               </a:rPr>
-              <a:t>Rule (month grain): FHS &lt; 40 AND engagement ≥ p75 (81.4) → 43 consumers = 52% of ALL stress episodes; stable at p70/p80 (44/41 consumers, 53%/48%).</a:t>
-            </a:r>
-            <a:endParaRPr lang="en-US" sz="1400" dirty="0"/>
+              <a:t>Reproducible rule (consumer-month): financial_health_score &lt; 40 AND engagement_score ≥ p75 (81.4) → 43 consumers / 49 months = 52% of ALL stress episodes. Robust: p70 / p80 give 44 / 41 consumers (53% / 48%).</a:t>
+            </a:r>
+            <a:endParaRPr lang="en-US" sz="1250" dirty="0"/>
           </a:p>
           <a:p>
             <a:pPr marL="177800" indent="-177800">
               <a:spcAft>
-                <a:spcPts val="800"/>
+                <a:spcPts val="700"/>
               </a:spcAft>
               <a:buSzPct val="100000"/>
               <a:buChar char="•"/>
             </a:pPr>
             <a:r>
-              <a:rPr lang="en-US" sz="1400" dirty="0">
+              <a:rPr lang="en-US" sz="1250" dirty="0">
                 <a:solidFill>
                   <a:srgbClr val="1B2A36"/>
                 </a:solidFill>
@@ -3430,20 +3469,20 @@
                 <a:ea typeface="Calibri" pitchFamily="34" charset="-122"/>
                 <a:cs typeface="Calibri" pitchFamily="34" charset="-120"/>
               </a:rPr>
-              <a:t>Stressed months put 23.5% of spend into 22–23h vs 8.3% for healthy — bigger late-night tickets, not more of them (count 11.6% vs 9.7%).</a:t>
-            </a:r>
-            <a:endParaRPr lang="en-US" sz="1400" dirty="0"/>
+              <a:t>Profile: spend/income 1.89, credit-utilization 0.55, online share 0.49 (2× national) — active, digital, over-extended.</a:t>
+            </a:r>
+            <a:endParaRPr lang="en-US" sz="1250" dirty="0"/>
           </a:p>
           <a:p>
             <a:pPr marL="177800" indent="-177800">
               <a:spcAft>
-                <a:spcPts val="800"/>
+                <a:spcPts val="700"/>
               </a:spcAft>
               <a:buSzPct val="100000"/>
               <a:buChar char="•"/>
             </a:pPr>
             <a:r>
-              <a:rPr lang="en-US" sz="1400" dirty="0">
+              <a:rPr lang="en-US" sz="1250" dirty="0">
                 <a:solidFill>
                   <a:srgbClr val="1B2A36"/>
                 </a:solidFill>
@@ -3451,9 +3490,9 @@
                 <a:ea typeface="Calibri" pitchFamily="34" charset="-122"/>
                 <a:cs typeface="Calibri" pitchFamily="34" charset="-120"/>
               </a:rPr>
-              <a:t>Sunday + Monday carry 42% of stressed spend (vs 34%) → send pacing alerts Sunday–Monday evenings, before 22:00.</a:t>
-            </a:r>
-            <a:endParaRPr lang="en-US" sz="1400" dirty="0"/>
+              <a:t>Timing (transactions): stressed months put 23.5% of spend value into 22–23h vs 8.3% (bigger late tickets, not more: count 11.6% vs 9.7%); Sunday + Monday = 42% vs 34% → alerts Sun–Mon evenings, before 22:00.</a:t>
+            </a:r>
+            <a:endParaRPr lang="en-US" sz="1250" dirty="0"/>
           </a:p>
         </p:txBody>
       </p:sp>
@@ -3472,8 +3511,8 @@
         </p:blipFill>
         <p:spPr>
           <a:xfrm>
-            <a:off x="502920" y="3063240"/>
-            <a:ext cx="5440680" cy="3200400"/>
+            <a:off x="502920" y="3017520"/>
+            <a:ext cx="5440680" cy="3063240"/>
           </a:xfrm>
           <a:prstGeom prst="rect">
             <a:avLst/>
@@ -3495,8 +3534,8 @@
         </p:blipFill>
         <p:spPr>
           <a:xfrm>
-            <a:off x="6263640" y="3063240"/>
-            <a:ext cx="5440680" cy="3200400"/>
+            <a:off x="6263640" y="3017520"/>
+            <a:ext cx="5440680" cy="3063240"/>
           </a:xfrm>
           <a:prstGeom prst="rect">
             <a:avLst/>
@@ -3506,6 +3545,45 @@
       <p:sp>
         <p:nvSpPr>
           <p:cNvPr id="7" name="Text 3"/>
+          <p:cNvSpPr txBox="1"/>
+          <p:nvPr/>
+        </p:nvSpPr>
+        <p:spPr>
+          <a:xfrm>
+            <a:off x="502920" y="6144768"/>
+            <a:ext cx="11201400" cy="256032"/>
+          </a:xfrm>
+          <a:prstGeom prst="rect">
+            <a:avLst/>
+          </a:prstGeom>
+          <a:noFill/>
+          <a:ln/>
+        </p:spPr>
+        <p:txBody>
+          <a:bodyPr wrap="square" lIns="0" tIns="0" rIns="0" bIns="0" rtlCol="0" anchor="t"/>
+          <a:lstStyle/>
+          <a:p>
+            <a:pPr indent="0" marL="0">
+              <a:buNone/>
+            </a:pPr>
+            <a:r>
+              <a:rPr lang="en-US" sz="850" i="1" dirty="0">
+                <a:solidFill>
+                  <a:srgbClr val="5F7180"/>
+                </a:solidFill>
+                <a:latin typeface="Calibri" pitchFamily="34" charset="0"/>
+                <a:ea typeface="Calibri" pitchFamily="34" charset="-122"/>
+                <a:cs typeface="Calibri" pitchFamily="34" charset="-120"/>
+              </a:rPr>
+              <a:t>Source: consumer_financial_health_engagement_2025 — 10,992 consumer-months, 999 consumers, 2025. Timing: Source: transactions file joined to the consumer-month file on consumer_id + month.</a:t>
+            </a:r>
+            <a:endParaRPr lang="en-US" sz="850" dirty="0"/>
+          </a:p>
+        </p:txBody>
+      </p:sp>
+      <p:sp>
+        <p:nvSpPr>
+          <p:cNvPr id="8" name="Text 4"/>
           <p:cNvSpPr txBox="1"/>
           <p:nvPr/>
         </p:nvSpPr>
@@ -3544,7 +3622,7 @@
       </p:sp>
       <p:sp>
         <p:nvSpPr>
-          <p:cNvPr id="8" name="Text 4"/>
+          <p:cNvPr id="9" name="Text 5"/>
           <p:cNvSpPr txBox="1"/>
           <p:nvPr/>
         </p:nvSpPr>
@@ -3646,7 +3724,7 @@
                 <a:ea typeface="Calibri" pitchFamily="34" charset="-122"/>
                 <a:cs typeface="Calibri" pitchFamily="34" charset="-120"/>
               </a:rPr>
-              <a:t>TASK 2 · FINANCIAL HEALTH</a:t>
+              <a:t>TASK 2 · FINANCIAL HEALTH · D3</a:t>
             </a:r>
             <a:endParaRPr lang="en-US" sz="1100" dirty="0"/>
           </a:p>
@@ -3702,8 +3780,8 @@
         </p:nvSpPr>
         <p:spPr>
           <a:xfrm>
-            <a:off x="457200" y="1463040"/>
-            <a:ext cx="11247120" cy="1417320"/>
+            <a:off x="457200" y="1417320"/>
+            <a:ext cx="11247120" cy="1463040"/>
           </a:xfrm>
           <a:prstGeom prst="rect">
             <a:avLst/>
@@ -3717,13 +3795,13 @@
           <a:p>
             <a:pPr marL="177800" indent="-177800">
               <a:spcAft>
-                <a:spcPts val="800"/>
+                <a:spcPts val="700"/>
               </a:spcAft>
               <a:buSzPct val="100000"/>
               <a:buChar char="•"/>
             </a:pPr>
             <a:r>
-              <a:rPr lang="en-US" sz="1400" dirty="0">
+              <a:rPr lang="en-US" sz="1250" dirty="0">
                 <a:solidFill>
                   <a:srgbClr val="1B2A36"/>
                 </a:solidFill>
@@ -3731,20 +3809,20 @@
                 <a:ea typeface="Calibri" pitchFamily="34" charset="-122"/>
                 <a:cs typeface="Calibri" pitchFamily="34" charset="-120"/>
               </a:rPr>
-              <a:t>Province: 22 of 27 provinces (≥15 consumers) have a 95% CI containing the national mean 66.3. Age: all six cohort CIs overlap.</a:t>
-            </a:r>
-            <a:endParaRPr lang="en-US" sz="1400" dirty="0"/>
+              <a:t>Province: 22 of 27 provinces (≥ 15 consumers) have a 95% CI containing the national mean 66.3 (extremes Thai Nguyen 63.0, HCMC 67.6). Age: all six cohort CIs overlap (65.8–67.0).</a:t>
+            </a:r>
+            <a:endParaRPr lang="en-US" sz="1250" dirty="0"/>
           </a:p>
           <a:p>
             <a:pPr marL="177800" indent="-177800">
               <a:spcAft>
-                <a:spcPts val="800"/>
+                <a:spcPts val="700"/>
               </a:spcAft>
               <a:buSzPct val="100000"/>
               <a:buChar char="•"/>
             </a:pPr>
             <a:r>
-              <a:rPr lang="en-US" sz="1400" dirty="0">
+              <a:rPr lang="en-US" sz="1250" dirty="0">
                 <a:solidFill>
                   <a:srgbClr val="1B2A36"/>
                 </a:solidFill>
@@ -3752,20 +3830,20 @@
                 <a:ea typeface="Calibri" pitchFamily="34" charset="-122"/>
                 <a:cs typeface="Calibri" pitchFamily="34" charset="-120"/>
               </a:rPr>
-              <a:t>Occupation (396 titles → 8 groups): Engineering/IT 69.1 and Business/finance 68.7 vs Office/public 64.5 and Manual 62.9 — a ~6-pt spread that mirrors spend-to-income (0.60 vs 0.76–0.79).</a:t>
-            </a:r>
-            <a:endParaRPr lang="en-US" sz="1400" dirty="0"/>
+              <a:t>Occupation (396 raw titles → 8 keyword groups): Engineering/science/IT 69.1 (n = 229), Business/finance 68.7 (126) vs Office/public 64.5 (443), Manual/trades 62.9 (23) — a ~6-pt spread that mirrors spend-to-income (0.60 vs 0.76–0.79).</a:t>
+            </a:r>
+            <a:endParaRPr lang="en-US" sz="1250" dirty="0"/>
           </a:p>
           <a:p>
             <a:pPr marL="177800" indent="-177800">
               <a:spcAft>
-                <a:spcPts val="800"/>
+                <a:spcPts val="700"/>
               </a:spcAft>
               <a:buSzPct val="100000"/>
               <a:buChar char="•"/>
             </a:pPr>
             <a:r>
-              <a:rPr lang="en-US" sz="1400" dirty="0">
+              <a:rPr lang="en-US" sz="1250" dirty="0">
                 <a:solidFill>
                   <a:srgbClr val="1B2A36"/>
                 </a:solidFill>
@@ -3773,9 +3851,9 @@
                 <a:ea typeface="Calibri" pitchFamily="34" charset="-122"/>
                 <a:cs typeface="Calibri" pitchFamily="34" charset="-120"/>
               </a:rPr>
-              <a:t>Demographics act through the overspend ratio → target the ratio, never the group.</a:t>
-            </a:r>
-            <a:endParaRPr lang="en-US" sz="1400" dirty="0"/>
+              <a:t>Demographics act through the overspend ratio → target the ratio, never the group (fairness).</a:t>
+            </a:r>
+            <a:endParaRPr lang="en-US" sz="1250" dirty="0"/>
           </a:p>
         </p:txBody>
       </p:sp>
@@ -3795,7 +3873,7 @@
         <p:spPr>
           <a:xfrm>
             <a:off x="457200" y="2926080"/>
-            <a:ext cx="11247120" cy="3474720"/>
+            <a:ext cx="11247120" cy="3154680"/>
           </a:xfrm>
           <a:prstGeom prst="rect">
             <a:avLst/>
@@ -3805,6 +3883,45 @@
       <p:sp>
         <p:nvSpPr>
           <p:cNvPr id="6" name="Text 3"/>
+          <p:cNvSpPr txBox="1"/>
+          <p:nvPr/>
+        </p:nvSpPr>
+        <p:spPr>
+          <a:xfrm>
+            <a:off x="457200" y="6144768"/>
+            <a:ext cx="11247120" cy="256032"/>
+          </a:xfrm>
+          <a:prstGeom prst="rect">
+            <a:avLst/>
+          </a:prstGeom>
+          <a:noFill/>
+          <a:ln/>
+        </p:spPr>
+        <p:txBody>
+          <a:bodyPr wrap="square" lIns="0" tIns="0" rIns="0" bIns="0" rtlCol="0" anchor="t"/>
+          <a:lstStyle/>
+          <a:p>
+            <a:pPr indent="0" marL="0">
+              <a:buNone/>
+            </a:pPr>
+            <a:r>
+              <a:rPr lang="en-US" sz="850" i="1" dirty="0">
+                <a:solidFill>
+                  <a:srgbClr val="5F7180"/>
+                </a:solidFill>
+                <a:latin typeface="Calibri" pitchFamily="34" charset="0"/>
+                <a:ea typeface="Calibri" pitchFamily="34" charset="-122"/>
+                <a:cs typeface="Calibri" pitchFamily="34" charset="-120"/>
+              </a:rPr>
+              <a:t>Source: consumer_financial_health_engagement_2025 — 10,992 consumer-months, 999 consumers, 2025.</a:t>
+            </a:r>
+            <a:endParaRPr lang="en-US" sz="850" dirty="0"/>
+          </a:p>
+        </p:txBody>
+      </p:sp>
+      <p:sp>
+        <p:nvSpPr>
+          <p:cNvPr id="7" name="Text 4"/>
           <p:cNvSpPr txBox="1"/>
           <p:nvPr/>
         </p:nvSpPr>
@@ -3843,7 +3960,7 @@
       </p:sp>
       <p:sp>
         <p:nvSpPr>
-          <p:cNvPr id="7" name="Text 4"/>
+          <p:cNvPr id="8" name="Text 5"/>
           <p:cNvSpPr txBox="1"/>
           <p:nvPr/>
         </p:nvSpPr>
@@ -3945,7 +4062,7 @@
                 <a:ea typeface="Calibri" pitchFamily="34" charset="-122"/>
                 <a:cs typeface="Calibri" pitchFamily="34" charset="-120"/>
               </a:rPr>
-              <a:t>TASK 3 · ENGAGEMENT</a:t>
+              <a:t>TASK 3 · ENGAGEMENT · D1–D2</a:t>
             </a:r>
             <a:endParaRPr lang="en-US" sz="1100" dirty="0"/>
           </a:p>
@@ -3987,7 +4104,7 @@
                 <a:ea typeface="Cambria" pitchFamily="34" charset="-122"/>
                 <a:cs typeface="Cambria" pitchFamily="34" charset="-120"/>
               </a:rPr>
-              <a:t>Engagement is saturated; digital is broad but shallow</a:t>
+              <a:t>Engagement is saturated; channels are POS-first</a:t>
             </a:r>
             <a:endParaRPr lang="en-US" sz="2700" dirty="0"/>
           </a:p>
@@ -4001,7 +4118,7 @@
         </p:nvSpPr>
         <p:spPr>
           <a:xfrm>
-            <a:off x="457200" y="1463040"/>
+            <a:off x="457200" y="1417320"/>
             <a:ext cx="11247120" cy="1508760"/>
           </a:xfrm>
           <a:prstGeom prst="rect">
@@ -4016,13 +4133,13 @@
           <a:p>
             <a:pPr marL="177800" indent="-177800">
               <a:spcAft>
-                <a:spcPts val="800"/>
+                <a:spcPts val="700"/>
               </a:spcAft>
               <a:buSzPct val="100000"/>
               <a:buChar char="•"/>
             </a:pPr>
             <a:r>
-              <a:rPr lang="en-US" sz="1400" dirty="0">
+              <a:rPr lang="en-US" sz="1250" dirty="0">
                 <a:solidFill>
                   <a:srgbClr val="1B2A36"/>
                 </a:solidFill>
@@ -4030,20 +4147,20 @@
                 <a:ea typeface="Calibri" pitchFamily="34" charset="-122"/>
                 <a:cs typeface="Calibri" pitchFamily="34" charset="-120"/>
               </a:rPr>
-              <a:t>Consumers by engagement segment: Low 1.0% · Medium 8.0% · High 74.1% · Very high 16.9% — the score does NOT segment the base.</a:t>
-            </a:r>
-            <a:endParaRPr lang="en-US" sz="1400" dirty="0"/>
+              <a:t>D1: engagement_score mean 77.8, median 78.1, IQR 74.8–81.4 (consumer-month). Consumers by segment: Low 1.0% (10) · Medium 8.0% (80) · High 74.1% (740) · Very high 16.9% (169) → the score alone does not segment the base.</a:t>
+            </a:r>
+            <a:endParaRPr lang="en-US" sz="1250" dirty="0"/>
           </a:p>
           <a:p>
             <a:pPr marL="177800" indent="-177800">
               <a:spcAft>
-                <a:spcPts val="800"/>
+                <a:spcPts val="700"/>
               </a:spcAft>
               <a:buSzPct val="100000"/>
               <a:buChar char="•"/>
             </a:pPr>
             <a:r>
-              <a:rPr lang="en-US" sz="1400" dirty="0">
+              <a:rPr lang="en-US" sz="1250" dirty="0">
                 <a:solidFill>
                   <a:srgbClr val="1B2A36"/>
                 </a:solidFill>
@@ -4051,36 +4168,15 @@
                 <a:ea typeface="Calibri" pitchFamily="34" charset="-122"/>
                 <a:cs typeface="Calibri" pitchFamily="34" charset="-120"/>
               </a:rPr>
-              <a:t>Channel mix: POS 58.8% · QR 19.8% · E-com 8.7% · Mobile 7.7% · Recurring 4.9%; average online spend share 24.7% per consumer.</a:t>
-            </a:r>
-            <a:endParaRPr lang="en-US" sz="1400" dirty="0"/>
-          </a:p>
-          <a:p>
-            <a:pPr marL="177800" indent="-177800">
-              <a:spcAft>
-                <a:spcPts val="800"/>
-              </a:spcAft>
-              <a:buSzPct val="100000"/>
-              <a:buChar char="•"/>
-            </a:pPr>
-            <a:r>
-              <a:rPr lang="en-US" sz="1400" dirty="0">
-                <a:solidFill>
-                  <a:srgbClr val="1B2A36"/>
-                </a:solidFill>
-                <a:latin typeface="Calibri" pitchFamily="34" charset="0"/>
-                <a:ea typeface="Calibri" pitchFamily="34" charset="-122"/>
-                <a:cs typeface="Calibri" pitchFamily="34" charset="-120"/>
-              </a:rPr>
-              <a:t>Non-POS channels carry 41% of trips and 41.5% of value (same ticket size as POS); truly online E-com + Mobile is ~17% of value.</a:t>
-            </a:r>
-            <a:endParaRPr lang="en-US" sz="1400" dirty="0"/>
+              <a:t>D2: POS 58.8% · QR 19.8% · E-commerce 8.7% · Mobile App 7.7% · Recurring 4.9% of 1.85M transactions; non-POS = 41% of trips and 41.5% of value. Average online spend share 24.7% per consumer (range 0–95%).</a:t>
+            </a:r>
+            <a:endParaRPr lang="en-US" sz="1250" dirty="0"/>
           </a:p>
         </p:txBody>
       </p:sp>
       <p:pic>
         <p:nvPicPr>
-          <p:cNvPr id="5" name="Image 0" descr="D:\BI10GroupYAPPERS\outputs\figures\t3_segment_share.png">    </p:cNvPr>
+          <p:cNvPr id="5" name="Image 0" descr="D:\BI10GroupYAPPERS\outputs\figures\t3_engagement_dist.png">    </p:cNvPr>
           <p:cNvPicPr>
             <a:picLocks noChangeAspect="1"/>
           </p:cNvPicPr>
@@ -4093,8 +4189,8 @@
         </p:blipFill>
         <p:spPr>
           <a:xfrm>
-            <a:off x="502920" y="3063240"/>
-            <a:ext cx="5440680" cy="3200400"/>
+            <a:off x="457200" y="2971800"/>
+            <a:ext cx="4343400" cy="3108960"/>
           </a:xfrm>
           <a:prstGeom prst="rect">
             <a:avLst/>
@@ -4103,7 +4199,7 @@
       </p:pic>
       <p:pic>
         <p:nvPicPr>
-          <p:cNvPr id="6" name="Image 1" descr="D:\BI10GroupYAPPERS\outputs\figures\t3_channel_mix.png">    </p:cNvPr>
+          <p:cNvPr id="6" name="Image 1" descr="D:\BI10GroupYAPPERS\outputs\figures\t3_segment_share.png">    </p:cNvPr>
           <p:cNvPicPr>
             <a:picLocks noChangeAspect="1"/>
           </p:cNvPicPr>
@@ -4116,17 +4212,79 @@
         </p:blipFill>
         <p:spPr>
           <a:xfrm>
-            <a:off x="6263640" y="3063240"/>
-            <a:ext cx="5440680" cy="3200400"/>
+            <a:off x="4937760" y="2971800"/>
+            <a:ext cx="3063240" cy="3108960"/>
           </a:xfrm>
           <a:prstGeom prst="rect">
             <a:avLst/>
           </a:prstGeom>
         </p:spPr>
       </p:pic>
-      <p:sp>
-        <p:nvSpPr>
-          <p:cNvPr id="7" name="Text 3"/>
+      <p:pic>
+        <p:nvPicPr>
+          <p:cNvPr id="7" name="Image 2" descr="D:\BI10GroupYAPPERS\outputs\figures\t3_channel_mix.png">    </p:cNvPr>
+          <p:cNvPicPr>
+            <a:picLocks noChangeAspect="1"/>
+          </p:cNvPicPr>
+          <p:nvPr/>
+        </p:nvPicPr>
+        <p:blipFill>
+          <a:blip r:embed="rId3"/>
+          <a:srcRect l="0" r="0" t="0" b="0"/>
+          <a:stretch/>
+        </p:blipFill>
+        <p:spPr>
+          <a:xfrm>
+            <a:off x="8138160" y="2971800"/>
+            <a:ext cx="3566160" cy="3108960"/>
+          </a:xfrm>
+          <a:prstGeom prst="rect">
+            <a:avLst/>
+          </a:prstGeom>
+        </p:spPr>
+      </p:pic>
+      <p:sp>
+        <p:nvSpPr>
+          <p:cNvPr id="8" name="Text 3"/>
+          <p:cNvSpPr txBox="1"/>
+          <p:nvPr/>
+        </p:nvSpPr>
+        <p:spPr>
+          <a:xfrm>
+            <a:off x="457200" y="6144768"/>
+            <a:ext cx="11247120" cy="256032"/>
+          </a:xfrm>
+          <a:prstGeom prst="rect">
+            <a:avLst/>
+          </a:prstGeom>
+          <a:noFill/>
+          <a:ln/>
+        </p:spPr>
+        <p:txBody>
+          <a:bodyPr wrap="square" lIns="0" tIns="0" rIns="0" bIns="0" rtlCol="0" anchor="t"/>
+          <a:lstStyle/>
+          <a:p>
+            <a:pPr indent="0" marL="0">
+              <a:buNone/>
+            </a:pPr>
+            <a:r>
+              <a:rPr lang="en-US" sz="850" i="1" dirty="0">
+                <a:solidFill>
+                  <a:srgbClr val="5F7180"/>
+                </a:solidFill>
+                <a:latin typeface="Calibri" pitchFamily="34" charset="0"/>
+                <a:ea typeface="Calibri" pitchFamily="34" charset="-122"/>
+                <a:cs typeface="Calibri" pitchFamily="34" charset="-120"/>
+              </a:rPr>
+              <a:t>Source: consumer_financial_health_engagement_2025 — 10,992 consumer-months, 999 consumers, 2025. Channels: Source: consumer_transactions_2025 — 1,852,394 transactions, 2025.</a:t>
+            </a:r>
+            <a:endParaRPr lang="en-US" sz="850" dirty="0"/>
+          </a:p>
+        </p:txBody>
+      </p:sp>
+      <p:sp>
+        <p:nvSpPr>
+          <p:cNvPr id="9" name="Text 4"/>
           <p:cNvSpPr txBox="1"/>
           <p:nvPr/>
         </p:nvSpPr>
@@ -4165,7 +4323,7 @@
       </p:sp>
       <p:sp>
         <p:nvSpPr>
-          <p:cNvPr id="8" name="Text 4"/>
+          <p:cNvPr id="10" name="Text 5"/>
           <p:cNvSpPr txBox="1"/>
           <p:nvPr/>
         </p:nvSpPr>
@@ -4267,7 +4425,7 @@
                 <a:ea typeface="Calibri" pitchFamily="34" charset="-122"/>
                 <a:cs typeface="Calibri" pitchFamily="34" charset="-120"/>
               </a:rPr>
-              <a:t>TASK 3 · ENGAGEMENT</a:t>
+              <a:t>TASK 3 · ENGAGEMENT · D3–D4</a:t>
             </a:r>
             <a:endParaRPr lang="en-US" sz="1100" dirty="0"/>
           </a:p>
@@ -4323,8 +4481,8 @@
         </p:nvSpPr>
         <p:spPr>
           <a:xfrm>
-            <a:off x="457200" y="1463040"/>
-            <a:ext cx="11247120" cy="1508760"/>
+            <a:off x="457200" y="1417320"/>
+            <a:ext cx="11247120" cy="1600200"/>
           </a:xfrm>
           <a:prstGeom prst="rect">
             <a:avLst/>
@@ -4338,13 +4496,13 @@
           <a:p>
             <a:pPr marL="177800" indent="-177800">
               <a:spcAft>
-                <a:spcPts val="800"/>
+                <a:spcPts val="700"/>
               </a:spcAft>
               <a:buSzPct val="100000"/>
               <a:buChar char="•"/>
             </a:pPr>
             <a:r>
-              <a:rPr lang="en-US" sz="1400" dirty="0">
+              <a:rPr lang="en-US" sz="1250" dirty="0">
                 <a:solidFill>
                   <a:srgbClr val="1B2A36"/>
                 </a:solidFill>
@@ -4352,20 +4510,20 @@
                 <a:ea typeface="Calibri" pitchFamily="34" charset="-122"/>
                 <a:cs typeface="Calibri" pitchFamily="34" charset="-120"/>
               </a:rPr>
-              <a:t>Category diversity: r +0.94 with engagement; still +0.81 without the dormant tail (Spearman +0.85) — not a tail artefact.</a:t>
-            </a:r>
-            <a:endParaRPr lang="en-US" sz="1400" dirty="0"/>
+              <a:t>D3 — category diversity ranges 2–14 (consumer mean 12.9; 908 of 999 at 13–14). r = +0.94 with engagement; still +0.81 without the dormant tail (Spearman +0.85) — not a tail artefact.</a:t>
+            </a:r>
+            <a:endParaRPr lang="en-US" sz="1250" dirty="0"/>
           </a:p>
           <a:p>
             <a:pPr marL="177800" indent="-177800">
               <a:spcAft>
-                <a:spcPts val="800"/>
+                <a:spcPts val="700"/>
               </a:spcAft>
               <a:buSzPct val="100000"/>
               <a:buChar char="•"/>
             </a:pPr>
             <a:r>
-              <a:rPr lang="en-US" sz="1400" dirty="0">
+              <a:rPr lang="en-US" sz="1250" dirty="0">
                 <a:solidFill>
                   <a:srgbClr val="1B2A36"/>
                 </a:solidFill>
@@ -4373,20 +4531,20 @@
                 <a:ea typeface="Calibri" pitchFamily="34" charset="-122"/>
                 <a:cs typeface="Calibri" pitchFamily="34" charset="-120"/>
               </a:rPr>
-              <a:t>Heatmap: 30–31 active days &amp; recency 0 → engagement 79.8 (n=6,614); every 1–5-active-day cell stays ≤ 55 whatever the recency.</a:t>
-            </a:r>
-            <a:endParaRPr lang="en-US" sz="1400" dirty="0"/>
+              <a:t>D4 — recency 0–30 days (median 0); active days 1–31 (median 30); transactions 2–713 per month (median 150). Links to engagement: active days r +0.59 &gt; recency −0.42 &gt; count +0.40.</a:t>
+            </a:r>
+            <a:endParaRPr lang="en-US" sz="1250" dirty="0"/>
           </a:p>
           <a:p>
             <a:pPr marL="177800" indent="-177800">
               <a:spcAft>
-                <a:spcPts val="800"/>
+                <a:spcPts val="700"/>
               </a:spcAft>
               <a:buSzPct val="100000"/>
               <a:buChar char="•"/>
             </a:pPr>
             <a:r>
-              <a:rPr lang="en-US" sz="1400" dirty="0">
+              <a:rPr lang="en-US" sz="1250" dirty="0">
                 <a:solidFill>
                   <a:srgbClr val="1B2A36"/>
                 </a:solidFill>
@@ -4394,9 +4552,9 @@
                 <a:ea typeface="Calibri" pitchFamily="34" charset="-122"/>
                 <a:cs typeface="Calibri" pitchFamily="34" charset="-120"/>
               </a:rPr>
-              <a:t>Consistency beats recency and volume → build the early-warning flag on falling diversity and active days.</a:t>
-            </a:r>
-            <a:endParaRPr lang="en-US" sz="1400" dirty="0"/>
+              <a:t>Heatmap: 30–31 active days &amp; recency 0 → engagement 79.8 (n = 6,614); every 1–5-active-day cell stays ≤ 55 → consistency beats recency and volume.</a:t>
+            </a:r>
+            <a:endParaRPr lang="en-US" sz="1250" dirty="0"/>
           </a:p>
         </p:txBody>
       </p:sp>
@@ -4415,8 +4573,8 @@
         </p:blipFill>
         <p:spPr>
           <a:xfrm>
-            <a:off x="502920" y="3063240"/>
-            <a:ext cx="5440680" cy="3200400"/>
+            <a:off x="502920" y="3017520"/>
+            <a:ext cx="5440680" cy="3063240"/>
           </a:xfrm>
           <a:prstGeom prst="rect">
             <a:avLst/>
@@ -4438,8 +4596,8 @@
         </p:blipFill>
         <p:spPr>
           <a:xfrm>
-            <a:off x="6263640" y="3063240"/>
-            <a:ext cx="5440680" cy="3200400"/>
+            <a:off x="6263640" y="3017520"/>
+            <a:ext cx="5440680" cy="3063240"/>
           </a:xfrm>
           <a:prstGeom prst="rect">
             <a:avLst/>
@@ -4449,6 +4607,45 @@
       <p:sp>
         <p:nvSpPr>
           <p:cNvPr id="7" name="Text 3"/>
+          <p:cNvSpPr txBox="1"/>
+          <p:nvPr/>
+        </p:nvSpPr>
+        <p:spPr>
+          <a:xfrm>
+            <a:off x="502920" y="6144768"/>
+            <a:ext cx="11201400" cy="256032"/>
+          </a:xfrm>
+          <a:prstGeom prst="rect">
+            <a:avLst/>
+          </a:prstGeom>
+          <a:noFill/>
+          <a:ln/>
+        </p:spPr>
+        <p:txBody>
+          <a:bodyPr wrap="square" lIns="0" tIns="0" rIns="0" bIns="0" rtlCol="0" anchor="t"/>
+          <a:lstStyle/>
+          <a:p>
+            <a:pPr indent="0" marL="0">
+              <a:buNone/>
+            </a:pPr>
+            <a:r>
+              <a:rPr lang="en-US" sz="850" i="1" dirty="0">
+                <a:solidFill>
+                  <a:srgbClr val="5F7180"/>
+                </a:solidFill>
+                <a:latin typeface="Calibri" pitchFamily="34" charset="0"/>
+                <a:ea typeface="Calibri" pitchFamily="34" charset="-122"/>
+                <a:cs typeface="Calibri" pitchFamily="34" charset="-120"/>
+              </a:rPr>
+              <a:t>Source: consumer_financial_health_engagement_2025 — 10,992 consumer-months, 999 consumers, 2025.</a:t>
+            </a:r>
+            <a:endParaRPr lang="en-US" sz="850" dirty="0"/>
+          </a:p>
+        </p:txBody>
+      </p:sp>
+      <p:sp>
+        <p:nvSpPr>
+          <p:cNvPr id="8" name="Text 4"/>
           <p:cNvSpPr txBox="1"/>
           <p:nvPr/>
         </p:nvSpPr>
@@ -4487,7 +4684,7 @@
       </p:sp>
       <p:sp>
         <p:nvSpPr>
-          <p:cNvPr id="8" name="Text 4"/>
+          <p:cNvPr id="9" name="Text 5"/>
           <p:cNvSpPr txBox="1"/>
           <p:nvPr/>
         </p:nvSpPr>
@@ -4589,7 +4786,7 @@
                 <a:ea typeface="Calibri" pitchFamily="34" charset="-122"/>
                 <a:cs typeface="Calibri" pitchFamily="34" charset="-120"/>
               </a:rPr>
-              <a:t>TASK 3 · ENGAGEMENT</a:t>
+              <a:t>TASK 3 · ENGAGEMENT · D5</a:t>
             </a:r>
             <a:endParaRPr lang="en-US" sz="1100" dirty="0"/>
           </a:p>
@@ -4631,7 +4828,7 @@
                 <a:ea typeface="Cambria" pitchFamily="34" charset="-122"/>
                 <a:cs typeface="Cambria" pitchFamily="34" charset="-120"/>
               </a:rPr>
-              <a:t>High-health, low-engagement: dormancy hiding in "healthy"</a:t>
+              <a:t>High-health, low-engagement: 25 good customers drifting away</a:t>
             </a:r>
             <a:endParaRPr lang="en-US" sz="2700" dirty="0"/>
           </a:p>
@@ -4645,8 +4842,8 @@
         </p:nvSpPr>
         <p:spPr>
           <a:xfrm>
-            <a:off x="457200" y="1600200"/>
-            <a:ext cx="5760720" cy="3200400"/>
+            <a:off x="457200" y="1554480"/>
+            <a:ext cx="5760720" cy="4572000"/>
           </a:xfrm>
           <a:prstGeom prst="rect">
             <a:avLst/>
@@ -4660,13 +4857,13 @@
           <a:p>
             <a:pPr marL="177800" indent="-177800">
               <a:spcAft>
-                <a:spcPts val="800"/>
+                <a:spcPts val="700"/>
               </a:spcAft>
               <a:buSzPct val="100000"/>
               <a:buChar char="•"/>
             </a:pPr>
             <a:r>
-              <a:rPr lang="en-US" sz="1400" dirty="0">
+              <a:rPr lang="en-US" sz="1200" dirty="0">
                 <a:solidFill>
                   <a:srgbClr val="1B2A36"/>
                 </a:solidFill>
@@ -4674,20 +4871,20 @@
                 <a:ea typeface="Calibri" pitchFamily="34" charset="-122"/>
                 <a:cs typeface="Calibri" pitchFamily="34" charset="-120"/>
               </a:rPr>
-              <a:t>Cutoff: FHS ≥ 70 AND engagement &lt; 70 → 25 consumers (2.5%).</a:t>
-            </a:r>
-            <a:endParaRPr lang="en-US" sz="1400" dirty="0"/>
+              <a:t>Cutoff: FHS ≥ 70 (≈ p79, top 21% of consumers) AND engagement &lt; 70 (below p10 = 71.1) → 25 consumers (2.5%).</a:t>
+            </a:r>
+            <a:endParaRPr lang="en-US" sz="1200" dirty="0"/>
           </a:p>
           <a:p>
             <a:pPr marL="177800" indent="-177800">
               <a:spcAft>
-                <a:spcPts val="800"/>
+                <a:spcPts val="700"/>
               </a:spcAft>
               <a:buSzPct val="100000"/>
               <a:buChar char="•"/>
             </a:pPr>
             <a:r>
-              <a:rPr lang="en-US" sz="1400" dirty="0">
+              <a:rPr lang="en-US" sz="1200" dirty="0">
                 <a:solidFill>
                   <a:srgbClr val="1B2A36"/>
                 </a:solidFill>
@@ -4695,20 +4892,20 @@
                 <a:ea typeface="Calibri" pitchFamily="34" charset="-122"/>
                 <a:cs typeface="Calibri" pitchFamily="34" charset="-120"/>
               </a:rPr>
-              <a:t>Why 70: the count is 25 at engagement &lt; 60, 65 and 70 (a natural gap) and jumps to 63 at &lt; 75; FHS ≥ 65 gives 48, ≥ 75 gives 9.</a:t>
-            </a:r>
-            <a:endParaRPr lang="en-US" sz="1400" dirty="0"/>
+              <a:t>Why not stricter / looser: the count stays 25 at engagement &lt; 60, 65, 68, 70 (a natural gap), then jumps to 36 (&lt; 72), 52 (&lt; 74), 63 (&lt; 75) as it reaches the main body. FHS ≥ 65 gives 48; ≥ 75 gives 9.</a:t>
+            </a:r>
+            <a:endParaRPr lang="en-US" sz="1200" dirty="0"/>
           </a:p>
           <a:p>
             <a:pPr marL="177800" indent="-177800">
               <a:spcAft>
-                <a:spcPts val="800"/>
+                <a:spcPts val="700"/>
               </a:spcAft>
               <a:buSzPct val="100000"/>
               <a:buChar char="•"/>
             </a:pPr>
             <a:r>
-              <a:rPr lang="en-US" sz="1400" dirty="0">
+              <a:rPr lang="en-US" sz="1200" dirty="0">
                 <a:solidFill>
                   <a:srgbClr val="1B2A36"/>
                 </a:solidFill>
@@ -4716,20 +4913,20 @@
                 <a:ea typeface="Calibri" pitchFamily="34" charset="-122"/>
                 <a:cs typeface="Calibri" pitchFamily="34" charset="-120"/>
               </a:rPr>
-              <a:t>They moved spend to narrow online use (diversity 4.7 vs 13.2; online 0.61 vs 0.24); 24 of 25 sit in Emerging Digital.</a:t>
-            </a:r>
-            <a:endParaRPr lang="en-US" sz="1400" dirty="0"/>
+              <a:t>Profile vs rest: FHS 74.0 vs 66.1 · engagement 46.8 vs 76.1 · 9.9 vs 159 transactions/month · 2.0 vs 27.0 active days · recency 14.3 vs 0.9 days · diversity 4.7 vs 13.1 · online 0.61 vs 0.24.</a:t>
+            </a:r>
+            <a:endParaRPr lang="en-US" sz="1200" dirty="0"/>
           </a:p>
           <a:p>
             <a:pPr marL="177800" indent="-177800">
               <a:spcAft>
-                <a:spcPts val="800"/>
+                <a:spcPts val="700"/>
               </a:spcAft>
               <a:buSzPct val="100000"/>
               <a:buChar char="•"/>
             </a:pPr>
             <a:r>
-              <a:rPr lang="en-US" sz="1400" dirty="0">
+              <a:rPr lang="en-US" sz="1200" dirty="0">
                 <a:solidFill>
                   <a:srgbClr val="1B2A36"/>
                 </a:solidFill>
@@ -4737,9 +4934,9 @@
                 <a:ea typeface="Calibri" pitchFamily="34" charset="-122"/>
                 <a:cs typeface="Calibri" pitchFamily="34" charset="-120"/>
               </a:rPr>
-              <a:t>Play = reactivation of everyday use, NOT budgeting.</a:t>
-            </a:r>
-            <a:endParaRPr lang="en-US" sz="1400" dirty="0"/>
+              <a:t>24 of 25 sit in Emerging Digital → play = reactivation of everyday use, not budgeting.</a:t>
+            </a:r>
+            <a:endParaRPr lang="en-US" sz="1200" dirty="0"/>
           </a:p>
         </p:txBody>
       </p:sp>
@@ -4759,7 +4956,7 @@
         <p:spPr>
           <a:xfrm>
             <a:off x="6446520" y="1554480"/>
-            <a:ext cx="5303520" cy="4206240"/>
+            <a:ext cx="5303520" cy="4023360"/>
           </a:xfrm>
           <a:prstGeom prst="rect">
             <a:avLst/>
@@ -4774,8 +4971,8 @@
         </p:nvSpPr>
         <p:spPr>
           <a:xfrm>
-            <a:off x="6446520" y="5852160"/>
-            <a:ext cx="5303520" cy="548640"/>
+            <a:off x="6446520" y="5623560"/>
+            <a:ext cx="5303520" cy="256032"/>
           </a:xfrm>
           <a:prstGeom prst="rect">
             <a:avLst/>
@@ -4791,7 +4988,7 @@
               <a:buNone/>
             </a:pPr>
             <a:r>
-              <a:rPr lang="en-US" sz="1000" i="1" dirty="0">
+              <a:rPr lang="en-US" sz="850" i="1" dirty="0">
                 <a:solidFill>
                   <a:srgbClr val="5F7180"/>
                 </a:solidFill>
@@ -4799,15 +4996,54 @@
                 <a:ea typeface="Calibri" pitchFamily="34" charset="-122"/>
                 <a:cs typeface="Calibri" pitchFamily="34" charset="-120"/>
               </a:rPr>
+              <a:t>Source: consumer_financial_health_engagement_2025 — 10,992 consumer-months, 999 consumers, 2025.</a:t>
+            </a:r>
+            <a:endParaRPr lang="en-US" sz="850" dirty="0"/>
+          </a:p>
+        </p:txBody>
+      </p:sp>
+      <p:sp>
+        <p:nvSpPr>
+          <p:cNvPr id="7" name="Text 4"/>
+          <p:cNvSpPr txBox="1"/>
+          <p:nvPr/>
+        </p:nvSpPr>
+        <p:spPr>
+          <a:xfrm>
+            <a:off x="6446520" y="5897880"/>
+            <a:ext cx="5303520" cy="502920"/>
+          </a:xfrm>
+          <a:prstGeom prst="rect">
+            <a:avLst/>
+          </a:prstGeom>
+          <a:noFill/>
+          <a:ln/>
+        </p:spPr>
+        <p:txBody>
+          <a:bodyPr wrap="square" lIns="0" tIns="0" rIns="0" bIns="0" rtlCol="0" anchor="t"/>
+          <a:lstStyle/>
+          <a:p>
+            <a:pPr indent="0" marL="0">
+              <a:buNone/>
+            </a:pPr>
+            <a:r>
+              <a:rPr lang="en-US" sz="950" i="1" dirty="0">
+                <a:solidFill>
+                  <a:srgbClr val="5F7180"/>
+                </a:solidFill>
+                <a:latin typeface="Calibri" pitchFamily="34" charset="0"/>
+                <a:ea typeface="Calibri" pitchFamily="34" charset="-122"/>
+                <a:cs typeface="Calibri" pitchFamily="34" charset="-120"/>
+              </a:rPr>
               <a:t>⚠  n = 25, synthetic-inflated engagement — a cohort to watch, not a sized forecast.</a:t>
             </a:r>
-            <a:endParaRPr lang="en-US" sz="1000" dirty="0"/>
-          </a:p>
-        </p:txBody>
-      </p:sp>
-      <p:sp>
-        <p:nvSpPr>
-          <p:cNvPr id="7" name="Text 4"/>
+            <a:endParaRPr lang="en-US" sz="950" dirty="0"/>
+          </a:p>
+        </p:txBody>
+      </p:sp>
+      <p:sp>
+        <p:nvSpPr>
+          <p:cNvPr id="8" name="Text 5"/>
           <p:cNvSpPr txBox="1"/>
           <p:nvPr/>
         </p:nvSpPr>
@@ -4846,7 +5082,7 @@
       </p:sp>
       <p:sp>
         <p:nvSpPr>
-          <p:cNvPr id="8" name="Text 5"/>
+          <p:cNvPr id="9" name="Text 6"/>
           <p:cNvSpPr txBox="1"/>
           <p:nvPr/>
         </p:nvSpPr>
@@ -4948,7 +5184,7 @@
                 <a:ea typeface="Calibri" pitchFamily="34" charset="-122"/>
                 <a:cs typeface="Calibri" pitchFamily="34" charset="-120"/>
               </a:rPr>
-              <a:t>TASK 4 · SEGMENTATION</a:t>
+              <a:t>TASK 4 · SEGMENTATION · METHOD</a:t>
             </a:r>
             <a:endParaRPr lang="en-US" sz="1100" dirty="0"/>
           </a:p>
@@ -4990,7 +5226,7 @@
                 <a:ea typeface="Cambria" pitchFamily="34" charset="-122"/>
                 <a:cs typeface="Cambria" pitchFamily="34" charset="-120"/>
               </a:rPr>
-              <a:t>Method: cluster on behaviour, justify k honestly</a:t>
+              <a:t>Preprocessing, features and model choice</a:t>
             </a:r>
             <a:endParaRPr lang="en-US" sz="2700" dirty="0"/>
           </a:p>
@@ -5004,8 +5240,8 @@
         </p:nvSpPr>
         <p:spPr>
           <a:xfrm>
-            <a:off x="457200" y="1600200"/>
-            <a:ext cx="5760720" cy="3200400"/>
+            <a:off x="457200" y="1554480"/>
+            <a:ext cx="5760720" cy="4572000"/>
           </a:xfrm>
           <a:prstGeom prst="rect">
             <a:avLst/>
@@ -5019,13 +5255,13 @@
           <a:p>
             <a:pPr marL="177800" indent="-177800">
               <a:spcAft>
-                <a:spcPts val="800"/>
+                <a:spcPts val="700"/>
               </a:spcAft>
               <a:buSzPct val="100000"/>
               <a:buChar char="•"/>
             </a:pPr>
             <a:r>
-              <a:rPr lang="en-US" sz="1400" dirty="0">
+              <a:rPr lang="en-US" sz="1200" dirty="0">
                 <a:solidFill>
                   <a:srgbClr val="1B2A36"/>
                 </a:solidFill>
@@ -5033,20 +5269,20 @@
                 <a:ea typeface="Calibri" pitchFamily="34" charset="-122"/>
                 <a:cs typeface="Calibri" pitchFamily="34" charset="-120"/>
               </a:rPr>
-              <a:t>Aggregate 10,992 consumer-months → 999 consumers (yearly mean profile); preprocessed dataset + dictionary delivered.</a:t>
-            </a:r>
-            <a:endParaRPr lang="en-US" sz="1400" dirty="0"/>
+              <a:t>Preprocessing: 10,992 consumer-months → 999 consumers (yearly mean of each ratio = typical monthly profile); 0 nulls after aggregation; raw VND excluded.</a:t>
+            </a:r>
+            <a:endParaRPr lang="en-US" sz="1200" dirty="0"/>
           </a:p>
           <a:p>
             <a:pPr marL="177800" indent="-177800">
               <a:spcAft>
-                <a:spcPts val="800"/>
+                <a:spcPts val="700"/>
               </a:spcAft>
               <a:buSzPct val="100000"/>
               <a:buChar char="•"/>
             </a:pPr>
             <a:r>
-              <a:rPr lang="en-US" sz="1400" dirty="0">
+              <a:rPr lang="en-US" sz="1200" dirty="0">
                 <a:solidFill>
                   <a:srgbClr val="1B2A36"/>
                 </a:solidFill>
@@ -5054,20 +5290,20 @@
                 <a:ea typeface="Calibri" pitchFamily="34" charset="-122"/>
                 <a:cs typeface="Calibri" pitchFamily="34" charset="-120"/>
               </a:rPr>
-              <a:t>8 z-scaled behavioural features across health, engagement &amp; spending; demographics kept out of clustering, used only to profile.</a:t>
-            </a:r>
-            <a:endParaRPr lang="en-US" sz="1400" dirty="0"/>
+              <a:t>8 features, z-scaled: health (FHS, spend-to-income, credit-utilization, volatility) · engagement (engagement score, transaction count) · spending (discretionary, online ratio).</a:t>
+            </a:r>
+            <a:endParaRPr lang="en-US" sz="1200" dirty="0"/>
           </a:p>
           <a:p>
             <a:pPr marL="177800" indent="-177800">
               <a:spcAft>
-                <a:spcPts val="800"/>
+                <a:spcPts val="700"/>
               </a:spcAft>
               <a:buSzPct val="100000"/>
               <a:buChar char="•"/>
             </a:pPr>
             <a:r>
-              <a:rPr lang="en-US" sz="1400" dirty="0">
+              <a:rPr lang="en-US" sz="1200" dirty="0">
                 <a:solidFill>
                   <a:srgbClr val="1B2A36"/>
                 </a:solidFill>
@@ -5075,20 +5311,20 @@
                 <a:ea typeface="Calibri" pitchFamily="34" charset="-122"/>
                 <a:cs typeface="Calibri" pitchFamily="34" charset="-120"/>
               </a:rPr>
-              <a:t>k-means chosen over a pure 2×2 so boundaries form across all 8 dimensions at once.</a:t>
-            </a:r>
-            <a:endParaRPr lang="en-US" sz="1400" dirty="0"/>
+              <a:t>Excluded with reason: essential ratio (= 1 − discretionary), diversity / active days / recency (p75 = max, near-constant); demographics kept for profiling only.</a:t>
+            </a:r>
+            <a:endParaRPr lang="en-US" sz="1200" dirty="0"/>
           </a:p>
           <a:p>
             <a:pPr marL="177800" indent="-177800">
               <a:spcAft>
-                <a:spcPts val="800"/>
+                <a:spcPts val="700"/>
               </a:spcAft>
               <a:buSzPct val="100000"/>
               <a:buChar char="•"/>
             </a:pPr>
             <a:r>
-              <a:rPr lang="en-US" sz="1400" dirty="0">
+              <a:rPr lang="en-US" sz="1200" dirty="0">
                 <a:solidFill>
                   <a:srgbClr val="1B2A36"/>
                 </a:solidFill>
@@ -5096,9 +5332,9 @@
                 <a:ea typeface="Calibri" pitchFamily="34" charset="-122"/>
                 <a:cs typeface="Calibri" pitchFamily="34" charset="-120"/>
               </a:rPr>
-              <a:t>k=4 via elbow + silhouette (0.251); coverage 999/999, all 7 minors retained — PASS.</a:t>
-            </a:r>
-            <a:endParaRPr lang="en-US" sz="1400" dirty="0"/>
+              <a:t>k-means over a pure 2×2: boundaries form across all 8 dimensions. k = 4 via elbow + best silhouette in the 4–6 range (0.251; k = 2 wins at 0.557 but collapses the personas). Coverage 999 / 999, 7 minors kept.</a:t>
+            </a:r>
+            <a:endParaRPr lang="en-US" sz="1200" dirty="0"/>
           </a:p>
         </p:txBody>
       </p:sp>
@@ -5118,7 +5354,7 @@
         <p:spPr>
           <a:xfrm>
             <a:off x="6446520" y="1554480"/>
-            <a:ext cx="5303520" cy="4206240"/>
+            <a:ext cx="5303520" cy="4023360"/>
           </a:xfrm>
           <a:prstGeom prst="rect">
             <a:avLst/>
@@ -5128,6 +5364,45 @@
       <p:sp>
         <p:nvSpPr>
           <p:cNvPr id="6" name="Text 3"/>
+          <p:cNvSpPr txBox="1"/>
+          <p:nvPr/>
+        </p:nvSpPr>
+        <p:spPr>
+          <a:xfrm>
+            <a:off x="6446520" y="5623560"/>
+            <a:ext cx="5303520" cy="256032"/>
+          </a:xfrm>
+          <a:prstGeom prst="rect">
+            <a:avLst/>
+          </a:prstGeom>
+          <a:noFill/>
+          <a:ln/>
+        </p:spPr>
+        <p:txBody>
+          <a:bodyPr wrap="square" lIns="0" tIns="0" rIns="0" bIns="0" rtlCol="0" anchor="t"/>
+          <a:lstStyle/>
+          <a:p>
+            <a:pPr indent="0" marL="0">
+              <a:buNone/>
+            </a:pPr>
+            <a:r>
+              <a:rPr lang="en-US" sz="850" i="1" dirty="0">
+                <a:solidFill>
+                  <a:srgbClr val="5F7180"/>
+                </a:solidFill>
+                <a:latin typeface="Calibri" pitchFamily="34" charset="0"/>
+                <a:ea typeface="Calibri" pitchFamily="34" charset="-122"/>
+                <a:cs typeface="Calibri" pitchFamily="34" charset="-120"/>
+              </a:rPr>
+              <a:t>Source: team k-means (k=4) on 8 z-scaled ratios, 999 consumers (task4_features.csv).</a:t>
+            </a:r>
+            <a:endParaRPr lang="en-US" sz="850" dirty="0"/>
+          </a:p>
+        </p:txBody>
+      </p:sp>
+      <p:sp>
+        <p:nvSpPr>
+          <p:cNvPr id="7" name="Text 4"/>
           <p:cNvSpPr txBox="1"/>
           <p:nvPr/>
         </p:nvSpPr>
@@ -5166,7 +5441,7 @@
       </p:sp>
       <p:sp>
         <p:nvSpPr>
-          <p:cNvPr id="7" name="Text 4"/>
+          <p:cNvPr id="8" name="Text 5"/>
           <p:cNvSpPr txBox="1"/>
           <p:nvPr/>
         </p:nvSpPr>
@@ -5268,7 +5543,7 @@
                 <a:ea typeface="Calibri" pitchFamily="34" charset="-122"/>
                 <a:cs typeface="Calibri" pitchFamily="34" charset="-120"/>
               </a:rPr>
-              <a:t>TASK 4 · SEGMENTATION</a:t>
+              <a:t>TASK 4 · SEGMENTATION · PROFILES</a:t>
             </a:r>
             <a:endParaRPr lang="en-US" sz="1100" dirty="0"/>
           </a:p>
@@ -5310,7 +5585,7 @@
                 <a:ea typeface="Cambria" pitchFamily="34" charset="-122"/>
                 <a:cs typeface="Cambria" pitchFamily="34" charset="-120"/>
               </a:rPr>
-              <a:t>The four customer segments</a:t>
+              <a:t>Four segments, side by side</a:t>
             </a:r>
             <a:endParaRPr lang="en-US" sz="2700" dirty="0"/>
           </a:p>
@@ -5324,8 +5599,8 @@
         </p:nvSpPr>
         <p:spPr>
           <a:xfrm>
-            <a:off x="457200" y="1463040"/>
-            <a:ext cx="11247120" cy="1508760"/>
+            <a:off x="457200" y="1417320"/>
+            <a:ext cx="11247120" cy="1600200"/>
           </a:xfrm>
           <a:prstGeom prst="rect">
             <a:avLst/>
@@ -5339,13 +5614,13 @@
           <a:p>
             <a:pPr marL="177800" indent="-177800">
               <a:spcAft>
-                <a:spcPts val="800"/>
+                <a:spcPts val="700"/>
               </a:spcAft>
               <a:buSzPct val="100000"/>
               <a:buChar char="•"/>
             </a:pPr>
             <a:r>
-              <a:rPr lang="en-US" sz="1400" dirty="0">
+              <a:rPr lang="en-US" sz="1250" dirty="0">
                 <a:solidFill>
                   <a:srgbClr val="1B2A36"/>
                 </a:solidFill>
@@ -5353,20 +5628,20 @@
                 <a:ea typeface="Calibri" pitchFamily="34" charset="-122"/>
                 <a:cs typeface="Calibri" pitchFamily="34" charset="-120"/>
               </a:rPr>
-              <a:t>Financially Healthy &amp; Highly Engaged — 351 (35%): FHS 70.5, lowest util 0.148 → retain &amp; grow value.</a:t>
-            </a:r>
-            <a:endParaRPr lang="en-US" sz="1400" dirty="0"/>
+              <a:t>Healthy &amp; Highly Engaged — 351 (35.1%): FHS 70.5, lowest spend/income 0.571 &amp; utilization 0.148 → retain &amp; grow value.  ·  Stretched but Highly Engaged — 302 (30.2%): FHS 62.6, highest spend/income 0.835 &amp; utilization 0.248, still engaged 76.5 → wellbeing priority.</a:t>
+            </a:r>
+            <a:endParaRPr lang="en-US" sz="1250" dirty="0"/>
           </a:p>
           <a:p>
             <a:pPr marL="177800" indent="-177800">
               <a:spcAft>
-                <a:spcPts val="800"/>
+                <a:spcPts val="700"/>
               </a:spcAft>
               <a:buSzPct val="100000"/>
               <a:buChar char="•"/>
             </a:pPr>
             <a:r>
-              <a:rPr lang="en-US" sz="1400" dirty="0">
+              <a:rPr lang="en-US" sz="1250" dirty="0">
                 <a:solidFill>
                   <a:srgbClr val="1B2A36"/>
                 </a:solidFill>
@@ -5374,20 +5649,20 @@
                 <a:ea typeface="Calibri" pitchFamily="34" charset="-122"/>
                 <a:cs typeface="Calibri" pitchFamily="34" charset="-120"/>
               </a:rPr>
-              <a:t>Financially Stretched but Highly Engaged — 302 (30%): highest spend/income 0.835, still engaged → the wellbeing priority.</a:t>
-            </a:r>
-            <a:endParaRPr lang="en-US" sz="1400" dirty="0"/>
+              <a:t>Digital Power Users — 258 (25.8%): 251 transactions/month (1.6× avg), highest volatility 1.91 &amp; engagement 80.2 → monetise, monitor drift.  ·  Low Engagement &amp; Emerging Digital — 88 (8.8%): 9.7 transactions/month, engagement 49.6, but 67.1% online &amp; 86.6% discretionary → activate.</a:t>
+            </a:r>
+            <a:endParaRPr lang="en-US" sz="1250" dirty="0"/>
           </a:p>
           <a:p>
             <a:pPr marL="177800" indent="-177800">
               <a:spcAft>
-                <a:spcPts val="800"/>
+                <a:spcPts val="700"/>
               </a:spcAft>
               <a:buSzPct val="100000"/>
               <a:buChar char="•"/>
             </a:pPr>
             <a:r>
-              <a:rPr lang="en-US" sz="1400" dirty="0">
+              <a:rPr lang="en-US" sz="1250" dirty="0">
                 <a:solidFill>
                   <a:srgbClr val="1B2A36"/>
                 </a:solidFill>
@@ -5395,9 +5670,9 @@
                 <a:ea typeface="Calibri" pitchFamily="34" charset="-122"/>
                 <a:cs typeface="Calibri" pitchFamily="34" charset="-120"/>
               </a:rPr>
-              <a:t>High-Activity Digital Power Users — 258 (26%): most active &amp; volatile → monetise &amp; monitor drift.  ·  Low Engagement &amp; Emerging Digital — 88 (9%): near-dormant, 60% of spend via E-com/Mobile → activate.</a:t>
-            </a:r>
-            <a:endParaRPr lang="en-US" sz="1400" dirty="0"/>
+              <a:t>Suggested personas not formed: Essential-Spend-Focused = only 4 consumers; Healthy-but-Disengaged = 25, 24 of them inside Emerging Digital.</a:t>
+            </a:r>
+            <a:endParaRPr lang="en-US" sz="1250" dirty="0"/>
           </a:p>
         </p:txBody>
       </p:sp>
@@ -5416,8 +5691,8 @@
         </p:blipFill>
         <p:spPr>
           <a:xfrm>
-            <a:off x="502920" y="3063240"/>
-            <a:ext cx="5440680" cy="3200400"/>
+            <a:off x="502920" y="3017520"/>
+            <a:ext cx="5440680" cy="3063240"/>
           </a:xfrm>
           <a:prstGeom prst="rect">
             <a:avLst/>
@@ -5439,8 +5714,8 @@
         </p:blipFill>
         <p:spPr>
           <a:xfrm>
-            <a:off x="6263640" y="3063240"/>
-            <a:ext cx="5440680" cy="3200400"/>
+            <a:off x="6263640" y="3017520"/>
+            <a:ext cx="5440680" cy="3063240"/>
           </a:xfrm>
           <a:prstGeom prst="rect">
             <a:avLst/>
@@ -5450,6 +5725,45 @@
       <p:sp>
         <p:nvSpPr>
           <p:cNvPr id="7" name="Text 3"/>
+          <p:cNvSpPr txBox="1"/>
+          <p:nvPr/>
+        </p:nvSpPr>
+        <p:spPr>
+          <a:xfrm>
+            <a:off x="502920" y="6144768"/>
+            <a:ext cx="11201400" cy="256032"/>
+          </a:xfrm>
+          <a:prstGeom prst="rect">
+            <a:avLst/>
+          </a:prstGeom>
+          <a:noFill/>
+          <a:ln/>
+        </p:spPr>
+        <p:txBody>
+          <a:bodyPr wrap="square" lIns="0" tIns="0" rIns="0" bIns="0" rtlCol="0" anchor="t"/>
+          <a:lstStyle/>
+          <a:p>
+            <a:pPr indent="0" marL="0">
+              <a:buNone/>
+            </a:pPr>
+            <a:r>
+              <a:rPr lang="en-US" sz="850" i="1" dirty="0">
+                <a:solidFill>
+                  <a:srgbClr val="5F7180"/>
+                </a:solidFill>
+                <a:latin typeface="Calibri" pitchFamily="34" charset="0"/>
+                <a:ea typeface="Calibri" pitchFamily="34" charset="-122"/>
+                <a:cs typeface="Calibri" pitchFamily="34" charset="-120"/>
+              </a:rPr>
+              <a:t>Source: team k-means (k=4) on 8 z-scaled ratios, 999 consumers (task4_features.csv).</a:t>
+            </a:r>
+            <a:endParaRPr lang="en-US" sz="850" dirty="0"/>
+          </a:p>
+        </p:txBody>
+      </p:sp>
+      <p:sp>
+        <p:nvSpPr>
+          <p:cNvPr id="8" name="Text 4"/>
           <p:cNvSpPr txBox="1"/>
           <p:nvPr/>
         </p:nvSpPr>
@@ -5488,7 +5802,7 @@
       </p:sp>
       <p:sp>
         <p:nvSpPr>
-          <p:cNvPr id="8" name="Text 4"/>
+          <p:cNvPr id="9" name="Text 5"/>
           <p:cNvSpPr txBox="1"/>
           <p:nvPr/>
         </p:nvSpPr>
@@ -5590,7 +5904,7 @@
                 <a:ea typeface="Calibri" pitchFamily="34" charset="-122"/>
                 <a:cs typeface="Calibri" pitchFamily="34" charset="-120"/>
               </a:rPr>
-              <a:t>TASK 4 · SEGMENTATION</a:t>
+              <a:t>TASK 4 · SEGMENTATION · VALIDATION &amp; LIMITS</a:t>
             </a:r>
             <a:endParaRPr lang="en-US" sz="1100" dirty="0"/>
           </a:p>
@@ -5632,7 +5946,7 @@
                 <a:ea typeface="Cambria" pitchFamily="34" charset="-122"/>
                 <a:cs typeface="Cambria" pitchFamily="34" charset="-120"/>
               </a:rPr>
-              <a:t>Validation: stable segments, and a December slide</a:t>
+              <a:t>Stable segments, a December slide — and honest limits</a:t>
             </a:r>
             <a:endParaRPr lang="en-US" sz="2700" dirty="0"/>
           </a:p>
@@ -5646,8 +5960,8 @@
         </p:nvSpPr>
         <p:spPr>
           <a:xfrm>
-            <a:off x="457200" y="1600200"/>
-            <a:ext cx="5760720" cy="3200400"/>
+            <a:off x="457200" y="1463040"/>
+            <a:ext cx="5852160" cy="2606040"/>
           </a:xfrm>
           <a:prstGeom prst="rect">
             <a:avLst/>
@@ -5661,13 +5975,13 @@
           <a:p>
             <a:pPr marL="177800" indent="-177800">
               <a:spcAft>
-                <a:spcPts val="800"/>
+                <a:spcPts val="700"/>
               </a:spcAft>
               <a:buSzPct val="100000"/>
               <a:buChar char="•"/>
             </a:pPr>
             <a:r>
-              <a:rPr lang="en-US" sz="1400" dirty="0">
+              <a:rPr lang="en-US" sz="1200" dirty="0">
                 <a:solidFill>
                   <a:srgbClr val="1B2A36"/>
                 </a:solidFill>
@@ -5675,20 +5989,20 @@
                 <a:ea typeface="Calibri" pitchFamily="34" charset="-122"/>
                 <a:cs typeface="Calibri" pitchFamily="34" charset="-120"/>
               </a:rPr>
-              <a:t>Stable: 20 random seeds → ARI 0.988; 80% bootstrap × 50 → ARI 0.911.</a:t>
-            </a:r>
-            <a:endParaRPr lang="en-US" sz="1400" dirty="0"/>
+              <a:t>Stability: 20 random seeds → ARI 0.988; 80% bootstrap × 50 → ARI 0.911. Alternative GMM: ARI 0.26 — Emerging Digital identical, the three large segments form one continuum (hence silhouette 0.251).</a:t>
+            </a:r>
+            <a:endParaRPr lang="en-US" sz="1200" dirty="0"/>
           </a:p>
           <a:p>
             <a:pPr marL="177800" indent="-177800">
               <a:spcAft>
-                <a:spcPts val="800"/>
+                <a:spcPts val="700"/>
               </a:spcAft>
               <a:buSzPct val="100000"/>
               <a:buChar char="•"/>
             </a:pPr>
             <a:r>
-              <a:rPr lang="en-US" sz="1400" dirty="0">
+              <a:rPr lang="en-US" sz="1200" dirty="0">
                 <a:solidFill>
                   <a:srgbClr val="1B2A36"/>
                 </a:solidFill>
@@ -5696,20 +6010,20 @@
                 <a:ea typeface="Calibri" pitchFamily="34" charset="-122"/>
                 <a:cs typeface="Calibri" pitchFamily="34" charset="-120"/>
               </a:rPr>
-              <a:t>GMM agrees only partly (ARI 0.26): Emerging Digital is identical, the three large segments form one continuum — hence silhouette 0.251.</a:t>
-            </a:r>
-            <a:endParaRPr lang="en-US" sz="1400" dirty="0"/>
+              <a:t>Monthly migration: a Healthy month is followed by a Stretched month 23% of the time — 72% from November to December.</a:t>
+            </a:r>
+            <a:endParaRPr lang="en-US" sz="1200" dirty="0"/>
           </a:p>
           <a:p>
             <a:pPr marL="177800" indent="-177800">
               <a:spcAft>
-                <a:spcPts val="800"/>
+                <a:spcPts val="700"/>
               </a:spcAft>
               <a:buSzPct val="100000"/>
               <a:buChar char="•"/>
             </a:pPr>
             <a:r>
-              <a:rPr lang="en-US" sz="1400" dirty="0">
+              <a:rPr lang="en-US" sz="1200" dirty="0">
                 <a:solidFill>
                   <a:srgbClr val="1B2A36"/>
                 </a:solidFill>
@@ -5717,30 +6031,9 @@
                 <a:ea typeface="Calibri" pitchFamily="34" charset="-122"/>
                 <a:cs typeface="Calibri" pitchFamily="34" charset="-120"/>
               </a:rPr>
-              <a:t>Monthly migration: a Healthy month slides to Stretched 23% of the time — but 72% from November to December.</a:t>
-            </a:r>
-            <a:endParaRPr lang="en-US" sz="1400" dirty="0"/>
-          </a:p>
-          <a:p>
-            <a:pPr marL="177800" indent="-177800">
-              <a:spcAft>
-                <a:spcPts val="800"/>
-              </a:spcAft>
-              <a:buSzPct val="100000"/>
-              <a:buChar char="•"/>
-            </a:pPr>
-            <a:r>
-              <a:rPr lang="en-US" sz="1400" dirty="0">
-                <a:solidFill>
-                  <a:srgbClr val="1B2A36"/>
-                </a:solidFill>
-                <a:latin typeface="Calibri" pitchFamily="34" charset="0"/>
-                <a:ea typeface="Calibri" pitchFamily="34" charset="-122"/>
-                <a:cs typeface="Calibri" pitchFamily="34" charset="-120"/>
-              </a:rPr>
-              <a:t>Segments correlate with age &amp; gender (p &lt; 0.01) though not used as inputs → trigger tools on behaviour only.</a:t>
-            </a:r>
-            <a:endParaRPr lang="en-US" sz="1400" dirty="0"/>
+              <a:t>Bias check: segments correlate with age &amp; gender (chi-square p &lt; 0.01) though not inputs → trigger every tool on behaviour, never on demographics.</a:t>
+            </a:r>
+            <a:endParaRPr lang="en-US" sz="1200" dirty="0"/>
           </a:p>
         </p:txBody>
       </p:sp>
@@ -5759,8 +6052,8 @@
         </p:blipFill>
         <p:spPr>
           <a:xfrm>
-            <a:off x="6446520" y="1554480"/>
-            <a:ext cx="5303520" cy="4206240"/>
+            <a:off x="6446520" y="1463040"/>
+            <a:ext cx="5303520" cy="2697480"/>
           </a:xfrm>
           <a:prstGeom prst="rect">
             <a:avLst/>
@@ -5769,107 +6062,294 @@
       </p:pic>
       <p:sp>
         <p:nvSpPr>
-          <p:cNvPr id="6" name="Shape 3"/>
+          <p:cNvPr id="6" name="Text 3"/>
+          <p:cNvSpPr txBox="1"/>
+          <p:nvPr/>
+        </p:nvSpPr>
+        <p:spPr>
+          <a:xfrm>
+            <a:off x="6446520" y="4160520"/>
+            <a:ext cx="5303520" cy="256032"/>
+          </a:xfrm>
+          <a:prstGeom prst="rect">
+            <a:avLst/>
+          </a:prstGeom>
+          <a:noFill/>
+          <a:ln/>
+        </p:spPr>
+        <p:txBody>
+          <a:bodyPr wrap="square" lIns="0" tIns="0" rIns="0" bIns="0" rtlCol="0" anchor="t"/>
+          <a:lstStyle/>
+          <a:p>
+            <a:pPr indent="0" marL="0">
+              <a:buNone/>
+            </a:pPr>
+            <a:r>
+              <a:rPr lang="en-US" sz="850" i="1" dirty="0">
+                <a:solidFill>
+                  <a:srgbClr val="5F7180"/>
+                </a:solidFill>
+                <a:latin typeface="Calibri" pitchFamily="34" charset="0"/>
+                <a:ea typeface="Calibri" pitchFamily="34" charset="-122"/>
+                <a:cs typeface="Calibri" pitchFamily="34" charset="-120"/>
+              </a:rPr>
+              <a:t>Source: team k-means (k=4) on 8 z-scaled ratios, 999 consumers (task4_features.csv). PCA = 73% of variance.</a:t>
+            </a:r>
+            <a:endParaRPr lang="en-US" sz="850" dirty="0"/>
+          </a:p>
+        </p:txBody>
+      </p:sp>
+      <p:sp>
+        <p:nvSpPr>
+          <p:cNvPr id="7" name="Shape 4"/>
           <p:cNvSpPr/>
           <p:nvPr/>
         </p:nvSpPr>
         <p:spPr>
           <a:xfrm>
-            <a:off x="457200" y="5029200"/>
-            <a:ext cx="3383280" cy="1097280"/>
+            <a:off x="457200" y="4480560"/>
+            <a:ext cx="5532120" cy="1874520"/>
           </a:xfrm>
           <a:prstGeom prst="roundRect">
             <a:avLst>
-              <a:gd name="adj" fmla="val 6667"/>
+              <a:gd name="adj" fmla="val 2927"/>
             </a:avLst>
           </a:prstGeom>
           <a:solidFill>
-            <a:srgbClr val="12435E"/>
+            <a:srgbClr val="EAF3F4"/>
           </a:solidFill>
           <a:ln/>
         </p:spPr>
       </p:sp>
       <p:sp>
         <p:nvSpPr>
-          <p:cNvPr id="7" name="Text 4"/>
-          <p:cNvSpPr txBox="1"/>
-          <p:nvPr/>
-        </p:nvSpPr>
-        <p:spPr>
-          <a:xfrm>
-            <a:off x="457200" y="5138928"/>
-            <a:ext cx="3383280" cy="658368"/>
-          </a:xfrm>
-          <a:prstGeom prst="rect">
-            <a:avLst/>
-          </a:prstGeom>
-          <a:noFill/>
-          <a:ln/>
-        </p:spPr>
-        <p:txBody>
-          <a:bodyPr wrap="square" lIns="0" tIns="0" rIns="0" bIns="0" rtlCol="0" anchor="ctr"/>
-          <a:lstStyle/>
-          <a:p>
-            <a:pPr algn="ctr" indent="0" marL="0">
-              <a:buNone/>
-            </a:pPr>
-            <a:r>
-              <a:rPr lang="en-US" sz="2800" b="1" dirty="0">
-                <a:solidFill>
-                  <a:srgbClr val="1FC3A6"/>
-                </a:solidFill>
-                <a:latin typeface="Cambria" pitchFamily="34" charset="0"/>
-                <a:ea typeface="Cambria" pitchFamily="34" charset="-122"/>
-                <a:cs typeface="Cambria" pitchFamily="34" charset="-120"/>
-              </a:rPr>
-              <a:t>72%</a:t>
-            </a:r>
-            <a:endParaRPr lang="en-US" sz="2800" dirty="0"/>
-          </a:p>
-        </p:txBody>
-      </p:sp>
-      <p:sp>
-        <p:nvSpPr>
           <p:cNvPr id="8" name="Text 5"/>
           <p:cNvSpPr txBox="1"/>
           <p:nvPr/>
         </p:nvSpPr>
         <p:spPr>
           <a:xfrm>
-            <a:off x="457200" y="5779008"/>
-            <a:ext cx="3383280" cy="320040"/>
-          </a:xfrm>
-          <a:prstGeom prst="rect">
-            <a:avLst/>
-          </a:prstGeom>
-          <a:noFill/>
-          <a:ln/>
-        </p:spPr>
-        <p:txBody>
-          <a:bodyPr wrap="square" lIns="0" tIns="0" rIns="0" bIns="0" rtlCol="0" anchor="ctr"/>
-          <a:lstStyle/>
-          <a:p>
-            <a:pPr algn="ctr" indent="0" marL="0">
-              <a:buNone/>
-            </a:pPr>
-            <a:r>
-              <a:rPr lang="en-US" sz="1100" dirty="0">
-                <a:solidFill>
-                  <a:srgbClr val="FFFFFF"/>
-                </a:solidFill>
-                <a:latin typeface="Calibri" pitchFamily="34" charset="0"/>
-                <a:ea typeface="Calibri" pitchFamily="34" charset="-122"/>
-                <a:cs typeface="Calibri" pitchFamily="34" charset="-120"/>
-              </a:rPr>
-              <a:t>Healthy → Stretched, Nov → Dec</a:t>
-            </a:r>
-            <a:endParaRPr lang="en-US" sz="1100" dirty="0"/>
-          </a:p>
-        </p:txBody>
-      </p:sp>
-      <p:sp>
-        <p:nvSpPr>
-          <p:cNvPr id="9" name="Text 6"/>
+            <a:off x="621792" y="4553712"/>
+            <a:ext cx="5212080" cy="1737360"/>
+          </a:xfrm>
+          <a:prstGeom prst="rect">
+            <a:avLst/>
+          </a:prstGeom>
+          <a:noFill/>
+          <a:ln/>
+        </p:spPr>
+        <p:txBody>
+          <a:bodyPr wrap="square" lIns="0" tIns="0" rIns="0" bIns="0" rtlCol="0" anchor="t"/>
+          <a:lstStyle/>
+          <a:p>
+            <a:pPr indent="0" marL="0">
+              <a:spcAft>
+                <a:spcPts val="400"/>
+              </a:spcAft>
+              <a:buNone/>
+            </a:pPr>
+            <a:r>
+              <a:rPr lang="en-US" sz="1250" b="1" dirty="0">
+                <a:solidFill>
+                  <a:srgbClr val="058B8C"/>
+                </a:solidFill>
+                <a:latin typeface="Calibri" pitchFamily="34" charset="0"/>
+                <a:ea typeface="Calibri" pitchFamily="34" charset="-122"/>
+                <a:cs typeface="Calibri" pitchFamily="34" charset="-120"/>
+              </a:rPr>
+              <a:t>Limitations</a:t>
+            </a:r>
+            <a:endParaRPr lang="en-US" sz="1250" dirty="0"/>
+          </a:p>
+          <a:p>
+            <a:pPr indent="0" marL="0">
+              <a:spcAft>
+                <a:spcPts val="300"/>
+              </a:spcAft>
+              <a:buNone/>
+            </a:pPr>
+            <a:r>
+              <a:rPr lang="en-US" sz="1050" dirty="0">
+                <a:solidFill>
+                  <a:srgbClr val="1B2A36"/>
+                </a:solidFill>
+                <a:latin typeface="Calibri" pitchFamily="34" charset="0"/>
+                <a:ea typeface="Calibri" pitchFamily="34" charset="-122"/>
+                <a:cs typeface="Calibri" pitchFamily="34" charset="-120"/>
+              </a:rPr>
+              <a:t>•  Technical: moderate silhouette; yearly means hide within-year trajectory; feature choice is a judgement call.</a:t>
+            </a:r>
+            <a:endParaRPr lang="en-US" sz="1250" dirty="0"/>
+          </a:p>
+          <a:p>
+            <a:pPr indent="0" marL="0">
+              <a:spcAft>
+                <a:spcPts val="300"/>
+              </a:spcAft>
+              <a:buNone/>
+            </a:pPr>
+            <a:r>
+              <a:rPr lang="en-US" sz="1050" dirty="0">
+                <a:solidFill>
+                  <a:srgbClr val="1B2A36"/>
+                </a:solidFill>
+                <a:latin typeface="Calibri" pitchFamily="34" charset="0"/>
+                <a:ea typeface="Calibri" pitchFamily="34" charset="-122"/>
+                <a:cs typeface="Calibri" pitchFamily="34" charset="-120"/>
+              </a:rPr>
+              <a:t>•  Data: synthetic, two source years folded onto 2025; engagement engineered high; Emerging Digital (n = 88) least robust.</a:t>
+            </a:r>
+            <a:endParaRPr lang="en-US" sz="1250" dirty="0"/>
+          </a:p>
+          <a:p>
+            <a:pPr indent="0" marL="0">
+              <a:spcAft>
+                <a:spcPts val="300"/>
+              </a:spcAft>
+              <a:buNone/>
+            </a:pPr>
+            <a:r>
+              <a:rPr lang="en-US" sz="1050" dirty="0">
+                <a:solidFill>
+                  <a:srgbClr val="1B2A36"/>
+                </a:solidFill>
+                <a:latin typeface="Calibri" pitchFamily="34" charset="0"/>
+                <a:ea typeface="Calibri" pitchFamily="34" charset="-122"/>
+                <a:cs typeface="Calibri" pitchFamily="34" charset="-120"/>
+              </a:rPr>
+              <a:t>•  Operational: segments are wellbeing groups, not risk tiers — never for lending.</a:t>
+            </a:r>
+            <a:endParaRPr lang="en-US" sz="1250" dirty="0"/>
+          </a:p>
+        </p:txBody>
+      </p:sp>
+      <p:sp>
+        <p:nvSpPr>
+          <p:cNvPr id="9" name="Shape 6"/>
+          <p:cNvSpPr/>
+          <p:nvPr/>
+        </p:nvSpPr>
+        <p:spPr>
+          <a:xfrm>
+            <a:off x="6217920" y="4480560"/>
+            <a:ext cx="5532120" cy="1874520"/>
+          </a:xfrm>
+          <a:prstGeom prst="roundRect">
+            <a:avLst>
+              <a:gd name="adj" fmla="val 2927"/>
+            </a:avLst>
+          </a:prstGeom>
+          <a:solidFill>
+            <a:srgbClr val="EAF3F4"/>
+          </a:solidFill>
+          <a:ln/>
+        </p:spPr>
+      </p:sp>
+      <p:sp>
+        <p:nvSpPr>
+          <p:cNvPr id="10" name="Text 7"/>
+          <p:cNvSpPr txBox="1"/>
+          <p:nvPr/>
+        </p:nvSpPr>
+        <p:spPr>
+          <a:xfrm>
+            <a:off x="6382512" y="4553712"/>
+            <a:ext cx="5212080" cy="1737360"/>
+          </a:xfrm>
+          <a:prstGeom prst="rect">
+            <a:avLst/>
+          </a:prstGeom>
+          <a:noFill/>
+          <a:ln/>
+        </p:spPr>
+        <p:txBody>
+          <a:bodyPr wrap="square" lIns="0" tIns="0" rIns="0" bIns="0" rtlCol="0" anchor="t"/>
+          <a:lstStyle/>
+          <a:p>
+            <a:pPr indent="0" marL="0">
+              <a:spcAft>
+                <a:spcPts val="400"/>
+              </a:spcAft>
+              <a:buNone/>
+            </a:pPr>
+            <a:r>
+              <a:rPr lang="en-US" sz="1250" b="1" dirty="0">
+                <a:solidFill>
+                  <a:srgbClr val="058B8C"/>
+                </a:solidFill>
+                <a:latin typeface="Calibri" pitchFamily="34" charset="0"/>
+                <a:ea typeface="Calibri" pitchFamily="34" charset="-122"/>
+                <a:cs typeface="Calibri" pitchFamily="34" charset="-120"/>
+              </a:rPr>
+              <a:t>Future work</a:t>
+            </a:r>
+            <a:endParaRPr lang="en-US" sz="1250" dirty="0"/>
+          </a:p>
+          <a:p>
+            <a:pPr indent="0" marL="0">
+              <a:spcAft>
+                <a:spcPts val="300"/>
+              </a:spcAft>
+              <a:buNone/>
+            </a:pPr>
+            <a:r>
+              <a:rPr lang="en-US" sz="1050" dirty="0">
+                <a:solidFill>
+                  <a:srgbClr val="1B2A36"/>
+                </a:solidFill>
+                <a:latin typeface="Calibri" pitchFamily="34" charset="0"/>
+                <a:ea typeface="Calibri" pitchFamily="34" charset="-122"/>
+                <a:cs typeface="Calibri" pitchFamily="34" charset="-120"/>
+              </a:rPr>
+              <a:t>•  Refit on multi-year real data; track segment migration monthly.</a:t>
+            </a:r>
+            <a:endParaRPr lang="en-US" sz="1250" dirty="0"/>
+          </a:p>
+          <a:p>
+            <a:pPr indent="0" marL="0">
+              <a:spcAft>
+                <a:spcPts val="300"/>
+              </a:spcAft>
+              <a:buNone/>
+            </a:pPr>
+            <a:r>
+              <a:rPr lang="en-US" sz="1050" dirty="0">
+                <a:solidFill>
+                  <a:srgbClr val="1B2A36"/>
+                </a:solidFill>
+                <a:latin typeface="Calibri" pitchFamily="34" charset="0"/>
+                <a:ea typeface="Calibri" pitchFamily="34" charset="-122"/>
+                <a:cs typeface="Calibri" pitchFamily="34" charset="-120"/>
+              </a:rPr>
+              <a:t>•  Trajectory features (FHS slope, volatility trend) + GMM soft membership for boundary customers.</a:t>
+            </a:r>
+            <a:endParaRPr lang="en-US" sz="1250" dirty="0"/>
+          </a:p>
+          <a:p>
+            <a:pPr indent="0" marL="0">
+              <a:spcAft>
+                <a:spcPts val="300"/>
+              </a:spcAft>
+              <a:buNone/>
+            </a:pPr>
+            <a:r>
+              <a:rPr lang="en-US" sz="1050" dirty="0">
+                <a:solidFill>
+                  <a:srgbClr val="1B2A36"/>
+                </a:solidFill>
+                <a:latin typeface="Calibri" pitchFamily="34" charset="0"/>
+                <a:ea typeface="Calibri" pitchFamily="34" charset="-122"/>
+                <a:cs typeface="Calibri" pitchFamily="34" charset="-120"/>
+              </a:rPr>
+              <a:t>•  Chronological model for next_month_low_health_flag (train Jan–Aug, test Nov) as an early-warning — support only.</a:t>
+            </a:r>
+            <a:endParaRPr lang="en-US" sz="1250" dirty="0"/>
+          </a:p>
+        </p:txBody>
+      </p:sp>
+      <p:sp>
+        <p:nvSpPr>
+          <p:cNvPr id="12" name="Text 8"/>
           <p:cNvSpPr txBox="1"/>
           <p:nvPr/>
         </p:nvSpPr>
@@ -5908,7 +6388,7 @@
       </p:sp>
       <p:sp>
         <p:nvSpPr>
-          <p:cNvPr id="10" name="Text 7"/>
+          <p:cNvPr id="13" name="Text 9"/>
           <p:cNvSpPr txBox="1"/>
           <p:nvPr/>
         </p:nvSpPr>
@@ -6052,186 +6532,2520 @@
                 <a:ea typeface="Cambria" pitchFamily="34" charset="-122"/>
                 <a:cs typeface="Cambria" pitchFamily="34" charset="-120"/>
               </a:rPr>
-              <a:t>A six-tool, non-punitive action plan</a:t>
+              <a:t>Six non-punitive tools, each tied to a data finding</a:t>
             </a:r>
             <a:endParaRPr lang="en-US" sz="2700" dirty="0"/>
           </a:p>
         </p:txBody>
       </p:sp>
-      <p:sp>
-        <p:nvSpPr>
-          <p:cNvPr id="4" name="Text 2"/>
-          <p:cNvSpPr txBox="1"/>
-          <p:nvPr/>
-        </p:nvSpPr>
-        <p:spPr>
-          <a:xfrm>
-            <a:off x="457200" y="1600200"/>
-            <a:ext cx="5760720" cy="3200400"/>
-          </a:xfrm>
-          <a:prstGeom prst="rect">
-            <a:avLst/>
-          </a:prstGeom>
-          <a:noFill/>
-          <a:ln/>
-        </p:spPr>
-        <p:txBody>
-          <a:bodyPr wrap="square" rtlCol="0" anchor="t"/>
-          <a:lstStyle/>
-          <a:p>
-            <a:pPr marL="177800" indent="-177800">
-              <a:spcAft>
-                <a:spcPts val="800"/>
-              </a:spcAft>
-              <a:buSzPct val="100000"/>
-              <a:buChar char="•"/>
-            </a:pPr>
-            <a:r>
-              <a:rPr lang="en-US" sz="1400" dirty="0">
-                <a:solidFill>
-                  <a:srgbClr val="1B2A36"/>
-                </a:solidFill>
-                <a:latin typeface="Calibri" pitchFamily="34" charset="0"/>
-                <a:ea typeface="Calibri" pitchFamily="34" charset="-122"/>
-                <a:cs typeface="Calibri" pitchFamily="34" charset="-120"/>
-              </a:rPr>
-              <a:t>① Budgeting → Stretched-Engaged (302): spend-vs-income dashboard (driver −0.90).</a:t>
-            </a:r>
-            <a:endParaRPr lang="en-US" sz="1400" dirty="0"/>
-          </a:p>
-          <a:p>
-            <a:pPr marL="177800" indent="-177800">
-              <a:spcAft>
-                <a:spcPts val="800"/>
-              </a:spcAft>
-              <a:buSzPct val="100000"/>
-              <a:buChar char="•"/>
-            </a:pPr>
-            <a:r>
-              <a:rPr lang="en-US" sz="1400" dirty="0">
-                <a:solidFill>
-                  <a:srgbClr val="1B2A36"/>
-                </a:solidFill>
-                <a:latin typeface="Calibri" pitchFamily="34" charset="0"/>
-                <a:ea typeface="Calibri" pitchFamily="34" charset="-122"/>
-                <a:cs typeface="Calibri" pitchFamily="34" charset="-120"/>
-              </a:rPr>
-              <a:t>② Spend alerts → Crossover (43 = 52% of stress): Sunday–Monday evenings, before 22:00.</a:t>
-            </a:r>
-            <a:endParaRPr lang="en-US" sz="1400" dirty="0"/>
-          </a:p>
-          <a:p>
-            <a:pPr marL="177800" indent="-177800">
-              <a:spcAft>
-                <a:spcPts val="800"/>
-              </a:spcAft>
-              <a:buSzPct val="100000"/>
-              <a:buChar char="•"/>
-            </a:pPr>
-            <a:r>
-              <a:rPr lang="en-US" sz="1400" dirty="0">
-                <a:solidFill>
-                  <a:srgbClr val="1B2A36"/>
-                </a:solidFill>
-                <a:latin typeface="Calibri" pitchFamily="34" charset="0"/>
-                <a:ea typeface="Calibri" pitchFamily="34" charset="-122"/>
-                <a:cs typeface="Calibri" pitchFamily="34" charset="-120"/>
-              </a:rPr>
-              <a:t>③ Planning reminders → Power Users (258) + Healthy (351) in November, before the 72% December slide.</a:t>
-            </a:r>
-            <a:endParaRPr lang="en-US" sz="1400" dirty="0"/>
-          </a:p>
-          <a:p>
-            <a:pPr marL="177800" indent="-177800">
-              <a:spcAft>
-                <a:spcPts val="800"/>
-              </a:spcAft>
-              <a:buSzPct val="100000"/>
-              <a:buChar char="•"/>
-            </a:pPr>
-            <a:r>
-              <a:rPr lang="en-US" sz="1400" dirty="0">
-                <a:solidFill>
-                  <a:srgbClr val="1B2A36"/>
-                </a:solidFill>
-                <a:latin typeface="Calibri" pitchFamily="34" charset="0"/>
-                <a:ea typeface="Calibri" pitchFamily="34" charset="-122"/>
-                <a:cs typeface="Calibri" pitchFamily="34" charset="-120"/>
-              </a:rPr>
-              <a:t>④ Education → Distress tail (67): needs-vs-wants modules (essential ratio +0.48).</a:t>
-            </a:r>
-            <a:endParaRPr lang="en-US" sz="1400" dirty="0"/>
-          </a:p>
-          <a:p>
-            <a:pPr marL="177800" indent="-177800">
-              <a:spcAft>
-                <a:spcPts val="800"/>
-              </a:spcAft>
-              <a:buSzPct val="100000"/>
-              <a:buChar char="•"/>
-            </a:pPr>
-            <a:r>
-              <a:rPr lang="en-US" sz="1400" dirty="0">
-                <a:solidFill>
-                  <a:srgbClr val="1B2A36"/>
-                </a:solidFill>
-                <a:latin typeface="Calibri" pitchFamily="34" charset="0"/>
-                <a:ea typeface="Calibri" pitchFamily="34" charset="-122"/>
-                <a:cs typeface="Calibri" pitchFamily="34" charset="-120"/>
-              </a:rPr>
-              <a:t>⑤ Digital nudges → Emerging Digital (88): in-app habit loops — they already spend 60% via E-com/Mobile.</a:t>
-            </a:r>
-            <a:endParaRPr lang="en-US" sz="1400" dirty="0"/>
-          </a:p>
-          <a:p>
-            <a:pPr marL="177800" indent="-177800">
-              <a:spcAft>
-                <a:spcPts val="800"/>
-              </a:spcAft>
-              <a:buSzPct val="100000"/>
-              <a:buChar char="•"/>
-            </a:pPr>
-            <a:r>
-              <a:rPr lang="en-US" sz="1400" dirty="0">
-                <a:solidFill>
-                  <a:srgbClr val="1B2A36"/>
-                </a:solidFill>
-                <a:latin typeface="Calibri" pitchFamily="34" charset="0"/>
-                <a:ea typeface="Calibri" pitchFamily="34" charset="-122"/>
-                <a:cs typeface="Calibri" pitchFamily="34" charset="-120"/>
-              </a:rPr>
-              <a:t>⑥ Product suggestions → Healthy-Engaged (351): savings/loyalty, opt-in, never auto-extend.</a:t>
-            </a:r>
-            <a:endParaRPr lang="en-US" sz="1400" dirty="0"/>
-          </a:p>
-        </p:txBody>
-      </p:sp>
-      <p:pic>
-        <p:nvPicPr>
-          <p:cNvPr id="5" name="Image 0" descr="D:\BI10GroupYAPPERS\outputs\figures\t5_target_sizes.png">    </p:cNvPr>
-          <p:cNvPicPr>
-            <a:picLocks noChangeAspect="1"/>
-          </p:cNvPicPr>
-          <p:nvPr/>
-        </p:nvPicPr>
-        <p:blipFill>
-          <a:blip r:embed="rId1"/>
-          <a:srcRect l="0" r="0" t="0" b="0"/>
-          <a:stretch/>
-        </p:blipFill>
-        <p:spPr>
-          <a:xfrm>
-            <a:off x="6446520" y="1554480"/>
-            <a:ext cx="5303520" cy="4206240"/>
-          </a:xfrm>
-          <a:prstGeom prst="rect">
-            <a:avLst/>
-          </a:prstGeom>
-        </p:spPr>
-      </p:pic>
+      <p:graphicFrame>
+        <p:nvGraphicFramePr>
+          <p:cNvPr id="20" name="Table 0"/>
+          <p:cNvGraphicFramePr>
+            <a:graphicFrameLocks noGrp="1"/>
+          </p:cNvGraphicFramePr>
+          <p:nvPr>
+            <p:extLst>
+              <p:ext uri="{D42A27DB-BD31-4B8C-83A1-F6EECF244321}">
+                <p14:modId xmlns:p14="http://schemas.microsoft.com/office/powerpoint/2010/main" val="1579011935"/>
+              </p:ext>
+            </p:extLst>
+          </p:nvPr>
+        </p:nvGraphicFramePr>
+        <p:xfrm>
+          <a:off x="457200" y="1508760"/>
+          <a:ext cx="11247120" cy="914400"/>
+        </p:xfrm>
+        <a:graphic>
+          <a:graphicData uri="http://schemas.openxmlformats.org/drawingml/2006/table">
+            <a:tbl>
+              <a:tblPr/>
+              <a:tblGrid>
+                <a:gridCol w="1691640"/>
+                <a:gridCol w="2331720"/>
+                <a:gridCol w="2926080"/>
+                <a:gridCol w="2743200"/>
+                <a:gridCol w="1554480"/>
+              </a:tblGrid>
+              <a:tr h="566928">
+                <a:tc>
+                  <a:txBody>
+                    <a:bodyPr/>
+                    <a:lstStyle/>
+                    <a:p>
+                      <a:pPr indent="0" marL="0">
+                        <a:buNone/>
+                      </a:pPr>
+                      <a:r>
+                        <a:rPr lang="en-US" sz="1100" b="1" dirty="0">
+                          <a:solidFill>
+                            <a:srgbClr val="FFFFFF"/>
+                          </a:solidFill>
+                          <a:latin typeface="Calibri" pitchFamily="34" charset="0"/>
+                          <a:ea typeface="Calibri" pitchFamily="34" charset="-122"/>
+                          <a:cs typeface="Calibri" pitchFamily="34" charset="-120"/>
+                        </a:rPr>
+                        <a:t>Tool</a:t>
+                      </a:r>
+                      <a:endParaRPr lang="en-US" sz="1100" dirty="0">
+                        <a:latin typeface="Calibri" charset="0"/>
+                        <a:ea typeface="Calibri" charset="0"/>
+                        <a:cs typeface="Calibri" charset="0"/>
+                      </a:endParaRPr>
+                    </a:p>
+                  </a:txBody>
+                  <a:tcPr marL="91440" marR="91440" marT="45720" marB="45720" anchor="ctr">
+                    <a:lnL w="6350" cap="flat" cmpd="sng" algn="ctr">
+                      <a:solidFill>
+                        <a:srgbClr val="C9D6DB"/>
+                      </a:solidFill>
+                      <a:prstDash val="solid"/>
+                      <a:round/>
+                      <a:headEnd type="none" w="med" len="med"/>
+                      <a:tailEnd type="none" w="med" len="med"/>
+                    </a:lnL>
+                    <a:lnR w="6350" cap="flat" cmpd="sng" algn="ctr">
+                      <a:solidFill>
+                        <a:srgbClr val="C9D6DB"/>
+                      </a:solidFill>
+                      <a:prstDash val="solid"/>
+                      <a:round/>
+                      <a:headEnd type="none" w="med" len="med"/>
+                      <a:tailEnd type="none" w="med" len="med"/>
+                    </a:lnR>
+                    <a:lnT w="6350" cap="flat" cmpd="sng" algn="ctr">
+                      <a:solidFill>
+                        <a:srgbClr val="C9D6DB"/>
+                      </a:solidFill>
+                      <a:prstDash val="solid"/>
+                      <a:round/>
+                      <a:headEnd type="none" w="med" len="med"/>
+                      <a:tailEnd type="none" w="med" len="med"/>
+                    </a:lnT>
+                    <a:lnB w="6350" cap="flat" cmpd="sng" algn="ctr">
+                      <a:solidFill>
+                        <a:srgbClr val="C9D6DB"/>
+                      </a:solidFill>
+                      <a:prstDash val="solid"/>
+                      <a:round/>
+                      <a:headEnd type="none" w="med" len="med"/>
+                      <a:tailEnd type="none" w="med" len="med"/>
+                    </a:lnB>
+                    <a:solidFill>
+                      <a:srgbClr val="12435E"/>
+                    </a:solidFill>
+                  </a:tcPr>
+                </a:tc>
+                <a:tc>
+                  <a:txBody>
+                    <a:bodyPr/>
+                    <a:lstStyle/>
+                    <a:p>
+                      <a:pPr indent="0" marL="0">
+                        <a:buNone/>
+                      </a:pPr>
+                      <a:r>
+                        <a:rPr lang="en-US" sz="1100" b="1" dirty="0">
+                          <a:solidFill>
+                            <a:srgbClr val="FFFFFF"/>
+                          </a:solidFill>
+                          <a:latin typeface="Calibri" pitchFamily="34" charset="0"/>
+                          <a:ea typeface="Calibri" pitchFamily="34" charset="-122"/>
+                          <a:cs typeface="Calibri" pitchFamily="34" charset="-120"/>
+                        </a:rPr>
+                        <a:t>Target group (n, % of 999)</a:t>
+                      </a:r>
+                      <a:endParaRPr lang="en-US" sz="1100" dirty="0">
+                        <a:latin typeface="Calibri" charset="0"/>
+                        <a:ea typeface="Calibri" charset="0"/>
+                        <a:cs typeface="Calibri" charset="0"/>
+                      </a:endParaRPr>
+                    </a:p>
+                  </a:txBody>
+                  <a:tcPr marL="91440" marR="91440" marT="45720" marB="45720" anchor="ctr">
+                    <a:lnL w="6350" cap="flat" cmpd="sng" algn="ctr">
+                      <a:solidFill>
+                        <a:srgbClr val="C9D6DB"/>
+                      </a:solidFill>
+                      <a:prstDash val="solid"/>
+                      <a:round/>
+                      <a:headEnd type="none" w="med" len="med"/>
+                      <a:tailEnd type="none" w="med" len="med"/>
+                    </a:lnL>
+                    <a:lnR w="6350" cap="flat" cmpd="sng" algn="ctr">
+                      <a:solidFill>
+                        <a:srgbClr val="C9D6DB"/>
+                      </a:solidFill>
+                      <a:prstDash val="solid"/>
+                      <a:round/>
+                      <a:headEnd type="none" w="med" len="med"/>
+                      <a:tailEnd type="none" w="med" len="med"/>
+                    </a:lnR>
+                    <a:lnT w="6350" cap="flat" cmpd="sng" algn="ctr">
+                      <a:solidFill>
+                        <a:srgbClr val="C9D6DB"/>
+                      </a:solidFill>
+                      <a:prstDash val="solid"/>
+                      <a:round/>
+                      <a:headEnd type="none" w="med" len="med"/>
+                      <a:tailEnd type="none" w="med" len="med"/>
+                    </a:lnT>
+                    <a:lnB w="6350" cap="flat" cmpd="sng" algn="ctr">
+                      <a:solidFill>
+                        <a:srgbClr val="C9D6DB"/>
+                      </a:solidFill>
+                      <a:prstDash val="solid"/>
+                      <a:round/>
+                      <a:headEnd type="none" w="med" len="med"/>
+                      <a:tailEnd type="none" w="med" len="med"/>
+                    </a:lnB>
+                    <a:solidFill>
+                      <a:srgbClr val="12435E"/>
+                    </a:solidFill>
+                  </a:tcPr>
+                </a:tc>
+                <a:tc>
+                  <a:txBody>
+                    <a:bodyPr/>
+                    <a:lstStyle/>
+                    <a:p>
+                      <a:pPr indent="0" marL="0">
+                        <a:buNone/>
+                      </a:pPr>
+                      <a:r>
+                        <a:rPr lang="en-US" sz="1100" b="1" dirty="0">
+                          <a:solidFill>
+                            <a:srgbClr val="FFFFFF"/>
+                          </a:solidFill>
+                          <a:latin typeface="Calibri" pitchFamily="34" charset="0"/>
+                          <a:ea typeface="Calibri" pitchFamily="34" charset="-122"/>
+                          <a:cs typeface="Calibri" pitchFamily="34" charset="-120"/>
+                        </a:rPr>
+                        <a:t>Data evidence</a:t>
+                      </a:r>
+                      <a:endParaRPr lang="en-US" sz="1100" dirty="0">
+                        <a:latin typeface="Calibri" charset="0"/>
+                        <a:ea typeface="Calibri" charset="0"/>
+                        <a:cs typeface="Calibri" charset="0"/>
+                      </a:endParaRPr>
+                    </a:p>
+                  </a:txBody>
+                  <a:tcPr marL="91440" marR="91440" marT="45720" marB="45720" anchor="ctr">
+                    <a:lnL w="6350" cap="flat" cmpd="sng" algn="ctr">
+                      <a:solidFill>
+                        <a:srgbClr val="C9D6DB"/>
+                      </a:solidFill>
+                      <a:prstDash val="solid"/>
+                      <a:round/>
+                      <a:headEnd type="none" w="med" len="med"/>
+                      <a:tailEnd type="none" w="med" len="med"/>
+                    </a:lnL>
+                    <a:lnR w="6350" cap="flat" cmpd="sng" algn="ctr">
+                      <a:solidFill>
+                        <a:srgbClr val="C9D6DB"/>
+                      </a:solidFill>
+                      <a:prstDash val="solid"/>
+                      <a:round/>
+                      <a:headEnd type="none" w="med" len="med"/>
+                      <a:tailEnd type="none" w="med" len="med"/>
+                    </a:lnR>
+                    <a:lnT w="6350" cap="flat" cmpd="sng" algn="ctr">
+                      <a:solidFill>
+                        <a:srgbClr val="C9D6DB"/>
+                      </a:solidFill>
+                      <a:prstDash val="solid"/>
+                      <a:round/>
+                      <a:headEnd type="none" w="med" len="med"/>
+                      <a:tailEnd type="none" w="med" len="med"/>
+                    </a:lnT>
+                    <a:lnB w="6350" cap="flat" cmpd="sng" algn="ctr">
+                      <a:solidFill>
+                        <a:srgbClr val="C9D6DB"/>
+                      </a:solidFill>
+                      <a:prstDash val="solid"/>
+                      <a:round/>
+                      <a:headEnd type="none" w="med" len="med"/>
+                      <a:tailEnd type="none" w="med" len="med"/>
+                    </a:lnB>
+                    <a:solidFill>
+                      <a:srgbClr val="12435E"/>
+                    </a:solidFill>
+                  </a:tcPr>
+                </a:tc>
+                <a:tc>
+                  <a:txBody>
+                    <a:bodyPr/>
+                    <a:lstStyle/>
+                    <a:p>
+                      <a:pPr indent="0" marL="0">
+                        <a:buNone/>
+                      </a:pPr>
+                      <a:r>
+                        <a:rPr lang="en-US" sz="1100" b="1" dirty="0">
+                          <a:solidFill>
+                            <a:srgbClr val="FFFFFF"/>
+                          </a:solidFill>
+                          <a:latin typeface="Calibri" pitchFamily="34" charset="0"/>
+                          <a:ea typeface="Calibri" pitchFamily="34" charset="-122"/>
+                          <a:cs typeface="Calibri" pitchFamily="34" charset="-120"/>
+                        </a:rPr>
+                        <a:t>Action</a:t>
+                      </a:r>
+                      <a:endParaRPr lang="en-US" sz="1100" dirty="0">
+                        <a:latin typeface="Calibri" charset="0"/>
+                        <a:ea typeface="Calibri" charset="0"/>
+                        <a:cs typeface="Calibri" charset="0"/>
+                      </a:endParaRPr>
+                    </a:p>
+                  </a:txBody>
+                  <a:tcPr marL="91440" marR="91440" marT="45720" marB="45720" anchor="ctr">
+                    <a:lnL w="6350" cap="flat" cmpd="sng" algn="ctr">
+                      <a:solidFill>
+                        <a:srgbClr val="C9D6DB"/>
+                      </a:solidFill>
+                      <a:prstDash val="solid"/>
+                      <a:round/>
+                      <a:headEnd type="none" w="med" len="med"/>
+                      <a:tailEnd type="none" w="med" len="med"/>
+                    </a:lnL>
+                    <a:lnR w="6350" cap="flat" cmpd="sng" algn="ctr">
+                      <a:solidFill>
+                        <a:srgbClr val="C9D6DB"/>
+                      </a:solidFill>
+                      <a:prstDash val="solid"/>
+                      <a:round/>
+                      <a:headEnd type="none" w="med" len="med"/>
+                      <a:tailEnd type="none" w="med" len="med"/>
+                    </a:lnR>
+                    <a:lnT w="6350" cap="flat" cmpd="sng" algn="ctr">
+                      <a:solidFill>
+                        <a:srgbClr val="C9D6DB"/>
+                      </a:solidFill>
+                      <a:prstDash val="solid"/>
+                      <a:round/>
+                      <a:headEnd type="none" w="med" len="med"/>
+                      <a:tailEnd type="none" w="med" len="med"/>
+                    </a:lnT>
+                    <a:lnB w="6350" cap="flat" cmpd="sng" algn="ctr">
+                      <a:solidFill>
+                        <a:srgbClr val="C9D6DB"/>
+                      </a:solidFill>
+                      <a:prstDash val="solid"/>
+                      <a:round/>
+                      <a:headEnd type="none" w="med" len="med"/>
+                      <a:tailEnd type="none" w="med" len="med"/>
+                    </a:lnB>
+                    <a:solidFill>
+                      <a:srgbClr val="12435E"/>
+                    </a:solidFill>
+                  </a:tcPr>
+                </a:tc>
+                <a:tc>
+                  <a:txBody>
+                    <a:bodyPr/>
+                    <a:lstStyle/>
+                    <a:p>
+                      <a:pPr indent="0" marL="0">
+                        <a:buNone/>
+                      </a:pPr>
+                      <a:r>
+                        <a:rPr lang="en-US" sz="1100" b="1" dirty="0">
+                          <a:solidFill>
+                            <a:srgbClr val="FFFFFF"/>
+                          </a:solidFill>
+                          <a:latin typeface="Calibri" pitchFamily="34" charset="0"/>
+                          <a:ea typeface="Calibri" pitchFamily="34" charset="-122"/>
+                          <a:cs typeface="Calibri" pitchFamily="34" charset="-120"/>
+                        </a:rPr>
+                        <a:t>KPI</a:t>
+                      </a:r>
+                      <a:endParaRPr lang="en-US" sz="1100" dirty="0">
+                        <a:latin typeface="Calibri" charset="0"/>
+                        <a:ea typeface="Calibri" charset="0"/>
+                        <a:cs typeface="Calibri" charset="0"/>
+                      </a:endParaRPr>
+                    </a:p>
+                  </a:txBody>
+                  <a:tcPr marL="91440" marR="91440" marT="45720" marB="45720" anchor="ctr">
+                    <a:lnL w="6350" cap="flat" cmpd="sng" algn="ctr">
+                      <a:solidFill>
+                        <a:srgbClr val="C9D6DB"/>
+                      </a:solidFill>
+                      <a:prstDash val="solid"/>
+                      <a:round/>
+                      <a:headEnd type="none" w="med" len="med"/>
+                      <a:tailEnd type="none" w="med" len="med"/>
+                    </a:lnL>
+                    <a:lnR w="6350" cap="flat" cmpd="sng" algn="ctr">
+                      <a:solidFill>
+                        <a:srgbClr val="C9D6DB"/>
+                      </a:solidFill>
+                      <a:prstDash val="solid"/>
+                      <a:round/>
+                      <a:headEnd type="none" w="med" len="med"/>
+                      <a:tailEnd type="none" w="med" len="med"/>
+                    </a:lnR>
+                    <a:lnT w="6350" cap="flat" cmpd="sng" algn="ctr">
+                      <a:solidFill>
+                        <a:srgbClr val="C9D6DB"/>
+                      </a:solidFill>
+                      <a:prstDash val="solid"/>
+                      <a:round/>
+                      <a:headEnd type="none" w="med" len="med"/>
+                      <a:tailEnd type="none" w="med" len="med"/>
+                    </a:lnT>
+                    <a:lnB w="6350" cap="flat" cmpd="sng" algn="ctr">
+                      <a:solidFill>
+                        <a:srgbClr val="C9D6DB"/>
+                      </a:solidFill>
+                      <a:prstDash val="solid"/>
+                      <a:round/>
+                      <a:headEnd type="none" w="med" len="med"/>
+                      <a:tailEnd type="none" w="med" len="med"/>
+                    </a:lnB>
+                    <a:solidFill>
+                      <a:srgbClr val="12435E"/>
+                    </a:solidFill>
+                  </a:tcPr>
+                </a:tc>
+              </a:tr>
+              <a:tr h="566928">
+                <a:tc>
+                  <a:txBody>
+                    <a:bodyPr/>
+                    <a:lstStyle/>
+                    <a:p>
+                      <a:pPr indent="0" marL="0">
+                        <a:buNone/>
+                      </a:pPr>
+                      <a:r>
+                        <a:rPr lang="en-US" sz="1050" dirty="0">
+                          <a:solidFill>
+                            <a:srgbClr val="1B2A36"/>
+                          </a:solidFill>
+                          <a:latin typeface="Calibri" pitchFamily="34" charset="0"/>
+                          <a:ea typeface="Calibri" pitchFamily="34" charset="-122"/>
+                          <a:cs typeface="Calibri" pitchFamily="34" charset="-120"/>
+                        </a:rPr>
+                        <a:t>① Budgeting tool</a:t>
+                      </a:r>
+                      <a:endParaRPr lang="en-US" sz="1050" dirty="0">
+                        <a:latin typeface="Calibri" charset="0"/>
+                        <a:ea typeface="Calibri" charset="0"/>
+                        <a:cs typeface="Calibri" charset="0"/>
+                      </a:endParaRPr>
+                    </a:p>
+                  </a:txBody>
+                  <a:tcPr marL="91440" marR="91440" marT="45720" marB="45720" anchor="ctr">
+                    <a:lnL w="6350" cap="flat" cmpd="sng" algn="ctr">
+                      <a:solidFill>
+                        <a:srgbClr val="C9D6DB"/>
+                      </a:solidFill>
+                      <a:prstDash val="solid"/>
+                      <a:round/>
+                      <a:headEnd type="none" w="med" len="med"/>
+                      <a:tailEnd type="none" w="med" len="med"/>
+                    </a:lnL>
+                    <a:lnR w="6350" cap="flat" cmpd="sng" algn="ctr">
+                      <a:solidFill>
+                        <a:srgbClr val="C9D6DB"/>
+                      </a:solidFill>
+                      <a:prstDash val="solid"/>
+                      <a:round/>
+                      <a:headEnd type="none" w="med" len="med"/>
+                      <a:tailEnd type="none" w="med" len="med"/>
+                    </a:lnR>
+                    <a:lnT w="6350" cap="flat" cmpd="sng" algn="ctr">
+                      <a:solidFill>
+                        <a:srgbClr val="C9D6DB"/>
+                      </a:solidFill>
+                      <a:prstDash val="solid"/>
+                      <a:round/>
+                      <a:headEnd type="none" w="med" len="med"/>
+                      <a:tailEnd type="none" w="med" len="med"/>
+                    </a:lnT>
+                    <a:lnB w="6350" cap="flat" cmpd="sng" algn="ctr">
+                      <a:solidFill>
+                        <a:srgbClr val="C9D6DB"/>
+                      </a:solidFill>
+                      <a:prstDash val="solid"/>
+                      <a:round/>
+                      <a:headEnd type="none" w="med" len="med"/>
+                      <a:tailEnd type="none" w="med" len="med"/>
+                    </a:lnB>
+                    <a:solidFill>
+                      <a:srgbClr val="FFFFFF"/>
+                    </a:solidFill>
+                  </a:tcPr>
+                </a:tc>
+                <a:tc>
+                  <a:txBody>
+                    <a:bodyPr/>
+                    <a:lstStyle/>
+                    <a:p>
+                      <a:pPr indent="0" marL="0">
+                        <a:buNone/>
+                      </a:pPr>
+                      <a:r>
+                        <a:rPr lang="en-US" sz="1050" dirty="0">
+                          <a:solidFill>
+                            <a:srgbClr val="1B2A36"/>
+                          </a:solidFill>
+                          <a:latin typeface="Calibri" pitchFamily="34" charset="0"/>
+                          <a:ea typeface="Calibri" pitchFamily="34" charset="-122"/>
+                          <a:cs typeface="Calibri" pitchFamily="34" charset="-120"/>
+                        </a:rPr>
+                        <a:t>Stretched &amp; Engaged: 302 (30.2%)</a:t>
+                      </a:r>
+                      <a:endParaRPr lang="en-US" sz="1050" dirty="0">
+                        <a:latin typeface="Calibri" charset="0"/>
+                        <a:ea typeface="Calibri" charset="0"/>
+                        <a:cs typeface="Calibri" charset="0"/>
+                      </a:endParaRPr>
+                    </a:p>
+                  </a:txBody>
+                  <a:tcPr marL="91440" marR="91440" marT="45720" marB="45720" anchor="ctr">
+                    <a:lnL w="6350" cap="flat" cmpd="sng" algn="ctr">
+                      <a:solidFill>
+                        <a:srgbClr val="C9D6DB"/>
+                      </a:solidFill>
+                      <a:prstDash val="solid"/>
+                      <a:round/>
+                      <a:headEnd type="none" w="med" len="med"/>
+                      <a:tailEnd type="none" w="med" len="med"/>
+                    </a:lnL>
+                    <a:lnR w="6350" cap="flat" cmpd="sng" algn="ctr">
+                      <a:solidFill>
+                        <a:srgbClr val="C9D6DB"/>
+                      </a:solidFill>
+                      <a:prstDash val="solid"/>
+                      <a:round/>
+                      <a:headEnd type="none" w="med" len="med"/>
+                      <a:tailEnd type="none" w="med" len="med"/>
+                    </a:lnR>
+                    <a:lnT w="6350" cap="flat" cmpd="sng" algn="ctr">
+                      <a:solidFill>
+                        <a:srgbClr val="C9D6DB"/>
+                      </a:solidFill>
+                      <a:prstDash val="solid"/>
+                      <a:round/>
+                      <a:headEnd type="none" w="med" len="med"/>
+                      <a:tailEnd type="none" w="med" len="med"/>
+                    </a:lnT>
+                    <a:lnB w="6350" cap="flat" cmpd="sng" algn="ctr">
+                      <a:solidFill>
+                        <a:srgbClr val="C9D6DB"/>
+                      </a:solidFill>
+                      <a:prstDash val="solid"/>
+                      <a:round/>
+                      <a:headEnd type="none" w="med" len="med"/>
+                      <a:tailEnd type="none" w="med" len="med"/>
+                    </a:lnB>
+                    <a:solidFill>
+                      <a:srgbClr val="FFFFFF"/>
+                    </a:solidFill>
+                  </a:tcPr>
+                </a:tc>
+                <a:tc>
+                  <a:txBody>
+                    <a:bodyPr/>
+                    <a:lstStyle/>
+                    <a:p>
+                      <a:pPr indent="0" marL="0">
+                        <a:buNone/>
+                      </a:pPr>
+                      <a:r>
+                        <a:rPr lang="en-US" sz="1050" dirty="0">
+                          <a:solidFill>
+                            <a:srgbClr val="1B2A36"/>
+                          </a:solidFill>
+                          <a:latin typeface="Calibri" pitchFamily="34" charset="0"/>
+                          <a:ea typeface="Calibri" pitchFamily="34" charset="-122"/>
+                          <a:cs typeface="Calibri" pitchFamily="34" charset="-120"/>
+                        </a:rPr>
+                        <a:t>spend_to_income r −0.90; segment spend/income 0.835</a:t>
+                      </a:r>
+                      <a:endParaRPr lang="en-US" sz="1050" dirty="0">
+                        <a:latin typeface="Calibri" charset="0"/>
+                        <a:ea typeface="Calibri" charset="0"/>
+                        <a:cs typeface="Calibri" charset="0"/>
+                      </a:endParaRPr>
+                    </a:p>
+                  </a:txBody>
+                  <a:tcPr marL="91440" marR="91440" marT="45720" marB="45720" anchor="ctr">
+                    <a:lnL w="6350" cap="flat" cmpd="sng" algn="ctr">
+                      <a:solidFill>
+                        <a:srgbClr val="C9D6DB"/>
+                      </a:solidFill>
+                      <a:prstDash val="solid"/>
+                      <a:round/>
+                      <a:headEnd type="none" w="med" len="med"/>
+                      <a:tailEnd type="none" w="med" len="med"/>
+                    </a:lnL>
+                    <a:lnR w="6350" cap="flat" cmpd="sng" algn="ctr">
+                      <a:solidFill>
+                        <a:srgbClr val="C9D6DB"/>
+                      </a:solidFill>
+                      <a:prstDash val="solid"/>
+                      <a:round/>
+                      <a:headEnd type="none" w="med" len="med"/>
+                      <a:tailEnd type="none" w="med" len="med"/>
+                    </a:lnR>
+                    <a:lnT w="6350" cap="flat" cmpd="sng" algn="ctr">
+                      <a:solidFill>
+                        <a:srgbClr val="C9D6DB"/>
+                      </a:solidFill>
+                      <a:prstDash val="solid"/>
+                      <a:round/>
+                      <a:headEnd type="none" w="med" len="med"/>
+                      <a:tailEnd type="none" w="med" len="med"/>
+                    </a:lnT>
+                    <a:lnB w="6350" cap="flat" cmpd="sng" algn="ctr">
+                      <a:solidFill>
+                        <a:srgbClr val="C9D6DB"/>
+                      </a:solidFill>
+                      <a:prstDash val="solid"/>
+                      <a:round/>
+                      <a:headEnd type="none" w="med" len="med"/>
+                      <a:tailEnd type="none" w="med" len="med"/>
+                    </a:lnB>
+                    <a:solidFill>
+                      <a:srgbClr val="FFFFFF"/>
+                    </a:solidFill>
+                  </a:tcPr>
+                </a:tc>
+                <a:tc>
+                  <a:txBody>
+                    <a:bodyPr/>
+                    <a:lstStyle/>
+                    <a:p>
+                      <a:pPr indent="0" marL="0">
+                        <a:buNone/>
+                      </a:pPr>
+                      <a:r>
+                        <a:rPr lang="en-US" sz="1050" dirty="0">
+                          <a:solidFill>
+                            <a:srgbClr val="1B2A36"/>
+                          </a:solidFill>
+                          <a:latin typeface="Calibri" pitchFamily="34" charset="0"/>
+                          <a:ea typeface="Calibri" pitchFamily="34" charset="-122"/>
+                          <a:cs typeface="Calibri" pitchFamily="34" charset="-120"/>
+                        </a:rPr>
+                        <a:t>In-app spend-vs-income dashboard, discretionary category view</a:t>
+                      </a:r>
+                      <a:endParaRPr lang="en-US" sz="1050" dirty="0">
+                        <a:latin typeface="Calibri" charset="0"/>
+                        <a:ea typeface="Calibri" charset="0"/>
+                        <a:cs typeface="Calibri" charset="0"/>
+                      </a:endParaRPr>
+                    </a:p>
+                  </a:txBody>
+                  <a:tcPr marL="91440" marR="91440" marT="45720" marB="45720" anchor="ctr">
+                    <a:lnL w="6350" cap="flat" cmpd="sng" algn="ctr">
+                      <a:solidFill>
+                        <a:srgbClr val="C9D6DB"/>
+                      </a:solidFill>
+                      <a:prstDash val="solid"/>
+                      <a:round/>
+                      <a:headEnd type="none" w="med" len="med"/>
+                      <a:tailEnd type="none" w="med" len="med"/>
+                    </a:lnL>
+                    <a:lnR w="6350" cap="flat" cmpd="sng" algn="ctr">
+                      <a:solidFill>
+                        <a:srgbClr val="C9D6DB"/>
+                      </a:solidFill>
+                      <a:prstDash val="solid"/>
+                      <a:round/>
+                      <a:headEnd type="none" w="med" len="med"/>
+                      <a:tailEnd type="none" w="med" len="med"/>
+                    </a:lnR>
+                    <a:lnT w="6350" cap="flat" cmpd="sng" algn="ctr">
+                      <a:solidFill>
+                        <a:srgbClr val="C9D6DB"/>
+                      </a:solidFill>
+                      <a:prstDash val="solid"/>
+                      <a:round/>
+                      <a:headEnd type="none" w="med" len="med"/>
+                      <a:tailEnd type="none" w="med" len="med"/>
+                    </a:lnT>
+                    <a:lnB w="6350" cap="flat" cmpd="sng" algn="ctr">
+                      <a:solidFill>
+                        <a:srgbClr val="C9D6DB"/>
+                      </a:solidFill>
+                      <a:prstDash val="solid"/>
+                      <a:round/>
+                      <a:headEnd type="none" w="med" len="med"/>
+                      <a:tailEnd type="none" w="med" len="med"/>
+                    </a:lnB>
+                    <a:solidFill>
+                      <a:srgbClr val="FFFFFF"/>
+                    </a:solidFill>
+                  </a:tcPr>
+                </a:tc>
+                <a:tc>
+                  <a:txBody>
+                    <a:bodyPr/>
+                    <a:lstStyle/>
+                    <a:p>
+                      <a:pPr indent="0" marL="0">
+                        <a:buNone/>
+                      </a:pPr>
+                      <a:r>
+                        <a:rPr lang="en-US" sz="1050" dirty="0">
+                          <a:solidFill>
+                            <a:srgbClr val="1B2A36"/>
+                          </a:solidFill>
+                          <a:latin typeface="Calibri" pitchFamily="34" charset="0"/>
+                          <a:ea typeface="Calibri" pitchFamily="34" charset="-122"/>
+                          <a:cs typeface="Calibri" pitchFamily="34" charset="-120"/>
+                        </a:rPr>
+                        <a:t>spend/income; % months FHS &lt; 40</a:t>
+                      </a:r>
+                      <a:endParaRPr lang="en-US" sz="1050" dirty="0">
+                        <a:latin typeface="Calibri" charset="0"/>
+                        <a:ea typeface="Calibri" charset="0"/>
+                        <a:cs typeface="Calibri" charset="0"/>
+                      </a:endParaRPr>
+                    </a:p>
+                  </a:txBody>
+                  <a:tcPr marL="91440" marR="91440" marT="45720" marB="45720" anchor="ctr">
+                    <a:lnL w="6350" cap="flat" cmpd="sng" algn="ctr">
+                      <a:solidFill>
+                        <a:srgbClr val="C9D6DB"/>
+                      </a:solidFill>
+                      <a:prstDash val="solid"/>
+                      <a:round/>
+                      <a:headEnd type="none" w="med" len="med"/>
+                      <a:tailEnd type="none" w="med" len="med"/>
+                    </a:lnL>
+                    <a:lnR w="6350" cap="flat" cmpd="sng" algn="ctr">
+                      <a:solidFill>
+                        <a:srgbClr val="C9D6DB"/>
+                      </a:solidFill>
+                      <a:prstDash val="solid"/>
+                      <a:round/>
+                      <a:headEnd type="none" w="med" len="med"/>
+                      <a:tailEnd type="none" w="med" len="med"/>
+                    </a:lnR>
+                    <a:lnT w="6350" cap="flat" cmpd="sng" algn="ctr">
+                      <a:solidFill>
+                        <a:srgbClr val="C9D6DB"/>
+                      </a:solidFill>
+                      <a:prstDash val="solid"/>
+                      <a:round/>
+                      <a:headEnd type="none" w="med" len="med"/>
+                      <a:tailEnd type="none" w="med" len="med"/>
+                    </a:lnT>
+                    <a:lnB w="6350" cap="flat" cmpd="sng" algn="ctr">
+                      <a:solidFill>
+                        <a:srgbClr val="C9D6DB"/>
+                      </a:solidFill>
+                      <a:prstDash val="solid"/>
+                      <a:round/>
+                      <a:headEnd type="none" w="med" len="med"/>
+                      <a:tailEnd type="none" w="med" len="med"/>
+                    </a:lnB>
+                    <a:solidFill>
+                      <a:srgbClr val="FFFFFF"/>
+                    </a:solidFill>
+                  </a:tcPr>
+                </a:tc>
+              </a:tr>
+              <a:tr h="566928">
+                <a:tc>
+                  <a:txBody>
+                    <a:bodyPr/>
+                    <a:lstStyle/>
+                    <a:p>
+                      <a:pPr indent="0" marL="0">
+                        <a:buNone/>
+                      </a:pPr>
+                      <a:r>
+                        <a:rPr lang="en-US" sz="1050" dirty="0">
+                          <a:solidFill>
+                            <a:srgbClr val="1B2A36"/>
+                          </a:solidFill>
+                          <a:latin typeface="Calibri" pitchFamily="34" charset="0"/>
+                          <a:ea typeface="Calibri" pitchFamily="34" charset="-122"/>
+                          <a:cs typeface="Calibri" pitchFamily="34" charset="-120"/>
+                        </a:rPr>
+                        <a:t>② Spend alerts</a:t>
+                      </a:r>
+                      <a:endParaRPr lang="en-US" sz="1050" dirty="0">
+                        <a:latin typeface="Calibri" charset="0"/>
+                        <a:ea typeface="Calibri" charset="0"/>
+                        <a:cs typeface="Calibri" charset="0"/>
+                      </a:endParaRPr>
+                    </a:p>
+                  </a:txBody>
+                  <a:tcPr marL="91440" marR="91440" marT="45720" marB="45720" anchor="ctr">
+                    <a:lnL w="6350" cap="flat" cmpd="sng" algn="ctr">
+                      <a:solidFill>
+                        <a:srgbClr val="C9D6DB"/>
+                      </a:solidFill>
+                      <a:prstDash val="solid"/>
+                      <a:round/>
+                      <a:headEnd type="none" w="med" len="med"/>
+                      <a:tailEnd type="none" w="med" len="med"/>
+                    </a:lnL>
+                    <a:lnR w="6350" cap="flat" cmpd="sng" algn="ctr">
+                      <a:solidFill>
+                        <a:srgbClr val="C9D6DB"/>
+                      </a:solidFill>
+                      <a:prstDash val="solid"/>
+                      <a:round/>
+                      <a:headEnd type="none" w="med" len="med"/>
+                      <a:tailEnd type="none" w="med" len="med"/>
+                    </a:lnR>
+                    <a:lnT w="6350" cap="flat" cmpd="sng" algn="ctr">
+                      <a:solidFill>
+                        <a:srgbClr val="C9D6DB"/>
+                      </a:solidFill>
+                      <a:prstDash val="solid"/>
+                      <a:round/>
+                      <a:headEnd type="none" w="med" len="med"/>
+                      <a:tailEnd type="none" w="med" len="med"/>
+                    </a:lnT>
+                    <a:lnB w="6350" cap="flat" cmpd="sng" algn="ctr">
+                      <a:solidFill>
+                        <a:srgbClr val="C9D6DB"/>
+                      </a:solidFill>
+                      <a:prstDash val="solid"/>
+                      <a:round/>
+                      <a:headEnd type="none" w="med" len="med"/>
+                      <a:tailEnd type="none" w="med" len="med"/>
+                    </a:lnB>
+                    <a:solidFill>
+                      <a:srgbClr val="FFFFFF"/>
+                    </a:solidFill>
+                  </a:tcPr>
+                </a:tc>
+                <a:tc>
+                  <a:txBody>
+                    <a:bodyPr/>
+                    <a:lstStyle/>
+                    <a:p>
+                      <a:pPr indent="0" marL="0">
+                        <a:buNone/>
+                      </a:pPr>
+                      <a:r>
+                        <a:rPr lang="en-US" sz="1050" dirty="0">
+                          <a:solidFill>
+                            <a:srgbClr val="1B2A36"/>
+                          </a:solidFill>
+                          <a:latin typeface="Calibri" pitchFamily="34" charset="0"/>
+                          <a:ea typeface="Calibri" pitchFamily="34" charset="-122"/>
+                          <a:cs typeface="Calibri" pitchFamily="34" charset="-120"/>
+                        </a:rPr>
+                        <a:t>Crossover: 43 (4.3%) = 52% of stress months</a:t>
+                      </a:r>
+                      <a:endParaRPr lang="en-US" sz="1050" dirty="0">
+                        <a:latin typeface="Calibri" charset="0"/>
+                        <a:ea typeface="Calibri" charset="0"/>
+                        <a:cs typeface="Calibri" charset="0"/>
+                      </a:endParaRPr>
+                    </a:p>
+                  </a:txBody>
+                  <a:tcPr marL="91440" marR="91440" marT="45720" marB="45720" anchor="ctr">
+                    <a:lnL w="6350" cap="flat" cmpd="sng" algn="ctr">
+                      <a:solidFill>
+                        <a:srgbClr val="C9D6DB"/>
+                      </a:solidFill>
+                      <a:prstDash val="solid"/>
+                      <a:round/>
+                      <a:headEnd type="none" w="med" len="med"/>
+                      <a:tailEnd type="none" w="med" len="med"/>
+                    </a:lnL>
+                    <a:lnR w="6350" cap="flat" cmpd="sng" algn="ctr">
+                      <a:solidFill>
+                        <a:srgbClr val="C9D6DB"/>
+                      </a:solidFill>
+                      <a:prstDash val="solid"/>
+                      <a:round/>
+                      <a:headEnd type="none" w="med" len="med"/>
+                      <a:tailEnd type="none" w="med" len="med"/>
+                    </a:lnR>
+                    <a:lnT w="6350" cap="flat" cmpd="sng" algn="ctr">
+                      <a:solidFill>
+                        <a:srgbClr val="C9D6DB"/>
+                      </a:solidFill>
+                      <a:prstDash val="solid"/>
+                      <a:round/>
+                      <a:headEnd type="none" w="med" len="med"/>
+                      <a:tailEnd type="none" w="med" len="med"/>
+                    </a:lnT>
+                    <a:lnB w="6350" cap="flat" cmpd="sng" algn="ctr">
+                      <a:solidFill>
+                        <a:srgbClr val="C9D6DB"/>
+                      </a:solidFill>
+                      <a:prstDash val="solid"/>
+                      <a:round/>
+                      <a:headEnd type="none" w="med" len="med"/>
+                      <a:tailEnd type="none" w="med" len="med"/>
+                    </a:lnB>
+                    <a:solidFill>
+                      <a:srgbClr val="FFFFFF"/>
+                    </a:solidFill>
+                  </a:tcPr>
+                </a:tc>
+                <a:tc>
+                  <a:txBody>
+                    <a:bodyPr/>
+                    <a:lstStyle/>
+                    <a:p>
+                      <a:pPr indent="0" marL="0">
+                        <a:buNone/>
+                      </a:pPr>
+                      <a:r>
+                        <a:rPr lang="en-US" sz="1050" dirty="0">
+                          <a:solidFill>
+                            <a:srgbClr val="1B2A36"/>
+                          </a:solidFill>
+                          <a:latin typeface="Calibri" pitchFamily="34" charset="0"/>
+                          <a:ea typeface="Calibri" pitchFamily="34" charset="-122"/>
+                          <a:cs typeface="Calibri" pitchFamily="34" charset="-120"/>
+                        </a:rPr>
+                        <a:t>FHS &lt; 40 &amp; engagement ≥ p75; 23.5% of spend at 22–23h</a:t>
+                      </a:r>
+                      <a:endParaRPr lang="en-US" sz="1050" dirty="0">
+                        <a:latin typeface="Calibri" charset="0"/>
+                        <a:ea typeface="Calibri" charset="0"/>
+                        <a:cs typeface="Calibri" charset="0"/>
+                      </a:endParaRPr>
+                    </a:p>
+                  </a:txBody>
+                  <a:tcPr marL="91440" marR="91440" marT="45720" marB="45720" anchor="ctr">
+                    <a:lnL w="6350" cap="flat" cmpd="sng" algn="ctr">
+                      <a:solidFill>
+                        <a:srgbClr val="C9D6DB"/>
+                      </a:solidFill>
+                      <a:prstDash val="solid"/>
+                      <a:round/>
+                      <a:headEnd type="none" w="med" len="med"/>
+                      <a:tailEnd type="none" w="med" len="med"/>
+                    </a:lnL>
+                    <a:lnR w="6350" cap="flat" cmpd="sng" algn="ctr">
+                      <a:solidFill>
+                        <a:srgbClr val="C9D6DB"/>
+                      </a:solidFill>
+                      <a:prstDash val="solid"/>
+                      <a:round/>
+                      <a:headEnd type="none" w="med" len="med"/>
+                      <a:tailEnd type="none" w="med" len="med"/>
+                    </a:lnR>
+                    <a:lnT w="6350" cap="flat" cmpd="sng" algn="ctr">
+                      <a:solidFill>
+                        <a:srgbClr val="C9D6DB"/>
+                      </a:solidFill>
+                      <a:prstDash val="solid"/>
+                      <a:round/>
+                      <a:headEnd type="none" w="med" len="med"/>
+                      <a:tailEnd type="none" w="med" len="med"/>
+                    </a:lnT>
+                    <a:lnB w="6350" cap="flat" cmpd="sng" algn="ctr">
+                      <a:solidFill>
+                        <a:srgbClr val="C9D6DB"/>
+                      </a:solidFill>
+                      <a:prstDash val="solid"/>
+                      <a:round/>
+                      <a:headEnd type="none" w="med" len="med"/>
+                      <a:tailEnd type="none" w="med" len="med"/>
+                    </a:lnB>
+                    <a:solidFill>
+                      <a:srgbClr val="FFFFFF"/>
+                    </a:solidFill>
+                  </a:tcPr>
+                </a:tc>
+                <a:tc>
+                  <a:txBody>
+                    <a:bodyPr/>
+                    <a:lstStyle/>
+                    <a:p>
+                      <a:pPr indent="0" marL="0">
+                        <a:buNone/>
+                      </a:pPr>
+                      <a:r>
+                        <a:rPr lang="en-US" sz="1050" dirty="0">
+                          <a:solidFill>
+                            <a:srgbClr val="1B2A36"/>
+                          </a:solidFill>
+                          <a:latin typeface="Calibri" pitchFamily="34" charset="0"/>
+                          <a:ea typeface="Calibri" pitchFamily="34" charset="-122"/>
+                          <a:cs typeface="Calibri" pitchFamily="34" charset="-120"/>
+                        </a:rPr>
+                        <a:t>Pacing alert Sun–Mon evenings, before 22:00</a:t>
+                      </a:r>
+                      <a:endParaRPr lang="en-US" sz="1050" dirty="0">
+                        <a:latin typeface="Calibri" charset="0"/>
+                        <a:ea typeface="Calibri" charset="0"/>
+                        <a:cs typeface="Calibri" charset="0"/>
+                      </a:endParaRPr>
+                    </a:p>
+                  </a:txBody>
+                  <a:tcPr marL="91440" marR="91440" marT="45720" marB="45720" anchor="ctr">
+                    <a:lnL w="6350" cap="flat" cmpd="sng" algn="ctr">
+                      <a:solidFill>
+                        <a:srgbClr val="C9D6DB"/>
+                      </a:solidFill>
+                      <a:prstDash val="solid"/>
+                      <a:round/>
+                      <a:headEnd type="none" w="med" len="med"/>
+                      <a:tailEnd type="none" w="med" len="med"/>
+                    </a:lnL>
+                    <a:lnR w="6350" cap="flat" cmpd="sng" algn="ctr">
+                      <a:solidFill>
+                        <a:srgbClr val="C9D6DB"/>
+                      </a:solidFill>
+                      <a:prstDash val="solid"/>
+                      <a:round/>
+                      <a:headEnd type="none" w="med" len="med"/>
+                      <a:tailEnd type="none" w="med" len="med"/>
+                    </a:lnR>
+                    <a:lnT w="6350" cap="flat" cmpd="sng" algn="ctr">
+                      <a:solidFill>
+                        <a:srgbClr val="C9D6DB"/>
+                      </a:solidFill>
+                      <a:prstDash val="solid"/>
+                      <a:round/>
+                      <a:headEnd type="none" w="med" len="med"/>
+                      <a:tailEnd type="none" w="med" len="med"/>
+                    </a:lnT>
+                    <a:lnB w="6350" cap="flat" cmpd="sng" algn="ctr">
+                      <a:solidFill>
+                        <a:srgbClr val="C9D6DB"/>
+                      </a:solidFill>
+                      <a:prstDash val="solid"/>
+                      <a:round/>
+                      <a:headEnd type="none" w="med" len="med"/>
+                      <a:tailEnd type="none" w="med" len="med"/>
+                    </a:lnB>
+                    <a:solidFill>
+                      <a:srgbClr val="FFFFFF"/>
+                    </a:solidFill>
+                  </a:tcPr>
+                </a:tc>
+                <a:tc>
+                  <a:txBody>
+                    <a:bodyPr/>
+                    <a:lstStyle/>
+                    <a:p>
+                      <a:pPr indent="0" marL="0">
+                        <a:buNone/>
+                      </a:pPr>
+                      <a:r>
+                        <a:rPr lang="en-US" sz="1050" dirty="0">
+                          <a:solidFill>
+                            <a:srgbClr val="1B2A36"/>
+                          </a:solidFill>
+                          <a:latin typeface="Calibri" pitchFamily="34" charset="0"/>
+                          <a:ea typeface="Calibri" pitchFamily="34" charset="-122"/>
+                          <a:cs typeface="Calibri" pitchFamily="34" charset="-120"/>
+                        </a:rPr>
+                        <a:t>stress months / consumer</a:t>
+                      </a:r>
+                      <a:endParaRPr lang="en-US" sz="1050" dirty="0">
+                        <a:latin typeface="Calibri" charset="0"/>
+                        <a:ea typeface="Calibri" charset="0"/>
+                        <a:cs typeface="Calibri" charset="0"/>
+                      </a:endParaRPr>
+                    </a:p>
+                  </a:txBody>
+                  <a:tcPr marL="91440" marR="91440" marT="45720" marB="45720" anchor="ctr">
+                    <a:lnL w="6350" cap="flat" cmpd="sng" algn="ctr">
+                      <a:solidFill>
+                        <a:srgbClr val="C9D6DB"/>
+                      </a:solidFill>
+                      <a:prstDash val="solid"/>
+                      <a:round/>
+                      <a:headEnd type="none" w="med" len="med"/>
+                      <a:tailEnd type="none" w="med" len="med"/>
+                    </a:lnL>
+                    <a:lnR w="6350" cap="flat" cmpd="sng" algn="ctr">
+                      <a:solidFill>
+                        <a:srgbClr val="C9D6DB"/>
+                      </a:solidFill>
+                      <a:prstDash val="solid"/>
+                      <a:round/>
+                      <a:headEnd type="none" w="med" len="med"/>
+                      <a:tailEnd type="none" w="med" len="med"/>
+                    </a:lnR>
+                    <a:lnT w="6350" cap="flat" cmpd="sng" algn="ctr">
+                      <a:solidFill>
+                        <a:srgbClr val="C9D6DB"/>
+                      </a:solidFill>
+                      <a:prstDash val="solid"/>
+                      <a:round/>
+                      <a:headEnd type="none" w="med" len="med"/>
+                      <a:tailEnd type="none" w="med" len="med"/>
+                    </a:lnT>
+                    <a:lnB w="6350" cap="flat" cmpd="sng" algn="ctr">
+                      <a:solidFill>
+                        <a:srgbClr val="C9D6DB"/>
+                      </a:solidFill>
+                      <a:prstDash val="solid"/>
+                      <a:round/>
+                      <a:headEnd type="none" w="med" len="med"/>
+                      <a:tailEnd type="none" w="med" len="med"/>
+                    </a:lnB>
+                    <a:solidFill>
+                      <a:srgbClr val="FFFFFF"/>
+                    </a:solidFill>
+                  </a:tcPr>
+                </a:tc>
+              </a:tr>
+              <a:tr h="566928">
+                <a:tc>
+                  <a:txBody>
+                    <a:bodyPr/>
+                    <a:lstStyle/>
+                    <a:p>
+                      <a:pPr indent="0" marL="0">
+                        <a:buNone/>
+                      </a:pPr>
+                      <a:r>
+                        <a:rPr lang="en-US" sz="1050" dirty="0">
+                          <a:solidFill>
+                            <a:srgbClr val="1B2A36"/>
+                          </a:solidFill>
+                          <a:latin typeface="Calibri" pitchFamily="34" charset="0"/>
+                          <a:ea typeface="Calibri" pitchFamily="34" charset="-122"/>
+                          <a:cs typeface="Calibri" pitchFamily="34" charset="-120"/>
+                        </a:rPr>
+                        <a:t>③ Planning reminders</a:t>
+                      </a:r>
+                      <a:endParaRPr lang="en-US" sz="1050" dirty="0">
+                        <a:latin typeface="Calibri" charset="0"/>
+                        <a:ea typeface="Calibri" charset="0"/>
+                        <a:cs typeface="Calibri" charset="0"/>
+                      </a:endParaRPr>
+                    </a:p>
+                  </a:txBody>
+                  <a:tcPr marL="91440" marR="91440" marT="45720" marB="45720" anchor="ctr">
+                    <a:lnL w="6350" cap="flat" cmpd="sng" algn="ctr">
+                      <a:solidFill>
+                        <a:srgbClr val="C9D6DB"/>
+                      </a:solidFill>
+                      <a:prstDash val="solid"/>
+                      <a:round/>
+                      <a:headEnd type="none" w="med" len="med"/>
+                      <a:tailEnd type="none" w="med" len="med"/>
+                    </a:lnL>
+                    <a:lnR w="6350" cap="flat" cmpd="sng" algn="ctr">
+                      <a:solidFill>
+                        <a:srgbClr val="C9D6DB"/>
+                      </a:solidFill>
+                      <a:prstDash val="solid"/>
+                      <a:round/>
+                      <a:headEnd type="none" w="med" len="med"/>
+                      <a:tailEnd type="none" w="med" len="med"/>
+                    </a:lnR>
+                    <a:lnT w="6350" cap="flat" cmpd="sng" algn="ctr">
+                      <a:solidFill>
+                        <a:srgbClr val="C9D6DB"/>
+                      </a:solidFill>
+                      <a:prstDash val="solid"/>
+                      <a:round/>
+                      <a:headEnd type="none" w="med" len="med"/>
+                      <a:tailEnd type="none" w="med" len="med"/>
+                    </a:lnT>
+                    <a:lnB w="6350" cap="flat" cmpd="sng" algn="ctr">
+                      <a:solidFill>
+                        <a:srgbClr val="C9D6DB"/>
+                      </a:solidFill>
+                      <a:prstDash val="solid"/>
+                      <a:round/>
+                      <a:headEnd type="none" w="med" len="med"/>
+                      <a:tailEnd type="none" w="med" len="med"/>
+                    </a:lnB>
+                    <a:solidFill>
+                      <a:srgbClr val="FFFFFF"/>
+                    </a:solidFill>
+                  </a:tcPr>
+                </a:tc>
+                <a:tc>
+                  <a:txBody>
+                    <a:bodyPr/>
+                    <a:lstStyle/>
+                    <a:p>
+                      <a:pPr indent="0" marL="0">
+                        <a:buNone/>
+                      </a:pPr>
+                      <a:r>
+                        <a:rPr lang="en-US" sz="1050" dirty="0">
+                          <a:solidFill>
+                            <a:srgbClr val="1B2A36"/>
+                          </a:solidFill>
+                          <a:latin typeface="Calibri" pitchFamily="34" charset="0"/>
+                          <a:ea typeface="Calibri" pitchFamily="34" charset="-122"/>
+                          <a:cs typeface="Calibri" pitchFamily="34" charset="-120"/>
+                        </a:rPr>
+                        <a:t>Power Users 258 (25.8%) + Healthy 351 (35.1%)</a:t>
+                      </a:r>
+                      <a:endParaRPr lang="en-US" sz="1050" dirty="0">
+                        <a:latin typeface="Calibri" charset="0"/>
+                        <a:ea typeface="Calibri" charset="0"/>
+                        <a:cs typeface="Calibri" charset="0"/>
+                      </a:endParaRPr>
+                    </a:p>
+                  </a:txBody>
+                  <a:tcPr marL="91440" marR="91440" marT="45720" marB="45720" anchor="ctr">
+                    <a:lnL w="6350" cap="flat" cmpd="sng" algn="ctr">
+                      <a:solidFill>
+                        <a:srgbClr val="C9D6DB"/>
+                      </a:solidFill>
+                      <a:prstDash val="solid"/>
+                      <a:round/>
+                      <a:headEnd type="none" w="med" len="med"/>
+                      <a:tailEnd type="none" w="med" len="med"/>
+                    </a:lnL>
+                    <a:lnR w="6350" cap="flat" cmpd="sng" algn="ctr">
+                      <a:solidFill>
+                        <a:srgbClr val="C9D6DB"/>
+                      </a:solidFill>
+                      <a:prstDash val="solid"/>
+                      <a:round/>
+                      <a:headEnd type="none" w="med" len="med"/>
+                      <a:tailEnd type="none" w="med" len="med"/>
+                    </a:lnR>
+                    <a:lnT w="6350" cap="flat" cmpd="sng" algn="ctr">
+                      <a:solidFill>
+                        <a:srgbClr val="C9D6DB"/>
+                      </a:solidFill>
+                      <a:prstDash val="solid"/>
+                      <a:round/>
+                      <a:headEnd type="none" w="med" len="med"/>
+                      <a:tailEnd type="none" w="med" len="med"/>
+                    </a:lnT>
+                    <a:lnB w="6350" cap="flat" cmpd="sng" algn="ctr">
+                      <a:solidFill>
+                        <a:srgbClr val="C9D6DB"/>
+                      </a:solidFill>
+                      <a:prstDash val="solid"/>
+                      <a:round/>
+                      <a:headEnd type="none" w="med" len="med"/>
+                      <a:tailEnd type="none" w="med" len="med"/>
+                    </a:lnB>
+                    <a:solidFill>
+                      <a:srgbClr val="FFFFFF"/>
+                    </a:solidFill>
+                  </a:tcPr>
+                </a:tc>
+                <a:tc>
+                  <a:txBody>
+                    <a:bodyPr/>
+                    <a:lstStyle/>
+                    <a:p>
+                      <a:pPr indent="0" marL="0">
+                        <a:buNone/>
+                      </a:pPr>
+                      <a:r>
+                        <a:rPr lang="en-US" sz="1050" dirty="0">
+                          <a:solidFill>
+                            <a:srgbClr val="1B2A36"/>
+                          </a:solidFill>
+                          <a:latin typeface="Calibri" pitchFamily="34" charset="0"/>
+                          <a:ea typeface="Calibri" pitchFamily="34" charset="-122"/>
+                          <a:cs typeface="Calibri" pitchFamily="34" charset="-120"/>
+                        </a:rPr>
+                        <a:t>Healthy → Stretched 72% Nov → Dec; volatility r −0.50</a:t>
+                      </a:r>
+                      <a:endParaRPr lang="en-US" sz="1050" dirty="0">
+                        <a:latin typeface="Calibri" charset="0"/>
+                        <a:ea typeface="Calibri" charset="0"/>
+                        <a:cs typeface="Calibri" charset="0"/>
+                      </a:endParaRPr>
+                    </a:p>
+                  </a:txBody>
+                  <a:tcPr marL="91440" marR="91440" marT="45720" marB="45720" anchor="ctr">
+                    <a:lnL w="6350" cap="flat" cmpd="sng" algn="ctr">
+                      <a:solidFill>
+                        <a:srgbClr val="C9D6DB"/>
+                      </a:solidFill>
+                      <a:prstDash val="solid"/>
+                      <a:round/>
+                      <a:headEnd type="none" w="med" len="med"/>
+                      <a:tailEnd type="none" w="med" len="med"/>
+                    </a:lnL>
+                    <a:lnR w="6350" cap="flat" cmpd="sng" algn="ctr">
+                      <a:solidFill>
+                        <a:srgbClr val="C9D6DB"/>
+                      </a:solidFill>
+                      <a:prstDash val="solid"/>
+                      <a:round/>
+                      <a:headEnd type="none" w="med" len="med"/>
+                      <a:tailEnd type="none" w="med" len="med"/>
+                    </a:lnR>
+                    <a:lnT w="6350" cap="flat" cmpd="sng" algn="ctr">
+                      <a:solidFill>
+                        <a:srgbClr val="C9D6DB"/>
+                      </a:solidFill>
+                      <a:prstDash val="solid"/>
+                      <a:round/>
+                      <a:headEnd type="none" w="med" len="med"/>
+                      <a:tailEnd type="none" w="med" len="med"/>
+                    </a:lnT>
+                    <a:lnB w="6350" cap="flat" cmpd="sng" algn="ctr">
+                      <a:solidFill>
+                        <a:srgbClr val="C9D6DB"/>
+                      </a:solidFill>
+                      <a:prstDash val="solid"/>
+                      <a:round/>
+                      <a:headEnd type="none" w="med" len="med"/>
+                      <a:tailEnd type="none" w="med" len="med"/>
+                    </a:lnB>
+                    <a:solidFill>
+                      <a:srgbClr val="FFFFFF"/>
+                    </a:solidFill>
+                  </a:tcPr>
+                </a:tc>
+                <a:tc>
+                  <a:txBody>
+                    <a:bodyPr/>
+                    <a:lstStyle/>
+                    <a:p>
+                      <a:pPr indent="0" marL="0">
+                        <a:buNone/>
+                      </a:pPr>
+                      <a:r>
+                        <a:rPr lang="en-US" sz="1050" dirty="0">
+                          <a:solidFill>
+                            <a:srgbClr val="1B2A36"/>
+                          </a:solidFill>
+                          <a:latin typeface="Calibri" pitchFamily="34" charset="0"/>
+                          <a:ea typeface="Calibri" pitchFamily="34" charset="-122"/>
+                          <a:cs typeface="Calibri" pitchFamily="34" charset="-120"/>
+                        </a:rPr>
+                        <a:t>November year-end budget plan &amp; reminder</a:t>
+                      </a:r>
+                      <a:endParaRPr lang="en-US" sz="1050" dirty="0">
+                        <a:latin typeface="Calibri" charset="0"/>
+                        <a:ea typeface="Calibri" charset="0"/>
+                        <a:cs typeface="Calibri" charset="0"/>
+                      </a:endParaRPr>
+                    </a:p>
+                  </a:txBody>
+                  <a:tcPr marL="91440" marR="91440" marT="45720" marB="45720" anchor="ctr">
+                    <a:lnL w="6350" cap="flat" cmpd="sng" algn="ctr">
+                      <a:solidFill>
+                        <a:srgbClr val="C9D6DB"/>
+                      </a:solidFill>
+                      <a:prstDash val="solid"/>
+                      <a:round/>
+                      <a:headEnd type="none" w="med" len="med"/>
+                      <a:tailEnd type="none" w="med" len="med"/>
+                    </a:lnL>
+                    <a:lnR w="6350" cap="flat" cmpd="sng" algn="ctr">
+                      <a:solidFill>
+                        <a:srgbClr val="C9D6DB"/>
+                      </a:solidFill>
+                      <a:prstDash val="solid"/>
+                      <a:round/>
+                      <a:headEnd type="none" w="med" len="med"/>
+                      <a:tailEnd type="none" w="med" len="med"/>
+                    </a:lnR>
+                    <a:lnT w="6350" cap="flat" cmpd="sng" algn="ctr">
+                      <a:solidFill>
+                        <a:srgbClr val="C9D6DB"/>
+                      </a:solidFill>
+                      <a:prstDash val="solid"/>
+                      <a:round/>
+                      <a:headEnd type="none" w="med" len="med"/>
+                      <a:tailEnd type="none" w="med" len="med"/>
+                    </a:lnT>
+                    <a:lnB w="6350" cap="flat" cmpd="sng" algn="ctr">
+                      <a:solidFill>
+                        <a:srgbClr val="C9D6DB"/>
+                      </a:solidFill>
+                      <a:prstDash val="solid"/>
+                      <a:round/>
+                      <a:headEnd type="none" w="med" len="med"/>
+                      <a:tailEnd type="none" w="med" len="med"/>
+                    </a:lnB>
+                    <a:solidFill>
+                      <a:srgbClr val="FFFFFF"/>
+                    </a:solidFill>
+                  </a:tcPr>
+                </a:tc>
+                <a:tc>
+                  <a:txBody>
+                    <a:bodyPr/>
+                    <a:lstStyle/>
+                    <a:p>
+                      <a:pPr indent="0" marL="0">
+                        <a:buNone/>
+                      </a:pPr>
+                      <a:r>
+                        <a:rPr lang="en-US" sz="1050" dirty="0">
+                          <a:solidFill>
+                            <a:srgbClr val="1B2A36"/>
+                          </a:solidFill>
+                          <a:latin typeface="Calibri" pitchFamily="34" charset="0"/>
+                          <a:ea typeface="Calibri" pitchFamily="34" charset="-122"/>
+                          <a:cs typeface="Calibri" pitchFamily="34" charset="-120"/>
+                        </a:rPr>
+                        <a:t>Nov → Dec slide rate</a:t>
+                      </a:r>
+                      <a:endParaRPr lang="en-US" sz="1050" dirty="0">
+                        <a:latin typeface="Calibri" charset="0"/>
+                        <a:ea typeface="Calibri" charset="0"/>
+                        <a:cs typeface="Calibri" charset="0"/>
+                      </a:endParaRPr>
+                    </a:p>
+                  </a:txBody>
+                  <a:tcPr marL="91440" marR="91440" marT="45720" marB="45720" anchor="ctr">
+                    <a:lnL w="6350" cap="flat" cmpd="sng" algn="ctr">
+                      <a:solidFill>
+                        <a:srgbClr val="C9D6DB"/>
+                      </a:solidFill>
+                      <a:prstDash val="solid"/>
+                      <a:round/>
+                      <a:headEnd type="none" w="med" len="med"/>
+                      <a:tailEnd type="none" w="med" len="med"/>
+                    </a:lnL>
+                    <a:lnR w="6350" cap="flat" cmpd="sng" algn="ctr">
+                      <a:solidFill>
+                        <a:srgbClr val="C9D6DB"/>
+                      </a:solidFill>
+                      <a:prstDash val="solid"/>
+                      <a:round/>
+                      <a:headEnd type="none" w="med" len="med"/>
+                      <a:tailEnd type="none" w="med" len="med"/>
+                    </a:lnR>
+                    <a:lnT w="6350" cap="flat" cmpd="sng" algn="ctr">
+                      <a:solidFill>
+                        <a:srgbClr val="C9D6DB"/>
+                      </a:solidFill>
+                      <a:prstDash val="solid"/>
+                      <a:round/>
+                      <a:headEnd type="none" w="med" len="med"/>
+                      <a:tailEnd type="none" w="med" len="med"/>
+                    </a:lnT>
+                    <a:lnB w="6350" cap="flat" cmpd="sng" algn="ctr">
+                      <a:solidFill>
+                        <a:srgbClr val="C9D6DB"/>
+                      </a:solidFill>
+                      <a:prstDash val="solid"/>
+                      <a:round/>
+                      <a:headEnd type="none" w="med" len="med"/>
+                      <a:tailEnd type="none" w="med" len="med"/>
+                    </a:lnB>
+                    <a:solidFill>
+                      <a:srgbClr val="FFFFFF"/>
+                    </a:solidFill>
+                  </a:tcPr>
+                </a:tc>
+              </a:tr>
+              <a:tr h="566928">
+                <a:tc>
+                  <a:txBody>
+                    <a:bodyPr/>
+                    <a:lstStyle/>
+                    <a:p>
+                      <a:pPr indent="0" marL="0">
+                        <a:buNone/>
+                      </a:pPr>
+                      <a:r>
+                        <a:rPr lang="en-US" sz="1050" dirty="0">
+                          <a:solidFill>
+                            <a:srgbClr val="1B2A36"/>
+                          </a:solidFill>
+                          <a:latin typeface="Calibri" pitchFamily="34" charset="0"/>
+                          <a:ea typeface="Calibri" pitchFamily="34" charset="-122"/>
+                          <a:cs typeface="Calibri" pitchFamily="34" charset="-120"/>
+                        </a:rPr>
+                        <a:t>④ Financial education</a:t>
+                      </a:r>
+                      <a:endParaRPr lang="en-US" sz="1050" dirty="0">
+                        <a:latin typeface="Calibri" charset="0"/>
+                        <a:ea typeface="Calibri" charset="0"/>
+                        <a:cs typeface="Calibri" charset="0"/>
+                      </a:endParaRPr>
+                    </a:p>
+                  </a:txBody>
+                  <a:tcPr marL="91440" marR="91440" marT="45720" marB="45720" anchor="ctr">
+                    <a:lnL w="6350" cap="flat" cmpd="sng" algn="ctr">
+                      <a:solidFill>
+                        <a:srgbClr val="C9D6DB"/>
+                      </a:solidFill>
+                      <a:prstDash val="solid"/>
+                      <a:round/>
+                      <a:headEnd type="none" w="med" len="med"/>
+                      <a:tailEnd type="none" w="med" len="med"/>
+                    </a:lnL>
+                    <a:lnR w="6350" cap="flat" cmpd="sng" algn="ctr">
+                      <a:solidFill>
+                        <a:srgbClr val="C9D6DB"/>
+                      </a:solidFill>
+                      <a:prstDash val="solid"/>
+                      <a:round/>
+                      <a:headEnd type="none" w="med" len="med"/>
+                      <a:tailEnd type="none" w="med" len="med"/>
+                    </a:lnR>
+                    <a:lnT w="6350" cap="flat" cmpd="sng" algn="ctr">
+                      <a:solidFill>
+                        <a:srgbClr val="C9D6DB"/>
+                      </a:solidFill>
+                      <a:prstDash val="solid"/>
+                      <a:round/>
+                      <a:headEnd type="none" w="med" len="med"/>
+                      <a:tailEnd type="none" w="med" len="med"/>
+                    </a:lnT>
+                    <a:lnB w="6350" cap="flat" cmpd="sng" algn="ctr">
+                      <a:solidFill>
+                        <a:srgbClr val="C9D6DB"/>
+                      </a:solidFill>
+                      <a:prstDash val="solid"/>
+                      <a:round/>
+                      <a:headEnd type="none" w="med" len="med"/>
+                      <a:tailEnd type="none" w="med" len="med"/>
+                    </a:lnB>
+                    <a:solidFill>
+                      <a:srgbClr val="FFFFFF"/>
+                    </a:solidFill>
+                  </a:tcPr>
+                </a:tc>
+                <a:tc>
+                  <a:txBody>
+                    <a:bodyPr/>
+                    <a:lstStyle/>
+                    <a:p>
+                      <a:pPr indent="0" marL="0">
+                        <a:buNone/>
+                      </a:pPr>
+                      <a:r>
+                        <a:rPr lang="en-US" sz="1050" dirty="0">
+                          <a:solidFill>
+                            <a:srgbClr val="1B2A36"/>
+                          </a:solidFill>
+                          <a:latin typeface="Calibri" pitchFamily="34" charset="0"/>
+                          <a:ea typeface="Calibri" pitchFamily="34" charset="-122"/>
+                          <a:cs typeface="Calibri" pitchFamily="34" charset="-120"/>
+                        </a:rPr>
+                        <a:t>Distress tail: 67 (6.7%)</a:t>
+                      </a:r>
+                      <a:endParaRPr lang="en-US" sz="1050" dirty="0">
+                        <a:latin typeface="Calibri" charset="0"/>
+                        <a:ea typeface="Calibri" charset="0"/>
+                        <a:cs typeface="Calibri" charset="0"/>
+                      </a:endParaRPr>
+                    </a:p>
+                  </a:txBody>
+                  <a:tcPr marL="91440" marR="91440" marT="45720" marB="45720" anchor="ctr">
+                    <a:lnL w="6350" cap="flat" cmpd="sng" algn="ctr">
+                      <a:solidFill>
+                        <a:srgbClr val="C9D6DB"/>
+                      </a:solidFill>
+                      <a:prstDash val="solid"/>
+                      <a:round/>
+                      <a:headEnd type="none" w="med" len="med"/>
+                      <a:tailEnd type="none" w="med" len="med"/>
+                    </a:lnL>
+                    <a:lnR w="6350" cap="flat" cmpd="sng" algn="ctr">
+                      <a:solidFill>
+                        <a:srgbClr val="C9D6DB"/>
+                      </a:solidFill>
+                      <a:prstDash val="solid"/>
+                      <a:round/>
+                      <a:headEnd type="none" w="med" len="med"/>
+                      <a:tailEnd type="none" w="med" len="med"/>
+                    </a:lnR>
+                    <a:lnT w="6350" cap="flat" cmpd="sng" algn="ctr">
+                      <a:solidFill>
+                        <a:srgbClr val="C9D6DB"/>
+                      </a:solidFill>
+                      <a:prstDash val="solid"/>
+                      <a:round/>
+                      <a:headEnd type="none" w="med" len="med"/>
+                      <a:tailEnd type="none" w="med" len="med"/>
+                    </a:lnT>
+                    <a:lnB w="6350" cap="flat" cmpd="sng" algn="ctr">
+                      <a:solidFill>
+                        <a:srgbClr val="C9D6DB"/>
+                      </a:solidFill>
+                      <a:prstDash val="solid"/>
+                      <a:round/>
+                      <a:headEnd type="none" w="med" len="med"/>
+                      <a:tailEnd type="none" w="med" len="med"/>
+                    </a:lnB>
+                    <a:solidFill>
+                      <a:srgbClr val="FFFFFF"/>
+                    </a:solidFill>
+                  </a:tcPr>
+                </a:tc>
+                <a:tc>
+                  <a:txBody>
+                    <a:bodyPr/>
+                    <a:lstStyle/>
+                    <a:p>
+                      <a:pPr indent="0" marL="0">
+                        <a:buNone/>
+                      </a:pPr>
+                      <a:r>
+                        <a:rPr lang="en-US" sz="1050" dirty="0">
+                          <a:solidFill>
+                            <a:srgbClr val="1B2A36"/>
+                          </a:solidFill>
+                          <a:latin typeface="Calibri" pitchFamily="34" charset="0"/>
+                          <a:ea typeface="Calibri" pitchFamily="34" charset="-122"/>
+                          <a:cs typeface="Calibri" pitchFamily="34" charset="-120"/>
+                        </a:rPr>
+                        <a:t>discretionary 72% vs 40% under stress</a:t>
+                      </a:r>
+                      <a:endParaRPr lang="en-US" sz="1050" dirty="0">
+                        <a:latin typeface="Calibri" charset="0"/>
+                        <a:ea typeface="Calibri" charset="0"/>
+                        <a:cs typeface="Calibri" charset="0"/>
+                      </a:endParaRPr>
+                    </a:p>
+                  </a:txBody>
+                  <a:tcPr marL="91440" marR="91440" marT="45720" marB="45720" anchor="ctr">
+                    <a:lnL w="6350" cap="flat" cmpd="sng" algn="ctr">
+                      <a:solidFill>
+                        <a:srgbClr val="C9D6DB"/>
+                      </a:solidFill>
+                      <a:prstDash val="solid"/>
+                      <a:round/>
+                      <a:headEnd type="none" w="med" len="med"/>
+                      <a:tailEnd type="none" w="med" len="med"/>
+                    </a:lnL>
+                    <a:lnR w="6350" cap="flat" cmpd="sng" algn="ctr">
+                      <a:solidFill>
+                        <a:srgbClr val="C9D6DB"/>
+                      </a:solidFill>
+                      <a:prstDash val="solid"/>
+                      <a:round/>
+                      <a:headEnd type="none" w="med" len="med"/>
+                      <a:tailEnd type="none" w="med" len="med"/>
+                    </a:lnR>
+                    <a:lnT w="6350" cap="flat" cmpd="sng" algn="ctr">
+                      <a:solidFill>
+                        <a:srgbClr val="C9D6DB"/>
+                      </a:solidFill>
+                      <a:prstDash val="solid"/>
+                      <a:round/>
+                      <a:headEnd type="none" w="med" len="med"/>
+                      <a:tailEnd type="none" w="med" len="med"/>
+                    </a:lnT>
+                    <a:lnB w="6350" cap="flat" cmpd="sng" algn="ctr">
+                      <a:solidFill>
+                        <a:srgbClr val="C9D6DB"/>
+                      </a:solidFill>
+                      <a:prstDash val="solid"/>
+                      <a:round/>
+                      <a:headEnd type="none" w="med" len="med"/>
+                      <a:tailEnd type="none" w="med" len="med"/>
+                    </a:lnB>
+                    <a:solidFill>
+                      <a:srgbClr val="FFFFFF"/>
+                    </a:solidFill>
+                  </a:tcPr>
+                </a:tc>
+                <a:tc>
+                  <a:txBody>
+                    <a:bodyPr/>
+                    <a:lstStyle/>
+                    <a:p>
+                      <a:pPr indent="0" marL="0">
+                        <a:buNone/>
+                      </a:pPr>
+                      <a:r>
+                        <a:rPr lang="en-US" sz="1050" dirty="0">
+                          <a:solidFill>
+                            <a:srgbClr val="1B2A36"/>
+                          </a:solidFill>
+                          <a:latin typeface="Calibri" pitchFamily="34" charset="0"/>
+                          <a:ea typeface="Calibri" pitchFamily="34" charset="-122"/>
+                          <a:cs typeface="Calibri" pitchFamily="34" charset="-120"/>
+                        </a:rPr>
+                        <a:t>Needs-vs-wants micro-modules</a:t>
+                      </a:r>
+                      <a:endParaRPr lang="en-US" sz="1050" dirty="0">
+                        <a:latin typeface="Calibri" charset="0"/>
+                        <a:ea typeface="Calibri" charset="0"/>
+                        <a:cs typeface="Calibri" charset="0"/>
+                      </a:endParaRPr>
+                    </a:p>
+                  </a:txBody>
+                  <a:tcPr marL="91440" marR="91440" marT="45720" marB="45720" anchor="ctr">
+                    <a:lnL w="6350" cap="flat" cmpd="sng" algn="ctr">
+                      <a:solidFill>
+                        <a:srgbClr val="C9D6DB"/>
+                      </a:solidFill>
+                      <a:prstDash val="solid"/>
+                      <a:round/>
+                      <a:headEnd type="none" w="med" len="med"/>
+                      <a:tailEnd type="none" w="med" len="med"/>
+                    </a:lnL>
+                    <a:lnR w="6350" cap="flat" cmpd="sng" algn="ctr">
+                      <a:solidFill>
+                        <a:srgbClr val="C9D6DB"/>
+                      </a:solidFill>
+                      <a:prstDash val="solid"/>
+                      <a:round/>
+                      <a:headEnd type="none" w="med" len="med"/>
+                      <a:tailEnd type="none" w="med" len="med"/>
+                    </a:lnR>
+                    <a:lnT w="6350" cap="flat" cmpd="sng" algn="ctr">
+                      <a:solidFill>
+                        <a:srgbClr val="C9D6DB"/>
+                      </a:solidFill>
+                      <a:prstDash val="solid"/>
+                      <a:round/>
+                      <a:headEnd type="none" w="med" len="med"/>
+                      <a:tailEnd type="none" w="med" len="med"/>
+                    </a:lnT>
+                    <a:lnB w="6350" cap="flat" cmpd="sng" algn="ctr">
+                      <a:solidFill>
+                        <a:srgbClr val="C9D6DB"/>
+                      </a:solidFill>
+                      <a:prstDash val="solid"/>
+                      <a:round/>
+                      <a:headEnd type="none" w="med" len="med"/>
+                      <a:tailEnd type="none" w="med" len="med"/>
+                    </a:lnB>
+                    <a:solidFill>
+                      <a:srgbClr val="FFFFFF"/>
+                    </a:solidFill>
+                  </a:tcPr>
+                </a:tc>
+                <a:tc>
+                  <a:txBody>
+                    <a:bodyPr/>
+                    <a:lstStyle/>
+                    <a:p>
+                      <a:pPr indent="0" marL="0">
+                        <a:buNone/>
+                      </a:pPr>
+                      <a:r>
+                        <a:rPr lang="en-US" sz="1050" dirty="0">
+                          <a:solidFill>
+                            <a:srgbClr val="1B2A36"/>
+                          </a:solidFill>
+                          <a:latin typeface="Calibri" pitchFamily="34" charset="0"/>
+                          <a:ea typeface="Calibri" pitchFamily="34" charset="-122"/>
+                          <a:cs typeface="Calibri" pitchFamily="34" charset="-120"/>
+                        </a:rPr>
+                        <a:t>essential share next month</a:t>
+                      </a:r>
+                      <a:endParaRPr lang="en-US" sz="1050" dirty="0">
+                        <a:latin typeface="Calibri" charset="0"/>
+                        <a:ea typeface="Calibri" charset="0"/>
+                        <a:cs typeface="Calibri" charset="0"/>
+                      </a:endParaRPr>
+                    </a:p>
+                  </a:txBody>
+                  <a:tcPr marL="91440" marR="91440" marT="45720" marB="45720" anchor="ctr">
+                    <a:lnL w="6350" cap="flat" cmpd="sng" algn="ctr">
+                      <a:solidFill>
+                        <a:srgbClr val="C9D6DB"/>
+                      </a:solidFill>
+                      <a:prstDash val="solid"/>
+                      <a:round/>
+                      <a:headEnd type="none" w="med" len="med"/>
+                      <a:tailEnd type="none" w="med" len="med"/>
+                    </a:lnL>
+                    <a:lnR w="6350" cap="flat" cmpd="sng" algn="ctr">
+                      <a:solidFill>
+                        <a:srgbClr val="C9D6DB"/>
+                      </a:solidFill>
+                      <a:prstDash val="solid"/>
+                      <a:round/>
+                      <a:headEnd type="none" w="med" len="med"/>
+                      <a:tailEnd type="none" w="med" len="med"/>
+                    </a:lnR>
+                    <a:lnT w="6350" cap="flat" cmpd="sng" algn="ctr">
+                      <a:solidFill>
+                        <a:srgbClr val="C9D6DB"/>
+                      </a:solidFill>
+                      <a:prstDash val="solid"/>
+                      <a:round/>
+                      <a:headEnd type="none" w="med" len="med"/>
+                      <a:tailEnd type="none" w="med" len="med"/>
+                    </a:lnT>
+                    <a:lnB w="6350" cap="flat" cmpd="sng" algn="ctr">
+                      <a:solidFill>
+                        <a:srgbClr val="C9D6DB"/>
+                      </a:solidFill>
+                      <a:prstDash val="solid"/>
+                      <a:round/>
+                      <a:headEnd type="none" w="med" len="med"/>
+                      <a:tailEnd type="none" w="med" len="med"/>
+                    </a:lnB>
+                    <a:solidFill>
+                      <a:srgbClr val="FFFFFF"/>
+                    </a:solidFill>
+                  </a:tcPr>
+                </a:tc>
+              </a:tr>
+              <a:tr h="566928">
+                <a:tc>
+                  <a:txBody>
+                    <a:bodyPr/>
+                    <a:lstStyle/>
+                    <a:p>
+                      <a:pPr indent="0" marL="0">
+                        <a:buNone/>
+                      </a:pPr>
+                      <a:r>
+                        <a:rPr lang="en-US" sz="1050" dirty="0">
+                          <a:solidFill>
+                            <a:srgbClr val="1B2A36"/>
+                          </a:solidFill>
+                          <a:latin typeface="Calibri" pitchFamily="34" charset="0"/>
+                          <a:ea typeface="Calibri" pitchFamily="34" charset="-122"/>
+                          <a:cs typeface="Calibri" pitchFamily="34" charset="-120"/>
+                        </a:rPr>
+                        <a:t>⑤ Digital nudges</a:t>
+                      </a:r>
+                      <a:endParaRPr lang="en-US" sz="1050" dirty="0">
+                        <a:latin typeface="Calibri" charset="0"/>
+                        <a:ea typeface="Calibri" charset="0"/>
+                        <a:cs typeface="Calibri" charset="0"/>
+                      </a:endParaRPr>
+                    </a:p>
+                  </a:txBody>
+                  <a:tcPr marL="91440" marR="91440" marT="45720" marB="45720" anchor="ctr">
+                    <a:lnL w="6350" cap="flat" cmpd="sng" algn="ctr">
+                      <a:solidFill>
+                        <a:srgbClr val="C9D6DB"/>
+                      </a:solidFill>
+                      <a:prstDash val="solid"/>
+                      <a:round/>
+                      <a:headEnd type="none" w="med" len="med"/>
+                      <a:tailEnd type="none" w="med" len="med"/>
+                    </a:lnL>
+                    <a:lnR w="6350" cap="flat" cmpd="sng" algn="ctr">
+                      <a:solidFill>
+                        <a:srgbClr val="C9D6DB"/>
+                      </a:solidFill>
+                      <a:prstDash val="solid"/>
+                      <a:round/>
+                      <a:headEnd type="none" w="med" len="med"/>
+                      <a:tailEnd type="none" w="med" len="med"/>
+                    </a:lnR>
+                    <a:lnT w="6350" cap="flat" cmpd="sng" algn="ctr">
+                      <a:solidFill>
+                        <a:srgbClr val="C9D6DB"/>
+                      </a:solidFill>
+                      <a:prstDash val="solid"/>
+                      <a:round/>
+                      <a:headEnd type="none" w="med" len="med"/>
+                      <a:tailEnd type="none" w="med" len="med"/>
+                    </a:lnT>
+                    <a:lnB w="6350" cap="flat" cmpd="sng" algn="ctr">
+                      <a:solidFill>
+                        <a:srgbClr val="C9D6DB"/>
+                      </a:solidFill>
+                      <a:prstDash val="solid"/>
+                      <a:round/>
+                      <a:headEnd type="none" w="med" len="med"/>
+                      <a:tailEnd type="none" w="med" len="med"/>
+                    </a:lnB>
+                    <a:solidFill>
+                      <a:srgbClr val="FFFFFF"/>
+                    </a:solidFill>
+                  </a:tcPr>
+                </a:tc>
+                <a:tc>
+                  <a:txBody>
+                    <a:bodyPr/>
+                    <a:lstStyle/>
+                    <a:p>
+                      <a:pPr indent="0" marL="0">
+                        <a:buNone/>
+                      </a:pPr>
+                      <a:r>
+                        <a:rPr lang="en-US" sz="1050" dirty="0">
+                          <a:solidFill>
+                            <a:srgbClr val="1B2A36"/>
+                          </a:solidFill>
+                          <a:latin typeface="Calibri" pitchFamily="34" charset="0"/>
+                          <a:ea typeface="Calibri" pitchFamily="34" charset="-122"/>
+                          <a:cs typeface="Calibri" pitchFamily="34" charset="-120"/>
+                        </a:rPr>
+                        <a:t>Emerging Digital: 88 (8.8%)</a:t>
+                      </a:r>
+                      <a:endParaRPr lang="en-US" sz="1050" dirty="0">
+                        <a:latin typeface="Calibri" charset="0"/>
+                        <a:ea typeface="Calibri" charset="0"/>
+                        <a:cs typeface="Calibri" charset="0"/>
+                      </a:endParaRPr>
+                    </a:p>
+                  </a:txBody>
+                  <a:tcPr marL="91440" marR="91440" marT="45720" marB="45720" anchor="ctr">
+                    <a:lnL w="6350" cap="flat" cmpd="sng" algn="ctr">
+                      <a:solidFill>
+                        <a:srgbClr val="C9D6DB"/>
+                      </a:solidFill>
+                      <a:prstDash val="solid"/>
+                      <a:round/>
+                      <a:headEnd type="none" w="med" len="med"/>
+                      <a:tailEnd type="none" w="med" len="med"/>
+                    </a:lnL>
+                    <a:lnR w="6350" cap="flat" cmpd="sng" algn="ctr">
+                      <a:solidFill>
+                        <a:srgbClr val="C9D6DB"/>
+                      </a:solidFill>
+                      <a:prstDash val="solid"/>
+                      <a:round/>
+                      <a:headEnd type="none" w="med" len="med"/>
+                      <a:tailEnd type="none" w="med" len="med"/>
+                    </a:lnR>
+                    <a:lnT w="6350" cap="flat" cmpd="sng" algn="ctr">
+                      <a:solidFill>
+                        <a:srgbClr val="C9D6DB"/>
+                      </a:solidFill>
+                      <a:prstDash val="solid"/>
+                      <a:round/>
+                      <a:headEnd type="none" w="med" len="med"/>
+                      <a:tailEnd type="none" w="med" len="med"/>
+                    </a:lnT>
+                    <a:lnB w="6350" cap="flat" cmpd="sng" algn="ctr">
+                      <a:solidFill>
+                        <a:srgbClr val="C9D6DB"/>
+                      </a:solidFill>
+                      <a:prstDash val="solid"/>
+                      <a:round/>
+                      <a:headEnd type="none" w="med" len="med"/>
+                      <a:tailEnd type="none" w="med" len="med"/>
+                    </a:lnB>
+                    <a:solidFill>
+                      <a:srgbClr val="FFFFFF"/>
+                    </a:solidFill>
+                  </a:tcPr>
+                </a:tc>
+                <a:tc>
+                  <a:txBody>
+                    <a:bodyPr/>
+                    <a:lstStyle/>
+                    <a:p>
+                      <a:pPr indent="0" marL="0">
+                        <a:buNone/>
+                      </a:pPr>
+                      <a:r>
+                        <a:rPr lang="en-US" sz="1050" dirty="0">
+                          <a:solidFill>
+                            <a:srgbClr val="1B2A36"/>
+                          </a:solidFill>
+                          <a:latin typeface="Calibri" pitchFamily="34" charset="0"/>
+                          <a:ea typeface="Calibri" pitchFamily="34" charset="-122"/>
+                          <a:cs typeface="Calibri" pitchFamily="34" charset="-120"/>
+                        </a:rPr>
+                        <a:t>diversity r +0.94; 60.5% of spend via E-com + Mobile</a:t>
+                      </a:r>
+                      <a:endParaRPr lang="en-US" sz="1050" dirty="0">
+                        <a:latin typeface="Calibri" charset="0"/>
+                        <a:ea typeface="Calibri" charset="0"/>
+                        <a:cs typeface="Calibri" charset="0"/>
+                      </a:endParaRPr>
+                    </a:p>
+                  </a:txBody>
+                  <a:tcPr marL="91440" marR="91440" marT="45720" marB="45720" anchor="ctr">
+                    <a:lnL w="6350" cap="flat" cmpd="sng" algn="ctr">
+                      <a:solidFill>
+                        <a:srgbClr val="C9D6DB"/>
+                      </a:solidFill>
+                      <a:prstDash val="solid"/>
+                      <a:round/>
+                      <a:headEnd type="none" w="med" len="med"/>
+                      <a:tailEnd type="none" w="med" len="med"/>
+                    </a:lnL>
+                    <a:lnR w="6350" cap="flat" cmpd="sng" algn="ctr">
+                      <a:solidFill>
+                        <a:srgbClr val="C9D6DB"/>
+                      </a:solidFill>
+                      <a:prstDash val="solid"/>
+                      <a:round/>
+                      <a:headEnd type="none" w="med" len="med"/>
+                      <a:tailEnd type="none" w="med" len="med"/>
+                    </a:lnR>
+                    <a:lnT w="6350" cap="flat" cmpd="sng" algn="ctr">
+                      <a:solidFill>
+                        <a:srgbClr val="C9D6DB"/>
+                      </a:solidFill>
+                      <a:prstDash val="solid"/>
+                      <a:round/>
+                      <a:headEnd type="none" w="med" len="med"/>
+                      <a:tailEnd type="none" w="med" len="med"/>
+                    </a:lnT>
+                    <a:lnB w="6350" cap="flat" cmpd="sng" algn="ctr">
+                      <a:solidFill>
+                        <a:srgbClr val="C9D6DB"/>
+                      </a:solidFill>
+                      <a:prstDash val="solid"/>
+                      <a:round/>
+                      <a:headEnd type="none" w="med" len="med"/>
+                      <a:tailEnd type="none" w="med" len="med"/>
+                    </a:lnB>
+                    <a:solidFill>
+                      <a:srgbClr val="FFFFFF"/>
+                    </a:solidFill>
+                  </a:tcPr>
+                </a:tc>
+                <a:tc>
+                  <a:txBody>
+                    <a:bodyPr/>
+                    <a:lstStyle/>
+                    <a:p>
+                      <a:pPr indent="0" marL="0">
+                        <a:buNone/>
+                      </a:pPr>
+                      <a:r>
+                        <a:rPr lang="en-US" sz="1050" dirty="0">
+                          <a:solidFill>
+                            <a:srgbClr val="1B2A36"/>
+                          </a:solidFill>
+                          <a:latin typeface="Calibri" pitchFamily="34" charset="0"/>
+                          <a:ea typeface="Calibri" pitchFamily="34" charset="-122"/>
+                          <a:cs typeface="Calibri" pitchFamily="34" charset="-120"/>
+                        </a:rPr>
+                        <a:t>Onboarding &amp; habit loops in the app they already use</a:t>
+                      </a:r>
+                      <a:endParaRPr lang="en-US" sz="1050" dirty="0">
+                        <a:latin typeface="Calibri" charset="0"/>
+                        <a:ea typeface="Calibri" charset="0"/>
+                        <a:cs typeface="Calibri" charset="0"/>
+                      </a:endParaRPr>
+                    </a:p>
+                  </a:txBody>
+                  <a:tcPr marL="91440" marR="91440" marT="45720" marB="45720" anchor="ctr">
+                    <a:lnL w="6350" cap="flat" cmpd="sng" algn="ctr">
+                      <a:solidFill>
+                        <a:srgbClr val="C9D6DB"/>
+                      </a:solidFill>
+                      <a:prstDash val="solid"/>
+                      <a:round/>
+                      <a:headEnd type="none" w="med" len="med"/>
+                      <a:tailEnd type="none" w="med" len="med"/>
+                    </a:lnL>
+                    <a:lnR w="6350" cap="flat" cmpd="sng" algn="ctr">
+                      <a:solidFill>
+                        <a:srgbClr val="C9D6DB"/>
+                      </a:solidFill>
+                      <a:prstDash val="solid"/>
+                      <a:round/>
+                      <a:headEnd type="none" w="med" len="med"/>
+                      <a:tailEnd type="none" w="med" len="med"/>
+                    </a:lnR>
+                    <a:lnT w="6350" cap="flat" cmpd="sng" algn="ctr">
+                      <a:solidFill>
+                        <a:srgbClr val="C9D6DB"/>
+                      </a:solidFill>
+                      <a:prstDash val="solid"/>
+                      <a:round/>
+                      <a:headEnd type="none" w="med" len="med"/>
+                      <a:tailEnd type="none" w="med" len="med"/>
+                    </a:lnT>
+                    <a:lnB w="6350" cap="flat" cmpd="sng" algn="ctr">
+                      <a:solidFill>
+                        <a:srgbClr val="C9D6DB"/>
+                      </a:solidFill>
+                      <a:prstDash val="solid"/>
+                      <a:round/>
+                      <a:headEnd type="none" w="med" len="med"/>
+                      <a:tailEnd type="none" w="med" len="med"/>
+                    </a:lnB>
+                    <a:solidFill>
+                      <a:srgbClr val="FFFFFF"/>
+                    </a:solidFill>
+                  </a:tcPr>
+                </a:tc>
+                <a:tc>
+                  <a:txBody>
+                    <a:bodyPr/>
+                    <a:lstStyle/>
+                    <a:p>
+                      <a:pPr indent="0" marL="0">
+                        <a:buNone/>
+                      </a:pPr>
+                      <a:r>
+                        <a:rPr lang="en-US" sz="1050" dirty="0">
+                          <a:solidFill>
+                            <a:srgbClr val="1B2A36"/>
+                          </a:solidFill>
+                          <a:latin typeface="Calibri" pitchFamily="34" charset="0"/>
+                          <a:ea typeface="Calibri" pitchFamily="34" charset="-122"/>
+                          <a:cs typeface="Calibri" pitchFamily="34" charset="-120"/>
+                        </a:rPr>
+                        <a:t>active days; categories / month</a:t>
+                      </a:r>
+                      <a:endParaRPr lang="en-US" sz="1050" dirty="0">
+                        <a:latin typeface="Calibri" charset="0"/>
+                        <a:ea typeface="Calibri" charset="0"/>
+                        <a:cs typeface="Calibri" charset="0"/>
+                      </a:endParaRPr>
+                    </a:p>
+                  </a:txBody>
+                  <a:tcPr marL="91440" marR="91440" marT="45720" marB="45720" anchor="ctr">
+                    <a:lnL w="6350" cap="flat" cmpd="sng" algn="ctr">
+                      <a:solidFill>
+                        <a:srgbClr val="C9D6DB"/>
+                      </a:solidFill>
+                      <a:prstDash val="solid"/>
+                      <a:round/>
+                      <a:headEnd type="none" w="med" len="med"/>
+                      <a:tailEnd type="none" w="med" len="med"/>
+                    </a:lnL>
+                    <a:lnR w="6350" cap="flat" cmpd="sng" algn="ctr">
+                      <a:solidFill>
+                        <a:srgbClr val="C9D6DB"/>
+                      </a:solidFill>
+                      <a:prstDash val="solid"/>
+                      <a:round/>
+                      <a:headEnd type="none" w="med" len="med"/>
+                      <a:tailEnd type="none" w="med" len="med"/>
+                    </a:lnR>
+                    <a:lnT w="6350" cap="flat" cmpd="sng" algn="ctr">
+                      <a:solidFill>
+                        <a:srgbClr val="C9D6DB"/>
+                      </a:solidFill>
+                      <a:prstDash val="solid"/>
+                      <a:round/>
+                      <a:headEnd type="none" w="med" len="med"/>
+                      <a:tailEnd type="none" w="med" len="med"/>
+                    </a:lnT>
+                    <a:lnB w="6350" cap="flat" cmpd="sng" algn="ctr">
+                      <a:solidFill>
+                        <a:srgbClr val="C9D6DB"/>
+                      </a:solidFill>
+                      <a:prstDash val="solid"/>
+                      <a:round/>
+                      <a:headEnd type="none" w="med" len="med"/>
+                      <a:tailEnd type="none" w="med" len="med"/>
+                    </a:lnB>
+                    <a:solidFill>
+                      <a:srgbClr val="FFFFFF"/>
+                    </a:solidFill>
+                  </a:tcPr>
+                </a:tc>
+              </a:tr>
+              <a:tr h="566928">
+                <a:tc>
+                  <a:txBody>
+                    <a:bodyPr/>
+                    <a:lstStyle/>
+                    <a:p>
+                      <a:pPr indent="0" marL="0">
+                        <a:buNone/>
+                      </a:pPr>
+                      <a:r>
+                        <a:rPr lang="en-US" sz="1050" dirty="0">
+                          <a:solidFill>
+                            <a:srgbClr val="1B2A36"/>
+                          </a:solidFill>
+                          <a:latin typeface="Calibri" pitchFamily="34" charset="0"/>
+                          <a:ea typeface="Calibri" pitchFamily="34" charset="-122"/>
+                          <a:cs typeface="Calibri" pitchFamily="34" charset="-120"/>
+                        </a:rPr>
+                        <a:t>⑥ Product suggestions</a:t>
+                      </a:r>
+                      <a:endParaRPr lang="en-US" sz="1050" dirty="0">
+                        <a:latin typeface="Calibri" charset="0"/>
+                        <a:ea typeface="Calibri" charset="0"/>
+                        <a:cs typeface="Calibri" charset="0"/>
+                      </a:endParaRPr>
+                    </a:p>
+                  </a:txBody>
+                  <a:tcPr marL="91440" marR="91440" marT="45720" marB="45720" anchor="ctr">
+                    <a:lnL w="6350" cap="flat" cmpd="sng" algn="ctr">
+                      <a:solidFill>
+                        <a:srgbClr val="C9D6DB"/>
+                      </a:solidFill>
+                      <a:prstDash val="solid"/>
+                      <a:round/>
+                      <a:headEnd type="none" w="med" len="med"/>
+                      <a:tailEnd type="none" w="med" len="med"/>
+                    </a:lnL>
+                    <a:lnR w="6350" cap="flat" cmpd="sng" algn="ctr">
+                      <a:solidFill>
+                        <a:srgbClr val="C9D6DB"/>
+                      </a:solidFill>
+                      <a:prstDash val="solid"/>
+                      <a:round/>
+                      <a:headEnd type="none" w="med" len="med"/>
+                      <a:tailEnd type="none" w="med" len="med"/>
+                    </a:lnR>
+                    <a:lnT w="6350" cap="flat" cmpd="sng" algn="ctr">
+                      <a:solidFill>
+                        <a:srgbClr val="C9D6DB"/>
+                      </a:solidFill>
+                      <a:prstDash val="solid"/>
+                      <a:round/>
+                      <a:headEnd type="none" w="med" len="med"/>
+                      <a:tailEnd type="none" w="med" len="med"/>
+                    </a:lnT>
+                    <a:lnB w="6350" cap="flat" cmpd="sng" algn="ctr">
+                      <a:solidFill>
+                        <a:srgbClr val="C9D6DB"/>
+                      </a:solidFill>
+                      <a:prstDash val="solid"/>
+                      <a:round/>
+                      <a:headEnd type="none" w="med" len="med"/>
+                      <a:tailEnd type="none" w="med" len="med"/>
+                    </a:lnB>
+                    <a:solidFill>
+                      <a:srgbClr val="FFFFFF"/>
+                    </a:solidFill>
+                  </a:tcPr>
+                </a:tc>
+                <a:tc>
+                  <a:txBody>
+                    <a:bodyPr/>
+                    <a:lstStyle/>
+                    <a:p>
+                      <a:pPr indent="0" marL="0">
+                        <a:buNone/>
+                      </a:pPr>
+                      <a:r>
+                        <a:rPr lang="en-US" sz="1050" dirty="0">
+                          <a:solidFill>
+                            <a:srgbClr val="1B2A36"/>
+                          </a:solidFill>
+                          <a:latin typeface="Calibri" pitchFamily="34" charset="0"/>
+                          <a:ea typeface="Calibri" pitchFamily="34" charset="-122"/>
+                          <a:cs typeface="Calibri" pitchFamily="34" charset="-120"/>
+                        </a:rPr>
+                        <a:t>Healthy &amp; Engaged: 351 (35.1%)</a:t>
+                      </a:r>
+                      <a:endParaRPr lang="en-US" sz="1050" dirty="0">
+                        <a:latin typeface="Calibri" charset="0"/>
+                        <a:ea typeface="Calibri" charset="0"/>
+                        <a:cs typeface="Calibri" charset="0"/>
+                      </a:endParaRPr>
+                    </a:p>
+                  </a:txBody>
+                  <a:tcPr marL="91440" marR="91440" marT="45720" marB="45720" anchor="ctr">
+                    <a:lnL w="6350" cap="flat" cmpd="sng" algn="ctr">
+                      <a:solidFill>
+                        <a:srgbClr val="C9D6DB"/>
+                      </a:solidFill>
+                      <a:prstDash val="solid"/>
+                      <a:round/>
+                      <a:headEnd type="none" w="med" len="med"/>
+                      <a:tailEnd type="none" w="med" len="med"/>
+                    </a:lnL>
+                    <a:lnR w="6350" cap="flat" cmpd="sng" algn="ctr">
+                      <a:solidFill>
+                        <a:srgbClr val="C9D6DB"/>
+                      </a:solidFill>
+                      <a:prstDash val="solid"/>
+                      <a:round/>
+                      <a:headEnd type="none" w="med" len="med"/>
+                      <a:tailEnd type="none" w="med" len="med"/>
+                    </a:lnR>
+                    <a:lnT w="6350" cap="flat" cmpd="sng" algn="ctr">
+                      <a:solidFill>
+                        <a:srgbClr val="C9D6DB"/>
+                      </a:solidFill>
+                      <a:prstDash val="solid"/>
+                      <a:round/>
+                      <a:headEnd type="none" w="med" len="med"/>
+                      <a:tailEnd type="none" w="med" len="med"/>
+                    </a:lnT>
+                    <a:lnB w="6350" cap="flat" cmpd="sng" algn="ctr">
+                      <a:solidFill>
+                        <a:srgbClr val="C9D6DB"/>
+                      </a:solidFill>
+                      <a:prstDash val="solid"/>
+                      <a:round/>
+                      <a:headEnd type="none" w="med" len="med"/>
+                      <a:tailEnd type="none" w="med" len="med"/>
+                    </a:lnB>
+                    <a:solidFill>
+                      <a:srgbClr val="FFFFFF"/>
+                    </a:solidFill>
+                  </a:tcPr>
+                </a:tc>
+                <a:tc>
+                  <a:txBody>
+                    <a:bodyPr/>
+                    <a:lstStyle/>
+                    <a:p>
+                      <a:pPr indent="0" marL="0">
+                        <a:buNone/>
+                      </a:pPr>
+                      <a:r>
+                        <a:rPr lang="en-US" sz="1050" dirty="0">
+                          <a:solidFill>
+                            <a:srgbClr val="1B2A36"/>
+                          </a:solidFill>
+                          <a:latin typeface="Calibri" pitchFamily="34" charset="0"/>
+                          <a:ea typeface="Calibri" pitchFamily="34" charset="-122"/>
+                          <a:cs typeface="Calibri" pitchFamily="34" charset="-120"/>
+                        </a:rPr>
+                        <a:t>lowest utilization 0.148, FHS 70.5</a:t>
+                      </a:r>
+                      <a:endParaRPr lang="en-US" sz="1050" dirty="0">
+                        <a:latin typeface="Calibri" charset="0"/>
+                        <a:ea typeface="Calibri" charset="0"/>
+                        <a:cs typeface="Calibri" charset="0"/>
+                      </a:endParaRPr>
+                    </a:p>
+                  </a:txBody>
+                  <a:tcPr marL="91440" marR="91440" marT="45720" marB="45720" anchor="ctr">
+                    <a:lnL w="6350" cap="flat" cmpd="sng" algn="ctr">
+                      <a:solidFill>
+                        <a:srgbClr val="C9D6DB"/>
+                      </a:solidFill>
+                      <a:prstDash val="solid"/>
+                      <a:round/>
+                      <a:headEnd type="none" w="med" len="med"/>
+                      <a:tailEnd type="none" w="med" len="med"/>
+                    </a:lnL>
+                    <a:lnR w="6350" cap="flat" cmpd="sng" algn="ctr">
+                      <a:solidFill>
+                        <a:srgbClr val="C9D6DB"/>
+                      </a:solidFill>
+                      <a:prstDash val="solid"/>
+                      <a:round/>
+                      <a:headEnd type="none" w="med" len="med"/>
+                      <a:tailEnd type="none" w="med" len="med"/>
+                    </a:lnR>
+                    <a:lnT w="6350" cap="flat" cmpd="sng" algn="ctr">
+                      <a:solidFill>
+                        <a:srgbClr val="C9D6DB"/>
+                      </a:solidFill>
+                      <a:prstDash val="solid"/>
+                      <a:round/>
+                      <a:headEnd type="none" w="med" len="med"/>
+                      <a:tailEnd type="none" w="med" len="med"/>
+                    </a:lnT>
+                    <a:lnB w="6350" cap="flat" cmpd="sng" algn="ctr">
+                      <a:solidFill>
+                        <a:srgbClr val="C9D6DB"/>
+                      </a:solidFill>
+                      <a:prstDash val="solid"/>
+                      <a:round/>
+                      <a:headEnd type="none" w="med" len="med"/>
+                      <a:tailEnd type="none" w="med" len="med"/>
+                    </a:lnB>
+                    <a:solidFill>
+                      <a:srgbClr val="FFFFFF"/>
+                    </a:solidFill>
+                  </a:tcPr>
+                </a:tc>
+                <a:tc>
+                  <a:txBody>
+                    <a:bodyPr/>
+                    <a:lstStyle/>
+                    <a:p>
+                      <a:pPr indent="0" marL="0">
+                        <a:buNone/>
+                      </a:pPr>
+                      <a:r>
+                        <a:rPr lang="en-US" sz="1050" dirty="0">
+                          <a:solidFill>
+                            <a:srgbClr val="1B2A36"/>
+                          </a:solidFill>
+                          <a:latin typeface="Calibri" pitchFamily="34" charset="0"/>
+                          <a:ea typeface="Calibri" pitchFamily="34" charset="-122"/>
+                          <a:cs typeface="Calibri" pitchFamily="34" charset="-120"/>
+                        </a:rPr>
+                        <a:t>Opt-in savings / loyalty; never auto-extend credit</a:t>
+                      </a:r>
+                      <a:endParaRPr lang="en-US" sz="1050" dirty="0">
+                        <a:latin typeface="Calibri" charset="0"/>
+                        <a:ea typeface="Calibri" charset="0"/>
+                        <a:cs typeface="Calibri" charset="0"/>
+                      </a:endParaRPr>
+                    </a:p>
+                  </a:txBody>
+                  <a:tcPr marL="91440" marR="91440" marT="45720" marB="45720" anchor="ctr">
+                    <a:lnL w="6350" cap="flat" cmpd="sng" algn="ctr">
+                      <a:solidFill>
+                        <a:srgbClr val="C9D6DB"/>
+                      </a:solidFill>
+                      <a:prstDash val="solid"/>
+                      <a:round/>
+                      <a:headEnd type="none" w="med" len="med"/>
+                      <a:tailEnd type="none" w="med" len="med"/>
+                    </a:lnL>
+                    <a:lnR w="6350" cap="flat" cmpd="sng" algn="ctr">
+                      <a:solidFill>
+                        <a:srgbClr val="C9D6DB"/>
+                      </a:solidFill>
+                      <a:prstDash val="solid"/>
+                      <a:round/>
+                      <a:headEnd type="none" w="med" len="med"/>
+                      <a:tailEnd type="none" w="med" len="med"/>
+                    </a:lnR>
+                    <a:lnT w="6350" cap="flat" cmpd="sng" algn="ctr">
+                      <a:solidFill>
+                        <a:srgbClr val="C9D6DB"/>
+                      </a:solidFill>
+                      <a:prstDash val="solid"/>
+                      <a:round/>
+                      <a:headEnd type="none" w="med" len="med"/>
+                      <a:tailEnd type="none" w="med" len="med"/>
+                    </a:lnT>
+                    <a:lnB w="6350" cap="flat" cmpd="sng" algn="ctr">
+                      <a:solidFill>
+                        <a:srgbClr val="C9D6DB"/>
+                      </a:solidFill>
+                      <a:prstDash val="solid"/>
+                      <a:round/>
+                      <a:headEnd type="none" w="med" len="med"/>
+                      <a:tailEnd type="none" w="med" len="med"/>
+                    </a:lnB>
+                    <a:solidFill>
+                      <a:srgbClr val="FFFFFF"/>
+                    </a:solidFill>
+                  </a:tcPr>
+                </a:tc>
+                <a:tc>
+                  <a:txBody>
+                    <a:bodyPr/>
+                    <a:lstStyle/>
+                    <a:p>
+                      <a:pPr indent="0" marL="0">
+                        <a:buNone/>
+                      </a:pPr>
+                      <a:r>
+                        <a:rPr lang="en-US" sz="1050" dirty="0">
+                          <a:solidFill>
+                            <a:srgbClr val="1B2A36"/>
+                          </a:solidFill>
+                          <a:latin typeface="Calibri" pitchFamily="34" charset="0"/>
+                          <a:ea typeface="Calibri" pitchFamily="34" charset="-122"/>
+                          <a:cs typeface="Calibri" pitchFamily="34" charset="-120"/>
+                        </a:rPr>
+                        <a:t>opt-in uptake; FHS stable</a:t>
+                      </a:r>
+                      <a:endParaRPr lang="en-US" sz="1050" dirty="0">
+                        <a:latin typeface="Calibri" charset="0"/>
+                        <a:ea typeface="Calibri" charset="0"/>
+                        <a:cs typeface="Calibri" charset="0"/>
+                      </a:endParaRPr>
+                    </a:p>
+                  </a:txBody>
+                  <a:tcPr marL="91440" marR="91440" marT="45720" marB="45720" anchor="ctr">
+                    <a:lnL w="6350" cap="flat" cmpd="sng" algn="ctr">
+                      <a:solidFill>
+                        <a:srgbClr val="C9D6DB"/>
+                      </a:solidFill>
+                      <a:prstDash val="solid"/>
+                      <a:round/>
+                      <a:headEnd type="none" w="med" len="med"/>
+                      <a:tailEnd type="none" w="med" len="med"/>
+                    </a:lnL>
+                    <a:lnR w="6350" cap="flat" cmpd="sng" algn="ctr">
+                      <a:solidFill>
+                        <a:srgbClr val="C9D6DB"/>
+                      </a:solidFill>
+                      <a:prstDash val="solid"/>
+                      <a:round/>
+                      <a:headEnd type="none" w="med" len="med"/>
+                      <a:tailEnd type="none" w="med" len="med"/>
+                    </a:lnR>
+                    <a:lnT w="6350" cap="flat" cmpd="sng" algn="ctr">
+                      <a:solidFill>
+                        <a:srgbClr val="C9D6DB"/>
+                      </a:solidFill>
+                      <a:prstDash val="solid"/>
+                      <a:round/>
+                      <a:headEnd type="none" w="med" len="med"/>
+                      <a:tailEnd type="none" w="med" len="med"/>
+                    </a:lnT>
+                    <a:lnB w="6350" cap="flat" cmpd="sng" algn="ctr">
+                      <a:solidFill>
+                        <a:srgbClr val="C9D6DB"/>
+                      </a:solidFill>
+                      <a:prstDash val="solid"/>
+                      <a:round/>
+                      <a:headEnd type="none" w="med" len="med"/>
+                      <a:tailEnd type="none" w="med" len="med"/>
+                    </a:lnB>
+                    <a:solidFill>
+                      <a:srgbClr val="FFFFFF"/>
+                    </a:solidFill>
+                  </a:tcPr>
+                </a:tc>
+              </a:tr>
+            </a:tbl>
+          </a:graphicData>
+        </a:graphic>
+      </p:graphicFrame>
+      <p:sp>
+        <p:nvSpPr>
+          <p:cNvPr id="5" name="Text 2"/>
+          <p:cNvSpPr txBox="1"/>
+          <p:nvPr/>
+        </p:nvSpPr>
+        <p:spPr>
+          <a:xfrm>
+            <a:off x="457200" y="5623560"/>
+            <a:ext cx="11247120" cy="256032"/>
+          </a:xfrm>
+          <a:prstGeom prst="rect">
+            <a:avLst/>
+          </a:prstGeom>
+          <a:noFill/>
+          <a:ln/>
+        </p:spPr>
+        <p:txBody>
+          <a:bodyPr wrap="square" lIns="0" tIns="0" rIns="0" bIns="0" rtlCol="0" anchor="t"/>
+          <a:lstStyle/>
+          <a:p>
+            <a:pPr indent="0" marL="0">
+              <a:buNone/>
+            </a:pPr>
+            <a:r>
+              <a:rPr lang="en-US" sz="850" i="1" dirty="0">
+                <a:solidFill>
+                  <a:srgbClr val="5F7180"/>
+                </a:solidFill>
+                <a:latin typeface="Calibri" pitchFamily="34" charset="0"/>
+                <a:ea typeface="Calibri" pitchFamily="34" charset="-122"/>
+                <a:cs typeface="Calibri" pitchFamily="34" charset="-120"/>
+              </a:rPr>
+              <a:t>Source: team k-means (k=4) on 8 z-scaled ratios, 999 consumers (task4_features.csv). Crossover &amp; distress tail: consumer-month file; channel share: transactions file.</a:t>
+            </a:r>
+            <a:endParaRPr lang="en-US" sz="850" dirty="0"/>
+          </a:p>
+        </p:txBody>
+      </p:sp>
       <p:sp>
         <p:nvSpPr>
           <p:cNvPr id="6" name="Text 3"/>
+          <p:cNvSpPr txBox="1"/>
+          <p:nvPr/>
+        </p:nvSpPr>
+        <p:spPr>
+          <a:xfrm>
+            <a:off x="457200" y="5897880"/>
+            <a:ext cx="11247120" cy="457200"/>
+          </a:xfrm>
+          <a:prstGeom prst="rect">
+            <a:avLst/>
+          </a:prstGeom>
+          <a:noFill/>
+          <a:ln/>
+        </p:spPr>
+        <p:txBody>
+          <a:bodyPr wrap="square" lIns="0" tIns="0" rIns="0" bIns="0" rtlCol="0" anchor="ctr"/>
+          <a:lstStyle/>
+          <a:p>
+            <a:pPr indent="0" marL="0">
+              <a:buNone/>
+            </a:pPr>
+            <a:r>
+              <a:rPr lang="en-US" sz="1100" i="1" dirty="0">
+                <a:solidFill>
+                  <a:srgbClr val="058B8C"/>
+                </a:solidFill>
+                <a:latin typeface="Calibri" pitchFamily="34" charset="0"/>
+                <a:ea typeface="Calibri" pitchFamily="34" charset="-122"/>
+                <a:cs typeface="Calibri" pitchFamily="34" charset="-120"/>
+              </a:rPr>
+              <a:t>No double-counting: the 4 segments partition all 999 consumers; the crossover (43) and distress tail (67) are overlays inside the Stretched segment.</a:t>
+            </a:r>
+            <a:endParaRPr lang="en-US" sz="1100" dirty="0"/>
+          </a:p>
+        </p:txBody>
+      </p:sp>
+      <p:sp>
+        <p:nvSpPr>
+          <p:cNvPr id="8" name="Text 4"/>
           <p:cNvSpPr txBox="1"/>
           <p:nvPr/>
         </p:nvSpPr>
@@ -6270,7 +9084,7 @@
       </p:sp>
       <p:sp>
         <p:nvSpPr>
-          <p:cNvPr id="7" name="Text 4"/>
+          <p:cNvPr id="9" name="Text 5"/>
           <p:cNvSpPr txBox="1"/>
           <p:nvPr/>
         </p:nvSpPr>
@@ -6914,7 +9728,7 @@
                 <a:ea typeface="Cambria" pitchFamily="34" charset="-122"/>
                 <a:cs typeface="Cambria" pitchFamily="34" charset="-120"/>
               </a:rPr>
-              <a:t>Prioritization &amp; the ethical rule</a:t>
+              <a:t>Prioritization — and the credit-decision rule</a:t>
             </a:r>
             <a:endParaRPr lang="en-US" sz="2700" dirty="0"/>
           </a:p>
@@ -6928,8 +9742,8 @@
         </p:nvSpPr>
         <p:spPr>
           <a:xfrm>
-            <a:off x="457200" y="1600200"/>
-            <a:ext cx="5760720" cy="3200400"/>
+            <a:off x="457200" y="1554480"/>
+            <a:ext cx="5760720" cy="3429000"/>
           </a:xfrm>
           <a:prstGeom prst="rect">
             <a:avLst/>
@@ -6943,13 +9757,13 @@
           <a:p>
             <a:pPr marL="177800" indent="-177800">
               <a:spcAft>
-                <a:spcPts val="800"/>
+                <a:spcPts val="700"/>
               </a:spcAft>
               <a:buSzPct val="100000"/>
               <a:buChar char="•"/>
             </a:pPr>
             <a:r>
-              <a:rPr lang="en-US" sz="1400" dirty="0">
+              <a:rPr lang="en-US" sz="1300" dirty="0">
                 <a:solidFill>
                   <a:srgbClr val="1B2A36"/>
                 </a:solidFill>
@@ -6957,20 +9771,20 @@
                 <a:ea typeface="Calibri" pitchFamily="34" charset="-122"/>
                 <a:cs typeface="Calibri" pitchFamily="34" charset="-120"/>
               </a:rPr>
-              <a:t>Ranking (reach × driver): Budgeting → Alerts → Reminders → Products → Nudges → Education.</a:t>
-            </a:r>
-            <a:endParaRPr lang="en-US" sz="1400" dirty="0"/>
+              <a:t>Ranking by reach × driver strength: ① Budgeting (302, |r| 0.90) → ② Alerts (43, 52% of stress) → ③ Reminders (258) → ⑥ Products (351) → ⑤ Nudges (88) → ④ Education (67).</a:t>
+            </a:r>
+            <a:endParaRPr lang="en-US" sz="1300" dirty="0"/>
           </a:p>
           <a:p>
             <a:pPr marL="177800" indent="-177800">
               <a:spcAft>
-                <a:spcPts val="800"/>
+                <a:spcPts val="700"/>
               </a:spcAft>
               <a:buSzPct val="100000"/>
               <a:buChar char="•"/>
             </a:pPr>
             <a:r>
-              <a:rPr lang="en-US" sz="1400" dirty="0">
+              <a:rPr lang="en-US" sz="1300" dirty="0">
                 <a:solidFill>
                   <a:srgbClr val="1B2A36"/>
                 </a:solidFill>
@@ -6978,20 +9792,20 @@
                 <a:ea typeface="Calibri" pitchFamily="34" charset="-122"/>
                 <a:cs typeface="Calibri" pitchFamily="34" charset="-120"/>
               </a:rPr>
-              <a:t>Lead with Budgeting + Alerts (the wellbeing mission); layer growth on top.</a:t>
-            </a:r>
-            <a:endParaRPr lang="en-US" sz="1400" dirty="0"/>
+              <a:t>Lead with Budgeting + Alerts (the wellbeing mission); layer growth tools on top.</a:t>
+            </a:r>
+            <a:endParaRPr lang="en-US" sz="1300" dirty="0"/>
           </a:p>
           <a:p>
             <a:pPr marL="177800" indent="-177800">
               <a:spcAft>
-                <a:spcPts val="800"/>
+                <a:spcPts val="700"/>
               </a:spcAft>
               <a:buSzPct val="100000"/>
               <a:buChar char="•"/>
             </a:pPr>
             <a:r>
-              <a:rPr lang="en-US" sz="1400" dirty="0">
+              <a:rPr lang="en-US" sz="1300" dirty="0">
                 <a:solidFill>
                   <a:srgbClr val="1B2A36"/>
                 </a:solidFill>
@@ -6999,20 +9813,20 @@
                 <a:ea typeface="Calibri" pitchFamily="34" charset="-122"/>
                 <a:cs typeface="Calibri" pitchFamily="34" charset="-120"/>
               </a:rPr>
-              <a:t>No double-counting: the 4 segments partition 999; crossover (43) &amp; distress (67) are overlays inside Segment 2.</a:t>
-            </a:r>
-            <a:endParaRPr lang="en-US" sz="1400" dirty="0"/>
+              <a:t>Fair by design: every trigger is a behavioural ratio; segments correlate with age / gender, so we never target by demographics.</a:t>
+            </a:r>
+            <a:endParaRPr lang="en-US" sz="1300" dirty="0"/>
           </a:p>
           <a:p>
             <a:pPr marL="177800" indent="-177800">
               <a:spcAft>
-                <a:spcPts val="800"/>
+                <a:spcPts val="700"/>
               </a:spcAft>
               <a:buSzPct val="100000"/>
               <a:buChar char="•"/>
             </a:pPr>
             <a:r>
-              <a:rPr lang="en-US" sz="1400" dirty="0">
+              <a:rPr lang="en-US" sz="1300" dirty="0">
                 <a:solidFill>
                   <a:srgbClr val="1B2A36"/>
                 </a:solidFill>
@@ -7020,9 +9834,9 @@
                 <a:ea typeface="Calibri" pitchFamily="34" charset="-122"/>
                 <a:cs typeface="Calibri" pitchFamily="34" charset="-120"/>
               </a:rPr>
-              <a:t>Fair by design: every trigger is a behavioural ratio; segments correlate with age/gender, so we never target by demographics.</a:t>
-            </a:r>
-            <a:endParaRPr lang="en-US" sz="1400" dirty="0"/>
+              <a:t>RULE: financial_health_score is never used to deny credit, cut a credit limit, raise a rate or block an account — a low score only triggers help that is offered.</a:t>
+            </a:r>
+            <a:endParaRPr lang="en-US" sz="1300" dirty="0"/>
           </a:p>
         </p:txBody>
       </p:sp>
@@ -7042,7 +9856,7 @@
         <p:spPr>
           <a:xfrm>
             <a:off x="6446520" y="1554480"/>
-            <a:ext cx="5303520" cy="4206240"/>
+            <a:ext cx="5303520" cy="4023360"/>
           </a:xfrm>
           <a:prstGeom prst="rect">
             <a:avLst/>
@@ -7051,18 +9865,57 @@
       </p:pic>
       <p:sp>
         <p:nvSpPr>
-          <p:cNvPr id="6" name="Shape 3"/>
+          <p:cNvPr id="6" name="Text 3"/>
+          <p:cNvSpPr txBox="1"/>
+          <p:nvPr/>
+        </p:nvSpPr>
+        <p:spPr>
+          <a:xfrm>
+            <a:off x="6446520" y="5623560"/>
+            <a:ext cx="5303520" cy="256032"/>
+          </a:xfrm>
+          <a:prstGeom prst="rect">
+            <a:avLst/>
+          </a:prstGeom>
+          <a:noFill/>
+          <a:ln/>
+        </p:spPr>
+        <p:txBody>
+          <a:bodyPr wrap="square" lIns="0" tIns="0" rIns="0" bIns="0" rtlCol="0" anchor="t"/>
+          <a:lstStyle/>
+          <a:p>
+            <a:pPr indent="0" marL="0">
+              <a:buNone/>
+            </a:pPr>
+            <a:r>
+              <a:rPr lang="en-US" sz="850" i="1" dirty="0">
+                <a:solidFill>
+                  <a:srgbClr val="5F7180"/>
+                </a:solidFill>
+                <a:latin typeface="Calibri" pitchFamily="34" charset="0"/>
+                <a:ea typeface="Calibri" pitchFamily="34" charset="-122"/>
+                <a:cs typeface="Calibri" pitchFamily="34" charset="-120"/>
+              </a:rPr>
+              <a:t>Source: team k-means (k=4) on 8 z-scaled ratios, 999 consumers (task4_features.csv).</a:t>
+            </a:r>
+            <a:endParaRPr lang="en-US" sz="850" dirty="0"/>
+          </a:p>
+        </p:txBody>
+      </p:sp>
+      <p:sp>
+        <p:nvSpPr>
+          <p:cNvPr id="7" name="Shape 4"/>
           <p:cNvSpPr/>
           <p:nvPr/>
         </p:nvSpPr>
         <p:spPr>
           <a:xfrm>
-            <a:off x="457200" y="5029200"/>
-            <a:ext cx="3383280" cy="1097280"/>
+            <a:off x="457200" y="5074920"/>
+            <a:ext cx="3383280" cy="1051560"/>
           </a:xfrm>
           <a:prstGeom prst="roundRect">
             <a:avLst>
-              <a:gd name="adj" fmla="val 6667"/>
+              <a:gd name="adj" fmla="val 6957"/>
             </a:avLst>
           </a:prstGeom>
           <a:solidFill>
@@ -7073,14 +9926,14 @@
       </p:sp>
       <p:sp>
         <p:nvSpPr>
-          <p:cNvPr id="7" name="Text 4"/>
-          <p:cNvSpPr txBox="1"/>
-          <p:nvPr/>
-        </p:nvSpPr>
-        <p:spPr>
-          <a:xfrm>
-            <a:off x="457200" y="5138928"/>
-            <a:ext cx="3383280" cy="658368"/>
+          <p:cNvPr id="8" name="Text 5"/>
+          <p:cNvSpPr txBox="1"/>
+          <p:nvPr/>
+        </p:nvSpPr>
+        <p:spPr>
+          <a:xfrm>
+            <a:off x="457200" y="5148072"/>
+            <a:ext cx="3383280" cy="621792"/>
           </a:xfrm>
           <a:prstGeom prst="rect">
             <a:avLst/>
@@ -7096,7 +9949,7 @@
               <a:buNone/>
             </a:pPr>
             <a:r>
-              <a:rPr lang="en-US" sz="2800" b="1" dirty="0">
+              <a:rPr lang="en-US" sz="2600" b="1" dirty="0">
                 <a:solidFill>
                   <a:srgbClr val="1FC3A6"/>
                 </a:solidFill>
@@ -7106,20 +9959,20 @@
               </a:rPr>
               <a:t>NEVER</a:t>
             </a:r>
-            <a:endParaRPr lang="en-US" sz="2800" dirty="0"/>
-          </a:p>
-        </p:txBody>
-      </p:sp>
-      <p:sp>
-        <p:nvSpPr>
-          <p:cNvPr id="8" name="Text 5"/>
-          <p:cNvSpPr txBox="1"/>
-          <p:nvPr/>
-        </p:nvSpPr>
-        <p:spPr>
-          <a:xfrm>
-            <a:off x="457200" y="5779008"/>
-            <a:ext cx="3383280" cy="320040"/>
+            <a:endParaRPr lang="en-US" sz="2600" dirty="0"/>
+          </a:p>
+        </p:txBody>
+      </p:sp>
+      <p:sp>
+        <p:nvSpPr>
+          <p:cNvPr id="9" name="Text 6"/>
+          <p:cNvSpPr txBox="1"/>
+          <p:nvPr/>
+        </p:nvSpPr>
+        <p:spPr>
+          <a:xfrm>
+            <a:off x="457200" y="5769864"/>
+            <a:ext cx="3383280" cy="301752"/>
           </a:xfrm>
           <a:prstGeom prst="rect">
             <a:avLst/>
@@ -7151,7 +10004,7 @@
       </p:sp>
       <p:sp>
         <p:nvSpPr>
-          <p:cNvPr id="9" name="Text 6"/>
+          <p:cNvPr id="10" name="Text 7"/>
           <p:cNvSpPr txBox="1"/>
           <p:nvPr/>
         </p:nvSpPr>
@@ -7190,7 +10043,7 @@
       </p:sp>
       <p:sp>
         <p:nvSpPr>
-          <p:cNvPr id="10" name="Text 7"/>
+          <p:cNvPr id="11" name="Text 8"/>
           <p:cNvSpPr txBox="1"/>
           <p:nvPr/>
         </p:nvSpPr>
@@ -7348,8 +10201,8 @@
         </p:nvSpPr>
         <p:spPr>
           <a:xfrm>
-            <a:off x="457200" y="1600200"/>
-            <a:ext cx="5760720" cy="3200400"/>
+            <a:off x="457200" y="1554480"/>
+            <a:ext cx="5760720" cy="3429000"/>
           </a:xfrm>
           <a:prstGeom prst="rect">
             <a:avLst/>
@@ -7363,13 +10216,13 @@
           <a:p>
             <a:pPr marL="177800" indent="-177800">
               <a:spcAft>
-                <a:spcPts val="800"/>
+                <a:spcPts val="700"/>
               </a:spcAft>
               <a:buSzPct val="100000"/>
               <a:buChar char="•"/>
             </a:pPr>
             <a:r>
-              <a:rPr lang="en-US" sz="1400" dirty="0">
+              <a:rPr lang="en-US" sz="1300" dirty="0">
                 <a:solidFill>
                   <a:srgbClr val="1B2A36"/>
                 </a:solidFill>
@@ -7377,20 +10230,20 @@
                 <a:ea typeface="Calibri" pitchFamily="34" charset="-122"/>
                 <a:cs typeface="Calibri" pitchFamily="34" charset="-120"/>
               </a:rPr>
-              <a:t>Scenario (illustrative): FHS = 84.1 − 25.3 × spend/income. A 10% trim for the Stretched 302 cuts stress months 95 → 65 (−32%); 5% → 80 (−16%).</a:t>
-            </a:r>
-            <a:endParaRPr lang="en-US" sz="1400" dirty="0"/>
+              <a:t>Scenario (illustrative): FHS = 84.1 − 25.3 × spend-to-income (r −0.90). A 5% trim for the Stretched 302 → stress months 95 → 80 (−16%); 10% → 65 (−32%); 15% → 49.</a:t>
+            </a:r>
+            <a:endParaRPr lang="en-US" sz="1300" dirty="0"/>
           </a:p>
           <a:p>
             <a:pPr marL="177800" indent="-177800">
               <a:spcAft>
-                <a:spcPts val="800"/>
+                <a:spcPts val="700"/>
               </a:spcAft>
               <a:buSzPct val="100000"/>
               <a:buChar char="•"/>
             </a:pPr>
             <a:r>
-              <a:rPr lang="en-US" sz="1400" dirty="0">
+              <a:rPr lang="en-US" sz="1300" dirty="0">
                 <a:solidFill>
                   <a:srgbClr val="1B2A36"/>
                 </a:solidFill>
@@ -7398,20 +10251,20 @@
                 <a:ea typeface="Calibri" pitchFamily="34" charset="-122"/>
                 <a:cs typeface="Calibri" pitchFamily="34" charset="-120"/>
               </a:rPr>
-              <a:t>Every tool gets one KPI and a randomised holdout (e.g. Budgeting: spend-to-income, 10% holdout for 3 months).</a:t>
-            </a:r>
-            <a:endParaRPr lang="en-US" sz="1400" dirty="0"/>
+              <a:t>Measurement: every tool gets one KPI and a randomised holdout (e.g. Budgeting: 10% holdout for 3 months).</a:t>
+            </a:r>
+            <a:endParaRPr lang="en-US" sz="1300" dirty="0"/>
           </a:p>
           <a:p>
             <a:pPr marL="177800" indent="-177800">
               <a:spcAft>
-                <a:spcPts val="800"/>
+                <a:spcPts val="700"/>
               </a:spcAft>
               <a:buSzPct val="100000"/>
               <a:buChar char="•"/>
             </a:pPr>
             <a:r>
-              <a:rPr lang="en-US" sz="1400" dirty="0">
+              <a:rPr lang="en-US" sz="1300" dirty="0">
                 <a:solidFill>
                   <a:srgbClr val="1B2A36"/>
                 </a:solidFill>
@@ -7419,9 +10272,9 @@
                 <a:ea typeface="Calibri" pitchFamily="34" charset="-122"/>
                 <a:cs typeface="Calibri" pitchFamily="34" charset="-120"/>
               </a:rPr>
-              <a:t>Days 0–30: Budgeting + Alerts · 31–60: November Reminders + Nudges · 61–90: Education + opt-in Products; keep what moves the KPI.</a:t>
-            </a:r>
-            <a:endParaRPr lang="en-US" sz="1400" dirty="0"/>
+              <a:t>Days 0–30: Budgeting + Alerts · 31–60: November Reminders + Digital Nudges · 61–90: Education + opt-in Products; keep what moves the KPI.</a:t>
+            </a:r>
+            <a:endParaRPr lang="en-US" sz="1300" dirty="0"/>
           </a:p>
         </p:txBody>
       </p:sp>
@@ -7441,7 +10294,7 @@
         <p:spPr>
           <a:xfrm>
             <a:off x="6446520" y="1554480"/>
-            <a:ext cx="5303520" cy="4206240"/>
+            <a:ext cx="5303520" cy="4023360"/>
           </a:xfrm>
           <a:prstGeom prst="rect">
             <a:avLst/>
@@ -7456,8 +10309,8 @@
         </p:nvSpPr>
         <p:spPr>
           <a:xfrm>
-            <a:off x="6446520" y="5852160"/>
-            <a:ext cx="5303520" cy="548640"/>
+            <a:off x="6446520" y="5623560"/>
+            <a:ext cx="5303520" cy="256032"/>
           </a:xfrm>
           <a:prstGeom prst="rect">
             <a:avLst/>
@@ -7473,7 +10326,7 @@
               <a:buNone/>
             </a:pPr>
             <a:r>
-              <a:rPr lang="en-US" sz="1000" i="1" dirty="0">
+              <a:rPr lang="en-US" sz="850" i="1" dirty="0">
                 <a:solidFill>
                   <a:srgbClr val="5F7180"/>
                 </a:solidFill>
@@ -7481,26 +10334,65 @@
                 <a:ea typeface="Calibri" pitchFamily="34" charset="-122"/>
                 <a:cs typeface="Calibri" pitchFamily="34" charset="-120"/>
               </a:rPr>
+              <a:t>Source: team scenario on the consumer-month file (10,992 months).</a:t>
+            </a:r>
+            <a:endParaRPr lang="en-US" sz="850" dirty="0"/>
+          </a:p>
+        </p:txBody>
+      </p:sp>
+      <p:sp>
+        <p:nvSpPr>
+          <p:cNvPr id="7" name="Text 4"/>
+          <p:cNvSpPr txBox="1"/>
+          <p:nvPr/>
+        </p:nvSpPr>
+        <p:spPr>
+          <a:xfrm>
+            <a:off x="6446520" y="5897880"/>
+            <a:ext cx="5303520" cy="502920"/>
+          </a:xfrm>
+          <a:prstGeom prst="rect">
+            <a:avLst/>
+          </a:prstGeom>
+          <a:noFill/>
+          <a:ln/>
+        </p:spPr>
+        <p:txBody>
+          <a:bodyPr wrap="square" lIns="0" tIns="0" rIns="0" bIns="0" rtlCol="0" anchor="t"/>
+          <a:lstStyle/>
+          <a:p>
+            <a:pPr indent="0" marL="0">
+              <a:buNone/>
+            </a:pPr>
+            <a:r>
+              <a:rPr lang="en-US" sz="950" i="1" dirty="0">
+                <a:solidFill>
+                  <a:srgbClr val="5F7180"/>
+                </a:solidFill>
+                <a:latin typeface="Calibri" pitchFamily="34" charset="0"/>
+                <a:ea typeface="Calibri" pitchFamily="34" charset="-122"/>
+                <a:cs typeface="Calibri" pitchFamily="34" charset="-120"/>
+              </a:rPr>
               <a:t>⚠  FHS embeds spend fields — the slope is mechanical; a scenario to test, not a forecast.</a:t>
             </a:r>
-            <a:endParaRPr lang="en-US" sz="1000" dirty="0"/>
-          </a:p>
-        </p:txBody>
-      </p:sp>
-      <p:sp>
-        <p:nvSpPr>
-          <p:cNvPr id="7" name="Shape 4"/>
+            <a:endParaRPr lang="en-US" sz="950" dirty="0"/>
+          </a:p>
+        </p:txBody>
+      </p:sp>
+      <p:sp>
+        <p:nvSpPr>
+          <p:cNvPr id="8" name="Shape 5"/>
           <p:cNvSpPr/>
           <p:nvPr/>
         </p:nvSpPr>
         <p:spPr>
           <a:xfrm>
-            <a:off x="457200" y="5029200"/>
-            <a:ext cx="3383280" cy="1097280"/>
+            <a:off x="457200" y="5074920"/>
+            <a:ext cx="3383280" cy="1051560"/>
           </a:xfrm>
           <a:prstGeom prst="roundRect">
             <a:avLst>
-              <a:gd name="adj" fmla="val 6667"/>
+              <a:gd name="adj" fmla="val 6957"/>
             </a:avLst>
           </a:prstGeom>
           <a:solidFill>
@@ -7511,14 +10403,14 @@
       </p:sp>
       <p:sp>
         <p:nvSpPr>
-          <p:cNvPr id="8" name="Text 5"/>
-          <p:cNvSpPr txBox="1"/>
-          <p:nvPr/>
-        </p:nvSpPr>
-        <p:spPr>
-          <a:xfrm>
-            <a:off x="457200" y="5138928"/>
-            <a:ext cx="3383280" cy="658368"/>
+          <p:cNvPr id="9" name="Text 6"/>
+          <p:cNvSpPr txBox="1"/>
+          <p:nvPr/>
+        </p:nvSpPr>
+        <p:spPr>
+          <a:xfrm>
+            <a:off x="457200" y="5148072"/>
+            <a:ext cx="3383280" cy="621792"/>
           </a:xfrm>
           <a:prstGeom prst="rect">
             <a:avLst/>
@@ -7534,7 +10426,7 @@
               <a:buNone/>
             </a:pPr>
             <a:r>
-              <a:rPr lang="en-US" sz="2800" b="1" dirty="0">
+              <a:rPr lang="en-US" sz="2600" b="1" dirty="0">
                 <a:solidFill>
                   <a:srgbClr val="1FC3A6"/>
                 </a:solidFill>
@@ -7544,20 +10436,20 @@
               </a:rPr>
               <a:t>−32%</a:t>
             </a:r>
-            <a:endParaRPr lang="en-US" sz="2800" dirty="0"/>
-          </a:p>
-        </p:txBody>
-      </p:sp>
-      <p:sp>
-        <p:nvSpPr>
-          <p:cNvPr id="9" name="Text 6"/>
-          <p:cNvSpPr txBox="1"/>
-          <p:nvPr/>
-        </p:nvSpPr>
-        <p:spPr>
-          <a:xfrm>
-            <a:off x="457200" y="5779008"/>
-            <a:ext cx="3383280" cy="320040"/>
+            <a:endParaRPr lang="en-US" sz="2600" dirty="0"/>
+          </a:p>
+        </p:txBody>
+      </p:sp>
+      <p:sp>
+        <p:nvSpPr>
+          <p:cNvPr id="10" name="Text 7"/>
+          <p:cNvSpPr txBox="1"/>
+          <p:nvPr/>
+        </p:nvSpPr>
+        <p:spPr>
+          <a:xfrm>
+            <a:off x="457200" y="5769864"/>
+            <a:ext cx="3383280" cy="301752"/>
           </a:xfrm>
           <a:prstGeom prst="rect">
             <a:avLst/>
@@ -7589,7 +10481,7 @@
       </p:sp>
       <p:sp>
         <p:nvSpPr>
-          <p:cNvPr id="10" name="Text 7"/>
+          <p:cNvPr id="11" name="Text 8"/>
           <p:cNvSpPr txBox="1"/>
           <p:nvPr/>
         </p:nvSpPr>
@@ -7628,7 +10520,7 @@
       </p:sp>
       <p:sp>
         <p:nvSpPr>
-          <p:cNvPr id="11" name="Text 8"/>
+          <p:cNvPr id="12" name="Text 9"/>
           <p:cNvSpPr txBox="1"/>
           <p:nvPr/>
         </p:nvSpPr>
@@ -8124,7 +11016,7 @@
                 <a:ea typeface="Calibri" pitchFamily="34" charset="-122"/>
                 <a:cs typeface="Calibri" pitchFamily="34" charset="-120"/>
               </a:rPr>
-              <a:t>Synthetic single-year data, uniform December uplift, engineered engagement, segments on a continuum — sizes directional, conclusions robust on ratios.</a:t>
+              <a:t>Synthetic data with two source years folded onto 2025, engineered engagement, segments on a continuum — sizes directional, conclusions robust on ratios.</a:t>
             </a:r>
             <a:endParaRPr lang="en-US" sz="1300" dirty="0"/>
           </a:p>
@@ -9111,8 +12003,8 @@
         </p:nvSpPr>
         <p:spPr>
           <a:xfrm>
-            <a:off x="457200" y="1600200"/>
-            <a:ext cx="5852160" cy="4206240"/>
+            <a:off x="457200" y="1554480"/>
+            <a:ext cx="5760720" cy="3108960"/>
           </a:xfrm>
           <a:prstGeom prst="rect">
             <a:avLst/>
@@ -9126,13 +12018,13 @@
           <a:p>
             <a:pPr marL="177800" indent="-177800">
               <a:spcAft>
-                <a:spcPts val="800"/>
+                <a:spcPts val="700"/>
               </a:spcAft>
               <a:buSzPct val="100000"/>
               <a:buChar char="•"/>
             </a:pPr>
             <a:r>
-              <a:rPr lang="en-US" sz="1400" dirty="0">
+              <a:rPr lang="en-US" sz="1300" dirty="0">
                 <a:solidFill>
                   <a:srgbClr val="1B2A36"/>
                 </a:solidFill>
@@ -9140,20 +12032,20 @@
                 <a:ea typeface="Calibri" pitchFamily="34" charset="-122"/>
                 <a:cs typeface="Calibri" pitchFamily="34" charset="-120"/>
               </a:rPr>
-              <a:t>ITB, a Vietnamese consumer-finance company, wants to understand customer wellbeing, spending and engagement.</a:t>
-            </a:r>
-            <a:endParaRPr lang="en-US" sz="1400" dirty="0"/>
+              <a:t>ITB, a Vietnamese consumer-finance company, wants to understand customer wellbeing, spending and engagement — customer understanding &amp; segmentation, NOT credit-risk decisions.</a:t>
+            </a:r>
+            <a:endParaRPr lang="en-US" sz="1300" dirty="0"/>
           </a:p>
           <a:p>
             <a:pPr marL="177800" indent="-177800">
               <a:spcAft>
-                <a:spcPts val="800"/>
+                <a:spcPts val="700"/>
               </a:spcAft>
               <a:buSzPct val="100000"/>
               <a:buChar char="•"/>
             </a:pPr>
             <a:r>
-              <a:rPr lang="en-US" sz="1400" dirty="0">
+              <a:rPr lang="en-US" sz="1300" dirty="0">
                 <a:solidFill>
                   <a:srgbClr val="1B2A36"/>
                 </a:solidFill>
@@ -9161,20 +12053,20 @@
                 <a:ea typeface="Calibri" pitchFamily="34" charset="-122"/>
                 <a:cs typeface="Calibri" pitchFamily="34" charset="-120"/>
               </a:rPr>
-              <a:t>This is customer understanding &amp; segmentation — NOT credit-risk decision-making.</a:t>
-            </a:r>
-            <a:endParaRPr lang="en-US" sz="1400" dirty="0"/>
+              <a:t>We read ratios and shares, never absolute VND: synthetic income / credit / balance magnitudes are inflated.</a:t>
+            </a:r>
+            <a:endParaRPr lang="en-US" sz="1300" dirty="0"/>
           </a:p>
           <a:p>
             <a:pPr marL="177800" indent="-177800">
               <a:spcAft>
-                <a:spcPts val="800"/>
+                <a:spcPts val="700"/>
               </a:spcAft>
               <a:buSzPct val="100000"/>
               <a:buChar char="•"/>
             </a:pPr>
             <a:r>
-              <a:rPr lang="en-US" sz="1400" dirty="0">
+              <a:rPr lang="en-US" sz="1300" dirty="0">
                 <a:solidFill>
                   <a:srgbClr val="1B2A36"/>
                 </a:solidFill>
@@ -9182,20 +12074,20 @@
                 <a:ea typeface="Calibri" pitchFamily="34" charset="-122"/>
                 <a:cs typeface="Calibri" pitchFamily="34" charset="-120"/>
               </a:rPr>
-              <a:t>We read ratios and shares, never absolute VND: synthetic income/credit/balance magnitudes are inflated.</a:t>
-            </a:r>
-            <a:endParaRPr lang="en-US" sz="1400" dirty="0"/>
+              <a:t>Distress analysed at consumer-MONTH grain (it is episodic); "what kind of customer" at consumer level.</a:t>
+            </a:r>
+            <a:endParaRPr lang="en-US" sz="1300" dirty="0"/>
           </a:p>
           <a:p>
             <a:pPr marL="177800" indent="-177800">
               <a:spcAft>
-                <a:spcPts val="800"/>
+                <a:spcPts val="700"/>
               </a:spcAft>
               <a:buSzPct val="100000"/>
               <a:buChar char="•"/>
             </a:pPr>
             <a:r>
-              <a:rPr lang="en-US" sz="1400" dirty="0">
+              <a:rPr lang="en-US" sz="1300" dirty="0">
                 <a:solidFill>
                   <a:srgbClr val="1B2A36"/>
                 </a:solidFill>
@@ -9203,9 +12095,9 @@
                 <a:ea typeface="Calibri" pitchFamily="34" charset="-122"/>
                 <a:cs typeface="Calibri" pitchFamily="34" charset="-120"/>
               </a:rPr>
-              <a:t>Distress analysed at consumer-MONTH grain (episodic); "what kind of customer" at consumer level.</a:t>
-            </a:r>
-            <a:endParaRPr lang="en-US" sz="1400" dirty="0"/>
+              <a:t>Process: data-quality checks → EDA → financial health → engagement → segmentation → recommendations. Every number reproduces in notebooks/full_pipeline.ipynb.</a:t>
+            </a:r>
+            <a:endParaRPr lang="en-US" sz="1300" dirty="0"/>
           </a:p>
         </p:txBody>
       </p:sp>
@@ -9217,12 +12109,87 @@
         </p:nvSpPr>
         <p:spPr>
           <a:xfrm>
-            <a:off x="6675120" y="1645920"/>
-            <a:ext cx="2468880" cy="1234440"/>
+            <a:off x="457200" y="4846320"/>
+            <a:ext cx="5760720" cy="1097280"/>
           </a:xfrm>
           <a:prstGeom prst="roundRect">
             <a:avLst>
-              <a:gd name="adj" fmla="val 5926"/>
+              <a:gd name="adj" fmla="val 6667"/>
+            </a:avLst>
+          </a:prstGeom>
+          <a:solidFill>
+            <a:srgbClr val="12435E"/>
+          </a:solidFill>
+          <a:ln/>
+        </p:spPr>
+      </p:sp>
+      <p:sp>
+        <p:nvSpPr>
+          <p:cNvPr id="6" name="Text 4"/>
+          <p:cNvSpPr txBox="1"/>
+          <p:nvPr/>
+        </p:nvSpPr>
+        <p:spPr>
+          <a:xfrm>
+            <a:off x="640080" y="4919472"/>
+            <a:ext cx="5394960" cy="960120"/>
+          </a:xfrm>
+          <a:prstGeom prst="rect">
+            <a:avLst/>
+          </a:prstGeom>
+          <a:noFill/>
+          <a:ln/>
+        </p:spPr>
+        <p:txBody>
+          <a:bodyPr wrap="square" lIns="0" tIns="0" rIns="0" bIns="0" rtlCol="0" anchor="ctr"/>
+          <a:lstStyle/>
+          <a:p>
+            <a:pPr indent="0" marL="0">
+              <a:buNone/>
+            </a:pPr>
+            <a:r>
+              <a:rPr lang="en-US" sz="1300" b="1" dirty="0">
+                <a:solidFill>
+                  <a:srgbClr val="1FC3A6"/>
+                </a:solidFill>
+                <a:latin typeface="Calibri" pitchFamily="34" charset="0"/>
+                <a:ea typeface="Calibri" pitchFamily="34" charset="-122"/>
+                <a:cs typeface="Calibri" pitchFamily="34" charset="-120"/>
+              </a:rPr>
+              <a:t>Ethical rule  </a:t>
+            </a:r>
+            <a:pPr indent="0" marL="0">
+              <a:buNone/>
+            </a:pPr>
+            <a:r>
+              <a:rPr lang="en-US" sz="1250" dirty="0">
+                <a:solidFill>
+                  <a:srgbClr val="FFFFFF"/>
+                </a:solidFill>
+                <a:latin typeface="Calibri" pitchFamily="34" charset="0"/>
+                <a:ea typeface="Calibri" pitchFamily="34" charset="-122"/>
+                <a:cs typeface="Calibri" pitchFamily="34" charset="-120"/>
+              </a:rPr>
+              <a:t>financial_health_score is a wellbeing measure — never used to deny credit, cut a limit, raise a rate, or block an account.</a:t>
+            </a:r>
+            <a:endParaRPr lang="en-US" sz="1300" dirty="0"/>
+          </a:p>
+        </p:txBody>
+      </p:sp>
+      <p:sp>
+        <p:nvSpPr>
+          <p:cNvPr id="7" name="Shape 5"/>
+          <p:cNvSpPr/>
+          <p:nvPr/>
+        </p:nvSpPr>
+        <p:spPr>
+          <a:xfrm>
+            <a:off x="6446520" y="1554480"/>
+            <a:ext cx="1234440" cy="960120"/>
+          </a:xfrm>
+          <a:prstGeom prst="roundRect">
+            <a:avLst>
+              <a:gd name="adj" fmla="val 7619"/>
             </a:avLst>
           </a:prstGeom>
           <a:solidFill>
@@ -9233,14 +12200,14 @@
       </p:sp>
       <p:sp>
         <p:nvSpPr>
-          <p:cNvPr id="6" name="Text 4"/>
-          <p:cNvSpPr txBox="1"/>
-          <p:nvPr/>
-        </p:nvSpPr>
-        <p:spPr>
-          <a:xfrm>
-            <a:off x="6675120" y="1755648"/>
-            <a:ext cx="2468880" cy="640080"/>
+          <p:cNvPr id="8" name="Text 6"/>
+          <p:cNvSpPr txBox="1"/>
+          <p:nvPr/>
+        </p:nvSpPr>
+        <p:spPr>
+          <a:xfrm>
+            <a:off x="6446520" y="1609344"/>
+            <a:ext cx="1234440" cy="502920"/>
           </a:xfrm>
           <a:prstGeom prst="rect">
             <a:avLst/>
@@ -9256,7 +12223,7 @@
               <a:buNone/>
             </a:pPr>
             <a:r>
-              <a:rPr lang="en-US" sz="2800" b="1" dirty="0">
+              <a:rPr lang="en-US" sz="2000" b="1" dirty="0">
                 <a:solidFill>
                   <a:srgbClr val="12435E"/>
                 </a:solidFill>
@@ -9266,20 +12233,20 @@
               </a:rPr>
               <a:t>999</a:t>
             </a:r>
-            <a:endParaRPr lang="en-US" sz="2800" dirty="0"/>
-          </a:p>
-        </p:txBody>
-      </p:sp>
-      <p:sp>
-        <p:nvSpPr>
-          <p:cNvPr id="7" name="Text 5"/>
-          <p:cNvSpPr txBox="1"/>
-          <p:nvPr/>
-        </p:nvSpPr>
-        <p:spPr>
-          <a:xfrm>
-            <a:off x="6675120" y="2395728"/>
-            <a:ext cx="2468880" cy="365760"/>
+            <a:endParaRPr lang="en-US" sz="2000" dirty="0"/>
+          </a:p>
+        </p:txBody>
+      </p:sp>
+      <p:sp>
+        <p:nvSpPr>
+          <p:cNvPr id="9" name="Text 7"/>
+          <p:cNvSpPr txBox="1"/>
+          <p:nvPr/>
+        </p:nvSpPr>
+        <p:spPr>
+          <a:xfrm>
+            <a:off x="6446520" y="2103120"/>
+            <a:ext cx="1234440" cy="320040"/>
           </a:xfrm>
           <a:prstGeom prst="rect">
             <a:avLst/>
@@ -9295,7 +12262,7 @@
               <a:buNone/>
             </a:pPr>
             <a:r>
-              <a:rPr lang="en-US" sz="1150" dirty="0">
+              <a:rPr lang="en-US" sz="1050" dirty="0">
                 <a:solidFill>
                   <a:srgbClr val="5F7180"/>
                 </a:solidFill>
@@ -9305,24 +12272,24 @@
               </a:rPr>
               <a:t>consumers</a:t>
             </a:r>
-            <a:endParaRPr lang="en-US" sz="1150" dirty="0"/>
-          </a:p>
-        </p:txBody>
-      </p:sp>
-      <p:sp>
-        <p:nvSpPr>
-          <p:cNvPr id="8" name="Shape 6"/>
+            <a:endParaRPr lang="en-US" sz="1050" dirty="0"/>
+          </a:p>
+        </p:txBody>
+      </p:sp>
+      <p:sp>
+        <p:nvSpPr>
+          <p:cNvPr id="10" name="Shape 8"/>
           <p:cNvSpPr/>
           <p:nvPr/>
         </p:nvSpPr>
         <p:spPr>
           <a:xfrm>
-            <a:off x="9326880" y="1645920"/>
-            <a:ext cx="2468880" cy="1234440"/>
+            <a:off x="7790688" y="1554480"/>
+            <a:ext cx="1234440" cy="960120"/>
           </a:xfrm>
           <a:prstGeom prst="roundRect">
             <a:avLst>
-              <a:gd name="adj" fmla="val 5926"/>
+              <a:gd name="adj" fmla="val 7619"/>
             </a:avLst>
           </a:prstGeom>
           <a:solidFill>
@@ -9333,14 +12300,14 @@
       </p:sp>
       <p:sp>
         <p:nvSpPr>
-          <p:cNvPr id="9" name="Text 7"/>
-          <p:cNvSpPr txBox="1"/>
-          <p:nvPr/>
-        </p:nvSpPr>
-        <p:spPr>
-          <a:xfrm>
-            <a:off x="9326880" y="1755648"/>
-            <a:ext cx="2468880" cy="640080"/>
+          <p:cNvPr id="11" name="Text 9"/>
+          <p:cNvSpPr txBox="1"/>
+          <p:nvPr/>
+        </p:nvSpPr>
+        <p:spPr>
+          <a:xfrm>
+            <a:off x="7790688" y="1609344"/>
+            <a:ext cx="1234440" cy="502920"/>
           </a:xfrm>
           <a:prstGeom prst="rect">
             <a:avLst/>
@@ -9356,7 +12323,7 @@
               <a:buNone/>
             </a:pPr>
             <a:r>
-              <a:rPr lang="en-US" sz="2800" b="1" dirty="0">
+              <a:rPr lang="en-US" sz="2000" b="1" dirty="0">
                 <a:solidFill>
                   <a:srgbClr val="12435E"/>
                 </a:solidFill>
@@ -9366,20 +12333,20 @@
               </a:rPr>
               <a:t>1.85M</a:t>
             </a:r>
-            <a:endParaRPr lang="en-US" sz="2800" dirty="0"/>
-          </a:p>
-        </p:txBody>
-      </p:sp>
-      <p:sp>
-        <p:nvSpPr>
-          <p:cNvPr id="10" name="Text 8"/>
-          <p:cNvSpPr txBox="1"/>
-          <p:nvPr/>
-        </p:nvSpPr>
-        <p:spPr>
-          <a:xfrm>
-            <a:off x="9326880" y="2395728"/>
-            <a:ext cx="2468880" cy="365760"/>
+            <a:endParaRPr lang="en-US" sz="2000" dirty="0"/>
+          </a:p>
+        </p:txBody>
+      </p:sp>
+      <p:sp>
+        <p:nvSpPr>
+          <p:cNvPr id="12" name="Text 10"/>
+          <p:cNvSpPr txBox="1"/>
+          <p:nvPr/>
+        </p:nvSpPr>
+        <p:spPr>
+          <a:xfrm>
+            <a:off x="7790688" y="2103120"/>
+            <a:ext cx="1234440" cy="320040"/>
           </a:xfrm>
           <a:prstGeom prst="rect">
             <a:avLst/>
@@ -9395,7 +12362,7 @@
               <a:buNone/>
             </a:pPr>
             <a:r>
-              <a:rPr lang="en-US" sz="1150" dirty="0">
+              <a:rPr lang="en-US" sz="1050" dirty="0">
                 <a:solidFill>
                   <a:srgbClr val="5F7180"/>
                 </a:solidFill>
@@ -9405,24 +12372,24 @@
               </a:rPr>
               <a:t>transactions</a:t>
             </a:r>
-            <a:endParaRPr lang="en-US" sz="1150" dirty="0"/>
-          </a:p>
-        </p:txBody>
-      </p:sp>
-      <p:sp>
-        <p:nvSpPr>
-          <p:cNvPr id="11" name="Shape 9"/>
+            <a:endParaRPr lang="en-US" sz="1050" dirty="0"/>
+          </a:p>
+        </p:txBody>
+      </p:sp>
+      <p:sp>
+        <p:nvSpPr>
+          <p:cNvPr id="13" name="Shape 11"/>
           <p:cNvSpPr/>
           <p:nvPr/>
         </p:nvSpPr>
         <p:spPr>
           <a:xfrm>
-            <a:off x="6675120" y="3063240"/>
-            <a:ext cx="2468880" cy="1234440"/>
+            <a:off x="9134856" y="1554480"/>
+            <a:ext cx="1234440" cy="960120"/>
           </a:xfrm>
           <a:prstGeom prst="roundRect">
             <a:avLst>
-              <a:gd name="adj" fmla="val 5926"/>
+              <a:gd name="adj" fmla="val 7619"/>
             </a:avLst>
           </a:prstGeom>
           <a:solidFill>
@@ -9433,14 +12400,14 @@
       </p:sp>
       <p:sp>
         <p:nvSpPr>
-          <p:cNvPr id="12" name="Text 10"/>
-          <p:cNvSpPr txBox="1"/>
-          <p:nvPr/>
-        </p:nvSpPr>
-        <p:spPr>
-          <a:xfrm>
-            <a:off x="6675120" y="3172968"/>
-            <a:ext cx="2468880" cy="640080"/>
+          <p:cNvPr id="14" name="Text 12"/>
+          <p:cNvSpPr txBox="1"/>
+          <p:nvPr/>
+        </p:nvSpPr>
+        <p:spPr>
+          <a:xfrm>
+            <a:off x="9134856" y="1609344"/>
+            <a:ext cx="1234440" cy="502920"/>
           </a:xfrm>
           <a:prstGeom prst="rect">
             <a:avLst/>
@@ -9456,7 +12423,7 @@
               <a:buNone/>
             </a:pPr>
             <a:r>
-              <a:rPr lang="en-US" sz="2800" b="1" dirty="0">
+              <a:rPr lang="en-US" sz="2000" b="1" dirty="0">
                 <a:solidFill>
                   <a:srgbClr val="12435E"/>
                 </a:solidFill>
@@ -9464,22 +12431,22 @@
                 <a:ea typeface="Cambria" pitchFamily="34" charset="-122"/>
                 <a:cs typeface="Cambria" pitchFamily="34" charset="-120"/>
               </a:rPr>
-              <a:t>2025</a:t>
-            </a:r>
-            <a:endParaRPr lang="en-US" sz="2800" dirty="0"/>
-          </a:p>
-        </p:txBody>
-      </p:sp>
-      <p:sp>
-        <p:nvSpPr>
-          <p:cNvPr id="13" name="Text 11"/>
-          <p:cNvSpPr txBox="1"/>
-          <p:nvPr/>
-        </p:nvSpPr>
-        <p:spPr>
-          <a:xfrm>
-            <a:off x="6675120" y="3813048"/>
-            <a:ext cx="2468880" cy="365760"/>
+              <a:t>693</a:t>
+            </a:r>
+            <a:endParaRPr lang="en-US" sz="2000" dirty="0"/>
+          </a:p>
+        </p:txBody>
+      </p:sp>
+      <p:sp>
+        <p:nvSpPr>
+          <p:cNvPr id="15" name="Text 13"/>
+          <p:cNvSpPr txBox="1"/>
+          <p:nvPr/>
+        </p:nvSpPr>
+        <p:spPr>
+          <a:xfrm>
+            <a:off x="9134856" y="2103120"/>
+            <a:ext cx="1234440" cy="320040"/>
           </a:xfrm>
           <a:prstGeom prst="rect">
             <a:avLst/>
@@ -9495,7 +12462,7 @@
               <a:buNone/>
             </a:pPr>
             <a:r>
-              <a:rPr lang="en-US" sz="1150" dirty="0">
+              <a:rPr lang="en-US" sz="1050" dirty="0">
                 <a:solidFill>
                   <a:srgbClr val="5F7180"/>
                 </a:solidFill>
@@ -9503,26 +12470,26 @@
                 <a:ea typeface="Calibri" pitchFamily="34" charset="-122"/>
                 <a:cs typeface="Calibri" pitchFamily="34" charset="-120"/>
               </a:rPr>
-              <a:t>full year, VND</a:t>
-            </a:r>
-            <a:endParaRPr lang="en-US" sz="1150" dirty="0"/>
-          </a:p>
-        </p:txBody>
-      </p:sp>
-      <p:sp>
-        <p:nvSpPr>
-          <p:cNvPr id="14" name="Shape 12"/>
+              <a:t>merchants</a:t>
+            </a:r>
+            <a:endParaRPr lang="en-US" sz="1050" dirty="0"/>
+          </a:p>
+        </p:txBody>
+      </p:sp>
+      <p:sp>
+        <p:nvSpPr>
+          <p:cNvPr id="16" name="Shape 14"/>
           <p:cNvSpPr/>
           <p:nvPr/>
         </p:nvSpPr>
         <p:spPr>
           <a:xfrm>
-            <a:off x="9326880" y="3063240"/>
-            <a:ext cx="2468880" cy="1234440"/>
+            <a:off x="10479024" y="1554480"/>
+            <a:ext cx="1234440" cy="960120"/>
           </a:xfrm>
           <a:prstGeom prst="roundRect">
             <a:avLst>
-              <a:gd name="adj" fmla="val 5926"/>
+              <a:gd name="adj" fmla="val 7619"/>
             </a:avLst>
           </a:prstGeom>
           <a:solidFill>
@@ -9533,14 +12500,14 @@
       </p:sp>
       <p:sp>
         <p:nvSpPr>
-          <p:cNvPr id="15" name="Text 13"/>
-          <p:cNvSpPr txBox="1"/>
-          <p:nvPr/>
-        </p:nvSpPr>
-        <p:spPr>
-          <a:xfrm>
-            <a:off x="9326880" y="3172968"/>
-            <a:ext cx="2468880" cy="640080"/>
+          <p:cNvPr id="17" name="Text 15"/>
+          <p:cNvSpPr txBox="1"/>
+          <p:nvPr/>
+        </p:nvSpPr>
+        <p:spPr>
+          <a:xfrm>
+            <a:off x="10479024" y="1609344"/>
+            <a:ext cx="1234440" cy="502920"/>
           </a:xfrm>
           <a:prstGeom prst="rect">
             <a:avLst/>
@@ -9556,7 +12523,7 @@
               <a:buNone/>
             </a:pPr>
             <a:r>
-              <a:rPr lang="en-US" sz="2800" b="1" dirty="0">
+              <a:rPr lang="en-US" sz="2000" b="1" dirty="0">
                 <a:solidFill>
                   <a:srgbClr val="12435E"/>
                 </a:solidFill>
@@ -9564,22 +12531,22 @@
                 <a:ea typeface="Cambria" pitchFamily="34" charset="-122"/>
                 <a:cs typeface="Cambria" pitchFamily="34" charset="-120"/>
               </a:rPr>
-              <a:t>Synthetic</a:t>
-            </a:r>
-            <a:endParaRPr lang="en-US" sz="2800" dirty="0"/>
-          </a:p>
-        </p:txBody>
-      </p:sp>
-      <p:sp>
-        <p:nvSpPr>
-          <p:cNvPr id="16" name="Text 14"/>
-          <p:cNvSpPr txBox="1"/>
-          <p:nvPr/>
-        </p:nvSpPr>
-        <p:spPr>
-          <a:xfrm>
-            <a:off x="9326880" y="3813048"/>
-            <a:ext cx="2468880" cy="365760"/>
+              <a:t>34</a:t>
+            </a:r>
+            <a:endParaRPr lang="en-US" sz="2000" dirty="0"/>
+          </a:p>
+        </p:txBody>
+      </p:sp>
+      <p:sp>
+        <p:nvSpPr>
+          <p:cNvPr id="18" name="Text 16"/>
+          <p:cNvSpPr txBox="1"/>
+          <p:nvPr/>
+        </p:nvSpPr>
+        <p:spPr>
+          <a:xfrm>
+            <a:off x="10479024" y="2103120"/>
+            <a:ext cx="1234440" cy="320040"/>
           </a:xfrm>
           <a:prstGeom prst="rect">
             <a:avLst/>
@@ -9595,7 +12562,7 @@
               <a:buNone/>
             </a:pPr>
             <a:r>
-              <a:rPr lang="en-US" sz="1150" dirty="0">
+              <a:rPr lang="en-US" sz="1050" dirty="0">
                 <a:solidFill>
                   <a:srgbClr val="5F7180"/>
                 </a:solidFill>
@@ -9603,90 +12570,224 @@
                 <a:ea typeface="Calibri" pitchFamily="34" charset="-122"/>
                 <a:cs typeface="Calibri" pitchFamily="34" charset="-120"/>
               </a:rPr>
-              <a:t>ratios are the signal</a:t>
-            </a:r>
-            <a:endParaRPr lang="en-US" sz="1150" dirty="0"/>
-          </a:p>
-        </p:txBody>
-      </p:sp>
-      <p:sp>
-        <p:nvSpPr>
-          <p:cNvPr id="17" name="Shape 15"/>
+              <a:t>provinces</a:t>
+            </a:r>
+            <a:endParaRPr lang="en-US" sz="1050" dirty="0"/>
+          </a:p>
+        </p:txBody>
+      </p:sp>
+      <p:sp>
+        <p:nvSpPr>
+          <p:cNvPr id="19" name="Shape 17"/>
           <p:cNvSpPr/>
           <p:nvPr/>
         </p:nvSpPr>
         <p:spPr>
           <a:xfrm>
-            <a:off x="6675120" y="4572000"/>
-            <a:ext cx="5120640" cy="1234440"/>
+            <a:off x="6446520" y="2697480"/>
+            <a:ext cx="5303520" cy="3246120"/>
           </a:xfrm>
           <a:prstGeom prst="roundRect">
             <a:avLst>
-              <a:gd name="adj" fmla="val 5926"/>
+              <a:gd name="adj" fmla="val 1690"/>
             </a:avLst>
           </a:prstGeom>
           <a:solidFill>
-            <a:srgbClr val="12435E"/>
+            <a:srgbClr val="FFFFFF"/>
           </a:solidFill>
-          <a:ln/>
-        </p:spPr>
-      </p:sp>
-      <p:sp>
-        <p:nvSpPr>
-          <p:cNvPr id="18" name="Text 16"/>
-          <p:cNvSpPr txBox="1"/>
-          <p:nvPr/>
-        </p:nvSpPr>
-        <p:spPr>
-          <a:xfrm>
-            <a:off x="6903720" y="4681728"/>
-            <a:ext cx="4709160" cy="1005840"/>
-          </a:xfrm>
-          <a:prstGeom prst="rect">
-            <a:avLst/>
-          </a:prstGeom>
-          <a:noFill/>
-          <a:ln/>
-        </p:spPr>
-        <p:txBody>
-          <a:bodyPr wrap="square" lIns="0" tIns="0" rIns="0" bIns="0" rtlCol="0" anchor="ctr"/>
+          <a:ln w="15240">
+            <a:solidFill>
+              <a:srgbClr val="1FC3A6"/>
+            </a:solidFill>
+            <a:prstDash val="solid"/>
+          </a:ln>
+        </p:spPr>
+      </p:sp>
+      <p:sp>
+        <p:nvSpPr>
+          <p:cNvPr id="20" name="Text 18"/>
+          <p:cNvSpPr txBox="1"/>
+          <p:nvPr/>
+        </p:nvSpPr>
+        <p:spPr>
+          <a:xfrm>
+            <a:off x="6629400" y="2788920"/>
+            <a:ext cx="4983480" cy="3108960"/>
+          </a:xfrm>
+          <a:prstGeom prst="rect">
+            <a:avLst/>
+          </a:prstGeom>
+          <a:noFill/>
+          <a:ln/>
+        </p:spPr>
+        <p:txBody>
+          <a:bodyPr wrap="square" lIns="0" tIns="0" rIns="0" bIns="0" rtlCol="0" anchor="t"/>
           <a:lstStyle/>
           <a:p>
             <a:pPr indent="0" marL="0">
+              <a:spcAft>
+                <a:spcPts val="600"/>
+              </a:spcAft>
               <a:buNone/>
             </a:pPr>
             <a:r>
               <a:rPr lang="en-US" sz="1300" b="1" dirty="0">
                 <a:solidFill>
-                  <a:srgbClr val="1FC3A6"/>
-                </a:solidFill>
-                <a:latin typeface="Calibri" pitchFamily="34" charset="0"/>
-                <a:ea typeface="Calibri" pitchFamily="34" charset="-122"/>
-                <a:cs typeface="Calibri" pitchFamily="34" charset="-120"/>
-              </a:rPr>
-              <a:t>Ethical rule  </a:t>
-            </a:r>
+                  <a:srgbClr val="058B8C"/>
+                </a:solidFill>
+                <a:latin typeface="Calibri" pitchFamily="34" charset="0"/>
+                <a:ea typeface="Calibri" pitchFamily="34" charset="-122"/>
+                <a:cs typeface="Calibri" pitchFamily="34" charset="-120"/>
+              </a:rPr>
+              <a:t>Data-quality checks — both files</a:t>
+            </a:r>
+            <a:endParaRPr lang="en-US" sz="1300" dirty="0"/>
+          </a:p>
+          <a:p>
             <a:pPr indent="0" marL="0">
-              <a:buNone/>
-            </a:pPr>
-            <a:r>
-              <a:rPr lang="en-US" sz="1250" dirty="0">
-                <a:solidFill>
-                  <a:srgbClr val="FFFFFF"/>
-                </a:solidFill>
-                <a:latin typeface="Calibri" pitchFamily="34" charset="0"/>
-                <a:ea typeface="Calibri" pitchFamily="34" charset="-122"/>
-                <a:cs typeface="Calibri" pitchFamily="34" charset="-120"/>
-              </a:rPr>
-              <a:t>financial_health_score is a wellbeing measure — never used to deny credit, cut a limit, or block an account.</a:t>
+              <a:spcAft>
+                <a:spcPts val="500"/>
+              </a:spcAft>
+              <a:buNone/>
+            </a:pPr>
+            <a:r>
+              <a:rPr lang="en-US" sz="1100" dirty="0">
+                <a:solidFill>
+                  <a:srgbClr val="1B2A36"/>
+                </a:solidFill>
+                <a:latin typeface="Calibri" pitchFamily="34" charset="0"/>
+                <a:ea typeface="Calibri" pitchFamily="34" charset="-122"/>
+                <a:cs typeface="Calibri" pitchFamily="34" charset="-120"/>
+              </a:rPr>
+              <a:t>✓  0 missing cells · 0 duplicate transaction IDs · 0 duplicate consumer-months</a:t>
             </a:r>
             <a:endParaRPr lang="en-US" sz="1300" dirty="0"/>
           </a:p>
-        </p:txBody>
-      </p:sp>
-      <p:sp>
-        <p:nvSpPr>
-          <p:cNvPr id="19" name="Text 17"/>
+          <a:p>
+            <a:pPr indent="0" marL="0">
+              <a:spcAft>
+                <a:spcPts val="500"/>
+              </a:spcAft>
+              <a:buNone/>
+            </a:pPr>
+            <a:r>
+              <a:rPr lang="en-US" sz="1100" dirty="0">
+                <a:solidFill>
+                  <a:srgbClr val="1B2A36"/>
+                </a:solidFill>
+                <a:latin typeface="Calibri" pitchFamily="34" charset="0"/>
+                <a:ea typeface="Calibri" pitchFamily="34" charset="-122"/>
+                <a:cs typeface="Calibri" pitchFamily="34" charset="-120"/>
+              </a:rPr>
+              <a:t>✓  0 negative amounts · every timestamp inside 2025</a:t>
+            </a:r>
+            <a:endParaRPr lang="en-US" sz="1300" dirty="0"/>
+          </a:p>
+          <a:p>
+            <a:pPr indent="0" marL="0">
+              <a:spcAft>
+                <a:spcPts val="500"/>
+              </a:spcAft>
+              <a:buNone/>
+            </a:pPr>
+            <a:r>
+              <a:rPr lang="en-US" sz="1100" dirty="0">
+                <a:solidFill>
+                  <a:srgbClr val="1B2A36"/>
+                </a:solidFill>
+                <a:latin typeface="Calibri" pitchFamily="34" charset="0"/>
+                <a:ea typeface="Calibri" pitchFamily="34" charset="-122"/>
+                <a:cs typeface="Calibri" pitchFamily="34" charset="-120"/>
+              </a:rPr>
+              <a:t>✓  1 name + birth date per consumer; 1 name per merchant</a:t>
+            </a:r>
+            <a:endParaRPr lang="en-US" sz="1300" dirty="0"/>
+          </a:p>
+          <a:p>
+            <a:pPr indent="0" marL="0">
+              <a:spcAft>
+                <a:spcPts val="500"/>
+              </a:spcAft>
+              <a:buNone/>
+            </a:pPr>
+            <a:r>
+              <a:rPr lang="en-US" sz="1100" dirty="0">
+                <a:solidFill>
+                  <a:srgbClr val="1B2A36"/>
+                </a:solidFill>
+                <a:latin typeface="Calibri" pitchFamily="34" charset="0"/>
+                <a:ea typeface="Calibri" pitchFamily="34" charset="-122"/>
+                <a:cs typeface="Calibri" pitchFamily="34" charset="-120"/>
+              </a:rPr>
+              <a:t>✓  Transactions reconcile 100% to monthly total_spend (10,992 / 10,992)</a:t>
+            </a:r>
+            <a:endParaRPr lang="en-US" sz="1300" dirty="0"/>
+          </a:p>
+          <a:p>
+            <a:pPr indent="0" marL="0">
+              <a:spcAft>
+                <a:spcPts val="500"/>
+              </a:spcAft>
+              <a:buNone/>
+            </a:pPr>
+            <a:r>
+              <a:rPr lang="en-US" sz="1100" dirty="0">
+                <a:solidFill>
+                  <a:srgbClr val="1B2A36"/>
+                </a:solidFill>
+                <a:latin typeface="Calibri" pitchFamily="34" charset="0"/>
+                <a:ea typeface="Calibri" pitchFamily="34" charset="-122"/>
+                <a:cs typeface="Calibri" pitchFamily="34" charset="-120"/>
+              </a:rPr>
+              <a:t>✓  10,992 of 11,988 possible consumer-months present (1–12 each)</a:t>
+            </a:r>
+            <a:endParaRPr lang="en-US" sz="1300" dirty="0"/>
+          </a:p>
+          <a:p>
+            <a:pPr indent="0" marL="0">
+              <a:spcAft>
+                <a:spcPts val="500"/>
+              </a:spcAft>
+              <a:buNone/>
+            </a:pPr>
+            <a:r>
+              <a:rPr lang="en-US" sz="1100" dirty="0">
+                <a:solidFill>
+                  <a:srgbClr val="1B2A36"/>
+                </a:solidFill>
+                <a:latin typeface="Calibri" pitchFamily="34" charset="0"/>
+                <a:ea typeface="Calibri" pitchFamily="34" charset="-122"/>
+                <a:cs typeface="Calibri" pitchFamily="34" charset="-120"/>
+              </a:rPr>
+              <a:t>✓  5 over-limit months (utilization 1.03–1.5, all FHS &lt; 35) kept as real behaviour</a:t>
+            </a:r>
+            <a:endParaRPr lang="en-US" sz="1300" dirty="0"/>
+          </a:p>
+          <a:p>
+            <a:pPr indent="0" marL="0">
+              <a:spcAft>
+                <a:spcPts val="500"/>
+              </a:spcAft>
+              <a:buNone/>
+            </a:pPr>
+            <a:r>
+              <a:rPr lang="en-US" sz="1100" dirty="0">
+                <a:solidFill>
+                  <a:srgbClr val="1B2A36"/>
+                </a:solidFill>
+                <a:latin typeface="Calibri" pitchFamily="34" charset="0"/>
+                <a:ea typeface="Calibri" pitchFamily="34" charset="-122"/>
+                <a:cs typeface="Calibri" pitchFamily="34" charset="-120"/>
+              </a:rPr>
+              <a:t>⚠  Caveat (case §12): two source years folded onto 2025 → volumes inflated; ratios are the signal</a:t>
+            </a:r>
+            <a:endParaRPr lang="en-US" sz="1300" dirty="0"/>
+          </a:p>
+        </p:txBody>
+      </p:sp>
+      <p:sp>
+        <p:nvSpPr>
+          <p:cNvPr id="21" name="Text 19"/>
           <p:cNvSpPr txBox="1"/>
           <p:nvPr/>
         </p:nvSpPr>
@@ -9725,7 +12826,7 @@
       </p:sp>
       <p:sp>
         <p:nvSpPr>
-          <p:cNvPr id="20" name="Text 18"/>
+          <p:cNvPr id="22" name="Text 20"/>
           <p:cNvSpPr txBox="1"/>
           <p:nvPr/>
         </p:nvSpPr>
@@ -9827,7 +12928,7 @@
                 <a:ea typeface="Calibri" pitchFamily="34" charset="-122"/>
                 <a:cs typeface="Calibri" pitchFamily="34" charset="-120"/>
               </a:rPr>
-              <a:t>TASK 1 · EDA</a:t>
+              <a:t>TASK 1 · EDA · Q1</a:t>
             </a:r>
             <a:endParaRPr lang="en-US" sz="1100" dirty="0"/>
           </a:p>
@@ -9883,8 +12984,8 @@
         </p:nvSpPr>
         <p:spPr>
           <a:xfrm>
-            <a:off x="457200" y="1600200"/>
-            <a:ext cx="5760720" cy="3200400"/>
+            <a:off x="457200" y="1554480"/>
+            <a:ext cx="5760720" cy="4572000"/>
           </a:xfrm>
           <a:prstGeom prst="rect">
             <a:avLst/>
@@ -9898,13 +12999,13 @@
           <a:p>
             <a:pPr marL="177800" indent="-177800">
               <a:spcAft>
-                <a:spcPts val="800"/>
+                <a:spcPts val="700"/>
               </a:spcAft>
               <a:buSzPct val="100000"/>
               <a:buChar char="•"/>
             </a:pPr>
             <a:r>
-              <a:rPr lang="en-US" sz="1400" dirty="0">
+              <a:rPr lang="en-US" sz="1300" dirty="0">
                 <a:solidFill>
                   <a:srgbClr val="1B2A36"/>
                 </a:solidFill>
@@ -9912,20 +13013,20 @@
                 <a:ea typeface="Calibri" pitchFamily="34" charset="-122"/>
                 <a:cs typeface="Calibri" pitchFamily="34" charset="-120"/>
               </a:rPr>
-              <a:t>Dec = 488B VND = 15.0% of the 3.24T annual — 2.8× the Feb trough.</a:t>
-            </a:r>
-            <a:endParaRPr lang="en-US" sz="1400" dirty="0"/>
+              <a:t>Peak: December = 488.0B VND = 15.04% of the 3.24T annual spend. Trough: February = 174.4B VND = 5.37% → December is 2.8× February.</a:t>
+            </a:r>
+            <a:endParaRPr lang="en-US" sz="1300" dirty="0"/>
           </a:p>
           <a:p>
             <a:pPr marL="177800" indent="-177800">
               <a:spcAft>
-                <a:spcPts val="800"/>
+                <a:spcPts val="700"/>
               </a:spcAft>
               <a:buSzPct val="100000"/>
               <a:buChar char="•"/>
             </a:pPr>
             <a:r>
-              <a:rPr lang="en-US" sz="1400" dirty="0">
+              <a:rPr lang="en-US" sz="1300" dirty="0">
                 <a:solidFill>
                   <a:srgbClr val="1B2A36"/>
                 </a:solidFill>
@@ -9933,20 +13034,20 @@
                 <a:ea typeface="Calibri" pitchFamily="34" charset="-122"/>
                 <a:cs typeface="Calibri" pitchFamily="34" charset="-120"/>
               </a:rPr>
-              <a:t>Peak is frequency: transaction count +187%, avg ticket −2.6%.</a:t>
-            </a:r>
-            <a:endParaRPr lang="en-US" sz="1400" dirty="0"/>
+              <a:t>Decomposition: transaction count +187% peak vs trough, while the average ticket falls 2.6% (1.74M vs 1.79M VND).</a:t>
+            </a:r>
+            <a:endParaRPr lang="en-US" sz="1300" dirty="0"/>
           </a:p>
           <a:p>
             <a:pPr marL="177800" indent="-177800">
               <a:spcAft>
-                <a:spcPts val="800"/>
+                <a:spcPts val="700"/>
               </a:spcAft>
               <a:buSzPct val="100000"/>
               <a:buChar char="•"/>
             </a:pPr>
             <a:r>
-              <a:rPr lang="en-US" sz="1400" dirty="0">
+              <a:rPr lang="en-US" sz="1300" dirty="0">
                 <a:solidFill>
                   <a:srgbClr val="1B2A36"/>
                 </a:solidFill>
@@ -9954,20 +13055,20 @@
                 <a:ea typeface="Calibri" pitchFamily="34" charset="-122"/>
                 <a:cs typeface="Calibri" pitchFamily="34" charset="-120"/>
               </a:rPr>
-              <a:t>The uplift is uniform: all 14 categories grow +181% to +193% — no single category drives it.</a:t>
-            </a:r>
-            <a:endParaRPr lang="en-US" sz="1400" dirty="0"/>
+              <a:t>The uplift is uniform — all 14 categories grow +181% to +193%; no single category drives it.</a:t>
+            </a:r>
+            <a:endParaRPr lang="en-US" sz="1300" dirty="0"/>
           </a:p>
           <a:p>
             <a:pPr marL="177800" indent="-177800">
               <a:spcAft>
-                <a:spcPts val="800"/>
+                <a:spcPts val="700"/>
               </a:spcAft>
               <a:buSzPct val="100000"/>
               <a:buChar char="•"/>
             </a:pPr>
             <a:r>
-              <a:rPr lang="en-US" sz="1400" dirty="0">
+              <a:rPr lang="en-US" sz="1300" dirty="0">
                 <a:solidFill>
                   <a:srgbClr val="1B2A36"/>
                 </a:solidFill>
@@ -9975,9 +13076,9 @@
                 <a:ea typeface="Calibri" pitchFamily="34" charset="-122"/>
                 <a:cs typeface="Calibri" pitchFamily="34" charset="-120"/>
               </a:rPr>
-              <a:t>Scale capacity, fraud monitoring &amp; campaigns to volume, not basket size.</a:t>
-            </a:r>
-            <a:endParaRPr lang="en-US" sz="1400" dirty="0"/>
+              <a:t>Behaviour: customers buy more often, not pricier (year-end / Tết preparation) → scale capacity, fraud monitoring and campaigns to volume, not basket size.</a:t>
+            </a:r>
+            <a:endParaRPr lang="en-US" sz="1300" dirty="0"/>
           </a:p>
         </p:txBody>
       </p:sp>
@@ -9997,7 +13098,7 @@
         <p:spPr>
           <a:xfrm>
             <a:off x="6446520" y="1554480"/>
-            <a:ext cx="5303520" cy="4206240"/>
+            <a:ext cx="5303520" cy="4023360"/>
           </a:xfrm>
           <a:prstGeom prst="rect">
             <a:avLst/>
@@ -10012,8 +13113,8 @@
         </p:nvSpPr>
         <p:spPr>
           <a:xfrm>
-            <a:off x="6446520" y="5852160"/>
-            <a:ext cx="5303520" cy="548640"/>
+            <a:off x="6446520" y="5623560"/>
+            <a:ext cx="5303520" cy="256032"/>
           </a:xfrm>
           <a:prstGeom prst="rect">
             <a:avLst/>
@@ -10029,7 +13130,7 @@
               <a:buNone/>
             </a:pPr>
             <a:r>
-              <a:rPr lang="en-US" sz="1000" i="1" dirty="0">
+              <a:rPr lang="en-US" sz="850" i="1" dirty="0">
                 <a:solidFill>
                   <a:srgbClr val="5F7180"/>
                 </a:solidFill>
@@ -10037,15 +13138,54 @@
                 <a:ea typeface="Calibri" pitchFamily="34" charset="-122"/>
                 <a:cs typeface="Calibri" pitchFamily="34" charset="-120"/>
               </a:rPr>
-              <a:t>⚠  All timestamps are 2025; the uniform uplift looks like a synthetic seasonal multiplier — treat 15% as directional.</a:t>
-            </a:r>
-            <a:endParaRPr lang="en-US" sz="1000" dirty="0"/>
+              <a:t>Source: consumer_transactions_2025 — 1,852,394 transactions, 2025.</a:t>
+            </a:r>
+            <a:endParaRPr lang="en-US" sz="850" dirty="0"/>
           </a:p>
         </p:txBody>
       </p:sp>
       <p:sp>
         <p:nvSpPr>
           <p:cNvPr id="7" name="Text 4"/>
+          <p:cNvSpPr txBox="1"/>
+          <p:nvPr/>
+        </p:nvSpPr>
+        <p:spPr>
+          <a:xfrm>
+            <a:off x="6446520" y="5897880"/>
+            <a:ext cx="5303520" cy="502920"/>
+          </a:xfrm>
+          <a:prstGeom prst="rect">
+            <a:avLst/>
+          </a:prstGeom>
+          <a:noFill/>
+          <a:ln/>
+        </p:spPr>
+        <p:txBody>
+          <a:bodyPr wrap="square" lIns="0" tIns="0" rIns="0" bIns="0" rtlCol="0" anchor="t"/>
+          <a:lstStyle/>
+          <a:p>
+            <a:pPr indent="0" marL="0">
+              <a:buNone/>
+            </a:pPr>
+            <a:r>
+              <a:rPr lang="en-US" sz="950" i="1" dirty="0">
+                <a:solidFill>
+                  <a:srgbClr val="5F7180"/>
+                </a:solidFill>
+                <a:latin typeface="Calibri" pitchFamily="34" charset="0"/>
+                <a:ea typeface="Calibri" pitchFamily="34" charset="-122"/>
+                <a:cs typeface="Calibri" pitchFamily="34" charset="-120"/>
+              </a:rPr>
+              <a:t>⚠  Case note §12: two source years folded onto 2025 inflate monthly volume — treat 15% as directional.</a:t>
+            </a:r>
+            <a:endParaRPr lang="en-US" sz="950" dirty="0"/>
+          </a:p>
+        </p:txBody>
+      </p:sp>
+      <p:sp>
+        <p:nvSpPr>
+          <p:cNvPr id="8" name="Text 5"/>
           <p:cNvSpPr txBox="1"/>
           <p:nvPr/>
         </p:nvSpPr>
@@ -10084,7 +13224,7 @@
       </p:sp>
       <p:sp>
         <p:nvSpPr>
-          <p:cNvPr id="8" name="Text 5"/>
+          <p:cNvPr id="9" name="Text 6"/>
           <p:cNvSpPr txBox="1"/>
           <p:nvPr/>
         </p:nvSpPr>
@@ -10186,7 +13326,7 @@
                 <a:ea typeface="Calibri" pitchFamily="34" charset="-122"/>
                 <a:cs typeface="Calibri" pitchFamily="34" charset="-120"/>
               </a:rPr>
-              <a:t>TASK 1 · EDA — THE SPINE</a:t>
+              <a:t>TASK 1 · EDA · Q2 — THE SPINE</a:t>
             </a:r>
             <a:endParaRPr lang="en-US" sz="1100" dirty="0"/>
           </a:p>
@@ -10242,8 +13382,8 @@
         </p:nvSpPr>
         <p:spPr>
           <a:xfrm>
-            <a:off x="457200" y="1463040"/>
-            <a:ext cx="11247120" cy="1508760"/>
+            <a:off x="457200" y="1417320"/>
+            <a:ext cx="11247120" cy="1600200"/>
           </a:xfrm>
           <a:prstGeom prst="rect">
             <a:avLst/>
@@ -10257,13 +13397,13 @@
           <a:p>
             <a:pPr marL="177800" indent="-177800">
               <a:spcAft>
-                <a:spcPts val="800"/>
+                <a:spcPts val="700"/>
               </a:spcAft>
               <a:buSzPct val="100000"/>
               <a:buChar char="•"/>
             </a:pPr>
             <a:r>
-              <a:rPr lang="en-US" sz="1400" dirty="0">
+              <a:rPr lang="en-US" sz="1250" dirty="0">
                 <a:solidFill>
                   <a:srgbClr val="1B2A36"/>
                 </a:solidFill>
@@ -10271,20 +13411,20 @@
                 <a:ea typeface="Calibri" pitchFamily="34" charset="-122"/>
                 <a:cs typeface="Calibri" pitchFamily="34" charset="-120"/>
               </a:rPr>
-              <a:t>Stressed (FHS &lt; 40): 72% discretionary vs healthy (FHS ≥ 80): 40% — the mix inverts completely.</a:t>
-            </a:r>
-            <a:endParaRPr lang="en-US" sz="1400" dirty="0"/>
+              <a:t>Stressed months (FHS &lt; 40; 95 consumer-months, 70 consumers): 28.4% essential / 71.6% discretionary. Healthy months (FHS ≥ 80; 475 months, 303 consumers): 59.5% / 40.5%.</a:t>
+            </a:r>
+            <a:endParaRPr lang="en-US" sz="1250" dirty="0"/>
           </a:p>
           <a:p>
             <a:pPr marL="177800" indent="-177800">
               <a:spcAft>
-                <a:spcPts val="800"/>
+                <a:spcPts val="700"/>
               </a:spcAft>
               <a:buSzPct val="100000"/>
               <a:buChar char="•"/>
             </a:pPr>
             <a:r>
-              <a:rPr lang="en-US" sz="1400" dirty="0">
+              <a:rPr lang="en-US" sz="1250" dirty="0">
                 <a:solidFill>
                   <a:srgbClr val="1B2A36"/>
                 </a:solidFill>
@@ -10292,20 +13432,20 @@
                 <a:ea typeface="Calibri" pitchFamily="34" charset="-122"/>
                 <a:cs typeface="Calibri" pitchFamily="34" charset="-120"/>
               </a:rPr>
-              <a:t>It is a gradient, not a threshold artefact: 72% → 64% → 57% → 54% → 49% → 41% across FHS bands; any cutoff pair keeps the direction (FHS&lt;35 vs ≥85: 74% vs 30%).</a:t>
-            </a:r>
-            <a:endParaRPr lang="en-US" sz="1400" dirty="0"/>
+              <a:t>A gradient, not a threshold artefact: discretionary share 71.6% → 64.2% → 57.3% → 54.4% → 49.2% → 40.6% across FHS bands; every cutoff pair keeps the direction (FHS &lt; 35 vs ≥ 85: 73.5% vs 30.2%).</a:t>
+            </a:r>
+            <a:endParaRPr lang="en-US" sz="1250" dirty="0"/>
           </a:p>
           <a:p>
             <a:pPr marL="177800" indent="-177800">
               <a:spcAft>
-                <a:spcPts val="800"/>
+                <a:spcPts val="700"/>
               </a:spcAft>
               <a:buSzPct val="100000"/>
               <a:buChar char="•"/>
             </a:pPr>
             <a:r>
-              <a:rPr lang="en-US" sz="1400" dirty="0">
+              <a:rPr lang="en-US" sz="1250" dirty="0">
                 <a:solidFill>
                   <a:srgbClr val="1B2A36"/>
                 </a:solidFill>
@@ -10313,9 +13453,9 @@
                 <a:ea typeface="Calibri" pitchFamily="34" charset="-122"/>
                 <a:cs typeface="Calibri" pitchFamily="34" charset="-120"/>
               </a:rPr>
-              <a:t>Highest-leverage help = budgeting visibility on discretionary spend, not credit restriction. This contrast anchors Tasks 4 and 5.</a:t>
-            </a:r>
-            <a:endParaRPr lang="en-US" sz="1400" dirty="0"/>
+              <a:t>Stress re-allocates the budget toward wants, not needs → the non-punitive lever is discretionary-spend visibility, not credit restriction. This anchors Tasks 4–5.</a:t>
+            </a:r>
+            <a:endParaRPr lang="en-US" sz="1250" dirty="0"/>
           </a:p>
         </p:txBody>
       </p:sp>
@@ -10334,8 +13474,8 @@
         </p:blipFill>
         <p:spPr>
           <a:xfrm>
-            <a:off x="502920" y="3063240"/>
-            <a:ext cx="5440680" cy="3200400"/>
+            <a:off x="502920" y="3017520"/>
+            <a:ext cx="5440680" cy="3063240"/>
           </a:xfrm>
           <a:prstGeom prst="rect">
             <a:avLst/>
@@ -10357,8 +13497,8 @@
         </p:blipFill>
         <p:spPr>
           <a:xfrm>
-            <a:off x="6263640" y="3063240"/>
-            <a:ext cx="5440680" cy="3200400"/>
+            <a:off x="6263640" y="3017520"/>
+            <a:ext cx="5440680" cy="3063240"/>
           </a:xfrm>
           <a:prstGeom prst="rect">
             <a:avLst/>
@@ -10368,6 +13508,45 @@
       <p:sp>
         <p:nvSpPr>
           <p:cNvPr id="7" name="Text 3"/>
+          <p:cNvSpPr txBox="1"/>
+          <p:nvPr/>
+        </p:nvSpPr>
+        <p:spPr>
+          <a:xfrm>
+            <a:off x="502920" y="6144768"/>
+            <a:ext cx="11201400" cy="256032"/>
+          </a:xfrm>
+          <a:prstGeom prst="rect">
+            <a:avLst/>
+          </a:prstGeom>
+          <a:noFill/>
+          <a:ln/>
+        </p:spPr>
+        <p:txBody>
+          <a:bodyPr wrap="square" lIns="0" tIns="0" rIns="0" bIns="0" rtlCol="0" anchor="t"/>
+          <a:lstStyle/>
+          <a:p>
+            <a:pPr indent="0" marL="0">
+              <a:buNone/>
+            </a:pPr>
+            <a:r>
+              <a:rPr lang="en-US" sz="850" i="1" dirty="0">
+                <a:solidFill>
+                  <a:srgbClr val="5F7180"/>
+                </a:solidFill>
+                <a:latin typeface="Calibri" pitchFamily="34" charset="0"/>
+                <a:ea typeface="Calibri" pitchFamily="34" charset="-122"/>
+                <a:cs typeface="Calibri" pitchFamily="34" charset="-120"/>
+              </a:rPr>
+              <a:t>Source: consumer_financial_health_engagement_2025 — 10,992 consumer-months, 999 consumers, 2025.</a:t>
+            </a:r>
+            <a:endParaRPr lang="en-US" sz="850" dirty="0"/>
+          </a:p>
+        </p:txBody>
+      </p:sp>
+      <p:sp>
+        <p:nvSpPr>
+          <p:cNvPr id="8" name="Text 4"/>
           <p:cNvSpPr txBox="1"/>
           <p:nvPr/>
         </p:nvSpPr>
@@ -10406,7 +13585,7 @@
       </p:sp>
       <p:sp>
         <p:nvSpPr>
-          <p:cNvPr id="8" name="Text 4"/>
+          <p:cNvPr id="9" name="Text 5"/>
           <p:cNvSpPr txBox="1"/>
           <p:nvPr/>
         </p:nvSpPr>
@@ -10508,7 +13687,7 @@
                 <a:ea typeface="Calibri" pitchFamily="34" charset="-122"/>
                 <a:cs typeface="Calibri" pitchFamily="34" charset="-120"/>
               </a:rPr>
-              <a:t>TASK 1 · EDA</a:t>
+              <a:t>TASK 1 · EDA · Q4 &amp; Q5</a:t>
             </a:r>
             <a:endParaRPr lang="en-US" sz="1100" dirty="0"/>
           </a:p>
@@ -10550,7 +13729,7 @@
                 <a:ea typeface="Cambria" pitchFamily="34" charset="-122"/>
                 <a:cs typeface="Cambria" pitchFamily="34" charset="-120"/>
               </a:rPr>
-              <a:t>Where the signal is NOT: age is flat; categories are habits</a:t>
+              <a:t>Categories: habit vs basket. Age: active 25–34 is weakest — barely</a:t>
             </a:r>
             <a:endParaRPr lang="en-US" sz="2700" dirty="0"/>
           </a:p>
@@ -10564,8 +13743,8 @@
         </p:nvSpPr>
         <p:spPr>
           <a:xfrm>
-            <a:off x="457200" y="1463040"/>
-            <a:ext cx="11247120" cy="1508760"/>
+            <a:off x="457200" y="1417320"/>
+            <a:ext cx="11247120" cy="1600200"/>
           </a:xfrm>
           <a:prstGeom prst="rect">
             <a:avLst/>
@@ -10579,13 +13758,13 @@
           <a:p>
             <a:pPr marL="177800" indent="-177800">
               <a:spcAft>
-                <a:spcPts val="800"/>
+                <a:spcPts val="700"/>
               </a:spcAft>
               <a:buSzPct val="100000"/>
               <a:buChar char="•"/>
             </a:pPr>
             <a:r>
-              <a:rPr lang="en-US" sz="1400" dirty="0">
+              <a:rPr lang="en-US" sz="1250" dirty="0">
                 <a:solidFill>
                   <a:srgbClr val="1B2A36"/>
                 </a:solidFill>
@@ -10593,20 +13772,20 @@
                 <a:ea typeface="Calibri" pitchFamily="34" charset="-122"/>
                 <a:cs typeface="Calibri" pitchFamily="34" charset="-120"/>
               </a:rPr>
-              <a:t>Two shopping rhythms: Fuel = frequent touchpoint (1.59M ticket, bought by 96.8% of consumers); Groceries = 1.8× larger basket, bought by 99.3%.</a:t>
-            </a:r>
-            <a:endParaRPr lang="en-US" sz="1400" dirty="0"/>
+              <a:t>Q4 — top by COUNT: Fuel &amp; Transport, 188,029 transactions, avg ticket 1.59M VND (bought by 96.8% of consumers, 17.3 times per buyer-month). Top by SPEND: in-store Groceries, 513.8B VND, avg ticket 2.92M VND (1.8×) — frequent top-ups vs stock-up baskets.</a:t>
+            </a:r>
+            <a:endParaRPr lang="en-US" sz="1250" dirty="0"/>
           </a:p>
           <a:p>
             <a:pPr marL="177800" indent="-177800">
               <a:spcAft>
-                <a:spcPts val="800"/>
+                <a:spcPts val="700"/>
               </a:spcAft>
               <a:buSzPct val="100000"/>
               <a:buChar char="•"/>
             </a:pPr>
             <a:r>
-              <a:rPr lang="en-US" sz="1400" dirty="0">
+              <a:rPr lang="en-US" sz="1250" dirty="0">
                 <a:solidFill>
                   <a:srgbClr val="1B2A36"/>
                 </a:solidFill>
@@ -10614,20 +13793,20 @@
                 <a:ea typeface="Calibri" pitchFamily="34" charset="-122"/>
                 <a:cs typeface="Calibri" pitchFamily="34" charset="-120"/>
               </a:rPr>
-              <a:t>25–34 has the lowest point estimate (FHS 65.8, highest spend/income 0.716) — but bootstrap 95% CIs of all six age cohorts overlap (65.8–67.0).</a:t>
-            </a:r>
-            <a:endParaRPr lang="en-US" sz="1400" dirty="0"/>
+              <a:t>Q5 — 25–34 is active (178.7 transactions/month, above the cohort median 177.8) with the lowest FHS 65.8 (best 67.0). Drivers: highest spend-to-income 0.716 (national 0.700) with a below-average essential ratio 0.468 (national 0.481) → overspend on wants.</a:t>
+            </a:r>
+            <a:endParaRPr lang="en-US" sz="1250" dirty="0"/>
           </a:p>
           <a:p>
             <a:pPr marL="177800" indent="-177800">
               <a:spcAft>
-                <a:spcPts val="800"/>
+                <a:spcPts val="700"/>
               </a:spcAft>
               <a:buSzPct val="100000"/>
               <a:buChar char="•"/>
             </a:pPr>
             <a:r>
-              <a:rPr lang="en-US" sz="1400" dirty="0">
+              <a:rPr lang="en-US" sz="1250" dirty="0">
                 <a:solidFill>
                   <a:srgbClr val="1B2A36"/>
                 </a:solidFill>
@@ -10635,9 +13814,9 @@
                 <a:ea typeface="Calibri" pitchFamily="34" charset="-122"/>
                 <a:cs typeface="Calibri" pitchFamily="34" charset="-120"/>
               </a:rPr>
-              <a:t>Age does not separate financial health → target behavioural ratios, not birth year.</a:t>
-            </a:r>
-            <a:endParaRPr lang="en-US" sz="1400" dirty="0"/>
+              <a:t>But bootstrap 95% CIs of all six cohorts overlap (65.8–67.0): age is a weak differentiator — target the ratios, not birth year.</a:t>
+            </a:r>
+            <a:endParaRPr lang="en-US" sz="1250" dirty="0"/>
           </a:p>
         </p:txBody>
       </p:sp>
@@ -10656,8 +13835,8 @@
         </p:blipFill>
         <p:spPr>
           <a:xfrm>
-            <a:off x="502920" y="3063240"/>
-            <a:ext cx="5440680" cy="3200400"/>
+            <a:off x="502920" y="3017520"/>
+            <a:ext cx="5440680" cy="3063240"/>
           </a:xfrm>
           <a:prstGeom prst="rect">
             <a:avLst/>
@@ -10679,8 +13858,8 @@
         </p:blipFill>
         <p:spPr>
           <a:xfrm>
-            <a:off x="6263640" y="3063240"/>
-            <a:ext cx="5440680" cy="3200400"/>
+            <a:off x="6263640" y="3017520"/>
+            <a:ext cx="5440680" cy="3063240"/>
           </a:xfrm>
           <a:prstGeom prst="rect">
             <a:avLst/>
@@ -10690,6 +13869,45 @@
       <p:sp>
         <p:nvSpPr>
           <p:cNvPr id="7" name="Text 3"/>
+          <p:cNvSpPr txBox="1"/>
+          <p:nvPr/>
+        </p:nvSpPr>
+        <p:spPr>
+          <a:xfrm>
+            <a:off x="502920" y="6144768"/>
+            <a:ext cx="11201400" cy="256032"/>
+          </a:xfrm>
+          <a:prstGeom prst="rect">
+            <a:avLst/>
+          </a:prstGeom>
+          <a:noFill/>
+          <a:ln/>
+        </p:spPr>
+        <p:txBody>
+          <a:bodyPr wrap="square" lIns="0" tIns="0" rIns="0" bIns="0" rtlCol="0" anchor="t"/>
+          <a:lstStyle/>
+          <a:p>
+            <a:pPr indent="0" marL="0">
+              <a:buNone/>
+            </a:pPr>
+            <a:r>
+              <a:rPr lang="en-US" sz="850" i="1" dirty="0">
+                <a:solidFill>
+                  <a:srgbClr val="5F7180"/>
+                </a:solidFill>
+                <a:latin typeface="Calibri" pitchFamily="34" charset="0"/>
+                <a:ea typeface="Calibri" pitchFamily="34" charset="-122"/>
+                <a:cs typeface="Calibri" pitchFamily="34" charset="-120"/>
+              </a:rPr>
+              <a:t>Source: consumer_transactions_2025 — 1,852,394 transactions, 2025. Age cohorts: consumer-month file.</a:t>
+            </a:r>
+            <a:endParaRPr lang="en-US" sz="850" dirty="0"/>
+          </a:p>
+        </p:txBody>
+      </p:sp>
+      <p:sp>
+        <p:nvSpPr>
+          <p:cNvPr id="8" name="Text 4"/>
           <p:cNvSpPr txBox="1"/>
           <p:nvPr/>
         </p:nvSpPr>
@@ -10728,7 +13946,7 @@
       </p:sp>
       <p:sp>
         <p:nvSpPr>
-          <p:cNvPr id="8" name="Text 4"/>
+          <p:cNvPr id="9" name="Text 5"/>
           <p:cNvSpPr txBox="1"/>
           <p:nvPr/>
         </p:nvSpPr>
@@ -10830,7 +14048,7 @@
                 <a:ea typeface="Calibri" pitchFamily="34" charset="-122"/>
                 <a:cs typeface="Calibri" pitchFamily="34" charset="-120"/>
               </a:rPr>
-              <a:t>TASK 1 · EDA</a:t>
+              <a:t>TASK 1 · EDA · Q3</a:t>
             </a:r>
             <a:endParaRPr lang="en-US" sz="1100" dirty="0"/>
           </a:p>
@@ -10886,8 +14104,8 @@
         </p:nvSpPr>
         <p:spPr>
           <a:xfrm>
-            <a:off x="457200" y="1600200"/>
-            <a:ext cx="5760720" cy="3200400"/>
+            <a:off x="457200" y="1554480"/>
+            <a:ext cx="5760720" cy="3429000"/>
           </a:xfrm>
           <a:prstGeom prst="rect">
             <a:avLst/>
@@ -10901,13 +14119,13 @@
           <a:p>
             <a:pPr marL="177800" indent="-177800">
               <a:spcAft>
-                <a:spcPts val="800"/>
+                <a:spcPts val="700"/>
               </a:spcAft>
               <a:buSzPct val="100000"/>
               <a:buChar char="•"/>
             </a:pPr>
             <a:r>
-              <a:rPr lang="en-US" sz="1400" dirty="0">
+              <a:rPr lang="en-US" sz="1300" dirty="0">
                 <a:solidFill>
                   <a:srgbClr val="1B2A36"/>
                 </a:solidFill>
@@ -10915,20 +14133,20 @@
                 <a:ea typeface="Calibri" pitchFamily="34" charset="-122"/>
                 <a:cs typeface="Calibri" pitchFamily="34" charset="-120"/>
               </a:rPr>
-              <a:t>5 high-spend provinces with below-average digital share: Ha Noi, Dong Nai, Lam Dong, Hung Yen, Hai Phong.</a:t>
-            </a:r>
-            <a:endParaRPr lang="en-US" sz="1400" dirty="0"/>
+              <a:t>5 provinces with above-median spend but below-average digital share: Ha Noi, Dong Nai, Lam Dong, Hung Yen, Hai Phong.</a:t>
+            </a:r>
+            <a:endParaRPr lang="en-US" sz="1300" dirty="0"/>
           </a:p>
           <a:p>
             <a:pPr marL="177800" indent="-177800">
               <a:spcAft>
-                <a:spcPts val="800"/>
+                <a:spcPts val="700"/>
               </a:spcAft>
               <a:buSzPct val="100000"/>
               <a:buChar char="•"/>
             </a:pPr>
             <a:r>
-              <a:rPr lang="en-US" sz="1400" dirty="0">
+              <a:rPr lang="en-US" sz="1300" dirty="0">
                 <a:solidFill>
                   <a:srgbClr val="1B2A36"/>
                 </a:solidFill>
@@ -10936,20 +14154,20 @@
                 <a:ea typeface="Calibri" pitchFamily="34" charset="-122"/>
                 <a:cs typeface="Calibri" pitchFamily="34" charset="-120"/>
               </a:rPr>
-              <a:t>POS 58.9–59.3% of transactions vs 58.8% nationally; QR ~20%, E-com ~8.5%, Mobile ~7.5%, Recurring ~5%.</a:t>
-            </a:r>
-            <a:endParaRPr lang="en-US" sz="1400" dirty="0"/>
+              <a:t>Channel breakdown (share of transactions): POS 58.9–59.3% vs 58.8% nationally · QR ~19.8–20.1% · E-commerce ~8.5% · Mobile ~7.5% · Recurring ~5%.</a:t>
+            </a:r>
+            <a:endParaRPr lang="en-US" sz="1300" dirty="0"/>
           </a:p>
           <a:p>
             <a:pPr marL="177800" indent="-177800">
               <a:spcAft>
-                <a:spcPts val="800"/>
+                <a:spcPts val="700"/>
               </a:spcAft>
               <a:buSzPct val="100000"/>
               <a:buChar char="•"/>
             </a:pPr>
             <a:r>
-              <a:rPr lang="en-US" sz="1400" dirty="0">
+              <a:rPr lang="en-US" sz="1300" dirty="0">
                 <a:solidFill>
                   <a:srgbClr val="1B2A36"/>
                 </a:solidFill>
@@ -10957,20 +14175,20 @@
                 <a:ea typeface="Calibri" pitchFamily="34" charset="-122"/>
                 <a:cs typeface="Calibri" pitchFamily="34" charset="-120"/>
               </a:rPr>
-              <a:t>Largest digital gap: −0.46pp (Dong Nai); digital value share 40.9–41.5% vs 41.5%.</a:t>
-            </a:r>
-            <a:endParaRPr lang="en-US" sz="1400" dirty="0"/>
+              <a:t>Largest digital gap: −0.46pp (Dong Nai); digital share of value 40.9–41.5% vs 41.5% nationally.</a:t>
+            </a:r>
+            <a:endParaRPr lang="en-US" sz="1300" dirty="0"/>
           </a:p>
           <a:p>
             <a:pPr marL="177800" indent="-177800">
               <a:spcAft>
-                <a:spcPts val="800"/>
+                <a:spcPts val="700"/>
               </a:spcAft>
               <a:buSzPct val="100000"/>
               <a:buChar char="•"/>
             </a:pPr>
             <a:r>
-              <a:rPr lang="en-US" sz="1400" dirty="0">
+              <a:rPr lang="en-US" sz="1300" dirty="0">
                 <a:solidFill>
                   <a:srgbClr val="1B2A36"/>
                 </a:solidFill>
@@ -10978,9 +14196,9 @@
                 <a:ea typeface="Calibri" pitchFamily="34" charset="-122"/>
                 <a:cs typeface="Calibri" pitchFamily="34" charset="-120"/>
               </a:rPr>
-              <a:t>The gap is real but commercially negligible → province is not a lever for digital adoption.</a:t>
-            </a:r>
-            <a:endParaRPr lang="en-US" sz="1400" dirty="0"/>
+              <a:t>The gap is statistically real but commercially negligible → province is not a lever for digital adoption; behaviour is.</a:t>
+            </a:r>
+            <a:endParaRPr lang="en-US" sz="1300" dirty="0"/>
           </a:p>
         </p:txBody>
       </p:sp>
@@ -11000,7 +14218,7 @@
         <p:spPr>
           <a:xfrm>
             <a:off x="6446520" y="1554480"/>
-            <a:ext cx="5303520" cy="4206240"/>
+            <a:ext cx="5303520" cy="4023360"/>
           </a:xfrm>
           <a:prstGeom prst="rect">
             <a:avLst/>
@@ -11009,18 +14227,57 @@
       </p:pic>
       <p:sp>
         <p:nvSpPr>
-          <p:cNvPr id="6" name="Shape 3"/>
+          <p:cNvPr id="6" name="Text 3"/>
+          <p:cNvSpPr txBox="1"/>
+          <p:nvPr/>
+        </p:nvSpPr>
+        <p:spPr>
+          <a:xfrm>
+            <a:off x="6446520" y="5623560"/>
+            <a:ext cx="5303520" cy="256032"/>
+          </a:xfrm>
+          <a:prstGeom prst="rect">
+            <a:avLst/>
+          </a:prstGeom>
+          <a:noFill/>
+          <a:ln/>
+        </p:spPr>
+        <p:txBody>
+          <a:bodyPr wrap="square" lIns="0" tIns="0" rIns="0" bIns="0" rtlCol="0" anchor="t"/>
+          <a:lstStyle/>
+          <a:p>
+            <a:pPr indent="0" marL="0">
+              <a:buNone/>
+            </a:pPr>
+            <a:r>
+              <a:rPr lang="en-US" sz="850" i="1" dirty="0">
+                <a:solidFill>
+                  <a:srgbClr val="5F7180"/>
+                </a:solidFill>
+                <a:latin typeface="Calibri" pitchFamily="34" charset="0"/>
+                <a:ea typeface="Calibri" pitchFamily="34" charset="-122"/>
+                <a:cs typeface="Calibri" pitchFamily="34" charset="-120"/>
+              </a:rPr>
+              <a:t>Source: consumer_transactions_2025 — 1,852,394 transactions, 2025.</a:t>
+            </a:r>
+            <a:endParaRPr lang="en-US" sz="850" dirty="0"/>
+          </a:p>
+        </p:txBody>
+      </p:sp>
+      <p:sp>
+        <p:nvSpPr>
+          <p:cNvPr id="7" name="Shape 4"/>
           <p:cNvSpPr/>
           <p:nvPr/>
         </p:nvSpPr>
         <p:spPr>
           <a:xfrm>
-            <a:off x="457200" y="5029200"/>
-            <a:ext cx="3383280" cy="1097280"/>
+            <a:off x="457200" y="5074920"/>
+            <a:ext cx="3383280" cy="1051560"/>
           </a:xfrm>
           <a:prstGeom prst="roundRect">
             <a:avLst>
-              <a:gd name="adj" fmla="val 6667"/>
+              <a:gd name="adj" fmla="val 6957"/>
             </a:avLst>
           </a:prstGeom>
           <a:solidFill>
@@ -11031,14 +14288,14 @@
       </p:sp>
       <p:sp>
         <p:nvSpPr>
-          <p:cNvPr id="7" name="Text 4"/>
-          <p:cNvSpPr txBox="1"/>
-          <p:nvPr/>
-        </p:nvSpPr>
-        <p:spPr>
-          <a:xfrm>
-            <a:off x="457200" y="5138928"/>
-            <a:ext cx="3383280" cy="658368"/>
+          <p:cNvPr id="8" name="Text 5"/>
+          <p:cNvSpPr txBox="1"/>
+          <p:nvPr/>
+        </p:nvSpPr>
+        <p:spPr>
+          <a:xfrm>
+            <a:off x="457200" y="5148072"/>
+            <a:ext cx="3383280" cy="621792"/>
           </a:xfrm>
           <a:prstGeom prst="rect">
             <a:avLst/>
@@ -11054,7 +14311,7 @@
               <a:buNone/>
             </a:pPr>
             <a:r>
-              <a:rPr lang="en-US" sz="2800" b="1" dirty="0">
+              <a:rPr lang="en-US" sz="2600" b="1" dirty="0">
                 <a:solidFill>
                   <a:srgbClr val="1FC3A6"/>
                 </a:solidFill>
@@ -11064,20 +14321,20 @@
               </a:rPr>
               <a:t>≤ 0.46pp</a:t>
             </a:r>
-            <a:endParaRPr lang="en-US" sz="2800" dirty="0"/>
-          </a:p>
-        </p:txBody>
-      </p:sp>
-      <p:sp>
-        <p:nvSpPr>
-          <p:cNvPr id="8" name="Text 5"/>
-          <p:cNvSpPr txBox="1"/>
-          <p:nvPr/>
-        </p:nvSpPr>
-        <p:spPr>
-          <a:xfrm>
-            <a:off x="457200" y="5779008"/>
-            <a:ext cx="3383280" cy="320040"/>
+            <a:endParaRPr lang="en-US" sz="2600" dirty="0"/>
+          </a:p>
+        </p:txBody>
+      </p:sp>
+      <p:sp>
+        <p:nvSpPr>
+          <p:cNvPr id="9" name="Text 6"/>
+          <p:cNvSpPr txBox="1"/>
+          <p:nvPr/>
+        </p:nvSpPr>
+        <p:spPr>
+          <a:xfrm>
+            <a:off x="457200" y="5769864"/>
+            <a:ext cx="3383280" cy="301752"/>
           </a:xfrm>
           <a:prstGeom prst="rect">
             <a:avLst/>
@@ -11101,7 +14358,7 @@
                 <a:ea typeface="Calibri" pitchFamily="34" charset="-122"/>
                 <a:cs typeface="Calibri" pitchFamily="34" charset="-120"/>
               </a:rPr>
-              <a:t>largest digital-share gap</a:t>
+              <a:t>largest digital-share gap vs national</a:t>
             </a:r>
             <a:endParaRPr lang="en-US" sz="1100" dirty="0"/>
           </a:p>
@@ -11109,7 +14366,7 @@
       </p:sp>
       <p:sp>
         <p:nvSpPr>
-          <p:cNvPr id="9" name="Text 6"/>
+          <p:cNvPr id="10" name="Text 7"/>
           <p:cNvSpPr txBox="1"/>
           <p:nvPr/>
         </p:nvSpPr>
@@ -11148,7 +14405,7 @@
       </p:sp>
       <p:sp>
         <p:nvSpPr>
-          <p:cNvPr id="10" name="Text 7"/>
+          <p:cNvPr id="11" name="Text 8"/>
           <p:cNvSpPr txBox="1"/>
           <p:nvPr/>
         </p:nvSpPr>
@@ -11250,7 +14507,7 @@
                 <a:ea typeface="Calibri" pitchFamily="34" charset="-122"/>
                 <a:cs typeface="Calibri" pitchFamily="34" charset="-120"/>
               </a:rPr>
-              <a:t>TASK 2 · FINANCIAL HEALTH</a:t>
+              <a:t>TASK 2 · FINANCIAL HEALTH · D1</a:t>
             </a:r>
             <a:endParaRPr lang="en-US" sz="1100" dirty="0"/>
           </a:p>
@@ -11306,8 +14563,8 @@
         </p:nvSpPr>
         <p:spPr>
           <a:xfrm>
-            <a:off x="457200" y="1600200"/>
-            <a:ext cx="5760720" cy="3200400"/>
+            <a:off x="457200" y="1554480"/>
+            <a:ext cx="5760720" cy="4572000"/>
           </a:xfrm>
           <a:prstGeom prst="rect">
             <a:avLst/>
@@ -11321,13 +14578,13 @@
           <a:p>
             <a:pPr marL="177800" indent="-177800">
               <a:spcAft>
-                <a:spcPts val="800"/>
+                <a:spcPts val="700"/>
               </a:spcAft>
               <a:buSzPct val="100000"/>
               <a:buChar char="•"/>
             </a:pPr>
             <a:r>
-              <a:rPr lang="en-US" sz="1400" dirty="0">
+              <a:rPr lang="en-US" sz="1300" dirty="0">
                 <a:solidFill>
                   <a:srgbClr val="1B2A36"/>
                 </a:solidFill>
@@ -11335,20 +14592,20 @@
                 <a:ea typeface="Calibri" pitchFamily="34" charset="-122"/>
                 <a:cs typeface="Calibri" pitchFamily="34" charset="-120"/>
               </a:rPr>
-              <a:t>Consumer-level FHS: mean 66.3, range 42–81 — a narrow band with a mild low tail.</a:t>
-            </a:r>
-            <a:endParaRPr lang="en-US" sz="1400" dirty="0"/>
+              <a:t>Consumer level (n = 999): mean 66.3, median 66.2, std 4.7, IQR 63.4–69.3, range 42.3–80.8, skew −0.32 (mild low tail).</a:t>
+            </a:r>
+            <a:endParaRPr lang="en-US" sz="1300" dirty="0"/>
           </a:p>
           <a:p>
             <a:pPr marL="177800" indent="-177800">
               <a:spcAft>
-                <a:spcPts val="800"/>
+                <a:spcPts val="700"/>
               </a:spcAft>
               <a:buSzPct val="100000"/>
               <a:buChar char="•"/>
             </a:pPr>
             <a:r>
-              <a:rPr lang="en-US" sz="1400" dirty="0">
+              <a:rPr lang="en-US" sz="1300" dirty="0">
                 <a:solidFill>
                   <a:srgbClr val="1B2A36"/>
                 </a:solidFill>
@@ -11356,20 +14613,20 @@
                 <a:ea typeface="Calibri" pitchFamily="34" charset="-122"/>
                 <a:cs typeface="Calibri" pitchFamily="34" charset="-120"/>
               </a:rPr>
-              <a:t>Stressed months only 0.9%; 0 of 999 consumers have a 12-month mean below 40.</a:t>
-            </a:r>
-            <a:endParaRPr lang="en-US" sz="1400" dirty="0"/>
+              <a:t>Month level (n = 10,992): std 9.5 — twice the consumer spread. Segments: Stable 72.5% · Watch 22.4% · Healthy 4.3% · Stressed 0.9%.</a:t>
+            </a:r>
+            <a:endParaRPr lang="en-US" sz="1300" dirty="0"/>
           </a:p>
           <a:p>
             <a:pPr marL="177800" indent="-177800">
               <a:spcAft>
-                <a:spcPts val="800"/>
+                <a:spcPts val="700"/>
               </a:spcAft>
               <a:buSzPct val="100000"/>
               <a:buChar char="•"/>
             </a:pPr>
             <a:r>
-              <a:rPr lang="en-US" sz="1400" dirty="0">
+              <a:rPr lang="en-US" sz="1300" dirty="0">
                 <a:solidFill>
                   <a:srgbClr val="1B2A36"/>
                 </a:solidFill>
@@ -11377,20 +14634,20 @@
                 <a:ea typeface="Calibri" pitchFamily="34" charset="-122"/>
                 <a:cs typeface="Calibri" pitchFamily="34" charset="-120"/>
               </a:rPr>
-              <a:t>Distress is episodic — healthy people dip in specific months (Feb 73.6 → Dec 54.2).</a:t>
-            </a:r>
-            <a:endParaRPr lang="en-US" sz="1400" dirty="0"/>
+              <a:t>0 of 999 consumers have a 12-month mean below 40 — stress is episodic: healthy people dip in specific months (Feb 73.6 → Dec 54.2).</a:t>
+            </a:r>
+            <a:endParaRPr lang="en-US" sz="1300" dirty="0"/>
           </a:p>
           <a:p>
             <a:pPr marL="177800" indent="-177800">
               <a:spcAft>
-                <a:spcPts val="800"/>
+                <a:spcPts val="700"/>
               </a:spcAft>
               <a:buSzPct val="100000"/>
               <a:buChar char="•"/>
             </a:pPr>
             <a:r>
-              <a:rPr lang="en-US" sz="1400" dirty="0">
+              <a:rPr lang="en-US" sz="1300" dirty="0">
                 <a:solidFill>
                   <a:srgbClr val="1B2A36"/>
                 </a:solidFill>
@@ -11398,9 +14655,9 @@
                 <a:ea typeface="Calibri" pitchFamily="34" charset="-122"/>
                 <a:cs typeface="Calibri" pitchFamily="34" charset="-120"/>
               </a:rPr>
-              <a:t>Interventions must be event-triggered on the current month, not a static risk list.</a:t>
-            </a:r>
-            <a:endParaRPr lang="en-US" sz="1400" dirty="0"/>
+              <a:t>Implication: trigger help on the current month, not on a static risk list.</a:t>
+            </a:r>
+            <a:endParaRPr lang="en-US" sz="1300" dirty="0"/>
           </a:p>
         </p:txBody>
       </p:sp>
@@ -11420,7 +14677,7 @@
         <p:spPr>
           <a:xfrm>
             <a:off x="6446520" y="1554480"/>
-            <a:ext cx="5303520" cy="4206240"/>
+            <a:ext cx="5303520" cy="4023360"/>
           </a:xfrm>
           <a:prstGeom prst="rect">
             <a:avLst/>
@@ -11430,6 +14687,45 @@
       <p:sp>
         <p:nvSpPr>
           <p:cNvPr id="6" name="Text 3"/>
+          <p:cNvSpPr txBox="1"/>
+          <p:nvPr/>
+        </p:nvSpPr>
+        <p:spPr>
+          <a:xfrm>
+            <a:off x="6446520" y="5623560"/>
+            <a:ext cx="5303520" cy="256032"/>
+          </a:xfrm>
+          <a:prstGeom prst="rect">
+            <a:avLst/>
+          </a:prstGeom>
+          <a:noFill/>
+          <a:ln/>
+        </p:spPr>
+        <p:txBody>
+          <a:bodyPr wrap="square" lIns="0" tIns="0" rIns="0" bIns="0" rtlCol="0" anchor="t"/>
+          <a:lstStyle/>
+          <a:p>
+            <a:pPr indent="0" marL="0">
+              <a:buNone/>
+            </a:pPr>
+            <a:r>
+              <a:rPr lang="en-US" sz="850" i="1" dirty="0">
+                <a:solidFill>
+                  <a:srgbClr val="5F7180"/>
+                </a:solidFill>
+                <a:latin typeface="Calibri" pitchFamily="34" charset="0"/>
+                <a:ea typeface="Calibri" pitchFamily="34" charset="-122"/>
+                <a:cs typeface="Calibri" pitchFamily="34" charset="-120"/>
+              </a:rPr>
+              <a:t>Source: consumer_financial_health_engagement_2025 — 10,992 consumer-months, 999 consumers, 2025.</a:t>
+            </a:r>
+            <a:endParaRPr lang="en-US" sz="850" dirty="0"/>
+          </a:p>
+        </p:txBody>
+      </p:sp>
+      <p:sp>
+        <p:nvSpPr>
+          <p:cNvPr id="7" name="Text 4"/>
           <p:cNvSpPr txBox="1"/>
           <p:nvPr/>
         </p:nvSpPr>
@@ -11468,7 +14764,7 @@
       </p:sp>
       <p:sp>
         <p:nvSpPr>
-          <p:cNvPr id="7" name="Text 4"/>
+          <p:cNvPr id="8" name="Text 5"/>
           <p:cNvSpPr txBox="1"/>
           <p:nvPr/>
         </p:nvSpPr>

--- a/draft/YAPPERS_BI10_R01.pptx
+++ b/draft/YAPPERS_BI10_R01.pptx
@@ -5269,7 +5269,7 @@
                 <a:ea typeface="Calibri" pitchFamily="34" charset="-122"/>
                 <a:cs typeface="Calibri" pitchFamily="34" charset="-120"/>
               </a:rPr>
-              <a:t>Preprocessing: 10,992 consumer-months → 999 consumers (yearly mean of each ratio = typical monthly profile); 0 nulls after aggregation; raw VND excluded.</a:t>
+              <a:t>Preprocessing: 10,992 consumer-months → 999 consumers (yearly mean of each ratio = typical monthly profile); 0 nulls after aggregation; raw VND excluded. The preprocessed dataset (task4_features.csv) and its data dictionary are in the submission ZIP.</a:t>
             </a:r>
             <a:endParaRPr lang="en-US" sz="1200" dirty="0"/>
           </a:p>
@@ -5990,6 +5990,27 @@
                 <a:cs typeface="Calibri" pitchFamily="34" charset="-120"/>
               </a:rPr>
               <a:t>Stability: 20 random seeds → ARI 0.988; 80% bootstrap × 50 → ARI 0.911. Alternative GMM: ARI 0.26 — Emerging Digital identical, the three large segments form one continuum (hence silhouette 0.251).</a:t>
+            </a:r>
+            <a:endParaRPr lang="en-US" sz="1200" dirty="0"/>
+          </a:p>
+          <a:p>
+            <a:pPr marL="177800" indent="-177800">
+              <a:spcAft>
+                <a:spcPts val="700"/>
+              </a:spcAft>
+              <a:buSzPct val="100000"/>
+              <a:buChar char="•"/>
+            </a:pPr>
+            <a:r>
+              <a:rPr lang="en-US" sz="1200" dirty="0">
+                <a:solidFill>
+                  <a:srgbClr val="1B2A36"/>
+                </a:solidFill>
+                <a:latin typeface="Calibri" pitchFamily="34" charset="0"/>
+                <a:ea typeface="Calibri" pitchFamily="34" charset="-122"/>
+                <a:cs typeface="Calibri" pitchFamily="34" charset="-120"/>
+              </a:rPr>
+              <a:t>Rule-based cross-check (2×2 median split of health × engagement): 344 of 351 Healthy and 273 of 302 Stretched customers fall in the matching halves.</a:t>
             </a:r>
             <a:endParaRPr lang="en-US" sz="1200" dirty="0"/>
           </a:p>

--- a/draft/YAPPERS_BI10_R01.pptx
+++ b/draft/YAPPERS_BI10_R01.pptx
@@ -14217,6 +14217,27 @@
                 <a:ea typeface="Calibri" pitchFamily="34" charset="-122"/>
                 <a:cs typeface="Calibri" pitchFamily="34" charset="-120"/>
               </a:rPr>
+              <a:t>Top performers: HCMC leads spend (13.6% of the national total) at 41.3% digital; highest digital share Cao Bang 43.1% (0.5% of spend), lowest Quang Ngai 39.2% — all 34 provinces sit within 3.9pp.</a:t>
+            </a:r>
+            <a:endParaRPr lang="en-US" sz="1300" dirty="0"/>
+          </a:p>
+          <a:p>
+            <a:pPr marL="177800" indent="-177800">
+              <a:spcAft>
+                <a:spcPts val="700"/>
+              </a:spcAft>
+              <a:buSzPct val="100000"/>
+              <a:buChar char="•"/>
+            </a:pPr>
+            <a:r>
+              <a:rPr lang="en-US" sz="1300" dirty="0">
+                <a:solidFill>
+                  <a:srgbClr val="1B2A36"/>
+                </a:solidFill>
+                <a:latin typeface="Calibri" pitchFamily="34" charset="0"/>
+                <a:ea typeface="Calibri" pitchFamily="34" charset="-122"/>
+                <a:cs typeface="Calibri" pitchFamily="34" charset="-120"/>
+              </a:rPr>
               <a:t>The gap is statistically real but commercially negligible → province is not a lever for digital adoption; behaviour is.</a:t>
             </a:r>
             <a:endParaRPr lang="en-US" sz="1300" dirty="0"/>

--- a/draft/YAPPERS_BI10_R01.pptx
+++ b/draft/YAPPERS_BI10_R01.pptx
@@ -699,7 +699,7 @@
           <a:p>
             <a:r>
               <a:rPr lang="en-US" dirty="0"/>
-              <a:t>More than half of every stress episode happens to someone we can reach in-app — and we know when.</a:t>
+              <a:t>Deliverable 3 — the one demographic gap is really a spending gap.</a:t>
             </a:r>
             <a:endParaRPr lang="en-US" dirty="0"/>
           </a:p>
@@ -787,7 +787,7 @@
           <a:p>
             <a:r>
               <a:rPr lang="en-US" dirty="0"/>
-              <a:t>Deliverable 3 — the one demographic gap is really a spending gap.</a:t>
+              <a:t>More than half of every stress episode happens to someone we can reach in-app — and we know when.</a:t>
             </a:r>
             <a:endParaRPr lang="en-US" dirty="0"/>
           </a:p>
@@ -2195,7 +2195,7 @@
           <a:p>
             <a:r>
               <a:rPr lang="en-US" dirty="0"/>
-              <a:t>Answer Q4 and Q5 exactly as asked, then show the honest limit (CI overlap).</a:t>
+              <a:t>Q3 asked for the channel breakdown — every hub has the national mix.</a:t>
             </a:r>
             <a:endParaRPr lang="en-US" dirty="0"/>
           </a:p>
@@ -2283,7 +2283,7 @@
           <a:p>
             <a:r>
               <a:rPr lang="en-US" dirty="0"/>
-              <a:t>Q3 asked for the channel breakdown — every hub has the national mix.</a:t>
+              <a:t>Answer Q4 and Q5 exactly as asked, then show the honest limit (CI overlap).</a:t>
             </a:r>
             <a:endParaRPr lang="en-US" dirty="0"/>
           </a:p>
@@ -3363,7 +3363,7 @@
                 <a:ea typeface="Calibri" pitchFamily="34" charset="-122"/>
                 <a:cs typeface="Calibri" pitchFamily="34" charset="-120"/>
               </a:rPr>
-              <a:t>TASK 2 · FINANCIAL HEALTH · D4</a:t>
+              <a:t>TASK 2 · FINANCIAL HEALTH · D3</a:t>
             </a:r>
             <a:endParaRPr lang="en-US" sz="1100" dirty="0"/>
           </a:p>
@@ -3405,7 +3405,7 @@
                 <a:ea typeface="Cambria" pitchFamily="34" charset="-122"/>
                 <a:cs typeface="Cambria" pitchFamily="34" charset="-120"/>
               </a:rPr>
-              <a:t>The "Stressed but Engaged" crossover — and when to reach it</a:t>
+              <a:t>Who differs? Province and age barely; occupation through spending</a:t>
             </a:r>
             <a:endParaRPr lang="en-US" sz="2700" dirty="0"/>
           </a:p>
@@ -3420,7 +3420,7 @@
         <p:spPr>
           <a:xfrm>
             <a:off x="457200" y="1417320"/>
-            <a:ext cx="11247120" cy="1600200"/>
+            <a:ext cx="11247120" cy="1463040"/>
           </a:xfrm>
           <a:prstGeom prst="rect">
             <a:avLst/>
@@ -3448,7 +3448,7 @@
                 <a:ea typeface="Calibri" pitchFamily="34" charset="-122"/>
                 <a:cs typeface="Calibri" pitchFamily="34" charset="-120"/>
               </a:rPr>
-              <a:t>Reproducible rule (consumer-month): financial_health_score &lt; 40 AND engagement_score ≥ p75 (81.4) → 43 consumers / 49 months = 52% of ALL stress episodes. Robust: p70 / p80 give 44 / 41 consumers (53% / 48%).</a:t>
+              <a:t>Province: 22 of 27 provinces (≥ 15 consumers) have a 95% CI containing the national mean 66.3 (extremes Thai Nguyen 63.0, HCMC 67.6). Age: all six cohort CIs overlap (65.8–67.0).</a:t>
             </a:r>
             <a:endParaRPr lang="en-US" sz="1250" dirty="0"/>
           </a:p>
@@ -3469,7 +3469,7 @@
                 <a:ea typeface="Calibri" pitchFamily="34" charset="-122"/>
                 <a:cs typeface="Calibri" pitchFamily="34" charset="-120"/>
               </a:rPr>
-              <a:t>Profile: spend/income 1.89, credit-utilization 0.55, online share 0.49 (2× national) — active, digital, over-extended.</a:t>
+              <a:t>Occupation (396 raw titles → 8 keyword groups): Engineering/science/IT 69.1 (n = 229), Business/finance 68.7 (126) vs Office/public 64.5 (443), Manual/trades 62.9 (23) — a ~6-pt spread that mirrors spend-to-income (0.60 vs 0.76–0.79).</a:t>
             </a:r>
             <a:endParaRPr lang="en-US" sz="1250" dirty="0"/>
           </a:p>
@@ -3490,7 +3490,7 @@
                 <a:ea typeface="Calibri" pitchFamily="34" charset="-122"/>
                 <a:cs typeface="Calibri" pitchFamily="34" charset="-120"/>
               </a:rPr>
-              <a:t>Timing (transactions): stressed months put 23.5% of spend value into 22–23h vs 8.3% (bigger late tickets, not more: count 11.6% vs 9.7%); Sunday + Monday = 42% vs 34% → alerts Sun–Mon evenings, before 22:00.</a:t>
+              <a:t>Demographics act through the overspend ratio → target the ratio, never the group (fairness).</a:t>
             </a:r>
             <a:endParaRPr lang="en-US" sz="1250" dirty="0"/>
           </a:p>
@@ -3498,7 +3498,7 @@
       </p:sp>
       <p:pic>
         <p:nvPicPr>
-          <p:cNvPr id="5" name="Image 0" descr="D:\BI10GroupYAPPERS\outputs\figures\t2_crossover.png">    </p:cNvPr>
+          <p:cNvPr id="5" name="Image 0" descr="D:\BI10GroupYAPPERS\outputs\figures\t2_demographics.png">    </p:cNvPr>
           <p:cNvPicPr>
             <a:picLocks noChangeAspect="1"/>
           </p:cNvPicPr>
@@ -3511,47 +3511,24 @@
         </p:blipFill>
         <p:spPr>
           <a:xfrm>
-            <a:off x="502920" y="3017520"/>
-            <a:ext cx="5440680" cy="3063240"/>
+            <a:off x="457200" y="2926080"/>
+            <a:ext cx="11247120" cy="3154680"/>
           </a:xfrm>
           <a:prstGeom prst="rect">
             <a:avLst/>
           </a:prstGeom>
         </p:spPr>
       </p:pic>
-      <p:pic>
-        <p:nvPicPr>
-          <p:cNvPr id="6" name="Image 1" descr="D:\BI10GroupYAPPERS\outputs\figures\t2_timing.png">    </p:cNvPr>
-          <p:cNvPicPr>
-            <a:picLocks noChangeAspect="1"/>
-          </p:cNvPicPr>
-          <p:nvPr/>
-        </p:nvPicPr>
-        <p:blipFill>
-          <a:blip r:embed="rId2"/>
-          <a:srcRect l="0" r="0" t="0" b="0"/>
-          <a:stretch/>
-        </p:blipFill>
-        <p:spPr>
-          <a:xfrm>
-            <a:off x="6263640" y="3017520"/>
-            <a:ext cx="5440680" cy="3063240"/>
-          </a:xfrm>
-          <a:prstGeom prst="rect">
-            <a:avLst/>
-          </a:prstGeom>
-        </p:spPr>
-      </p:pic>
-      <p:sp>
-        <p:nvSpPr>
-          <p:cNvPr id="7" name="Text 3"/>
-          <p:cNvSpPr txBox="1"/>
-          <p:nvPr/>
-        </p:nvSpPr>
-        <p:spPr>
-          <a:xfrm>
-            <a:off x="502920" y="6144768"/>
-            <a:ext cx="11201400" cy="256032"/>
+      <p:sp>
+        <p:nvSpPr>
+          <p:cNvPr id="6" name="Text 3"/>
+          <p:cNvSpPr txBox="1"/>
+          <p:nvPr/>
+        </p:nvSpPr>
+        <p:spPr>
+          <a:xfrm>
+            <a:off x="457200" y="6144768"/>
+            <a:ext cx="11247120" cy="256032"/>
           </a:xfrm>
           <a:prstGeom prst="rect">
             <a:avLst/>
@@ -3575,7 +3552,7 @@
                 <a:ea typeface="Calibri" pitchFamily="34" charset="-122"/>
                 <a:cs typeface="Calibri" pitchFamily="34" charset="-120"/>
               </a:rPr>
-              <a:t>Source: consumer_financial_health_engagement_2025 — 10,992 consumer-months, 999 consumers, 2025. Timing: Source: transactions file joined to the consumer-month file on consumer_id + month.</a:t>
+              <a:t>Source: consumer_financial_health_engagement_2025 — 10,992 consumer-months, 999 consumers, 2025.</a:t>
             </a:r>
             <a:endParaRPr lang="en-US" sz="850" dirty="0"/>
           </a:p>
@@ -3583,7 +3560,7 @@
       </p:sp>
       <p:sp>
         <p:nvSpPr>
-          <p:cNvPr id="8" name="Text 4"/>
+          <p:cNvPr id="7" name="Text 4"/>
           <p:cNvSpPr txBox="1"/>
           <p:nvPr/>
         </p:nvSpPr>
@@ -3622,7 +3599,7 @@
       </p:sp>
       <p:sp>
         <p:nvSpPr>
-          <p:cNvPr id="9" name="Text 5"/>
+          <p:cNvPr id="8" name="Text 5"/>
           <p:cNvSpPr txBox="1"/>
           <p:nvPr/>
         </p:nvSpPr>
@@ -3724,7 +3701,7 @@
                 <a:ea typeface="Calibri" pitchFamily="34" charset="-122"/>
                 <a:cs typeface="Calibri" pitchFamily="34" charset="-120"/>
               </a:rPr>
-              <a:t>TASK 2 · FINANCIAL HEALTH · D3</a:t>
+              <a:t>TASK 2 · FINANCIAL HEALTH · D4</a:t>
             </a:r>
             <a:endParaRPr lang="en-US" sz="1100" dirty="0"/>
           </a:p>
@@ -3766,7 +3743,7 @@
                 <a:ea typeface="Cambria" pitchFamily="34" charset="-122"/>
                 <a:cs typeface="Cambria" pitchFamily="34" charset="-120"/>
               </a:rPr>
-              <a:t>Who differs? Province and age barely; occupation through spending</a:t>
+              <a:t>The "Stressed but Engaged" crossover — and when to reach it</a:t>
             </a:r>
             <a:endParaRPr lang="en-US" sz="2700" dirty="0"/>
           </a:p>
@@ -3781,7 +3758,7 @@
         <p:spPr>
           <a:xfrm>
             <a:off x="457200" y="1417320"/>
-            <a:ext cx="11247120" cy="1463040"/>
+            <a:ext cx="11247120" cy="1600200"/>
           </a:xfrm>
           <a:prstGeom prst="rect">
             <a:avLst/>
@@ -3809,7 +3786,7 @@
                 <a:ea typeface="Calibri" pitchFamily="34" charset="-122"/>
                 <a:cs typeface="Calibri" pitchFamily="34" charset="-120"/>
               </a:rPr>
-              <a:t>Province: 22 of 27 provinces (≥ 15 consumers) have a 95% CI containing the national mean 66.3 (extremes Thai Nguyen 63.0, HCMC 67.6). Age: all six cohort CIs overlap (65.8–67.0).</a:t>
+              <a:t>Reproducible rule (consumer-month): financial_health_score &lt; 40 AND engagement_score ≥ p75 (81.4) → 43 consumers / 49 months = 52% of ALL stress episodes. Robust: p70 / p80 give 44 / 41 consumers (53% / 48%).</a:t>
             </a:r>
             <a:endParaRPr lang="en-US" sz="1250" dirty="0"/>
           </a:p>
@@ -3830,7 +3807,7 @@
                 <a:ea typeface="Calibri" pitchFamily="34" charset="-122"/>
                 <a:cs typeface="Calibri" pitchFamily="34" charset="-120"/>
               </a:rPr>
-              <a:t>Occupation (396 raw titles → 8 keyword groups): Engineering/science/IT 69.1 (n = 229), Business/finance 68.7 (126) vs Office/public 64.5 (443), Manual/trades 62.9 (23) — a ~6-pt spread that mirrors spend-to-income (0.60 vs 0.76–0.79).</a:t>
+              <a:t>Profile: spend/income 1.89, credit-utilization 0.55, online share 0.49 (2× national) — active, digital, over-extended.</a:t>
             </a:r>
             <a:endParaRPr lang="en-US" sz="1250" dirty="0"/>
           </a:p>
@@ -3851,7 +3828,7 @@
                 <a:ea typeface="Calibri" pitchFamily="34" charset="-122"/>
                 <a:cs typeface="Calibri" pitchFamily="34" charset="-120"/>
               </a:rPr>
-              <a:t>Demographics act through the overspend ratio → target the ratio, never the group (fairness).</a:t>
+              <a:t>Timing (transactions): stressed months put 23.5% of spend value into 22–23h vs 8.3% (bigger late tickets, not more: count 11.6% vs 9.7%); Sunday + Monday = 42% vs 34% → alerts Sun–Mon evenings, before 22:00.</a:t>
             </a:r>
             <a:endParaRPr lang="en-US" sz="1250" dirty="0"/>
           </a:p>
@@ -3859,7 +3836,7 @@
       </p:sp>
       <p:pic>
         <p:nvPicPr>
-          <p:cNvPr id="5" name="Image 0" descr="D:\BI10GroupYAPPERS\outputs\figures\t2_demographics.png">    </p:cNvPr>
+          <p:cNvPr id="5" name="Image 0" descr="D:\BI10GroupYAPPERS\outputs\figures\t2_crossover.png">    </p:cNvPr>
           <p:cNvPicPr>
             <a:picLocks noChangeAspect="1"/>
           </p:cNvPicPr>
@@ -3872,24 +3849,47 @@
         </p:blipFill>
         <p:spPr>
           <a:xfrm>
-            <a:off x="457200" y="2926080"/>
-            <a:ext cx="11247120" cy="3154680"/>
+            <a:off x="502920" y="3017520"/>
+            <a:ext cx="5440680" cy="3063240"/>
           </a:xfrm>
           <a:prstGeom prst="rect">
             <a:avLst/>
           </a:prstGeom>
         </p:spPr>
       </p:pic>
-      <p:sp>
-        <p:nvSpPr>
-          <p:cNvPr id="6" name="Text 3"/>
-          <p:cNvSpPr txBox="1"/>
-          <p:nvPr/>
-        </p:nvSpPr>
-        <p:spPr>
-          <a:xfrm>
-            <a:off x="457200" y="6144768"/>
-            <a:ext cx="11247120" cy="256032"/>
+      <p:pic>
+        <p:nvPicPr>
+          <p:cNvPr id="6" name="Image 1" descr="D:\BI10GroupYAPPERS\outputs\figures\t2_timing.png">    </p:cNvPr>
+          <p:cNvPicPr>
+            <a:picLocks noChangeAspect="1"/>
+          </p:cNvPicPr>
+          <p:nvPr/>
+        </p:nvPicPr>
+        <p:blipFill>
+          <a:blip r:embed="rId2"/>
+          <a:srcRect l="0" r="0" t="0" b="0"/>
+          <a:stretch/>
+        </p:blipFill>
+        <p:spPr>
+          <a:xfrm>
+            <a:off x="6263640" y="3017520"/>
+            <a:ext cx="5440680" cy="3063240"/>
+          </a:xfrm>
+          <a:prstGeom prst="rect">
+            <a:avLst/>
+          </a:prstGeom>
+        </p:spPr>
+      </p:pic>
+      <p:sp>
+        <p:nvSpPr>
+          <p:cNvPr id="7" name="Text 3"/>
+          <p:cNvSpPr txBox="1"/>
+          <p:nvPr/>
+        </p:nvSpPr>
+        <p:spPr>
+          <a:xfrm>
+            <a:off x="502920" y="6144768"/>
+            <a:ext cx="11201400" cy="256032"/>
           </a:xfrm>
           <a:prstGeom prst="rect">
             <a:avLst/>
@@ -3913,7 +3913,7 @@
                 <a:ea typeface="Calibri" pitchFamily="34" charset="-122"/>
                 <a:cs typeface="Calibri" pitchFamily="34" charset="-120"/>
               </a:rPr>
-              <a:t>Source: consumer_financial_health_engagement_2025 — 10,992 consumer-months, 999 consumers, 2025.</a:t>
+              <a:t>Source: consumer_financial_health_engagement_2025 — 10,992 consumer-months, 999 consumers, 2025. Timing: Source: transactions file joined to the consumer-month file on consumer_id + month.</a:t>
             </a:r>
             <a:endParaRPr lang="en-US" sz="850" dirty="0"/>
           </a:p>
@@ -3921,7 +3921,7 @@
       </p:sp>
       <p:sp>
         <p:nvSpPr>
-          <p:cNvPr id="7" name="Text 4"/>
+          <p:cNvPr id="8" name="Text 4"/>
           <p:cNvSpPr txBox="1"/>
           <p:nvPr/>
         </p:nvSpPr>
@@ -3960,7 +3960,7 @@
       </p:sp>
       <p:sp>
         <p:nvSpPr>
-          <p:cNvPr id="8" name="Text 5"/>
+          <p:cNvPr id="9" name="Text 5"/>
           <p:cNvSpPr txBox="1"/>
           <p:nvPr/>
         </p:nvSpPr>
@@ -13708,7 +13708,7 @@
                 <a:ea typeface="Calibri" pitchFamily="34" charset="-122"/>
                 <a:cs typeface="Calibri" pitchFamily="34" charset="-120"/>
               </a:rPr>
-              <a:t>TASK 1 · EDA · Q4 &amp; Q5</a:t>
+              <a:t>TASK 1 · EDA · Q3</a:t>
             </a:r>
             <a:endParaRPr lang="en-US" sz="1100" dirty="0"/>
           </a:p>
@@ -13750,7 +13750,7 @@
                 <a:ea typeface="Cambria" pitchFamily="34" charset="-122"/>
                 <a:cs typeface="Cambria" pitchFamily="34" charset="-120"/>
               </a:rPr>
-              <a:t>Categories: habit vs basket. Age: active 25–34 is weakest — barely</a:t>
+              <a:t>No regional digital divide: high-spend provinces mirror the nation</a:t>
             </a:r>
             <a:endParaRPr lang="en-US" sz="2700" dirty="0"/>
           </a:p>
@@ -13764,8 +13764,8 @@
         </p:nvSpPr>
         <p:spPr>
           <a:xfrm>
-            <a:off x="457200" y="1417320"/>
-            <a:ext cx="11247120" cy="1600200"/>
+            <a:off x="457200" y="1554480"/>
+            <a:ext cx="5760720" cy="3429000"/>
           </a:xfrm>
           <a:prstGeom prst="rect">
             <a:avLst/>
@@ -13785,7 +13785,7 @@
               <a:buChar char="•"/>
             </a:pPr>
             <a:r>
-              <a:rPr lang="en-US" sz="1250" dirty="0">
+              <a:rPr lang="en-US" sz="1300" dirty="0">
                 <a:solidFill>
                   <a:srgbClr val="1B2A36"/>
                 </a:solidFill>
@@ -13793,9 +13793,9 @@
                 <a:ea typeface="Calibri" pitchFamily="34" charset="-122"/>
                 <a:cs typeface="Calibri" pitchFamily="34" charset="-120"/>
               </a:rPr>
-              <a:t>Q4 — top by COUNT: Fuel &amp; Transport, 188,029 transactions, avg ticket 1.59M VND (bought by 96.8% of consumers, 17.3 times per buyer-month). Top by SPEND: in-store Groceries, 513.8B VND, avg ticket 2.92M VND (1.8×) — frequent top-ups vs stock-up baskets.</a:t>
-            </a:r>
-            <a:endParaRPr lang="en-US" sz="1250" dirty="0"/>
+              <a:t>5 provinces with above-median spend but below-average digital share: Ha Noi, Dong Nai, Lam Dong, Hung Yen, Hai Phong.</a:t>
+            </a:r>
+            <a:endParaRPr lang="en-US" sz="1300" dirty="0"/>
           </a:p>
           <a:p>
             <a:pPr marL="177800" indent="-177800">
@@ -13806,7 +13806,7 @@
               <a:buChar char="•"/>
             </a:pPr>
             <a:r>
-              <a:rPr lang="en-US" sz="1250" dirty="0">
+              <a:rPr lang="en-US" sz="1300" dirty="0">
                 <a:solidFill>
                   <a:srgbClr val="1B2A36"/>
                 </a:solidFill>
@@ -13814,9 +13814,9 @@
                 <a:ea typeface="Calibri" pitchFamily="34" charset="-122"/>
                 <a:cs typeface="Calibri" pitchFamily="34" charset="-120"/>
               </a:rPr>
-              <a:t>Q5 — 25–34 is active (178.7 transactions/month, above the cohort median 177.8) with the lowest FHS 65.8 (best 67.0). Drivers: highest spend-to-income 0.716 (national 0.700) with a below-average essential ratio 0.468 (national 0.481) → overspend on wants.</a:t>
-            </a:r>
-            <a:endParaRPr lang="en-US" sz="1250" dirty="0"/>
+              <a:t>Channel breakdown (share of transactions): POS 58.9–59.3% vs 58.8% nationally · QR ~19.8–20.1% · E-commerce ~8.5% · Mobile ~7.5% · Recurring ~5%.</a:t>
+            </a:r>
+            <a:endParaRPr lang="en-US" sz="1300" dirty="0"/>
           </a:p>
           <a:p>
             <a:pPr marL="177800" indent="-177800">
@@ -13827,7 +13827,7 @@
               <a:buChar char="•"/>
             </a:pPr>
             <a:r>
-              <a:rPr lang="en-US" sz="1250" dirty="0">
+              <a:rPr lang="en-US" sz="1300" dirty="0">
                 <a:solidFill>
                   <a:srgbClr val="1B2A36"/>
                 </a:solidFill>
@@ -13835,15 +13835,57 @@
                 <a:ea typeface="Calibri" pitchFamily="34" charset="-122"/>
                 <a:cs typeface="Calibri" pitchFamily="34" charset="-120"/>
               </a:rPr>
-              <a:t>But bootstrap 95% CIs of all six cohorts overlap (65.8–67.0): age is a weak differentiator — target the ratios, not birth year.</a:t>
-            </a:r>
-            <a:endParaRPr lang="en-US" sz="1250" dirty="0"/>
+              <a:t>Largest digital gap: −0.46pp (Dong Nai); digital share of value 40.9–41.5% vs 41.5% nationally.</a:t>
+            </a:r>
+            <a:endParaRPr lang="en-US" sz="1300" dirty="0"/>
+          </a:p>
+          <a:p>
+            <a:pPr marL="177800" indent="-177800">
+              <a:spcAft>
+                <a:spcPts val="700"/>
+              </a:spcAft>
+              <a:buSzPct val="100000"/>
+              <a:buChar char="•"/>
+            </a:pPr>
+            <a:r>
+              <a:rPr lang="en-US" sz="1300" dirty="0">
+                <a:solidFill>
+                  <a:srgbClr val="1B2A36"/>
+                </a:solidFill>
+                <a:latin typeface="Calibri" pitchFamily="34" charset="0"/>
+                <a:ea typeface="Calibri" pitchFamily="34" charset="-122"/>
+                <a:cs typeface="Calibri" pitchFamily="34" charset="-120"/>
+              </a:rPr>
+              <a:t>Top performers: HCMC leads spend (13.6% of the national total) at 41.3% digital; highest digital share Cao Bang 43.1% (0.5% of spend), lowest Quang Ngai 39.2% — all 34 provinces sit within 3.9pp.</a:t>
+            </a:r>
+            <a:endParaRPr lang="en-US" sz="1300" dirty="0"/>
+          </a:p>
+          <a:p>
+            <a:pPr marL="177800" indent="-177800">
+              <a:spcAft>
+                <a:spcPts val="700"/>
+              </a:spcAft>
+              <a:buSzPct val="100000"/>
+              <a:buChar char="•"/>
+            </a:pPr>
+            <a:r>
+              <a:rPr lang="en-US" sz="1300" dirty="0">
+                <a:solidFill>
+                  <a:srgbClr val="1B2A36"/>
+                </a:solidFill>
+                <a:latin typeface="Calibri" pitchFamily="34" charset="0"/>
+                <a:ea typeface="Calibri" pitchFamily="34" charset="-122"/>
+                <a:cs typeface="Calibri" pitchFamily="34" charset="-120"/>
+              </a:rPr>
+              <a:t>The gap is statistically real but commercially negligible → province is not a lever for digital adoption; behaviour is.</a:t>
+            </a:r>
+            <a:endParaRPr lang="en-US" sz="1300" dirty="0"/>
           </a:p>
         </p:txBody>
       </p:sp>
       <p:pic>
         <p:nvPicPr>
-          <p:cNvPr id="5" name="Image 0" descr="D:\BI10GroupYAPPERS\outputs\figures\t1_category_ticket.png">    </p:cNvPr>
+          <p:cNvPr id="5" name="Image 0" descr="D:\BI10GroupYAPPERS\outputs\figures\t1_province_channel.png">    </p:cNvPr>
           <p:cNvPicPr>
             <a:picLocks noChangeAspect="1"/>
           </p:cNvPicPr>
@@ -13856,47 +13898,24 @@
         </p:blipFill>
         <p:spPr>
           <a:xfrm>
-            <a:off x="502920" y="3017520"/>
-            <a:ext cx="5440680" cy="3063240"/>
+            <a:off x="6446520" y="1554480"/>
+            <a:ext cx="5303520" cy="4023360"/>
           </a:xfrm>
           <a:prstGeom prst="rect">
             <a:avLst/>
           </a:prstGeom>
         </p:spPr>
       </p:pic>
-      <p:pic>
-        <p:nvPicPr>
-          <p:cNvPr id="6" name="Image 1" descr="D:\BI10GroupYAPPERS\outputs\figures\t1_age_cohort.png">    </p:cNvPr>
-          <p:cNvPicPr>
-            <a:picLocks noChangeAspect="1"/>
-          </p:cNvPicPr>
-          <p:nvPr/>
-        </p:nvPicPr>
-        <p:blipFill>
-          <a:blip r:embed="rId2"/>
-          <a:srcRect l="0" r="0" t="0" b="0"/>
-          <a:stretch/>
-        </p:blipFill>
-        <p:spPr>
-          <a:xfrm>
-            <a:off x="6263640" y="3017520"/>
-            <a:ext cx="5440680" cy="3063240"/>
-          </a:xfrm>
-          <a:prstGeom prst="rect">
-            <a:avLst/>
-          </a:prstGeom>
-        </p:spPr>
-      </p:pic>
-      <p:sp>
-        <p:nvSpPr>
-          <p:cNvPr id="7" name="Text 3"/>
-          <p:cNvSpPr txBox="1"/>
-          <p:nvPr/>
-        </p:nvSpPr>
-        <p:spPr>
-          <a:xfrm>
-            <a:off x="502920" y="6144768"/>
-            <a:ext cx="11201400" cy="256032"/>
+      <p:sp>
+        <p:nvSpPr>
+          <p:cNvPr id="6" name="Text 3"/>
+          <p:cNvSpPr txBox="1"/>
+          <p:nvPr/>
+        </p:nvSpPr>
+        <p:spPr>
+          <a:xfrm>
+            <a:off x="6446520" y="5623560"/>
+            <a:ext cx="5303520" cy="256032"/>
           </a:xfrm>
           <a:prstGeom prst="rect">
             <a:avLst/>
@@ -13920,7 +13939,7 @@
                 <a:ea typeface="Calibri" pitchFamily="34" charset="-122"/>
                 <a:cs typeface="Calibri" pitchFamily="34" charset="-120"/>
               </a:rPr>
-              <a:t>Source: consumer_transactions_2025 — 1,852,394 transactions, 2025. Age cohorts: consumer-month file.</a:t>
+              <a:t>Source: consumer_transactions_2025 — 1,852,394 transactions, 2025.</a:t>
             </a:r>
             <a:endParaRPr lang="en-US" sz="850" dirty="0"/>
           </a:p>
@@ -13928,7 +13947,107 @@
       </p:sp>
       <p:sp>
         <p:nvSpPr>
-          <p:cNvPr id="8" name="Text 4"/>
+          <p:cNvPr id="7" name="Shape 4"/>
+          <p:cNvSpPr/>
+          <p:nvPr/>
+        </p:nvSpPr>
+        <p:spPr>
+          <a:xfrm>
+            <a:off x="457200" y="5074920"/>
+            <a:ext cx="3383280" cy="1051560"/>
+          </a:xfrm>
+          <a:prstGeom prst="roundRect">
+            <a:avLst>
+              <a:gd name="adj" fmla="val 6957"/>
+            </a:avLst>
+          </a:prstGeom>
+          <a:solidFill>
+            <a:srgbClr val="12435E"/>
+          </a:solidFill>
+          <a:ln/>
+        </p:spPr>
+      </p:sp>
+      <p:sp>
+        <p:nvSpPr>
+          <p:cNvPr id="8" name="Text 5"/>
+          <p:cNvSpPr txBox="1"/>
+          <p:nvPr/>
+        </p:nvSpPr>
+        <p:spPr>
+          <a:xfrm>
+            <a:off x="457200" y="5148072"/>
+            <a:ext cx="3383280" cy="621792"/>
+          </a:xfrm>
+          <a:prstGeom prst="rect">
+            <a:avLst/>
+          </a:prstGeom>
+          <a:noFill/>
+          <a:ln/>
+        </p:spPr>
+        <p:txBody>
+          <a:bodyPr wrap="square" lIns="0" tIns="0" rIns="0" bIns="0" rtlCol="0" anchor="ctr"/>
+          <a:lstStyle/>
+          <a:p>
+            <a:pPr algn="ctr" indent="0" marL="0">
+              <a:buNone/>
+            </a:pPr>
+            <a:r>
+              <a:rPr lang="en-US" sz="2600" b="1" dirty="0">
+                <a:solidFill>
+                  <a:srgbClr val="1FC3A6"/>
+                </a:solidFill>
+                <a:latin typeface="Cambria" pitchFamily="34" charset="0"/>
+                <a:ea typeface="Cambria" pitchFamily="34" charset="-122"/>
+                <a:cs typeface="Cambria" pitchFamily="34" charset="-120"/>
+              </a:rPr>
+              <a:t>≤ 0.46pp</a:t>
+            </a:r>
+            <a:endParaRPr lang="en-US" sz="2600" dirty="0"/>
+          </a:p>
+        </p:txBody>
+      </p:sp>
+      <p:sp>
+        <p:nvSpPr>
+          <p:cNvPr id="9" name="Text 6"/>
+          <p:cNvSpPr txBox="1"/>
+          <p:nvPr/>
+        </p:nvSpPr>
+        <p:spPr>
+          <a:xfrm>
+            <a:off x="457200" y="5769864"/>
+            <a:ext cx="3383280" cy="301752"/>
+          </a:xfrm>
+          <a:prstGeom prst="rect">
+            <a:avLst/>
+          </a:prstGeom>
+          <a:noFill/>
+          <a:ln/>
+        </p:spPr>
+        <p:txBody>
+          <a:bodyPr wrap="square" lIns="0" tIns="0" rIns="0" bIns="0" rtlCol="0" anchor="ctr"/>
+          <a:lstStyle/>
+          <a:p>
+            <a:pPr algn="ctr" indent="0" marL="0">
+              <a:buNone/>
+            </a:pPr>
+            <a:r>
+              <a:rPr lang="en-US" sz="1100" dirty="0">
+                <a:solidFill>
+                  <a:srgbClr val="FFFFFF"/>
+                </a:solidFill>
+                <a:latin typeface="Calibri" pitchFamily="34" charset="0"/>
+                <a:ea typeface="Calibri" pitchFamily="34" charset="-122"/>
+                <a:cs typeface="Calibri" pitchFamily="34" charset="-120"/>
+              </a:rPr>
+              <a:t>largest digital-share gap vs national</a:t>
+            </a:r>
+            <a:endParaRPr lang="en-US" sz="1100" dirty="0"/>
+          </a:p>
+        </p:txBody>
+      </p:sp>
+      <p:sp>
+        <p:nvSpPr>
+          <p:cNvPr id="10" name="Text 7"/>
           <p:cNvSpPr txBox="1"/>
           <p:nvPr/>
         </p:nvSpPr>
@@ -13967,7 +14086,7 @@
       </p:sp>
       <p:sp>
         <p:nvSpPr>
-          <p:cNvPr id="9" name="Text 5"/>
+          <p:cNvPr id="11" name="Text 8"/>
           <p:cNvSpPr txBox="1"/>
           <p:nvPr/>
         </p:nvSpPr>
@@ -14069,7 +14188,7 @@
                 <a:ea typeface="Calibri" pitchFamily="34" charset="-122"/>
                 <a:cs typeface="Calibri" pitchFamily="34" charset="-120"/>
               </a:rPr>
-              <a:t>TASK 1 · EDA · Q3</a:t>
+              <a:t>TASK 1 · EDA · Q4 &amp; Q5</a:t>
             </a:r>
             <a:endParaRPr lang="en-US" sz="1100" dirty="0"/>
           </a:p>
@@ -14111,7 +14230,7 @@
                 <a:ea typeface="Cambria" pitchFamily="34" charset="-122"/>
                 <a:cs typeface="Cambria" pitchFamily="34" charset="-120"/>
               </a:rPr>
-              <a:t>No regional digital divide: high-spend provinces mirror the nation</a:t>
+              <a:t>Categories: habit vs basket. Age: active 25–34 is weakest — barely</a:t>
             </a:r>
             <a:endParaRPr lang="en-US" sz="2700" dirty="0"/>
           </a:p>
@@ -14125,8 +14244,8 @@
         </p:nvSpPr>
         <p:spPr>
           <a:xfrm>
-            <a:off x="457200" y="1554480"/>
-            <a:ext cx="5760720" cy="3429000"/>
+            <a:off x="457200" y="1417320"/>
+            <a:ext cx="11247120" cy="1600200"/>
           </a:xfrm>
           <a:prstGeom prst="rect">
             <a:avLst/>
@@ -14146,7 +14265,7 @@
               <a:buChar char="•"/>
             </a:pPr>
             <a:r>
-              <a:rPr lang="en-US" sz="1300" dirty="0">
+              <a:rPr lang="en-US" sz="1250" dirty="0">
                 <a:solidFill>
                   <a:srgbClr val="1B2A36"/>
                 </a:solidFill>
@@ -14154,9 +14273,9 @@
                 <a:ea typeface="Calibri" pitchFamily="34" charset="-122"/>
                 <a:cs typeface="Calibri" pitchFamily="34" charset="-120"/>
               </a:rPr>
-              <a:t>5 provinces with above-median spend but below-average digital share: Ha Noi, Dong Nai, Lam Dong, Hung Yen, Hai Phong.</a:t>
-            </a:r>
-            <a:endParaRPr lang="en-US" sz="1300" dirty="0"/>
+              <a:t>Q4 — top by COUNT: Fuel &amp; Transport, 188,029 transactions, avg ticket 1.59M VND (bought by 96.8% of consumers, 17.3 times per buyer-month). Top by SPEND: in-store Groceries, 513.8B VND, avg ticket 2.92M VND (1.8×) — frequent top-ups vs stock-up baskets.</a:t>
+            </a:r>
+            <a:endParaRPr lang="en-US" sz="1250" dirty="0"/>
           </a:p>
           <a:p>
             <a:pPr marL="177800" indent="-177800">
@@ -14167,7 +14286,7 @@
               <a:buChar char="•"/>
             </a:pPr>
             <a:r>
-              <a:rPr lang="en-US" sz="1300" dirty="0">
+              <a:rPr lang="en-US" sz="1250" dirty="0">
                 <a:solidFill>
                   <a:srgbClr val="1B2A36"/>
                 </a:solidFill>
@@ -14175,9 +14294,9 @@
                 <a:ea typeface="Calibri" pitchFamily="34" charset="-122"/>
                 <a:cs typeface="Calibri" pitchFamily="34" charset="-120"/>
               </a:rPr>
-              <a:t>Channel breakdown (share of transactions): POS 58.9–59.3% vs 58.8% nationally · QR ~19.8–20.1% · E-commerce ~8.5% · Mobile ~7.5% · Recurring ~5%.</a:t>
-            </a:r>
-            <a:endParaRPr lang="en-US" sz="1300" dirty="0"/>
+              <a:t>Q5 — 25–34 is active (178.7 transactions/month, above the cohort median 177.8) with the lowest FHS 65.8 (best 67.0). Drivers: highest spend-to-income 0.716 (national 0.700) with a below-average essential ratio 0.468 (national 0.481) → overspend on wants.</a:t>
+            </a:r>
+            <a:endParaRPr lang="en-US" sz="1250" dirty="0"/>
           </a:p>
           <a:p>
             <a:pPr marL="177800" indent="-177800">
@@ -14188,7 +14307,7 @@
               <a:buChar char="•"/>
             </a:pPr>
             <a:r>
-              <a:rPr lang="en-US" sz="1300" dirty="0">
+              <a:rPr lang="en-US" sz="1250" dirty="0">
                 <a:solidFill>
                   <a:srgbClr val="1B2A36"/>
                 </a:solidFill>
@@ -14196,57 +14315,15 @@
                 <a:ea typeface="Calibri" pitchFamily="34" charset="-122"/>
                 <a:cs typeface="Calibri" pitchFamily="34" charset="-120"/>
               </a:rPr>
-              <a:t>Largest digital gap: −0.46pp (Dong Nai); digital share of value 40.9–41.5% vs 41.5% nationally.</a:t>
-            </a:r>
-            <a:endParaRPr lang="en-US" sz="1300" dirty="0"/>
-          </a:p>
-          <a:p>
-            <a:pPr marL="177800" indent="-177800">
-              <a:spcAft>
-                <a:spcPts val="700"/>
-              </a:spcAft>
-              <a:buSzPct val="100000"/>
-              <a:buChar char="•"/>
-            </a:pPr>
-            <a:r>
-              <a:rPr lang="en-US" sz="1300" dirty="0">
-                <a:solidFill>
-                  <a:srgbClr val="1B2A36"/>
-                </a:solidFill>
-                <a:latin typeface="Calibri" pitchFamily="34" charset="0"/>
-                <a:ea typeface="Calibri" pitchFamily="34" charset="-122"/>
-                <a:cs typeface="Calibri" pitchFamily="34" charset="-120"/>
-              </a:rPr>
-              <a:t>Top performers: HCMC leads spend (13.6% of the national total) at 41.3% digital; highest digital share Cao Bang 43.1% (0.5% of spend), lowest Quang Ngai 39.2% — all 34 provinces sit within 3.9pp.</a:t>
-            </a:r>
-            <a:endParaRPr lang="en-US" sz="1300" dirty="0"/>
-          </a:p>
-          <a:p>
-            <a:pPr marL="177800" indent="-177800">
-              <a:spcAft>
-                <a:spcPts val="700"/>
-              </a:spcAft>
-              <a:buSzPct val="100000"/>
-              <a:buChar char="•"/>
-            </a:pPr>
-            <a:r>
-              <a:rPr lang="en-US" sz="1300" dirty="0">
-                <a:solidFill>
-                  <a:srgbClr val="1B2A36"/>
-                </a:solidFill>
-                <a:latin typeface="Calibri" pitchFamily="34" charset="0"/>
-                <a:ea typeface="Calibri" pitchFamily="34" charset="-122"/>
-                <a:cs typeface="Calibri" pitchFamily="34" charset="-120"/>
-              </a:rPr>
-              <a:t>The gap is statistically real but commercially negligible → province is not a lever for digital adoption; behaviour is.</a:t>
-            </a:r>
-            <a:endParaRPr lang="en-US" sz="1300" dirty="0"/>
+              <a:t>But bootstrap 95% CIs of all six cohorts overlap (65.8–67.0): age is a weak differentiator — target the ratios, not birth year.</a:t>
+            </a:r>
+            <a:endParaRPr lang="en-US" sz="1250" dirty="0"/>
           </a:p>
         </p:txBody>
       </p:sp>
       <p:pic>
         <p:nvPicPr>
-          <p:cNvPr id="5" name="Image 0" descr="D:\BI10GroupYAPPERS\outputs\figures\t1_province_channel.png">    </p:cNvPr>
+          <p:cNvPr id="5" name="Image 0" descr="D:\BI10GroupYAPPERS\outputs\figures\t1_category_ticket.png">    </p:cNvPr>
           <p:cNvPicPr>
             <a:picLocks noChangeAspect="1"/>
           </p:cNvPicPr>
@@ -14259,24 +14336,47 @@
         </p:blipFill>
         <p:spPr>
           <a:xfrm>
-            <a:off x="6446520" y="1554480"/>
-            <a:ext cx="5303520" cy="4023360"/>
+            <a:off x="502920" y="3017520"/>
+            <a:ext cx="5440680" cy="3063240"/>
           </a:xfrm>
           <a:prstGeom prst="rect">
             <a:avLst/>
           </a:prstGeom>
         </p:spPr>
       </p:pic>
-      <p:sp>
-        <p:nvSpPr>
-          <p:cNvPr id="6" name="Text 3"/>
-          <p:cNvSpPr txBox="1"/>
-          <p:nvPr/>
-        </p:nvSpPr>
-        <p:spPr>
-          <a:xfrm>
-            <a:off x="6446520" y="5623560"/>
-            <a:ext cx="5303520" cy="256032"/>
+      <p:pic>
+        <p:nvPicPr>
+          <p:cNvPr id="6" name="Image 1" descr="D:\BI10GroupYAPPERS\outputs\figures\t1_age_cohort.png">    </p:cNvPr>
+          <p:cNvPicPr>
+            <a:picLocks noChangeAspect="1"/>
+          </p:cNvPicPr>
+          <p:nvPr/>
+        </p:nvPicPr>
+        <p:blipFill>
+          <a:blip r:embed="rId2"/>
+          <a:srcRect l="0" r="0" t="0" b="0"/>
+          <a:stretch/>
+        </p:blipFill>
+        <p:spPr>
+          <a:xfrm>
+            <a:off x="6263640" y="3017520"/>
+            <a:ext cx="5440680" cy="3063240"/>
+          </a:xfrm>
+          <a:prstGeom prst="rect">
+            <a:avLst/>
+          </a:prstGeom>
+        </p:spPr>
+      </p:pic>
+      <p:sp>
+        <p:nvSpPr>
+          <p:cNvPr id="7" name="Text 3"/>
+          <p:cNvSpPr txBox="1"/>
+          <p:nvPr/>
+        </p:nvSpPr>
+        <p:spPr>
+          <a:xfrm>
+            <a:off x="502920" y="6144768"/>
+            <a:ext cx="11201400" cy="256032"/>
           </a:xfrm>
           <a:prstGeom prst="rect">
             <a:avLst/>
@@ -14300,7 +14400,7 @@
                 <a:ea typeface="Calibri" pitchFamily="34" charset="-122"/>
                 <a:cs typeface="Calibri" pitchFamily="34" charset="-120"/>
               </a:rPr>
-              <a:t>Source: consumer_transactions_2025 — 1,852,394 transactions, 2025.</a:t>
+              <a:t>Source: consumer_transactions_2025 — 1,852,394 transactions, 2025. Age cohorts: consumer-month file.</a:t>
             </a:r>
             <a:endParaRPr lang="en-US" sz="850" dirty="0"/>
           </a:p>
@@ -14308,107 +14408,7 @@
       </p:sp>
       <p:sp>
         <p:nvSpPr>
-          <p:cNvPr id="7" name="Shape 4"/>
-          <p:cNvSpPr/>
-          <p:nvPr/>
-        </p:nvSpPr>
-        <p:spPr>
-          <a:xfrm>
-            <a:off x="457200" y="5074920"/>
-            <a:ext cx="3383280" cy="1051560"/>
-          </a:xfrm>
-          <a:prstGeom prst="roundRect">
-            <a:avLst>
-              <a:gd name="adj" fmla="val 6957"/>
-            </a:avLst>
-          </a:prstGeom>
-          <a:solidFill>
-            <a:srgbClr val="12435E"/>
-          </a:solidFill>
-          <a:ln/>
-        </p:spPr>
-      </p:sp>
-      <p:sp>
-        <p:nvSpPr>
-          <p:cNvPr id="8" name="Text 5"/>
-          <p:cNvSpPr txBox="1"/>
-          <p:nvPr/>
-        </p:nvSpPr>
-        <p:spPr>
-          <a:xfrm>
-            <a:off x="457200" y="5148072"/>
-            <a:ext cx="3383280" cy="621792"/>
-          </a:xfrm>
-          <a:prstGeom prst="rect">
-            <a:avLst/>
-          </a:prstGeom>
-          <a:noFill/>
-          <a:ln/>
-        </p:spPr>
-        <p:txBody>
-          <a:bodyPr wrap="square" lIns="0" tIns="0" rIns="0" bIns="0" rtlCol="0" anchor="ctr"/>
-          <a:lstStyle/>
-          <a:p>
-            <a:pPr algn="ctr" indent="0" marL="0">
-              <a:buNone/>
-            </a:pPr>
-            <a:r>
-              <a:rPr lang="en-US" sz="2600" b="1" dirty="0">
-                <a:solidFill>
-                  <a:srgbClr val="1FC3A6"/>
-                </a:solidFill>
-                <a:latin typeface="Cambria" pitchFamily="34" charset="0"/>
-                <a:ea typeface="Cambria" pitchFamily="34" charset="-122"/>
-                <a:cs typeface="Cambria" pitchFamily="34" charset="-120"/>
-              </a:rPr>
-              <a:t>≤ 0.46pp</a:t>
-            </a:r>
-            <a:endParaRPr lang="en-US" sz="2600" dirty="0"/>
-          </a:p>
-        </p:txBody>
-      </p:sp>
-      <p:sp>
-        <p:nvSpPr>
-          <p:cNvPr id="9" name="Text 6"/>
-          <p:cNvSpPr txBox="1"/>
-          <p:nvPr/>
-        </p:nvSpPr>
-        <p:spPr>
-          <a:xfrm>
-            <a:off x="457200" y="5769864"/>
-            <a:ext cx="3383280" cy="301752"/>
-          </a:xfrm>
-          <a:prstGeom prst="rect">
-            <a:avLst/>
-          </a:prstGeom>
-          <a:noFill/>
-          <a:ln/>
-        </p:spPr>
-        <p:txBody>
-          <a:bodyPr wrap="square" lIns="0" tIns="0" rIns="0" bIns="0" rtlCol="0" anchor="ctr"/>
-          <a:lstStyle/>
-          <a:p>
-            <a:pPr algn="ctr" indent="0" marL="0">
-              <a:buNone/>
-            </a:pPr>
-            <a:r>
-              <a:rPr lang="en-US" sz="1100" dirty="0">
-                <a:solidFill>
-                  <a:srgbClr val="FFFFFF"/>
-                </a:solidFill>
-                <a:latin typeface="Calibri" pitchFamily="34" charset="0"/>
-                <a:ea typeface="Calibri" pitchFamily="34" charset="-122"/>
-                <a:cs typeface="Calibri" pitchFamily="34" charset="-120"/>
-              </a:rPr>
-              <a:t>largest digital-share gap vs national</a:t>
-            </a:r>
-            <a:endParaRPr lang="en-US" sz="1100" dirty="0"/>
-          </a:p>
-        </p:txBody>
-      </p:sp>
-      <p:sp>
-        <p:nvSpPr>
-          <p:cNvPr id="10" name="Text 7"/>
+          <p:cNvPr id="8" name="Text 4"/>
           <p:cNvSpPr txBox="1"/>
           <p:nvPr/>
         </p:nvSpPr>
@@ -14447,7 +14447,7 @@
       </p:sp>
       <p:sp>
         <p:nvSpPr>
-          <p:cNvPr id="11" name="Text 8"/>
+          <p:cNvPr id="9" name="Text 5"/>
           <p:cNvSpPr txBox="1"/>
           <p:nvPr/>
         </p:nvSpPr>

--- a/draft/YAPPERS_BI10_R01.pptx
+++ b/draft/YAPPERS_BI10_R01.pptx
@@ -523,7 +523,7 @@
           <a:p>
             <a:r>
               <a:rPr lang="en-US" dirty="0"/>
-              <a:t>Set the wellbeing frame from second one — customer understanding, never credit scoring.</a:t>
+              <a:t>This is a wellbeing study, not credit scoring. In one line: people slide into stress because they overspend on wants, usually in specific months, so ITB can offer help at the right time and never touch anyone's credit.</a:t>
             </a:r>
             <a:endParaRPr lang="en-US" dirty="0"/>
           </a:p>
@@ -611,7 +611,7 @@
           <a:p>
             <a:r>
               <a:rPr lang="en-US" dirty="0"/>
-              <a:t>Two ratios are the whole game — the quintile chart makes r = −0.90 tangible.</a:t>
+              <a:t>The two headline ratios are one story: spending relative to capacity. The practical line is spend-to-income above 1, which almost every stressed month crosses. The transaction file shows the extra spend is discretionary and online, which tells a budgeting tool what to watch.</a:t>
             </a:r>
             <a:endParaRPr lang="en-US" dirty="0"/>
           </a:p>
@@ -699,7 +699,7 @@
           <a:p>
             <a:r>
               <a:rPr lang="en-US" dirty="0"/>
-              <a:t>Deliverable 3 — the one demographic gap is really a spending gap.</a:t>
+              <a:t>All three cuts the brief asks for are here. Occupation shows the biggest gap, but it almost disappears once we account for spending relative to income; the same holds for province. That is why the recommendations target behaviour, not demographics.</a:t>
             </a:r>
             <a:endParaRPr lang="en-US" dirty="0"/>
           </a:p>
@@ -787,7 +787,7 @@
           <a:p>
             <a:r>
               <a:rPr lang="en-US" dirty="0"/>
-              <a:t>More than half of every stress episode happens to someone we can reach in-app — and we know when.</a:t>
+              <a:t>The rule has two fixed thresholds on monthly fields, so anyone can rerun it. More than half of all stress happens to customers already very active in our channels, and the transaction file tells us when: late evening, big online baskets.</a:t>
             </a:r>
             <a:endParaRPr lang="en-US" dirty="0"/>
           </a:p>
@@ -875,7 +875,7 @@
           <a:p>
             <a:r>
               <a:rPr lang="en-US" dirty="0"/>
-              <a:t>Histogram for a continuous score, bar for ordered segments (a pie would hide the 1% tail), bar for nominal channels.</a:t>
+              <a:t>The histogram shows the continuous score; shading the official 40/60/80 bands answers the share-per-segment question on the same axis, at month and consumer grain, so the 1% tail stays visible where a pie would hide it. Channels are nominal, so a sorted bar labelled with trip share, value share and adoption fits.</a:t>
             </a:r>
             <a:endParaRPr lang="en-US" dirty="0"/>
           </a:p>
@@ -963,7 +963,7 @@
           <a:p>
             <a:r>
               <a:rPr lang="en-US" dirty="0"/>
-              <a:t>Scatter for two continuous variables; heatmap for the recency × frequency interaction.</a:t>
+              <a:t>Diversity and engagement are both continuous, so a scatter fits; colouring the one-off users shows the r = 0.94 is partly two clusters, and the within-base r = 0.81 shows the link holds anyway. Recency × frequency is an interaction of two binned variables, so a heatmap with cell counts fits.</a:t>
             </a:r>
             <a:endParaRPr lang="en-US" dirty="0"/>
           </a:p>
@@ -1051,7 +1051,7 @@
           <a:p>
             <a:r>
               <a:rPr lang="en-US" dirty="0"/>
-              <a:t>The sensitivity numbers answer 'why this cutoff and not a stricter or looser one'.</a:t>
+              <a:t>Health and engagement are two continuous scores, so a quadrant scatter with both cutoffs fits. The shaded empty band between 61.6 and 69.8 and the inset curve show the 70 cutoff sits in a real gap in the data. These are healthy, older, low-spend users whose single burst was mostly digital: the play is reactivation.</a:t>
             </a:r>
             <a:endParaRPr lang="en-US" dirty="0"/>
           </a:p>
@@ -1139,7 +1139,7 @@
           <a:p>
             <a:r>
               <a:rPr lang="en-US" dirty="0"/>
-              <a:t>Preprocessed dataset + data dictionary are in the ZIP (task4_features.csv, data_dictionary_task4.md).</a:t>
+              <a:t>We cluster on ratios only, one row per customer, and keep demographics out so segments describe behaviour, not who people are. k = 4 is not a matter of taste: each added cluster separates a new business axis, and beyond four the model only subdivides.</a:t>
             </a:r>
             <a:endParaRPr lang="en-US" dirty="0"/>
           </a:p>
@@ -1227,7 +1227,7 @@
           <a:p>
             <a:r>
               <a:rPr lang="en-US" dirty="0"/>
-              <a:t>The heatmap is the side-by-side comparison the brief asks for.</a:t>
+              <a:t>The heatmap is the side-by-side comparison: top rows are model inputs, bottom rows profile-only checks. Health splits Healthy from Stretched, activity isolates High-Activity, and the Occasional group is defined by how rarely we see them. Each segment maps to one tool in Task 5; none touches credit decisions.</a:t>
             </a:r>
             <a:endParaRPr lang="en-US" dirty="0"/>
           </a:p>
@@ -1315,7 +1315,7 @@
           <a:p>
             <a:r>
               <a:rPr lang="en-US" dirty="0"/>
-              <a:t>Stable enough to act on; the Nov→Dec slide is the timing evidence for planning reminders.</a:t>
+              <a:t>The segments survive re-seeding, resampling and removing December, so they are safe to act on. We are explicit that the three full-year groups are zones on a continuum and that the smallest group is defined by how rarely we see them. ARI measures agreement between two groupings (1 = identical); silhouette measures separation (0–1).</a:t>
             </a:r>
             <a:endParaRPr lang="en-US" dirty="0"/>
           </a:p>
@@ -1403,7 +1403,7 @@
           <a:p>
             <a:r>
               <a:rPr lang="en-US" dirty="0"/>
-              <a:t>One tool per required type, each with exact size, %, the column it rests on, and a KPI.</a:t>
+              <a:t>One tool per required type, each with an exact size, the column it rests on and a KPI. The only double contact is 64 occasional customers who get education and nudges, staggered.</a:t>
             </a:r>
             <a:endParaRPr lang="en-US" dirty="0"/>
           </a:p>
@@ -1491,7 +1491,7 @@
           <a:p>
             <a:r>
               <a:rPr lang="en-US" dirty="0"/>
-              <a:t>If a judge reads only this slide, they get the whole story.</a:t>
+              <a:t>One row per task: the signal, the driver and timing, engagement, the segments, then the plan and the ethical rule. The 82% is the share of FHS variance explained by the two ratios (R² 0.82). The 28–32% is a what-if scenario, tested with holdouts on slide 21.</a:t>
             </a:r>
             <a:endParaRPr lang="en-US" dirty="0"/>
           </a:p>
@@ -1579,7 +1579,7 @@
           <a:p>
             <a:r>
               <a:rPr lang="en-US" dirty="0"/>
-              <a:t>The rule is the deck's contract — a low score triggers help offered, never access removed.</a:t>
+              <a:t>The chart's axes are the two ranking inputs, so the order is reproducible. Budgeting wins on both. Alerts is small but precise, so it launches in wave 1. The rule is the contract: help offered, never access removed.</a:t>
             </a:r>
             <a:endParaRPr lang="en-US" dirty="0"/>
           </a:p>
@@ -1667,7 +1667,7 @@
           <a:p>
             <a:r>
               <a:rPr lang="en-US" dirty="0"/>
-              <a:t>Impact is a hypothesis we will measure, not a promise.</a:t>
+              <a:t>This is a hypothesis we will measure, not a promise. Even the conservative slope removes about a quarter of stress months, and the holdout tells us which tools earn scale.</a:t>
             </a:r>
             <a:endParaRPr lang="en-US" dirty="0"/>
           </a:p>
@@ -1755,7 +1755,7 @@
           <a:p>
             <a:r>
               <a:rPr lang="en-US" dirty="0"/>
-              <a:t>Close on the contract.</a:t>
+              <a:t>If a judge remembers three things: overspending, not income; timing, not a blacklist; help offered, never credit taken away.</a:t>
             </a:r>
             <a:endParaRPr lang="en-US" dirty="0"/>
           </a:p>
@@ -1843,7 +1843,7 @@
           <a:p>
             <a:r>
               <a:rPr lang="en-US" dirty="0"/>
-              <a:t>Show the arc — EDA and segmentation carry the most weight.</a:t>
+              <a:t>Four required sections: Executive Summary (2), Contents (3), Introduction (4), Task results (5–21). Each task follows the brief's question order.</a:t>
             </a:r>
             <a:endParaRPr lang="en-US" dirty="0"/>
           </a:p>
@@ -1931,7 +1931,7 @@
           <a:p>
             <a:r>
               <a:rPr lang="en-US" dirty="0"/>
-              <a:t>Two rules govern the deck: ratios over magnitudes, wellbeing over credit. Data quality is clean except the documented synthetic caveats.</a:t>
+              <a:t>Two rules govern the deck: ratios over magnitudes, wellbeing over credit. The data is clean; the caveats are the synthetic ones the case documents plus 91 customers seen only once, and we flag them wherever they touch a number.</a:t>
             </a:r>
             <a:endParaRPr lang="en-US" dirty="0"/>
           </a:p>
@@ -2019,7 +2019,7 @@
           <a:p>
             <a:r>
               <a:rPr lang="en-US" dirty="0"/>
-              <a:t>Peaks are a frequency phenomenon across every category — the lever is trip frequency, not upsell.</a:t>
+              <a:t>December is not new customers or pricier baskets: the same ~918 customers transact almost three times as often, even per day. That burst coincides with the year's lowest average health score (54.2), so the peak is also the pressure point we return to in Task 2 and Task 5.</a:t>
             </a:r>
             <a:endParaRPr lang="en-US" dirty="0"/>
           </a:p>
@@ -2107,7 +2107,7 @@
           <a:p>
             <a:r>
               <a:rPr lang="en-US" dirty="0"/>
-              <a:t>THE slide — the gradient proves the inversion is real, not an artefact of the 40/80 cutoffs.</a:t>
+              <a:t>Stressed customers do not buy wants more often: essentials are about 47% of their transactions, like healthy customers. The inversion comes from a few very large discretionary tickets, above all travel. FHS partly reflects spend-to-income, so read this as co-occurrence, not cause.</a:t>
             </a:r>
             <a:endParaRPr lang="en-US" dirty="0"/>
           </a:p>
@@ -2195,7 +2195,7 @@
           <a:p>
             <a:r>
               <a:rPr lang="en-US" dirty="0"/>
-              <a:t>Q3 asked for the channel breakdown — every hub has the national mix.</a:t>
+              <a:t>Six high-spend provinces technically qualify, but they lag only in app and e-commerce use, and by fractions of a point. Customers within any province differ far more than provinces do, so a regional digital campaign would miss the real variation.</a:t>
             </a:r>
             <a:endParaRPr lang="en-US" dirty="0"/>
           </a:p>
@@ -2283,7 +2283,7 @@
           <a:p>
             <a:r>
               <a:rPr lang="en-US" dirty="0"/>
-              <a:t>Answer Q4 and Q5 exactly as asked, then show the honest limit (CI overlap).</a:t>
+              <a:t>Fuel and groceries are both near-universal essentials but serve different jobs. On age, 25–34 answers Q5 as asked (active, lowest score, highest spend-to-income), but the spread is 1.2 points and not significant, so the actionable variable is spend-to-income.</a:t>
             </a:r>
             <a:endParaRPr lang="en-US" dirty="0"/>
           </a:p>
@@ -2371,7 +2371,7 @@
           <a:p>
             <a:r>
               <a:rPr lang="en-US" dirty="0"/>
-              <a:t>Nobody is chronically unhealthy — trigger on the month, not the person.</a:t>
+              <a:t>Averaging each person makes everyone look fine: the lowest consumer average is 42. Month by month almost everyone has a bad month, and stress spikes in December and January. So the right unit for help is the customer-month.</a:t>
             </a:r>
             <a:endParaRPr lang="en-US" dirty="0"/>
           </a:p>
@@ -2420,38 +2420,6 @@
       <p:bgRef idx="1001">
         <a:schemeClr val="bg1"/>
       </p:bgRef>
-    </p:bg>
-    <p:spTree>
-      <p:nvGrpSpPr>
-        <p:cNvPr id="1" name=""/>
-        <p:cNvGrpSpPr/>
-        <p:nvPr/>
-      </p:nvGrpSpPr>
-      <p:grpSpPr>
-        <a:xfrm>
-          <a:off x="0" y="0"/>
-          <a:ext cx="0" cy="0"/>
-          <a:chOff x="0" y="0"/>
-          <a:chExt cx="0" cy="0"/>
-        </a:xfrm>
-      </p:grpSpPr>
-    </p:spTree>
-  </p:cSld>
-  <p:clrMapOvr>
-    <a:masterClrMapping/>
-  </p:clrMapOvr>
-</p:sldLayout>
-</file>
-
-<file path=ppt/slideLayouts/slideLayout2.xml><?xml version="1.0" encoding="utf-8"?>
-<p:sldLayout xmlns:a="http://schemas.openxmlformats.org/drawingml/2006/main" xmlns:r="http://schemas.openxmlformats.org/officeDocument/2006/relationships" xmlns:p="http://schemas.openxmlformats.org/presentationml/2006/main" preserve="1">
-  <p:cSld name="L">
-    <p:bg>
-      <p:bgPr>
-        <a:solidFill>
-          <a:srgbClr val="FFFFFF"/>
-        </a:solidFill>
-      </p:bgPr>
     </p:bg>
     <p:spTree>
       <p:nvGrpSpPr>
@@ -2497,7 +2465,6 @@
   <p:clrMap bg1="lt1" tx1="dk1" bg2="lt2" tx2="dk2" accent1="accent1" accent2="accent2" accent3="accent3" accent4="accent4" accent5="accent5" accent6="accent6" hlink="hlink" folHlink="folHlink"/>
   <p:sldLayoutIdLst>
     <p:sldLayoutId id="2147483649" r:id="rId1"/>
-    <p:sldLayoutId id="2147483650" r:id="rId2"/>
   </p:sldLayoutIdLst>
   <p:hf sldNum="0" hdr="0" ftr="0" dt="0"/>
   <p:txStyles>
@@ -2819,9 +2786,6 @@
           <a:lstStyle/>
           <a:p>
             <a:pPr indent="0" marL="0">
-              <a:lnSpc>
-                <a:spcPct val="100000"/>
-              </a:lnSpc>
               <a:buNone/>
             </a:pPr>
             <a:r>
@@ -2848,7 +2812,7 @@
         <p:spPr>
           <a:xfrm>
             <a:off x="822960" y="3063240"/>
-            <a:ext cx="10058400" cy="548640"/>
+            <a:ext cx="10515600" cy="548640"/>
           </a:xfrm>
           <a:prstGeom prst="rect">
             <a:avLst/>
@@ -2872,7 +2836,7 @@
                 <a:ea typeface="Calibri" pitchFamily="34" charset="-122"/>
                 <a:cs typeface="Calibri" pitchFamily="34" charset="-120"/>
               </a:rPr>
-              <a:t>A non-punitive plan built on spending behaviour, not credit risk</a:t>
+              <a:t>Overspending, not low income, drives financial stress, and help can be timed to reach it</a:t>
             </a:r>
             <a:endParaRPr lang="en-US" sz="1800" dirty="0"/>
           </a:p>
@@ -2914,7 +2878,7 @@
                 <a:ea typeface="Calibri" pitchFamily="34" charset="-122"/>
                 <a:cs typeface="Calibri" pitchFamily="34" charset="-120"/>
               </a:rPr>
-              <a:t>999 consumers · 1.85M transactions — and one finding that reframes everything.</a:t>
+              <a:t>999 consumers · 10,992 consumer-months · 1.85M transactions · calendar year 2025</a:t>
             </a:r>
             <a:endParaRPr lang="en-US" sz="1400" dirty="0"/>
           </a:p>
@@ -2978,7 +2942,7 @@
         <p:spPr>
           <a:xfrm>
             <a:off x="457200" y="384048"/>
-            <a:ext cx="4114800" cy="292608"/>
+            <a:ext cx="7315200" cy="292608"/>
           </a:xfrm>
           <a:prstGeom prst="rect">
             <a:avLst/>
@@ -3017,7 +2981,7 @@
         <p:spPr>
           <a:xfrm>
             <a:off x="457200" y="658368"/>
-            <a:ext cx="11247120" cy="868680"/>
+            <a:ext cx="11247120" cy="731520"/>
           </a:xfrm>
           <a:prstGeom prst="rect">
             <a:avLst/>
@@ -3036,7 +3000,7 @@
               <a:buNone/>
             </a:pPr>
             <a:r>
-              <a:rPr lang="en-US" sz="2700" b="1" dirty="0">
+              <a:rPr lang="en-US" sz="2500" b="1" dirty="0">
                 <a:solidFill>
                   <a:srgbClr val="12435E"/>
                 </a:solidFill>
@@ -3044,9 +3008,9 @@
                 <a:ea typeface="Cambria" pitchFamily="34" charset="-122"/>
                 <a:cs typeface="Cambria" pitchFamily="34" charset="-120"/>
               </a:rPr>
-              <a:t>Low health is an overspend story</a:t>
-            </a:r>
-            <a:endParaRPr lang="en-US" sz="2700" dirty="0"/>
+              <a:t>Low health is overspending: it breaks once spend passes income</a:t>
+            </a:r>
+            <a:endParaRPr lang="en-US" sz="2500" dirty="0"/>
           </a:p>
         </p:txBody>
       </p:sp>
@@ -3058,8 +3022,8 @@
         </p:nvSpPr>
         <p:spPr>
           <a:xfrm>
-            <a:off x="457200" y="1417320"/>
-            <a:ext cx="11247120" cy="1600200"/>
+            <a:off x="457200" y="1371600"/>
+            <a:ext cx="11247120" cy="1691640"/>
           </a:xfrm>
           <a:prstGeom prst="rect">
             <a:avLst/>
@@ -3079,7 +3043,7 @@
               <a:buChar char="•"/>
             </a:pPr>
             <a:r>
-              <a:rPr lang="en-US" sz="1250" dirty="0">
+              <a:rPr lang="en-US" sz="1200" dirty="0">
                 <a:solidFill>
                   <a:srgbClr val="1B2A36"/>
                 </a:solidFill>
@@ -3087,9 +3051,9 @@
                 <a:ea typeface="Calibri" pitchFamily="34" charset="-122"/>
                 <a:cs typeface="Calibri" pitchFamily="34" charset="-120"/>
               </a:rPr>
-              <a:t>Top correlates with FHS (month grain, n = 10,992): spend-to-income −0.90, credit-utilization −0.86, volatility −0.50. Stressed vs healthy months: spend/income 2.10 vs 0.29; utilization 0.58 vs 0.08.</a:t>
-            </a:r>
-            <a:endParaRPr lang="en-US" sz="1250" dirty="0"/>
+              <a:t>One factor dominates (month grain, n = 10,992): spend-to-income r −0.90 and credit utilization r −0.86 move together (r 0.90) and jointly explain 82% of FHS variance; the link also holds within each consumer (r −0.90).</a:t>
+            </a:r>
+            <a:endParaRPr lang="en-US" sz="1200" dirty="0"/>
           </a:p>
           <a:p>
             <a:pPr marL="177800" indent="-177800">
@@ -3100,7 +3064,7 @@
               <a:buChar char="•"/>
             </a:pPr>
             <a:r>
-              <a:rPr lang="en-US" sz="1250" dirty="0">
+              <a:rPr lang="en-US" sz="1200" dirty="0">
                 <a:solidFill>
                   <a:srgbClr val="1B2A36"/>
                 </a:solidFill>
@@ -3108,9 +3072,9 @@
                 <a:ea typeface="Calibri" pitchFamily="34" charset="-122"/>
                 <a:cs typeface="Calibri" pitchFamily="34" charset="-120"/>
               </a:rPr>
-              <a:t>Step by step: mean FHS 72.4 → 68.4 → 66.0 → 63.8 → 60.9 across spend-to-income quintiles (−11.4 pts, ~10× the age spread).</a:t>
-            </a:r>
-            <a:endParaRPr lang="en-US" sz="1250" dirty="0"/>
+              <a:t>Threshold: 98% of stressed months spend more than income; in the top spend-to-income quintile (avg 1.21) 93% of months fall below 60, and none do in the bottom two quintiles.</a:t>
+            </a:r>
+            <a:endParaRPr lang="en-US" sz="1200" dirty="0"/>
           </a:p>
           <a:p>
             <a:pPr marL="177800" indent="-177800">
@@ -3121,7 +3085,7 @@
               <a:buChar char="•"/>
             </a:pPr>
             <a:r>
-              <a:rPr lang="en-US" sz="1250" dirty="0">
+              <a:rPr lang="en-US" sz="1200" dirty="0">
                 <a:solidFill>
                   <a:srgbClr val="1B2A36"/>
                 </a:solidFill>
@@ -3129,15 +3093,15 @@
                 <a:ea typeface="Calibri" pitchFamily="34" charset="-122"/>
                 <a:cs typeface="Calibri" pitchFamily="34" charset="-120"/>
               </a:rPr>
-              <a:t>Counter-intuitive: stressed months are MORE engaged (81.1 vs 72.7). FHS and ratios share spend fields — directional, not causal.</a:t>
-            </a:r>
-            <a:endParaRPr lang="en-US" sz="1250" dirty="0"/>
+              <a:t>What they buy (transactions): stressed months are 72% discretionary by value vs 40% in healthy months, with 2× the e-commerce + app share (23% vs 12%). They are also MORE engaged (81.1 vs 72.7). Shared inputs → directional, not causal.</a:t>
+            </a:r>
+            <a:endParaRPr lang="en-US" sz="1200" dirty="0"/>
           </a:p>
         </p:txBody>
       </p:sp>
       <p:pic>
         <p:nvPicPr>
-          <p:cNvPr id="5" name="Image 0" descr="D:\BI10GroupYAPPERS\outputs\figures\t2_low_health_drivers.png">    </p:cNvPr>
+          <p:cNvPr id="5" name="Image 0" descr="D:\BI10GroupYAPPERS\outputs\figures\v2_t2_sti_threshold.png">    </p:cNvPr>
           <p:cNvPicPr>
             <a:picLocks noChangeAspect="1"/>
           </p:cNvPicPr>
@@ -3150,8 +3114,8 @@
         </p:blipFill>
         <p:spPr>
           <a:xfrm>
-            <a:off x="502920" y="3017520"/>
-            <a:ext cx="5440680" cy="3063240"/>
+            <a:off x="457200" y="3063240"/>
+            <a:ext cx="5532120" cy="3017520"/>
           </a:xfrm>
           <a:prstGeom prst="rect">
             <a:avLst/>
@@ -3160,7 +3124,7 @@
       </p:pic>
       <p:pic>
         <p:nvPicPr>
-          <p:cNvPr id="6" name="Image 1" descr="D:\BI10GroupYAPPERS\outputs\figures\t2_sti_quintile.png">    </p:cNvPr>
+          <p:cNvPr id="6" name="Image 1" descr="D:\BI10GroupYAPPERS\outputs\figures\t2_low_health_drivers.png">    </p:cNvPr>
           <p:cNvPicPr>
             <a:picLocks noChangeAspect="1"/>
           </p:cNvPicPr>
@@ -3173,8 +3137,8 @@
         </p:blipFill>
         <p:spPr>
           <a:xfrm>
-            <a:off x="6263640" y="3017520"/>
-            <a:ext cx="5440680" cy="3063240"/>
+            <a:off x="6172200" y="3063240"/>
+            <a:ext cx="5532120" cy="3017520"/>
           </a:xfrm>
           <a:prstGeom prst="rect">
             <a:avLst/>
@@ -3189,8 +3153,8 @@
         </p:nvSpPr>
         <p:spPr>
           <a:xfrm>
-            <a:off x="502920" y="6144768"/>
-            <a:ext cx="11201400" cy="256032"/>
+            <a:off x="457200" y="6144768"/>
+            <a:ext cx="11247120" cy="256032"/>
           </a:xfrm>
           <a:prstGeom prst="rect">
             <a:avLst/>
@@ -3214,7 +3178,7 @@
                 <a:ea typeface="Calibri" pitchFamily="34" charset="-122"/>
                 <a:cs typeface="Calibri" pitchFamily="34" charset="-120"/>
               </a:rPr>
-              <a:t>Source: consumer_financial_health_engagement_2025 — 10,992 consumer-months, 999 consumers, 2025.</a:t>
+              <a:t>Source: consumer_financial_health_engagement_2025 (10,992 consumer-months, 999 consumers, 2025). Category mix: transactions joined to consumer-months on consumer_id + month.</a:t>
             </a:r>
             <a:endParaRPr lang="en-US" sz="850" dirty="0"/>
           </a:p>
@@ -3339,7 +3303,7 @@
         <p:spPr>
           <a:xfrm>
             <a:off x="457200" y="384048"/>
-            <a:ext cx="4114800" cy="292608"/>
+            <a:ext cx="7315200" cy="292608"/>
           </a:xfrm>
           <a:prstGeom prst="rect">
             <a:avLst/>
@@ -3378,7 +3342,7 @@
         <p:spPr>
           <a:xfrm>
             <a:off x="457200" y="658368"/>
-            <a:ext cx="11247120" cy="868680"/>
+            <a:ext cx="11247120" cy="731520"/>
           </a:xfrm>
           <a:prstGeom prst="rect">
             <a:avLst/>
@@ -3397,7 +3361,7 @@
               <a:buNone/>
             </a:pPr>
             <a:r>
-              <a:rPr lang="en-US" sz="2700" b="1" dirty="0">
+              <a:rPr lang="en-US" sz="2500" b="1" dirty="0">
                 <a:solidFill>
                   <a:srgbClr val="12435E"/>
                 </a:solidFill>
@@ -3405,9 +3369,9 @@
                 <a:ea typeface="Cambria" pitchFamily="34" charset="-122"/>
                 <a:cs typeface="Cambria" pitchFamily="34" charset="-120"/>
               </a:rPr>
-              <a:t>Who differs? Province and age barely; occupation through spending</a:t>
-            </a:r>
-            <a:endParaRPr lang="en-US" sz="2700" dirty="0"/>
+              <a:t>Occupation and province gaps are really spending gaps; age is flat</a:t>
+            </a:r>
+            <a:endParaRPr lang="en-US" sz="2500" dirty="0"/>
           </a:p>
         </p:txBody>
       </p:sp>
@@ -3419,8 +3383,8 @@
         </p:nvSpPr>
         <p:spPr>
           <a:xfrm>
-            <a:off x="457200" y="1417320"/>
-            <a:ext cx="11247120" cy="1463040"/>
+            <a:off x="457200" y="1371600"/>
+            <a:ext cx="11247120" cy="1600200"/>
           </a:xfrm>
           <a:prstGeom prst="rect">
             <a:avLst/>
@@ -3440,7 +3404,7 @@
               <a:buChar char="•"/>
             </a:pPr>
             <a:r>
-              <a:rPr lang="en-US" sz="1250" dirty="0">
+              <a:rPr lang="en-US" sz="1200" dirty="0">
                 <a:solidFill>
                   <a:srgbClr val="1B2A36"/>
                 </a:solidFill>
@@ -3448,9 +3412,9 @@
                 <a:ea typeface="Calibri" pitchFamily="34" charset="-122"/>
                 <a:cs typeface="Calibri" pitchFamily="34" charset="-120"/>
               </a:rPr>
-              <a:t>Province: 22 of 27 provinces (≥ 15 consumers) have a 95% CI containing the national mean 66.3 (extremes Thai Nguyen 63.0, HCMC 67.6). Age: all six cohort CIs overlap (65.8–67.0).</a:t>
-            </a:r>
-            <a:endParaRPr lang="en-US" sz="1250" dirty="0"/>
+              <a:t>Occupation (396 titles → 8 keyword groups + Other; consumer level): Eng/science/IT 69.1 (n = 229) and Business/finance 68.7 (126) vs Office/public 64.5 (443) and Manual/trades 62.9 (23), a 6.2-pt spread mirroring spend-to-income 0.61 vs 0.76–0.79.</a:t>
+            </a:r>
+            <a:endParaRPr lang="en-US" sz="1200" dirty="0"/>
           </a:p>
           <a:p>
             <a:pPr marL="177800" indent="-177800">
@@ -3461,7 +3425,7 @@
               <a:buChar char="•"/>
             </a:pPr>
             <a:r>
-              <a:rPr lang="en-US" sz="1250" dirty="0">
+              <a:rPr lang="en-US" sz="1200" dirty="0">
                 <a:solidFill>
                   <a:srgbClr val="1B2A36"/>
                 </a:solidFill>
@@ -3469,9 +3433,9 @@
                 <a:ea typeface="Calibri" pitchFamily="34" charset="-122"/>
                 <a:cs typeface="Calibri" pitchFamily="34" charset="-120"/>
               </a:rPr>
-              <a:t>Occupation (396 raw titles → 8 keyword groups): Engineering/science/IT 69.1 (n = 229), Business/finance 68.7 (126) vs Office/public 64.5 (443), Manual/trades 62.9 (23) — a ~6-pt spread that mirrors spend-to-income (0.60 vs 0.76–0.79).</a:t>
-            </a:r>
-            <a:endParaRPr lang="en-US" sz="1250" dirty="0"/>
+              <a:t>Province (27 with ≥ 15 consumers): Thai Nguyen 63.0 to Ha Noi 67.8; real but small (ANOVA p = 0.009, 5% of variance). Age: six cohorts within 65.8–67.0, not significant (p = 0.13).</a:t>
+            </a:r>
+            <a:endParaRPr lang="en-US" sz="1200" dirty="0"/>
           </a:p>
           <a:p>
             <a:pPr marL="177800" indent="-177800">
@@ -3482,7 +3446,7 @@
               <a:buChar char="•"/>
             </a:pPr>
             <a:r>
-              <a:rPr lang="en-US" sz="1250" dirty="0">
+              <a:rPr lang="en-US" sz="1200" dirty="0">
                 <a:solidFill>
                   <a:srgbClr val="1B2A36"/>
                 </a:solidFill>
@@ -3490,15 +3454,15 @@
                 <a:ea typeface="Calibri" pitchFamily="34" charset="-122"/>
                 <a:cs typeface="Calibri" pitchFamily="34" charset="-120"/>
               </a:rPr>
-              <a:t>Demographics act through the overspend ratio → target the ratio, never the group (fairness).</a:t>
-            </a:r>
-            <a:endParaRPr lang="en-US" sz="1250" dirty="0"/>
+              <a:t>Hold spend-to-income constant and the occupation spread falls to 1.3 pts and province to 1.6 pts (p = 0.62). Target the ratio, never the group — the fairer and more effective lever.</a:t>
+            </a:r>
+            <a:endParaRPr lang="en-US" sz="1200" dirty="0"/>
           </a:p>
         </p:txBody>
       </p:sp>
       <p:pic>
         <p:nvPicPr>
-          <p:cNvPr id="5" name="Image 0" descr="D:\BI10GroupYAPPERS\outputs\figures\t2_demographics.png">    </p:cNvPr>
+          <p:cNvPr id="5" name="Image 0" descr="D:\BI10GroupYAPPERS\outputs\figures\v2_t2_demog_adjusted.png">    </p:cNvPr>
           <p:cNvPicPr>
             <a:picLocks noChangeAspect="1"/>
           </p:cNvPicPr>
@@ -3511,8 +3475,8 @@
         </p:blipFill>
         <p:spPr>
           <a:xfrm>
-            <a:off x="457200" y="2926080"/>
-            <a:ext cx="11247120" cy="3154680"/>
+            <a:off x="457200" y="3017520"/>
+            <a:ext cx="11247120" cy="3063240"/>
           </a:xfrm>
           <a:prstGeom prst="rect">
             <a:avLst/>
@@ -3552,7 +3516,7 @@
                 <a:ea typeface="Calibri" pitchFamily="34" charset="-122"/>
                 <a:cs typeface="Calibri" pitchFamily="34" charset="-120"/>
               </a:rPr>
-              <a:t>Source: consumer_financial_health_engagement_2025 — 10,992 consumer-months, 999 consumers, 2025.</a:t>
+              <a:t>Source: consumer_financial_health_engagement_2025 (10,992 consumer-months, 999 consumers, 2025). Consumer level, n = 999; adjustment = residual of FHS on spend-to-income (linear).</a:t>
             </a:r>
             <a:endParaRPr lang="en-US" sz="850" dirty="0"/>
           </a:p>
@@ -3677,7 +3641,7 @@
         <p:spPr>
           <a:xfrm>
             <a:off x="457200" y="384048"/>
-            <a:ext cx="4114800" cy="292608"/>
+            <a:ext cx="7315200" cy="292608"/>
           </a:xfrm>
           <a:prstGeom prst="rect">
             <a:avLst/>
@@ -3716,7 +3680,7 @@
         <p:spPr>
           <a:xfrm>
             <a:off x="457200" y="658368"/>
-            <a:ext cx="11247120" cy="868680"/>
+            <a:ext cx="11247120" cy="731520"/>
           </a:xfrm>
           <a:prstGeom prst="rect">
             <a:avLst/>
@@ -3735,7 +3699,7 @@
               <a:buNone/>
             </a:pPr>
             <a:r>
-              <a:rPr lang="en-US" sz="2700" b="1" dirty="0">
+              <a:rPr lang="en-US" sz="2500" b="1" dirty="0">
                 <a:solidFill>
                   <a:srgbClr val="12435E"/>
                 </a:solidFill>
@@ -3743,9 +3707,9 @@
                 <a:ea typeface="Cambria" pitchFamily="34" charset="-122"/>
                 <a:cs typeface="Cambria" pitchFamily="34" charset="-120"/>
               </a:rPr>
-              <a:t>The "Stressed but Engaged" crossover — and when to reach it</a:t>
-            </a:r>
-            <a:endParaRPr lang="en-US" sz="2700" dirty="0"/>
+              <a:t>43 active customers carry 52% of stress months — reach them before 22:00</a:t>
+            </a:r>
+            <a:endParaRPr lang="en-US" sz="2500" dirty="0"/>
           </a:p>
         </p:txBody>
       </p:sp>
@@ -3757,8 +3721,8 @@
         </p:nvSpPr>
         <p:spPr>
           <a:xfrm>
-            <a:off x="457200" y="1417320"/>
-            <a:ext cx="11247120" cy="1600200"/>
+            <a:off x="457200" y="1371600"/>
+            <a:ext cx="11247120" cy="1691640"/>
           </a:xfrm>
           <a:prstGeom prst="rect">
             <a:avLst/>
@@ -3778,7 +3742,7 @@
               <a:buChar char="•"/>
             </a:pPr>
             <a:r>
-              <a:rPr lang="en-US" sz="1250" dirty="0">
+              <a:rPr lang="en-US" sz="1200" dirty="0">
                 <a:solidFill>
                   <a:srgbClr val="1B2A36"/>
                 </a:solidFill>
@@ -3786,9 +3750,9 @@
                 <a:ea typeface="Calibri" pitchFamily="34" charset="-122"/>
                 <a:cs typeface="Calibri" pitchFamily="34" charset="-120"/>
               </a:rPr>
-              <a:t>Reproducible rule (consumer-month): financial_health_score &lt; 40 AND engagement_score ≥ p75 (81.4) → 43 consumers / 49 months = 52% of ALL stress episodes. Robust: p70 / p80 give 44 / 41 consumers (53% / 48%).</a:t>
-            </a:r>
-            <a:endParaRPr lang="en-US" sz="1250" dirty="0"/>
+              <a:t>Rule (consumer-month): financial_health_score &lt; 40 AND engagement_score ≥ 81.4 (the top 25% of all 10,992 consumer-months, a fixed constant). It flags 49 months / 43 consumers = 52% of stressed months vs 25% by chance (p &lt; 0.001); top 30% / 20% give 44 / 41 consumers.</a:t>
+            </a:r>
+            <a:endParaRPr lang="en-US" sz="1200" dirty="0"/>
           </a:p>
           <a:p>
             <a:pPr marL="177800" indent="-177800">
@@ -3799,7 +3763,7 @@
               <a:buChar char="•"/>
             </a:pPr>
             <a:r>
-              <a:rPr lang="en-US" sz="1250" dirty="0">
+              <a:rPr lang="en-US" sz="1200" dirty="0">
                 <a:solidFill>
                   <a:srgbClr val="1B2A36"/>
                 </a:solidFill>
@@ -3807,9 +3771,9 @@
                 <a:ea typeface="Calibri" pitchFamily="34" charset="-122"/>
                 <a:cs typeface="Calibri" pitchFamily="34" charset="-120"/>
               </a:rPr>
-              <a:t>Profile: spend/income 1.89, credit-utilization 0.55, online share 0.49 (2× national) — active, digital, over-extended.</a:t>
-            </a:r>
-            <a:endParaRPr lang="en-US" sz="1250" dirty="0"/>
+              <a:t>Profile: spend/income 1.89, utilization 0.55, discretionary 71%, online share 0.49 (2.3× the 0.21 average). All 43 are full-year customers averaging FHS 62 in other months; 39 of them sit in the Stretched &amp; Engaged segment.</a:t>
+            </a:r>
+            <a:endParaRPr lang="en-US" sz="1200" dirty="0"/>
           </a:p>
           <a:p>
             <a:pPr marL="177800" indent="-177800">
@@ -3820,7 +3784,7 @@
               <a:buChar char="•"/>
             </a:pPr>
             <a:r>
-              <a:rPr lang="en-US" sz="1250" dirty="0">
+              <a:rPr lang="en-US" sz="1200" dirty="0">
                 <a:solidFill>
                   <a:srgbClr val="1B2A36"/>
                 </a:solidFill>
@@ -3828,9 +3792,9 @@
                 <a:ea typeface="Calibri" pitchFamily="34" charset="-122"/>
                 <a:cs typeface="Calibri" pitchFamily="34" charset="-120"/>
               </a:rPr>
-              <a:t>Timing (transactions): stressed months put 23.5% of spend value into 22–23h vs 8.3% (bigger late tickets, not more: count 11.6% vs 9.7%); Sunday + Monday = 42% vs 34% → alerts Sun–Mon evenings, before 22:00.</a:t>
-            </a:r>
-            <a:endParaRPr lang="en-US" sz="1250" dirty="0"/>
+              <a:t>When (transactions): 22:00–23:59 carries 23.5% of stressed-month spend value vs 8.3% in healthy months (count only 11.6% vs 9.7%), led by online shopping 39% and travel 14% → opt-in spend alerts before 22:00. Wellbeing use only.</a:t>
+            </a:r>
+            <a:endParaRPr lang="en-US" sz="1200" dirty="0"/>
           </a:p>
         </p:txBody>
       </p:sp>
@@ -3849,8 +3813,8 @@
         </p:blipFill>
         <p:spPr>
           <a:xfrm>
-            <a:off x="502920" y="3017520"/>
-            <a:ext cx="5440680" cy="3063240"/>
+            <a:off x="457200" y="3063240"/>
+            <a:ext cx="5532120" cy="3017520"/>
           </a:xfrm>
           <a:prstGeom prst="rect">
             <a:avLst/>
@@ -3859,7 +3823,7 @@
       </p:pic>
       <p:pic>
         <p:nvPicPr>
-          <p:cNvPr id="6" name="Image 1" descr="D:\BI10GroupYAPPERS\outputs\figures\t2_timing.png">    </p:cNvPr>
+          <p:cNvPr id="6" name="Image 1" descr="D:\BI10GroupYAPPERS\outputs\figures\v2_t2_latenight.png">    </p:cNvPr>
           <p:cNvPicPr>
             <a:picLocks noChangeAspect="1"/>
           </p:cNvPicPr>
@@ -3872,8 +3836,8 @@
         </p:blipFill>
         <p:spPr>
           <a:xfrm>
-            <a:off x="6263640" y="3017520"/>
-            <a:ext cx="5440680" cy="3063240"/>
+            <a:off x="6172200" y="3063240"/>
+            <a:ext cx="5532120" cy="3017520"/>
           </a:xfrm>
           <a:prstGeom prst="rect">
             <a:avLst/>
@@ -3888,8 +3852,8 @@
         </p:nvSpPr>
         <p:spPr>
           <a:xfrm>
-            <a:off x="502920" y="6144768"/>
-            <a:ext cx="11201400" cy="256032"/>
+            <a:off x="457200" y="6144768"/>
+            <a:ext cx="11247120" cy="256032"/>
           </a:xfrm>
           <a:prstGeom prst="rect">
             <a:avLst/>
@@ -3913,7 +3877,7 @@
                 <a:ea typeface="Calibri" pitchFamily="34" charset="-122"/>
                 <a:cs typeface="Calibri" pitchFamily="34" charset="-120"/>
               </a:rPr>
-              <a:t>Source: consumer_financial_health_engagement_2025 — 10,992 consumer-months, 999 consumers, 2025. Timing: Source: transactions file joined to the consumer-month file on consumer_id + month.</a:t>
+              <a:t>Source: consumer_financial_health_engagement_2025 (10,992 consumer-months, 999 consumers, 2025). Timing: transactions joined to consumer-months on consumer_id + month.</a:t>
             </a:r>
             <a:endParaRPr lang="en-US" sz="850" dirty="0"/>
           </a:p>
@@ -4038,7 +4002,7 @@
         <p:spPr>
           <a:xfrm>
             <a:off x="457200" y="384048"/>
-            <a:ext cx="4114800" cy="292608"/>
+            <a:ext cx="7315200" cy="292608"/>
           </a:xfrm>
           <a:prstGeom prst="rect">
             <a:avLst/>
@@ -4077,7 +4041,7 @@
         <p:spPr>
           <a:xfrm>
             <a:off x="457200" y="658368"/>
-            <a:ext cx="11247120" cy="868680"/>
+            <a:ext cx="11247120" cy="731520"/>
           </a:xfrm>
           <a:prstGeom prst="rect">
             <a:avLst/>
@@ -4096,7 +4060,7 @@
               <a:buNone/>
             </a:pPr>
             <a:r>
-              <a:rPr lang="en-US" sz="2700" b="1" dirty="0">
+              <a:rPr lang="en-US" sz="2500" b="1" dirty="0">
                 <a:solidFill>
                   <a:srgbClr val="12435E"/>
                 </a:solidFill>
@@ -4104,9 +4068,9 @@
                 <a:ea typeface="Cambria" pitchFamily="34" charset="-122"/>
                 <a:cs typeface="Cambria" pitchFamily="34" charset="-120"/>
               </a:rPr>
-              <a:t>Engagement is saturated; channels are POS-first</a:t>
-            </a:r>
-            <a:endParaRPr lang="en-US" sz="2700" dirty="0"/>
+              <a:t>Engagement is saturated; digital share is what varies</a:t>
+            </a:r>
+            <a:endParaRPr lang="en-US" sz="2500" dirty="0"/>
           </a:p>
         </p:txBody>
       </p:sp>
@@ -4118,8 +4082,8 @@
         </p:nvSpPr>
         <p:spPr>
           <a:xfrm>
-            <a:off x="457200" y="1417320"/>
-            <a:ext cx="11247120" cy="1508760"/>
+            <a:off x="457200" y="1371600"/>
+            <a:ext cx="11247120" cy="1691640"/>
           </a:xfrm>
           <a:prstGeom prst="rect">
             <a:avLst/>
@@ -4139,7 +4103,7 @@
               <a:buChar char="•"/>
             </a:pPr>
             <a:r>
-              <a:rPr lang="en-US" sz="1250" dirty="0">
+              <a:rPr lang="en-US" sz="1200" dirty="0">
                 <a:solidFill>
                   <a:srgbClr val="1B2A36"/>
                 </a:solidFill>
@@ -4147,9 +4111,9 @@
                 <a:ea typeface="Calibri" pitchFamily="34" charset="-122"/>
                 <a:cs typeface="Calibri" pitchFamily="34" charset="-120"/>
               </a:rPr>
-              <a:t>D1: engagement_score mean 77.8, median 78.1, IQR 74.8–81.4 (consumer-month). Consumers by segment: Low 1.0% (10) · Medium 8.0% (80) · High 74.1% (740) · Very high 16.9% (169) → the score alone does not segment the base.</a:t>
-            </a:r>
-            <a:endParaRPr lang="en-US" sz="1250" dirty="0"/>
+              <a:t>D1: engagement_score mean 77.8, median 78.1, IQR 74.8–81.4. Official bands (40/60/80) per month: Low 0.1% · Medium 0.9% · High 64.2% · Very high 34.8%. Per consumer (average score): 1.0% · 8.0% · 66.9% · 24.1% — 91% High or Very high.</a:t>
+            </a:r>
+            <a:endParaRPr lang="en-US" sz="1200" dirty="0"/>
           </a:p>
           <a:p>
             <a:pPr marL="177800" indent="-177800">
@@ -4160,7 +4124,7 @@
               <a:buChar char="•"/>
             </a:pPr>
             <a:r>
-              <a:rPr lang="en-US" sz="1250" dirty="0">
+              <a:rPr lang="en-US" sz="1200" dirty="0">
                 <a:solidFill>
                   <a:srgbClr val="1B2A36"/>
                 </a:solidFill>
@@ -4168,15 +4132,36 @@
                 <a:ea typeface="Calibri" pitchFamily="34" charset="-122"/>
                 <a:cs typeface="Calibri" pitchFamily="34" charset="-120"/>
               </a:rPr>
-              <a:t>D2: POS 58.8% · QR 19.8% · E-commerce 8.7% · Mobile App 7.7% · Recurring 4.9% of 1.85M transactions; non-POS = 41% of trips and 41.5% of value. Average online spend share 24.7% per consumer (range 0–95%).</a:t>
-            </a:r>
-            <a:endParaRPr lang="en-US" sz="1250" dirty="0"/>
+              <a:t>All 91 consumers below 'High' used the card on only 1–2 days all year; every one of the 908 full-year consumers averages ≥ 69.8. The score separates one-off users from the base, not good customers from great ones.</a:t>
+            </a:r>
+            <a:endParaRPr lang="en-US" sz="1200" dirty="0"/>
+          </a:p>
+          <a:p>
+            <a:pPr marL="177800" indent="-177800">
+              <a:spcAft>
+                <a:spcPts val="700"/>
+              </a:spcAft>
+              <a:buSzPct val="100000"/>
+              <a:buChar char="•"/>
+            </a:pPr>
+            <a:r>
+              <a:rPr lang="en-US" sz="1200" dirty="0">
+                <a:solidFill>
+                  <a:srgbClr val="1B2A36"/>
+                </a:solidFill>
+                <a:latin typeface="Calibri" pitchFamily="34" charset="0"/>
+                <a:ea typeface="Calibri" pitchFamily="34" charset="-122"/>
+                <a:cs typeface="Calibri" pitchFamily="34" charset="-120"/>
+              </a:rPr>
+              <a:t>D2: POS 58.8% · QR 19.8% · E-commerce 8.7% · Mobile App 7.7% · Recurring 4.9% of transactions; 925 of 999 use all 5. Average online spend share 21.0% of spend (consumer median 20.4%, full-year range 12–36%); it tracks engagement (r +0.86).</a:t>
+            </a:r>
+            <a:endParaRPr lang="en-US" sz="1200" dirty="0"/>
           </a:p>
         </p:txBody>
       </p:sp>
       <p:pic>
         <p:nvPicPr>
-          <p:cNvPr id="5" name="Image 0" descr="D:\BI10GroupYAPPERS\outputs\figures\t3_engagement_dist.png">    </p:cNvPr>
+          <p:cNvPr id="5" name="Image 0" descr="D:\BI10GroupYAPPERS\outputs\figures\v2_t3_engagement_segments.png">    </p:cNvPr>
           <p:cNvPicPr>
             <a:picLocks noChangeAspect="1"/>
           </p:cNvPicPr>
@@ -4189,8 +4174,8 @@
         </p:blipFill>
         <p:spPr>
           <a:xfrm>
-            <a:off x="457200" y="2971800"/>
-            <a:ext cx="4343400" cy="3108960"/>
+            <a:off x="457200" y="3063240"/>
+            <a:ext cx="5532120" cy="3017520"/>
           </a:xfrm>
           <a:prstGeom prst="rect">
             <a:avLst/>
@@ -4199,7 +4184,7 @@
       </p:pic>
       <p:pic>
         <p:nvPicPr>
-          <p:cNvPr id="6" name="Image 1" descr="D:\BI10GroupYAPPERS\outputs\figures\t3_segment_share.png">    </p:cNvPr>
+          <p:cNvPr id="6" name="Image 1" descr="D:\BI10GroupYAPPERS\outputs\figures\v2_t3_channel_mix.png">    </p:cNvPr>
           <p:cNvPicPr>
             <a:picLocks noChangeAspect="1"/>
           </p:cNvPicPr>
@@ -4212,40 +4197,17 @@
         </p:blipFill>
         <p:spPr>
           <a:xfrm>
-            <a:off x="4937760" y="2971800"/>
-            <a:ext cx="3063240" cy="3108960"/>
+            <a:off x="6172200" y="3063240"/>
+            <a:ext cx="5532120" cy="3017520"/>
           </a:xfrm>
           <a:prstGeom prst="rect">
             <a:avLst/>
           </a:prstGeom>
         </p:spPr>
       </p:pic>
-      <p:pic>
-        <p:nvPicPr>
-          <p:cNvPr id="7" name="Image 2" descr="D:\BI10GroupYAPPERS\outputs\figures\t3_channel_mix.png">    </p:cNvPr>
-          <p:cNvPicPr>
-            <a:picLocks noChangeAspect="1"/>
-          </p:cNvPicPr>
-          <p:nvPr/>
-        </p:nvPicPr>
-        <p:blipFill>
-          <a:blip r:embed="rId3"/>
-          <a:srcRect l="0" r="0" t="0" b="0"/>
-          <a:stretch/>
-        </p:blipFill>
-        <p:spPr>
-          <a:xfrm>
-            <a:off x="8138160" y="2971800"/>
-            <a:ext cx="3566160" cy="3108960"/>
-          </a:xfrm>
-          <a:prstGeom prst="rect">
-            <a:avLst/>
-          </a:prstGeom>
-        </p:spPr>
-      </p:pic>
-      <p:sp>
-        <p:nvSpPr>
-          <p:cNvPr id="8" name="Text 3"/>
+      <p:sp>
+        <p:nvSpPr>
+          <p:cNvPr id="7" name="Text 3"/>
           <p:cNvSpPr txBox="1"/>
           <p:nvPr/>
         </p:nvSpPr>
@@ -4276,7 +4238,7 @@
                 <a:ea typeface="Calibri" pitchFamily="34" charset="-122"/>
                 <a:cs typeface="Calibri" pitchFamily="34" charset="-120"/>
               </a:rPr>
-              <a:t>Source: consumer_financial_health_engagement_2025 — 10,992 consumer-months, 999 consumers, 2025. Channels: Source: consumer_transactions_2025 — 1,852,394 transactions, 2025.</a:t>
+              <a:t>Source: consumer_financial_health_engagement_2025 (10,992 consumer-months, 999 consumers, 2025). Channels: consumer_transactions_2025 (1,852,394 transactions, 2025).</a:t>
             </a:r>
             <a:endParaRPr lang="en-US" sz="850" dirty="0"/>
           </a:p>
@@ -4284,7 +4246,7 @@
       </p:sp>
       <p:sp>
         <p:nvSpPr>
-          <p:cNvPr id="9" name="Text 4"/>
+          <p:cNvPr id="8" name="Text 4"/>
           <p:cNvSpPr txBox="1"/>
           <p:nvPr/>
         </p:nvSpPr>
@@ -4323,7 +4285,7 @@
       </p:sp>
       <p:sp>
         <p:nvSpPr>
-          <p:cNvPr id="10" name="Text 5"/>
+          <p:cNvPr id="9" name="Text 5"/>
           <p:cNvSpPr txBox="1"/>
           <p:nvPr/>
         </p:nvSpPr>
@@ -4401,7 +4363,7 @@
         <p:spPr>
           <a:xfrm>
             <a:off x="457200" y="384048"/>
-            <a:ext cx="4114800" cy="292608"/>
+            <a:ext cx="7315200" cy="292608"/>
           </a:xfrm>
           <a:prstGeom prst="rect">
             <a:avLst/>
@@ -4440,7 +4402,7 @@
         <p:spPr>
           <a:xfrm>
             <a:off x="457200" y="658368"/>
-            <a:ext cx="11247120" cy="868680"/>
+            <a:ext cx="11247120" cy="731520"/>
           </a:xfrm>
           <a:prstGeom prst="rect">
             <a:avLst/>
@@ -4459,7 +4421,7 @@
               <a:buNone/>
             </a:pPr>
             <a:r>
-              <a:rPr lang="en-US" sz="2700" b="1" dirty="0">
+              <a:rPr lang="en-US" sz="2500" b="1" dirty="0">
                 <a:solidFill>
                   <a:srgbClr val="12435E"/>
                 </a:solidFill>
@@ -4467,9 +4429,9 @@
                 <a:ea typeface="Cambria" pitchFamily="34" charset="-122"/>
                 <a:cs typeface="Cambria" pitchFamily="34" charset="-120"/>
               </a:rPr>
-              <a:t>What actually discriminates: diversity &amp; consistency</a:t>
-            </a:r>
-            <a:endParaRPr lang="en-US" sz="2700" dirty="0"/>
+              <a:t>Breadth and regular use track engagement; recency only flags one-offs</a:t>
+            </a:r>
+            <a:endParaRPr lang="en-US" sz="2500" dirty="0"/>
           </a:p>
         </p:txBody>
       </p:sp>
@@ -4481,8 +4443,8 @@
         </p:nvSpPr>
         <p:spPr>
           <a:xfrm>
-            <a:off x="457200" y="1417320"/>
-            <a:ext cx="11247120" cy="1600200"/>
+            <a:off x="457200" y="1371600"/>
+            <a:ext cx="11247120" cy="1691640"/>
           </a:xfrm>
           <a:prstGeom prst="rect">
             <a:avLst/>
@@ -4502,7 +4464,7 @@
               <a:buChar char="•"/>
             </a:pPr>
             <a:r>
-              <a:rPr lang="en-US" sz="1250" dirty="0">
+              <a:rPr lang="en-US" sz="1200" dirty="0">
                 <a:solidFill>
                   <a:srgbClr val="1B2A36"/>
                 </a:solidFill>
@@ -4510,9 +4472,9 @@
                 <a:ea typeface="Calibri" pitchFamily="34" charset="-122"/>
                 <a:cs typeface="Calibri" pitchFamily="34" charset="-120"/>
               </a:rPr>
-              <a:t>D3 — category diversity ranges 2–14 (consumer mean 12.9; 908 of 999 at 13–14). r = +0.94 with engagement; still +0.81 without the dormant tail (Spearman +0.85) — not a tail artefact.</a:t>
-            </a:r>
-            <a:endParaRPr lang="en-US" sz="1250" dirty="0"/>
+              <a:t>D3: category diversity ranges 2–14 per month; the 908 full-year consumers average 12.5–14, the 91 one-off users 2–7. r = +0.94 across all consumers and still +0.81 within the full-year base (Spearman +0.79): breadth matters beyond the tail.</a:t>
+            </a:r>
+            <a:endParaRPr lang="en-US" sz="1200" dirty="0"/>
           </a:p>
           <a:p>
             <a:pPr marL="177800" indent="-177800">
@@ -4523,7 +4485,7 @@
               <a:buChar char="•"/>
             </a:pPr>
             <a:r>
-              <a:rPr lang="en-US" sz="1250" dirty="0">
+              <a:rPr lang="en-US" sz="1200" dirty="0">
                 <a:solidFill>
                   <a:srgbClr val="1B2A36"/>
                 </a:solidFill>
@@ -4531,9 +4493,9 @@
                 <a:ea typeface="Calibri" pitchFamily="34" charset="-122"/>
                 <a:cs typeface="Calibri" pitchFamily="34" charset="-120"/>
               </a:rPr>
-              <a:t>D4 — recency 0–30 days (median 0); active days 1–31 (median 30); transactions 2–713 per month (median 150). Links to engagement: active days r +0.59 &gt; recency −0.42 &gt; count +0.40.</a:t>
-            </a:r>
-            <a:endParaRPr lang="en-US" sz="1250" dirty="0"/>
+              <a:t>D4: recency 0–30 days (median 0), active days 1–31 (median 30), 2–713 transactions per month (median 150). Full-year consumers: recency ≤ 4 days, active days 15–31. Links (consumer, full-year): active days r +0.80, count +0.76, recency −0.58.</a:t>
+            </a:r>
+            <a:endParaRPr lang="en-US" sz="1200" dirty="0"/>
           </a:p>
           <a:p>
             <a:pPr marL="177800" indent="-177800">
@@ -4544,7 +4506,7 @@
               <a:buChar char="•"/>
             </a:pPr>
             <a:r>
-              <a:rPr lang="en-US" sz="1250" dirty="0">
+              <a:rPr lang="en-US" sz="1200" dirty="0">
                 <a:solidFill>
                   <a:srgbClr val="1B2A36"/>
                 </a:solidFill>
@@ -4552,15 +4514,15 @@
                 <a:ea typeface="Calibri" pitchFamily="34" charset="-122"/>
                 <a:cs typeface="Calibri" pitchFamily="34" charset="-120"/>
               </a:rPr>
-              <a:t>Heatmap: 30–31 active days &amp; recency 0 → engagement 79.8 (n = 6,614); every 1–5-active-day cell stays ≤ 55 → consistency beats recency and volume.</a:t>
-            </a:r>
-            <a:endParaRPr lang="en-US" sz="1250" dirty="0"/>
+              <a:t>Heatmap: 30–31 active days &amp; recency 0 → engagement 79.8 (n = 6,614 months); every 1–5-active-day cell stays ≤ 55 → watch falling breadth and active days, not recency.</a:t>
+            </a:r>
+            <a:endParaRPr lang="en-US" sz="1200" dirty="0"/>
           </a:p>
         </p:txBody>
       </p:sp>
       <p:pic>
         <p:nvPicPr>
-          <p:cNvPr id="5" name="Image 0" descr="D:\BI10GroupYAPPERS\outputs\figures\t3_diversity_vs_engagement.png">    </p:cNvPr>
+          <p:cNvPr id="5" name="Image 0" descr="D:\BI10GroupYAPPERS\outputs\figures\v2_t3_diversity_engagement.png">    </p:cNvPr>
           <p:cNvPicPr>
             <a:picLocks noChangeAspect="1"/>
           </p:cNvPicPr>
@@ -4573,8 +4535,8 @@
         </p:blipFill>
         <p:spPr>
           <a:xfrm>
-            <a:off x="502920" y="3017520"/>
-            <a:ext cx="5440680" cy="3063240"/>
+            <a:off x="457200" y="3063240"/>
+            <a:ext cx="5532120" cy="3017520"/>
           </a:xfrm>
           <a:prstGeom prst="rect">
             <a:avLst/>
@@ -4596,8 +4558,8 @@
         </p:blipFill>
         <p:spPr>
           <a:xfrm>
-            <a:off x="6263640" y="3017520"/>
-            <a:ext cx="5440680" cy="3063240"/>
+            <a:off x="6172200" y="3063240"/>
+            <a:ext cx="5532120" cy="3017520"/>
           </a:xfrm>
           <a:prstGeom prst="rect">
             <a:avLst/>
@@ -4612,8 +4574,8 @@
         </p:nvSpPr>
         <p:spPr>
           <a:xfrm>
-            <a:off x="502920" y="6144768"/>
-            <a:ext cx="11201400" cy="256032"/>
+            <a:off x="457200" y="6144768"/>
+            <a:ext cx="11247120" cy="256032"/>
           </a:xfrm>
           <a:prstGeom prst="rect">
             <a:avLst/>
@@ -4637,7 +4599,7 @@
                 <a:ea typeface="Calibri" pitchFamily="34" charset="-122"/>
                 <a:cs typeface="Calibri" pitchFamily="34" charset="-120"/>
               </a:rPr>
-              <a:t>Source: consumer_financial_health_engagement_2025 — 10,992 consumer-months, 999 consumers, 2025.</a:t>
+              <a:t>Source: consumer_financial_health_engagement_2025 (10,992 consumer-months, 999 consumers, 2025).</a:t>
             </a:r>
             <a:endParaRPr lang="en-US" sz="850" dirty="0"/>
           </a:p>
@@ -4762,7 +4724,7 @@
         <p:spPr>
           <a:xfrm>
             <a:off x="457200" y="384048"/>
-            <a:ext cx="4114800" cy="292608"/>
+            <a:ext cx="7315200" cy="292608"/>
           </a:xfrm>
           <a:prstGeom prst="rect">
             <a:avLst/>
@@ -4801,7 +4763,7 @@
         <p:spPr>
           <a:xfrm>
             <a:off x="457200" y="658368"/>
-            <a:ext cx="11247120" cy="868680"/>
+            <a:ext cx="11247120" cy="731520"/>
           </a:xfrm>
           <a:prstGeom prst="rect">
             <a:avLst/>
@@ -4820,7 +4782,7 @@
               <a:buNone/>
             </a:pPr>
             <a:r>
-              <a:rPr lang="en-US" sz="2700" b="1" dirty="0">
+              <a:rPr lang="en-US" sz="2500" b="1" dirty="0">
                 <a:solidFill>
                   <a:srgbClr val="12435E"/>
                 </a:solidFill>
@@ -4828,9 +4790,9 @@
                 <a:ea typeface="Cambria" pitchFamily="34" charset="-122"/>
                 <a:cs typeface="Cambria" pitchFamily="34" charset="-120"/>
               </a:rPr>
-              <a:t>High-health, low-engagement: 25 good customers drifting away</a:t>
-            </a:r>
-            <a:endParaRPr lang="en-US" sz="2700" dirty="0"/>
+              <a:t>25 healthy customers used the card on only 1–2 days all year</a:t>
+            </a:r>
+            <a:endParaRPr lang="en-US" sz="2500" dirty="0"/>
           </a:p>
         </p:txBody>
       </p:sp>
@@ -4842,8 +4804,8 @@
         </p:nvSpPr>
         <p:spPr>
           <a:xfrm>
-            <a:off x="457200" y="1554480"/>
-            <a:ext cx="5760720" cy="4572000"/>
+            <a:off x="457200" y="1463040"/>
+            <a:ext cx="5760720" cy="4663440"/>
           </a:xfrm>
           <a:prstGeom prst="rect">
             <a:avLst/>
@@ -4871,7 +4833,7 @@
                 <a:ea typeface="Calibri" pitchFamily="34" charset="-122"/>
                 <a:cs typeface="Calibri" pitchFamily="34" charset="-120"/>
               </a:rPr>
-              <a:t>Cutoff: FHS ≥ 70 (≈ p79, top 21% of consumers) AND engagement &lt; 70 (below p10 = 71.1) → 25 consumers (2.5%).</a:t>
+              <a:t>Cutoff: FHS ≥ 70 (top 21%, p79) AND engagement &lt; 70 (below the consumer p10 = 71.1) → 25 consumers = 2.5% of the base, 11.8% of the 211 healthy.</a:t>
             </a:r>
             <a:endParaRPr lang="en-US" sz="1200" dirty="0"/>
           </a:p>
@@ -4892,7 +4854,7 @@
                 <a:ea typeface="Calibri" pitchFamily="34" charset="-122"/>
                 <a:cs typeface="Calibri" pitchFamily="34" charset="-120"/>
               </a:rPr>
-              <a:t>Why not stricter / looser: the count stays 25 at engagement &lt; 60, 65, 68, 70 (a natural gap), then jumps to 36 (&lt; 72), 52 (&lt; 74), 63 (&lt; 75) as it reaches the main body. FHS ≥ 65 gives 48; ≥ 75 gives 9.</a:t>
+              <a:t>Why 70: one-off users score ≤ 61.6 and full-year consumers ≥ 69.8, so cutoffs 60–70 all give 25; &lt; 72 / 75 pull in active users (36 / 63). FHS ≥ 65 → 48 (not clearly healthy); ≥ 75 → 9.</a:t>
             </a:r>
             <a:endParaRPr lang="en-US" sz="1200" dirty="0"/>
           </a:p>
@@ -4913,7 +4875,7 @@
                 <a:ea typeface="Calibri" pitchFamily="34" charset="-122"/>
                 <a:cs typeface="Calibri" pitchFamily="34" charset="-120"/>
               </a:rPr>
-              <a:t>Profile vs rest: FHS 74.0 vs 66.1 · engagement 46.8 vs 76.1 · 9.9 vs 159 transactions/month · 2.0 vs 27.0 active days · recency 14.3 vs 0.9 days · diversity 4.7 vs 13.1 · online 0.61 vs 0.24.</a:t>
+              <a:t>Profile vs rest: 2.0 vs 27.0 active days · 9.9 vs 159 transactions/month · diversity 4.7 vs 13.1 · online 0.61 vs 0.24 · age 61 vs 50 · spend/income 0.46 vs 0.70.</a:t>
             </a:r>
             <a:endParaRPr lang="en-US" sz="1200" dirty="0"/>
           </a:p>
@@ -4934,7 +4896,7 @@
                 <a:ea typeface="Calibri" pitchFamily="34" charset="-122"/>
                 <a:cs typeface="Calibri" pitchFamily="34" charset="-120"/>
               </a:rPr>
-              <a:t>24 of 25 sit in Emerging Digital → play = reactivation of everyday use, not budgeting.</a:t>
+              <a:t>19 of 25 were last seen in Jan–Jul (silent 5+ months); 24 of 25 are Occasional Online-First → play = win back everyday use, not budgeting.</a:t>
             </a:r>
             <a:endParaRPr lang="en-US" sz="1200" dirty="0"/>
           </a:p>
@@ -4942,7 +4904,7 @@
       </p:sp>
       <p:pic>
         <p:nvPicPr>
-          <p:cNvPr id="5" name="Image 0" descr="D:\BI10GroupYAPPERS\outputs\figures\t3_health_vs_engagement_quadrant.png">    </p:cNvPr>
+          <p:cNvPr id="5" name="Image 0" descr="D:\BI10GroupYAPPERS\outputs\figures\v2_t3_quadrant.png">    </p:cNvPr>
           <p:cNvPicPr>
             <a:picLocks noChangeAspect="1"/>
           </p:cNvPicPr>
@@ -4955,8 +4917,8 @@
         </p:blipFill>
         <p:spPr>
           <a:xfrm>
-            <a:off x="6446520" y="1554480"/>
-            <a:ext cx="5303520" cy="4023360"/>
+            <a:off x="6446520" y="1463040"/>
+            <a:ext cx="5303520" cy="4114800"/>
           </a:xfrm>
           <a:prstGeom prst="rect">
             <a:avLst/>
@@ -4996,7 +4958,7 @@
                 <a:ea typeface="Calibri" pitchFamily="34" charset="-122"/>
                 <a:cs typeface="Calibri" pitchFamily="34" charset="-120"/>
               </a:rPr>
-              <a:t>Source: consumer_financial_health_engagement_2025 — 10,992 consumer-months, 999 consumers, 2025.</a:t>
+              <a:t>Source: consumer_financial_health_engagement_2025 (10,992 consumer-months, 999 consumers, 2025).</a:t>
             </a:r>
             <a:endParaRPr lang="en-US" sz="850" dirty="0"/>
           </a:p>
@@ -5035,7 +4997,7 @@
                 <a:ea typeface="Calibri" pitchFamily="34" charset="-122"/>
                 <a:cs typeface="Calibri" pitchFamily="34" charset="-120"/>
               </a:rPr>
-              <a:t>⚠  n = 25, synthetic-inflated engagement — a cohort to watch, not a sized forecast.</a:t>
+              <a:t>⚠  n = 25, one month of data each: FHS is a single reading. A watch-list, not a sized forecast; never used to limit credit.</a:t>
             </a:r>
             <a:endParaRPr lang="en-US" sz="950" dirty="0"/>
           </a:p>
@@ -5160,7 +5122,7 @@
         <p:spPr>
           <a:xfrm>
             <a:off x="457200" y="384048"/>
-            <a:ext cx="4114800" cy="292608"/>
+            <a:ext cx="7315200" cy="292608"/>
           </a:xfrm>
           <a:prstGeom prst="rect">
             <a:avLst/>
@@ -5199,7 +5161,7 @@
         <p:spPr>
           <a:xfrm>
             <a:off x="457200" y="658368"/>
-            <a:ext cx="11247120" cy="868680"/>
+            <a:ext cx="11247120" cy="731520"/>
           </a:xfrm>
           <a:prstGeom prst="rect">
             <a:avLst/>
@@ -5218,7 +5180,7 @@
               <a:buNone/>
             </a:pPr>
             <a:r>
-              <a:rPr lang="en-US" sz="2700" b="1" dirty="0">
+              <a:rPr lang="en-US" sz="2500" b="1" dirty="0">
                 <a:solidFill>
                   <a:srgbClr val="12435E"/>
                 </a:solidFill>
@@ -5226,9 +5188,9 @@
                 <a:ea typeface="Cambria" pitchFamily="34" charset="-122"/>
                 <a:cs typeface="Cambria" pitchFamily="34" charset="-120"/>
               </a:rPr>
-              <a:t>Preprocessing, features and model choice</a:t>
-            </a:r>
-            <a:endParaRPr lang="en-US" sz="2700" dirty="0"/>
+              <a:t>Three business axes, one model: coverage, health and activity</a:t>
+            </a:r>
+            <a:endParaRPr lang="en-US" sz="2500" dirty="0"/>
           </a:p>
         </p:txBody>
       </p:sp>
@@ -5240,8 +5202,8 @@
         </p:nvSpPr>
         <p:spPr>
           <a:xfrm>
-            <a:off x="457200" y="1554480"/>
-            <a:ext cx="5760720" cy="4572000"/>
+            <a:off x="457200" y="1463040"/>
+            <a:ext cx="5760720" cy="4663440"/>
           </a:xfrm>
           <a:prstGeom prst="rect">
             <a:avLst/>
@@ -5261,7 +5223,7 @@
               <a:buChar char="•"/>
             </a:pPr>
             <a:r>
-              <a:rPr lang="en-US" sz="1200" dirty="0">
+              <a:rPr lang="en-US" sz="1250" dirty="0">
                 <a:solidFill>
                   <a:srgbClr val="1B2A36"/>
                 </a:solidFill>
@@ -5269,9 +5231,9 @@
                 <a:ea typeface="Calibri" pitchFamily="34" charset="-122"/>
                 <a:cs typeface="Calibri" pitchFamily="34" charset="-120"/>
               </a:rPr>
-              <a:t>Preprocessing: 10,992 consumer-months → 999 consumers (yearly mean of each ratio = typical monthly profile); 0 nulls after aggregation; raw VND excluded. The preprocessed dataset (task4_features.csv) and its data dictionary are in the submission ZIP.</a:t>
-            </a:r>
-            <a:endParaRPr lang="en-US" sz="1200" dirty="0"/>
+              <a:t>Preprocessing: 10,992 consumer-months → 999 consumers (yearly mean per ratio), 0 nulls, raw VND excluded. The preprocessed dataset + dictionary are in the ZIP (task4_features.csv).</a:t>
+            </a:r>
+            <a:endParaRPr lang="en-US" sz="1250" dirty="0"/>
           </a:p>
           <a:p>
             <a:pPr marL="177800" indent="-177800">
@@ -5282,7 +5244,7 @@
               <a:buChar char="•"/>
             </a:pPr>
             <a:r>
-              <a:rPr lang="en-US" sz="1200" dirty="0">
+              <a:rPr lang="en-US" sz="1250" dirty="0">
                 <a:solidFill>
                   <a:srgbClr val="1B2A36"/>
                 </a:solidFill>
@@ -5290,9 +5252,9 @@
                 <a:ea typeface="Calibri" pitchFamily="34" charset="-122"/>
                 <a:cs typeface="Calibri" pitchFamily="34" charset="-120"/>
               </a:rPr>
-              <a:t>8 features, z-scaled: health (FHS, spend-to-income, credit-utilization, volatility) · engagement (engagement score, transaction count) · spending (discretionary, online ratio).</a:t>
-            </a:r>
-            <a:endParaRPr lang="en-US" sz="1200" dirty="0"/>
+              <a:t>8 z-scaled inputs: health (FHS, spend/income, utilization, volatility) · activity (engagement, transactions) · mix (discretionary, online share).</a:t>
+            </a:r>
+            <a:endParaRPr lang="en-US" sz="1250" dirty="0"/>
           </a:p>
           <a:p>
             <a:pPr marL="177800" indent="-177800">
@@ -5303,7 +5265,7 @@
               <a:buChar char="•"/>
             </a:pPr>
             <a:r>
-              <a:rPr lang="en-US" sz="1200" dirty="0">
+              <a:rPr lang="en-US" sz="1250" dirty="0">
                 <a:solidFill>
                   <a:srgbClr val="1B2A36"/>
                 </a:solidFill>
@@ -5311,9 +5273,9 @@
                 <a:ea typeface="Calibri" pitchFamily="34" charset="-122"/>
                 <a:cs typeface="Calibri" pitchFamily="34" charset="-120"/>
               </a:rPr>
-              <a:t>Excluded with reason: essential ratio (= 1 − discretionary), diversity / active days / recency (p75 = max, near-constant); demographics kept for profiling only.</a:t>
-            </a:r>
-            <a:endParaRPr lang="en-US" sz="1200" dirty="0"/>
+              <a:t>Excluded with reason: essential ratio (= 1 − discretionary); diversity, active days, recency (p75 already at the best value). Demographics used for profiling only, never as inputs.</a:t>
+            </a:r>
+            <a:endParaRPr lang="en-US" sz="1250" dirty="0"/>
           </a:p>
           <a:p>
             <a:pPr marL="177800" indent="-177800">
@@ -5324,7 +5286,7 @@
               <a:buChar char="•"/>
             </a:pPr>
             <a:r>
-              <a:rPr lang="en-US" sz="1200" dirty="0">
+              <a:rPr lang="en-US" sz="1250" dirty="0">
                 <a:solidFill>
                   <a:srgbClr val="1B2A36"/>
                 </a:solidFill>
@@ -5332,15 +5294,15 @@
                 <a:ea typeface="Calibri" pitchFamily="34" charset="-122"/>
                 <a:cs typeface="Calibri" pitchFamily="34" charset="-120"/>
               </a:rPr>
-              <a:t>k-means over a pure 2×2: boundaries form across all 8 dimensions. k = 4 via elbow + best silhouette in the 4–6 range (0.251; k = 2 wins at 0.557 but collapses the personas). Coverage 999 / 999, 7 minors kept.</a:t>
-            </a:r>
-            <a:endParaRPr lang="en-US" sz="1200" dirty="0"/>
+              <a:t>Why k = 4 (k-means): k = 2 splits off part-year customers, k = 3 adds health, k = 4 adds activity; k ≥ 5 only subdivides. Silhouette 0.25 (separation, 0–1); coverage 999 / 999 incl. 7 minors.</a:t>
+            </a:r>
+            <a:endParaRPr lang="en-US" sz="1250" dirty="0"/>
           </a:p>
         </p:txBody>
       </p:sp>
       <p:pic>
         <p:nvPicPr>
-          <p:cNvPr id="5" name="Image 0" descr="D:\BI10GroupYAPPERS\outputs\figures\t4_silhouette.png">    </p:cNvPr>
+          <p:cNvPr id="5" name="Image 0" descr="D:\BI10GroupYAPPERS\outputs\figures\v2_t4_k_selection.png">    </p:cNvPr>
           <p:cNvPicPr>
             <a:picLocks noChangeAspect="1"/>
           </p:cNvPicPr>
@@ -5353,8 +5315,8 @@
         </p:blipFill>
         <p:spPr>
           <a:xfrm>
-            <a:off x="6446520" y="1554480"/>
-            <a:ext cx="5303520" cy="4023360"/>
+            <a:off x="6446520" y="1463040"/>
+            <a:ext cx="5303520" cy="4114800"/>
           </a:xfrm>
           <a:prstGeom prst="rect">
             <a:avLst/>
@@ -5394,7 +5356,7 @@
                 <a:ea typeface="Calibri" pitchFamily="34" charset="-122"/>
                 <a:cs typeface="Calibri" pitchFamily="34" charset="-120"/>
               </a:rPr>
-              <a:t>Source: team k-means (k=4) on 8 z-scaled ratios, 999 consumers (task4_features.csv).</a:t>
+              <a:t>Source: team k-means (k = 4) on 8 z-scaled ratios, 999 consumers (task4_features.csv).</a:t>
             </a:r>
             <a:endParaRPr lang="en-US" sz="850" dirty="0"/>
           </a:p>
@@ -5519,7 +5481,7 @@
         <p:spPr>
           <a:xfrm>
             <a:off x="457200" y="384048"/>
-            <a:ext cx="4114800" cy="292608"/>
+            <a:ext cx="7315200" cy="292608"/>
           </a:xfrm>
           <a:prstGeom prst="rect">
             <a:avLst/>
@@ -5558,7 +5520,7 @@
         <p:spPr>
           <a:xfrm>
             <a:off x="457200" y="658368"/>
-            <a:ext cx="11247120" cy="868680"/>
+            <a:ext cx="11247120" cy="731520"/>
           </a:xfrm>
           <a:prstGeom prst="rect">
             <a:avLst/>
@@ -5577,7 +5539,7 @@
               <a:buNone/>
             </a:pPr>
             <a:r>
-              <a:rPr lang="en-US" sz="2700" b="1" dirty="0">
+              <a:rPr lang="en-US" sz="2500" b="1" dirty="0">
                 <a:solidFill>
                   <a:srgbClr val="12435E"/>
                 </a:solidFill>
@@ -5585,9 +5547,9 @@
                 <a:ea typeface="Cambria" pitchFamily="34" charset="-122"/>
                 <a:cs typeface="Cambria" pitchFamily="34" charset="-120"/>
               </a:rPr>
-              <a:t>Four segments, side by side</a:t>
-            </a:r>
-            <a:endParaRPr lang="en-US" sz="2700" dirty="0"/>
+              <a:t>Four segments, four different jobs for the product team</a:t>
+            </a:r>
+            <a:endParaRPr lang="en-US" sz="2500" dirty="0"/>
           </a:p>
         </p:txBody>
       </p:sp>
@@ -5599,8 +5561,8 @@
         </p:nvSpPr>
         <p:spPr>
           <a:xfrm>
-            <a:off x="457200" y="1417320"/>
-            <a:ext cx="11247120" cy="1600200"/>
+            <a:off x="457200" y="1371600"/>
+            <a:ext cx="11247120" cy="1691640"/>
           </a:xfrm>
           <a:prstGeom prst="rect">
             <a:avLst/>
@@ -5620,7 +5582,7 @@
               <a:buChar char="•"/>
             </a:pPr>
             <a:r>
-              <a:rPr lang="en-US" sz="1250" dirty="0">
+              <a:rPr lang="en-US" sz="1200" dirty="0">
                 <a:solidFill>
                   <a:srgbClr val="1B2A36"/>
                 </a:solidFill>
@@ -5628,9 +5590,9 @@
                 <a:ea typeface="Calibri" pitchFamily="34" charset="-122"/>
                 <a:cs typeface="Calibri" pitchFamily="34" charset="-120"/>
               </a:rPr>
-              <a:t>Healthy &amp; Highly Engaged — 351 (35.1%): FHS 70.5, lowest spend/income 0.571 &amp; utilization 0.148 → retain &amp; grow value.  ·  Stretched but Highly Engaged — 302 (30.2%): FHS 62.6, highest spend/income 0.835 &amp; utilization 0.248, still engaged 76.5 → wellbeing priority.</a:t>
-            </a:r>
-            <a:endParaRPr lang="en-US" sz="1250" dirty="0"/>
+              <a:t>Healthy &amp; Engaged 351 (35.1%): best FHS 70.5, lowest spend/income 0.57, utilization 0.15 → savings &amp; opt-in product offers.  ·  Stretched &amp; Engaged 302 (30.2%): spend/income 0.84, utilization 0.25, 20% had a stress month → budgeting tool + spend alerts.</a:t>
+            </a:r>
+            <a:endParaRPr lang="en-US" sz="1200" dirty="0"/>
           </a:p>
           <a:p>
             <a:pPr marL="177800" indent="-177800">
@@ -5641,7 +5603,7 @@
               <a:buChar char="•"/>
             </a:pPr>
             <a:r>
-              <a:rPr lang="en-US" sz="1250" dirty="0">
+              <a:rPr lang="en-US" sz="1200" dirty="0">
                 <a:solidFill>
                   <a:srgbClr val="1B2A36"/>
                 </a:solidFill>
@@ -5649,9 +5611,9 @@
                 <a:ea typeface="Calibri" pitchFamily="34" charset="-122"/>
                 <a:cs typeface="Calibri" pitchFamily="34" charset="-120"/>
               </a:rPr>
-              <a:t>Digital Power Users — 258 (25.8%): 251 transactions/month (1.6× avg), highest volatility 1.91 &amp; engagement 80.2 → monetise, monitor drift.  ·  Low Engagement &amp; Emerging Digital — 88 (8.8%): 9.7 transactions/month, engagement 49.6, but 67.1% online &amp; 86.6% discretionary → activate.</a:t>
-            </a:r>
-            <a:endParaRPr lang="en-US" sz="1250" dirty="0"/>
+              <a:t>High-Activity Users 258 (25.8%): 251 transactions/month (1.6× average), 30 active days, highest volatility 1.91; not more online (21% vs 25% average); youngest (43), 60% female → volatility smoothing, year-end planning reminders.</a:t>
+            </a:r>
+            <a:endParaRPr lang="en-US" sz="1200" dirty="0"/>
           </a:p>
           <a:p>
             <a:pPr marL="177800" indent="-177800">
@@ -5662,7 +5624,7 @@
               <a:buChar char="•"/>
             </a:pPr>
             <a:r>
-              <a:rPr lang="en-US" sz="1250" dirty="0">
+              <a:rPr lang="en-US" sz="1200" dirty="0">
                 <a:solidFill>
                   <a:srgbClr val="1B2A36"/>
                 </a:solidFill>
@@ -5670,15 +5632,15 @@
                 <a:ea typeface="Calibri" pitchFamily="34" charset="-122"/>
                 <a:cs typeface="Calibri" pitchFamily="34" charset="-120"/>
               </a:rPr>
-              <a:t>Suggested personas not formed: Essential-Spend-Focused = only 4 consumers; Healthy-but-Disengaged = 25, 24 of them inside Emerging Digital.</a:t>
-            </a:r>
-            <a:endParaRPr lang="en-US" sz="1250" dirty="0"/>
+              <a:t>Occasional Online-First 88 (8.8%) ≈ the brief's Emerging Digital: seen 1.1 of 12 months, 1.9 active days, 67% online, 75% of value non-POS → digital nudges to build a habit; scores rest on ~1 month (low confidence).</a:t>
+            </a:r>
+            <a:endParaRPr lang="en-US" sz="1200" dirty="0"/>
           </a:p>
         </p:txBody>
       </p:sp>
       <p:pic>
         <p:nvPicPr>
-          <p:cNvPr id="5" name="Image 0" descr="D:\BI10GroupYAPPERS\outputs\figures\t4_segment_sizes.png">    </p:cNvPr>
+          <p:cNvPr id="5" name="Image 0" descr="D:\BI10GroupYAPPERS\outputs\figures\v2_t4_sizes.png">    </p:cNvPr>
           <p:cNvPicPr>
             <a:picLocks noChangeAspect="1"/>
           </p:cNvPicPr>
@@ -5691,8 +5653,8 @@
         </p:blipFill>
         <p:spPr>
           <a:xfrm>
-            <a:off x="502920" y="3017520"/>
-            <a:ext cx="5440680" cy="3063240"/>
+            <a:off x="457200" y="3063240"/>
+            <a:ext cx="4206240" cy="3017520"/>
           </a:xfrm>
           <a:prstGeom prst="rect">
             <a:avLst/>
@@ -5701,7 +5663,7 @@
       </p:pic>
       <p:pic>
         <p:nvPicPr>
-          <p:cNvPr id="6" name="Image 1" descr="D:\BI10GroupYAPPERS\outputs\figures\t4_segment_profiles.png">    </p:cNvPr>
+          <p:cNvPr id="6" name="Image 1" descr="D:\BI10GroupYAPPERS\outputs\figures\v2_t4_profile_heatmap.png">    </p:cNvPr>
           <p:cNvPicPr>
             <a:picLocks noChangeAspect="1"/>
           </p:cNvPicPr>
@@ -5714,8 +5676,8 @@
         </p:blipFill>
         <p:spPr>
           <a:xfrm>
-            <a:off x="6263640" y="3017520"/>
-            <a:ext cx="5440680" cy="3063240"/>
+            <a:off x="4846320" y="3063240"/>
+            <a:ext cx="6858000" cy="3017520"/>
           </a:xfrm>
           <a:prstGeom prst="rect">
             <a:avLst/>
@@ -5730,8 +5692,8 @@
         </p:nvSpPr>
         <p:spPr>
           <a:xfrm>
-            <a:off x="502920" y="6144768"/>
-            <a:ext cx="11201400" cy="256032"/>
+            <a:off x="457200" y="6144768"/>
+            <a:ext cx="11247120" cy="256032"/>
           </a:xfrm>
           <a:prstGeom prst="rect">
             <a:avLst/>
@@ -5755,7 +5717,7 @@
                 <a:ea typeface="Calibri" pitchFamily="34" charset="-122"/>
                 <a:cs typeface="Calibri" pitchFamily="34" charset="-120"/>
               </a:rPr>
-              <a:t>Source: team k-means (k=4) on 8 z-scaled ratios, 999 consumers (task4_features.csv).</a:t>
+              <a:t>Source: team k-means (k = 4) on 8 z-scaled ratios, 999 consumers (task4_features.csv). Non-POS share from consumer_transactions_2025 (1,852,394 transactions, 2025).</a:t>
             </a:r>
             <a:endParaRPr lang="en-US" sz="850" dirty="0"/>
           </a:p>
@@ -5880,7 +5842,7 @@
         <p:spPr>
           <a:xfrm>
             <a:off x="457200" y="384048"/>
-            <a:ext cx="4114800" cy="292608"/>
+            <a:ext cx="7315200" cy="292608"/>
           </a:xfrm>
           <a:prstGeom prst="rect">
             <a:avLst/>
@@ -5919,7 +5881,7 @@
         <p:spPr>
           <a:xfrm>
             <a:off x="457200" y="658368"/>
-            <a:ext cx="11247120" cy="868680"/>
+            <a:ext cx="11247120" cy="731520"/>
           </a:xfrm>
           <a:prstGeom prst="rect">
             <a:avLst/>
@@ -5938,7 +5900,7 @@
               <a:buNone/>
             </a:pPr>
             <a:r>
-              <a:rPr lang="en-US" sz="2700" b="1" dirty="0">
+              <a:rPr lang="en-US" sz="2500" b="1" dirty="0">
                 <a:solidFill>
                   <a:srgbClr val="12435E"/>
                 </a:solidFill>
@@ -5946,9 +5908,9 @@
                 <a:ea typeface="Cambria" pitchFamily="34" charset="-122"/>
                 <a:cs typeface="Cambria" pitchFamily="34" charset="-120"/>
               </a:rPr>
-              <a:t>Stable segments, a December slide — and honest limits</a:t>
-            </a:r>
-            <a:endParaRPr lang="en-US" sz="2700" dirty="0"/>
+              <a:t>Stable where it matters, honest where it is thin</a:t>
+            </a:r>
+            <a:endParaRPr lang="en-US" sz="2500" dirty="0"/>
           </a:p>
         </p:txBody>
       </p:sp>
@@ -5960,8 +5922,8 @@
         </p:nvSpPr>
         <p:spPr>
           <a:xfrm>
-            <a:off x="457200" y="1463040"/>
-            <a:ext cx="5852160" cy="2606040"/>
+            <a:off x="457200" y="1371600"/>
+            <a:ext cx="5852160" cy="3108960"/>
           </a:xfrm>
           <a:prstGeom prst="rect">
             <a:avLst/>
@@ -5981,7 +5943,7 @@
               <a:buChar char="•"/>
             </a:pPr>
             <a:r>
-              <a:rPr lang="en-US" sz="1200" dirty="0">
+              <a:rPr lang="en-US" sz="1150" dirty="0">
                 <a:solidFill>
                   <a:srgbClr val="1B2A36"/>
                 </a:solidFill>
@@ -5989,9 +5951,9 @@
                 <a:ea typeface="Calibri" pitchFamily="34" charset="-122"/>
                 <a:cs typeface="Calibri" pitchFamily="34" charset="-120"/>
               </a:rPr>
-              <a:t>Stability: 20 random seeds → ARI 0.988; 80% bootstrap × 50 → ARI 0.911. Alternative GMM: ARI 0.26 — Emerging Digital identical, the three large segments form one continuum (hence silhouette 0.251).</a:t>
-            </a:r>
-            <a:endParaRPr lang="en-US" sz="1200" dirty="0"/>
+              <a:t>Stability (ARI, 1 = identical groups): 20 random seeds 0.988; 80% bootstrap × 50 0.911; dropping December 0.873. Changing features or aggregation moves ~⅓ of labels (0.62–0.63).</a:t>
+            </a:r>
+            <a:endParaRPr lang="en-US" sz="1150" dirty="0"/>
           </a:p>
           <a:p>
             <a:pPr marL="177800" indent="-177800">
@@ -6002,7 +5964,7 @@
               <a:buChar char="•"/>
             </a:pPr>
             <a:r>
-              <a:rPr lang="en-US" sz="1200" dirty="0">
+              <a:rPr lang="en-US" sz="1150" dirty="0">
                 <a:solidFill>
                   <a:srgbClr val="1B2A36"/>
                 </a:solidFill>
@@ -6010,9 +5972,9 @@
                 <a:ea typeface="Calibri" pitchFamily="34" charset="-122"/>
                 <a:cs typeface="Calibri" pitchFamily="34" charset="-120"/>
               </a:rPr>
-              <a:t>Rule-based cross-check (2×2 median split of health × engagement): 344 of 351 Healthy and 273 of 302 Stretched customers fall in the matching halves.</a:t>
-            </a:r>
-            <a:endParaRPr lang="en-US" sz="1200" dirty="0"/>
+              <a:t>Structure: Occasional is distinct (silhouette 0.47; = "seen &lt; 12 months", ARI 0.98); the 3 full-year segments form a continuum (0.19–0.27; GMM ARI 0.26) → zones, not types.</a:t>
+            </a:r>
+            <a:endParaRPr lang="en-US" sz="1150" dirty="0"/>
           </a:p>
           <a:p>
             <a:pPr marL="177800" indent="-177800">
@@ -6023,7 +5985,7 @@
               <a:buChar char="•"/>
             </a:pPr>
             <a:r>
-              <a:rPr lang="en-US" sz="1200" dirty="0">
+              <a:rPr lang="en-US" sz="1150" dirty="0">
                 <a:solidFill>
                   <a:srgbClr val="1B2A36"/>
                 </a:solidFill>
@@ -6031,9 +5993,9 @@
                 <a:ea typeface="Calibri" pitchFamily="34" charset="-122"/>
                 <a:cs typeface="Calibri" pitchFamily="34" charset="-120"/>
               </a:rPr>
-              <a:t>Monthly migration: a Healthy month is followed by a Stretched month 23% of the time — 72% from November to December.</a:t>
-            </a:r>
-            <a:endParaRPr lang="en-US" sz="1200" dirty="0"/>
+              <a:t>2×2 cross-check: the health axis agrees (344/351 Healthy above the FHS median, 273/302 Stretched below); the engagement median (78.2) does not separate them → activity axis added.</a:t>
+            </a:r>
+            <a:endParaRPr lang="en-US" sz="1150" dirty="0"/>
           </a:p>
           <a:p>
             <a:pPr marL="177800" indent="-177800">
@@ -6044,7 +6006,7 @@
               <a:buChar char="•"/>
             </a:pPr>
             <a:r>
-              <a:rPr lang="en-US" sz="1200" dirty="0">
+              <a:rPr lang="en-US" sz="1150" dirty="0">
                 <a:solidFill>
                   <a:srgbClr val="1B2A36"/>
                 </a:solidFill>
@@ -6052,15 +6014,15 @@
                 <a:ea typeface="Calibri" pitchFamily="34" charset="-122"/>
                 <a:cs typeface="Calibri" pitchFamily="34" charset="-120"/>
               </a:rPr>
-              <a:t>Bias check: segments correlate with age &amp; gender (chi-square p &lt; 0.01) though not inputs → trigger every tool on behaviour, never on demographics.</a:t>
-            </a:r>
-            <a:endParaRPr lang="en-US" sz="1200" dirty="0"/>
+              <a:t>December cuts FHS 12.8 / 14.2 / 13.4 pts in all 3 full-year segments alike → a calendar effect: reminders go to everyone. Age / gender differ (Cramér's V 0.19 / 0.13) → act on behaviour.</a:t>
+            </a:r>
+            <a:endParaRPr lang="en-US" sz="1150" dirty="0"/>
           </a:p>
         </p:txBody>
       </p:sp>
       <p:pic>
         <p:nvPicPr>
-          <p:cNvPr id="5" name="Image 0" descr="D:\BI10GroupYAPPERS\outputs\figures\t4_pca.png">    </p:cNvPr>
+          <p:cNvPr id="5" name="Image 0" descr="D:\BI10GroupYAPPERS\outputs\figures\v2_t4_pca.png">    </p:cNvPr>
           <p:cNvPicPr>
             <a:picLocks noChangeAspect="1"/>
           </p:cNvPicPr>
@@ -6073,8 +6035,8 @@
         </p:blipFill>
         <p:spPr>
           <a:xfrm>
-            <a:off x="6446520" y="1463040"/>
-            <a:ext cx="5303520" cy="2697480"/>
+            <a:off x="6446520" y="1371600"/>
+            <a:ext cx="5303520" cy="2788920"/>
           </a:xfrm>
           <a:prstGeom prst="rect">
             <a:avLst/>
@@ -6089,7 +6051,7 @@
         </p:nvSpPr>
         <p:spPr>
           <a:xfrm>
-            <a:off x="6446520" y="4160520"/>
+            <a:off x="6446520" y="4187952"/>
             <a:ext cx="5303520" cy="256032"/>
           </a:xfrm>
           <a:prstGeom prst="rect">
@@ -6114,7 +6076,7 @@
                 <a:ea typeface="Calibri" pitchFamily="34" charset="-122"/>
                 <a:cs typeface="Calibri" pitchFamily="34" charset="-120"/>
               </a:rPr>
-              <a:t>Source: team k-means (k=4) on 8 z-scaled ratios, 999 consumers (task4_features.csv). PCA = 73% of variance.</a:t>
+              <a:t>Source: team k-means (k = 4) on 8 z-scaled ratios, 999 consumers (task4_features.csv). PCA of 8 z-scaled features = 73% of variance.</a:t>
             </a:r>
             <a:endParaRPr lang="en-US" sz="850" dirty="0"/>
           </a:p>
@@ -6128,12 +6090,12 @@
         </p:nvSpPr>
         <p:spPr>
           <a:xfrm>
-            <a:off x="457200" y="4480560"/>
-            <a:ext cx="5532120" cy="1874520"/>
+            <a:off x="457200" y="4526280"/>
+            <a:ext cx="5532120" cy="1828800"/>
           </a:xfrm>
           <a:prstGeom prst="roundRect">
             <a:avLst>
-              <a:gd name="adj" fmla="val 2927"/>
+              <a:gd name="adj" fmla="val 3000"/>
             </a:avLst>
           </a:prstGeom>
           <a:solidFill>
@@ -6150,8 +6112,8 @@
         </p:nvSpPr>
         <p:spPr>
           <a:xfrm>
-            <a:off x="621792" y="4553712"/>
-            <a:ext cx="5212080" cy="1737360"/>
+            <a:off x="621792" y="4599432"/>
+            <a:ext cx="5212080" cy="1700784"/>
           </a:xfrm>
           <a:prstGeom prst="rect">
             <a:avLst/>
@@ -6198,7 +6160,7 @@
                 <a:ea typeface="Calibri" pitchFamily="34" charset="-122"/>
                 <a:cs typeface="Calibri" pitchFamily="34" charset="-120"/>
               </a:rPr>
-              <a:t>•  Technical: moderate silhouette; yearly means hide within-year trajectory; feature choice is a judgement call.</a:t>
+              <a:t>•  Moderate separation (silhouette 0.25); full-year segments are a continuum sensitive to feature choice.</a:t>
             </a:r>
             <a:endParaRPr lang="en-US" sz="1250" dirty="0"/>
           </a:p>
@@ -6218,7 +6180,7 @@
                 <a:ea typeface="Calibri" pitchFamily="34" charset="-122"/>
                 <a:cs typeface="Calibri" pitchFamily="34" charset="-120"/>
               </a:rPr>
-              <a:t>•  Data: synthetic, two source years folded onto 2025; engagement engineered high; Emerging Digital (n = 88) least robust.</a:t>
+              <a:t>•  Yearly means hide trajectory; 91 customers seen &lt; 12 months carry ~1-month scores (low confidence).</a:t>
             </a:r>
             <a:endParaRPr lang="en-US" sz="1250" dirty="0"/>
           </a:p>
@@ -6238,7 +6200,7 @@
                 <a:ea typeface="Calibri" pitchFamily="34" charset="-122"/>
                 <a:cs typeface="Calibri" pitchFamily="34" charset="-120"/>
               </a:rPr>
-              <a:t>•  Operational: segments are wellbeing groups, not risk tiers — never for lending.</a:t>
+              <a:t>•  Synthetic data, two source years folded onto 2025, engagement saturated. Wellbeing groups only: never lending, limits or pricing.</a:t>
             </a:r>
             <a:endParaRPr lang="en-US" sz="1250" dirty="0"/>
           </a:p>
@@ -6252,12 +6214,12 @@
         </p:nvSpPr>
         <p:spPr>
           <a:xfrm>
-            <a:off x="6217920" y="4480560"/>
-            <a:ext cx="5532120" cy="1874520"/>
+            <a:off x="6217920" y="4526280"/>
+            <a:ext cx="5532120" cy="1828800"/>
           </a:xfrm>
           <a:prstGeom prst="roundRect">
             <a:avLst>
-              <a:gd name="adj" fmla="val 2927"/>
+              <a:gd name="adj" fmla="val 3000"/>
             </a:avLst>
           </a:prstGeom>
           <a:solidFill>
@@ -6274,8 +6236,8 @@
         </p:nvSpPr>
         <p:spPr>
           <a:xfrm>
-            <a:off x="6382512" y="4553712"/>
-            <a:ext cx="5212080" cy="1737360"/>
+            <a:off x="6382512" y="4599432"/>
+            <a:ext cx="5212080" cy="1700784"/>
           </a:xfrm>
           <a:prstGeom prst="rect">
             <a:avLst/>
@@ -6322,7 +6284,7 @@
                 <a:ea typeface="Calibri" pitchFamily="34" charset="-122"/>
                 <a:cs typeface="Calibri" pitchFamily="34" charset="-120"/>
               </a:rPr>
-              <a:t>•  Refit on multi-year real data; track segment migration monthly.</a:t>
+              <a:t>•  Hybrid model: a rule for part-year customers + k-means k = 3 on full-year customers (ARI 0.86 vs today).</a:t>
             </a:r>
             <a:endParaRPr lang="en-US" sz="1250" dirty="0"/>
           </a:p>
@@ -6342,7 +6304,7 @@
                 <a:ea typeface="Calibri" pitchFamily="34" charset="-122"/>
                 <a:cs typeface="Calibri" pitchFamily="34" charset="-120"/>
               </a:rPr>
-              <a:t>•  Trajectory features (FHS slope, volatility trend) + GMM soft membership for boundary customers.</a:t>
+              <a:t>•  Trajectory features (within-year FHS SD: 17.1 Occasional vs 7.7 Healthy) and GMM soft membership.</a:t>
             </a:r>
             <a:endParaRPr lang="en-US" sz="1250" dirty="0"/>
           </a:p>
@@ -6362,7 +6324,7 @@
                 <a:ea typeface="Calibri" pitchFamily="34" charset="-122"/>
                 <a:cs typeface="Calibri" pitchFamily="34" charset="-120"/>
               </a:rPr>
-              <a:t>•  Chronological model for next_month_low_health_flag (train Jan–Aug, test Nov) as an early-warning — support only.</a:t>
+              <a:t>•  Chronological early-warning on next_month_low_health_flag (train Jan–Aug, test Nov), to offer help only.</a:t>
             </a:r>
             <a:endParaRPr lang="en-US" sz="1250" dirty="0"/>
           </a:p>
@@ -6370,7 +6332,7 @@
       </p:sp>
       <p:sp>
         <p:nvSpPr>
-          <p:cNvPr id="12" name="Text 8"/>
+          <p:cNvPr id="11" name="Text 8"/>
           <p:cNvSpPr txBox="1"/>
           <p:nvPr/>
         </p:nvSpPr>
@@ -6409,7 +6371,7 @@
       </p:sp>
       <p:sp>
         <p:nvSpPr>
-          <p:cNvPr id="13" name="Text 9"/>
+          <p:cNvPr id="12" name="Text 9"/>
           <p:cNvSpPr txBox="1"/>
           <p:nvPr/>
         </p:nvSpPr>
@@ -6487,7 +6449,7 @@
         <p:spPr>
           <a:xfrm>
             <a:off x="457200" y="384048"/>
-            <a:ext cx="4114800" cy="292608"/>
+            <a:ext cx="7315200" cy="292608"/>
           </a:xfrm>
           <a:prstGeom prst="rect">
             <a:avLst/>
@@ -6526,7 +6488,7 @@
         <p:spPr>
           <a:xfrm>
             <a:off x="457200" y="658368"/>
-            <a:ext cx="11247120" cy="868680"/>
+            <a:ext cx="11247120" cy="731520"/>
           </a:xfrm>
           <a:prstGeom prst="rect">
             <a:avLst/>
@@ -6545,7 +6507,7 @@
               <a:buNone/>
             </a:pPr>
             <a:r>
-              <a:rPr lang="en-US" sz="2700" b="1" dirty="0">
+              <a:rPr lang="en-US" sz="2500" b="1" dirty="0">
                 <a:solidFill>
                   <a:srgbClr val="12435E"/>
                 </a:solidFill>
@@ -6553,9 +6515,9 @@
                 <a:ea typeface="Cambria" pitchFamily="34" charset="-122"/>
                 <a:cs typeface="Cambria" pitchFamily="34" charset="-120"/>
               </a:rPr>
-              <a:t>Six non-punitive tools, each tied to a data finding</a:t>
-            </a:r>
-            <a:endParaRPr lang="en-US" sz="2700" dirty="0"/>
+              <a:t>Six non-punitive tools, each tied to a measured data finding</a:t>
+            </a:r>
+            <a:endParaRPr lang="en-US" sz="2500" dirty="0"/>
           </a:p>
         </p:txBody>
       </p:sp>
@@ -6574,7 +6536,7 @@
           </p:nvPr>
         </p:nvGraphicFramePr>
         <p:xfrm>
-          <a:off x="457200" y="1508760"/>
+          <a:off x="457200" y="1417320"/>
           <a:ext cx="11247120" cy="914400"/>
         </p:xfrm>
         <a:graphic>
@@ -6582,11 +6544,11 @@
             <a:tbl>
               <a:tblPr/>
               <a:tblGrid>
-                <a:gridCol w="1691640"/>
+                <a:gridCol w="1600200"/>
                 <a:gridCol w="2331720"/>
-                <a:gridCol w="2926080"/>
+                <a:gridCol w="3063240"/>
                 <a:gridCol w="2743200"/>
-                <a:gridCol w="1554480"/>
+                <a:gridCol w="1508760"/>
               </a:tblGrid>
               <a:tr h="566928">
                 <a:tc>
@@ -6598,7 +6560,7 @@
                         <a:buNone/>
                       </a:pPr>
                       <a:r>
-                        <a:rPr lang="en-US" sz="1100" b="1" dirty="0">
+                        <a:rPr lang="en-US" sz="1050" b="1" dirty="0">
                           <a:solidFill>
                             <a:srgbClr val="FFFFFF"/>
                           </a:solidFill>
@@ -6608,7 +6570,7 @@
                         </a:rPr>
                         <a:t>Tool</a:t>
                       </a:r>
-                      <a:endParaRPr lang="en-US" sz="1100" dirty="0">
+                      <a:endParaRPr lang="en-US" sz="1050" dirty="0">
                         <a:latin typeface="Calibri" charset="0"/>
                         <a:ea typeface="Calibri" charset="0"/>
                         <a:cs typeface="Calibri" charset="0"/>
@@ -6666,7 +6628,7 @@
                         <a:buNone/>
                       </a:pPr>
                       <a:r>
-                        <a:rPr lang="en-US" sz="1100" b="1" dirty="0">
+                        <a:rPr lang="en-US" sz="1050" b="1" dirty="0">
                           <a:solidFill>
                             <a:srgbClr val="FFFFFF"/>
                           </a:solidFill>
@@ -6676,7 +6638,7 @@
                         </a:rPr>
                         <a:t>Target group (n, % of 999)</a:t>
                       </a:r>
-                      <a:endParaRPr lang="en-US" sz="1100" dirty="0">
+                      <a:endParaRPr lang="en-US" sz="1050" dirty="0">
                         <a:latin typeface="Calibri" charset="0"/>
                         <a:ea typeface="Calibri" charset="0"/>
                         <a:cs typeface="Calibri" charset="0"/>
@@ -6734,7 +6696,7 @@
                         <a:buNone/>
                       </a:pPr>
                       <a:r>
-                        <a:rPr lang="en-US" sz="1100" b="1" dirty="0">
+                        <a:rPr lang="en-US" sz="1050" b="1" dirty="0">
                           <a:solidFill>
                             <a:srgbClr val="FFFFFF"/>
                           </a:solidFill>
@@ -6744,7 +6706,7 @@
                         </a:rPr>
                         <a:t>Data evidence</a:t>
                       </a:r>
-                      <a:endParaRPr lang="en-US" sz="1100" dirty="0">
+                      <a:endParaRPr lang="en-US" sz="1050" dirty="0">
                         <a:latin typeface="Calibri" charset="0"/>
                         <a:ea typeface="Calibri" charset="0"/>
                         <a:cs typeface="Calibri" charset="0"/>
@@ -6802,7 +6764,7 @@
                         <a:buNone/>
                       </a:pPr>
                       <a:r>
-                        <a:rPr lang="en-US" sz="1100" b="1" dirty="0">
+                        <a:rPr lang="en-US" sz="1050" b="1" dirty="0">
                           <a:solidFill>
                             <a:srgbClr val="FFFFFF"/>
                           </a:solidFill>
@@ -6812,7 +6774,7 @@
                         </a:rPr>
                         <a:t>Action</a:t>
                       </a:r>
-                      <a:endParaRPr lang="en-US" sz="1100" dirty="0">
+                      <a:endParaRPr lang="en-US" sz="1050" dirty="0">
                         <a:latin typeface="Calibri" charset="0"/>
                         <a:ea typeface="Calibri" charset="0"/>
                         <a:cs typeface="Calibri" charset="0"/>
@@ -6870,7 +6832,7 @@
                         <a:buNone/>
                       </a:pPr>
                       <a:r>
-                        <a:rPr lang="en-US" sz="1100" b="1" dirty="0">
+                        <a:rPr lang="en-US" sz="1050" b="1" dirty="0">
                           <a:solidFill>
                             <a:srgbClr val="FFFFFF"/>
                           </a:solidFill>
@@ -6880,7 +6842,7 @@
                         </a:rPr>
                         <a:t>KPI</a:t>
                       </a:r>
-                      <a:endParaRPr lang="en-US" sz="1100" dirty="0">
+                      <a:endParaRPr lang="en-US" sz="1050" dirty="0">
                         <a:latin typeface="Calibri" charset="0"/>
                         <a:ea typeface="Calibri" charset="0"/>
                         <a:cs typeface="Calibri" charset="0"/>
@@ -6940,7 +6902,7 @@
                         <a:buNone/>
                       </a:pPr>
                       <a:r>
-                        <a:rPr lang="en-US" sz="1050" dirty="0">
+                        <a:rPr lang="en-US" sz="1000" dirty="0">
                           <a:solidFill>
                             <a:srgbClr val="1B2A36"/>
                           </a:solidFill>
@@ -6950,7 +6912,7 @@
                         </a:rPr>
                         <a:t>① Budgeting tool</a:t>
                       </a:r>
-                      <a:endParaRPr lang="en-US" sz="1050" dirty="0">
+                      <a:endParaRPr lang="en-US" sz="1000" dirty="0">
                         <a:latin typeface="Calibri" charset="0"/>
                         <a:ea typeface="Calibri" charset="0"/>
                         <a:cs typeface="Calibri" charset="0"/>
@@ -7008,7 +6970,7 @@
                         <a:buNone/>
                       </a:pPr>
                       <a:r>
-                        <a:rPr lang="en-US" sz="1050" dirty="0">
+                        <a:rPr lang="en-US" sz="1000" dirty="0">
                           <a:solidFill>
                             <a:srgbClr val="1B2A36"/>
                           </a:solidFill>
@@ -7018,7 +6980,7 @@
                         </a:rPr>
                         <a:t>Stretched &amp; Engaged: 302 (30.2%)</a:t>
                       </a:r>
-                      <a:endParaRPr lang="en-US" sz="1050" dirty="0">
+                      <a:endParaRPr lang="en-US" sz="1000" dirty="0">
                         <a:latin typeface="Calibri" charset="0"/>
                         <a:ea typeface="Calibri" charset="0"/>
                         <a:cs typeface="Calibri" charset="0"/>
@@ -7076,7 +7038,7 @@
                         <a:buNone/>
                       </a:pPr>
                       <a:r>
-                        <a:rPr lang="en-US" sz="1050" dirty="0">
+                        <a:rPr lang="en-US" sz="1000" dirty="0">
                           <a:solidFill>
                             <a:srgbClr val="1B2A36"/>
                           </a:solidFill>
@@ -7084,9 +7046,9 @@
                           <a:ea typeface="Calibri" pitchFamily="34" charset="-122"/>
                           <a:cs typeface="Calibri" pitchFamily="34" charset="-120"/>
                         </a:rPr>
-                        <a:t>spend_to_income r −0.90; segment spend/income 0.835</a:t>
+                        <a:t>spend/income 0.84 vs 0.57 Healthy; r(spend/income, FHS) −0.90</a:t>
                       </a:r>
-                      <a:endParaRPr lang="en-US" sz="1050" dirty="0">
+                      <a:endParaRPr lang="en-US" sz="1000" dirty="0">
                         <a:latin typeface="Calibri" charset="0"/>
                         <a:ea typeface="Calibri" charset="0"/>
                         <a:cs typeface="Calibri" charset="0"/>
@@ -7144,7 +7106,7 @@
                         <a:buNone/>
                       </a:pPr>
                       <a:r>
-                        <a:rPr lang="en-US" sz="1050" dirty="0">
+                        <a:rPr lang="en-US" sz="1000" dirty="0">
                           <a:solidFill>
                             <a:srgbClr val="1B2A36"/>
                           </a:solidFill>
@@ -7152,9 +7114,9 @@
                           <a:ea typeface="Calibri" pitchFamily="34" charset="-122"/>
                           <a:cs typeface="Calibri" pitchFamily="34" charset="-120"/>
                         </a:rPr>
-                        <a:t>In-app spend-vs-income dashboard, discretionary category view</a:t>
+                        <a:t>Spend-vs-income dashboard + self-set discretionary budget</a:t>
                       </a:r>
-                      <a:endParaRPr lang="en-US" sz="1050" dirty="0">
+                      <a:endParaRPr lang="en-US" sz="1000" dirty="0">
                         <a:latin typeface="Calibri" charset="0"/>
                         <a:ea typeface="Calibri" charset="0"/>
                         <a:cs typeface="Calibri" charset="0"/>
@@ -7212,7 +7174,7 @@
                         <a:buNone/>
                       </a:pPr>
                       <a:r>
-                        <a:rPr lang="en-US" sz="1050" dirty="0">
+                        <a:rPr lang="en-US" sz="1000" dirty="0">
                           <a:solidFill>
                             <a:srgbClr val="1B2A36"/>
                           </a:solidFill>
@@ -7222,7 +7184,7 @@
                         </a:rPr>
                         <a:t>spend/income; % months FHS &lt; 40</a:t>
                       </a:r>
-                      <a:endParaRPr lang="en-US" sz="1050" dirty="0">
+                      <a:endParaRPr lang="en-US" sz="1000" dirty="0">
                         <a:latin typeface="Calibri" charset="0"/>
                         <a:ea typeface="Calibri" charset="0"/>
                         <a:cs typeface="Calibri" charset="0"/>
@@ -7282,7 +7244,7 @@
                         <a:buNone/>
                       </a:pPr>
                       <a:r>
-                        <a:rPr lang="en-US" sz="1050" dirty="0">
+                        <a:rPr lang="en-US" sz="1000" dirty="0">
                           <a:solidFill>
                             <a:srgbClr val="1B2A36"/>
                           </a:solidFill>
@@ -7292,7 +7254,7 @@
                         </a:rPr>
                         <a:t>② Spend alerts</a:t>
                       </a:r>
-                      <a:endParaRPr lang="en-US" sz="1050" dirty="0">
+                      <a:endParaRPr lang="en-US" sz="1000" dirty="0">
                         <a:latin typeface="Calibri" charset="0"/>
                         <a:ea typeface="Calibri" charset="0"/>
                         <a:cs typeface="Calibri" charset="0"/>
@@ -7350,7 +7312,7 @@
                         <a:buNone/>
                       </a:pPr>
                       <a:r>
-                        <a:rPr lang="en-US" sz="1050" dirty="0">
+                        <a:rPr lang="en-US" sz="1000" dirty="0">
                           <a:solidFill>
                             <a:srgbClr val="1B2A36"/>
                           </a:solidFill>
@@ -7358,9 +7320,9 @@
                           <a:ea typeface="Calibri" pitchFamily="34" charset="-122"/>
                           <a:cs typeface="Calibri" pitchFamily="34" charset="-120"/>
                         </a:rPr>
-                        <a:t>Crossover: 43 (4.3%) = 52% of stress months</a:t>
+                        <a:t>Crossover: 43 (4.3%) — 39 Stretched + 4 Healthy</a:t>
                       </a:r>
-                      <a:endParaRPr lang="en-US" sz="1050" dirty="0">
+                      <a:endParaRPr lang="en-US" sz="1000" dirty="0">
                         <a:latin typeface="Calibri" charset="0"/>
                         <a:ea typeface="Calibri" charset="0"/>
                         <a:cs typeface="Calibri" charset="0"/>
@@ -7418,7 +7380,7 @@
                         <a:buNone/>
                       </a:pPr>
                       <a:r>
-                        <a:rPr lang="en-US" sz="1050" dirty="0">
+                        <a:rPr lang="en-US" sz="1000" dirty="0">
                           <a:solidFill>
                             <a:srgbClr val="1B2A36"/>
                           </a:solidFill>
@@ -7426,9 +7388,9 @@
                           <a:ea typeface="Calibri" pitchFamily="34" charset="-122"/>
                           <a:cs typeface="Calibri" pitchFamily="34" charset="-120"/>
                         </a:rPr>
-                        <a:t>FHS &lt; 40 &amp; engagement ≥ p75; 23.5% of spend at 22–23h</a:t>
+                        <a:t>49 of 95 stress months (52%); 23.5% of stressed spend at 22–23h</a:t>
                       </a:r>
-                      <a:endParaRPr lang="en-US" sz="1050" dirty="0">
+                      <a:endParaRPr lang="en-US" sz="1000" dirty="0">
                         <a:latin typeface="Calibri" charset="0"/>
                         <a:ea typeface="Calibri" charset="0"/>
                         <a:cs typeface="Calibri" charset="0"/>
@@ -7486,7 +7448,7 @@
                         <a:buNone/>
                       </a:pPr>
                       <a:r>
-                        <a:rPr lang="en-US" sz="1050" dirty="0">
+                        <a:rPr lang="en-US" sz="1000" dirty="0">
                           <a:solidFill>
                             <a:srgbClr val="1B2A36"/>
                           </a:solidFill>
@@ -7494,9 +7456,9 @@
                           <a:ea typeface="Calibri" pitchFamily="34" charset="-122"/>
                           <a:cs typeface="Calibri" pitchFamily="34" charset="-120"/>
                         </a:rPr>
-                        <a:t>Pacing alert Sun–Mon evenings, before 22:00</a:t>
+                        <a:t>Opt-in, dismissible pacing alert in the evening, before 22:00</a:t>
                       </a:r>
-                      <a:endParaRPr lang="en-US" sz="1050" dirty="0">
+                      <a:endParaRPr lang="en-US" sz="1000" dirty="0">
                         <a:latin typeface="Calibri" charset="0"/>
                         <a:ea typeface="Calibri" charset="0"/>
                         <a:cs typeface="Calibri" charset="0"/>
@@ -7554,7 +7516,7 @@
                         <a:buNone/>
                       </a:pPr>
                       <a:r>
-                        <a:rPr lang="en-US" sz="1050" dirty="0">
+                        <a:rPr lang="en-US" sz="1000" dirty="0">
                           <a:solidFill>
                             <a:srgbClr val="1B2A36"/>
                           </a:solidFill>
@@ -7562,9 +7524,9 @@
                           <a:ea typeface="Calibri" pitchFamily="34" charset="-122"/>
                           <a:cs typeface="Calibri" pitchFamily="34" charset="-120"/>
                         </a:rPr>
-                        <a:t>stress months / consumer</a:t>
+                        <a:t>stress months per consumer</a:t>
                       </a:r>
-                      <a:endParaRPr lang="en-US" sz="1050" dirty="0">
+                      <a:endParaRPr lang="en-US" sz="1000" dirty="0">
                         <a:latin typeface="Calibri" charset="0"/>
                         <a:ea typeface="Calibri" charset="0"/>
                         <a:cs typeface="Calibri" charset="0"/>
@@ -7624,7 +7586,7 @@
                         <a:buNone/>
                       </a:pPr>
                       <a:r>
-                        <a:rPr lang="en-US" sz="1050" dirty="0">
+                        <a:rPr lang="en-US" sz="1000" dirty="0">
                           <a:solidFill>
                             <a:srgbClr val="1B2A36"/>
                           </a:solidFill>
@@ -7634,7 +7596,7 @@
                         </a:rPr>
                         <a:t>③ Planning reminders</a:t>
                       </a:r>
-                      <a:endParaRPr lang="en-US" sz="1050" dirty="0">
+                      <a:endParaRPr lang="en-US" sz="1000" dirty="0">
                         <a:latin typeface="Calibri" charset="0"/>
                         <a:ea typeface="Calibri" charset="0"/>
                         <a:cs typeface="Calibri" charset="0"/>
@@ -7692,7 +7654,7 @@
                         <a:buNone/>
                       </a:pPr>
                       <a:r>
-                        <a:rPr lang="en-US" sz="1050" dirty="0">
+                        <a:rPr lang="en-US" sz="1000" dirty="0">
                           <a:solidFill>
                             <a:srgbClr val="1B2A36"/>
                           </a:solidFill>
@@ -7700,9 +7662,9 @@
                           <a:ea typeface="Calibri" pitchFamily="34" charset="-122"/>
                           <a:cs typeface="Calibri" pitchFamily="34" charset="-120"/>
                         </a:rPr>
-                        <a:t>Power Users 258 (25.8%) + Healthy 351 (35.1%)</a:t>
+                        <a:t>High-Activity Users: 258 (25.8%)</a:t>
                       </a:r>
-                      <a:endParaRPr lang="en-US" sz="1050" dirty="0">
+                      <a:endParaRPr lang="en-US" sz="1000" dirty="0">
                         <a:latin typeface="Calibri" charset="0"/>
                         <a:ea typeface="Calibri" charset="0"/>
                         <a:cs typeface="Calibri" charset="0"/>
@@ -7760,7 +7722,7 @@
                         <a:buNone/>
                       </a:pPr>
                       <a:r>
-                        <a:rPr lang="en-US" sz="1050" dirty="0">
+                        <a:rPr lang="en-US" sz="1000" dirty="0">
                           <a:solidFill>
                             <a:srgbClr val="1B2A36"/>
                           </a:solidFill>
@@ -7768,9 +7730,9 @@
                           <a:ea typeface="Calibri" pitchFamily="34" charset="-122"/>
                           <a:cs typeface="Calibri" pitchFamily="34" charset="-120"/>
                         </a:rPr>
-                        <a:t>Healthy → Stretched 72% Nov → Dec; volatility r −0.50</a:t>
+                        <a:t>highest volatility 1.91 (r −0.50); December cuts FHS ~13 pts in every segment</a:t>
                       </a:r>
-                      <a:endParaRPr lang="en-US" sz="1050" dirty="0">
+                      <a:endParaRPr lang="en-US" sz="1000" dirty="0">
                         <a:latin typeface="Calibri" charset="0"/>
                         <a:ea typeface="Calibri" charset="0"/>
                         <a:cs typeface="Calibri" charset="0"/>
@@ -7828,7 +7790,7 @@
                         <a:buNone/>
                       </a:pPr>
                       <a:r>
-                        <a:rPr lang="en-US" sz="1050" dirty="0">
+                        <a:rPr lang="en-US" sz="1000" dirty="0">
                           <a:solidFill>
                             <a:srgbClr val="1B2A36"/>
                           </a:solidFill>
@@ -7836,9 +7798,9 @@
                           <a:ea typeface="Calibri" pitchFamily="34" charset="-122"/>
                           <a:cs typeface="Calibri" pitchFamily="34" charset="-120"/>
                         </a:rPr>
-                        <a:t>November year-end budget plan &amp; reminder</a:t>
+                        <a:t>Monthly set-aside prompt; year-end plan sent in November</a:t>
                       </a:r>
-                      <a:endParaRPr lang="en-US" sz="1050" dirty="0">
+                      <a:endParaRPr lang="en-US" sz="1000" dirty="0">
                         <a:latin typeface="Calibri" charset="0"/>
                         <a:ea typeface="Calibri" charset="0"/>
                         <a:cs typeface="Calibri" charset="0"/>
@@ -7896,7 +7858,7 @@
                         <a:buNone/>
                       </a:pPr>
                       <a:r>
-                        <a:rPr lang="en-US" sz="1050" dirty="0">
+                        <a:rPr lang="en-US" sz="1000" dirty="0">
                           <a:solidFill>
                             <a:srgbClr val="1B2A36"/>
                           </a:solidFill>
@@ -7904,9 +7866,9 @@
                           <a:ea typeface="Calibri" pitchFamily="34" charset="-122"/>
                           <a:cs typeface="Calibri" pitchFamily="34" charset="-120"/>
                         </a:rPr>
-                        <a:t>Nov → Dec slide rate</a:t>
+                        <a:t>December FHS drop vs holdout</a:t>
                       </a:r>
-                      <a:endParaRPr lang="en-US" sz="1050" dirty="0">
+                      <a:endParaRPr lang="en-US" sz="1000" dirty="0">
                         <a:latin typeface="Calibri" charset="0"/>
                         <a:ea typeface="Calibri" charset="0"/>
                         <a:cs typeface="Calibri" charset="0"/>
@@ -7966,7 +7928,7 @@
                         <a:buNone/>
                       </a:pPr>
                       <a:r>
-                        <a:rPr lang="en-US" sz="1050" dirty="0">
+                        <a:rPr lang="en-US" sz="1000" dirty="0">
                           <a:solidFill>
                             <a:srgbClr val="1B2A36"/>
                           </a:solidFill>
@@ -7976,7 +7938,7 @@
                         </a:rPr>
                         <a:t>④ Financial education</a:t>
                       </a:r>
-                      <a:endParaRPr lang="en-US" sz="1050" dirty="0">
+                      <a:endParaRPr lang="en-US" sz="1000" dirty="0">
                         <a:latin typeface="Calibri" charset="0"/>
                         <a:ea typeface="Calibri" charset="0"/>
                         <a:cs typeface="Calibri" charset="0"/>
@@ -8034,7 +7996,7 @@
                         <a:buNone/>
                       </a:pPr>
                       <a:r>
-                        <a:rPr lang="en-US" sz="1050" dirty="0">
+                        <a:rPr lang="en-US" sz="1000" dirty="0">
                           <a:solidFill>
                             <a:srgbClr val="1B2A36"/>
                           </a:solidFill>
@@ -8042,9 +8004,9 @@
                           <a:ea typeface="Calibri" pitchFamily="34" charset="-122"/>
                           <a:cs typeface="Calibri" pitchFamily="34" charset="-120"/>
                         </a:rPr>
-                        <a:t>Distress tail: 67 (6.7%)</a:t>
+                        <a:t>Low-health &amp; low-engagement: 67 (6.7%)</a:t>
                       </a:r>
-                      <a:endParaRPr lang="en-US" sz="1050" dirty="0">
+                      <a:endParaRPr lang="en-US" sz="1000" dirty="0">
                         <a:latin typeface="Calibri" charset="0"/>
                         <a:ea typeface="Calibri" charset="0"/>
                         <a:cs typeface="Calibri" charset="0"/>
@@ -8102,7 +8064,7 @@
                         <a:buNone/>
                       </a:pPr>
                       <a:r>
-                        <a:rPr lang="en-US" sz="1050" dirty="0">
+                        <a:rPr lang="en-US" sz="1000" dirty="0">
                           <a:solidFill>
                             <a:srgbClr val="1B2A36"/>
                           </a:solidFill>
@@ -8110,9 +8072,9 @@
                           <a:ea typeface="Calibri" pitchFamily="34" charset="-122"/>
                           <a:cs typeface="Calibri" pitchFamily="34" charset="-120"/>
                         </a:rPr>
-                        <a:t>discretionary 72% vs 40% under stress</a:t>
+                        <a:t>86% discretionary vs 55% base; 64 of 67 are occasional users</a:t>
                       </a:r>
-                      <a:endParaRPr lang="en-US" sz="1050" dirty="0">
+                      <a:endParaRPr lang="en-US" sz="1000" dirty="0">
                         <a:latin typeface="Calibri" charset="0"/>
                         <a:ea typeface="Calibri" charset="0"/>
                         <a:cs typeface="Calibri" charset="0"/>
@@ -8170,7 +8132,7 @@
                         <a:buNone/>
                       </a:pPr>
                       <a:r>
-                        <a:rPr lang="en-US" sz="1050" dirty="0">
+                        <a:rPr lang="en-US" sz="1000" dirty="0">
                           <a:solidFill>
                             <a:srgbClr val="1B2A36"/>
                           </a:solidFill>
@@ -8178,9 +8140,9 @@
                           <a:ea typeface="Calibri" pitchFamily="34" charset="-122"/>
                           <a:cs typeface="Calibri" pitchFamily="34" charset="-120"/>
                         </a:rPr>
-                        <a:t>Needs-vs-wants micro-modules</a:t>
+                        <a:t>Needs-vs-wants micro-modules built on their own spend mix</a:t>
                       </a:r>
-                      <a:endParaRPr lang="en-US" sz="1050" dirty="0">
+                      <a:endParaRPr lang="en-US" sz="1000" dirty="0">
                         <a:latin typeface="Calibri" charset="0"/>
                         <a:ea typeface="Calibri" charset="0"/>
                         <a:cs typeface="Calibri" charset="0"/>
@@ -8238,7 +8200,7 @@
                         <a:buNone/>
                       </a:pPr>
                       <a:r>
-                        <a:rPr lang="en-US" sz="1050" dirty="0">
+                        <a:rPr lang="en-US" sz="1000" dirty="0">
                           <a:solidFill>
                             <a:srgbClr val="1B2A36"/>
                           </a:solidFill>
@@ -8246,9 +8208,9 @@
                           <a:ea typeface="Calibri" pitchFamily="34" charset="-122"/>
                           <a:cs typeface="Calibri" pitchFamily="34" charset="-120"/>
                         </a:rPr>
-                        <a:t>essential share next month</a:t>
+                        <a:t>essential share next active month</a:t>
                       </a:r>
-                      <a:endParaRPr lang="en-US" sz="1050" dirty="0">
+                      <a:endParaRPr lang="en-US" sz="1000" dirty="0">
                         <a:latin typeface="Calibri" charset="0"/>
                         <a:ea typeface="Calibri" charset="0"/>
                         <a:cs typeface="Calibri" charset="0"/>
@@ -8308,7 +8270,7 @@
                         <a:buNone/>
                       </a:pPr>
                       <a:r>
-                        <a:rPr lang="en-US" sz="1050" dirty="0">
+                        <a:rPr lang="en-US" sz="1000" dirty="0">
                           <a:solidFill>
                             <a:srgbClr val="1B2A36"/>
                           </a:solidFill>
@@ -8318,7 +8280,7 @@
                         </a:rPr>
                         <a:t>⑤ Digital nudges</a:t>
                       </a:r>
-                      <a:endParaRPr lang="en-US" sz="1050" dirty="0">
+                      <a:endParaRPr lang="en-US" sz="1000" dirty="0">
                         <a:latin typeface="Calibri" charset="0"/>
                         <a:ea typeface="Calibri" charset="0"/>
                         <a:cs typeface="Calibri" charset="0"/>
@@ -8376,7 +8338,7 @@
                         <a:buNone/>
                       </a:pPr>
                       <a:r>
-                        <a:rPr lang="en-US" sz="1050" dirty="0">
+                        <a:rPr lang="en-US" sz="1000" dirty="0">
                           <a:solidFill>
                             <a:srgbClr val="1B2A36"/>
                           </a:solidFill>
@@ -8384,9 +8346,9 @@
                           <a:ea typeface="Calibri" pitchFamily="34" charset="-122"/>
                           <a:cs typeface="Calibri" pitchFamily="34" charset="-120"/>
                         </a:rPr>
-                        <a:t>Emerging Digital: 88 (8.8%)</a:t>
+                        <a:t>Occasional Online-First: 88 (8.8%)</a:t>
                       </a:r>
-                      <a:endParaRPr lang="en-US" sz="1050" dirty="0">
+                      <a:endParaRPr lang="en-US" sz="1000" dirty="0">
                         <a:latin typeface="Calibri" charset="0"/>
                         <a:ea typeface="Calibri" charset="0"/>
                         <a:cs typeface="Calibri" charset="0"/>
@@ -8444,7 +8406,7 @@
                         <a:buNone/>
                       </a:pPr>
                       <a:r>
-                        <a:rPr lang="en-US" sz="1050" dirty="0">
+                        <a:rPr lang="en-US" sz="1000" dirty="0">
                           <a:solidFill>
                             <a:srgbClr val="1B2A36"/>
                           </a:solidFill>
@@ -8452,9 +8414,9 @@
                           <a:ea typeface="Calibri" pitchFamily="34" charset="-122"/>
                           <a:cs typeface="Calibri" pitchFamily="34" charset="-120"/>
                         </a:rPr>
-                        <a:t>diversity r +0.94; 60.5% of spend via E-com + Mobile</a:t>
+                        <a:t>seen on 1–2 days only; 60.5% of spend via E-com + Mobile</a:t>
                       </a:r>
-                      <a:endParaRPr lang="en-US" sz="1050" dirty="0">
+                      <a:endParaRPr lang="en-US" sz="1000" dirty="0">
                         <a:latin typeface="Calibri" charset="0"/>
                         <a:ea typeface="Calibri" charset="0"/>
                         <a:cs typeface="Calibri" charset="0"/>
@@ -8512,7 +8474,7 @@
                         <a:buNone/>
                       </a:pPr>
                       <a:r>
-                        <a:rPr lang="en-US" sz="1050" dirty="0">
+                        <a:rPr lang="en-US" sz="1000" dirty="0">
                           <a:solidFill>
                             <a:srgbClr val="1B2A36"/>
                           </a:solidFill>
@@ -8520,9 +8482,9 @@
                           <a:ea typeface="Calibri" pitchFamily="34" charset="-122"/>
                           <a:cs typeface="Calibri" pitchFamily="34" charset="-120"/>
                         </a:rPr>
-                        <a:t>Onboarding &amp; habit loops in the app they already use</a:t>
+                        <a:t>Onboarding + category-broadening nudges in the app they use</a:t>
                       </a:r>
-                      <a:endParaRPr lang="en-US" sz="1050" dirty="0">
+                      <a:endParaRPr lang="en-US" sz="1000" dirty="0">
                         <a:latin typeface="Calibri" charset="0"/>
                         <a:ea typeface="Calibri" charset="0"/>
                         <a:cs typeface="Calibri" charset="0"/>
@@ -8580,7 +8542,7 @@
                         <a:buNone/>
                       </a:pPr>
                       <a:r>
-                        <a:rPr lang="en-US" sz="1050" dirty="0">
+                        <a:rPr lang="en-US" sz="1000" dirty="0">
                           <a:solidFill>
                             <a:srgbClr val="1B2A36"/>
                           </a:solidFill>
@@ -8590,7 +8552,7 @@
                         </a:rPr>
                         <a:t>active days; categories / month</a:t>
                       </a:r>
-                      <a:endParaRPr lang="en-US" sz="1050" dirty="0">
+                      <a:endParaRPr lang="en-US" sz="1000" dirty="0">
                         <a:latin typeface="Calibri" charset="0"/>
                         <a:ea typeface="Calibri" charset="0"/>
                         <a:cs typeface="Calibri" charset="0"/>
@@ -8650,7 +8612,7 @@
                         <a:buNone/>
                       </a:pPr>
                       <a:r>
-                        <a:rPr lang="en-US" sz="1050" dirty="0">
+                        <a:rPr lang="en-US" sz="1000" dirty="0">
                           <a:solidFill>
                             <a:srgbClr val="1B2A36"/>
                           </a:solidFill>
@@ -8660,7 +8622,7 @@
                         </a:rPr>
                         <a:t>⑥ Product suggestions</a:t>
                       </a:r>
-                      <a:endParaRPr lang="en-US" sz="1050" dirty="0">
+                      <a:endParaRPr lang="en-US" sz="1000" dirty="0">
                         <a:latin typeface="Calibri" charset="0"/>
                         <a:ea typeface="Calibri" charset="0"/>
                         <a:cs typeface="Calibri" charset="0"/>
@@ -8718,7 +8680,7 @@
                         <a:buNone/>
                       </a:pPr>
                       <a:r>
-                        <a:rPr lang="en-US" sz="1050" dirty="0">
+                        <a:rPr lang="en-US" sz="1000" dirty="0">
                           <a:solidFill>
                             <a:srgbClr val="1B2A36"/>
                           </a:solidFill>
@@ -8726,9 +8688,9 @@
                           <a:ea typeface="Calibri" pitchFamily="34" charset="-122"/>
                           <a:cs typeface="Calibri" pitchFamily="34" charset="-120"/>
                         </a:rPr>
-                        <a:t>Healthy &amp; Engaged: 351 (35.1%)</a:t>
+                        <a:t>Healthy &amp; Engaged: 351 (35.1%), adults only</a:t>
                       </a:r>
-                      <a:endParaRPr lang="en-US" sz="1050" dirty="0">
+                      <a:endParaRPr lang="en-US" sz="1000" dirty="0">
                         <a:latin typeface="Calibri" charset="0"/>
                         <a:ea typeface="Calibri" charset="0"/>
                         <a:cs typeface="Calibri" charset="0"/>
@@ -8786,7 +8748,7 @@
                         <a:buNone/>
                       </a:pPr>
                       <a:r>
-                        <a:rPr lang="en-US" sz="1050" dirty="0">
+                        <a:rPr lang="en-US" sz="1000" dirty="0">
                           <a:solidFill>
                             <a:srgbClr val="1B2A36"/>
                           </a:solidFill>
@@ -8794,9 +8756,9 @@
                           <a:ea typeface="Calibri" pitchFamily="34" charset="-122"/>
                           <a:cs typeface="Calibri" pitchFamily="34" charset="-120"/>
                         </a:rPr>
-                        <a:t>lowest utilization 0.148, FHS 70.5</a:t>
+                        <a:t>lowest utilization 0.148, highest FHS 70.5</a:t>
                       </a:r>
-                      <a:endParaRPr lang="en-US" sz="1050" dirty="0">
+                      <a:endParaRPr lang="en-US" sz="1000" dirty="0">
                         <a:latin typeface="Calibri" charset="0"/>
                         <a:ea typeface="Calibri" charset="0"/>
                         <a:cs typeface="Calibri" charset="0"/>
@@ -8854,7 +8816,7 @@
                         <a:buNone/>
                       </a:pPr>
                       <a:r>
-                        <a:rPr lang="en-US" sz="1050" dirty="0">
+                        <a:rPr lang="en-US" sz="1000" dirty="0">
                           <a:solidFill>
                             <a:srgbClr val="1B2A36"/>
                           </a:solidFill>
@@ -8862,9 +8824,9 @@
                           <a:ea typeface="Calibri" pitchFamily="34" charset="-122"/>
                           <a:cs typeface="Calibri" pitchFamily="34" charset="-120"/>
                         </a:rPr>
-                        <a:t>Opt-in savings / loyalty; never auto-extend credit</a:t>
+                        <a:t>Opt-in savings / loyalty; never a credit-line increase</a:t>
                       </a:r>
-                      <a:endParaRPr lang="en-US" sz="1050" dirty="0">
+                      <a:endParaRPr lang="en-US" sz="1000" dirty="0">
                         <a:latin typeface="Calibri" charset="0"/>
                         <a:ea typeface="Calibri" charset="0"/>
                         <a:cs typeface="Calibri" charset="0"/>
@@ -8922,7 +8884,7 @@
                         <a:buNone/>
                       </a:pPr>
                       <a:r>
-                        <a:rPr lang="en-US" sz="1050" dirty="0">
+                        <a:rPr lang="en-US" sz="1000" dirty="0">
                           <a:solidFill>
                             <a:srgbClr val="1B2A36"/>
                           </a:solidFill>
@@ -8932,7 +8894,7 @@
                         </a:rPr>
                         <a:t>opt-in uptake; FHS stable</a:t>
                       </a:r>
-                      <a:endParaRPr lang="en-US" sz="1050" dirty="0">
+                      <a:endParaRPr lang="en-US" sz="1000" dirty="0">
                         <a:latin typeface="Calibri" charset="0"/>
                         <a:ea typeface="Calibri" charset="0"/>
                         <a:cs typeface="Calibri" charset="0"/>
@@ -8994,7 +8956,7 @@
         </p:nvSpPr>
         <p:spPr>
           <a:xfrm>
-            <a:off x="457200" y="5623560"/>
+            <a:off x="457200" y="5532120"/>
             <a:ext cx="11247120" cy="256032"/>
           </a:xfrm>
           <a:prstGeom prst="rect">
@@ -9019,7 +8981,7 @@
                 <a:ea typeface="Calibri" pitchFamily="34" charset="-122"/>
                 <a:cs typeface="Calibri" pitchFamily="34" charset="-120"/>
               </a:rPr>
-              <a:t>Source: team k-means (k=4) on 8 z-scaled ratios, 999 consumers (task4_features.csv). Crossover &amp; distress tail: consumer-month file; channel share: transactions file.</a:t>
+              <a:t>Source: team k-means (k = 4) on 8 z-scaled ratios, 999 consumers (task4_features.csv). Crossover, low-health group and r: consumer-month file; timing and channels: transactions file.</a:t>
             </a:r>
             <a:endParaRPr lang="en-US" sz="850" dirty="0"/>
           </a:p>
@@ -9033,8 +8995,8 @@
         </p:nvSpPr>
         <p:spPr>
           <a:xfrm>
-            <a:off x="457200" y="5897880"/>
-            <a:ext cx="11247120" cy="457200"/>
+            <a:off x="457200" y="5806440"/>
+            <a:ext cx="11247120" cy="548640"/>
           </a:xfrm>
           <a:prstGeom prst="rect">
             <a:avLst/>
@@ -9058,7 +9020,7 @@
                 <a:ea typeface="Calibri" pitchFamily="34" charset="-122"/>
                 <a:cs typeface="Calibri" pitchFamily="34" charset="-120"/>
               </a:rPr>
-              <a:t>No double-counting: the 4 segments partition all 999 consumers; the crossover (43) and distress tail (67) are overlays inside the Stretched segment.</a:t>
+              <a:t>Segments ① ③ ⑤ ⑥ partition all 999 customers. Overlays: Alerts 43 = 39 Stretched + 4 Healthy; Education 67 = 64 Occasional + 3 Stretched, so those 64 receive ④ and ⑤ in sequence, never in the same week.</a:t>
             </a:r>
             <a:endParaRPr lang="en-US" sz="1100" dirty="0"/>
           </a:p>
@@ -9066,7 +9028,7 @@
       </p:sp>
       <p:sp>
         <p:nvSpPr>
-          <p:cNvPr id="8" name="Text 4"/>
+          <p:cNvPr id="7" name="Text 4"/>
           <p:cNvSpPr txBox="1"/>
           <p:nvPr/>
         </p:nvSpPr>
@@ -9105,7 +9067,7 @@
       </p:sp>
       <p:sp>
         <p:nvSpPr>
-          <p:cNvPr id="9" name="Text 5"/>
+          <p:cNvPr id="8" name="Text 5"/>
           <p:cNvSpPr txBox="1"/>
           <p:nvPr/>
         </p:nvSpPr>
@@ -9182,7 +9144,7 @@
         </p:nvSpPr>
         <p:spPr>
           <a:xfrm>
-            <a:off x="548640" y="457200"/>
+            <a:off x="548640" y="411480"/>
             <a:ext cx="7315200" cy="365760"/>
           </a:xfrm>
           <a:prstGeom prst="rect">
@@ -9221,8 +9183,8 @@
         </p:nvSpPr>
         <p:spPr>
           <a:xfrm>
-            <a:off x="548640" y="822960"/>
-            <a:ext cx="10972800" cy="731520"/>
+            <a:off x="548640" y="777240"/>
+            <a:ext cx="11155680" cy="731520"/>
           </a:xfrm>
           <a:prstGeom prst="rect">
             <a:avLst/>
@@ -9238,7 +9200,7 @@
               <a:buNone/>
             </a:pPr>
             <a:r>
-              <a:rPr lang="en-US" sz="3000" b="1" dirty="0">
+              <a:rPr lang="en-US" sz="2800" b="1" dirty="0">
                 <a:solidFill>
                   <a:srgbClr val="FFFFFF"/>
                 </a:solidFill>
@@ -9246,9 +9208,9 @@
                 <a:ea typeface="Cambria" pitchFamily="34" charset="-122"/>
                 <a:cs typeface="Cambria" pitchFamily="34" charset="-120"/>
               </a:rPr>
-              <a:t>One inversion drives the whole story</a:t>
-            </a:r>
-            <a:endParaRPr lang="en-US" sz="3000" dirty="0"/>
+              <a:t>Overspending drives stress, and it is timed, reachable and fixable</a:t>
+            </a:r>
+            <a:endParaRPr lang="en-US" sz="2800" dirty="0"/>
           </a:p>
         </p:txBody>
       </p:sp>
@@ -9260,8 +9222,8 @@
         </p:nvSpPr>
         <p:spPr>
           <a:xfrm>
-            <a:off x="548640" y="1828800"/>
-            <a:ext cx="3749040" cy="822960"/>
+            <a:off x="548640" y="1691640"/>
+            <a:ext cx="3383280" cy="868680"/>
           </a:xfrm>
           <a:prstGeom prst="rect">
             <a:avLst/>
@@ -9277,7 +9239,7 @@
               <a:buNone/>
             </a:pPr>
             <a:r>
-              <a:rPr lang="en-US" sz="1500" b="1" dirty="0">
+              <a:rPr lang="en-US" sz="1450" b="1" dirty="0">
                 <a:solidFill>
                   <a:srgbClr val="1FC3A6"/>
                 </a:solidFill>
@@ -9285,9 +9247,9 @@
                 <a:ea typeface="Calibri" pitchFamily="34" charset="-122"/>
                 <a:cs typeface="Calibri" pitchFamily="34" charset="-120"/>
               </a:rPr>
-              <a:t>Overspend, not low income</a:t>
-            </a:r>
-            <a:endParaRPr lang="en-US" sz="1500" dirty="0"/>
+              <a:t>T1 · The budget flips under stress</a:t>
+            </a:r>
+            <a:endParaRPr lang="en-US" sz="1450" dirty="0"/>
           </a:p>
         </p:txBody>
       </p:sp>
@@ -9299,8 +9261,8 @@
         </p:nvSpPr>
         <p:spPr>
           <a:xfrm>
-            <a:off x="4480560" y="1828800"/>
-            <a:ext cx="7132320" cy="822960"/>
+            <a:off x="4069080" y="1691640"/>
+            <a:ext cx="7635240" cy="868680"/>
           </a:xfrm>
           <a:prstGeom prst="rect">
             <a:avLst/>
@@ -9316,7 +9278,7 @@
               <a:buNone/>
             </a:pPr>
             <a:r>
-              <a:rPr lang="en-US" sz="1350" dirty="0">
+              <a:rPr lang="en-US" sz="1250" dirty="0">
                 <a:solidFill>
                   <a:srgbClr val="DCEAEC"/>
                 </a:solidFill>
@@ -9324,9 +9286,9 @@
                 <a:ea typeface="Calibri" pitchFamily="34" charset="-122"/>
                 <a:cs typeface="Calibri" pitchFamily="34" charset="-120"/>
               </a:rPr>
-              <a:t>spend-to-income (r −0.90) and credit-utilization (r −0.86) explain almost all of financial health.</a:t>
-            </a:r>
-            <a:endParaRPr lang="en-US" sz="1350" dirty="0"/>
+              <a:t>Stressed months (FHS &lt; 40) are 71.6% discretionary vs 40.5% in healthy months (FHS ≥ 80), a steady gradient across every band. The flip is in value: purchases ≥ 10M VND are 4% of stressed-month transactions but 54% of their spend.</a:t>
+            </a:r>
+            <a:endParaRPr lang="en-US" sz="1250" dirty="0"/>
           </a:p>
         </p:txBody>
       </p:sp>
@@ -9338,8 +9300,8 @@
         </p:nvSpPr>
         <p:spPr>
           <a:xfrm>
-            <a:off x="548640" y="2761488"/>
-            <a:ext cx="3749040" cy="822960"/>
+            <a:off x="548640" y="2633472"/>
+            <a:ext cx="3383280" cy="868680"/>
           </a:xfrm>
           <a:prstGeom prst="rect">
             <a:avLst/>
@@ -9355,7 +9317,7 @@
               <a:buNone/>
             </a:pPr>
             <a:r>
-              <a:rPr lang="en-US" sz="1500" b="1" dirty="0">
+              <a:rPr lang="en-US" sz="1450" b="1" dirty="0">
                 <a:solidFill>
                   <a:srgbClr val="1FC3A6"/>
                 </a:solidFill>
@@ -9363,9 +9325,9 @@
                 <a:ea typeface="Calibri" pitchFamily="34" charset="-122"/>
                 <a:cs typeface="Calibri" pitchFamily="34" charset="-120"/>
               </a:rPr>
-              <a:t>The budget inverts under stress</a:t>
-            </a:r>
-            <a:endParaRPr lang="en-US" sz="1500" dirty="0"/>
+              <a:t>T2 · Overspending, not low income</a:t>
+            </a:r>
+            <a:endParaRPr lang="en-US" sz="1450" dirty="0"/>
           </a:p>
         </p:txBody>
       </p:sp>
@@ -9377,8 +9339,8 @@
         </p:nvSpPr>
         <p:spPr>
           <a:xfrm>
-            <a:off x="4480560" y="2761488"/>
-            <a:ext cx="7132320" cy="822960"/>
+            <a:off x="4069080" y="2633472"/>
+            <a:ext cx="7635240" cy="868680"/>
           </a:xfrm>
           <a:prstGeom prst="rect">
             <a:avLst/>
@@ -9394,7 +9356,7 @@
               <a:buNone/>
             </a:pPr>
             <a:r>
-              <a:rPr lang="en-US" sz="1350" dirty="0">
+              <a:rPr lang="en-US" sz="1250" dirty="0">
                 <a:solidFill>
                   <a:srgbClr val="DCEAEC"/>
                 </a:solidFill>
@@ -9402,9 +9364,9 @@
                 <a:ea typeface="Calibri" pitchFamily="34" charset="-122"/>
                 <a:cs typeface="Calibri" pitchFamily="34" charset="-120"/>
               </a:rPr>
-              <a:t>stressed customers spend 71.6% discretionary vs healthy customers' 40.5% — the strongest signal in the data.</a:t>
-            </a:r>
-            <a:endParaRPr lang="en-US" sz="1350" dirty="0"/>
+              <a:t>Spend-to-income (r −0.90) and credit utilization (r −0.86), one overspending factor, explain ~82% of the health score. Nobody is stressed all year, yet 87% dip below 60 at least once; 43 active customers hold 52% of stress months.</a:t>
+            </a:r>
+            <a:endParaRPr lang="en-US" sz="1250" dirty="0"/>
           </a:p>
         </p:txBody>
       </p:sp>
@@ -9416,8 +9378,8 @@
         </p:nvSpPr>
         <p:spPr>
           <a:xfrm>
-            <a:off x="548640" y="3694176"/>
-            <a:ext cx="3749040" cy="822960"/>
+            <a:off x="548640" y="3575304"/>
+            <a:ext cx="3383280" cy="868680"/>
           </a:xfrm>
           <a:prstGeom prst="rect">
             <a:avLst/>
@@ -9433,7 +9395,7 @@
               <a:buNone/>
             </a:pPr>
             <a:r>
-              <a:rPr lang="en-US" sz="1500" b="1" dirty="0">
+              <a:rPr lang="en-US" sz="1450" b="1" dirty="0">
                 <a:solidFill>
                   <a:srgbClr val="1FC3A6"/>
                 </a:solidFill>
@@ -9441,9 +9403,9 @@
                 <a:ea typeface="Calibri" pitchFamily="34" charset="-122"/>
                 <a:cs typeface="Calibri" pitchFamily="34" charset="-120"/>
               </a:rPr>
-              <a:t>Stress is episodic &amp; hits the engaged</a:t>
-            </a:r>
-            <a:endParaRPr lang="en-US" sz="1500" dirty="0"/>
+              <a:t>T3 · Engagement is saturated</a:t>
+            </a:r>
+            <a:endParaRPr lang="en-US" sz="1450" dirty="0"/>
           </a:p>
         </p:txBody>
       </p:sp>
@@ -9455,8 +9417,8 @@
         </p:nvSpPr>
         <p:spPr>
           <a:xfrm>
-            <a:off x="4480560" y="3694176"/>
-            <a:ext cx="7132320" cy="822960"/>
+            <a:off x="4069080" y="3575304"/>
+            <a:ext cx="7635240" cy="868680"/>
           </a:xfrm>
           <a:prstGeom prst="rect">
             <a:avLst/>
@@ -9472,7 +9434,7 @@
               <a:buNone/>
             </a:pPr>
             <a:r>
-              <a:rPr lang="en-US" sz="1350" dirty="0">
+              <a:rPr lang="en-US" sz="1250" dirty="0">
                 <a:solidFill>
                   <a:srgbClr val="DCEAEC"/>
                 </a:solidFill>
@@ -9480,9 +9442,9 @@
                 <a:ea typeface="Calibri" pitchFamily="34" charset="-122"/>
                 <a:cs typeface="Calibri" pitchFamily="34" charset="-120"/>
               </a:rPr>
-              <a:t>0 of 999 chronically stressed; the crossover = 43 consumers = 52% of ALL stress episodes; 72% of Healthy→Stretched slides happen Nov→Dec.</a:t>
-            </a:r>
-            <a:endParaRPr lang="en-US" sz="1350" dirty="0"/>
+              <a:t>91% of customers are High / Very-high engaged; the whole low tail is 91 customers seen on only 1–2 days in 2025. Among full-year customers, category breadth (r +0.81) and active days (r +0.80) drive engagement.</a:t>
+            </a:r>
+            <a:endParaRPr lang="en-US" sz="1250" dirty="0"/>
           </a:p>
         </p:txBody>
       </p:sp>
@@ -9494,8 +9456,8 @@
         </p:nvSpPr>
         <p:spPr>
           <a:xfrm>
-            <a:off x="548640" y="4626864"/>
-            <a:ext cx="3749040" cy="822960"/>
+            <a:off x="548640" y="4517136"/>
+            <a:ext cx="3383280" cy="868680"/>
           </a:xfrm>
           <a:prstGeom prst="rect">
             <a:avLst/>
@@ -9511,7 +9473,7 @@
               <a:buNone/>
             </a:pPr>
             <a:r>
-              <a:rPr lang="en-US" sz="1500" b="1" dirty="0">
+              <a:rPr lang="en-US" sz="1450" b="1" dirty="0">
                 <a:solidFill>
                   <a:srgbClr val="1FC3A6"/>
                 </a:solidFill>
@@ -9519,9 +9481,9 @@
                 <a:ea typeface="Calibri" pitchFamily="34" charset="-122"/>
                 <a:cs typeface="Calibri" pitchFamily="34" charset="-120"/>
               </a:rPr>
-              <a:t>Four stable segments</a:t>
-            </a:r>
-            <a:endParaRPr lang="en-US" sz="1500" dirty="0"/>
+              <a:t>T4 · Four segments, 100% covered</a:t>
+            </a:r>
+            <a:endParaRPr lang="en-US" sz="1450" dirty="0"/>
           </a:p>
         </p:txBody>
       </p:sp>
@@ -9533,8 +9495,8 @@
         </p:nvSpPr>
         <p:spPr>
           <a:xfrm>
-            <a:off x="4480560" y="4626864"/>
-            <a:ext cx="7132320" cy="822960"/>
+            <a:off x="4069080" y="4517136"/>
+            <a:ext cx="7635240" cy="868680"/>
           </a:xfrm>
           <a:prstGeom prst="rect">
             <a:avLst/>
@@ -9550,7 +9512,7 @@
               <a:buNone/>
             </a:pPr>
             <a:r>
-              <a:rPr lang="en-US" sz="1350" dirty="0">
+              <a:rPr lang="en-US" sz="1250" dirty="0">
                 <a:solidFill>
                   <a:srgbClr val="DCEAEC"/>
                 </a:solidFill>
@@ -9558,9 +9520,9 @@
                 <a:ea typeface="Calibri" pitchFamily="34" charset="-122"/>
                 <a:cs typeface="Calibri" pitchFamily="34" charset="-120"/>
               </a:rPr>
-              <a:t>k-means (k=4), 999/999 covered — sizes 351 / 302 / 258 / 88; stable across seeds (ARI 0.99).</a:t>
-            </a:r>
-            <a:endParaRPr lang="en-US" sz="1350" dirty="0"/>
+              <a:t>Healthy &amp; Engaged 351 · Stretched &amp; Engaged 302 · High-Activity 258 · Occasional Online-First 88; stable across random seeds (agreement 0.99 of 1). December lowers health ~13 points in every full-year segment.</a:t>
+            </a:r>
+            <a:endParaRPr lang="en-US" sz="1250" dirty="0"/>
           </a:p>
         </p:txBody>
       </p:sp>
@@ -9572,8 +9534,8 @@
         </p:nvSpPr>
         <p:spPr>
           <a:xfrm>
-            <a:off x="548640" y="5559552"/>
-            <a:ext cx="3749040" cy="822960"/>
+            <a:off x="548640" y="5458968"/>
+            <a:ext cx="3383280" cy="868680"/>
           </a:xfrm>
           <a:prstGeom prst="rect">
             <a:avLst/>
@@ -9589,7 +9551,7 @@
               <a:buNone/>
             </a:pPr>
             <a:r>
-              <a:rPr lang="en-US" sz="1500" b="1" dirty="0">
+              <a:rPr lang="en-US" sz="1450" b="1" dirty="0">
                 <a:solidFill>
                   <a:srgbClr val="1FC3A6"/>
                 </a:solidFill>
@@ -9597,9 +9559,9 @@
                 <a:ea typeface="Calibri" pitchFamily="34" charset="-122"/>
                 <a:cs typeface="Calibri" pitchFamily="34" charset="-120"/>
               </a:rPr>
-              <a:t>A 6-tool wellbeing plan</a:t>
-            </a:r>
-            <a:endParaRPr lang="en-US" sz="1500" dirty="0"/>
+              <a:t>T5 · Six opt-in tools, one rule</a:t>
+            </a:r>
+            <a:endParaRPr lang="en-US" sz="1450" dirty="0"/>
           </a:p>
         </p:txBody>
       </p:sp>
@@ -9611,8 +9573,8 @@
         </p:nvSpPr>
         <p:spPr>
           <a:xfrm>
-            <a:off x="4480560" y="5559552"/>
-            <a:ext cx="7132320" cy="822960"/>
+            <a:off x="4069080" y="5458968"/>
+            <a:ext cx="7635240" cy="868680"/>
           </a:xfrm>
           <a:prstGeom prst="rect">
             <a:avLst/>
@@ -9628,7 +9590,7 @@
               <a:buNone/>
             </a:pPr>
             <a:r>
-              <a:rPr lang="en-US" sz="1350" dirty="0">
+              <a:rPr lang="en-US" sz="1250" dirty="0">
                 <a:solidFill>
                   <a:srgbClr val="DCEAEC"/>
                 </a:solidFill>
@@ -9636,9 +9598,9 @@
                 <a:ea typeface="Calibri" pitchFamily="34" charset="-122"/>
                 <a:cs typeface="Calibri" pitchFamily="34" charset="-120"/>
               </a:rPr>
-              <a:t>lead with Budgeting (302) + Spend Alerts (43, Sun–Mon evenings); a 10% spend trim cuts stress months ~32%. FHS never denies, cuts, or blocks credit.</a:t>
-            </a:r>
-            <a:endParaRPr lang="en-US" sz="1350" dirty="0"/>
+              <a:t>Ranked by reach × driver strength: Budgeting (302) → November Reminders (258) → Spend Alerts (43, launched first). A 10% spend trim could cut stress months 28–32% (what-if). FHS never denies, cuts, prices or blocks credit.</a:t>
+            </a:r>
+            <a:endParaRPr lang="en-US" sz="1250" dirty="0"/>
           </a:p>
         </p:txBody>
       </p:sp>
@@ -9683,7 +9645,7 @@
         <p:spPr>
           <a:xfrm>
             <a:off x="457200" y="384048"/>
-            <a:ext cx="4114800" cy="292608"/>
+            <a:ext cx="7315200" cy="292608"/>
           </a:xfrm>
           <a:prstGeom prst="rect">
             <a:avLst/>
@@ -9722,7 +9684,7 @@
         <p:spPr>
           <a:xfrm>
             <a:off x="457200" y="658368"/>
-            <a:ext cx="11247120" cy="868680"/>
+            <a:ext cx="11247120" cy="731520"/>
           </a:xfrm>
           <a:prstGeom prst="rect">
             <a:avLst/>
@@ -9741,7 +9703,7 @@
               <a:buNone/>
             </a:pPr>
             <a:r>
-              <a:rPr lang="en-US" sz="2700" b="1" dirty="0">
+              <a:rPr lang="en-US" sz="2500" b="1" dirty="0">
                 <a:solidFill>
                   <a:srgbClr val="12435E"/>
                 </a:solidFill>
@@ -9749,9 +9711,9 @@
                 <a:ea typeface="Cambria" pitchFamily="34" charset="-122"/>
                 <a:cs typeface="Cambria" pitchFamily="34" charset="-120"/>
               </a:rPr>
-              <a:t>Prioritization — and the credit-decision rule</a:t>
-            </a:r>
-            <a:endParaRPr lang="en-US" sz="2700" dirty="0"/>
+              <a:t>Prioritisation by reach × driver strength — and the credit rule</a:t>
+            </a:r>
+            <a:endParaRPr lang="en-US" sz="2500" dirty="0"/>
           </a:p>
         </p:txBody>
       </p:sp>
@@ -9763,8 +9725,8 @@
         </p:nvSpPr>
         <p:spPr>
           <a:xfrm>
-            <a:off x="457200" y="1554480"/>
-            <a:ext cx="5760720" cy="3429000"/>
+            <a:off x="457200" y="1463040"/>
+            <a:ext cx="5760720" cy="3520440"/>
           </a:xfrm>
           <a:prstGeom prst="rect">
             <a:avLst/>
@@ -9784,7 +9746,7 @@
               <a:buChar char="•"/>
             </a:pPr>
             <a:r>
-              <a:rPr lang="en-US" sz="1300" dirty="0">
+              <a:rPr lang="en-US" sz="1200" dirty="0">
                 <a:solidFill>
                   <a:srgbClr val="1B2A36"/>
                 </a:solidFill>
@@ -9792,9 +9754,9 @@
                 <a:ea typeface="Calibri" pitchFamily="34" charset="-122"/>
                 <a:cs typeface="Calibri" pitchFamily="34" charset="-120"/>
               </a:rPr>
-              <a:t>Ranking by reach × driver strength: ① Budgeting (302, |r| 0.90) → ② Alerts (43, 52% of stress) → ③ Reminders (258) → ⑥ Products (351) → ⑤ Nudges (88) → ④ Education (67).</a:t>
-            </a:r>
-            <a:endParaRPr lang="en-US" sz="1300" dirty="0"/>
+              <a:t>Score = reach (consumers) × driver strength (|r| of the tool's trigger column with the outcome it should move, month level). Wellbeing tools (outcome FHS) rank before growth tools (outcome engagement).</a:t>
+            </a:r>
+            <a:endParaRPr lang="en-US" sz="1200" dirty="0"/>
           </a:p>
           <a:p>
             <a:pPr marL="177800" indent="-177800">
@@ -9805,7 +9767,7 @@
               <a:buChar char="•"/>
             </a:pPr>
             <a:r>
-              <a:rPr lang="en-US" sz="1300" dirty="0">
+              <a:rPr lang="en-US" sz="1200" dirty="0">
                 <a:solidFill>
                   <a:srgbClr val="1B2A36"/>
                 </a:solidFill>
@@ -9813,9 +9775,9 @@
                 <a:ea typeface="Calibri" pitchFamily="34" charset="-122"/>
                 <a:cs typeface="Calibri" pitchFamily="34" charset="-120"/>
               </a:rPr>
-              <a:t>Lead with Budgeting + Alerts (the wellbeing mission); layer growth tools on top.</a:t>
-            </a:r>
-            <a:endParaRPr lang="en-US" sz="1300" dirty="0"/>
+              <a:t>Wellbeing: ① Budgeting 271 → ③ Reminders 128 → ② Alerts 37 → ④ Education 32. Growth: ⑥ Products 74 → ⑤ Nudges 52. Alerts still ships first: its 43 customers hold 71% of stress months.</a:t>
+            </a:r>
+            <a:endParaRPr lang="en-US" sz="1200" dirty="0"/>
           </a:p>
           <a:p>
             <a:pPr marL="177800" indent="-177800">
@@ -9826,7 +9788,7 @@
               <a:buChar char="•"/>
             </a:pPr>
             <a:r>
-              <a:rPr lang="en-US" sz="1300" dirty="0">
+              <a:rPr lang="en-US" sz="1200" dirty="0">
                 <a:solidFill>
                   <a:srgbClr val="1B2A36"/>
                 </a:solidFill>
@@ -9834,9 +9796,9 @@
                 <a:ea typeface="Calibri" pitchFamily="34" charset="-122"/>
                 <a:cs typeface="Calibri" pitchFamily="34" charset="-120"/>
               </a:rPr>
-              <a:t>Fair by design: every trigger is a behavioural ratio; segments correlate with age / gender, so we never target by demographics.</a:t>
-            </a:r>
-            <a:endParaRPr lang="en-US" sz="1300" dirty="0"/>
+              <a:t>Fairness audit: triggers are behaviour only, but targets skew — Reminders 60.5% female (base 50.6%); Education / Nudges mean age ~58 (base 50). We track uptake by age and gender; minors get no offers.</a:t>
+            </a:r>
+            <a:endParaRPr lang="en-US" sz="1200" dirty="0"/>
           </a:p>
           <a:p>
             <a:pPr marL="177800" indent="-177800">
@@ -9847,7 +9809,7 @@
               <a:buChar char="•"/>
             </a:pPr>
             <a:r>
-              <a:rPr lang="en-US" sz="1300" dirty="0">
+              <a:rPr lang="en-US" sz="1200" dirty="0">
                 <a:solidFill>
                   <a:srgbClr val="1B2A36"/>
                 </a:solidFill>
@@ -9855,15 +9817,15 @@
                 <a:ea typeface="Calibri" pitchFamily="34" charset="-122"/>
                 <a:cs typeface="Calibri" pitchFamily="34" charset="-120"/>
               </a:rPr>
-              <a:t>RULE: financial_health_score is never used to deny credit, cut a credit limit, raise a rate or block an account — a low score only triggers help that is offered.</a:t>
-            </a:r>
-            <a:endParaRPr lang="en-US" sz="1300" dirty="0"/>
+              <a:t>RULE: financial_health_score is never used to deny credit, cut a credit limit, raise a rate or block an account. A low score only triggers help that is offered.</a:t>
+            </a:r>
+            <a:endParaRPr lang="en-US" sz="1200" dirty="0"/>
           </a:p>
         </p:txBody>
       </p:sp>
       <p:pic>
         <p:nvPicPr>
-          <p:cNvPr id="5" name="Image 0" descr="D:\BI10GroupYAPPERS\outputs\figures\t5_priority_ranking.png">    </p:cNvPr>
+          <p:cNvPr id="5" name="Image 0" descr="D:\BI10GroupYAPPERS\outputs\figures\v2_t5_priority_score.png">    </p:cNvPr>
           <p:cNvPicPr>
             <a:picLocks noChangeAspect="1"/>
           </p:cNvPicPr>
@@ -9876,8 +9838,8 @@
         </p:blipFill>
         <p:spPr>
           <a:xfrm>
-            <a:off x="6446520" y="1554480"/>
-            <a:ext cx="5303520" cy="4023360"/>
+            <a:off x="6446520" y="1463040"/>
+            <a:ext cx="5303520" cy="4114800"/>
           </a:xfrm>
           <a:prstGeom prst="rect">
             <a:avLst/>
@@ -9917,7 +9879,7 @@
                 <a:ea typeface="Calibri" pitchFamily="34" charset="-122"/>
                 <a:cs typeface="Calibri" pitchFamily="34" charset="-120"/>
               </a:rPr>
-              <a:t>Source: team k-means (k=4) on 8 z-scaled ratios, 999 consumers (task4_features.csv).</a:t>
+              <a:t>Source: team analysis on the consumer-month file (10,992 months) + task4_features.csv; |r| = Pearson, month level.</a:t>
             </a:r>
             <a:endParaRPr lang="en-US" sz="850" dirty="0"/>
           </a:p>
@@ -10142,7 +10104,7 @@
         <p:spPr>
           <a:xfrm>
             <a:off x="457200" y="384048"/>
-            <a:ext cx="4114800" cy="292608"/>
+            <a:ext cx="7315200" cy="292608"/>
           </a:xfrm>
           <a:prstGeom prst="rect">
             <a:avLst/>
@@ -10181,7 +10143,7 @@
         <p:spPr>
           <a:xfrm>
             <a:off x="457200" y="658368"/>
-            <a:ext cx="11247120" cy="868680"/>
+            <a:ext cx="11247120" cy="731520"/>
           </a:xfrm>
           <a:prstGeom prst="rect">
             <a:avLst/>
@@ -10200,7 +10162,7 @@
               <a:buNone/>
             </a:pPr>
             <a:r>
-              <a:rPr lang="en-US" sz="2700" b="1" dirty="0">
+              <a:rPr lang="en-US" sz="2500" b="1" dirty="0">
                 <a:solidFill>
                   <a:srgbClr val="12435E"/>
                 </a:solidFill>
@@ -10208,9 +10170,9 @@
                 <a:ea typeface="Cambria" pitchFamily="34" charset="-122"/>
                 <a:cs typeface="Cambria" pitchFamily="34" charset="-120"/>
               </a:rPr>
-              <a:t>Expected impact, measurement &amp; a 90-day roadmap</a:t>
-            </a:r>
-            <a:endParaRPr lang="en-US" sz="2700" dirty="0"/>
+              <a:t>A 10% spend trim could cut stress months 28–32%, tested in 90 days</a:t>
+            </a:r>
+            <a:endParaRPr lang="en-US" sz="2500" dirty="0"/>
           </a:p>
         </p:txBody>
       </p:sp>
@@ -10222,8 +10184,8 @@
         </p:nvSpPr>
         <p:spPr>
           <a:xfrm>
-            <a:off x="457200" y="1554480"/>
-            <a:ext cx="5760720" cy="3429000"/>
+            <a:off x="457200" y="1463040"/>
+            <a:ext cx="5760720" cy="3520440"/>
           </a:xfrm>
           <a:prstGeom prst="rect">
             <a:avLst/>
@@ -10251,7 +10213,7 @@
                 <a:ea typeface="Calibri" pitchFamily="34" charset="-122"/>
                 <a:cs typeface="Calibri" pitchFamily="34" charset="-120"/>
               </a:rPr>
-              <a:t>Scenario (illustrative): FHS = 84.1 − 25.3 × spend-to-income (r −0.90). A 5% trim for the Stretched 302 → stress months 95 → 80 (−16%); 10% → 65 (−32%); 15% → 49.</a:t>
+              <a:t>What-if: FHS = 84.1 − 25.3 × spend-to-income (r −0.90). If the Stretched 302 cut spend-to-income by 10%, stress months fall 95 → 65–68 (−28% to −32%).</a:t>
             </a:r>
             <a:endParaRPr lang="en-US" sz="1300" dirty="0"/>
           </a:p>
@@ -10272,7 +10234,7 @@
                 <a:ea typeface="Calibri" pitchFamily="34" charset="-122"/>
                 <a:cs typeface="Calibri" pitchFamily="34" charset="-120"/>
               </a:rPr>
-              <a:t>Measurement: every tool gets one KPI and a randomised holdout (e.g. Budgeting: 10% holdout for 3 months).</a:t>
+              <a:t>Directional only: spend-to-income + utilization explain 82% of FHS, so part of the gain is mechanical; 9 of the 95 stress months sit outside the 302.</a:t>
             </a:r>
             <a:endParaRPr lang="en-US" sz="1300" dirty="0"/>
           </a:p>
@@ -10293,7 +10255,28 @@
                 <a:ea typeface="Calibri" pitchFamily="34" charset="-122"/>
                 <a:cs typeface="Calibri" pitchFamily="34" charset="-120"/>
               </a:rPr>
-              <a:t>Days 0–30: Budgeting + Alerts · 31–60: November Reminders + Digital Nudges · 61–90: Education + opt-in Products; keep what moves the KPI.</a:t>
+              <a:t>Measurement: each tool has one KPI against a random 10% holdout for 3 months; Reminders are judged on the December FHS drop vs holdout.</a:t>
+            </a:r>
+            <a:endParaRPr lang="en-US" sz="1300" dirty="0"/>
+          </a:p>
+          <a:p>
+            <a:pPr marL="177800" indent="-177800">
+              <a:spcAft>
+                <a:spcPts val="700"/>
+              </a:spcAft>
+              <a:buSzPct val="100000"/>
+              <a:buChar char="•"/>
+            </a:pPr>
+            <a:r>
+              <a:rPr lang="en-US" sz="1300" dirty="0">
+                <a:solidFill>
+                  <a:srgbClr val="1B2A36"/>
+                </a:solidFill>
+                <a:latin typeface="Calibri" pitchFamily="34" charset="0"/>
+                <a:ea typeface="Calibri" pitchFamily="34" charset="-122"/>
+                <a:cs typeface="Calibri" pitchFamily="34" charset="-120"/>
+              </a:rPr>
+              <a:t>Days 0–30: Budgeting + Alerts · 31–60: November Reminders + Digital Nudges · 61–90: Education + opt-in Products. Scale only what beats its holdout.</a:t>
             </a:r>
             <a:endParaRPr lang="en-US" sz="1300" dirty="0"/>
           </a:p>
@@ -10301,7 +10284,7 @@
       </p:sp>
       <p:pic>
         <p:nvPicPr>
-          <p:cNvPr id="5" name="Image 0" descr="D:\BI10GroupYAPPERS\outputs\figures\t5_impact_scenario.png">    </p:cNvPr>
+          <p:cNvPr id="5" name="Image 0" descr="D:\BI10GroupYAPPERS\outputs\figures\v2_t5_impact_scenario.png">    </p:cNvPr>
           <p:cNvPicPr>
             <a:picLocks noChangeAspect="1"/>
           </p:cNvPicPr>
@@ -10314,8 +10297,8 @@
         </p:blipFill>
         <p:spPr>
           <a:xfrm>
-            <a:off x="6446520" y="1554480"/>
-            <a:ext cx="5303520" cy="4023360"/>
+            <a:off x="6446520" y="1463040"/>
+            <a:ext cx="5303520" cy="4114800"/>
           </a:xfrm>
           <a:prstGeom prst="rect">
             <a:avLst/>
@@ -10355,7 +10338,7 @@
                 <a:ea typeface="Calibri" pitchFamily="34" charset="-122"/>
                 <a:cs typeface="Calibri" pitchFamily="34" charset="-120"/>
               </a:rPr>
-              <a:t>Source: team scenario on the consumer-month file (10,992 months).</a:t>
+              <a:t>Source: team what-if on the consumer-month file (10,992 months); OLS slopes, all customers vs Stretched only.</a:t>
             </a:r>
             <a:endParaRPr lang="en-US" sz="850" dirty="0"/>
           </a:p>
@@ -10394,7 +10377,7 @@
                 <a:ea typeface="Calibri" pitchFamily="34" charset="-122"/>
                 <a:cs typeface="Calibri" pitchFamily="34" charset="-120"/>
               </a:rPr>
-              <a:t>⚠  FHS embeds spend fields — the slope is mechanical; a scenario to test, not a forecast.</a:t>
+              <a:t>⚠  Illustrative: the slope is partly built into the FHS formula, so only the holdout test can show real behaviour change.</a:t>
             </a:r>
             <a:endParaRPr lang="en-US" sz="950" dirty="0"/>
           </a:p>
@@ -10455,7 +10438,7 @@
                 <a:ea typeface="Cambria" pitchFamily="34" charset="-122"/>
                 <a:cs typeface="Cambria" pitchFamily="34" charset="-120"/>
               </a:rPr>
-              <a:t>−32%</a:t>
+              <a:t>65–68</a:t>
             </a:r>
             <a:endParaRPr lang="en-US" sz="2600" dirty="0"/>
           </a:p>
@@ -10494,7 +10477,7 @@
                 <a:ea typeface="Calibri" pitchFamily="34" charset="-122"/>
                 <a:cs typeface="Calibri" pitchFamily="34" charset="-120"/>
               </a:rPr>
-              <a:t>stress months at a 10% trim</a:t>
+              <a:t>stress months (from 95) at a 10% trim</a:t>
             </a:r>
             <a:endParaRPr lang="en-US" sz="1100" dirty="0"/>
           </a:p>
@@ -10638,7 +10621,7 @@
         </p:nvSpPr>
         <p:spPr>
           <a:xfrm>
-            <a:off x="822960" y="822960"/>
+            <a:off x="822960" y="731520"/>
             <a:ext cx="7315200" cy="365760"/>
           </a:xfrm>
           <a:prstGeom prst="rect">
@@ -10663,7 +10646,7 @@
                 <a:ea typeface="Calibri" pitchFamily="34" charset="-122"/>
                 <a:cs typeface="Calibri" pitchFamily="34" charset="-120"/>
               </a:rPr>
-              <a:t>The contract</a:t>
+              <a:t>THE CONTRACT</a:t>
             </a:r>
             <a:endParaRPr lang="en-US" sz="1200" dirty="0"/>
           </a:p>
@@ -10677,7 +10660,7 @@
         </p:nvSpPr>
         <p:spPr>
           <a:xfrm>
-            <a:off x="822960" y="1234440"/>
+            <a:off x="822960" y="1143000"/>
             <a:ext cx="10607040" cy="1554480"/>
           </a:xfrm>
           <a:prstGeom prst="rect">
@@ -10697,7 +10680,7 @@
               <a:buNone/>
             </a:pPr>
             <a:r>
-              <a:rPr lang="en-US" sz="2800" b="1" dirty="0">
+              <a:rPr lang="en-US" sz="2600" b="1" dirty="0">
                 <a:solidFill>
                   <a:srgbClr val="FFFFFF"/>
                 </a:solidFill>
@@ -10705,41 +10688,99 @@
                 <a:ea typeface="Cambria" pitchFamily="34" charset="-122"/>
                 <a:cs typeface="Cambria" pitchFamily="34" charset="-120"/>
               </a:rPr>
-              <a:t>Grow the healthy, activate the dormant, protect the stretched —</a:t>
-            </a:r>
-            <a:endParaRPr lang="en-US" sz="2800" dirty="0"/>
-          </a:p>
+              <a:t>Protect the stretched, plan with the active, re-engage the occasional, grow the healthy — without ever touching their credit.</a:t>
+            </a:r>
+            <a:endParaRPr lang="en-US" sz="2600" dirty="0"/>
+          </a:p>
+        </p:txBody>
+      </p:sp>
+      <p:sp>
+        <p:nvSpPr>
+          <p:cNvPr id="5" name="Text 3"/>
+          <p:cNvSpPr txBox="1"/>
+          <p:nvPr/>
+        </p:nvSpPr>
+        <p:spPr>
+          <a:xfrm>
+            <a:off x="822960" y="2971800"/>
+            <a:ext cx="2468880" cy="731520"/>
+          </a:xfrm>
+          <a:prstGeom prst="rect">
+            <a:avLst/>
+          </a:prstGeom>
+          <a:noFill/>
+          <a:ln/>
+        </p:spPr>
+        <p:txBody>
+          <a:bodyPr wrap="square" lIns="0" tIns="0" rIns="0" bIns="0" rtlCol="0" anchor="t"/>
+          <a:lstStyle/>
           <a:p>
             <a:pPr indent="0" marL="0">
-              <a:lnSpc>
-                <a:spcPct val="105000"/>
-              </a:lnSpc>
-              <a:buNone/>
-            </a:pPr>
-            <a:r>
-              <a:rPr lang="en-US" sz="2800" b="1" dirty="0">
-                <a:solidFill>
-                  <a:srgbClr val="FFFFFF"/>
-                </a:solidFill>
-                <a:latin typeface="Cambria" pitchFamily="34" charset="0"/>
-                <a:ea typeface="Cambria" pitchFamily="34" charset="-122"/>
-                <a:cs typeface="Cambria" pitchFamily="34" charset="-120"/>
-              </a:rPr>
-              <a:t>without ever touching their credit.</a:t>
-            </a:r>
-            <a:endParaRPr lang="en-US" sz="2800" dirty="0"/>
-          </a:p>
-        </p:txBody>
-      </p:sp>
-      <p:sp>
-        <p:nvSpPr>
-          <p:cNvPr id="5" name="Text 3"/>
-          <p:cNvSpPr txBox="1"/>
-          <p:nvPr/>
-        </p:nvSpPr>
-        <p:spPr>
-          <a:xfrm>
-            <a:off x="822960" y="3063240"/>
+              <a:buNone/>
+            </a:pPr>
+            <a:r>
+              <a:rPr lang="en-US" sz="1400" b="1" dirty="0">
+                <a:solidFill>
+                  <a:srgbClr val="1FC3A6"/>
+                </a:solidFill>
+                <a:latin typeface="Calibri" pitchFamily="34" charset="0"/>
+                <a:ea typeface="Calibri" pitchFamily="34" charset="-122"/>
+                <a:cs typeface="Calibri" pitchFamily="34" charset="-120"/>
+              </a:rPr>
+              <a:t>The spine</a:t>
+            </a:r>
+            <a:endParaRPr lang="en-US" sz="1400" dirty="0"/>
+          </a:p>
+        </p:txBody>
+      </p:sp>
+      <p:sp>
+        <p:nvSpPr>
+          <p:cNvPr id="6" name="Text 4"/>
+          <p:cNvSpPr txBox="1"/>
+          <p:nvPr/>
+        </p:nvSpPr>
+        <p:spPr>
+          <a:xfrm>
+            <a:off x="3383280" y="2971800"/>
+            <a:ext cx="8138160" cy="731520"/>
+          </a:xfrm>
+          <a:prstGeom prst="rect">
+            <a:avLst/>
+          </a:prstGeom>
+          <a:noFill/>
+          <a:ln/>
+        </p:spPr>
+        <p:txBody>
+          <a:bodyPr wrap="square" lIns="0" tIns="0" rIns="0" bIns="0" rtlCol="0" anchor="t"/>
+          <a:lstStyle/>
+          <a:p>
+            <a:pPr indent="0" marL="0">
+              <a:buNone/>
+            </a:pPr>
+            <a:r>
+              <a:rPr lang="en-US" sz="1300" dirty="0">
+                <a:solidFill>
+                  <a:srgbClr val="DCEAEC"/>
+                </a:solidFill>
+                <a:latin typeface="Calibri" pitchFamily="34" charset="0"/>
+                <a:ea typeface="Calibri" pitchFamily="34" charset="-122"/>
+                <a:cs typeface="Calibri" pitchFamily="34" charset="-120"/>
+              </a:rPr>
+              <a:t>Overspending drives poor health (r −0.90). Under stress the budget flips to 71.6% discretionary. Stress comes in episodes and peaks in December.</a:t>
+            </a:r>
+            <a:endParaRPr lang="en-US" sz="1300" dirty="0"/>
+          </a:p>
+        </p:txBody>
+      </p:sp>
+      <p:sp>
+        <p:nvSpPr>
+          <p:cNvPr id="7" name="Text 5"/>
+          <p:cNvSpPr txBox="1"/>
+          <p:nvPr/>
+        </p:nvSpPr>
+        <p:spPr>
+          <a:xfrm>
+            <a:off x="822960" y="3758184"/>
             <a:ext cx="2468880" cy="731520"/>
           </a:xfrm>
           <a:prstGeom prst="rect">
@@ -10764,7 +10805,7 @@
                 <a:ea typeface="Calibri" pitchFamily="34" charset="-122"/>
                 <a:cs typeface="Calibri" pitchFamily="34" charset="-120"/>
               </a:rPr>
-              <a:t>The spine</a:t>
+              <a:t>The segments</a:t>
             </a:r>
             <a:endParaRPr lang="en-US" sz="1400" dirty="0"/>
           </a:p>
@@ -10772,14 +10813,14 @@
       </p:sp>
       <p:sp>
         <p:nvSpPr>
-          <p:cNvPr id="6" name="Text 4"/>
-          <p:cNvSpPr txBox="1"/>
-          <p:nvPr/>
-        </p:nvSpPr>
-        <p:spPr>
-          <a:xfrm>
-            <a:off x="3383280" y="3063240"/>
-            <a:ext cx="8046720" cy="731520"/>
+          <p:cNvPr id="8" name="Text 6"/>
+          <p:cNvSpPr txBox="1"/>
+          <p:nvPr/>
+        </p:nvSpPr>
+        <p:spPr>
+          <a:xfrm>
+            <a:off x="3383280" y="3758184"/>
+            <a:ext cx="8138160" cy="731520"/>
           </a:xfrm>
           <a:prstGeom prst="rect">
             <a:avLst/>
@@ -10803,7 +10844,7 @@
                 <a:ea typeface="Calibri" pitchFamily="34" charset="-122"/>
                 <a:cs typeface="Calibri" pitchFamily="34" charset="-120"/>
               </a:rPr>
-              <a:t>Overspend drives poor health; the budget inverts under stress; stress is episodic, striking the most engaged.</a:t>
+              <a:t>4 segments (351 / 302 / 258 / 88) covering all 999 customers, stable across seeds, each with its own opt-in tool.</a:t>
             </a:r>
             <a:endParaRPr lang="en-US" sz="1300" dirty="0"/>
           </a:p>
@@ -10811,13 +10852,13 @@
       </p:sp>
       <p:sp>
         <p:nvSpPr>
-          <p:cNvPr id="7" name="Text 5"/>
-          <p:cNvSpPr txBox="1"/>
-          <p:nvPr/>
-        </p:nvSpPr>
-        <p:spPr>
-          <a:xfrm>
-            <a:off x="822960" y="3849624"/>
+          <p:cNvPr id="9" name="Text 7"/>
+          <p:cNvSpPr txBox="1"/>
+          <p:nvPr/>
+        </p:nvSpPr>
+        <p:spPr>
+          <a:xfrm>
+            <a:off x="822960" y="4544568"/>
             <a:ext cx="2468880" cy="731520"/>
           </a:xfrm>
           <a:prstGeom prst="rect">
@@ -10842,7 +10883,7 @@
                 <a:ea typeface="Calibri" pitchFamily="34" charset="-122"/>
                 <a:cs typeface="Calibri" pitchFamily="34" charset="-120"/>
               </a:rPr>
-              <a:t>The payoff</a:t>
+              <a:t>Lead action</a:t>
             </a:r>
             <a:endParaRPr lang="en-US" sz="1400" dirty="0"/>
           </a:p>
@@ -10850,14 +10891,14 @@
       </p:sp>
       <p:sp>
         <p:nvSpPr>
-          <p:cNvPr id="8" name="Text 6"/>
-          <p:cNvSpPr txBox="1"/>
-          <p:nvPr/>
-        </p:nvSpPr>
-        <p:spPr>
-          <a:xfrm>
-            <a:off x="3383280" y="3849624"/>
-            <a:ext cx="8046720" cy="731520"/>
+          <p:cNvPr id="10" name="Text 8"/>
+          <p:cNvSpPr txBox="1"/>
+          <p:nvPr/>
+        </p:nvSpPr>
+        <p:spPr>
+          <a:xfrm>
+            <a:off x="3383280" y="4544568"/>
+            <a:ext cx="8138160" cy="731520"/>
           </a:xfrm>
           <a:prstGeom prst="rect">
             <a:avLst/>
@@ -10881,7 +10922,7 @@
                 <a:ea typeface="Calibri" pitchFamily="34" charset="-122"/>
                 <a:cs typeface="Calibri" pitchFamily="34" charset="-120"/>
               </a:rPr>
-              <a:t>4 clean segments (351/302/258/88) and a 6-tool plan reaching every customer with the right non-punitive touch.</a:t>
+              <a:t>Budgeting for the Stretched 302, plus evening Spend Alerts for the 43 customers behind 52% of stress months, each measured against a random holdout within 90 days.</a:t>
             </a:r>
             <a:endParaRPr lang="en-US" sz="1300" dirty="0"/>
           </a:p>
@@ -10889,13 +10930,13 @@
       </p:sp>
       <p:sp>
         <p:nvSpPr>
-          <p:cNvPr id="9" name="Text 7"/>
-          <p:cNvSpPr txBox="1"/>
-          <p:nvPr/>
-        </p:nvSpPr>
-        <p:spPr>
-          <a:xfrm>
-            <a:off x="822960" y="4636008"/>
+          <p:cNvPr id="11" name="Text 9"/>
+          <p:cNvSpPr txBox="1"/>
+          <p:nvPr/>
+        </p:nvSpPr>
+        <p:spPr>
+          <a:xfrm>
+            <a:off x="822960" y="5330952"/>
             <a:ext cx="2468880" cy="731520"/>
           </a:xfrm>
           <a:prstGeom prst="rect">
@@ -10920,7 +10961,7 @@
                 <a:ea typeface="Calibri" pitchFamily="34" charset="-122"/>
                 <a:cs typeface="Calibri" pitchFamily="34" charset="-120"/>
               </a:rPr>
-              <a:t>Lead action</a:t>
+              <a:t>Honest limits</a:t>
             </a:r>
             <a:endParaRPr lang="en-US" sz="1400" dirty="0"/>
           </a:p>
@@ -10928,14 +10969,14 @@
       </p:sp>
       <p:sp>
         <p:nvSpPr>
-          <p:cNvPr id="10" name="Text 8"/>
-          <p:cNvSpPr txBox="1"/>
-          <p:nvPr/>
-        </p:nvSpPr>
-        <p:spPr>
-          <a:xfrm>
-            <a:off x="3383280" y="4636008"/>
-            <a:ext cx="8046720" cy="731520"/>
+          <p:cNvPr id="12" name="Text 10"/>
+          <p:cNvSpPr txBox="1"/>
+          <p:nvPr/>
+        </p:nvSpPr>
+        <p:spPr>
+          <a:xfrm>
+            <a:off x="3383280" y="5330952"/>
+            <a:ext cx="8138160" cy="731520"/>
           </a:xfrm>
           <a:prstGeom prst="rect">
             <a:avLst/>
@@ -10959,7 +11000,7 @@
                 <a:ea typeface="Calibri" pitchFamily="34" charset="-122"/>
                 <a:cs typeface="Calibri" pitchFamily="34" charset="-120"/>
               </a:rPr>
-              <a:t>Budgeting for 302 + real-time Alerts catching 52% of all stress — highest reach × strongest driver, near-zero cost.</a:t>
+              <a:t>Synthetic data (two source years folded onto 2025, engagement skewed high), 91 customers seen only once, segments on a continuum. Sizes are directional; conclusions rest on ratios.</a:t>
             </a:r>
             <a:endParaRPr lang="en-US" sz="1300" dirty="0"/>
           </a:p>
@@ -10967,91 +11008,13 @@
       </p:sp>
       <p:sp>
         <p:nvSpPr>
-          <p:cNvPr id="11" name="Text 9"/>
-          <p:cNvSpPr txBox="1"/>
-          <p:nvPr/>
-        </p:nvSpPr>
-        <p:spPr>
-          <a:xfrm>
-            <a:off x="822960" y="5422392"/>
-            <a:ext cx="2468880" cy="731520"/>
-          </a:xfrm>
-          <a:prstGeom prst="rect">
-            <a:avLst/>
-          </a:prstGeom>
-          <a:noFill/>
-          <a:ln/>
-        </p:spPr>
-        <p:txBody>
-          <a:bodyPr wrap="square" lIns="0" tIns="0" rIns="0" bIns="0" rtlCol="0" anchor="t"/>
-          <a:lstStyle/>
-          <a:p>
-            <a:pPr indent="0" marL="0">
-              <a:buNone/>
-            </a:pPr>
-            <a:r>
-              <a:rPr lang="en-US" sz="1400" b="1" dirty="0">
-                <a:solidFill>
-                  <a:srgbClr val="1FC3A6"/>
-                </a:solidFill>
-                <a:latin typeface="Calibri" pitchFamily="34" charset="0"/>
-                <a:ea typeface="Calibri" pitchFamily="34" charset="-122"/>
-                <a:cs typeface="Calibri" pitchFamily="34" charset="-120"/>
-              </a:rPr>
-              <a:t>Honest limits</a:t>
-            </a:r>
-            <a:endParaRPr lang="en-US" sz="1400" dirty="0"/>
-          </a:p>
-        </p:txBody>
-      </p:sp>
-      <p:sp>
-        <p:nvSpPr>
-          <p:cNvPr id="12" name="Text 10"/>
-          <p:cNvSpPr txBox="1"/>
-          <p:nvPr/>
-        </p:nvSpPr>
-        <p:spPr>
-          <a:xfrm>
-            <a:off x="3383280" y="5422392"/>
-            <a:ext cx="8046720" cy="731520"/>
-          </a:xfrm>
-          <a:prstGeom prst="rect">
-            <a:avLst/>
-          </a:prstGeom>
-          <a:noFill/>
-          <a:ln/>
-        </p:spPr>
-        <p:txBody>
-          <a:bodyPr wrap="square" lIns="0" tIns="0" rIns="0" bIns="0" rtlCol="0" anchor="t"/>
-          <a:lstStyle/>
-          <a:p>
-            <a:pPr indent="0" marL="0">
-              <a:buNone/>
-            </a:pPr>
-            <a:r>
-              <a:rPr lang="en-US" sz="1300" dirty="0">
-                <a:solidFill>
-                  <a:srgbClr val="DCEAEC"/>
-                </a:solidFill>
-                <a:latin typeface="Calibri" pitchFamily="34" charset="0"/>
-                <a:ea typeface="Calibri" pitchFamily="34" charset="-122"/>
-                <a:cs typeface="Calibri" pitchFamily="34" charset="-120"/>
-              </a:rPr>
-              <a:t>Synthetic data with two source years folded onto 2025, engineered engagement, segments on a continuum — sizes directional, conclusions robust on ratios.</a:t>
-            </a:r>
-            <a:endParaRPr lang="en-US" sz="1300" dirty="0"/>
-          </a:p>
-        </p:txBody>
-      </p:sp>
-      <p:sp>
-        <p:nvSpPr>
           <p:cNvPr id="13" name="Text 11"/>
           <p:cNvSpPr txBox="1"/>
           <p:nvPr/>
         </p:nvSpPr>
         <p:spPr>
           <a:xfrm>
-            <a:off x="822960" y="6263640"/>
+            <a:off x="822960" y="6217920"/>
             <a:ext cx="10607040" cy="365760"/>
           </a:xfrm>
           <a:prstGeom prst="rect">
@@ -11123,7 +11086,7 @@
         <p:spPr>
           <a:xfrm>
             <a:off x="457200" y="384048"/>
-            <a:ext cx="4114800" cy="292608"/>
+            <a:ext cx="7315200" cy="292608"/>
           </a:xfrm>
           <a:prstGeom prst="rect">
             <a:avLst/>
@@ -11162,7 +11125,7 @@
         <p:spPr>
           <a:xfrm>
             <a:off x="457200" y="658368"/>
-            <a:ext cx="11247120" cy="868680"/>
+            <a:ext cx="11247120" cy="731520"/>
           </a:xfrm>
           <a:prstGeom prst="rect">
             <a:avLst/>
@@ -11181,7 +11144,7 @@
               <a:buNone/>
             </a:pPr>
             <a:r>
-              <a:rPr lang="en-US" sz="2700" b="1" dirty="0">
+              <a:rPr lang="en-US" sz="2500" b="1" dirty="0">
                 <a:solidFill>
                   <a:srgbClr val="12435E"/>
                 </a:solidFill>
@@ -11191,7 +11154,7 @@
               </a:rPr>
               <a:t>What this deck covers</a:t>
             </a:r>
-            <a:endParaRPr lang="en-US" sz="2700" dirty="0"/>
+            <a:endParaRPr lang="en-US" sz="2500" dirty="0"/>
           </a:p>
         </p:txBody>
       </p:sp>
@@ -11203,7 +11166,7 @@
         </p:nvSpPr>
         <p:spPr>
           <a:xfrm>
-            <a:off x="640080" y="1920240"/>
+            <a:off x="640080" y="1828800"/>
             <a:ext cx="777240" cy="777240"/>
           </a:xfrm>
           <a:prstGeom prst="roundRect">
@@ -11230,7 +11193,7 @@
         </p:nvSpPr>
         <p:spPr>
           <a:xfrm>
-            <a:off x="640080" y="1920240"/>
+            <a:off x="640080" y="1828800"/>
             <a:ext cx="777240" cy="777240"/>
           </a:xfrm>
           <a:prstGeom prst="rect">
@@ -11269,7 +11232,7 @@
         </p:nvSpPr>
         <p:spPr>
           <a:xfrm>
-            <a:off x="1600200" y="1920240"/>
+            <a:off x="1600200" y="1828800"/>
             <a:ext cx="4480560" cy="777240"/>
           </a:xfrm>
           <a:prstGeom prst="rect">
@@ -11294,7 +11257,24 @@
                 <a:ea typeface="Calibri" pitchFamily="34" charset="-122"/>
                 <a:cs typeface="Calibri" pitchFamily="34" charset="-120"/>
               </a:rPr>
-              <a:t>Introduction to the Case</a:t>
+              <a:t>Introduction to the Case &amp; data quality</a:t>
+            </a:r>
+            <a:endParaRPr lang="en-US" sz="1500" dirty="0"/>
+          </a:p>
+          <a:p>
+            <a:pPr indent="0" marL="0">
+              <a:buNone/>
+            </a:pPr>
+            <a:r>
+              <a:rPr lang="en-US" sz="1200" dirty="0">
+                <a:solidFill>
+                  <a:srgbClr val="5F7180"/>
+                </a:solidFill>
+                <a:latin typeface="Calibri" pitchFamily="34" charset="0"/>
+                <a:ea typeface="Calibri" pitchFamily="34" charset="-122"/>
+                <a:cs typeface="Calibri" pitchFamily="34" charset="-120"/>
+              </a:rPr>
+              <a:t>slide 4</a:t>
             </a:r>
             <a:endParaRPr lang="en-US" sz="1500" dirty="0"/>
           </a:p>
@@ -11308,7 +11288,7 @@
         </p:nvSpPr>
         <p:spPr>
           <a:xfrm>
-            <a:off x="640080" y="3291840"/>
+            <a:off x="640080" y="3200400"/>
             <a:ext cx="777240" cy="777240"/>
           </a:xfrm>
           <a:prstGeom prst="roundRect">
@@ -11335,7 +11315,7 @@
         </p:nvSpPr>
         <p:spPr>
           <a:xfrm>
-            <a:off x="640080" y="3291840"/>
+            <a:off x="640080" y="3200400"/>
             <a:ext cx="777240" cy="777240"/>
           </a:xfrm>
           <a:prstGeom prst="rect">
@@ -11374,7 +11354,7 @@
         </p:nvSpPr>
         <p:spPr>
           <a:xfrm>
-            <a:off x="1600200" y="3291840"/>
+            <a:off x="1600200" y="3200400"/>
             <a:ext cx="4480560" cy="777240"/>
           </a:xfrm>
           <a:prstGeom prst="rect">
@@ -11400,6 +11380,23 @@
                 <a:cs typeface="Calibri" pitchFamily="34" charset="-120"/>
               </a:rPr>
               <a:t>Task 1 — Exploratory Data Analysis</a:t>
+            </a:r>
+            <a:endParaRPr lang="en-US" sz="1500" dirty="0"/>
+          </a:p>
+          <a:p>
+            <a:pPr indent="0" marL="0">
+              <a:buNone/>
+            </a:pPr>
+            <a:r>
+              <a:rPr lang="en-US" sz="1200" dirty="0">
+                <a:solidFill>
+                  <a:srgbClr val="5F7180"/>
+                </a:solidFill>
+                <a:latin typeface="Calibri" pitchFamily="34" charset="0"/>
+                <a:ea typeface="Calibri" pitchFamily="34" charset="-122"/>
+                <a:cs typeface="Calibri" pitchFamily="34" charset="-120"/>
+              </a:rPr>
+              <a:t>slides 5–8</a:t>
             </a:r>
             <a:endParaRPr lang="en-US" sz="1500" dirty="0"/>
           </a:p>
@@ -11413,7 +11410,7 @@
         </p:nvSpPr>
         <p:spPr>
           <a:xfrm>
-            <a:off x="640080" y="4663440"/>
+            <a:off x="640080" y="4572000"/>
             <a:ext cx="777240" cy="777240"/>
           </a:xfrm>
           <a:prstGeom prst="roundRect">
@@ -11440,7 +11437,7 @@
         </p:nvSpPr>
         <p:spPr>
           <a:xfrm>
-            <a:off x="640080" y="4663440"/>
+            <a:off x="640080" y="4572000"/>
             <a:ext cx="777240" cy="777240"/>
           </a:xfrm>
           <a:prstGeom prst="rect">
@@ -11479,7 +11476,7 @@
         </p:nvSpPr>
         <p:spPr>
           <a:xfrm>
-            <a:off x="1600200" y="4663440"/>
+            <a:off x="1600200" y="4572000"/>
             <a:ext cx="4480560" cy="777240"/>
           </a:xfrm>
           <a:prstGeom prst="rect">
@@ -11505,6 +11502,23 @@
                 <a:cs typeface="Calibri" pitchFamily="34" charset="-120"/>
               </a:rPr>
               <a:t>Task 2 — Financial Health Analysis</a:t>
+            </a:r>
+            <a:endParaRPr lang="en-US" sz="1500" dirty="0"/>
+          </a:p>
+          <a:p>
+            <a:pPr indent="0" marL="0">
+              <a:buNone/>
+            </a:pPr>
+            <a:r>
+              <a:rPr lang="en-US" sz="1200" dirty="0">
+                <a:solidFill>
+                  <a:srgbClr val="5F7180"/>
+                </a:solidFill>
+                <a:latin typeface="Calibri" pitchFamily="34" charset="0"/>
+                <a:ea typeface="Calibri" pitchFamily="34" charset="-122"/>
+                <a:cs typeface="Calibri" pitchFamily="34" charset="-120"/>
+              </a:rPr>
+              <a:t>slides 9–12</a:t>
             </a:r>
             <a:endParaRPr lang="en-US" sz="1500" dirty="0"/>
           </a:p>
@@ -11518,7 +11532,7 @@
         </p:nvSpPr>
         <p:spPr>
           <a:xfrm>
-            <a:off x="6400800" y="1920240"/>
+            <a:off x="6400800" y="1828800"/>
             <a:ext cx="777240" cy="777240"/>
           </a:xfrm>
           <a:prstGeom prst="roundRect">
@@ -11545,7 +11559,7 @@
         </p:nvSpPr>
         <p:spPr>
           <a:xfrm>
-            <a:off x="6400800" y="1920240"/>
+            <a:off x="6400800" y="1828800"/>
             <a:ext cx="777240" cy="777240"/>
           </a:xfrm>
           <a:prstGeom prst="rect">
@@ -11584,7 +11598,7 @@
         </p:nvSpPr>
         <p:spPr>
           <a:xfrm>
-            <a:off x="7360920" y="1920240"/>
+            <a:off x="7360920" y="1828800"/>
             <a:ext cx="4480560" cy="777240"/>
           </a:xfrm>
           <a:prstGeom prst="rect">
@@ -11610,6 +11624,23 @@
                 <a:cs typeface="Calibri" pitchFamily="34" charset="-120"/>
               </a:rPr>
               <a:t>Task 3 — Customer Engagement Analysis</a:t>
+            </a:r>
+            <a:endParaRPr lang="en-US" sz="1500" dirty="0"/>
+          </a:p>
+          <a:p>
+            <a:pPr indent="0" marL="0">
+              <a:buNone/>
+            </a:pPr>
+            <a:r>
+              <a:rPr lang="en-US" sz="1200" dirty="0">
+                <a:solidFill>
+                  <a:srgbClr val="5F7180"/>
+                </a:solidFill>
+                <a:latin typeface="Calibri" pitchFamily="34" charset="0"/>
+                <a:ea typeface="Calibri" pitchFamily="34" charset="-122"/>
+                <a:cs typeface="Calibri" pitchFamily="34" charset="-120"/>
+              </a:rPr>
+              <a:t>slides 13–15</a:t>
             </a:r>
             <a:endParaRPr lang="en-US" sz="1500" dirty="0"/>
           </a:p>
@@ -11623,7 +11654,7 @@
         </p:nvSpPr>
         <p:spPr>
           <a:xfrm>
-            <a:off x="6400800" y="3291840"/>
+            <a:off x="6400800" y="3200400"/>
             <a:ext cx="777240" cy="777240"/>
           </a:xfrm>
           <a:prstGeom prst="roundRect">
@@ -11650,7 +11681,7 @@
         </p:nvSpPr>
         <p:spPr>
           <a:xfrm>
-            <a:off x="6400800" y="3291840"/>
+            <a:off x="6400800" y="3200400"/>
             <a:ext cx="777240" cy="777240"/>
           </a:xfrm>
           <a:prstGeom prst="rect">
@@ -11689,7 +11720,7 @@
         </p:nvSpPr>
         <p:spPr>
           <a:xfrm>
-            <a:off x="7360920" y="3291840"/>
+            <a:off x="7360920" y="3200400"/>
             <a:ext cx="4480560" cy="777240"/>
           </a:xfrm>
           <a:prstGeom prst="rect">
@@ -11715,6 +11746,23 @@
                 <a:cs typeface="Calibri" pitchFamily="34" charset="-120"/>
               </a:rPr>
               <a:t>Task 4 — Customer Segmentation</a:t>
+            </a:r>
+            <a:endParaRPr lang="en-US" sz="1500" dirty="0"/>
+          </a:p>
+          <a:p>
+            <a:pPr indent="0" marL="0">
+              <a:buNone/>
+            </a:pPr>
+            <a:r>
+              <a:rPr lang="en-US" sz="1200" dirty="0">
+                <a:solidFill>
+                  <a:srgbClr val="5F7180"/>
+                </a:solidFill>
+                <a:latin typeface="Calibri" pitchFamily="34" charset="0"/>
+                <a:ea typeface="Calibri" pitchFamily="34" charset="-122"/>
+                <a:cs typeface="Calibri" pitchFamily="34" charset="-120"/>
+              </a:rPr>
+              <a:t>slides 16–18</a:t>
             </a:r>
             <a:endParaRPr lang="en-US" sz="1500" dirty="0"/>
           </a:p>
@@ -11728,7 +11776,7 @@
         </p:nvSpPr>
         <p:spPr>
           <a:xfrm>
-            <a:off x="6400800" y="4663440"/>
+            <a:off x="6400800" y="4572000"/>
             <a:ext cx="777240" cy="777240"/>
           </a:xfrm>
           <a:prstGeom prst="roundRect">
@@ -11755,7 +11803,7 @@
         </p:nvSpPr>
         <p:spPr>
           <a:xfrm>
-            <a:off x="6400800" y="4663440"/>
+            <a:off x="6400800" y="4572000"/>
             <a:ext cx="777240" cy="777240"/>
           </a:xfrm>
           <a:prstGeom prst="rect">
@@ -11794,7 +11842,7 @@
         </p:nvSpPr>
         <p:spPr>
           <a:xfrm>
-            <a:off x="7360920" y="4663440"/>
+            <a:off x="7360920" y="4572000"/>
             <a:ext cx="4480560" cy="777240"/>
           </a:xfrm>
           <a:prstGeom prst="rect">
@@ -11820,6 +11868,23 @@
                 <a:cs typeface="Calibri" pitchFamily="34" charset="-120"/>
               </a:rPr>
               <a:t>Task 5 — Recommendations &amp; Impact</a:t>
+            </a:r>
+            <a:endParaRPr lang="en-US" sz="1500" dirty="0"/>
+          </a:p>
+          <a:p>
+            <a:pPr indent="0" marL="0">
+              <a:buNone/>
+            </a:pPr>
+            <a:r>
+              <a:rPr lang="en-US" sz="1200" dirty="0">
+                <a:solidFill>
+                  <a:srgbClr val="5F7180"/>
+                </a:solidFill>
+                <a:latin typeface="Calibri" pitchFamily="34" charset="0"/>
+                <a:ea typeface="Calibri" pitchFamily="34" charset="-122"/>
+                <a:cs typeface="Calibri" pitchFamily="34" charset="-120"/>
+              </a:rPr>
+              <a:t>slides 19–22</a:t>
             </a:r>
             <a:endParaRPr lang="en-US" sz="1500" dirty="0"/>
           </a:p>
@@ -11944,7 +12009,7 @@
         <p:spPr>
           <a:xfrm>
             <a:off x="457200" y="384048"/>
-            <a:ext cx="4114800" cy="292608"/>
+            <a:ext cx="7315200" cy="292608"/>
           </a:xfrm>
           <a:prstGeom prst="rect">
             <a:avLst/>
@@ -11983,7 +12048,7 @@
         <p:spPr>
           <a:xfrm>
             <a:off x="457200" y="658368"/>
-            <a:ext cx="11247120" cy="868680"/>
+            <a:ext cx="11247120" cy="731520"/>
           </a:xfrm>
           <a:prstGeom prst="rect">
             <a:avLst/>
@@ -12002,7 +12067,7 @@
               <a:buNone/>
             </a:pPr>
             <a:r>
-              <a:rPr lang="en-US" sz="2700" b="1" dirty="0">
+              <a:rPr lang="en-US" sz="2500" b="1" dirty="0">
                 <a:solidFill>
                   <a:srgbClr val="12435E"/>
                 </a:solidFill>
@@ -12010,9 +12075,9 @@
                 <a:ea typeface="Cambria" pitchFamily="34" charset="-122"/>
                 <a:cs typeface="Cambria" pitchFamily="34" charset="-120"/>
               </a:rPr>
-              <a:t>The case: understand wellbeing, not score credit</a:t>
-            </a:r>
-            <a:endParaRPr lang="en-US" sz="2700" dirty="0"/>
+              <a:t>The case: understand wellbeing, never score credit</a:t>
+            </a:r>
+            <a:endParaRPr lang="en-US" sz="2500" dirty="0"/>
           </a:p>
         </p:txBody>
       </p:sp>
@@ -12024,8 +12089,8 @@
         </p:nvSpPr>
         <p:spPr>
           <a:xfrm>
-            <a:off x="457200" y="1554480"/>
-            <a:ext cx="5760720" cy="3108960"/>
+            <a:off x="457200" y="1463040"/>
+            <a:ext cx="5760720" cy="3291840"/>
           </a:xfrm>
           <a:prstGeom prst="rect">
             <a:avLst/>
@@ -12045,7 +12110,7 @@
               <a:buChar char="•"/>
             </a:pPr>
             <a:r>
-              <a:rPr lang="en-US" sz="1300" dirty="0">
+              <a:rPr lang="en-US" sz="1250" dirty="0">
                 <a:solidFill>
                   <a:srgbClr val="1B2A36"/>
                 </a:solidFill>
@@ -12053,9 +12118,9 @@
                 <a:ea typeface="Calibri" pitchFamily="34" charset="-122"/>
                 <a:cs typeface="Calibri" pitchFamily="34" charset="-120"/>
               </a:rPr>
-              <a:t>ITB, a Vietnamese consumer-finance company, wants to understand customer wellbeing, spending and engagement — customer understanding &amp; segmentation, NOT credit-risk decisions.</a:t>
-            </a:r>
-            <a:endParaRPr lang="en-US" sz="1300" dirty="0"/>
+              <a:t>ITB, a Vietnamese consumer-finance company, wants to understand customers' financial wellbeing, spending and channel engagement, and to segment them. It does not want credit-risk decisions.</a:t>
+            </a:r>
+            <a:endParaRPr lang="en-US" sz="1250" dirty="0"/>
           </a:p>
           <a:p>
             <a:pPr marL="177800" indent="-177800">
@@ -12066,7 +12131,7 @@
               <a:buChar char="•"/>
             </a:pPr>
             <a:r>
-              <a:rPr lang="en-US" sz="1300" dirty="0">
+              <a:rPr lang="en-US" sz="1250" dirty="0">
                 <a:solidFill>
                   <a:srgbClr val="1B2A36"/>
                 </a:solidFill>
@@ -12074,9 +12139,9 @@
                 <a:ea typeface="Calibri" pitchFamily="34" charset="-122"/>
                 <a:cs typeface="Calibri" pitchFamily="34" charset="-120"/>
               </a:rPr>
-              <a:t>We read ratios and shares, never absolute VND: synthetic income / credit / balance magnitudes are inflated.</a:t>
-            </a:r>
-            <a:endParaRPr lang="en-US" sz="1300" dirty="0"/>
+              <a:t>We compare ratios and shares, never absolute VND: synthetic income, credit and balance amounts are inflated (case §12).</a:t>
+            </a:r>
+            <a:endParaRPr lang="en-US" sz="1250" dirty="0"/>
           </a:p>
           <a:p>
             <a:pPr marL="177800" indent="-177800">
@@ -12087,7 +12152,7 @@
               <a:buChar char="•"/>
             </a:pPr>
             <a:r>
-              <a:rPr lang="en-US" sz="1300" dirty="0">
+              <a:rPr lang="en-US" sz="1250" dirty="0">
                 <a:solidFill>
                   <a:srgbClr val="1B2A36"/>
                 </a:solidFill>
@@ -12095,9 +12160,9 @@
                 <a:ea typeface="Calibri" pitchFamily="34" charset="-122"/>
                 <a:cs typeface="Calibri" pitchFamily="34" charset="-120"/>
               </a:rPr>
-              <a:t>Distress analysed at consumer-MONTH grain (it is episodic); "what kind of customer" at consumer level.</a:t>
-            </a:r>
-            <a:endParaRPr lang="en-US" sz="1300" dirty="0"/>
+              <a:t>Stress is measured per customer-month, because it comes and goes. Segments are measured per customer, as a yearly average profile.</a:t>
+            </a:r>
+            <a:endParaRPr lang="en-US" sz="1250" dirty="0"/>
           </a:p>
           <a:p>
             <a:pPr marL="177800" indent="-177800">
@@ -12108,7 +12173,7 @@
               <a:buChar char="•"/>
             </a:pPr>
             <a:r>
-              <a:rPr lang="en-US" sz="1300" dirty="0">
+              <a:rPr lang="en-US" sz="1250" dirty="0">
                 <a:solidFill>
                   <a:srgbClr val="1B2A36"/>
                 </a:solidFill>
@@ -12116,9 +12181,9 @@
                 <a:ea typeface="Calibri" pitchFamily="34" charset="-122"/>
                 <a:cs typeface="Calibri" pitchFamily="34" charset="-120"/>
               </a:rPr>
-              <a:t>Process: data-quality checks → EDA → financial health → engagement → segmentation → recommendations. Every number reproduces in notebooks/full_pipeline.ipynb.</a:t>
-            </a:r>
-            <a:endParaRPr lang="en-US" sz="1300" dirty="0"/>
+              <a:t>Process: data-quality checks → EDA → financial health → engagement → segmentation → recommendations. Every number reproduces from notebooks/full_pipeline.ipynb.</a:t>
+            </a:r>
+            <a:endParaRPr lang="en-US" sz="1250" dirty="0"/>
           </a:p>
         </p:txBody>
       </p:sp>
@@ -12131,11 +12196,11 @@
         <p:spPr>
           <a:xfrm>
             <a:off x="457200" y="4846320"/>
-            <a:ext cx="5760720" cy="1097280"/>
+            <a:ext cx="5760720" cy="1188720"/>
           </a:xfrm>
           <a:prstGeom prst="roundRect">
             <a:avLst>
-              <a:gd name="adj" fmla="val 6667"/>
+              <a:gd name="adj" fmla="val 6154"/>
             </a:avLst>
           </a:prstGeom>
           <a:solidFill>
@@ -12152,8 +12217,8 @@
         </p:nvSpPr>
         <p:spPr>
           <a:xfrm>
-            <a:off x="640080" y="4919472"/>
-            <a:ext cx="5394960" cy="960120"/>
+            <a:off x="640080" y="4901184"/>
+            <a:ext cx="5394960" cy="1078992"/>
           </a:xfrm>
           <a:prstGeom prst="rect">
             <a:avLst/>
@@ -12183,7 +12248,7 @@
               <a:buNone/>
             </a:pPr>
             <a:r>
-              <a:rPr lang="en-US" sz="1250" dirty="0">
+              <a:rPr lang="en-US" sz="1200" dirty="0">
                 <a:solidFill>
                   <a:srgbClr val="FFFFFF"/>
                 </a:solidFill>
@@ -12191,7 +12256,7 @@
                 <a:ea typeface="Calibri" pitchFamily="34" charset="-122"/>
                 <a:cs typeface="Calibri" pitchFamily="34" charset="-120"/>
               </a:rPr>
-              <a:t>financial_health_score is a wellbeing measure — never used to deny credit, cut a limit, raise a rate, or block an account.</a:t>
+              <a:t>financial_health_score is a wellbeing indicator. It is never used to approve or deny credit, cut a limit, raise a rate or block an account. A low score only triggers help the customer can accept or ignore.</a:t>
             </a:r>
             <a:endParaRPr lang="en-US" sz="1300" dirty="0"/>
           </a:p>
@@ -12205,7 +12270,7 @@
         </p:nvSpPr>
         <p:spPr>
           <a:xfrm>
-            <a:off x="6446520" y="1554480"/>
+            <a:off x="6446520" y="1463040"/>
             <a:ext cx="1234440" cy="960120"/>
           </a:xfrm>
           <a:prstGeom prst="roundRect">
@@ -12227,7 +12292,7 @@
         </p:nvSpPr>
         <p:spPr>
           <a:xfrm>
-            <a:off x="6446520" y="1609344"/>
+            <a:off x="6446520" y="1517904"/>
             <a:ext cx="1234440" cy="502920"/>
           </a:xfrm>
           <a:prstGeom prst="rect">
@@ -12244,7 +12309,7 @@
               <a:buNone/>
             </a:pPr>
             <a:r>
-              <a:rPr lang="en-US" sz="2000" b="1" dirty="0">
+              <a:rPr lang="en-US" sz="1900" b="1" dirty="0">
                 <a:solidFill>
                   <a:srgbClr val="12435E"/>
                 </a:solidFill>
@@ -12254,7 +12319,7 @@
               </a:rPr>
               <a:t>999</a:t>
             </a:r>
-            <a:endParaRPr lang="en-US" sz="2000" dirty="0"/>
+            <a:endParaRPr lang="en-US" sz="1900" dirty="0"/>
           </a:p>
         </p:txBody>
       </p:sp>
@@ -12266,7 +12331,7 @@
         </p:nvSpPr>
         <p:spPr>
           <a:xfrm>
-            <a:off x="6446520" y="2103120"/>
+            <a:off x="6446520" y="2011680"/>
             <a:ext cx="1234440" cy="320040"/>
           </a:xfrm>
           <a:prstGeom prst="rect">
@@ -12283,7 +12348,7 @@
               <a:buNone/>
             </a:pPr>
             <a:r>
-              <a:rPr lang="en-US" sz="1050" dirty="0">
+              <a:rPr lang="en-US" sz="1000" dirty="0">
                 <a:solidFill>
                   <a:srgbClr val="5F7180"/>
                 </a:solidFill>
@@ -12293,7 +12358,7 @@
               </a:rPr>
               <a:t>consumers</a:t>
             </a:r>
-            <a:endParaRPr lang="en-US" sz="1050" dirty="0"/>
+            <a:endParaRPr lang="en-US" sz="1000" dirty="0"/>
           </a:p>
         </p:txBody>
       </p:sp>
@@ -12305,7 +12370,7 @@
         </p:nvSpPr>
         <p:spPr>
           <a:xfrm>
-            <a:off x="7790688" y="1554480"/>
+            <a:off x="7790688" y="1463040"/>
             <a:ext cx="1234440" cy="960120"/>
           </a:xfrm>
           <a:prstGeom prst="roundRect">
@@ -12327,7 +12392,7 @@
         </p:nvSpPr>
         <p:spPr>
           <a:xfrm>
-            <a:off x="7790688" y="1609344"/>
+            <a:off x="7790688" y="1517904"/>
             <a:ext cx="1234440" cy="502920"/>
           </a:xfrm>
           <a:prstGeom prst="rect">
@@ -12344,7 +12409,7 @@
               <a:buNone/>
             </a:pPr>
             <a:r>
-              <a:rPr lang="en-US" sz="2000" b="1" dirty="0">
+              <a:rPr lang="en-US" sz="1900" b="1" dirty="0">
                 <a:solidFill>
                   <a:srgbClr val="12435E"/>
                 </a:solidFill>
@@ -12352,9 +12417,9 @@
                 <a:ea typeface="Cambria" pitchFamily="34" charset="-122"/>
                 <a:cs typeface="Cambria" pitchFamily="34" charset="-120"/>
               </a:rPr>
-              <a:t>1.85M</a:t>
-            </a:r>
-            <a:endParaRPr lang="en-US" sz="2000" dirty="0"/>
+              <a:t>10,992</a:t>
+            </a:r>
+            <a:endParaRPr lang="en-US" sz="1900" dirty="0"/>
           </a:p>
         </p:txBody>
       </p:sp>
@@ -12366,7 +12431,7 @@
         </p:nvSpPr>
         <p:spPr>
           <a:xfrm>
-            <a:off x="7790688" y="2103120"/>
+            <a:off x="7790688" y="2011680"/>
             <a:ext cx="1234440" cy="320040"/>
           </a:xfrm>
           <a:prstGeom prst="rect">
@@ -12383,7 +12448,7 @@
               <a:buNone/>
             </a:pPr>
             <a:r>
-              <a:rPr lang="en-US" sz="1050" dirty="0">
+              <a:rPr lang="en-US" sz="1000" dirty="0">
                 <a:solidFill>
                   <a:srgbClr val="5F7180"/>
                 </a:solidFill>
@@ -12391,9 +12456,9 @@
                 <a:ea typeface="Calibri" pitchFamily="34" charset="-122"/>
                 <a:cs typeface="Calibri" pitchFamily="34" charset="-120"/>
               </a:rPr>
-              <a:t>transactions</a:t>
-            </a:r>
-            <a:endParaRPr lang="en-US" sz="1050" dirty="0"/>
+              <a:t>consumer-months</a:t>
+            </a:r>
+            <a:endParaRPr lang="en-US" sz="1000" dirty="0"/>
           </a:p>
         </p:txBody>
       </p:sp>
@@ -12405,7 +12470,7 @@
         </p:nvSpPr>
         <p:spPr>
           <a:xfrm>
-            <a:off x="9134856" y="1554480"/>
+            <a:off x="9134856" y="1463040"/>
             <a:ext cx="1234440" cy="960120"/>
           </a:xfrm>
           <a:prstGeom prst="roundRect">
@@ -12427,7 +12492,7 @@
         </p:nvSpPr>
         <p:spPr>
           <a:xfrm>
-            <a:off x="9134856" y="1609344"/>
+            <a:off x="9134856" y="1517904"/>
             <a:ext cx="1234440" cy="502920"/>
           </a:xfrm>
           <a:prstGeom prst="rect">
@@ -12444,7 +12509,7 @@
               <a:buNone/>
             </a:pPr>
             <a:r>
-              <a:rPr lang="en-US" sz="2000" b="1" dirty="0">
+              <a:rPr lang="en-US" sz="1900" b="1" dirty="0">
                 <a:solidFill>
                   <a:srgbClr val="12435E"/>
                 </a:solidFill>
@@ -12452,9 +12517,9 @@
                 <a:ea typeface="Cambria" pitchFamily="34" charset="-122"/>
                 <a:cs typeface="Cambria" pitchFamily="34" charset="-120"/>
               </a:rPr>
-              <a:t>693</a:t>
-            </a:r>
-            <a:endParaRPr lang="en-US" sz="2000" dirty="0"/>
+              <a:t>1.85M</a:t>
+            </a:r>
+            <a:endParaRPr lang="en-US" sz="1900" dirty="0"/>
           </a:p>
         </p:txBody>
       </p:sp>
@@ -12466,7 +12531,7 @@
         </p:nvSpPr>
         <p:spPr>
           <a:xfrm>
-            <a:off x="9134856" y="2103120"/>
+            <a:off x="9134856" y="2011680"/>
             <a:ext cx="1234440" cy="320040"/>
           </a:xfrm>
           <a:prstGeom prst="rect">
@@ -12483,7 +12548,7 @@
               <a:buNone/>
             </a:pPr>
             <a:r>
-              <a:rPr lang="en-US" sz="1050" dirty="0">
+              <a:rPr lang="en-US" sz="1000" dirty="0">
                 <a:solidFill>
                   <a:srgbClr val="5F7180"/>
                 </a:solidFill>
@@ -12491,9 +12556,9 @@
                 <a:ea typeface="Calibri" pitchFamily="34" charset="-122"/>
                 <a:cs typeface="Calibri" pitchFamily="34" charset="-120"/>
               </a:rPr>
-              <a:t>merchants</a:t>
-            </a:r>
-            <a:endParaRPr lang="en-US" sz="1050" dirty="0"/>
+              <a:t>transactions</a:t>
+            </a:r>
+            <a:endParaRPr lang="en-US" sz="1000" dirty="0"/>
           </a:p>
         </p:txBody>
       </p:sp>
@@ -12505,7 +12570,7 @@
         </p:nvSpPr>
         <p:spPr>
           <a:xfrm>
-            <a:off x="10479024" y="1554480"/>
+            <a:off x="10479024" y="1463040"/>
             <a:ext cx="1234440" cy="960120"/>
           </a:xfrm>
           <a:prstGeom prst="roundRect">
@@ -12527,7 +12592,7 @@
         </p:nvSpPr>
         <p:spPr>
           <a:xfrm>
-            <a:off x="10479024" y="1609344"/>
+            <a:off x="10479024" y="1517904"/>
             <a:ext cx="1234440" cy="502920"/>
           </a:xfrm>
           <a:prstGeom prst="rect">
@@ -12544,7 +12609,7 @@
               <a:buNone/>
             </a:pPr>
             <a:r>
-              <a:rPr lang="en-US" sz="2000" b="1" dirty="0">
+              <a:rPr lang="en-US" sz="1900" b="1" dirty="0">
                 <a:solidFill>
                   <a:srgbClr val="12435E"/>
                 </a:solidFill>
@@ -12554,7 +12619,7 @@
               </a:rPr>
               <a:t>34</a:t>
             </a:r>
-            <a:endParaRPr lang="en-US" sz="2000" dirty="0"/>
+            <a:endParaRPr lang="en-US" sz="1900" dirty="0"/>
           </a:p>
         </p:txBody>
       </p:sp>
@@ -12566,7 +12631,7 @@
         </p:nvSpPr>
         <p:spPr>
           <a:xfrm>
-            <a:off x="10479024" y="2103120"/>
+            <a:off x="10479024" y="2011680"/>
             <a:ext cx="1234440" cy="320040"/>
           </a:xfrm>
           <a:prstGeom prst="rect">
@@ -12583,7 +12648,7 @@
               <a:buNone/>
             </a:pPr>
             <a:r>
-              <a:rPr lang="en-US" sz="1050" dirty="0">
+              <a:rPr lang="en-US" sz="1000" dirty="0">
                 <a:solidFill>
                   <a:srgbClr val="5F7180"/>
                 </a:solidFill>
@@ -12593,7 +12658,7 @@
               </a:rPr>
               <a:t>provinces</a:t>
             </a:r>
-            <a:endParaRPr lang="en-US" sz="1050" dirty="0"/>
+            <a:endParaRPr lang="en-US" sz="1000" dirty="0"/>
           </a:p>
         </p:txBody>
       </p:sp>
@@ -12605,12 +12670,12 @@
         </p:nvSpPr>
         <p:spPr>
           <a:xfrm>
-            <a:off x="6446520" y="2697480"/>
-            <a:ext cx="5303520" cy="3246120"/>
+            <a:off x="6446520" y="2606040"/>
+            <a:ext cx="5303520" cy="3429000"/>
           </a:xfrm>
           <a:prstGeom prst="roundRect">
             <a:avLst>
-              <a:gd name="adj" fmla="val 1690"/>
+              <a:gd name="adj" fmla="val 1600"/>
             </a:avLst>
           </a:prstGeom>
           <a:solidFill>
@@ -12632,8 +12697,8 @@
         </p:nvSpPr>
         <p:spPr>
           <a:xfrm>
-            <a:off x="6629400" y="2788920"/>
-            <a:ext cx="4983480" cy="3108960"/>
+            <a:off x="6629400" y="2697480"/>
+            <a:ext cx="4983480" cy="3291840"/>
           </a:xfrm>
           <a:prstGeom prst="rect">
             <a:avLst/>
@@ -12672,7 +12737,7 @@
               <a:buNone/>
             </a:pPr>
             <a:r>
-              <a:rPr lang="en-US" sz="1100" dirty="0">
+              <a:rPr lang="en-US" sz="1050" dirty="0">
                 <a:solidFill>
                   <a:srgbClr val="1B2A36"/>
                 </a:solidFill>
@@ -12680,7 +12745,7 @@
                 <a:ea typeface="Calibri" pitchFamily="34" charset="-122"/>
                 <a:cs typeface="Calibri" pitchFamily="34" charset="-120"/>
               </a:rPr>
-              <a:t>✓  0 missing cells · 0 duplicate transaction IDs · 0 duplicate consumer-months</a:t>
+              <a:t>✓  0 missing cells · 0 duplicate transaction IDs or consumer-months · 0 negative amounts</a:t>
             </a:r>
             <a:endParaRPr lang="en-US" sz="1300" dirty="0"/>
           </a:p>
@@ -12692,7 +12757,7 @@
               <a:buNone/>
             </a:pPr>
             <a:r>
-              <a:rPr lang="en-US" sz="1100" dirty="0">
+              <a:rPr lang="en-US" sz="1050" dirty="0">
                 <a:solidFill>
                   <a:srgbClr val="1B2A36"/>
                 </a:solidFill>
@@ -12700,7 +12765,7 @@
                 <a:ea typeface="Calibri" pitchFamily="34" charset="-122"/>
                 <a:cs typeface="Calibri" pitchFamily="34" charset="-120"/>
               </a:rPr>
-              <a:t>✓  0 negative amounts · every timestamp inside 2025</a:t>
+              <a:t>✓  Every timestamp in 2025; 1 name + birth date per consumer, 1 name per merchant (693)</a:t>
             </a:r>
             <a:endParaRPr lang="en-US" sz="1300" dirty="0"/>
           </a:p>
@@ -12712,7 +12777,7 @@
               <a:buNone/>
             </a:pPr>
             <a:r>
-              <a:rPr lang="en-US" sz="1100" dirty="0">
+              <a:rPr lang="en-US" sz="1050" dirty="0">
                 <a:solidFill>
                   <a:srgbClr val="1B2A36"/>
                 </a:solidFill>
@@ -12720,7 +12785,7 @@
                 <a:ea typeface="Calibri" pitchFamily="34" charset="-122"/>
                 <a:cs typeface="Calibri" pitchFamily="34" charset="-120"/>
               </a:rPr>
-              <a:t>✓  1 name + birth date per consumer; 1 name per merchant</a:t>
+              <a:t>✓  Transactions reconcile 100% to monthly total_spend (10,992 / 10,992 months)</a:t>
             </a:r>
             <a:endParaRPr lang="en-US" sz="1300" dirty="0"/>
           </a:p>
@@ -12732,7 +12797,7 @@
               <a:buNone/>
             </a:pPr>
             <a:r>
-              <a:rPr lang="en-US" sz="1100" dirty="0">
+              <a:rPr lang="en-US" sz="1050" dirty="0">
                 <a:solidFill>
                   <a:srgbClr val="1B2A36"/>
                 </a:solidFill>
@@ -12740,7 +12805,7 @@
                 <a:ea typeface="Calibri" pitchFamily="34" charset="-122"/>
                 <a:cs typeface="Calibri" pitchFamily="34" charset="-120"/>
               </a:rPr>
-              <a:t>✓  Transactions reconcile 100% to monthly total_spend (10,992 / 10,992)</a:t>
+              <a:t>⚠  Coverage: 908 customers have all 12 months; 91 appear in only 1–2 months (1–2 active days)</a:t>
             </a:r>
             <a:endParaRPr lang="en-US" sz="1300" dirty="0"/>
           </a:p>
@@ -12752,7 +12817,7 @@
               <a:buNone/>
             </a:pPr>
             <a:r>
-              <a:rPr lang="en-US" sz="1100" dirty="0">
+              <a:rPr lang="en-US" sz="1050" dirty="0">
                 <a:solidFill>
                   <a:srgbClr val="1B2A36"/>
                 </a:solidFill>
@@ -12760,7 +12825,7 @@
                 <a:ea typeface="Calibri" pitchFamily="34" charset="-122"/>
                 <a:cs typeface="Calibri" pitchFamily="34" charset="-120"/>
               </a:rPr>
-              <a:t>✓  10,992 of 11,988 possible consumer-months present (1–12 each)</a:t>
+              <a:t>✓  5 over-limit months (utilization 1.03–1.5, all FHS &lt; 35) kept as real behaviour</a:t>
             </a:r>
             <a:endParaRPr lang="en-US" sz="1300" dirty="0"/>
           </a:p>
@@ -12772,7 +12837,7 @@
               <a:buNone/>
             </a:pPr>
             <a:r>
-              <a:rPr lang="en-US" sz="1100" dirty="0">
+              <a:rPr lang="en-US" sz="1050" dirty="0">
                 <a:solidFill>
                   <a:srgbClr val="1B2A36"/>
                 </a:solidFill>
@@ -12780,7 +12845,7 @@
                 <a:ea typeface="Calibri" pitchFamily="34" charset="-122"/>
                 <a:cs typeface="Calibri" pitchFamily="34" charset="-120"/>
               </a:rPr>
-              <a:t>✓  5 over-limit months (utilization 1.03–1.5, all FHS &lt; 35) kept as real behaviour</a:t>
+              <a:t>✓  7 minors (aged 15–17) kept and binned, not dropped</a:t>
             </a:r>
             <a:endParaRPr lang="en-US" sz="1300" dirty="0"/>
           </a:p>
@@ -12792,7 +12857,7 @@
               <a:buNone/>
             </a:pPr>
             <a:r>
-              <a:rPr lang="en-US" sz="1100" dirty="0">
+              <a:rPr lang="en-US" sz="1050" dirty="0">
                 <a:solidFill>
                   <a:srgbClr val="1B2A36"/>
                 </a:solidFill>
@@ -12800,7 +12865,7 @@
                 <a:ea typeface="Calibri" pitchFamily="34" charset="-122"/>
                 <a:cs typeface="Calibri" pitchFamily="34" charset="-120"/>
               </a:rPr>
-              <a:t>⚠  Caveat (case §12): two source years folded onto 2025 → volumes inflated; ratios are the signal</a:t>
+              <a:t>⚠  Case §12: two source years folded onto 2025 inflate volumes; engagement skews high → ratios are the signal</a:t>
             </a:r>
             <a:endParaRPr lang="en-US" sz="1300" dirty="0"/>
           </a:p>
@@ -12925,7 +12990,7 @@
         <p:spPr>
           <a:xfrm>
             <a:off x="457200" y="384048"/>
-            <a:ext cx="4114800" cy="292608"/>
+            <a:ext cx="7315200" cy="292608"/>
           </a:xfrm>
           <a:prstGeom prst="rect">
             <a:avLst/>
@@ -12964,7 +13029,7 @@
         <p:spPr>
           <a:xfrm>
             <a:off x="457200" y="658368"/>
-            <a:ext cx="11247120" cy="868680"/>
+            <a:ext cx="11247120" cy="731520"/>
           </a:xfrm>
           <a:prstGeom prst="rect">
             <a:avLst/>
@@ -12983,7 +13048,7 @@
               <a:buNone/>
             </a:pPr>
             <a:r>
-              <a:rPr lang="en-US" sz="2700" b="1" dirty="0">
+              <a:rPr lang="en-US" sz="2500" b="1" dirty="0">
                 <a:solidFill>
                   <a:srgbClr val="12435E"/>
                 </a:solidFill>
@@ -12991,9 +13056,9 @@
                 <a:ea typeface="Cambria" pitchFamily="34" charset="-122"/>
                 <a:cs typeface="Cambria" pitchFamily="34" charset="-120"/>
               </a:rPr>
-              <a:t>December is the spending engine — and it runs on frequency</a:t>
-            </a:r>
-            <a:endParaRPr lang="en-US" sz="2700" dirty="0"/>
+              <a:t>December = 15% of annual spend, driven by trip frequency, not tickets</a:t>
+            </a:r>
+            <a:endParaRPr lang="en-US" sz="2500" dirty="0"/>
           </a:p>
         </p:txBody>
       </p:sp>
@@ -13005,8 +13070,8 @@
         </p:nvSpPr>
         <p:spPr>
           <a:xfrm>
-            <a:off x="457200" y="1554480"/>
-            <a:ext cx="5760720" cy="4572000"/>
+            <a:off x="457200" y="1463040"/>
+            <a:ext cx="5760720" cy="3520440"/>
           </a:xfrm>
           <a:prstGeom prst="rect">
             <a:avLst/>
@@ -13034,7 +13099,7 @@
                 <a:ea typeface="Calibri" pitchFamily="34" charset="-122"/>
                 <a:cs typeface="Calibri" pitchFamily="34" charset="-120"/>
               </a:rPr>
-              <a:t>Peak: December = 488.0B VND = 15.04% of the 3.24T annual spend. Trough: February = 174.4B VND = 5.37% → December is 2.8× February.</a:t>
+              <a:t>Peak: December 488.0B VND = 15.04% of the 3.24T annual spend. Trough: February 174.4B = 5.37%. Gap +313.7B VND (+9.7pp): December is 2.8× February.</a:t>
             </a:r>
             <a:endParaRPr lang="en-US" sz="1300" dirty="0"/>
           </a:p>
@@ -13055,7 +13120,7 @@
                 <a:ea typeface="Calibri" pitchFamily="34" charset="-122"/>
                 <a:cs typeface="Calibri" pitchFamily="34" charset="-120"/>
               </a:rPr>
-              <a:t>Decomposition: transaction count +187% peak vs trough, while the average ticket falls 2.6% (1.74M vs 1.79M VND).</a:t>
+              <a:t>Driver is count: transactions +187% (97,657 → 280,598) while the average ticket slips 2.6% (1.79M → 1.74M VND). Count explains the entire lift.</a:t>
             </a:r>
             <a:endParaRPr lang="en-US" sz="1300" dirty="0"/>
           </a:p>
@@ -13076,7 +13141,7 @@
                 <a:ea typeface="Calibri" pitchFamily="34" charset="-122"/>
                 <a:cs typeface="Calibri" pitchFamily="34" charset="-120"/>
               </a:rPr>
-              <a:t>The uplift is uniform — all 14 categories grow +181% to +193%; no single category drives it.</a:t>
+              <a:t>Same customers, more trips: active consumers flat (919 → 918), transactions per consumer 106 → 306. All 14 categories grow +181% to +193% in transactions.</a:t>
             </a:r>
             <a:endParaRPr lang="en-US" sz="1300" dirty="0"/>
           </a:p>
@@ -13097,7 +13162,7 @@
                 <a:ea typeface="Calibri" pitchFamily="34" charset="-122"/>
                 <a:cs typeface="Calibri" pitchFamily="34" charset="-120"/>
               </a:rPr>
-              <a:t>Behaviour: customers buy more often, not pricier (year-end / Tết preparation) → scale capacity, fraud monitoring and campaigns to volume, not basket size.</a:t>
+              <a:t>Reveals: the peak is a burst of everyday frequency, and December is the weakest-health month (avg FHS 54.2 vs 73.6 in Feb) → plan support before December.</a:t>
             </a:r>
             <a:endParaRPr lang="en-US" sz="1300" dirty="0"/>
           </a:p>
@@ -13105,7 +13170,7 @@
       </p:sp>
       <p:pic>
         <p:nvPicPr>
-          <p:cNvPr id="5" name="Image 0" descr="D:\BI10GroupYAPPERS\outputs\figures\t1_monthly_spend.png">    </p:cNvPr>
+          <p:cNvPr id="5" name="Image 0" descr="D:\BI10GroupYAPPERS\outputs\figures\v2_t1_q1_decomposition.png">    </p:cNvPr>
           <p:cNvPicPr>
             <a:picLocks noChangeAspect="1"/>
           </p:cNvPicPr>
@@ -13118,8 +13183,8 @@
         </p:blipFill>
         <p:spPr>
           <a:xfrm>
-            <a:off x="6446520" y="1554480"/>
-            <a:ext cx="5303520" cy="4023360"/>
+            <a:off x="6446520" y="1463040"/>
+            <a:ext cx="5303520" cy="4114800"/>
           </a:xfrm>
           <a:prstGeom prst="rect">
             <a:avLst/>
@@ -13159,7 +13224,7 @@
                 <a:ea typeface="Calibri" pitchFamily="34" charset="-122"/>
                 <a:cs typeface="Calibri" pitchFamily="34" charset="-120"/>
               </a:rPr>
-              <a:t>Source: consumer_transactions_2025 — 1,852,394 transactions, 2025.</a:t>
+              <a:t>Source: consumer_transactions_2025 (1,852,394 transactions, 2025).</a:t>
             </a:r>
             <a:endParaRPr lang="en-US" sz="850" dirty="0"/>
           </a:p>
@@ -13198,7 +13263,7 @@
                 <a:ea typeface="Calibri" pitchFamily="34" charset="-122"/>
                 <a:cs typeface="Calibri" pitchFamily="34" charset="-120"/>
               </a:rPr>
-              <a:t>⚠  Case note §12: two source years folded onto 2025 inflate monthly volume — treat 15% as directional.</a:t>
+              <a:t>⚠  Case §12: two source years folded onto 2025 inflate absolute VND in every month; shares and ratios (15.04%, 2.8×) are the reliable signal.</a:t>
             </a:r>
             <a:endParaRPr lang="en-US" sz="950" dirty="0"/>
           </a:p>
@@ -13206,7 +13271,107 @@
       </p:sp>
       <p:sp>
         <p:nvSpPr>
-          <p:cNvPr id="8" name="Text 5"/>
+          <p:cNvPr id="8" name="Shape 5"/>
+          <p:cNvSpPr/>
+          <p:nvPr/>
+        </p:nvSpPr>
+        <p:spPr>
+          <a:xfrm>
+            <a:off x="457200" y="5074920"/>
+            <a:ext cx="3383280" cy="1051560"/>
+          </a:xfrm>
+          <a:prstGeom prst="roundRect">
+            <a:avLst>
+              <a:gd name="adj" fmla="val 6957"/>
+            </a:avLst>
+          </a:prstGeom>
+          <a:solidFill>
+            <a:srgbClr val="12435E"/>
+          </a:solidFill>
+          <a:ln/>
+        </p:spPr>
+      </p:sp>
+      <p:sp>
+        <p:nvSpPr>
+          <p:cNvPr id="9" name="Text 6"/>
+          <p:cNvSpPr txBox="1"/>
+          <p:nvPr/>
+        </p:nvSpPr>
+        <p:spPr>
+          <a:xfrm>
+            <a:off x="457200" y="5148072"/>
+            <a:ext cx="3383280" cy="621792"/>
+          </a:xfrm>
+          <a:prstGeom prst="rect">
+            <a:avLst/>
+          </a:prstGeom>
+          <a:noFill/>
+          <a:ln/>
+        </p:spPr>
+        <p:txBody>
+          <a:bodyPr wrap="square" lIns="0" tIns="0" rIns="0" bIns="0" rtlCol="0" anchor="ctr"/>
+          <a:lstStyle/>
+          <a:p>
+            <a:pPr algn="ctr" indent="0" marL="0">
+              <a:buNone/>
+            </a:pPr>
+            <a:r>
+              <a:rPr lang="en-US" sz="2600" b="1" dirty="0">
+                <a:solidFill>
+                  <a:srgbClr val="1FC3A6"/>
+                </a:solidFill>
+                <a:latin typeface="Cambria" pitchFamily="34" charset="0"/>
+                <a:ea typeface="Cambria" pitchFamily="34" charset="-122"/>
+                <a:cs typeface="Cambria" pitchFamily="34" charset="-120"/>
+              </a:rPr>
+              <a:t>2.9×</a:t>
+            </a:r>
+            <a:endParaRPr lang="en-US" sz="2600" dirty="0"/>
+          </a:p>
+        </p:txBody>
+      </p:sp>
+      <p:sp>
+        <p:nvSpPr>
+          <p:cNvPr id="10" name="Text 7"/>
+          <p:cNvSpPr txBox="1"/>
+          <p:nvPr/>
+        </p:nvSpPr>
+        <p:spPr>
+          <a:xfrm>
+            <a:off x="457200" y="5769864"/>
+            <a:ext cx="3383280" cy="301752"/>
+          </a:xfrm>
+          <a:prstGeom prst="rect">
+            <a:avLst/>
+          </a:prstGeom>
+          <a:noFill/>
+          <a:ln/>
+        </p:spPr>
+        <p:txBody>
+          <a:bodyPr wrap="square" lIns="0" tIns="0" rIns="0" bIns="0" rtlCol="0" anchor="ctr"/>
+          <a:lstStyle/>
+          <a:p>
+            <a:pPr algn="ctr" indent="0" marL="0">
+              <a:buNone/>
+            </a:pPr>
+            <a:r>
+              <a:rPr lang="en-US" sz="1100" dirty="0">
+                <a:solidFill>
+                  <a:srgbClr val="FFFFFF"/>
+                </a:solidFill>
+                <a:latin typeface="Calibri" pitchFamily="34" charset="0"/>
+                <a:ea typeface="Calibri" pitchFamily="34" charset="-122"/>
+                <a:cs typeface="Calibri" pitchFamily="34" charset="-120"/>
+              </a:rPr>
+              <a:t>transactions per customer, Dec vs Feb</a:t>
+            </a:r>
+            <a:endParaRPr lang="en-US" sz="1100" dirty="0"/>
+          </a:p>
+        </p:txBody>
+      </p:sp>
+      <p:sp>
+        <p:nvSpPr>
+          <p:cNvPr id="11" name="Text 8"/>
           <p:cNvSpPr txBox="1"/>
           <p:nvPr/>
         </p:nvSpPr>
@@ -13245,7 +13410,7 @@
       </p:sp>
       <p:sp>
         <p:nvSpPr>
-          <p:cNvPr id="9" name="Text 6"/>
+          <p:cNvPr id="12" name="Text 9"/>
           <p:cNvSpPr txBox="1"/>
           <p:nvPr/>
         </p:nvSpPr>
@@ -13323,7 +13488,7 @@
         <p:spPr>
           <a:xfrm>
             <a:off x="457200" y="384048"/>
-            <a:ext cx="4114800" cy="292608"/>
+            <a:ext cx="7315200" cy="292608"/>
           </a:xfrm>
           <a:prstGeom prst="rect">
             <a:avLst/>
@@ -13362,7 +13527,7 @@
         <p:spPr>
           <a:xfrm>
             <a:off x="457200" y="658368"/>
-            <a:ext cx="11247120" cy="868680"/>
+            <a:ext cx="11247120" cy="731520"/>
           </a:xfrm>
           <a:prstGeom prst="rect">
             <a:avLst/>
@@ -13381,7 +13546,7 @@
               <a:buNone/>
             </a:pPr>
             <a:r>
-              <a:rPr lang="en-US" sz="2700" b="1" dirty="0">
+              <a:rPr lang="en-US" sz="2500" b="1" dirty="0">
                 <a:solidFill>
                   <a:srgbClr val="12435E"/>
                 </a:solidFill>
@@ -13389,9 +13554,9 @@
                 <a:ea typeface="Cambria" pitchFamily="34" charset="-122"/>
                 <a:cs typeface="Cambria" pitchFamily="34" charset="-120"/>
               </a:rPr>
-              <a:t>Financial stress flips the budget: essential → discretionary</a:t>
-            </a:r>
-            <a:endParaRPr lang="en-US" sz="2700" dirty="0"/>
+              <a:t>Stress flips the budget: 71.6% discretionary vs 40.5% when healthy</a:t>
+            </a:r>
+            <a:endParaRPr lang="en-US" sz="2500" dirty="0"/>
           </a:p>
         </p:txBody>
       </p:sp>
@@ -13403,8 +13568,8 @@
         </p:nvSpPr>
         <p:spPr>
           <a:xfrm>
-            <a:off x="457200" y="1417320"/>
-            <a:ext cx="11247120" cy="1600200"/>
+            <a:off x="457200" y="1371600"/>
+            <a:ext cx="11247120" cy="1691640"/>
           </a:xfrm>
           <a:prstGeom prst="rect">
             <a:avLst/>
@@ -13424,7 +13589,7 @@
               <a:buChar char="•"/>
             </a:pPr>
             <a:r>
-              <a:rPr lang="en-US" sz="1250" dirty="0">
+              <a:rPr lang="en-US" sz="1200" dirty="0">
                 <a:solidFill>
                   <a:srgbClr val="1B2A36"/>
                 </a:solidFill>
@@ -13432,9 +13597,9 @@
                 <a:ea typeface="Calibri" pitchFamily="34" charset="-122"/>
                 <a:cs typeface="Calibri" pitchFamily="34" charset="-120"/>
               </a:rPr>
-              <a:t>Stressed months (FHS &lt; 40; 95 consumer-months, 70 consumers): 28.4% essential / 71.6% discretionary. Healthy months (FHS ≥ 80; 475 months, 303 consumers): 59.5% / 40.5%.</a:t>
-            </a:r>
-            <a:endParaRPr lang="en-US" sz="1250" dirty="0"/>
+              <a:t>Stressed months (FHS &lt; 40; 95 consumer-months, 70 consumers): 28.4% essential / 71.6% discretionary. Healthy months (FHS ≥ 80; 475 months, 303 consumers): 59.5% / 40.5%. A steady gradient across FHS bands: 71.6 → 64.2 → 57.3 → 54.4 → 49.2 → 40.5%.</a:t>
+            </a:r>
+            <a:endParaRPr lang="en-US" sz="1200" dirty="0"/>
           </a:p>
           <a:p>
             <a:pPr marL="177800" indent="-177800">
@@ -13445,7 +13610,7 @@
               <a:buChar char="•"/>
             </a:pPr>
             <a:r>
-              <a:rPr lang="en-US" sz="1250" dirty="0">
+              <a:rPr lang="en-US" sz="1200" dirty="0">
                 <a:solidFill>
                   <a:srgbClr val="1B2A36"/>
                 </a:solidFill>
@@ -13453,9 +13618,9 @@
                 <a:ea typeface="Calibri" pitchFamily="34" charset="-122"/>
                 <a:cs typeface="Calibri" pitchFamily="34" charset="-120"/>
               </a:rPr>
-              <a:t>A gradient, not a threshold artefact: discretionary share 71.6% → 64.2% → 57.3% → 54.4% → 49.2% → 40.6% across FHS bands; every cutoff pair keeps the direction (FHS &lt; 35 vs ≥ 85: 73.5% vs 30.2%).</a:t>
-            </a:r>
-            <a:endParaRPr lang="en-US" sz="1250" dirty="0"/>
+              <a:t>The flip is in value, not habits: essentials are ~47% of transactions in both groups, but the discretionary ticket is 3.9M vs 1.1M VND. Purchases ≥ 10M VND are 4.3% of stressed-month transactions yet 54% of their value (healthy: 0.4% → 3%).</a:t>
+            </a:r>
+            <a:endParaRPr lang="en-US" sz="1200" dirty="0"/>
           </a:p>
           <a:p>
             <a:pPr marL="177800" indent="-177800">
@@ -13466,7 +13631,7 @@
               <a:buChar char="•"/>
             </a:pPr>
             <a:r>
-              <a:rPr lang="en-US" sz="1250" dirty="0">
+              <a:rPr lang="en-US" sz="1200" dirty="0">
                 <a:solidFill>
                   <a:srgbClr val="1B2A36"/>
                 </a:solidFill>
@@ -13474,9 +13639,9 @@
                 <a:ea typeface="Calibri" pitchFamily="34" charset="-122"/>
                 <a:cs typeface="Calibri" pitchFamily="34" charset="-120"/>
               </a:rPr>
-              <a:t>Stress re-allocates the budget toward wants, not needs → the non-punitive lever is discretionary-spend visibility, not credit restriction. This anchors Tasks 4–5.</a:t>
-            </a:r>
-            <a:endParaRPr lang="en-US" sz="1250" dirty="0"/>
+              <a:t>Travel alone adds +22pp of value share, online shopping +11pp; the mix stays inverted without travel (37% vs 60% essential). Stress = a few large discretionary purchases → pre-purchase alerts, not credit restriction.</a:t>
+            </a:r>
+            <a:endParaRPr lang="en-US" sz="1200" dirty="0"/>
           </a:p>
         </p:txBody>
       </p:sp>
@@ -13495,8 +13660,8 @@
         </p:blipFill>
         <p:spPr>
           <a:xfrm>
-            <a:off x="502920" y="3017520"/>
-            <a:ext cx="5440680" cy="3063240"/>
+            <a:off x="457200" y="3063240"/>
+            <a:ext cx="5532120" cy="3017520"/>
           </a:xfrm>
           <a:prstGeom prst="rect">
             <a:avLst/>
@@ -13505,7 +13670,7 @@
       </p:pic>
       <p:pic>
         <p:nvPicPr>
-          <p:cNvPr id="6" name="Image 1" descr="D:\BI10GroupYAPPERS\outputs\figures\t1_discretionary_gradient.png">    </p:cNvPr>
+          <p:cNvPr id="6" name="Image 1" descr="D:\BI10GroupYAPPERS\outputs\figures\v2_t1_q2_category_shift.png">    </p:cNvPr>
           <p:cNvPicPr>
             <a:picLocks noChangeAspect="1"/>
           </p:cNvPicPr>
@@ -13518,8 +13683,8 @@
         </p:blipFill>
         <p:spPr>
           <a:xfrm>
-            <a:off x="6263640" y="3017520"/>
-            <a:ext cx="5440680" cy="3063240"/>
+            <a:off x="6172200" y="3063240"/>
+            <a:ext cx="5532120" cy="3017520"/>
           </a:xfrm>
           <a:prstGeom prst="rect">
             <a:avLst/>
@@ -13534,8 +13699,8 @@
         </p:nvSpPr>
         <p:spPr>
           <a:xfrm>
-            <a:off x="502920" y="6144768"/>
-            <a:ext cx="11201400" cy="256032"/>
+            <a:off x="457200" y="6144768"/>
+            <a:ext cx="11247120" cy="256032"/>
           </a:xfrm>
           <a:prstGeom prst="rect">
             <a:avLst/>
@@ -13559,7 +13724,7 @@
                 <a:ea typeface="Calibri" pitchFamily="34" charset="-122"/>
                 <a:cs typeface="Calibri" pitchFamily="34" charset="-120"/>
               </a:rPr>
-              <a:t>Source: consumer_financial_health_engagement_2025 — 10,992 consumer-months, 999 consumers, 2025.</a:t>
+              <a:t>Source: consumer_financial_health_engagement_2025 (10,992 consumer-months, 999 consumers, 2025). Category shift: transactions joined to consumer-months on consumer_id + month.</a:t>
             </a:r>
             <a:endParaRPr lang="en-US" sz="850" dirty="0"/>
           </a:p>
@@ -13684,7 +13849,7 @@
         <p:spPr>
           <a:xfrm>
             <a:off x="457200" y="384048"/>
-            <a:ext cx="4114800" cy="292608"/>
+            <a:ext cx="7315200" cy="292608"/>
           </a:xfrm>
           <a:prstGeom prst="rect">
             <a:avLst/>
@@ -13723,7 +13888,7 @@
         <p:spPr>
           <a:xfrm>
             <a:off x="457200" y="658368"/>
-            <a:ext cx="11247120" cy="868680"/>
+            <a:ext cx="11247120" cy="731520"/>
           </a:xfrm>
           <a:prstGeom prst="rect">
             <a:avLst/>
@@ -13742,7 +13907,7 @@
               <a:buNone/>
             </a:pPr>
             <a:r>
-              <a:rPr lang="en-US" sz="2700" b="1" dirty="0">
+              <a:rPr lang="en-US" sz="2500" b="1" dirty="0">
                 <a:solidFill>
                   <a:srgbClr val="12435E"/>
                 </a:solidFill>
@@ -13750,9 +13915,9 @@
                 <a:ea typeface="Cambria" pitchFamily="34" charset="-122"/>
                 <a:cs typeface="Cambria" pitchFamily="34" charset="-120"/>
               </a:rPr>
-              <a:t>No regional digital divide: high-spend provinces mirror the nation</a:t>
-            </a:r>
-            <a:endParaRPr lang="en-US" sz="2700" dirty="0"/>
+              <a:t>High-spend hubs trail digital by ≤ 0.46pp; geography is not the lever</a:t>
+            </a:r>
+            <a:endParaRPr lang="en-US" sz="2500" dirty="0"/>
           </a:p>
         </p:txBody>
       </p:sp>
@@ -13764,8 +13929,8 @@
         </p:nvSpPr>
         <p:spPr>
           <a:xfrm>
-            <a:off x="457200" y="1554480"/>
-            <a:ext cx="5760720" cy="3429000"/>
+            <a:off x="457200" y="1463040"/>
+            <a:ext cx="5760720" cy="3520440"/>
           </a:xfrm>
           <a:prstGeom prst="rect">
             <a:avLst/>
@@ -13785,7 +13950,7 @@
               <a:buChar char="•"/>
             </a:pPr>
             <a:r>
-              <a:rPr lang="en-US" sz="1300" dirty="0">
+              <a:rPr lang="en-US" sz="1200" dirty="0">
                 <a:solidFill>
                   <a:srgbClr val="1B2A36"/>
                 </a:solidFill>
@@ -13793,9 +13958,9 @@
                 <a:ea typeface="Calibri" pitchFamily="34" charset="-122"/>
                 <a:cs typeface="Calibri" pitchFamily="34" charset="-120"/>
               </a:rPr>
-              <a:t>5 provinces with above-median spend but below-average digital share: Ha Noi, Dong Nai, Lam Dong, Hung Yen, Hai Phong.</a:t>
-            </a:r>
-            <a:endParaRPr lang="en-US" sz="1300" dirty="0"/>
+              <a:t>6 provinces combine above-median spend (&gt; 82.7B VND) with below-average digital share (non-POS; national 41.2%): Ha Noi, Dong Nai, Lam Dong, Hung Yen, Hai Phong, Nghe An.</a:t>
+            </a:r>
+            <a:endParaRPr lang="en-US" sz="1200" dirty="0"/>
           </a:p>
           <a:p>
             <a:pPr marL="177800" indent="-177800">
@@ -13806,7 +13971,7 @@
               <a:buChar char="•"/>
             </a:pPr>
             <a:r>
-              <a:rPr lang="en-US" sz="1300" dirty="0">
+              <a:rPr lang="en-US" sz="1200" dirty="0">
                 <a:solidFill>
                   <a:srgbClr val="1B2A36"/>
                 </a:solidFill>
@@ -13814,9 +13979,9 @@
                 <a:ea typeface="Calibri" pitchFamily="34" charset="-122"/>
                 <a:cs typeface="Calibri" pitchFamily="34" charset="-120"/>
               </a:rPr>
-              <a:t>Channel breakdown (share of transactions): POS 58.9–59.3% vs 58.8% nationally · QR ~19.8–20.1% · E-commerce ~8.5% · Mobile ~7.5% · Recurring ~5%.</a:t>
-            </a:r>
-            <a:endParaRPr lang="en-US" sz="1300" dirty="0"/>
+              <a:t>Breakdown: POS 58.9–59.3% vs 58.8% nationally; QR at par (19.7–20.3% vs 19.9%). All 6 trail on both E-commerce (to −0.31pp) and Mobile App (to −0.32pp).</a:t>
+            </a:r>
+            <a:endParaRPr lang="en-US" sz="1200" dirty="0"/>
           </a:p>
           <a:p>
             <a:pPr marL="177800" indent="-177800">
@@ -13827,7 +13992,7 @@
               <a:buChar char="•"/>
             </a:pPr>
             <a:r>
-              <a:rPr lang="en-US" sz="1300" dirty="0">
+              <a:rPr lang="en-US" sz="1200" dirty="0">
                 <a:solidFill>
                   <a:srgbClr val="1B2A36"/>
                 </a:solidFill>
@@ -13835,9 +14000,9 @@
                 <a:ea typeface="Calibri" pitchFamily="34" charset="-122"/>
                 <a:cs typeface="Calibri" pitchFamily="34" charset="-120"/>
               </a:rPr>
-              <a:t>Largest digital gap: −0.46pp (Dong Nai); digital share of value 40.9–41.5% vs 41.5% nationally.</a:t>
-            </a:r>
-            <a:endParaRPr lang="en-US" sz="1300" dirty="0"/>
+              <a:t>Size: largest gap −0.46pp (Dong Nai); only 3 of 6 significant (p &lt; 0.05). Leaders: HCMC 13.6% of spend at 41.3%; range Cao Bang 43.1% → Quang Ngai 39.2%.</a:t>
+            </a:r>
+            <a:endParaRPr lang="en-US" sz="1200" dirty="0"/>
           </a:p>
           <a:p>
             <a:pPr marL="177800" indent="-177800">
@@ -13848,7 +14013,7 @@
               <a:buChar char="•"/>
             </a:pPr>
             <a:r>
-              <a:rPr lang="en-US" sz="1300" dirty="0">
+              <a:rPr lang="en-US" sz="1200" dirty="0">
                 <a:solidFill>
                   <a:srgbClr val="1B2A36"/>
                 </a:solidFill>
@@ -13856,36 +14021,15 @@
                 <a:ea typeface="Calibri" pitchFamily="34" charset="-122"/>
                 <a:cs typeface="Calibri" pitchFamily="34" charset="-120"/>
               </a:rPr>
-              <a:t>Top performers: HCMC leads spend (13.6% of the national total) at 41.3% digital; highest digital share Cao Bang 43.1% (0.5% of spend), lowest Quang Ngai 39.2% — all 34 provinces sit within 3.9pp.</a:t>
-            </a:r>
-            <a:endParaRPr lang="en-US" sz="1300" dirty="0"/>
-          </a:p>
-          <a:p>
-            <a:pPr marL="177800" indent="-177800">
-              <a:spcAft>
-                <a:spcPts val="700"/>
-              </a:spcAft>
-              <a:buSzPct val="100000"/>
-              <a:buChar char="•"/>
-            </a:pPr>
-            <a:r>
-              <a:rPr lang="en-US" sz="1300" dirty="0">
-                <a:solidFill>
-                  <a:srgbClr val="1B2A36"/>
-                </a:solidFill>
-                <a:latin typeface="Calibri" pitchFamily="34" charset="0"/>
-                <a:ea typeface="Calibri" pitchFamily="34" charset="-122"/>
-                <a:cs typeface="Calibri" pitchFamily="34" charset="-120"/>
-              </a:rPr>
-              <a:t>The gap is statistically real but commercially negligible → province is not a lever for digital adoption; behaviour is.</a:t>
-            </a:r>
-            <a:endParaRPr lang="en-US" sz="1300" dirty="0"/>
+              <a:t>Customers differ 8.7pp (p10–p90 digital share 37.2–45.9%) vs 3.9pp across all 34 provinces → drive digital adoption per customer, not per region.</a:t>
+            </a:r>
+            <a:endParaRPr lang="en-US" sz="1200" dirty="0"/>
           </a:p>
         </p:txBody>
       </p:sp>
       <p:pic>
         <p:nvPicPr>
-          <p:cNvPr id="5" name="Image 0" descr="D:\BI10GroupYAPPERS\outputs\figures\t1_province_channel.png">    </p:cNvPr>
+          <p:cNvPr id="5" name="Image 0" descr="D:\BI10GroupYAPPERS\outputs\figures\v2_t1_q3_channel_gap.png">    </p:cNvPr>
           <p:cNvPicPr>
             <a:picLocks noChangeAspect="1"/>
           </p:cNvPicPr>
@@ -13898,8 +14042,8 @@
         </p:blipFill>
         <p:spPr>
           <a:xfrm>
-            <a:off x="6446520" y="1554480"/>
-            <a:ext cx="5303520" cy="4023360"/>
+            <a:off x="6446520" y="1463040"/>
+            <a:ext cx="5303520" cy="4114800"/>
           </a:xfrm>
           <a:prstGeom prst="rect">
             <a:avLst/>
@@ -13939,7 +14083,7 @@
                 <a:ea typeface="Calibri" pitchFamily="34" charset="-122"/>
                 <a:cs typeface="Calibri" pitchFamily="34" charset="-120"/>
               </a:rPr>
-              <a:t>Source: consumer_transactions_2025 — 1,852,394 transactions, 2025.</a:t>
+              <a:t>Source: consumer_transactions_2025 (1,852,394 transactions, 2025).</a:t>
             </a:r>
             <a:endParaRPr lang="en-US" sz="850" dirty="0"/>
           </a:p>
@@ -13947,7 +14091,46 @@
       </p:sp>
       <p:sp>
         <p:nvSpPr>
-          <p:cNvPr id="7" name="Shape 4"/>
+          <p:cNvPr id="7" name="Text 4"/>
+          <p:cNvSpPr txBox="1"/>
+          <p:nvPr/>
+        </p:nvSpPr>
+        <p:spPr>
+          <a:xfrm>
+            <a:off x="6446520" y="5897880"/>
+            <a:ext cx="5303520" cy="502920"/>
+          </a:xfrm>
+          <a:prstGeom prst="rect">
+            <a:avLst/>
+          </a:prstGeom>
+          <a:noFill/>
+          <a:ln/>
+        </p:spPr>
+        <p:txBody>
+          <a:bodyPr wrap="square" lIns="0" tIns="0" rIns="0" bIns="0" rtlCol="0" anchor="t"/>
+          <a:lstStyle/>
+          <a:p>
+            <a:pPr indent="0" marL="0">
+              <a:buNone/>
+            </a:pPr>
+            <a:r>
+              <a:rPr lang="en-US" sz="950" i="1" dirty="0">
+                <a:solidFill>
+                  <a:srgbClr val="5F7180"/>
+                </a:solidFill>
+                <a:latin typeface="Calibri" pitchFamily="34" charset="0"/>
+                <a:ea typeface="Calibri" pitchFamily="34" charset="-122"/>
+                <a:cs typeface="Calibri" pitchFamily="34" charset="-120"/>
+              </a:rPr>
+              <a:t>⚠  Digital = non-POS incl. QR. On online_transaction_flag (excl. QR, national 21.3%) Lam Dong drops out; other gaps stay ≤ 0.6pp.</a:t>
+            </a:r>
+            <a:endParaRPr lang="en-US" sz="950" dirty="0"/>
+          </a:p>
+        </p:txBody>
+      </p:sp>
+      <p:sp>
+        <p:nvSpPr>
+          <p:cNvPr id="8" name="Shape 5"/>
           <p:cNvSpPr/>
           <p:nvPr/>
         </p:nvSpPr>
@@ -13969,7 +14152,7 @@
       </p:sp>
       <p:sp>
         <p:nvSpPr>
-          <p:cNvPr id="8" name="Text 5"/>
+          <p:cNvPr id="9" name="Text 6"/>
           <p:cNvSpPr txBox="1"/>
           <p:nvPr/>
         </p:nvSpPr>
@@ -14000,7 +14183,7 @@
                 <a:ea typeface="Cambria" pitchFamily="34" charset="-122"/>
                 <a:cs typeface="Cambria" pitchFamily="34" charset="-120"/>
               </a:rPr>
-              <a:t>≤ 0.46pp</a:t>
+              <a:t>−0.46pp</a:t>
             </a:r>
             <a:endParaRPr lang="en-US" sz="2600" dirty="0"/>
           </a:p>
@@ -14008,7 +14191,7 @@
       </p:sp>
       <p:sp>
         <p:nvSpPr>
-          <p:cNvPr id="9" name="Text 6"/>
+          <p:cNvPr id="10" name="Text 7"/>
           <p:cNvSpPr txBox="1"/>
           <p:nvPr/>
         </p:nvSpPr>
@@ -14039,7 +14222,7 @@
                 <a:ea typeface="Calibri" pitchFamily="34" charset="-122"/>
                 <a:cs typeface="Calibri" pitchFamily="34" charset="-120"/>
               </a:rPr>
-              <a:t>largest digital-share gap vs national</a:t>
+              <a:t>largest digital gap among high-spend hubs</a:t>
             </a:r>
             <a:endParaRPr lang="en-US" sz="1100" dirty="0"/>
           </a:p>
@@ -14047,7 +14230,7 @@
       </p:sp>
       <p:sp>
         <p:nvSpPr>
-          <p:cNvPr id="10" name="Text 7"/>
+          <p:cNvPr id="11" name="Text 8"/>
           <p:cNvSpPr txBox="1"/>
           <p:nvPr/>
         </p:nvSpPr>
@@ -14086,7 +14269,7 @@
       </p:sp>
       <p:sp>
         <p:nvSpPr>
-          <p:cNvPr id="11" name="Text 8"/>
+          <p:cNvPr id="12" name="Text 9"/>
           <p:cNvSpPr txBox="1"/>
           <p:nvPr/>
         </p:nvSpPr>
@@ -14164,7 +14347,7 @@
         <p:spPr>
           <a:xfrm>
             <a:off x="457200" y="384048"/>
-            <a:ext cx="4114800" cy="292608"/>
+            <a:ext cx="7315200" cy="292608"/>
           </a:xfrm>
           <a:prstGeom prst="rect">
             <a:avLst/>
@@ -14203,7 +14386,7 @@
         <p:spPr>
           <a:xfrm>
             <a:off x="457200" y="658368"/>
-            <a:ext cx="11247120" cy="868680"/>
+            <a:ext cx="11247120" cy="731520"/>
           </a:xfrm>
           <a:prstGeom prst="rect">
             <a:avLst/>
@@ -14222,7 +14405,7 @@
               <a:buNone/>
             </a:pPr>
             <a:r>
-              <a:rPr lang="en-US" sz="2700" b="1" dirty="0">
+              <a:rPr lang="en-US" sz="2500" b="1" dirty="0">
                 <a:solidFill>
                   <a:srgbClr val="12435E"/>
                 </a:solidFill>
@@ -14230,9 +14413,9 @@
                 <a:ea typeface="Cambria" pitchFamily="34" charset="-122"/>
                 <a:cs typeface="Cambria" pitchFamily="34" charset="-120"/>
               </a:rPr>
-              <a:t>Categories: habit vs basket. Age: active 25–34 is weakest — barely</a:t>
-            </a:r>
-            <a:endParaRPr lang="en-US" sz="2700" dirty="0"/>
+              <a:t>Fuel is the habit, groceries the wallet; 25–34 is weakest, barely</a:t>
+            </a:r>
+            <a:endParaRPr lang="en-US" sz="2500" dirty="0"/>
           </a:p>
         </p:txBody>
       </p:sp>
@@ -14244,8 +14427,8 @@
         </p:nvSpPr>
         <p:spPr>
           <a:xfrm>
-            <a:off x="457200" y="1417320"/>
-            <a:ext cx="11247120" cy="1600200"/>
+            <a:off x="457200" y="1371600"/>
+            <a:ext cx="11247120" cy="1691640"/>
           </a:xfrm>
           <a:prstGeom prst="rect">
             <a:avLst/>
@@ -14265,7 +14448,7 @@
               <a:buChar char="•"/>
             </a:pPr>
             <a:r>
-              <a:rPr lang="en-US" sz="1250" dirty="0">
+              <a:rPr lang="en-US" sz="1200" dirty="0">
                 <a:solidFill>
                   <a:srgbClr val="1B2A36"/>
                 </a:solidFill>
@@ -14273,9 +14456,9 @@
                 <a:ea typeface="Calibri" pitchFamily="34" charset="-122"/>
                 <a:cs typeface="Calibri" pitchFamily="34" charset="-120"/>
               </a:rPr>
-              <a:t>Q4 — top by COUNT: Fuel &amp; Transport, 188,029 transactions, avg ticket 1.59M VND (bought by 96.8% of consumers, 17.3 times per buyer-month). Top by SPEND: in-store Groceries, 513.8B VND, avg ticket 2.92M VND (1.8×) — frequent top-ups vs stock-up baskets.</a:t>
-            </a:r>
-            <a:endParaRPr lang="en-US" sz="1250" dirty="0"/>
+              <a:t>Q4 — Top by count: Fuel &amp; Transport, 188,029 transactions (10.2%), avg ticket 1.59M VND, 17.3 buys per buyer-month. Top by spend: in-store Groceries, 513.8B VND (15.8% of value), avg ticket 2.92M (1.8× fuel). Fuel = frequent top-ups; groceries = stock-up baskets.</a:t>
+            </a:r>
+            <a:endParaRPr lang="en-US" sz="1200" dirty="0"/>
           </a:p>
           <a:p>
             <a:pPr marL="177800" indent="-177800">
@@ -14286,7 +14469,7 @@
               <a:buChar char="•"/>
             </a:pPr>
             <a:r>
-              <a:rPr lang="en-US" sz="1250" dirty="0">
+              <a:rPr lang="en-US" sz="1200" dirty="0">
                 <a:solidFill>
                   <a:srgbClr val="1B2A36"/>
                 </a:solidFill>
@@ -14294,9 +14477,9 @@
                 <a:ea typeface="Calibri" pitchFamily="34" charset="-122"/>
                 <a:cs typeface="Calibri" pitchFamily="34" charset="-120"/>
               </a:rPr>
-              <a:t>Q5 — 25–34 is active (178.7 transactions/month, above the cohort median 177.8) with the lowest FHS 65.8 (best 67.0). Drivers: highest spend-to-income 0.716 (national 0.700) with a below-average essential ratio 0.468 (national 0.481) → overspend on wants.</a:t>
-            </a:r>
-            <a:endParaRPr lang="en-US" sz="1250" dirty="0"/>
+              <a:t>Q5 — 25–34 has the lowest mean FHS (65.8 vs best 67.0) while staying active (178.7 transactions/month vs cohort median 177.8). It is the only cohort above national spend-to-income (0.716 vs 0.700) AND below the national essential ratio (0.468 vs 0.481).</a:t>
+            </a:r>
+            <a:endParaRPr lang="en-US" sz="1200" dirty="0"/>
           </a:p>
           <a:p>
             <a:pPr marL="177800" indent="-177800">
@@ -14307,7 +14490,7 @@
               <a:buChar char="•"/>
             </a:pPr>
             <a:r>
-              <a:rPr lang="en-US" sz="1250" dirty="0">
+              <a:rPr lang="en-US" sz="1200" dirty="0">
                 <a:solidFill>
                   <a:srgbClr val="1B2A36"/>
                 </a:solidFill>
@@ -14315,15 +14498,15 @@
                 <a:ea typeface="Calibri" pitchFamily="34" charset="-122"/>
                 <a:cs typeface="Calibri" pitchFamily="34" charset="-120"/>
               </a:rPr>
-              <a:t>But bootstrap 95% CIs of all six cohorts overlap (65.8–67.0): age is a weak differentiator — target the ratios, not birth year.</a:t>
-            </a:r>
-            <a:endParaRPr lang="en-US" sz="1250" dirty="0"/>
+              <a:t>Honest limit: the cohort spread is 1.2 pts, 95% CIs overlap and ANOVA p = 0.13; counting each consumer once, 15–24 ties (65.75 vs 65.79). Age is a weak lever: target spend-to-income, not birth year.</a:t>
+            </a:r>
+            <a:endParaRPr lang="en-US" sz="1200" dirty="0"/>
           </a:p>
         </p:txBody>
       </p:sp>
       <p:pic>
         <p:nvPicPr>
-          <p:cNvPr id="5" name="Image 0" descr="D:\BI10GroupYAPPERS\outputs\figures\t1_category_ticket.png">    </p:cNvPr>
+          <p:cNvPr id="5" name="Image 0" descr="D:\BI10GroupYAPPERS\outputs\figures\v2_t1_q4_category.png">    </p:cNvPr>
           <p:cNvPicPr>
             <a:picLocks noChangeAspect="1"/>
           </p:cNvPicPr>
@@ -14336,8 +14519,8 @@
         </p:blipFill>
         <p:spPr>
           <a:xfrm>
-            <a:off x="502920" y="3017520"/>
-            <a:ext cx="5440680" cy="3063240"/>
+            <a:off x="457200" y="3063240"/>
+            <a:ext cx="5532120" cy="3017520"/>
           </a:xfrm>
           <a:prstGeom prst="rect">
             <a:avLst/>
@@ -14346,7 +14529,7 @@
       </p:pic>
       <p:pic>
         <p:nvPicPr>
-          <p:cNvPr id="6" name="Image 1" descr="D:\BI10GroupYAPPERS\outputs\figures\t1_age_cohort.png">    </p:cNvPr>
+          <p:cNvPr id="6" name="Image 1" descr="D:\BI10GroupYAPPERS\outputs\figures\v2_t1_q5_age.png">    </p:cNvPr>
           <p:cNvPicPr>
             <a:picLocks noChangeAspect="1"/>
           </p:cNvPicPr>
@@ -14359,8 +14542,8 @@
         </p:blipFill>
         <p:spPr>
           <a:xfrm>
-            <a:off x="6263640" y="3017520"/>
-            <a:ext cx="5440680" cy="3063240"/>
+            <a:off x="6172200" y="3063240"/>
+            <a:ext cx="5532120" cy="3017520"/>
           </a:xfrm>
           <a:prstGeom prst="rect">
             <a:avLst/>
@@ -14375,8 +14558,8 @@
         </p:nvSpPr>
         <p:spPr>
           <a:xfrm>
-            <a:off x="502920" y="6144768"/>
-            <a:ext cx="11201400" cy="256032"/>
+            <a:off x="457200" y="6144768"/>
+            <a:ext cx="11247120" cy="256032"/>
           </a:xfrm>
           <a:prstGeom prst="rect">
             <a:avLst/>
@@ -14400,7 +14583,7 @@
                 <a:ea typeface="Calibri" pitchFamily="34" charset="-122"/>
                 <a:cs typeface="Calibri" pitchFamily="34" charset="-120"/>
               </a:rPr>
-              <a:t>Source: consumer_transactions_2025 — 1,852,394 transactions, 2025. Age cohorts: consumer-month file.</a:t>
+              <a:t>Source: consumer_transactions_2025 (1,852,394 transactions, 2025). Age cohorts: consumer-month file; 95% CIs from consumer-level bootstrap.</a:t>
             </a:r>
             <a:endParaRPr lang="en-US" sz="850" dirty="0"/>
           </a:p>
@@ -14525,7 +14708,7 @@
         <p:spPr>
           <a:xfrm>
             <a:off x="457200" y="384048"/>
-            <a:ext cx="4114800" cy="292608"/>
+            <a:ext cx="7315200" cy="292608"/>
           </a:xfrm>
           <a:prstGeom prst="rect">
             <a:avLst/>
@@ -14564,7 +14747,7 @@
         <p:spPr>
           <a:xfrm>
             <a:off x="457200" y="658368"/>
-            <a:ext cx="11247120" cy="868680"/>
+            <a:ext cx="11247120" cy="731520"/>
           </a:xfrm>
           <a:prstGeom prst="rect">
             <a:avLst/>
@@ -14583,7 +14766,7 @@
               <a:buNone/>
             </a:pPr>
             <a:r>
-              <a:rPr lang="en-US" sz="2700" b="1" dirty="0">
+              <a:rPr lang="en-US" sz="2500" b="1" dirty="0">
                 <a:solidFill>
                   <a:srgbClr val="12435E"/>
                 </a:solidFill>
@@ -14591,9 +14774,9 @@
                 <a:ea typeface="Cambria" pitchFamily="34" charset="-122"/>
                 <a:cs typeface="Cambria" pitchFamily="34" charset="-120"/>
               </a:rPr>
-              <a:t>Health is a tight band; distress is episodic, never chronic</a:t>
-            </a:r>
-            <a:endParaRPr lang="en-US" sz="2700" dirty="0"/>
+              <a:t>Nobody is stressed on average, yet 87% dip below 60 at some point</a:t>
+            </a:r>
+            <a:endParaRPr lang="en-US" sz="2500" dirty="0"/>
           </a:p>
         </p:txBody>
       </p:sp>
@@ -14605,8 +14788,8 @@
         </p:nvSpPr>
         <p:spPr>
           <a:xfrm>
-            <a:off x="457200" y="1554480"/>
-            <a:ext cx="5760720" cy="4572000"/>
+            <a:off x="457200" y="1463040"/>
+            <a:ext cx="5760720" cy="3520440"/>
           </a:xfrm>
           <a:prstGeom prst="rect">
             <a:avLst/>
@@ -14626,7 +14809,7 @@
               <a:buChar char="•"/>
             </a:pPr>
             <a:r>
-              <a:rPr lang="en-US" sz="1300" dirty="0">
+              <a:rPr lang="en-US" sz="1250" dirty="0">
                 <a:solidFill>
                   <a:srgbClr val="1B2A36"/>
                 </a:solidFill>
@@ -14634,9 +14817,9 @@
                 <a:ea typeface="Calibri" pitchFamily="34" charset="-122"/>
                 <a:cs typeface="Calibri" pitchFamily="34" charset="-120"/>
               </a:rPr>
-              <a:t>Consumer level (n = 999): mean 66.3, median 66.2, std 4.7, IQR 63.4–69.3, range 42.3–80.8, skew −0.32 (mild low tail).</a:t>
-            </a:r>
-            <a:endParaRPr lang="en-US" sz="1300" dirty="0"/>
+              <a:t>Consumer level (average of each consumer's months, n = 999): mean 66.3, median 66.2, std 4.7, IQR 63.4–69.3, range 42.3–80.8 — a tight band.</a:t>
+            </a:r>
+            <a:endParaRPr lang="en-US" sz="1250" dirty="0"/>
           </a:p>
           <a:p>
             <a:pPr marL="177800" indent="-177800">
@@ -14647,7 +14830,7 @@
               <a:buChar char="•"/>
             </a:pPr>
             <a:r>
-              <a:rPr lang="en-US" sz="1300" dirty="0">
+              <a:rPr lang="en-US" sz="1250" dirty="0">
                 <a:solidFill>
                   <a:srgbClr val="1B2A36"/>
                 </a:solidFill>
@@ -14655,9 +14838,9 @@
                 <a:ea typeface="Calibri" pitchFamily="34" charset="-122"/>
                 <a:cs typeface="Calibri" pitchFamily="34" charset="-120"/>
               </a:rPr>
-              <a:t>Month level (n = 10,992): std 9.5 — twice the consumer spread. Segments: Stable 72.5% · Watch 22.4% · Healthy 4.3% · Stressed 0.9%.</a:t>
-            </a:r>
-            <a:endParaRPr lang="en-US" sz="1300" dirty="0"/>
+              <a:t>Month level (n = 10,992): std 9.5, 2× wider. Stable 72.5% · Watch 22.4% · Healthy (≥ 80) 4.3% · Stressed (&lt; 40) 0.9% = 95 months across 70 consumers.</a:t>
+            </a:r>
+            <a:endParaRPr lang="en-US" sz="1250" dirty="0"/>
           </a:p>
           <a:p>
             <a:pPr marL="177800" indent="-177800">
@@ -14668,7 +14851,7 @@
               <a:buChar char="•"/>
             </a:pPr>
             <a:r>
-              <a:rPr lang="en-US" sz="1300" dirty="0">
+              <a:rPr lang="en-US" sz="1250" dirty="0">
                 <a:solidFill>
                   <a:srgbClr val="1B2A36"/>
                 </a:solidFill>
@@ -14676,9 +14859,9 @@
                 <a:ea typeface="Calibri" pitchFamily="34" charset="-122"/>
                 <a:cs typeface="Calibri" pitchFamily="34" charset="-120"/>
               </a:rPr>
-              <a:t>0 of 999 consumers have a 12-month mean below 40 — stress is episodic: healthy people dip in specific months (Feb 73.6 → Dec 54.2).</a:t>
-            </a:r>
-            <a:endParaRPr lang="en-US" sz="1300" dirty="0"/>
+              <a:t>0 of 999 average below 40, but 869 (87%) fall below 60 in at least one month; who the customer is explains only 22% of monthly variance, the calendar month 25%.</a:t>
+            </a:r>
+            <a:endParaRPr lang="en-US" sz="1250" dirty="0"/>
           </a:p>
           <a:p>
             <a:pPr marL="177800" indent="-177800">
@@ -14689,7 +14872,7 @@
               <a:buChar char="•"/>
             </a:pPr>
             <a:r>
-              <a:rPr lang="en-US" sz="1300" dirty="0">
+              <a:rPr lang="en-US" sz="1250" dirty="0">
                 <a:solidFill>
                   <a:srgbClr val="1B2A36"/>
                 </a:solidFill>
@@ -14697,15 +14880,15 @@
                 <a:ea typeface="Calibri" pitchFamily="34" charset="-122"/>
                 <a:cs typeface="Calibri" pitchFamily="34" charset="-120"/>
               </a:rPr>
-              <a:t>Implication: trigger help on the current month, not on a static risk list.</a:t>
-            </a:r>
-            <a:endParaRPr lang="en-US" sz="1300" dirty="0"/>
+              <a:t>Stress peaks at year-ends: January + December hold 46 of 95 stressed months (mean FHS Feb 73.6 → Dec 54.2) → trigger support on the month, not a static list.</a:t>
+            </a:r>
+            <a:endParaRPr lang="en-US" sz="1250" dirty="0"/>
           </a:p>
         </p:txBody>
       </p:sp>
       <p:pic>
         <p:nvPicPr>
-          <p:cNvPr id="5" name="Image 0" descr="D:\BI10GroupYAPPERS\outputs\figures\t2_fhs_distribution.png">    </p:cNvPr>
+          <p:cNvPr id="5" name="Image 0" descr="D:\BI10GroupYAPPERS\outputs\figures\v2_t2_distribution.png">    </p:cNvPr>
           <p:cNvPicPr>
             <a:picLocks noChangeAspect="1"/>
           </p:cNvPicPr>
@@ -14718,8 +14901,8 @@
         </p:blipFill>
         <p:spPr>
           <a:xfrm>
-            <a:off x="6446520" y="1554480"/>
-            <a:ext cx="5303520" cy="4023360"/>
+            <a:off x="6446520" y="1463040"/>
+            <a:ext cx="5303520" cy="4114800"/>
           </a:xfrm>
           <a:prstGeom prst="rect">
             <a:avLst/>
@@ -14759,7 +14942,7 @@
                 <a:ea typeface="Calibri" pitchFamily="34" charset="-122"/>
                 <a:cs typeface="Calibri" pitchFamily="34" charset="-120"/>
               </a:rPr>
-              <a:t>Source: consumer_financial_health_engagement_2025 — 10,992 consumer-months, 999 consumers, 2025.</a:t>
+              <a:t>Source: consumer_financial_health_engagement_2025 (10,992 consumer-months, 999 consumers, 2025). Consumer level = mean of available months (908 consumers have 12, 91 have 1–2).</a:t>
             </a:r>
             <a:endParaRPr lang="en-US" sz="850" dirty="0"/>
           </a:p>
@@ -14767,7 +14950,107 @@
       </p:sp>
       <p:sp>
         <p:nvSpPr>
-          <p:cNvPr id="7" name="Text 4"/>
+          <p:cNvPr id="7" name="Shape 4"/>
+          <p:cNvSpPr/>
+          <p:nvPr/>
+        </p:nvSpPr>
+        <p:spPr>
+          <a:xfrm>
+            <a:off x="457200" y="5074920"/>
+            <a:ext cx="3383280" cy="1051560"/>
+          </a:xfrm>
+          <a:prstGeom prst="roundRect">
+            <a:avLst>
+              <a:gd name="adj" fmla="val 6957"/>
+            </a:avLst>
+          </a:prstGeom>
+          <a:solidFill>
+            <a:srgbClr val="12435E"/>
+          </a:solidFill>
+          <a:ln/>
+        </p:spPr>
+      </p:sp>
+      <p:sp>
+        <p:nvSpPr>
+          <p:cNvPr id="8" name="Text 5"/>
+          <p:cNvSpPr txBox="1"/>
+          <p:nvPr/>
+        </p:nvSpPr>
+        <p:spPr>
+          <a:xfrm>
+            <a:off x="457200" y="5148072"/>
+            <a:ext cx="3383280" cy="621792"/>
+          </a:xfrm>
+          <a:prstGeom prst="rect">
+            <a:avLst/>
+          </a:prstGeom>
+          <a:noFill/>
+          <a:ln/>
+        </p:spPr>
+        <p:txBody>
+          <a:bodyPr wrap="square" lIns="0" tIns="0" rIns="0" bIns="0" rtlCol="0" anchor="ctr"/>
+          <a:lstStyle/>
+          <a:p>
+            <a:pPr algn="ctr" indent="0" marL="0">
+              <a:buNone/>
+            </a:pPr>
+            <a:r>
+              <a:rPr lang="en-US" sz="2600" b="1" dirty="0">
+                <a:solidFill>
+                  <a:srgbClr val="1FC3A6"/>
+                </a:solidFill>
+                <a:latin typeface="Cambria" pitchFamily="34" charset="0"/>
+                <a:ea typeface="Cambria" pitchFamily="34" charset="-122"/>
+                <a:cs typeface="Cambria" pitchFamily="34" charset="-120"/>
+              </a:rPr>
+              <a:t>87%</a:t>
+            </a:r>
+            <a:endParaRPr lang="en-US" sz="2600" dirty="0"/>
+          </a:p>
+        </p:txBody>
+      </p:sp>
+      <p:sp>
+        <p:nvSpPr>
+          <p:cNvPr id="9" name="Text 6"/>
+          <p:cNvSpPr txBox="1"/>
+          <p:nvPr/>
+        </p:nvSpPr>
+        <p:spPr>
+          <a:xfrm>
+            <a:off x="457200" y="5769864"/>
+            <a:ext cx="3383280" cy="301752"/>
+          </a:xfrm>
+          <a:prstGeom prst="rect">
+            <a:avLst/>
+          </a:prstGeom>
+          <a:noFill/>
+          <a:ln/>
+        </p:spPr>
+        <p:txBody>
+          <a:bodyPr wrap="square" lIns="0" tIns="0" rIns="0" bIns="0" rtlCol="0" anchor="ctr"/>
+          <a:lstStyle/>
+          <a:p>
+            <a:pPr algn="ctr" indent="0" marL="0">
+              <a:buNone/>
+            </a:pPr>
+            <a:r>
+              <a:rPr lang="en-US" sz="1100" dirty="0">
+                <a:solidFill>
+                  <a:srgbClr val="FFFFFF"/>
+                </a:solidFill>
+                <a:latin typeface="Calibri" pitchFamily="34" charset="0"/>
+                <a:ea typeface="Calibri" pitchFamily="34" charset="-122"/>
+                <a:cs typeface="Calibri" pitchFamily="34" charset="-120"/>
+              </a:rPr>
+              <a:t>dip below 60 at least once</a:t>
+            </a:r>
+            <a:endParaRPr lang="en-US" sz="1100" dirty="0"/>
+          </a:p>
+        </p:txBody>
+      </p:sp>
+      <p:sp>
+        <p:nvSpPr>
+          <p:cNvPr id="10" name="Text 7"/>
           <p:cNvSpPr txBox="1"/>
           <p:nvPr/>
         </p:nvSpPr>
@@ -14806,7 +15089,7 @@
       </p:sp>
       <p:sp>
         <p:nvSpPr>
-          <p:cNvPr id="8" name="Text 5"/>
+          <p:cNvPr id="11" name="Text 8"/>
           <p:cNvSpPr txBox="1"/>
           <p:nvPr/>
         </p:nvSpPr>

--- a/draft/YAPPERS_BI10_R01.pptx
+++ b/draft/YAPPERS_BI10_R01.pptx
@@ -3093,7 +3093,7 @@
                 <a:ea typeface="Calibri" pitchFamily="34" charset="-122"/>
                 <a:cs typeface="Calibri" pitchFamily="34" charset="-120"/>
               </a:rPr>
-              <a:t>What they buy (transactions): stressed months are 72% discretionary by value vs 40% in healthy months, with 2× the e-commerce + app share (23% vs 12%). They are also MORE engaged (81.1 vs 72.7). Shared inputs → directional, not causal.</a:t>
+              <a:t>What they buy (transactions): stressed months are 71.6% discretionary by value vs 40.5% in healthy months, with 2× the e-commerce + app share (23% vs 12%). They are also MORE engaged (81.1 vs 72.7). Shared inputs → directional, not causal.</a:t>
             </a:r>
             <a:endParaRPr lang="en-US" sz="1200" dirty="0"/>
           </a:p>

--- a/draft/YAPPERS_BI10_R01.pptx
+++ b/draft/YAPPERS_BI10_R01.pptx
@@ -1315,7 +1315,7 @@
           <a:p>
             <a:r>
               <a:rPr lang="en-US" dirty="0"/>
-              <a:t>Stability: 20 seeds ARI 0.988; 80% bootstrap × 50 ARI 0.911; dropping December 0.873. GMM agrees 0.26 (Occasional identical). 2×2 median cross-check agrees on health (344/351, 273/302). Segments correlate with age/gender (Cramér's V 0.23 age / 0.13 gender) → act on behaviour only. Future work: hybrid model (rule for part-year + k = 3), trajectory features, chronological early-warning on next_month_low_health_flag (support only).</a:t>
+              <a:t>Stability: 20 seeds ARI 0.988; 80% bootstrap × 50 ARI 0.911; dropping December 0.873. GMM agrees 0.26 (Occasional identical). 2×2 median cross-check agrees on health (344/351, 273/302). Future work detail: hybrid model (rule for part-year customers + k = 3 on the full-year base), trajectory features (slope, December dip), chronological early-warning on next_month_low_health_flag trained Jan–Aug, validated Sep–Oct, tested Nov (support only).</a:t>
             </a:r>
             <a:endParaRPr lang="en-US" dirty="0"/>
           </a:p>
@@ -1491,7 +1491,7 @@
           <a:p>
             <a:r>
               <a:rPr lang="en-US" dirty="0"/>
-              <a:t>One row per task: signal, driver, engagement, segments, plan. The 82% (T2) is the variance explained by spend-to-income and utilization; the 28–32% is a what-if tested with holdouts (slide 21).</a:t>
+              <a:t>One row per task: signal, driver, engagement, segments, plan. The 52% (T2) is the share of the 95 stress months held by the 43 crossover customers; spend-to-income and utilization explain 82% of FHS; the 28–32% is a simulated what-if, to be tested against holdouts (slide 21).</a:t>
             </a:r>
             <a:endParaRPr lang="en-US" dirty="0"/>
           </a:p>
@@ -5744,7 +5744,7 @@
                 <a:ea typeface="Arial" pitchFamily="34" charset="-122"/>
                 <a:cs typeface="Arial" pitchFamily="34" charset="-120"/>
               </a:rPr>
-              <a:t>active days vs engagement — ahead of transaction count (+0.76) and recency (−0.58)</a:t>
+              <a:t>active days (range 1–31, median 30) — ahead of count (+0.76) and recency (−0.58; range 0 to 30 days)</a:t>
             </a:r>
             <a:endParaRPr lang="en-US" sz="1050" dirty="0"/>
           </a:p>
@@ -6210,7 +6210,7 @@
                 <a:ea typeface="Arial" pitchFamily="34" charset="-122"/>
                 <a:cs typeface="Arial" pitchFamily="34" charset="-120"/>
               </a:rPr>
-              <a:t>The cutoff sits in an empty gap: 25 at any engagement cutoff from 60 to 70</a:t>
+              <a:t>Cutoff 70 sits in an empty gap: 25 at any cutoff 60–70; looser (72.5 / 75) pulls in active users (39 / 63); stricter FHS ≥ 75 leaves 9</a:t>
             </a:r>
             <a:endParaRPr lang="en-US" sz="1200" dirty="0"/>
           </a:p>
@@ -6440,7 +6440,7 @@
                 <a:ea typeface="Arial" pitchFamily="34" charset="-122"/>
                 <a:cs typeface="Arial" pitchFamily="34" charset="-120"/>
               </a:rPr>
-              <a:t>Clustering 8 behavioural ratios yields four segments along three business axes</a:t>
+              <a:t>Clustering 8 behavioural features yields four segments along three business axes</a:t>
             </a:r>
             <a:endParaRPr lang="en-US" sz="2400" dirty="0"/>
           </a:p>
@@ -6568,7 +6568,7 @@
                 <a:ea typeface="Arial" pitchFamily="34" charset="-122"/>
                 <a:cs typeface="Arial" pitchFamily="34" charset="-120"/>
               </a:rPr>
-              <a:t>k-means on 8 scaled ratios, 999 customers</a:t>
+              <a:t>k-means on 8 z-scaled behavioural features, 999 customers</a:t>
             </a:r>
             <a:endParaRPr lang="en-US" sz="1100" dirty="0"/>
           </a:p>
@@ -6611,7 +6611,7 @@
                 <a:ea typeface="Arial" pitchFamily="34" charset="-122"/>
                 <a:cs typeface="Arial" pitchFamily="34" charset="-120"/>
               </a:rPr>
-              <a:t>Inputs: health, activity and spending-mix ratios; no raw VND, no demographics</a:t>
+              <a:t>Inputs: 4 ratios (spend/income, utilization, discretionary, online), spending volatility, FHS, engagement score, transactions/month; no raw VND, no demographics</a:t>
             </a:r>
             <a:endParaRPr lang="en-US" sz="1200" dirty="0"/>
           </a:p>
@@ -6653,7 +6653,7 @@
                 <a:ea typeface="Arial" pitchFamily="34" charset="-122"/>
                 <a:cs typeface="Arial" pitchFamily="34" charset="-120"/>
               </a:rPr>
-              <a:t>Coverage 999 / 999 incl. 7 minors; dataset + dictionary in the ZIP</a:t>
+              <a:t>Coverage 999 / 999 incl. 7 minors; preprocessed dataset task4_features.csv + dictionary in the ZIP</a:t>
             </a:r>
             <a:endParaRPr lang="en-US" sz="1200" dirty="0"/>
           </a:p>
@@ -6692,7 +6692,7 @@
                 <a:ea typeface="Arial" pitchFamily="34" charset="-122"/>
                 <a:cs typeface="Arial" pitchFamily="34" charset="-120"/>
               </a:rPr>
-              <a:t>Source: team k-means (k = 4) on 8 scaled ratios, 999 customers. Charts: notebooks/full_pipeline.ipynb.</a:t>
+              <a:t>Source: team k-means (k = 4) on 8 z-scaled behavioural features, 999 customers. Charts: notebooks/full_pipeline.ipynb.</a:t>
             </a:r>
             <a:endParaRPr lang="en-US" sz="850" dirty="0"/>
           </a:p>
@@ -7479,7 +7479,7 @@
                 <a:ea typeface="Arial" pitchFamily="34" charset="-122"/>
                 <a:cs typeface="Arial" pitchFamily="34" charset="-120"/>
               </a:rPr>
-              <a:t>Source: team k-means (k = 4) on 8 scaled ratios, 999 customers. Charts: notebooks/full_pipeline.ipynb.</a:t>
+              <a:t>Source: team k-means (k = 4) on 8 z-scaled behavioural features, 999 customers. Charts: notebooks/full_pipeline.ipynb.</a:t>
             </a:r>
             <a:endParaRPr lang="en-US" sz="850" dirty="0"/>
           </a:p>
@@ -7589,7 +7589,7 @@
                 <a:ea typeface="Arial" pitchFamily="34" charset="-122"/>
                 <a:cs typeface="Arial" pitchFamily="34" charset="-120"/>
               </a:rPr>
-              <a:t>TASK 4 · SEGMENTATION · VALIDATION</a:t>
+              <a:t>TASK 4 · VALIDATION, LIMITS &amp; FUTURE WORK</a:t>
             </a:r>
             <a:endParaRPr lang="en-US" sz="1100" dirty="0"/>
           </a:p>
@@ -7709,7 +7709,7 @@
               <a:buNone/>
             </a:pPr>
             <a:r>
-              <a:rPr lang="en-US" sz="4000" b="1" dirty="0">
+              <a:rPr lang="en-US" sz="3600" b="1" dirty="0">
                 <a:solidFill>
                   <a:srgbClr val="1F5FA8"/>
                 </a:solidFill>
@@ -7719,7 +7719,7 @@
               </a:rPr>
               <a:t>0.99</a:t>
             </a:r>
-            <a:endParaRPr lang="en-US" sz="4000" dirty="0"/>
+            <a:endParaRPr lang="en-US" sz="3600" dirty="0"/>
           </a:p>
         </p:txBody>
       </p:sp>
@@ -7791,7 +7791,7 @@
               <a:buChar char="•"/>
             </a:pPr>
             <a:r>
-              <a:rPr lang="en-US" sz="1200" dirty="0">
+              <a:rPr lang="en-US" sz="1050" dirty="0">
                 <a:solidFill>
                   <a:srgbClr val="1A2433"/>
                 </a:solidFill>
@@ -7799,9 +7799,9 @@
                 <a:ea typeface="Arial" pitchFamily="34" charset="-122"/>
                 <a:cs typeface="Arial" pitchFamily="34" charset="-120"/>
               </a:rPr>
-              <a:t>Bootstrap ARI 0.91; the three full-year segments form a continuum</a:t>
-            </a:r>
-            <a:endParaRPr lang="en-US" sz="1200" dirty="0"/>
+              <a:t>Bootstrap ARI 0.91; December cuts health 12.8–14.2 pts in every segment → reminders for all</a:t>
+            </a:r>
+            <a:endParaRPr lang="en-US" sz="1050" dirty="0"/>
           </a:p>
           <a:p>
             <a:pPr marL="342900" indent="-342900">
@@ -7812,7 +7812,7 @@
               <a:buChar char="•"/>
             </a:pPr>
             <a:r>
-              <a:rPr lang="en-US" sz="1200" dirty="0">
+              <a:rPr lang="en-US" sz="1050" dirty="0">
                 <a:solidFill>
                   <a:srgbClr val="1A2433"/>
                 </a:solidFill>
@@ -7820,9 +7820,9 @@
                 <a:ea typeface="Arial" pitchFamily="34" charset="-122"/>
                 <a:cs typeface="Arial" pitchFamily="34" charset="-120"/>
               </a:rPr>
-              <a:t>December cuts health 12.8–14.2 pts in every segment → reminders for everyone</a:t>
-            </a:r>
-            <a:endParaRPr lang="en-US" sz="1200" dirty="0"/>
+              <a:t>Limits: synthetic folded data; 88 occasional users rest on ~1 month; full-year segments form a continuum (silhouette 0.25); segments lean on age / gender (Cramér's V 0.23 / 0.13) → act on behaviour only</a:t>
+            </a:r>
+            <a:endParaRPr lang="en-US" sz="1050" dirty="0"/>
           </a:p>
           <a:p>
             <a:pPr marL="342900" indent="-342900">
@@ -7833,7 +7833,7 @@
               <a:buChar char="•"/>
             </a:pPr>
             <a:r>
-              <a:rPr lang="en-US" sz="1200" dirty="0">
+              <a:rPr lang="en-US" sz="1050" dirty="0">
                 <a:solidFill>
                   <a:srgbClr val="1A2433"/>
                 </a:solidFill>
@@ -7841,9 +7841,9 @@
                 <a:ea typeface="Arial" pitchFamily="34" charset="-122"/>
                 <a:cs typeface="Arial" pitchFamily="34" charset="-120"/>
               </a:rPr>
-              <a:t>Limits: synthetic folded data; 88 occasional users rest on ~1 month; never for lending</a:t>
-            </a:r>
-            <a:endParaRPr lang="en-US" sz="1200" dirty="0"/>
+              <a:t>Future work: hybrid rules + k-means, month-to-month trajectory features, chronological early-warning on next_month_low_health_flag (support only)</a:t>
+            </a:r>
+            <a:endParaRPr lang="en-US" sz="1050" dirty="0"/>
           </a:p>
         </p:txBody>
       </p:sp>
@@ -7880,7 +7880,7 @@
                 <a:ea typeface="Arial" pitchFamily="34" charset="-122"/>
                 <a:cs typeface="Arial" pitchFamily="34" charset="-120"/>
               </a:rPr>
-              <a:t>Source: team k-means (k = 4) on 8 scaled ratios, 999 customers. Charts: notebooks/full_pipeline.ipynb.</a:t>
+              <a:t>Source: team k-means (k = 4) on 8 z-scaled behavioural features, 999 customers. Charts: notebooks/full_pipeline.ipynb.</a:t>
             </a:r>
             <a:endParaRPr lang="en-US" sz="850" dirty="0"/>
           </a:p>
@@ -9518,7 +9518,7 @@
                           <a:ea typeface="Arial" pitchFamily="34" charset="-122"/>
                           <a:cs typeface="Arial" pitchFamily="34" charset="-120"/>
                         </a:rPr>
-                        <a:t>Low health &amp; engagement · 67 (6.7%)</a:t>
+                        <a:t>FHS &lt; 70 &amp; engagement &lt; 70 (yearly means) · 67 (6.7%)</a:t>
                       </a:r>
                       <a:endParaRPr lang="en-US" sz="1100" dirty="0">
                         <a:latin typeface="Arial" charset="0"/>
@@ -10202,7 +10202,7 @@
                           <a:ea typeface="Arial" pitchFamily="34" charset="-122"/>
                           <a:cs typeface="Arial" pitchFamily="34" charset="-120"/>
                         </a:rPr>
-                        <a:t>Healthy &amp; Engaged · 351 (35.1%), adults</a:t>
+                        <a:t>Healthy &amp; Engaged, adults 18+ · 350 (35.0%)</a:t>
                       </a:r>
                       <a:endParaRPr lang="en-US" sz="1100" dirty="0">
                         <a:latin typeface="Arial" charset="0"/>
@@ -10495,7 +10495,7 @@
                 <a:ea typeface="Arial" pitchFamily="34" charset="-122"/>
                 <a:cs typeface="Arial" pitchFamily="34" charset="-120"/>
               </a:rPr>
-              <a:t>Segments ① ③ ⑤ ⑥ cover all 999 customers. Overlays: alerts 43 = 39 Stretched + 4 Healthy; education 67 = 64 Occasional + 3 Stretched (sequenced, never in the same week).</a:t>
+              <a:t>Segments ① ③ ⑤ ⑥ cover all 999 customers (1 minor in Healthy &amp; Engaged gets no product offer). Overlays: alerts 43 = 39 Stretched + 4 Healthy; education 67 = 64 Occasional + 3 Stretched (sequenced, never in the same week).</a:t>
             </a:r>
             <a:endParaRPr lang="en-US" sz="1100" dirty="0"/>
           </a:p>
@@ -10534,7 +10534,7 @@
                 <a:ea typeface="Arial" pitchFamily="34" charset="-122"/>
                 <a:cs typeface="Arial" pitchFamily="34" charset="-120"/>
               </a:rPr>
-              <a:t>Source: team k-means (k = 4) on 8 scaled ratios, 999 customers; consumer_financial_health_engagement_2025 (10,992 consumer-months, 999 customers); consumer_transactions_2025 (1,852,394 transactions). Charts: notebooks/full_pipeline.ipynb.</a:t>
+              <a:t>Source: team k-means (k = 4) on 8 z-scaled behavioural features, 999 customers; consumer_financial_health_engagement_2025 (10,992 consumer-months, 999 customers); consumer_transactions_2025 (1,852,394 transactions). Charts: notebooks/full_pipeline.ipynb.</a:t>
             </a:r>
             <a:endParaRPr lang="en-US" sz="850" dirty="0"/>
           </a:p>
@@ -11598,7 +11598,7 @@
                 <a:ea typeface="Arial" pitchFamily="34" charset="-122"/>
                 <a:cs typeface="Arial" pitchFamily="34" charset="-120"/>
               </a:rPr>
-              <a:t>Budgeting → November reminders → evening alerts lead. A 10% spend trim could cut stress months 28–32%. FHS never touches credit.</a:t>
+              <a:t>Budgeting → November reminders → evening alerts lead. In a what-if, a 10% spend trim cuts stress months 28–32% (to be tested). FHS never touches credit.</a:t>
             </a:r>
             <a:endParaRPr lang="en-US" sz="1150" dirty="0"/>
           </a:p>
@@ -11910,7 +11910,7 @@
               <a:buChar char="•"/>
             </a:pPr>
             <a:r>
-              <a:rPr lang="en-US" sz="1200" dirty="0">
+              <a:rPr lang="en-US" sz="1100" dirty="0">
                 <a:solidFill>
                   <a:srgbClr val="1A2433"/>
                 </a:solidFill>
@@ -11918,9 +11918,9 @@
                 <a:ea typeface="Arial" pitchFamily="34" charset="-122"/>
                 <a:cs typeface="Arial" pitchFamily="34" charset="-120"/>
               </a:rPr>
-              <a:t>Score = reach × |r| of the trigger with its outcome; wellbeing before growth</a:t>
-            </a:r>
-            <a:endParaRPr lang="en-US" sz="1200" dirty="0"/>
+              <a:t>Reach × |r|: a ranking heuristic, not an impact estimate; wellbeing first</a:t>
+            </a:r>
+            <a:endParaRPr lang="en-US" sz="1100" dirty="0"/>
           </a:p>
           <a:p>
             <a:pPr marL="342900" indent="-342900">
@@ -11931,7 +11931,7 @@
               <a:buChar char="•"/>
             </a:pPr>
             <a:r>
-              <a:rPr lang="en-US" sz="1200" dirty="0">
+              <a:rPr lang="en-US" sz="1100" dirty="0">
                 <a:solidFill>
                   <a:srgbClr val="1A2433"/>
                 </a:solidFill>
@@ -11941,7 +11941,7 @@
               </a:rPr>
               <a:t>Alerts reach only 43 customers but 71% of stress months → wave 1</a:t>
             </a:r>
-            <a:endParaRPr lang="en-US" sz="1200" dirty="0"/>
+            <a:endParaRPr lang="en-US" sz="1100" dirty="0"/>
           </a:p>
           <a:p>
             <a:pPr marL="342900" indent="-342900">
@@ -11952,7 +11952,7 @@
               <a:buChar char="•"/>
             </a:pPr>
             <a:r>
-              <a:rPr lang="en-US" sz="1200" dirty="0">
+              <a:rPr lang="en-US" sz="1100" dirty="0">
                 <a:solidFill>
                   <a:srgbClr val="1A2433"/>
                 </a:solidFill>
@@ -11962,7 +11962,7 @@
               </a:rPr>
               <a:t>Fairness: behaviour-only triggers; uptake tracked by age &amp; gender; no offers to minors</a:t>
             </a:r>
-            <a:endParaRPr lang="en-US" sz="1200" dirty="0"/>
+            <a:endParaRPr lang="en-US" sz="1100" dirty="0"/>
           </a:p>
         </p:txBody>
       </p:sp>
@@ -11999,7 +11999,7 @@
                 <a:ea typeface="Arial" pitchFamily="34" charset="-122"/>
                 <a:cs typeface="Arial" pitchFamily="34" charset="-120"/>
               </a:rPr>
-              <a:t>Source: consumer_financial_health_engagement_2025 (10,992 consumer-months, 999 customers); team k-means (k = 4) on 8 scaled ratios, 999 customers. Charts: notebooks/full_pipeline.ipynb.</a:t>
+              <a:t>Source: consumer_financial_health_engagement_2025 (10,992 consumer-months, 999 customers); team k-means (k = 4) on 8 z-scaled behavioural features, 999 customers. Charts: notebooks/full_pipeline.ipynb.</a:t>
             </a:r>
             <a:endParaRPr lang="en-US" sz="850" dirty="0"/>
           </a:p>
@@ -12253,7 +12253,7 @@
                 <a:ea typeface="Arial" pitchFamily="34" charset="-122"/>
                 <a:cs typeface="Arial" pitchFamily="34" charset="-120"/>
               </a:rPr>
-              <a:t>A 10% spend trim could cut stress months by 28–32%, tested within 90 days</a:t>
+              <a:t>What-if: a 10% spend trim would cut stress months by 28–32% — to be tested in a 90-day pilot</a:t>
             </a:r>
             <a:endParaRPr lang="en-US" sz="2400" dirty="0"/>
           </a:p>
@@ -12381,7 +12381,7 @@
                 <a:ea typeface="Arial" pitchFamily="34" charset="-122"/>
                 <a:cs typeface="Arial" pitchFamily="34" charset="-120"/>
               </a:rPr>
-              <a:t>stress months if the Stretched 302 trim spend-to-income by 10%</a:t>
+              <a:t>stress months if the Stretched 302 trim spend-to-income by 10% (simulated, not measured)</a:t>
             </a:r>
             <a:endParaRPr lang="en-US" sz="1100" dirty="0"/>
           </a:p>
@@ -12969,7 +12969,7 @@
                 <a:ea typeface="Arial" pitchFamily="34" charset="-122"/>
                 <a:cs typeface="Arial" pitchFamily="34" charset="-120"/>
               </a:rPr>
-              <a:t>Budgeting for 302 and opt-in evening alerts first, each measured against a random holdout within 90 days.</a:t>
+              <a:t>Budgeting for 302 and opt-in evening alerts first, each to be measured against a random holdout in a 90-day pilot.</a:t>
             </a:r>
             <a:endParaRPr lang="en-US" sz="1300" dirty="0"/>
           </a:p>
@@ -14021,7 +14021,7 @@
                 <a:ea typeface="Arial" pitchFamily="34" charset="-122"/>
                 <a:cs typeface="Arial" pitchFamily="34" charset="-120"/>
               </a:rPr>
-              <a:t>slides 19–22</a:t>
+              <a:t>slides 19–21 · closing 22</a:t>
             </a:r>
             <a:endParaRPr lang="en-US" sz="1200" dirty="0"/>
           </a:p>
@@ -15037,7 +15037,7 @@
                 <a:ea typeface="Arial" pitchFamily="34" charset="-122"/>
                 <a:cs typeface="Arial" pitchFamily="34" charset="-120"/>
               </a:rPr>
-              <a:t>Two source years folded onto 2025 (case §12) → ratios are the signal</a:t>
+              <a:t>Two source years folded onto 2025 (case study §12) → ratios are the signal</a:t>
             </a:r>
             <a:endParaRPr lang="en-US" sz="1200" dirty="0"/>
           </a:p>
@@ -16352,7 +16352,7 @@
                 <a:ea typeface="Arial" pitchFamily="34" charset="-122"/>
                 <a:cs typeface="Arial" pitchFamily="34" charset="-120"/>
               </a:rPr>
-              <a:t>6 provinces qualify: Ha Noi, Dong Nai, Lam Dong, Hung Yen, Hai Phong, Nghe An</a:t>
+              <a:t>6 qualify (spend &gt; median, digital &lt; 41.2%): Dong Nai 40.7%, Hung Yen 40.8%, Hai Phong 40.8%, Ha Noi 40.9%, Lam Dong 41.1%, Nghe An 41.2%</a:t>
             </a:r>
             <a:endParaRPr lang="en-US" sz="1200" dirty="0"/>
           </a:p>
@@ -16373,7 +16373,7 @@
                 <a:ea typeface="Arial" pitchFamily="34" charset="-122"/>
                 <a:cs typeface="Arial" pitchFamily="34" charset="-120"/>
               </a:rPr>
-              <a:t>POS 58.9–59.3% vs 58.8% nationally; QR at par; small gaps in e-commerce and app</a:t>
+              <a:t>Channel mix: POS 58.9–59.3% vs 58.8% nationally; QR at par; the gap sits in e-commerce and app</a:t>
             </a:r>
             <a:endParaRPr lang="en-US" sz="1200" dirty="0"/>
           </a:p>
@@ -16395,6 +16395,27 @@
                 <a:cs typeface="Arial" pitchFamily="34" charset="-120"/>
               </a:rPr>
               <a:t>Customers differ 8.6pp within provinces vs 3.9pp across all 34 → target the customer, not the region</a:t>
+            </a:r>
+            <a:endParaRPr lang="en-US" sz="1200" dirty="0"/>
+          </a:p>
+          <a:p>
+            <a:pPr marL="342900" indent="-342900">
+              <a:spcAft>
+                <a:spcPts val="800"/>
+              </a:spcAft>
+              <a:buSzPct val="100000"/>
+              <a:buChar char="•"/>
+            </a:pPr>
+            <a:r>
+              <a:rPr lang="en-US" sz="1200" dirty="0">
+                <a:solidFill>
+                  <a:srgbClr val="1A2433"/>
+                </a:solidFill>
+                <a:latin typeface="Arial" pitchFamily="34" charset="0"/>
+                <a:ea typeface="Arial" pitchFamily="34" charset="-122"/>
+                <a:cs typeface="Arial" pitchFamily="34" charset="-120"/>
+              </a:rPr>
+              <a:t>Top market HCMC: 13.6% of spend at 41.3% digital; lagging: Quang Ngai 39.2% digital</a:t>
             </a:r>
             <a:endParaRPr lang="en-US" sz="1200" dirty="0"/>
           </a:p>
@@ -16842,7 +16863,7 @@
                 <a:ea typeface="Arial" pitchFamily="34" charset="-122"/>
                 <a:cs typeface="Arial" pitchFamily="34" charset="-120"/>
               </a:rPr>
-              <a:t>VND ticket for in-store groceries — top by spend (513.8B), 1.8× the fuel ticket</a:t>
+              <a:t>VND grocery ticket — top by spend (513.8B), 1.8× fuel. Lagging: travel (57,956 txns), online groceries (87.1B)</a:t>
             </a:r>
             <a:endParaRPr lang="en-US" sz="1050" dirty="0"/>
           </a:p>
@@ -16949,7 +16970,7 @@
                 <a:ea typeface="Arial" pitchFamily="34" charset="-122"/>
                 <a:cs typeface="Arial" pitchFamily="34" charset="-120"/>
               </a:rPr>
-              <a:t>lowest FHS: 25–34, still active (178.7 txns/month) with the highest spend-to-income 0.716</a:t>
+              <a:t>lowest FHS: 25–34, active (178.7 txns/mo); spend/income 0.716 vs 0.700, essential 0.468 vs 0.481</a:t>
             </a:r>
             <a:endParaRPr lang="en-US" sz="1050" dirty="0"/>
           </a:p>
